--- a/Seminario de Sistemas/Clases/Clase 4 - Metodologias agiles/Presentacion.pptx
+++ b/Seminario de Sistemas/Clases/Clase 4 - Metodologias agiles/Presentacion.pptx
@@ -19,6 +19,10 @@
     <p:sldId id="267" r:id="rId18"/>
     <p:sldId id="268" r:id="rId19"/>
     <p:sldId id="269" r:id="rId20"/>
+    <p:sldId id="270" r:id="rId21"/>
+    <p:sldId id="271" r:id="rId22"/>
+    <p:sldId id="272" r:id="rId23"/>
+    <p:sldId id="273" r:id="rId24"/>
   </p:sldIdLst>
   <p:sldSz cx="12191695" cy="6858000" type="screen4x3"/>
   <p:notesSz cx="6858000" cy="9144000"/>
@@ -3619,111 +3623,21 @@
                 </a:solidFill>
                 <a:latin typeface="Calibri"/>
               </a:rPr>
-              <a:t>Taller PI — pasos guiados</a:t>
-            </a:r>
-          </a:p>
-        </p:txBody>
-      </p:sp>
-      <p:sp>
-        <p:nvSpPr>
-          <p:cNvPr id="5" name="Rounded Rectangle 4"/>
-          <p:cNvSpPr/>
-          <p:nvPr/>
-        </p:nvSpPr>
-        <p:spPr>
-          <a:xfrm>
-            <a:off x="457200" y="1234440"/>
-            <a:ext cx="11277295" cy="950976"/>
-          </a:xfrm>
-          <a:prstGeom prst="roundRect">
-            <a:avLst>
-              <a:gd name="adj" fmla="val 12000"/>
-            </a:avLst>
-          </a:prstGeom>
-          <a:solidFill>
-            <a:srgbClr val="F2F2F2"/>
-          </a:solidFill>
-          <a:ln>
-            <a:noFill/>
-          </a:ln>
-        </p:spPr>
-        <p:style>
-          <a:lnRef idx="1">
-            <a:schemeClr val="accent1"/>
-          </a:lnRef>
-          <a:fillRef idx="3">
-            <a:schemeClr val="accent1"/>
-          </a:fillRef>
-          <a:effectRef idx="2">
-            <a:schemeClr val="accent1"/>
-          </a:effectRef>
-          <a:fontRef idx="minor">
-            <a:schemeClr val="lt1"/>
-          </a:fontRef>
-        </p:style>
-        <p:txBody>
-          <a:bodyPr rtlCol="0" anchor="ctr"/>
-          <a:lstStyle/>
-          <a:p>
-            <a:pPr algn="ctr"/>
-          </a:p>
-        </p:txBody>
-      </p:sp>
-      <p:sp>
-        <p:nvSpPr>
-          <p:cNvPr id="6" name="Rounded Rectangle 5"/>
-          <p:cNvSpPr/>
-          <p:nvPr/>
-        </p:nvSpPr>
-        <p:spPr>
-          <a:xfrm>
-            <a:off x="594360" y="1490472"/>
-            <a:ext cx="438912" cy="438912"/>
-          </a:xfrm>
-          <a:prstGeom prst="roundRect">
-            <a:avLst>
-              <a:gd name="adj" fmla="val 12000"/>
-            </a:avLst>
-          </a:prstGeom>
-          <a:solidFill>
-            <a:srgbClr val="095292"/>
-          </a:solidFill>
-          <a:ln>
-            <a:noFill/>
-          </a:ln>
-        </p:spPr>
-        <p:style>
-          <a:lnRef idx="1">
-            <a:schemeClr val="accent1"/>
-          </a:lnRef>
-          <a:fillRef idx="3">
-            <a:schemeClr val="accent1"/>
-          </a:fillRef>
-          <a:effectRef idx="2">
-            <a:schemeClr val="accent1"/>
-          </a:effectRef>
-          <a:fontRef idx="minor">
-            <a:schemeClr val="lt1"/>
-          </a:fontRef>
-        </p:style>
-        <p:txBody>
-          <a:bodyPr rtlCol="0" anchor="ctr"/>
-          <a:lstStyle/>
-          <a:p>
-            <a:pPr algn="ctr"/>
-          </a:p>
-        </p:txBody>
-      </p:sp>
-      <p:sp>
-        <p:nvSpPr>
-          <p:cNvPr id="7" name="TextBox 6"/>
+              <a:t>Demo del dia</a:t>
+            </a:r>
+          </a:p>
+        </p:txBody>
+      </p:sp>
+      <p:sp>
+        <p:nvSpPr>
+          <p:cNvPr id="5" name="TextBox 4"/>
           <p:cNvSpPr txBox="1"/>
           <p:nvPr/>
         </p:nvSpPr>
         <p:spPr>
           <a:xfrm>
-            <a:off x="594360" y="1490472"/>
-            <a:ext cx="438912" cy="438912"/>
+            <a:off x="457200" y="1170432"/>
+            <a:ext cx="11277295" cy="5230368"/>
           </a:xfrm>
           <a:prstGeom prst="rect">
             <a:avLst/>
@@ -3731,677 +3645,99 @@
           <a:noFill/>
         </p:spPr>
         <p:txBody>
-          <a:bodyPr wrap="square" anchor="ctr"/>
-          <a:lstStyle/>
-          <a:p>
-            <a:pPr algn="ctr"/>
-            <a:r>
-              <a:rPr sz="1600" b="1" i="0">
-                <a:solidFill>
-                  <a:srgbClr val="FFFFFF"/>
-                </a:solidFill>
-                <a:latin typeface="Calibri"/>
-              </a:rPr>
-              <a:t>1</a:t>
-            </a:r>
-          </a:p>
-        </p:txBody>
-      </p:sp>
-      <p:sp>
-        <p:nvSpPr>
-          <p:cNvPr id="8" name="TextBox 7"/>
-          <p:cNvSpPr txBox="1"/>
-          <p:nvPr/>
-        </p:nvSpPr>
-        <p:spPr>
-          <a:xfrm>
-            <a:off x="1188720" y="1325880"/>
-            <a:ext cx="10271455" cy="786384"/>
-          </a:xfrm>
-          <a:prstGeom prst="rect">
-            <a:avLst/>
-          </a:prstGeom>
-          <a:noFill/>
-        </p:spPr>
-        <p:txBody>
-          <a:bodyPr wrap="square" anchor="ctr"/>
-          <a:lstStyle/>
-          <a:p>
-            <a:r>
-              <a:rPr sz="1500" b="1" i="0">
-                <a:solidFill>
-                  <a:srgbClr val="095292"/>
-                </a:solidFill>
-                <a:latin typeface="Calibri"/>
-              </a:rPr>
-              <a:t>En Google Docs escriba el Product Backlog de VetCare con al menos ocho items redactados como historias de usuario cortas, cada uno con prioridad (Alta/Media/Baja) y una justificacion de valor para Huellitas en una linea.</a:t>
-            </a:r>
-          </a:p>
-        </p:txBody>
-      </p:sp>
-      <p:sp>
-        <p:nvSpPr>
-          <p:cNvPr id="9" name="Rounded Rectangle 8"/>
-          <p:cNvSpPr/>
-          <p:nvPr/>
-        </p:nvSpPr>
-        <p:spPr>
-          <a:xfrm>
-            <a:off x="457200" y="2276856"/>
-            <a:ext cx="11277295" cy="950976"/>
-          </a:xfrm>
-          <a:prstGeom prst="roundRect">
-            <a:avLst>
-              <a:gd name="adj" fmla="val 12000"/>
-            </a:avLst>
-          </a:prstGeom>
-          <a:solidFill>
-            <a:srgbClr val="E8F4FA"/>
-          </a:solidFill>
-          <a:ln>
-            <a:noFill/>
-          </a:ln>
-        </p:spPr>
-        <p:style>
-          <a:lnRef idx="1">
-            <a:schemeClr val="accent1"/>
-          </a:lnRef>
-          <a:fillRef idx="3">
-            <a:schemeClr val="accent1"/>
-          </a:fillRef>
-          <a:effectRef idx="2">
-            <a:schemeClr val="accent1"/>
-          </a:effectRef>
-          <a:fontRef idx="minor">
-            <a:schemeClr val="lt1"/>
-          </a:fontRef>
-        </p:style>
-        <p:txBody>
-          <a:bodyPr rtlCol="0" anchor="ctr"/>
-          <a:lstStyle/>
-          <a:p>
-            <a:pPr algn="ctr"/>
-          </a:p>
-        </p:txBody>
-      </p:sp>
-      <p:sp>
-        <p:nvSpPr>
-          <p:cNvPr id="10" name="Rounded Rectangle 9"/>
-          <p:cNvSpPr/>
-          <p:nvPr/>
-        </p:nvSpPr>
-        <p:spPr>
-          <a:xfrm>
-            <a:off x="594360" y="2532888"/>
-            <a:ext cx="438912" cy="438912"/>
-          </a:xfrm>
-          <a:prstGeom prst="roundRect">
-            <a:avLst>
-              <a:gd name="adj" fmla="val 12000"/>
-            </a:avLst>
-          </a:prstGeom>
-          <a:solidFill>
-            <a:srgbClr val="095292"/>
-          </a:solidFill>
-          <a:ln>
-            <a:noFill/>
-          </a:ln>
-        </p:spPr>
-        <p:style>
-          <a:lnRef idx="1">
-            <a:schemeClr val="accent1"/>
-          </a:lnRef>
-          <a:fillRef idx="3">
-            <a:schemeClr val="accent1"/>
-          </a:fillRef>
-          <a:effectRef idx="2">
-            <a:schemeClr val="accent1"/>
-          </a:effectRef>
-          <a:fontRef idx="minor">
-            <a:schemeClr val="lt1"/>
-          </a:fontRef>
-        </p:style>
-        <p:txBody>
-          <a:bodyPr rtlCol="0" anchor="ctr"/>
-          <a:lstStyle/>
-          <a:p>
-            <a:pPr algn="ctr"/>
-          </a:p>
-        </p:txBody>
-      </p:sp>
-      <p:sp>
-        <p:nvSpPr>
-          <p:cNvPr id="11" name="TextBox 10"/>
-          <p:cNvSpPr txBox="1"/>
-          <p:nvPr/>
-        </p:nvSpPr>
-        <p:spPr>
-          <a:xfrm>
-            <a:off x="594360" y="2532888"/>
-            <a:ext cx="438912" cy="438912"/>
-          </a:xfrm>
-          <a:prstGeom prst="rect">
-            <a:avLst/>
-          </a:prstGeom>
-          <a:noFill/>
-        </p:spPr>
-        <p:txBody>
-          <a:bodyPr wrap="square" anchor="ctr"/>
-          <a:lstStyle/>
-          <a:p>
-            <a:pPr algn="ctr"/>
-            <a:r>
-              <a:rPr sz="1600" b="1" i="0">
-                <a:solidFill>
-                  <a:srgbClr val="FFFFFF"/>
-                </a:solidFill>
-                <a:latin typeface="Calibri"/>
-              </a:rPr>
-              <a:t>2</a:t>
-            </a:r>
-          </a:p>
-        </p:txBody>
-      </p:sp>
-      <p:sp>
-        <p:nvSpPr>
-          <p:cNvPr id="12" name="TextBox 11"/>
-          <p:cNvSpPr txBox="1"/>
-          <p:nvPr/>
-        </p:nvSpPr>
-        <p:spPr>
-          <a:xfrm>
-            <a:off x="1188720" y="2368296"/>
-            <a:ext cx="10271455" cy="786384"/>
-          </a:xfrm>
-          <a:prstGeom prst="rect">
-            <a:avLst/>
-          </a:prstGeom>
-          <a:noFill/>
-        </p:spPr>
-        <p:txBody>
-          <a:bodyPr wrap="square" anchor="ctr"/>
-          <a:lstStyle/>
-          <a:p>
-            <a:r>
-              <a:rPr sz="1500" b="1" i="0">
-                <a:solidFill>
-                  <a:srgbClr val="095292"/>
-                </a:solidFill>
-                <a:latin typeface="Calibri"/>
-              </a:rPr>
-              <a:t>Priorice el backlog en orden de arriba hacia abajo y explique por escrito, en dos renglones, por que el primer item es el primero (pista: resuelve uno de los tres dolores de la clinica).</a:t>
-            </a:r>
-          </a:p>
-        </p:txBody>
-      </p:sp>
-      <p:sp>
-        <p:nvSpPr>
-          <p:cNvPr id="13" name="Rounded Rectangle 12"/>
-          <p:cNvSpPr/>
-          <p:nvPr/>
-        </p:nvSpPr>
-        <p:spPr>
-          <a:xfrm>
-            <a:off x="457200" y="3319272"/>
-            <a:ext cx="11277295" cy="950976"/>
-          </a:xfrm>
-          <a:prstGeom prst="roundRect">
-            <a:avLst>
-              <a:gd name="adj" fmla="val 12000"/>
-            </a:avLst>
-          </a:prstGeom>
-          <a:solidFill>
-            <a:srgbClr val="F2F2F2"/>
-          </a:solidFill>
-          <a:ln>
-            <a:noFill/>
-          </a:ln>
-        </p:spPr>
-        <p:style>
-          <a:lnRef idx="1">
-            <a:schemeClr val="accent1"/>
-          </a:lnRef>
-          <a:fillRef idx="3">
-            <a:schemeClr val="accent1"/>
-          </a:fillRef>
-          <a:effectRef idx="2">
-            <a:schemeClr val="accent1"/>
-          </a:effectRef>
-          <a:fontRef idx="minor">
-            <a:schemeClr val="lt1"/>
-          </a:fontRef>
-        </p:style>
-        <p:txBody>
-          <a:bodyPr rtlCol="0" anchor="ctr"/>
-          <a:lstStyle/>
-          <a:p>
-            <a:pPr algn="ctr"/>
-          </a:p>
-        </p:txBody>
-      </p:sp>
-      <p:sp>
-        <p:nvSpPr>
-          <p:cNvPr id="14" name="Rounded Rectangle 13"/>
-          <p:cNvSpPr/>
-          <p:nvPr/>
-        </p:nvSpPr>
-        <p:spPr>
-          <a:xfrm>
-            <a:off x="594360" y="3575304"/>
-            <a:ext cx="438912" cy="438912"/>
-          </a:xfrm>
-          <a:prstGeom prst="roundRect">
-            <a:avLst>
-              <a:gd name="adj" fmla="val 12000"/>
-            </a:avLst>
-          </a:prstGeom>
-          <a:solidFill>
-            <a:srgbClr val="095292"/>
-          </a:solidFill>
-          <a:ln>
-            <a:noFill/>
-          </a:ln>
-        </p:spPr>
-        <p:style>
-          <a:lnRef idx="1">
-            <a:schemeClr val="accent1"/>
-          </a:lnRef>
-          <a:fillRef idx="3">
-            <a:schemeClr val="accent1"/>
-          </a:fillRef>
-          <a:effectRef idx="2">
-            <a:schemeClr val="accent1"/>
-          </a:effectRef>
-          <a:fontRef idx="minor">
-            <a:schemeClr val="lt1"/>
-          </a:fontRef>
-        </p:style>
-        <p:txBody>
-          <a:bodyPr rtlCol="0" anchor="ctr"/>
-          <a:lstStyle/>
-          <a:p>
-            <a:pPr algn="ctr"/>
-          </a:p>
-        </p:txBody>
-      </p:sp>
-      <p:sp>
-        <p:nvSpPr>
-          <p:cNvPr id="15" name="TextBox 14"/>
-          <p:cNvSpPr txBox="1"/>
-          <p:nvPr/>
-        </p:nvSpPr>
-        <p:spPr>
-          <a:xfrm>
-            <a:off x="594360" y="3575304"/>
-            <a:ext cx="438912" cy="438912"/>
-          </a:xfrm>
-          <a:prstGeom prst="rect">
-            <a:avLst/>
-          </a:prstGeom>
-          <a:noFill/>
-        </p:spPr>
-        <p:txBody>
-          <a:bodyPr wrap="square" anchor="ctr"/>
-          <a:lstStyle/>
-          <a:p>
-            <a:pPr algn="ctr"/>
-            <a:r>
-              <a:rPr sz="1600" b="1" i="0">
-                <a:solidFill>
-                  <a:srgbClr val="FFFFFF"/>
-                </a:solidFill>
-                <a:latin typeface="Calibri"/>
-              </a:rPr>
-              <a:t>3</a:t>
-            </a:r>
-          </a:p>
-        </p:txBody>
-      </p:sp>
-      <p:sp>
-        <p:nvSpPr>
-          <p:cNvPr id="16" name="TextBox 15"/>
-          <p:cNvSpPr txBox="1"/>
-          <p:nvPr/>
-        </p:nvSpPr>
-        <p:spPr>
-          <a:xfrm>
-            <a:off x="1188720" y="3410712"/>
-            <a:ext cx="10271455" cy="786384"/>
-          </a:xfrm>
-          <a:prstGeom prst="rect">
-            <a:avLst/>
-          </a:prstGeom>
-          <a:noFill/>
-        </p:spPr>
-        <p:txBody>
-          <a:bodyPr wrap="square" anchor="ctr"/>
-          <a:lstStyle/>
-          <a:p>
-            <a:r>
-              <a:rPr sz="1500" b="1" i="0">
-                <a:solidFill>
-                  <a:srgbClr val="095292"/>
-                </a:solidFill>
-                <a:latin typeface="Calibri"/>
-              </a:rPr>
-              <a:t>Escriba tres historias completas con criterios de aceptacion en formato Dado/Cuando/Entonces, y asegurese de que cada historia tenga al menos un escenario alternativo o de error, no solo el camino feliz.</a:t>
-            </a:r>
-          </a:p>
-        </p:txBody>
-      </p:sp>
-      <p:sp>
-        <p:nvSpPr>
-          <p:cNvPr id="17" name="Rounded Rectangle 16"/>
-          <p:cNvSpPr/>
-          <p:nvPr/>
-        </p:nvSpPr>
-        <p:spPr>
-          <a:xfrm>
-            <a:off x="457200" y="4361688"/>
-            <a:ext cx="11277295" cy="950976"/>
-          </a:xfrm>
-          <a:prstGeom prst="roundRect">
-            <a:avLst>
-              <a:gd name="adj" fmla="val 12000"/>
-            </a:avLst>
-          </a:prstGeom>
-          <a:solidFill>
-            <a:srgbClr val="E8F4FA"/>
-          </a:solidFill>
-          <a:ln>
-            <a:noFill/>
-          </a:ln>
-        </p:spPr>
-        <p:style>
-          <a:lnRef idx="1">
-            <a:schemeClr val="accent1"/>
-          </a:lnRef>
-          <a:fillRef idx="3">
-            <a:schemeClr val="accent1"/>
-          </a:fillRef>
-          <a:effectRef idx="2">
-            <a:schemeClr val="accent1"/>
-          </a:effectRef>
-          <a:fontRef idx="minor">
-            <a:schemeClr val="lt1"/>
-          </a:fontRef>
-        </p:style>
-        <p:txBody>
-          <a:bodyPr rtlCol="0" anchor="ctr"/>
-          <a:lstStyle/>
-          <a:p>
-            <a:pPr algn="ctr"/>
-          </a:p>
-        </p:txBody>
-      </p:sp>
-      <p:sp>
-        <p:nvSpPr>
-          <p:cNvPr id="18" name="Rounded Rectangle 17"/>
-          <p:cNvSpPr/>
-          <p:nvPr/>
-        </p:nvSpPr>
-        <p:spPr>
-          <a:xfrm>
-            <a:off x="594360" y="4617720"/>
-            <a:ext cx="438912" cy="438912"/>
-          </a:xfrm>
-          <a:prstGeom prst="roundRect">
-            <a:avLst>
-              <a:gd name="adj" fmla="val 12000"/>
-            </a:avLst>
-          </a:prstGeom>
-          <a:solidFill>
-            <a:srgbClr val="095292"/>
-          </a:solidFill>
-          <a:ln>
-            <a:noFill/>
-          </a:ln>
-        </p:spPr>
-        <p:style>
-          <a:lnRef idx="1">
-            <a:schemeClr val="accent1"/>
-          </a:lnRef>
-          <a:fillRef idx="3">
-            <a:schemeClr val="accent1"/>
-          </a:fillRef>
-          <a:effectRef idx="2">
-            <a:schemeClr val="accent1"/>
-          </a:effectRef>
-          <a:fontRef idx="minor">
-            <a:schemeClr val="lt1"/>
-          </a:fontRef>
-        </p:style>
-        <p:txBody>
-          <a:bodyPr rtlCol="0" anchor="ctr"/>
-          <a:lstStyle/>
-          <a:p>
-            <a:pPr algn="ctr"/>
-          </a:p>
-        </p:txBody>
-      </p:sp>
-      <p:sp>
-        <p:nvSpPr>
-          <p:cNvPr id="19" name="TextBox 18"/>
-          <p:cNvSpPr txBox="1"/>
-          <p:nvPr/>
-        </p:nvSpPr>
-        <p:spPr>
-          <a:xfrm>
-            <a:off x="594360" y="4617720"/>
-            <a:ext cx="438912" cy="438912"/>
-          </a:xfrm>
-          <a:prstGeom prst="rect">
-            <a:avLst/>
-          </a:prstGeom>
-          <a:noFill/>
-        </p:spPr>
-        <p:txBody>
-          <a:bodyPr wrap="square" anchor="ctr"/>
-          <a:lstStyle/>
-          <a:p>
-            <a:pPr algn="ctr"/>
-            <a:r>
-              <a:rPr sz="1600" b="1" i="0">
-                <a:solidFill>
-                  <a:srgbClr val="FFFFFF"/>
-                </a:solidFill>
-                <a:latin typeface="Calibri"/>
-              </a:rPr>
-              <a:t>4</a:t>
-            </a:r>
-          </a:p>
-        </p:txBody>
-      </p:sp>
-      <p:sp>
-        <p:nvSpPr>
-          <p:cNvPr id="20" name="TextBox 19"/>
-          <p:cNvSpPr txBox="1"/>
-          <p:nvPr/>
-        </p:nvSpPr>
-        <p:spPr>
-          <a:xfrm>
-            <a:off x="1188720" y="4453128"/>
-            <a:ext cx="10271455" cy="786384"/>
-          </a:xfrm>
-          <a:prstGeom prst="rect">
-            <a:avLst/>
-          </a:prstGeom>
-          <a:noFill/>
-        </p:spPr>
-        <p:txBody>
-          <a:bodyPr wrap="square" anchor="ctr"/>
-          <a:lstStyle/>
-          <a:p>
-            <a:r>
-              <a:rPr sz="1500" b="1" i="0">
-                <a:solidFill>
-                  <a:srgbClr val="095292"/>
-                </a:solidFill>
-                <a:latin typeface="Calibri"/>
-              </a:rPr>
-              <a:t>Redacte la Definicion de Terminado para artefactos de diseño (por ejemplo: tiene diagrama en draw.io, tiene mockup, esta revisado por un compañero y tiene el visto bueno del cliente) y escribala en la cabecera del tablero.</a:t>
-            </a:r>
-          </a:p>
-        </p:txBody>
-      </p:sp>
-      <p:sp>
-        <p:nvSpPr>
-          <p:cNvPr id="21" name="Rounded Rectangle 20"/>
-          <p:cNvSpPr/>
-          <p:nvPr/>
-        </p:nvSpPr>
-        <p:spPr>
-          <a:xfrm>
-            <a:off x="457200" y="5404104"/>
-            <a:ext cx="11277295" cy="950976"/>
-          </a:xfrm>
-          <a:prstGeom prst="roundRect">
-            <a:avLst>
-              <a:gd name="adj" fmla="val 12000"/>
-            </a:avLst>
-          </a:prstGeom>
-          <a:solidFill>
-            <a:srgbClr val="F2F2F2"/>
-          </a:solidFill>
-          <a:ln>
-            <a:noFill/>
-          </a:ln>
-        </p:spPr>
-        <p:style>
-          <a:lnRef idx="1">
-            <a:schemeClr val="accent1"/>
-          </a:lnRef>
-          <a:fillRef idx="3">
-            <a:schemeClr val="accent1"/>
-          </a:fillRef>
-          <a:effectRef idx="2">
-            <a:schemeClr val="accent1"/>
-          </a:effectRef>
-          <a:fontRef idx="minor">
-            <a:schemeClr val="lt1"/>
-          </a:fontRef>
-        </p:style>
-        <p:txBody>
-          <a:bodyPr rtlCol="0" anchor="ctr"/>
-          <a:lstStyle/>
-          <a:p>
-            <a:pPr algn="ctr"/>
-          </a:p>
-        </p:txBody>
-      </p:sp>
-      <p:sp>
-        <p:nvSpPr>
-          <p:cNvPr id="22" name="Rounded Rectangle 21"/>
-          <p:cNvSpPr/>
-          <p:nvPr/>
-        </p:nvSpPr>
-        <p:spPr>
-          <a:xfrm>
-            <a:off x="594360" y="5660136"/>
-            <a:ext cx="438912" cy="438912"/>
-          </a:xfrm>
-          <a:prstGeom prst="roundRect">
-            <a:avLst>
-              <a:gd name="adj" fmla="val 12000"/>
-            </a:avLst>
-          </a:prstGeom>
-          <a:solidFill>
-            <a:srgbClr val="095292"/>
-          </a:solidFill>
-          <a:ln>
-            <a:noFill/>
-          </a:ln>
-        </p:spPr>
-        <p:style>
-          <a:lnRef idx="1">
-            <a:schemeClr val="accent1"/>
-          </a:lnRef>
-          <a:fillRef idx="3">
-            <a:schemeClr val="accent1"/>
-          </a:fillRef>
-          <a:effectRef idx="2">
-            <a:schemeClr val="accent1"/>
-          </a:effectRef>
-          <a:fontRef idx="minor">
-            <a:schemeClr val="lt1"/>
-          </a:fontRef>
-        </p:style>
-        <p:txBody>
-          <a:bodyPr rtlCol="0" anchor="ctr"/>
-          <a:lstStyle/>
-          <a:p>
-            <a:pPr algn="ctr"/>
-          </a:p>
-        </p:txBody>
-      </p:sp>
-      <p:sp>
-        <p:nvSpPr>
-          <p:cNvPr id="23" name="TextBox 22"/>
-          <p:cNvSpPr txBox="1"/>
-          <p:nvPr/>
-        </p:nvSpPr>
-        <p:spPr>
-          <a:xfrm>
-            <a:off x="594360" y="5660136"/>
-            <a:ext cx="438912" cy="438912"/>
-          </a:xfrm>
-          <a:prstGeom prst="rect">
-            <a:avLst/>
-          </a:prstGeom>
-          <a:noFill/>
-        </p:spPr>
-        <p:txBody>
-          <a:bodyPr wrap="square" anchor="ctr"/>
-          <a:lstStyle/>
-          <a:p>
-            <a:pPr algn="ctr"/>
-            <a:r>
-              <a:rPr sz="1600" b="1" i="0">
-                <a:solidFill>
-                  <a:srgbClr val="FFFFFF"/>
-                </a:solidFill>
-                <a:latin typeface="Calibri"/>
-              </a:rPr>
-              <a:t>5</a:t>
-            </a:r>
-          </a:p>
-        </p:txBody>
-      </p:sp>
-      <p:sp>
-        <p:nvSpPr>
-          <p:cNvPr id="24" name="TextBox 23"/>
-          <p:cNvSpPr txBox="1"/>
-          <p:nvPr/>
-        </p:nvSpPr>
-        <p:spPr>
-          <a:xfrm>
-            <a:off x="1188720" y="5495544"/>
-            <a:ext cx="10271455" cy="786384"/>
-          </a:xfrm>
-          <a:prstGeom prst="rect">
-            <a:avLst/>
-          </a:prstGeom>
-          <a:noFill/>
-        </p:spPr>
-        <p:txBody>
-          <a:bodyPr wrap="square" anchor="ctr"/>
-          <a:lstStyle/>
-          <a:p>
-            <a:r>
-              <a:rPr sz="1400" b="1" i="0">
-                <a:solidFill>
-                  <a:srgbClr val="095292"/>
-                </a:solidFill>
-                <a:latin typeface="Calibri"/>
-              </a:rPr>
-              <a:t>En draw.io o Excalidraw arme el tablero con las columnas Por hacer / Modelando / En revision del cliente / Aprobado, ponga el limite de trabajo en curso en dos para las columnas del medio, distribuya las tarjetas en tres sprints con su objetivo y entregable de diseño, exporte a PDF y suba a la plataforma del curso.</a:t>
-            </a:r>
-          </a:p>
-        </p:txBody>
-      </p:sp>
-      <p:sp>
-        <p:nvSpPr>
-          <p:cNvPr id="25" name="TextBox 24"/>
+          <a:bodyPr wrap="square">
+            <a:spAutoFit/>
+          </a:bodyPr>
+          <a:lstStyle/>
+          <a:p>
+            <a:pPr>
+              <a:spcAft>
+                <a:spcPts val="800"/>
+              </a:spcAft>
+            </a:pPr>
+            <a:r>
+              <a:rPr sz="2000" b="0" i="0">
+                <a:solidFill>
+                  <a:srgbClr val="333333"/>
+                </a:solidFill>
+                <a:latin typeface="Calibri"/>
+              </a:rPr>
+              <a:t>–   </a:t>
+            </a:r>
+            <a:r>
+              <a:rPr sz="2000" b="1" i="0">
+                <a:solidFill>
+                  <a:srgbClr val="333333"/>
+                </a:solidFill>
+                <a:latin typeface="Calibri"/>
+              </a:rPr>
+              <a:t>Herramienta:</a:t>
+            </a:r>
+            <a:r>
+              <a:rPr sz="2000" b="0" i="0">
+                <a:solidFill>
+                  <a:srgbClr val="333333"/>
+                </a:solidFill>
+                <a:latin typeface="Calibri"/>
+              </a:rPr>
+              <a:t> draw.io · Excalidraw · Google Docs</a:t>
+            </a:r>
+          </a:p>
+          <a:p>
+            <a:pPr>
+              <a:spcAft>
+                <a:spcPts val="800"/>
+              </a:spcAft>
+            </a:pPr>
+            <a:r>
+              <a:rPr sz="2000" b="0" i="0">
+                <a:solidFill>
+                  <a:srgbClr val="333333"/>
+                </a:solidFill>
+                <a:latin typeface="Calibri"/>
+              </a:rPr>
+              <a:t>–   </a:t>
+            </a:r>
+            <a:r>
+              <a:rPr sz="2000" b="1" i="0">
+                <a:solidFill>
+                  <a:srgbClr val="333333"/>
+                </a:solidFill>
+                <a:latin typeface="Calibri"/>
+              </a:rPr>
+              <a:t>Demo:</a:t>
+            </a:r>
+            <a:r>
+              <a:rPr sz="2000" b="0" i="0">
+                <a:solidFill>
+                  <a:srgbClr val="333333"/>
+                </a:solidFill>
+                <a:latin typeface="Calibri"/>
+              </a:rPr>
+              <a:t> El docente arma en pantalla el tablero de VetCare, arrastra una tarjeta de 'Por hacer' a 'En revision del cliente' y muestra que pasa cuando se rompe el limite de trabajo en curso.</a:t>
+            </a:r>
+          </a:p>
+          <a:p>
+            <a:pPr>
+              <a:spcAft>
+                <a:spcPts val="800"/>
+              </a:spcAft>
+            </a:pPr>
+            <a:r>
+              <a:rPr sz="2000" b="0" i="0">
+                <a:solidFill>
+                  <a:srgbClr val="333333"/>
+                </a:solidFill>
+                <a:latin typeface="Calibri"/>
+              </a:rPr>
+              <a:t>–   Mismo dominio VetCare — no otro ejemplo. Aqui se diseña, no se programa.</a:t>
+            </a:r>
+          </a:p>
+        </p:txBody>
+      </p:sp>
+      <p:sp>
+        <p:nvSpPr>
+          <p:cNvPr id="6" name="TextBox 5"/>
           <p:cNvSpPr txBox="1"/>
           <p:nvPr/>
         </p:nvSpPr>
@@ -4469,7 +3805,7 @@
         <p:spPr>
           <a:xfrm>
             <a:off x="0" y="0"/>
-            <a:ext cx="12191695" cy="960120"/>
+            <a:ext cx="12191695" cy="1170432"/>
           </a:xfrm>
           <a:prstGeom prst="rect">
             <a:avLst/>
@@ -4511,7 +3847,7 @@
         </p:nvSpPr>
         <p:spPr>
           <a:xfrm>
-            <a:off x="0" y="960120"/>
+            <a:off x="0" y="1170432"/>
             <a:ext cx="12191695" cy="41148"/>
           </a:xfrm>
           <a:prstGeom prst="rect">
@@ -4555,7 +3891,7 @@
         <p:spPr>
           <a:xfrm>
             <a:off x="457200" y="164592"/>
-            <a:ext cx="11277295" cy="502920"/>
+            <a:ext cx="11277295" cy="384048"/>
           </a:xfrm>
           <a:prstGeom prst="rect">
             <a:avLst/>
@@ -4575,21 +3911,55 @@
                 </a:solidFill>
                 <a:latin typeface="Calibri"/>
               </a:rPr>
-              <a:t>Antes de entregar — autochequeo</a:t>
-            </a:r>
-          </a:p>
-        </p:txBody>
-      </p:sp>
-      <p:sp>
-        <p:nvSpPr>
-          <p:cNvPr id="5" name="Rounded Rectangle 4"/>
+              <a:t>Herramientas de hoy</a:t>
+            </a:r>
+          </a:p>
+        </p:txBody>
+      </p:sp>
+      <p:sp>
+        <p:nvSpPr>
+          <p:cNvPr id="5" name="TextBox 4"/>
+          <p:cNvSpPr txBox="1"/>
+          <p:nvPr/>
+        </p:nvSpPr>
+        <p:spPr>
+          <a:xfrm>
+            <a:off x="457200" y="566928"/>
+            <a:ext cx="11277295" cy="411480"/>
+          </a:xfrm>
+          <a:prstGeom prst="rect">
+            <a:avLst/>
+          </a:prstGeom>
+          <a:noFill/>
+        </p:spPr>
+        <p:txBody>
+          <a:bodyPr wrap="square">
+            <a:spAutoFit/>
+          </a:bodyPr>
+          <a:lstStyle/>
+          <a:p>
+            <a:r>
+              <a:rPr sz="1400" b="0" i="0">
+                <a:solidFill>
+                  <a:srgbClr val="B8D8EE"/>
+                </a:solidFill>
+                <a:latin typeface="Calibri"/>
+              </a:rPr>
+              <a:t>Gratis · funcionan en el navegador</a:t>
+            </a:r>
+          </a:p>
+        </p:txBody>
+      </p:sp>
+      <p:sp>
+        <p:nvSpPr>
+          <p:cNvPr id="6" name="Rounded Rectangle 5"/>
           <p:cNvSpPr/>
           <p:nvPr/>
         </p:nvSpPr>
         <p:spPr>
           <a:xfrm>
-            <a:off x="457200" y="1261872"/>
-            <a:ext cx="11277295" cy="566928"/>
+            <a:off x="457200" y="1591056"/>
+            <a:ext cx="3624986" cy="2299716"/>
           </a:xfrm>
           <a:prstGeom prst="roundRect">
             <a:avLst>
@@ -4627,25 +3997,23 @@
       </p:sp>
       <p:sp>
         <p:nvSpPr>
-          <p:cNvPr id="6" name="Rectangle 5"/>
+          <p:cNvPr id="7" name="Rectangle 6"/>
           <p:cNvSpPr/>
           <p:nvPr/>
         </p:nvSpPr>
         <p:spPr>
           <a:xfrm>
-            <a:off x="640080" y="1408175"/>
-            <a:ext cx="274320" cy="274320"/>
+            <a:off x="457200" y="1591056"/>
+            <a:ext cx="3624986" cy="64008"/>
           </a:xfrm>
           <a:prstGeom prst="rect">
             <a:avLst/>
           </a:prstGeom>
           <a:solidFill>
-            <a:srgbClr val="FFFFFF"/>
+            <a:srgbClr val="095292"/>
           </a:solidFill>
           <a:ln>
-            <a:solidFill>
-              <a:srgbClr val="333333"/>
-            </a:solidFill>
+            <a:noFill/>
           </a:ln>
         </p:spPr>
         <p:style>
@@ -4672,20 +4040,20 @@
       </p:sp>
       <p:sp>
         <p:nvSpPr>
-          <p:cNvPr id="7" name="Rectangle 6"/>
+          <p:cNvPr id="8" name="Rectangle 7"/>
           <p:cNvSpPr/>
           <p:nvPr/>
         </p:nvSpPr>
         <p:spPr>
           <a:xfrm>
-            <a:off x="640080" y="1408175"/>
-            <a:ext cx="73152" cy="274320"/>
+            <a:off x="457200" y="1655064"/>
+            <a:ext cx="3624986" cy="27432"/>
           </a:xfrm>
           <a:prstGeom prst="rect">
             <a:avLst/>
           </a:prstGeom>
           <a:solidFill>
-            <a:srgbClr val="269CCB"/>
+            <a:srgbClr val="FFD000"/>
           </a:solidFill>
           <a:ln>
             <a:noFill/>
@@ -4713,16 +4081,40 @@
           </a:p>
         </p:txBody>
       </p:sp>
-      <p:sp>
-        <p:nvSpPr>
-          <p:cNvPr id="8" name="TextBox 7"/>
+      <p:pic>
+        <p:nvPicPr>
+          <p:cNvPr id="9" name="Picture 8" descr="drawio.png"/>
+          <p:cNvPicPr>
+            <a:picLocks noChangeAspect="1"/>
+          </p:cNvPicPr>
+          <p:nvPr/>
+        </p:nvPicPr>
+        <p:blipFill>
+          <a:blip r:embed="rId2"/>
+          <a:stretch>
+            <a:fillRect/>
+          </a:stretch>
+        </p:blipFill>
+        <p:spPr>
+          <a:xfrm>
+            <a:off x="1659331" y="1847087"/>
+            <a:ext cx="1220724" cy="1220724"/>
+          </a:xfrm>
+          <a:prstGeom prst="rect">
+            <a:avLst/>
+          </a:prstGeom>
+        </p:spPr>
+      </p:pic>
+      <p:sp>
+        <p:nvSpPr>
+          <p:cNvPr id="10" name="TextBox 9"/>
           <p:cNvSpPr txBox="1"/>
           <p:nvPr/>
         </p:nvSpPr>
         <p:spPr>
           <a:xfrm>
-            <a:off x="1097280" y="1353312"/>
-            <a:ext cx="10362895" cy="402336"/>
+            <a:off x="530352" y="3159251"/>
+            <a:ext cx="3478682" cy="621792"/>
           </a:xfrm>
           <a:prstGeom prst="rect">
             <a:avLst/>
@@ -4730,31 +4122,48 @@
           <a:noFill/>
         </p:spPr>
         <p:txBody>
-          <a:bodyPr wrap="square" anchor="ctr"/>
-          <a:lstStyle/>
-          <a:p>
-            <a:r>
-              <a:rPr sz="1500" b="0" i="0">
-                <a:solidFill>
-                  <a:srgbClr val="333333"/>
-                </a:solidFill>
-                <a:latin typeface="Calibri"/>
-              </a:rPr>
-              <a:t>Si su sprint 1 se llama 'analisis' y el sprint 2 'diseño', que le va a mostrar a la veterinaria al terminar el sprint 1 que ella pueda entender y criticar?</a:t>
-            </a:r>
-          </a:p>
-        </p:txBody>
-      </p:sp>
-      <p:sp>
-        <p:nvSpPr>
-          <p:cNvPr id="9" name="Rounded Rectangle 8"/>
+          <a:bodyPr wrap="square" anchor="t"/>
+          <a:lstStyle/>
+          <a:p>
+            <a:pPr algn="ctr"/>
+            <a:r>
+              <a:rPr sz="1300" b="1" i="0">
+                <a:solidFill>
+                  <a:srgbClr val="095292"/>
+                </a:solidFill>
+                <a:latin typeface="Calibri"/>
+              </a:rPr>
+              <a:t>Draw.Io</a:t>
+            </a:r>
+          </a:p>
+          <a:p>
+            <a:pPr algn="ctr">
+              <a:spcBef>
+                <a:spcPts val="200"/>
+              </a:spcBef>
+            </a:pPr>
+            <a:r>
+              <a:rPr sz="1000" b="0" i="0">
+                <a:solidFill>
+                  <a:srgbClr val="666666"/>
+                </a:solidFill>
+                <a:latin typeface="Calibri"/>
+              </a:rPr>
+              <a:t>Diagramas UML y de contexto</a:t>
+            </a:r>
+          </a:p>
+        </p:txBody>
+      </p:sp>
+      <p:sp>
+        <p:nvSpPr>
+          <p:cNvPr id="11" name="Rounded Rectangle 10"/>
           <p:cNvSpPr/>
           <p:nvPr/>
         </p:nvSpPr>
         <p:spPr>
           <a:xfrm>
-            <a:off x="457200" y="1938528"/>
-            <a:ext cx="11277295" cy="566928"/>
+            <a:off x="4283354" y="1591056"/>
+            <a:ext cx="3624986" cy="2299716"/>
           </a:xfrm>
           <a:prstGeom prst="roundRect">
             <a:avLst>
@@ -4792,25 +4201,23 @@
       </p:sp>
       <p:sp>
         <p:nvSpPr>
-          <p:cNvPr id="10" name="Rectangle 9"/>
+          <p:cNvPr id="12" name="Rectangle 11"/>
           <p:cNvSpPr/>
           <p:nvPr/>
         </p:nvSpPr>
         <p:spPr>
           <a:xfrm>
-            <a:off x="640080" y="2084832"/>
-            <a:ext cx="274320" cy="274320"/>
+            <a:off x="4283354" y="1591056"/>
+            <a:ext cx="3624986" cy="64008"/>
           </a:xfrm>
           <a:prstGeom prst="rect">
             <a:avLst/>
           </a:prstGeom>
           <a:solidFill>
-            <a:srgbClr val="FFFFFF"/>
+            <a:srgbClr val="095292"/>
           </a:solidFill>
           <a:ln>
-            <a:solidFill>
-              <a:srgbClr val="333333"/>
-            </a:solidFill>
+            <a:noFill/>
           </a:ln>
         </p:spPr>
         <p:style>
@@ -4837,20 +4244,20 @@
       </p:sp>
       <p:sp>
         <p:nvSpPr>
-          <p:cNvPr id="11" name="Rectangle 10"/>
+          <p:cNvPr id="13" name="Rectangle 12"/>
           <p:cNvSpPr/>
           <p:nvPr/>
         </p:nvSpPr>
         <p:spPr>
           <a:xfrm>
-            <a:off x="640080" y="2084832"/>
-            <a:ext cx="73152" cy="274320"/>
+            <a:off x="4283354" y="1655064"/>
+            <a:ext cx="3624986" cy="27432"/>
           </a:xfrm>
           <a:prstGeom prst="rect">
             <a:avLst/>
           </a:prstGeom>
           <a:solidFill>
-            <a:srgbClr val="269CCB"/>
+            <a:srgbClr val="FFD000"/>
           </a:solidFill>
           <a:ln>
             <a:noFill/>
@@ -4878,16 +4285,40 @@
           </a:p>
         </p:txBody>
       </p:sp>
-      <p:sp>
-        <p:nvSpPr>
-          <p:cNvPr id="12" name="TextBox 11"/>
+      <p:pic>
+        <p:nvPicPr>
+          <p:cNvPr id="14" name="Picture 13" descr="excalidraw.png"/>
+          <p:cNvPicPr>
+            <a:picLocks noChangeAspect="1"/>
+          </p:cNvPicPr>
+          <p:nvPr/>
+        </p:nvPicPr>
+        <p:blipFill>
+          <a:blip r:embed="rId3"/>
+          <a:stretch>
+            <a:fillRect/>
+          </a:stretch>
+        </p:blipFill>
+        <p:spPr>
+          <a:xfrm>
+            <a:off x="5485485" y="1847087"/>
+            <a:ext cx="1220724" cy="1220724"/>
+          </a:xfrm>
+          <a:prstGeom prst="rect">
+            <a:avLst/>
+          </a:prstGeom>
+        </p:spPr>
+      </p:pic>
+      <p:sp>
+        <p:nvSpPr>
+          <p:cNvPr id="15" name="TextBox 14"/>
           <p:cNvSpPr txBox="1"/>
           <p:nvPr/>
         </p:nvSpPr>
         <p:spPr>
           <a:xfrm>
-            <a:off x="1097280" y="2029968"/>
-            <a:ext cx="10362895" cy="402336"/>
+            <a:off x="4356506" y="3159251"/>
+            <a:ext cx="3478682" cy="621792"/>
           </a:xfrm>
           <a:prstGeom prst="rect">
             <a:avLst/>
@@ -4895,31 +4326,48 @@
           <a:noFill/>
         </p:spPr>
         <p:txBody>
-          <a:bodyPr wrap="square" anchor="ctr"/>
-          <a:lstStyle/>
-          <a:p>
-            <a:r>
-              <a:rPr sz="1500" b="0" i="0">
-                <a:solidFill>
-                  <a:srgbClr val="333333"/>
-                </a:solidFill>
-                <a:latin typeface="Calibri"/>
-              </a:rPr>
-              <a:t>Sus criterios de aceptacion describen solo el camino feliz? Que pasa si la mascota no existe, si el nombre esta repetido o si la conexion se cae?</a:t>
-            </a:r>
-          </a:p>
-        </p:txBody>
-      </p:sp>
-      <p:sp>
-        <p:nvSpPr>
-          <p:cNvPr id="13" name="Rounded Rectangle 12"/>
+          <a:bodyPr wrap="square" anchor="t"/>
+          <a:lstStyle/>
+          <a:p>
+            <a:pPr algn="ctr"/>
+            <a:r>
+              <a:rPr sz="1300" b="1" i="0">
+                <a:solidFill>
+                  <a:srgbClr val="095292"/>
+                </a:solidFill>
+                <a:latin typeface="Calibri"/>
+              </a:rPr>
+              <a:t>Excalidraw</a:t>
+            </a:r>
+          </a:p>
+          <a:p>
+            <a:pPr algn="ctr">
+              <a:spcBef>
+                <a:spcPts val="200"/>
+              </a:spcBef>
+            </a:pPr>
+            <a:r>
+              <a:rPr sz="1000" b="0" i="0">
+                <a:solidFill>
+                  <a:srgbClr val="666666"/>
+                </a:solidFill>
+                <a:latin typeface="Calibri"/>
+              </a:rPr>
+              <a:t>Bocetos rapidos a mano alzada</a:t>
+            </a:r>
+          </a:p>
+        </p:txBody>
+      </p:sp>
+      <p:sp>
+        <p:nvSpPr>
+          <p:cNvPr id="16" name="Rounded Rectangle 15"/>
           <p:cNvSpPr/>
           <p:nvPr/>
         </p:nvSpPr>
         <p:spPr>
           <a:xfrm>
-            <a:off x="457200" y="2615184"/>
-            <a:ext cx="11277295" cy="566928"/>
+            <a:off x="8109508" y="1591056"/>
+            <a:ext cx="3624986" cy="2299716"/>
           </a:xfrm>
           <a:prstGeom prst="roundRect">
             <a:avLst>
@@ -4957,25 +4405,23 @@
       </p:sp>
       <p:sp>
         <p:nvSpPr>
-          <p:cNvPr id="14" name="Rectangle 13"/>
+          <p:cNvPr id="17" name="Rectangle 16"/>
           <p:cNvSpPr/>
           <p:nvPr/>
         </p:nvSpPr>
         <p:spPr>
           <a:xfrm>
-            <a:off x="640080" y="2761488"/>
-            <a:ext cx="274320" cy="274320"/>
+            <a:off x="8109508" y="1591056"/>
+            <a:ext cx="3624986" cy="64008"/>
           </a:xfrm>
           <a:prstGeom prst="rect">
             <a:avLst/>
           </a:prstGeom>
           <a:solidFill>
-            <a:srgbClr val="FFFFFF"/>
+            <a:srgbClr val="095292"/>
           </a:solidFill>
           <a:ln>
-            <a:solidFill>
-              <a:srgbClr val="333333"/>
-            </a:solidFill>
+            <a:noFill/>
           </a:ln>
         </p:spPr>
         <p:style>
@@ -5002,20 +4448,20 @@
       </p:sp>
       <p:sp>
         <p:nvSpPr>
-          <p:cNvPr id="15" name="Rectangle 14"/>
+          <p:cNvPr id="18" name="Rectangle 17"/>
           <p:cNvSpPr/>
           <p:nvPr/>
         </p:nvSpPr>
         <p:spPr>
           <a:xfrm>
-            <a:off x="640080" y="2761488"/>
-            <a:ext cx="73152" cy="274320"/>
+            <a:off x="8109508" y="1655064"/>
+            <a:ext cx="3624986" cy="27432"/>
           </a:xfrm>
           <a:prstGeom prst="rect">
             <a:avLst/>
           </a:prstGeom>
           <a:solidFill>
-            <a:srgbClr val="269CCB"/>
+            <a:srgbClr val="FFD000"/>
           </a:solidFill>
           <a:ln>
             <a:noFill/>
@@ -5043,16 +4489,40 @@
           </a:p>
         </p:txBody>
       </p:sp>
-      <p:sp>
-        <p:nvSpPr>
-          <p:cNvPr id="16" name="TextBox 15"/>
+      <p:pic>
+        <p:nvPicPr>
+          <p:cNvPr id="19" name="Picture 18" descr="google_docs.png"/>
+          <p:cNvPicPr>
+            <a:picLocks noChangeAspect="1"/>
+          </p:cNvPicPr>
+          <p:nvPr/>
+        </p:nvPicPr>
+        <p:blipFill>
+          <a:blip r:embed="rId4"/>
+          <a:stretch>
+            <a:fillRect/>
+          </a:stretch>
+        </p:blipFill>
+        <p:spPr>
+          <a:xfrm>
+            <a:off x="9311640" y="1847087"/>
+            <a:ext cx="1220724" cy="1220724"/>
+          </a:xfrm>
+          <a:prstGeom prst="rect">
+            <a:avLst/>
+          </a:prstGeom>
+        </p:spPr>
+      </p:pic>
+      <p:sp>
+        <p:nvSpPr>
+          <p:cNvPr id="20" name="TextBox 19"/>
           <p:cNvSpPr txBox="1"/>
           <p:nvPr/>
         </p:nvSpPr>
         <p:spPr>
           <a:xfrm>
-            <a:off x="1097280" y="2706624"/>
-            <a:ext cx="10362895" cy="402336"/>
+            <a:off x="8182660" y="3159251"/>
+            <a:ext cx="3478682" cy="621792"/>
           </a:xfrm>
           <a:prstGeom prst="rect">
             <a:avLst/>
@@ -5060,24 +4530,245 @@
           <a:noFill/>
         </p:spPr>
         <p:txBody>
-          <a:bodyPr wrap="square" anchor="ctr"/>
-          <a:lstStyle/>
-          <a:p>
-            <a:r>
-              <a:rPr sz="1500" b="0" i="0">
-                <a:solidFill>
-                  <a:srgbClr val="333333"/>
-                </a:solidFill>
-                <a:latin typeface="Calibri"/>
-              </a:rPr>
-              <a:t>Su Definicion de Terminado se puede verificar mirando el tablero, o incluye frases como 'que quede bien hecho' que nadie puede comprobar?</a:t>
-            </a:r>
-          </a:p>
-        </p:txBody>
-      </p:sp>
-      <p:sp>
-        <p:nvSpPr>
-          <p:cNvPr id="17" name="TextBox 16"/>
+          <a:bodyPr wrap="square" anchor="t"/>
+          <a:lstStyle/>
+          <a:p>
+            <a:pPr algn="ctr"/>
+            <a:r>
+              <a:rPr sz="1300" b="1" i="0">
+                <a:solidFill>
+                  <a:srgbClr val="095292"/>
+                </a:solidFill>
+                <a:latin typeface="Calibri"/>
+              </a:rPr>
+              <a:t>google docs</a:t>
+            </a:r>
+          </a:p>
+          <a:p>
+            <a:pPr algn="ctr">
+              <a:spcBef>
+                <a:spcPts val="200"/>
+              </a:spcBef>
+            </a:pPr>
+            <a:r>
+              <a:rPr sz="1000" b="0" i="0">
+                <a:solidFill>
+                  <a:srgbClr val="666666"/>
+                </a:solidFill>
+                <a:latin typeface="Calibri"/>
+              </a:rPr>
+              <a:t>Documentos del paquete de diseño</a:t>
+            </a:r>
+          </a:p>
+        </p:txBody>
+      </p:sp>
+      <p:sp>
+        <p:nvSpPr>
+          <p:cNvPr id="21" name="Rounded Rectangle 20"/>
+          <p:cNvSpPr/>
+          <p:nvPr/>
+        </p:nvSpPr>
+        <p:spPr>
+          <a:xfrm>
+            <a:off x="4283354" y="4055364"/>
+            <a:ext cx="3624986" cy="2299716"/>
+          </a:xfrm>
+          <a:prstGeom prst="roundRect">
+            <a:avLst>
+              <a:gd name="adj" fmla="val 12000"/>
+            </a:avLst>
+          </a:prstGeom>
+          <a:solidFill>
+            <a:srgbClr val="F2F2F2"/>
+          </a:solidFill>
+          <a:ln>
+            <a:noFill/>
+          </a:ln>
+        </p:spPr>
+        <p:style>
+          <a:lnRef idx="1">
+            <a:schemeClr val="accent1"/>
+          </a:lnRef>
+          <a:fillRef idx="3">
+            <a:schemeClr val="accent1"/>
+          </a:fillRef>
+          <a:effectRef idx="2">
+            <a:schemeClr val="accent1"/>
+          </a:effectRef>
+          <a:fontRef idx="minor">
+            <a:schemeClr val="lt1"/>
+          </a:fontRef>
+        </p:style>
+        <p:txBody>
+          <a:bodyPr rtlCol="0" anchor="ctr"/>
+          <a:lstStyle/>
+          <a:p>
+            <a:pPr algn="ctr"/>
+          </a:p>
+        </p:txBody>
+      </p:sp>
+      <p:sp>
+        <p:nvSpPr>
+          <p:cNvPr id="22" name="Rectangle 21"/>
+          <p:cNvSpPr/>
+          <p:nvPr/>
+        </p:nvSpPr>
+        <p:spPr>
+          <a:xfrm>
+            <a:off x="4283354" y="4055364"/>
+            <a:ext cx="3624986" cy="64008"/>
+          </a:xfrm>
+          <a:prstGeom prst="rect">
+            <a:avLst/>
+          </a:prstGeom>
+          <a:solidFill>
+            <a:srgbClr val="095292"/>
+          </a:solidFill>
+          <a:ln>
+            <a:noFill/>
+          </a:ln>
+        </p:spPr>
+        <p:style>
+          <a:lnRef idx="1">
+            <a:schemeClr val="accent1"/>
+          </a:lnRef>
+          <a:fillRef idx="3">
+            <a:schemeClr val="accent1"/>
+          </a:fillRef>
+          <a:effectRef idx="2">
+            <a:schemeClr val="accent1"/>
+          </a:effectRef>
+          <a:fontRef idx="minor">
+            <a:schemeClr val="lt1"/>
+          </a:fontRef>
+        </p:style>
+        <p:txBody>
+          <a:bodyPr rtlCol="0" anchor="ctr"/>
+          <a:lstStyle/>
+          <a:p>
+            <a:pPr algn="ctr"/>
+          </a:p>
+        </p:txBody>
+      </p:sp>
+      <p:sp>
+        <p:nvSpPr>
+          <p:cNvPr id="23" name="Rectangle 22"/>
+          <p:cNvSpPr/>
+          <p:nvPr/>
+        </p:nvSpPr>
+        <p:spPr>
+          <a:xfrm>
+            <a:off x="4283354" y="4119372"/>
+            <a:ext cx="3624986" cy="27432"/>
+          </a:xfrm>
+          <a:prstGeom prst="rect">
+            <a:avLst/>
+          </a:prstGeom>
+          <a:solidFill>
+            <a:srgbClr val="FFD000"/>
+          </a:solidFill>
+          <a:ln>
+            <a:noFill/>
+          </a:ln>
+        </p:spPr>
+        <p:style>
+          <a:lnRef idx="1">
+            <a:schemeClr val="accent1"/>
+          </a:lnRef>
+          <a:fillRef idx="3">
+            <a:schemeClr val="accent1"/>
+          </a:fillRef>
+          <a:effectRef idx="2">
+            <a:schemeClr val="accent1"/>
+          </a:effectRef>
+          <a:fontRef idx="minor">
+            <a:schemeClr val="lt1"/>
+          </a:fontRef>
+        </p:style>
+        <p:txBody>
+          <a:bodyPr rtlCol="0" anchor="ctr"/>
+          <a:lstStyle/>
+          <a:p>
+            <a:pPr algn="ctr"/>
+          </a:p>
+        </p:txBody>
+      </p:sp>
+      <p:pic>
+        <p:nvPicPr>
+          <p:cNvPr id="24" name="Picture 23" descr="examlab.png"/>
+          <p:cNvPicPr>
+            <a:picLocks noChangeAspect="1"/>
+          </p:cNvPicPr>
+          <p:nvPr/>
+        </p:nvPicPr>
+        <p:blipFill>
+          <a:blip r:embed="rId5"/>
+          <a:stretch>
+            <a:fillRect/>
+          </a:stretch>
+        </p:blipFill>
+        <p:spPr>
+          <a:xfrm>
+            <a:off x="5485485" y="4311396"/>
+            <a:ext cx="1220724" cy="1220724"/>
+          </a:xfrm>
+          <a:prstGeom prst="rect">
+            <a:avLst/>
+          </a:prstGeom>
+        </p:spPr>
+      </p:pic>
+      <p:sp>
+        <p:nvSpPr>
+          <p:cNvPr id="25" name="TextBox 24"/>
+          <p:cNvSpPr txBox="1"/>
+          <p:nvPr/>
+        </p:nvSpPr>
+        <p:spPr>
+          <a:xfrm>
+            <a:off x="4356506" y="5623560"/>
+            <a:ext cx="3478682" cy="621792"/>
+          </a:xfrm>
+          <a:prstGeom prst="rect">
+            <a:avLst/>
+          </a:prstGeom>
+          <a:noFill/>
+        </p:spPr>
+        <p:txBody>
+          <a:bodyPr wrap="square" anchor="t"/>
+          <a:lstStyle/>
+          <a:p>
+            <a:pPr algn="ctr"/>
+            <a:r>
+              <a:rPr sz="1300" b="1" i="0">
+                <a:solidFill>
+                  <a:srgbClr val="095292"/>
+                </a:solidFill>
+                <a:latin typeface="Calibri"/>
+              </a:rPr>
+              <a:t>la plataforma del curso</a:t>
+            </a:r>
+          </a:p>
+          <a:p>
+            <a:pPr algn="ctr">
+              <a:spcBef>
+                <a:spcPts val="200"/>
+              </a:spcBef>
+            </a:pPr>
+            <a:r>
+              <a:rPr sz="1000" b="0" i="0">
+                <a:solidFill>
+                  <a:srgbClr val="666666"/>
+                </a:solidFill>
+                <a:latin typeface="Calibri"/>
+              </a:rPr>
+              <a:t>Entrega del taller · en la fecha que indique el docente</a:t>
+            </a:r>
+          </a:p>
+        </p:txBody>
+      </p:sp>
+      <p:sp>
+        <p:nvSpPr>
+          <p:cNvPr id="26" name="TextBox 25"/>
           <p:cNvSpPr txBox="1"/>
           <p:nvPr/>
         </p:nvSpPr>
@@ -5251,7 +4942,7 @@
                 </a:solidFill>
                 <a:latin typeface="Calibri"/>
               </a:rPr>
-              <a:t>Criterios de exito / entregable</a:t>
+              <a:t>Taller PI — por que importa</a:t>
             </a:r>
           </a:p>
         </p:txBody>
@@ -5299,7 +4990,7 @@
                 </a:solidFill>
                 <a:latin typeface="Calibri"/>
               </a:rPr>
-              <a:t>Entregable:</a:t>
+              <a:t>Por que importa al PI:</a:t>
             </a:r>
             <a:r>
               <a:rPr sz="2000" b="0" i="0">
@@ -5308,7 +4999,7 @@
                 </a:solidFill>
                 <a:latin typeface="Calibri"/>
               </a:rPr>
-              <a:t> Un tablero en draw.io o Excalidraw con el Product Backlog priorizado de VetCare y las columnas de flujo con limite de trabajo en curso, mas un documento con el plan de tres sprints (objetivo y entregable de diseño de cada uno), la Definicion de Terminado y tres historias de usuario con criterios en formato Dado/Cuando/Entonces.</a:t>
+              <a:t> el semestre completo de VetCare se va a organizar como sprints, y lo que se defina hoy en el backlog es literalmente el orden en que se van a producir los planos.</a:t>
             </a:r>
           </a:p>
           <a:p>
@@ -5324,25 +5015,7 @@
                 </a:solidFill>
                 <a:latin typeface="Calibri"/>
               </a:rPr>
-              <a:t>–   </a:t>
-            </a:r>
-            <a:r>
-              <a:rPr sz="2000" b="1" i="0">
-                <a:solidFill>
-                  <a:srgbClr val="333333"/>
-                </a:solidFill>
-                <a:latin typeface="Calibri"/>
-              </a:rPr>
-              <a:t>Exito:</a:t>
-            </a:r>
-            <a:r>
-              <a:rPr sz="2000" b="0" i="0">
-                <a:solidFill>
-                  <a:srgbClr val="333333"/>
-                </a:solidFill>
-                <a:latin typeface="Calibri"/>
-              </a:rPr>
-              <a:t> El backlog esta priorizado con un orden explicito y cada item tiene una justificacion de valor para la clinica, no un orden arbitrario.</a:t>
+              <a:t>–   Ya vimos el enfoque tradicional y su documentacion formal; hoy se ve el otro extremo del espectro y se aprende a decidir cual parte de VetCare conviene tratar de cada forma.</a:t>
             </a:r>
           </a:p>
           <a:p>
@@ -5358,127 +5031,7 @@
                 </a:solidFill>
                 <a:latin typeface="Calibri"/>
               </a:rPr>
-              <a:t>–   </a:t>
-            </a:r>
-            <a:r>
-              <a:rPr sz="2000" b="1" i="0">
-                <a:solidFill>
-                  <a:srgbClr val="333333"/>
-                </a:solidFill>
-                <a:latin typeface="Calibri"/>
-              </a:rPr>
-              <a:t>Exito:</a:t>
-            </a:r>
-            <a:r>
-              <a:rPr sz="2000" b="0" i="0">
-                <a:solidFill>
-                  <a:srgbClr val="333333"/>
-                </a:solidFill>
-                <a:latin typeface="Calibri"/>
-              </a:rPr>
-              <a:t> Las tres historias siguen la estructura Como / quiero / para y cada una tiene al menos dos escenarios en Dado/Cuando/Entonces, incluido uno alternativo o de error.</a:t>
-            </a:r>
-          </a:p>
-          <a:p>
-            <a:pPr>
-              <a:spcAft>
-                <a:spcPts val="800"/>
-              </a:spcAft>
-            </a:pPr>
-            <a:r>
-              <a:rPr sz="2000" b="0" i="0">
-                <a:solidFill>
-                  <a:srgbClr val="333333"/>
-                </a:solidFill>
-                <a:latin typeface="Calibri"/>
-              </a:rPr>
-              <a:t>–   </a:t>
-            </a:r>
-            <a:r>
-              <a:rPr sz="2000" b="1" i="0">
-                <a:solidFill>
-                  <a:srgbClr val="333333"/>
-                </a:solidFill>
-                <a:latin typeface="Calibri"/>
-              </a:rPr>
-              <a:t>Exito:</a:t>
-            </a:r>
-            <a:r>
-              <a:rPr sz="2000" b="0" i="0">
-                <a:solidFill>
-                  <a:srgbClr val="333333"/>
-                </a:solidFill>
-                <a:latin typeface="Calibri"/>
-              </a:rPr>
-              <a:t> Cada sprint del plan termina en un incremento que la clinica podria ver y opinar (mockup, prototipo, diagrama revisado), no en trabajo interno invisible.</a:t>
-            </a:r>
-          </a:p>
-          <a:p>
-            <a:pPr>
-              <a:spcAft>
-                <a:spcPts val="800"/>
-              </a:spcAft>
-            </a:pPr>
-            <a:r>
-              <a:rPr sz="2000" b="0" i="0">
-                <a:solidFill>
-                  <a:srgbClr val="333333"/>
-                </a:solidFill>
-                <a:latin typeface="Calibri"/>
-              </a:rPr>
-              <a:t>–   </a:t>
-            </a:r>
-            <a:r>
-              <a:rPr sz="2000" b="1" i="0">
-                <a:solidFill>
-                  <a:srgbClr val="333333"/>
-                </a:solidFill>
-                <a:latin typeface="Calibri"/>
-              </a:rPr>
-              <a:t>Exito:</a:t>
-            </a:r>
-            <a:r>
-              <a:rPr sz="2000" b="0" i="0">
-                <a:solidFill>
-                  <a:srgbClr val="333333"/>
-                </a:solidFill>
-                <a:latin typeface="Calibri"/>
-              </a:rPr>
-              <a:t> El tablero declara la Definicion de Terminado y el limite de trabajo en curso, y ninguna columna del medio tiene mas tarjetas que su limite.</a:t>
-            </a:r>
-          </a:p>
-          <a:p>
-            <a:pPr>
-              <a:spcAft>
-                <a:spcPts val="800"/>
-              </a:spcAft>
-            </a:pPr>
-            <a:r>
-              <a:rPr sz="2000" b="0" i="0">
-                <a:solidFill>
-                  <a:srgbClr val="333333"/>
-                </a:solidFill>
-                <a:latin typeface="Calibri"/>
-              </a:rPr>
-              <a:t>–   </a:t>
-            </a:r>
-            <a:r>
-              <a:rPr sz="2000" b="1" i="0">
-                <a:solidFill>
-                  <a:srgbClr val="333333"/>
-                </a:solidFill>
-                <a:latin typeface="Calibri"/>
-              </a:rPr>
-              <a:t>Entrega en la plataforma del curso</a:t>
-            </a:r>
-            <a:r>
-              <a:rPr sz="2000" b="0" i="0">
-                <a:solidFill>
-                  <a:srgbClr val="333333"/>
-                </a:solidFill>
-                <a:latin typeface="Calibri"/>
-              </a:rPr>
-              <a:t> — en la fecha que indique el docente.</a:t>
+              <a:t>–   Aqui se aclara de una vez el malentendido mas costoso del curso: agil no es la excusa para no documentar, y en esta asignatura la documentacion de diseño es justamente el incremento entregable.</a:t>
             </a:r>
           </a:p>
         </p:txBody>
@@ -5659,109 +5212,21 @@
                 </a:solidFill>
                 <a:latin typeface="Calibri"/>
               </a:rPr>
-              <a:t>Para el PI esta semana</a:t>
-            </a:r>
-          </a:p>
-        </p:txBody>
-      </p:sp>
-      <p:sp>
-        <p:nvSpPr>
-          <p:cNvPr id="5" name="Rounded Rectangle 4"/>
-          <p:cNvSpPr/>
-          <p:nvPr/>
-        </p:nvSpPr>
-        <p:spPr>
-          <a:xfrm>
-            <a:off x="457200" y="1261872"/>
-            <a:ext cx="11277295" cy="1051560"/>
-          </a:xfrm>
-          <a:prstGeom prst="roundRect">
-            <a:avLst>
-              <a:gd name="adj" fmla="val 12000"/>
-            </a:avLst>
-          </a:prstGeom>
-          <a:solidFill>
-            <a:srgbClr val="E8F4FA"/>
-          </a:solidFill>
-          <a:ln>
-            <a:noFill/>
-          </a:ln>
-        </p:spPr>
-        <p:style>
-          <a:lnRef idx="1">
-            <a:schemeClr val="accent1"/>
-          </a:lnRef>
-          <a:fillRef idx="3">
-            <a:schemeClr val="accent1"/>
-          </a:fillRef>
-          <a:effectRef idx="2">
-            <a:schemeClr val="accent1"/>
-          </a:effectRef>
-          <a:fontRef idx="minor">
-            <a:schemeClr val="lt1"/>
-          </a:fontRef>
-        </p:style>
-        <p:txBody>
-          <a:bodyPr rtlCol="0" anchor="ctr"/>
-          <a:lstStyle/>
-          <a:p>
-            <a:pPr algn="ctr"/>
-          </a:p>
-        </p:txBody>
-      </p:sp>
-      <p:sp>
-        <p:nvSpPr>
-          <p:cNvPr id="6" name="Rectangle 5"/>
-          <p:cNvSpPr/>
-          <p:nvPr/>
-        </p:nvSpPr>
-        <p:spPr>
-          <a:xfrm>
-            <a:off x="457200" y="1261872"/>
-            <a:ext cx="128016" cy="1051560"/>
-          </a:xfrm>
-          <a:prstGeom prst="rect">
-            <a:avLst/>
-          </a:prstGeom>
-          <a:solidFill>
-            <a:srgbClr val="269CCB"/>
-          </a:solidFill>
-          <a:ln>
-            <a:noFill/>
-          </a:ln>
-        </p:spPr>
-        <p:style>
-          <a:lnRef idx="1">
-            <a:schemeClr val="accent1"/>
-          </a:lnRef>
-          <a:fillRef idx="3">
-            <a:schemeClr val="accent1"/>
-          </a:fillRef>
-          <a:effectRef idx="2">
-            <a:schemeClr val="accent1"/>
-          </a:effectRef>
-          <a:fontRef idx="minor">
-            <a:schemeClr val="lt1"/>
-          </a:fontRef>
-        </p:style>
-        <p:txBody>
-          <a:bodyPr rtlCol="0" anchor="ctr"/>
-          <a:lstStyle/>
-          <a:p>
-            <a:pPr algn="ctr"/>
-          </a:p>
-        </p:txBody>
-      </p:sp>
-      <p:sp>
-        <p:nvSpPr>
-          <p:cNvPr id="7" name="TextBox 6"/>
+              <a:t>Taller PI — punto de partida</a:t>
+            </a:r>
+          </a:p>
+        </p:txBody>
+      </p:sp>
+      <p:sp>
+        <p:nvSpPr>
+          <p:cNvPr id="5" name="TextBox 4"/>
           <p:cNvSpPr txBox="1"/>
           <p:nvPr/>
         </p:nvSpPr>
         <p:spPr>
           <a:xfrm>
-            <a:off x="777240" y="1399031"/>
-            <a:ext cx="10774375" cy="822959"/>
+            <a:off x="457200" y="1170432"/>
+            <a:ext cx="11277295" cy="5230368"/>
           </a:xfrm>
           <a:prstGeom prst="rect">
             <a:avLst/>
@@ -5774,313 +5239,58 @@
           </a:bodyPr>
           <a:lstStyle/>
           <a:p>
-            <a:r>
-              <a:rPr sz="1200" b="1" i="0">
-                <a:solidFill>
-                  <a:srgbClr val="269CCB"/>
-                </a:solidFill>
-                <a:latin typeface="Calibri"/>
-              </a:rPr>
-              <a:t>Info</a:t>
-            </a:r>
-          </a:p>
-          <a:p>
             <a:pPr>
-              <a:spcBef>
-                <a:spcPts val="400"/>
-              </a:spcBef>
+              <a:spcAft>
+                <a:spcPts val="800"/>
+              </a:spcAft>
             </a:pPr>
             <a:r>
-              <a:rPr sz="1400" b="0" i="0">
+              <a:rPr sz="2000" b="0" i="0">
                 <a:solidFill>
                   <a:srgbClr val="333333"/>
                 </a:solidFill>
                 <a:latin typeface="Calibri"/>
               </a:rPr>
-              <a:t>Hito: Queda listo el backlog priorizado de VetCare repartido en sprints del semestre, con las primeras historias de usuario escritas con criterios de aceptacion.</a:t>
-            </a:r>
-          </a:p>
-        </p:txBody>
-      </p:sp>
-      <p:sp>
-        <p:nvSpPr>
-          <p:cNvPr id="8" name="Rounded Rectangle 7"/>
-          <p:cNvSpPr/>
-          <p:nvPr/>
-        </p:nvSpPr>
-        <p:spPr>
-          <a:xfrm>
-            <a:off x="457200" y="2478024"/>
-            <a:ext cx="11277295" cy="1051560"/>
-          </a:xfrm>
-          <a:prstGeom prst="roundRect">
-            <a:avLst>
-              <a:gd name="adj" fmla="val 12000"/>
-            </a:avLst>
-          </a:prstGeom>
-          <a:solidFill>
-            <a:srgbClr val="FFF8E1"/>
-          </a:solidFill>
-          <a:ln>
-            <a:noFill/>
-          </a:ln>
-        </p:spPr>
-        <p:style>
-          <a:lnRef idx="1">
-            <a:schemeClr val="accent1"/>
-          </a:lnRef>
-          <a:fillRef idx="3">
-            <a:schemeClr val="accent1"/>
-          </a:fillRef>
-          <a:effectRef idx="2">
-            <a:schemeClr val="accent1"/>
-          </a:effectRef>
-          <a:fontRef idx="minor">
-            <a:schemeClr val="lt1"/>
-          </a:fontRef>
-        </p:style>
-        <p:txBody>
-          <a:bodyPr rtlCol="0" anchor="ctr"/>
-          <a:lstStyle/>
-          <a:p>
-            <a:pPr algn="ctr"/>
-          </a:p>
-        </p:txBody>
-      </p:sp>
-      <p:sp>
-        <p:nvSpPr>
-          <p:cNvPr id="9" name="Rectangle 8"/>
-          <p:cNvSpPr/>
-          <p:nvPr/>
-        </p:nvSpPr>
-        <p:spPr>
-          <a:xfrm>
-            <a:off x="457200" y="2478024"/>
-            <a:ext cx="128016" cy="1051560"/>
-          </a:xfrm>
-          <a:prstGeom prst="rect">
-            <a:avLst/>
-          </a:prstGeom>
-          <a:solidFill>
-            <a:srgbClr val="FFD000"/>
-          </a:solidFill>
-          <a:ln>
-            <a:noFill/>
-          </a:ln>
-        </p:spPr>
-        <p:style>
-          <a:lnRef idx="1">
-            <a:schemeClr val="accent1"/>
-          </a:lnRef>
-          <a:fillRef idx="3">
-            <a:schemeClr val="accent1"/>
-          </a:fillRef>
-          <a:effectRef idx="2">
-            <a:schemeClr val="accent1"/>
-          </a:effectRef>
-          <a:fontRef idx="minor">
-            <a:schemeClr val="lt1"/>
-          </a:fontRef>
-        </p:style>
-        <p:txBody>
-          <a:bodyPr rtlCol="0" anchor="ctr"/>
-          <a:lstStyle/>
-          <a:p>
-            <a:pPr algn="ctr"/>
-          </a:p>
-        </p:txBody>
-      </p:sp>
-      <p:sp>
-        <p:nvSpPr>
-          <p:cNvPr id="10" name="TextBox 9"/>
-          <p:cNvSpPr txBox="1"/>
-          <p:nvPr/>
-        </p:nvSpPr>
-        <p:spPr>
-          <a:xfrm>
-            <a:off x="777240" y="2615184"/>
-            <a:ext cx="10774375" cy="822959"/>
-          </a:xfrm>
-          <a:prstGeom prst="rect">
-            <a:avLst/>
-          </a:prstGeom>
-          <a:noFill/>
-        </p:spPr>
-        <p:txBody>
-          <a:bodyPr wrap="square">
-            <a:spAutoFit/>
-          </a:bodyPr>
-          <a:lstStyle/>
-          <a:p>
-            <a:r>
-              <a:rPr sz="1200" b="1" i="0">
-                <a:solidFill>
-                  <a:srgbClr val="FFD000"/>
-                </a:solidFill>
-                <a:latin typeface="Calibri"/>
-              </a:rPr>
-              <a:t>Aclaración</a:t>
+              <a:t>–   El equipo tiene requisitos escritos y un mapa de fases, pero no tiene ningun orden de trabajo: todos quieren empezar por la pantalla que les parece mas bonita.</a:t>
             </a:r>
           </a:p>
           <a:p>
             <a:pPr>
-              <a:spcBef>
-                <a:spcPts val="400"/>
-              </a:spcBef>
+              <a:spcAft>
+                <a:spcPts val="800"/>
+              </a:spcAft>
             </a:pPr>
             <a:r>
-              <a:rPr sz="1400" b="0" i="0">
+              <a:rPr sz="2000" b="0" i="0">
                 <a:solidFill>
                   <a:srgbClr val="333333"/>
                 </a:solidFill>
                 <a:latin typeface="Calibri"/>
               </a:rPr>
-              <a:t>Enunciado completo: Clases/Proyecto Integrador/ (VetCare).</a:t>
-            </a:r>
-          </a:p>
-        </p:txBody>
-      </p:sp>
-      <p:sp>
-        <p:nvSpPr>
-          <p:cNvPr id="11" name="Rounded Rectangle 10"/>
-          <p:cNvSpPr/>
-          <p:nvPr/>
-        </p:nvSpPr>
-        <p:spPr>
-          <a:xfrm>
-            <a:off x="457200" y="3694176"/>
-            <a:ext cx="11277295" cy="1051560"/>
-          </a:xfrm>
-          <a:prstGeom prst="roundRect">
-            <a:avLst>
-              <a:gd name="adj" fmla="val 12000"/>
-            </a:avLst>
-          </a:prstGeom>
-          <a:solidFill>
-            <a:srgbClr val="FBE4E4"/>
-          </a:solidFill>
-          <a:ln>
-            <a:noFill/>
-          </a:ln>
-        </p:spPr>
-        <p:style>
-          <a:lnRef idx="1">
-            <a:schemeClr val="accent1"/>
-          </a:lnRef>
-          <a:fillRef idx="3">
-            <a:schemeClr val="accent1"/>
-          </a:fillRef>
-          <a:effectRef idx="2">
-            <a:schemeClr val="accent1"/>
-          </a:effectRef>
-          <a:fontRef idx="minor">
-            <a:schemeClr val="lt1"/>
-          </a:fontRef>
-        </p:style>
-        <p:txBody>
-          <a:bodyPr rtlCol="0" anchor="ctr"/>
-          <a:lstStyle/>
-          <a:p>
-            <a:pPr algn="ctr"/>
-          </a:p>
-        </p:txBody>
-      </p:sp>
-      <p:sp>
-        <p:nvSpPr>
-          <p:cNvPr id="12" name="Rectangle 11"/>
-          <p:cNvSpPr/>
-          <p:nvPr/>
-        </p:nvSpPr>
-        <p:spPr>
-          <a:xfrm>
-            <a:off x="457200" y="3694176"/>
-            <a:ext cx="128016" cy="1051560"/>
-          </a:xfrm>
-          <a:prstGeom prst="rect">
-            <a:avLst/>
-          </a:prstGeom>
-          <a:solidFill>
-            <a:srgbClr val="A02030"/>
-          </a:solidFill>
-          <a:ln>
-            <a:noFill/>
-          </a:ln>
-        </p:spPr>
-        <p:style>
-          <a:lnRef idx="1">
-            <a:schemeClr val="accent1"/>
-          </a:lnRef>
-          <a:fillRef idx="3">
-            <a:schemeClr val="accent1"/>
-          </a:fillRef>
-          <a:effectRef idx="2">
-            <a:schemeClr val="accent1"/>
-          </a:effectRef>
-          <a:fontRef idx="minor">
-            <a:schemeClr val="lt1"/>
-          </a:fontRef>
-        </p:style>
-        <p:txBody>
-          <a:bodyPr rtlCol="0" anchor="ctr"/>
-          <a:lstStyle/>
-          <a:p>
-            <a:pPr algn="ctr"/>
-          </a:p>
-        </p:txBody>
-      </p:sp>
-      <p:sp>
-        <p:nvSpPr>
-          <p:cNvPr id="13" name="TextBox 12"/>
-          <p:cNvSpPr txBox="1"/>
-          <p:nvPr/>
-        </p:nvSpPr>
-        <p:spPr>
-          <a:xfrm>
-            <a:off x="777240" y="3831336"/>
-            <a:ext cx="10774375" cy="822959"/>
-          </a:xfrm>
-          <a:prstGeom prst="rect">
-            <a:avLst/>
-          </a:prstGeom>
-          <a:noFill/>
-        </p:spPr>
-        <p:txBody>
-          <a:bodyPr wrap="square">
-            <a:spAutoFit/>
-          </a:bodyPr>
-          <a:lstStyle/>
-          <a:p>
-            <a:r>
-              <a:rPr sz="1200" b="1" i="0">
-                <a:solidFill>
-                  <a:srgbClr val="A02030"/>
-                </a:solidFill>
-                <a:latin typeface="Calibri"/>
-              </a:rPr>
-              <a:t>Atención</a:t>
+              <a:t>–   La administradora de Huellitas puede dar retroalimentacion corta cada dos o tres semanas, pero no puede sentarse a leer un documento de ochenta paginas.</a:t>
             </a:r>
           </a:p>
           <a:p>
             <a:pPr>
-              <a:spcBef>
-                <a:spcPts val="400"/>
-              </a:spcBef>
+              <a:spcAft>
+                <a:spcPts val="800"/>
+              </a:spcAft>
             </a:pPr>
             <a:r>
-              <a:rPr sz="1400" b="0" i="0">
+              <a:rPr sz="2000" b="0" i="0">
                 <a:solidFill>
                   <a:srgbClr val="333333"/>
                 </a:solidFill>
                 <a:latin typeface="Calibri"/>
               </a:rPr>
-              <a:t>Entrega del taller, si el docente lo asigna · en la fecha que indique el docente.</a:t>
-            </a:r>
-          </a:p>
-        </p:txBody>
-      </p:sp>
-      <p:sp>
-        <p:nvSpPr>
-          <p:cNvPr id="14" name="TextBox 13"/>
+              <a:t>–   En el grupo circula la idea de que agil significa no escribir nada y que 'ya lo iremos viendo sobre la marcha'.</a:t>
+            </a:r>
+          </a:p>
+        </p:txBody>
+      </p:sp>
+      <p:sp>
+        <p:nvSpPr>
+          <p:cNvPr id="6" name="TextBox 5"/>
           <p:cNvSpPr txBox="1"/>
           <p:nvPr/>
         </p:nvSpPr>
@@ -6148,6 +5358,2641 @@
         <p:spPr>
           <a:xfrm>
             <a:off x="0" y="0"/>
+            <a:ext cx="12191695" cy="960120"/>
+          </a:xfrm>
+          <a:prstGeom prst="rect">
+            <a:avLst/>
+          </a:prstGeom>
+          <a:solidFill>
+            <a:srgbClr val="095292"/>
+          </a:solidFill>
+          <a:ln>
+            <a:noFill/>
+          </a:ln>
+        </p:spPr>
+        <p:style>
+          <a:lnRef idx="1">
+            <a:schemeClr val="accent1"/>
+          </a:lnRef>
+          <a:fillRef idx="3">
+            <a:schemeClr val="accent1"/>
+          </a:fillRef>
+          <a:effectRef idx="2">
+            <a:schemeClr val="accent1"/>
+          </a:effectRef>
+          <a:fontRef idx="minor">
+            <a:schemeClr val="lt1"/>
+          </a:fontRef>
+        </p:style>
+        <p:txBody>
+          <a:bodyPr rtlCol="0" anchor="ctr"/>
+          <a:lstStyle/>
+          <a:p>
+            <a:pPr algn="ctr"/>
+          </a:p>
+        </p:txBody>
+      </p:sp>
+      <p:sp>
+        <p:nvSpPr>
+          <p:cNvPr id="3" name="Rectangle 2"/>
+          <p:cNvSpPr/>
+          <p:nvPr/>
+        </p:nvSpPr>
+        <p:spPr>
+          <a:xfrm>
+            <a:off x="0" y="960120"/>
+            <a:ext cx="12191695" cy="41148"/>
+          </a:xfrm>
+          <a:prstGeom prst="rect">
+            <a:avLst/>
+          </a:prstGeom>
+          <a:solidFill>
+            <a:srgbClr val="FFD000"/>
+          </a:solidFill>
+          <a:ln>
+            <a:noFill/>
+          </a:ln>
+        </p:spPr>
+        <p:style>
+          <a:lnRef idx="1">
+            <a:schemeClr val="accent1"/>
+          </a:lnRef>
+          <a:fillRef idx="3">
+            <a:schemeClr val="accent1"/>
+          </a:fillRef>
+          <a:effectRef idx="2">
+            <a:schemeClr val="accent1"/>
+          </a:effectRef>
+          <a:fontRef idx="minor">
+            <a:schemeClr val="lt1"/>
+          </a:fontRef>
+        </p:style>
+        <p:txBody>
+          <a:bodyPr rtlCol="0" anchor="ctr"/>
+          <a:lstStyle/>
+          <a:p>
+            <a:pPr algn="ctr"/>
+          </a:p>
+        </p:txBody>
+      </p:sp>
+      <p:sp>
+        <p:nvSpPr>
+          <p:cNvPr id="4" name="TextBox 3"/>
+          <p:cNvSpPr txBox="1"/>
+          <p:nvPr/>
+        </p:nvSpPr>
+        <p:spPr>
+          <a:xfrm>
+            <a:off x="457200" y="164592"/>
+            <a:ext cx="11277295" cy="502920"/>
+          </a:xfrm>
+          <a:prstGeom prst="rect">
+            <a:avLst/>
+          </a:prstGeom>
+          <a:noFill/>
+        </p:spPr>
+        <p:txBody>
+          <a:bodyPr wrap="square">
+            <a:spAutoFit/>
+          </a:bodyPr>
+          <a:lstStyle/>
+          <a:p>
+            <a:r>
+              <a:rPr sz="2600" b="1" i="0">
+                <a:solidFill>
+                  <a:srgbClr val="FFFFFF"/>
+                </a:solidFill>
+                <a:latin typeface="Calibri"/>
+              </a:rPr>
+              <a:t>Taller PI — pasos guiados</a:t>
+            </a:r>
+          </a:p>
+        </p:txBody>
+      </p:sp>
+      <p:sp>
+        <p:nvSpPr>
+          <p:cNvPr id="5" name="Rounded Rectangle 4"/>
+          <p:cNvSpPr/>
+          <p:nvPr/>
+        </p:nvSpPr>
+        <p:spPr>
+          <a:xfrm>
+            <a:off x="457200" y="1234440"/>
+            <a:ext cx="11277295" cy="950976"/>
+          </a:xfrm>
+          <a:prstGeom prst="roundRect">
+            <a:avLst>
+              <a:gd name="adj" fmla="val 12000"/>
+            </a:avLst>
+          </a:prstGeom>
+          <a:solidFill>
+            <a:srgbClr val="F2F2F2"/>
+          </a:solidFill>
+          <a:ln>
+            <a:noFill/>
+          </a:ln>
+        </p:spPr>
+        <p:style>
+          <a:lnRef idx="1">
+            <a:schemeClr val="accent1"/>
+          </a:lnRef>
+          <a:fillRef idx="3">
+            <a:schemeClr val="accent1"/>
+          </a:fillRef>
+          <a:effectRef idx="2">
+            <a:schemeClr val="accent1"/>
+          </a:effectRef>
+          <a:fontRef idx="minor">
+            <a:schemeClr val="lt1"/>
+          </a:fontRef>
+        </p:style>
+        <p:txBody>
+          <a:bodyPr rtlCol="0" anchor="ctr"/>
+          <a:lstStyle/>
+          <a:p>
+            <a:pPr algn="ctr"/>
+          </a:p>
+        </p:txBody>
+      </p:sp>
+      <p:sp>
+        <p:nvSpPr>
+          <p:cNvPr id="6" name="Rounded Rectangle 5"/>
+          <p:cNvSpPr/>
+          <p:nvPr/>
+        </p:nvSpPr>
+        <p:spPr>
+          <a:xfrm>
+            <a:off x="594360" y="1490472"/>
+            <a:ext cx="438912" cy="438912"/>
+          </a:xfrm>
+          <a:prstGeom prst="roundRect">
+            <a:avLst>
+              <a:gd name="adj" fmla="val 12000"/>
+            </a:avLst>
+          </a:prstGeom>
+          <a:solidFill>
+            <a:srgbClr val="095292"/>
+          </a:solidFill>
+          <a:ln>
+            <a:noFill/>
+          </a:ln>
+        </p:spPr>
+        <p:style>
+          <a:lnRef idx="1">
+            <a:schemeClr val="accent1"/>
+          </a:lnRef>
+          <a:fillRef idx="3">
+            <a:schemeClr val="accent1"/>
+          </a:fillRef>
+          <a:effectRef idx="2">
+            <a:schemeClr val="accent1"/>
+          </a:effectRef>
+          <a:fontRef idx="minor">
+            <a:schemeClr val="lt1"/>
+          </a:fontRef>
+        </p:style>
+        <p:txBody>
+          <a:bodyPr rtlCol="0" anchor="ctr"/>
+          <a:lstStyle/>
+          <a:p>
+            <a:pPr algn="ctr"/>
+          </a:p>
+        </p:txBody>
+      </p:sp>
+      <p:sp>
+        <p:nvSpPr>
+          <p:cNvPr id="7" name="TextBox 6"/>
+          <p:cNvSpPr txBox="1"/>
+          <p:nvPr/>
+        </p:nvSpPr>
+        <p:spPr>
+          <a:xfrm>
+            <a:off x="594360" y="1490472"/>
+            <a:ext cx="438912" cy="438912"/>
+          </a:xfrm>
+          <a:prstGeom prst="rect">
+            <a:avLst/>
+          </a:prstGeom>
+          <a:noFill/>
+        </p:spPr>
+        <p:txBody>
+          <a:bodyPr wrap="square" anchor="ctr"/>
+          <a:lstStyle/>
+          <a:p>
+            <a:pPr algn="ctr"/>
+            <a:r>
+              <a:rPr sz="1600" b="1" i="0">
+                <a:solidFill>
+                  <a:srgbClr val="FFFFFF"/>
+                </a:solidFill>
+                <a:latin typeface="Calibri"/>
+              </a:rPr>
+              <a:t>1</a:t>
+            </a:r>
+          </a:p>
+        </p:txBody>
+      </p:sp>
+      <p:sp>
+        <p:nvSpPr>
+          <p:cNvPr id="8" name="TextBox 7"/>
+          <p:cNvSpPr txBox="1"/>
+          <p:nvPr/>
+        </p:nvSpPr>
+        <p:spPr>
+          <a:xfrm>
+            <a:off x="1188720" y="1325880"/>
+            <a:ext cx="10271455" cy="786384"/>
+          </a:xfrm>
+          <a:prstGeom prst="rect">
+            <a:avLst/>
+          </a:prstGeom>
+          <a:noFill/>
+        </p:spPr>
+        <p:txBody>
+          <a:bodyPr wrap="square" anchor="ctr"/>
+          <a:lstStyle/>
+          <a:p>
+            <a:r>
+              <a:rPr sz="1500" b="1" i="0">
+                <a:solidFill>
+                  <a:srgbClr val="095292"/>
+                </a:solidFill>
+                <a:latin typeface="Calibri"/>
+              </a:rPr>
+              <a:t>En Google Docs escriba el Product Backlog de VetCare con al menos ocho items redactados como historias de usuario cortas, cada uno con prioridad (Alta/Media/Baja) y una justificacion de valor para Huellitas en una linea.</a:t>
+            </a:r>
+          </a:p>
+        </p:txBody>
+      </p:sp>
+      <p:sp>
+        <p:nvSpPr>
+          <p:cNvPr id="9" name="Rounded Rectangle 8"/>
+          <p:cNvSpPr/>
+          <p:nvPr/>
+        </p:nvSpPr>
+        <p:spPr>
+          <a:xfrm>
+            <a:off x="457200" y="2276856"/>
+            <a:ext cx="11277295" cy="950976"/>
+          </a:xfrm>
+          <a:prstGeom prst="roundRect">
+            <a:avLst>
+              <a:gd name="adj" fmla="val 12000"/>
+            </a:avLst>
+          </a:prstGeom>
+          <a:solidFill>
+            <a:srgbClr val="E8F4FA"/>
+          </a:solidFill>
+          <a:ln>
+            <a:noFill/>
+          </a:ln>
+        </p:spPr>
+        <p:style>
+          <a:lnRef idx="1">
+            <a:schemeClr val="accent1"/>
+          </a:lnRef>
+          <a:fillRef idx="3">
+            <a:schemeClr val="accent1"/>
+          </a:fillRef>
+          <a:effectRef idx="2">
+            <a:schemeClr val="accent1"/>
+          </a:effectRef>
+          <a:fontRef idx="minor">
+            <a:schemeClr val="lt1"/>
+          </a:fontRef>
+        </p:style>
+        <p:txBody>
+          <a:bodyPr rtlCol="0" anchor="ctr"/>
+          <a:lstStyle/>
+          <a:p>
+            <a:pPr algn="ctr"/>
+          </a:p>
+        </p:txBody>
+      </p:sp>
+      <p:sp>
+        <p:nvSpPr>
+          <p:cNvPr id="10" name="Rounded Rectangle 9"/>
+          <p:cNvSpPr/>
+          <p:nvPr/>
+        </p:nvSpPr>
+        <p:spPr>
+          <a:xfrm>
+            <a:off x="594360" y="2532888"/>
+            <a:ext cx="438912" cy="438912"/>
+          </a:xfrm>
+          <a:prstGeom prst="roundRect">
+            <a:avLst>
+              <a:gd name="adj" fmla="val 12000"/>
+            </a:avLst>
+          </a:prstGeom>
+          <a:solidFill>
+            <a:srgbClr val="095292"/>
+          </a:solidFill>
+          <a:ln>
+            <a:noFill/>
+          </a:ln>
+        </p:spPr>
+        <p:style>
+          <a:lnRef idx="1">
+            <a:schemeClr val="accent1"/>
+          </a:lnRef>
+          <a:fillRef idx="3">
+            <a:schemeClr val="accent1"/>
+          </a:fillRef>
+          <a:effectRef idx="2">
+            <a:schemeClr val="accent1"/>
+          </a:effectRef>
+          <a:fontRef idx="minor">
+            <a:schemeClr val="lt1"/>
+          </a:fontRef>
+        </p:style>
+        <p:txBody>
+          <a:bodyPr rtlCol="0" anchor="ctr"/>
+          <a:lstStyle/>
+          <a:p>
+            <a:pPr algn="ctr"/>
+          </a:p>
+        </p:txBody>
+      </p:sp>
+      <p:sp>
+        <p:nvSpPr>
+          <p:cNvPr id="11" name="TextBox 10"/>
+          <p:cNvSpPr txBox="1"/>
+          <p:nvPr/>
+        </p:nvSpPr>
+        <p:spPr>
+          <a:xfrm>
+            <a:off x="594360" y="2532888"/>
+            <a:ext cx="438912" cy="438912"/>
+          </a:xfrm>
+          <a:prstGeom prst="rect">
+            <a:avLst/>
+          </a:prstGeom>
+          <a:noFill/>
+        </p:spPr>
+        <p:txBody>
+          <a:bodyPr wrap="square" anchor="ctr"/>
+          <a:lstStyle/>
+          <a:p>
+            <a:pPr algn="ctr"/>
+            <a:r>
+              <a:rPr sz="1600" b="1" i="0">
+                <a:solidFill>
+                  <a:srgbClr val="FFFFFF"/>
+                </a:solidFill>
+                <a:latin typeface="Calibri"/>
+              </a:rPr>
+              <a:t>2</a:t>
+            </a:r>
+          </a:p>
+        </p:txBody>
+      </p:sp>
+      <p:sp>
+        <p:nvSpPr>
+          <p:cNvPr id="12" name="TextBox 11"/>
+          <p:cNvSpPr txBox="1"/>
+          <p:nvPr/>
+        </p:nvSpPr>
+        <p:spPr>
+          <a:xfrm>
+            <a:off x="1188720" y="2368296"/>
+            <a:ext cx="10271455" cy="786384"/>
+          </a:xfrm>
+          <a:prstGeom prst="rect">
+            <a:avLst/>
+          </a:prstGeom>
+          <a:noFill/>
+        </p:spPr>
+        <p:txBody>
+          <a:bodyPr wrap="square" anchor="ctr"/>
+          <a:lstStyle/>
+          <a:p>
+            <a:r>
+              <a:rPr sz="1500" b="1" i="0">
+                <a:solidFill>
+                  <a:srgbClr val="095292"/>
+                </a:solidFill>
+                <a:latin typeface="Calibri"/>
+              </a:rPr>
+              <a:t>Priorice el backlog en orden de arriba hacia abajo y explique por escrito, en dos renglones, por que el primer item es el primero (pista: resuelve uno de los tres dolores de la clinica).</a:t>
+            </a:r>
+          </a:p>
+        </p:txBody>
+      </p:sp>
+      <p:sp>
+        <p:nvSpPr>
+          <p:cNvPr id="13" name="Rounded Rectangle 12"/>
+          <p:cNvSpPr/>
+          <p:nvPr/>
+        </p:nvSpPr>
+        <p:spPr>
+          <a:xfrm>
+            <a:off x="457200" y="3319272"/>
+            <a:ext cx="11277295" cy="950976"/>
+          </a:xfrm>
+          <a:prstGeom prst="roundRect">
+            <a:avLst>
+              <a:gd name="adj" fmla="val 12000"/>
+            </a:avLst>
+          </a:prstGeom>
+          <a:solidFill>
+            <a:srgbClr val="F2F2F2"/>
+          </a:solidFill>
+          <a:ln>
+            <a:noFill/>
+          </a:ln>
+        </p:spPr>
+        <p:style>
+          <a:lnRef idx="1">
+            <a:schemeClr val="accent1"/>
+          </a:lnRef>
+          <a:fillRef idx="3">
+            <a:schemeClr val="accent1"/>
+          </a:fillRef>
+          <a:effectRef idx="2">
+            <a:schemeClr val="accent1"/>
+          </a:effectRef>
+          <a:fontRef idx="minor">
+            <a:schemeClr val="lt1"/>
+          </a:fontRef>
+        </p:style>
+        <p:txBody>
+          <a:bodyPr rtlCol="0" anchor="ctr"/>
+          <a:lstStyle/>
+          <a:p>
+            <a:pPr algn="ctr"/>
+          </a:p>
+        </p:txBody>
+      </p:sp>
+      <p:sp>
+        <p:nvSpPr>
+          <p:cNvPr id="14" name="Rounded Rectangle 13"/>
+          <p:cNvSpPr/>
+          <p:nvPr/>
+        </p:nvSpPr>
+        <p:spPr>
+          <a:xfrm>
+            <a:off x="594360" y="3575304"/>
+            <a:ext cx="438912" cy="438912"/>
+          </a:xfrm>
+          <a:prstGeom prst="roundRect">
+            <a:avLst>
+              <a:gd name="adj" fmla="val 12000"/>
+            </a:avLst>
+          </a:prstGeom>
+          <a:solidFill>
+            <a:srgbClr val="095292"/>
+          </a:solidFill>
+          <a:ln>
+            <a:noFill/>
+          </a:ln>
+        </p:spPr>
+        <p:style>
+          <a:lnRef idx="1">
+            <a:schemeClr val="accent1"/>
+          </a:lnRef>
+          <a:fillRef idx="3">
+            <a:schemeClr val="accent1"/>
+          </a:fillRef>
+          <a:effectRef idx="2">
+            <a:schemeClr val="accent1"/>
+          </a:effectRef>
+          <a:fontRef idx="minor">
+            <a:schemeClr val="lt1"/>
+          </a:fontRef>
+        </p:style>
+        <p:txBody>
+          <a:bodyPr rtlCol="0" anchor="ctr"/>
+          <a:lstStyle/>
+          <a:p>
+            <a:pPr algn="ctr"/>
+          </a:p>
+        </p:txBody>
+      </p:sp>
+      <p:sp>
+        <p:nvSpPr>
+          <p:cNvPr id="15" name="TextBox 14"/>
+          <p:cNvSpPr txBox="1"/>
+          <p:nvPr/>
+        </p:nvSpPr>
+        <p:spPr>
+          <a:xfrm>
+            <a:off x="594360" y="3575304"/>
+            <a:ext cx="438912" cy="438912"/>
+          </a:xfrm>
+          <a:prstGeom prst="rect">
+            <a:avLst/>
+          </a:prstGeom>
+          <a:noFill/>
+        </p:spPr>
+        <p:txBody>
+          <a:bodyPr wrap="square" anchor="ctr"/>
+          <a:lstStyle/>
+          <a:p>
+            <a:pPr algn="ctr"/>
+            <a:r>
+              <a:rPr sz="1600" b="1" i="0">
+                <a:solidFill>
+                  <a:srgbClr val="FFFFFF"/>
+                </a:solidFill>
+                <a:latin typeface="Calibri"/>
+              </a:rPr>
+              <a:t>3</a:t>
+            </a:r>
+          </a:p>
+        </p:txBody>
+      </p:sp>
+      <p:sp>
+        <p:nvSpPr>
+          <p:cNvPr id="16" name="TextBox 15"/>
+          <p:cNvSpPr txBox="1"/>
+          <p:nvPr/>
+        </p:nvSpPr>
+        <p:spPr>
+          <a:xfrm>
+            <a:off x="1188720" y="3410712"/>
+            <a:ext cx="10271455" cy="786384"/>
+          </a:xfrm>
+          <a:prstGeom prst="rect">
+            <a:avLst/>
+          </a:prstGeom>
+          <a:noFill/>
+        </p:spPr>
+        <p:txBody>
+          <a:bodyPr wrap="square" anchor="ctr"/>
+          <a:lstStyle/>
+          <a:p>
+            <a:r>
+              <a:rPr sz="1500" b="1" i="0">
+                <a:solidFill>
+                  <a:srgbClr val="095292"/>
+                </a:solidFill>
+                <a:latin typeface="Calibri"/>
+              </a:rPr>
+              <a:t>Escriba tres historias completas con criterios de aceptacion en formato Dado/Cuando/Entonces, y asegurese de que cada historia tenga al menos un escenario alternativo o de error, no solo el camino feliz.</a:t>
+            </a:r>
+          </a:p>
+        </p:txBody>
+      </p:sp>
+      <p:sp>
+        <p:nvSpPr>
+          <p:cNvPr id="17" name="Rounded Rectangle 16"/>
+          <p:cNvSpPr/>
+          <p:nvPr/>
+        </p:nvSpPr>
+        <p:spPr>
+          <a:xfrm>
+            <a:off x="457200" y="4361688"/>
+            <a:ext cx="11277295" cy="950976"/>
+          </a:xfrm>
+          <a:prstGeom prst="roundRect">
+            <a:avLst>
+              <a:gd name="adj" fmla="val 12000"/>
+            </a:avLst>
+          </a:prstGeom>
+          <a:solidFill>
+            <a:srgbClr val="E8F4FA"/>
+          </a:solidFill>
+          <a:ln>
+            <a:noFill/>
+          </a:ln>
+        </p:spPr>
+        <p:style>
+          <a:lnRef idx="1">
+            <a:schemeClr val="accent1"/>
+          </a:lnRef>
+          <a:fillRef idx="3">
+            <a:schemeClr val="accent1"/>
+          </a:fillRef>
+          <a:effectRef idx="2">
+            <a:schemeClr val="accent1"/>
+          </a:effectRef>
+          <a:fontRef idx="minor">
+            <a:schemeClr val="lt1"/>
+          </a:fontRef>
+        </p:style>
+        <p:txBody>
+          <a:bodyPr rtlCol="0" anchor="ctr"/>
+          <a:lstStyle/>
+          <a:p>
+            <a:pPr algn="ctr"/>
+          </a:p>
+        </p:txBody>
+      </p:sp>
+      <p:sp>
+        <p:nvSpPr>
+          <p:cNvPr id="18" name="Rounded Rectangle 17"/>
+          <p:cNvSpPr/>
+          <p:nvPr/>
+        </p:nvSpPr>
+        <p:spPr>
+          <a:xfrm>
+            <a:off x="594360" y="4617720"/>
+            <a:ext cx="438912" cy="438912"/>
+          </a:xfrm>
+          <a:prstGeom prst="roundRect">
+            <a:avLst>
+              <a:gd name="adj" fmla="val 12000"/>
+            </a:avLst>
+          </a:prstGeom>
+          <a:solidFill>
+            <a:srgbClr val="095292"/>
+          </a:solidFill>
+          <a:ln>
+            <a:noFill/>
+          </a:ln>
+        </p:spPr>
+        <p:style>
+          <a:lnRef idx="1">
+            <a:schemeClr val="accent1"/>
+          </a:lnRef>
+          <a:fillRef idx="3">
+            <a:schemeClr val="accent1"/>
+          </a:fillRef>
+          <a:effectRef idx="2">
+            <a:schemeClr val="accent1"/>
+          </a:effectRef>
+          <a:fontRef idx="minor">
+            <a:schemeClr val="lt1"/>
+          </a:fontRef>
+        </p:style>
+        <p:txBody>
+          <a:bodyPr rtlCol="0" anchor="ctr"/>
+          <a:lstStyle/>
+          <a:p>
+            <a:pPr algn="ctr"/>
+          </a:p>
+        </p:txBody>
+      </p:sp>
+      <p:sp>
+        <p:nvSpPr>
+          <p:cNvPr id="19" name="TextBox 18"/>
+          <p:cNvSpPr txBox="1"/>
+          <p:nvPr/>
+        </p:nvSpPr>
+        <p:spPr>
+          <a:xfrm>
+            <a:off x="594360" y="4617720"/>
+            <a:ext cx="438912" cy="438912"/>
+          </a:xfrm>
+          <a:prstGeom prst="rect">
+            <a:avLst/>
+          </a:prstGeom>
+          <a:noFill/>
+        </p:spPr>
+        <p:txBody>
+          <a:bodyPr wrap="square" anchor="ctr"/>
+          <a:lstStyle/>
+          <a:p>
+            <a:pPr algn="ctr"/>
+            <a:r>
+              <a:rPr sz="1600" b="1" i="0">
+                <a:solidFill>
+                  <a:srgbClr val="FFFFFF"/>
+                </a:solidFill>
+                <a:latin typeface="Calibri"/>
+              </a:rPr>
+              <a:t>4</a:t>
+            </a:r>
+          </a:p>
+        </p:txBody>
+      </p:sp>
+      <p:sp>
+        <p:nvSpPr>
+          <p:cNvPr id="20" name="TextBox 19"/>
+          <p:cNvSpPr txBox="1"/>
+          <p:nvPr/>
+        </p:nvSpPr>
+        <p:spPr>
+          <a:xfrm>
+            <a:off x="1188720" y="4453128"/>
+            <a:ext cx="10271455" cy="786384"/>
+          </a:xfrm>
+          <a:prstGeom prst="rect">
+            <a:avLst/>
+          </a:prstGeom>
+          <a:noFill/>
+        </p:spPr>
+        <p:txBody>
+          <a:bodyPr wrap="square" anchor="ctr"/>
+          <a:lstStyle/>
+          <a:p>
+            <a:r>
+              <a:rPr sz="1500" b="1" i="0">
+                <a:solidFill>
+                  <a:srgbClr val="095292"/>
+                </a:solidFill>
+                <a:latin typeface="Calibri"/>
+              </a:rPr>
+              <a:t>Redacte la Definicion de Terminado para artefactos de diseño (por ejemplo: tiene diagrama en draw.io, tiene mockup, esta revisado por un compañero y tiene el visto bueno del cliente) y escribala en la cabecera del tablero.</a:t>
+            </a:r>
+          </a:p>
+        </p:txBody>
+      </p:sp>
+      <p:sp>
+        <p:nvSpPr>
+          <p:cNvPr id="21" name="Rounded Rectangle 20"/>
+          <p:cNvSpPr/>
+          <p:nvPr/>
+        </p:nvSpPr>
+        <p:spPr>
+          <a:xfrm>
+            <a:off x="457200" y="5404104"/>
+            <a:ext cx="11277295" cy="950976"/>
+          </a:xfrm>
+          <a:prstGeom prst="roundRect">
+            <a:avLst>
+              <a:gd name="adj" fmla="val 12000"/>
+            </a:avLst>
+          </a:prstGeom>
+          <a:solidFill>
+            <a:srgbClr val="F2F2F2"/>
+          </a:solidFill>
+          <a:ln>
+            <a:noFill/>
+          </a:ln>
+        </p:spPr>
+        <p:style>
+          <a:lnRef idx="1">
+            <a:schemeClr val="accent1"/>
+          </a:lnRef>
+          <a:fillRef idx="3">
+            <a:schemeClr val="accent1"/>
+          </a:fillRef>
+          <a:effectRef idx="2">
+            <a:schemeClr val="accent1"/>
+          </a:effectRef>
+          <a:fontRef idx="minor">
+            <a:schemeClr val="lt1"/>
+          </a:fontRef>
+        </p:style>
+        <p:txBody>
+          <a:bodyPr rtlCol="0" anchor="ctr"/>
+          <a:lstStyle/>
+          <a:p>
+            <a:pPr algn="ctr"/>
+          </a:p>
+        </p:txBody>
+      </p:sp>
+      <p:sp>
+        <p:nvSpPr>
+          <p:cNvPr id="22" name="Rounded Rectangle 21"/>
+          <p:cNvSpPr/>
+          <p:nvPr/>
+        </p:nvSpPr>
+        <p:spPr>
+          <a:xfrm>
+            <a:off x="594360" y="5660136"/>
+            <a:ext cx="438912" cy="438912"/>
+          </a:xfrm>
+          <a:prstGeom prst="roundRect">
+            <a:avLst>
+              <a:gd name="adj" fmla="val 12000"/>
+            </a:avLst>
+          </a:prstGeom>
+          <a:solidFill>
+            <a:srgbClr val="095292"/>
+          </a:solidFill>
+          <a:ln>
+            <a:noFill/>
+          </a:ln>
+        </p:spPr>
+        <p:style>
+          <a:lnRef idx="1">
+            <a:schemeClr val="accent1"/>
+          </a:lnRef>
+          <a:fillRef idx="3">
+            <a:schemeClr val="accent1"/>
+          </a:fillRef>
+          <a:effectRef idx="2">
+            <a:schemeClr val="accent1"/>
+          </a:effectRef>
+          <a:fontRef idx="minor">
+            <a:schemeClr val="lt1"/>
+          </a:fontRef>
+        </p:style>
+        <p:txBody>
+          <a:bodyPr rtlCol="0" anchor="ctr"/>
+          <a:lstStyle/>
+          <a:p>
+            <a:pPr algn="ctr"/>
+          </a:p>
+        </p:txBody>
+      </p:sp>
+      <p:sp>
+        <p:nvSpPr>
+          <p:cNvPr id="23" name="TextBox 22"/>
+          <p:cNvSpPr txBox="1"/>
+          <p:nvPr/>
+        </p:nvSpPr>
+        <p:spPr>
+          <a:xfrm>
+            <a:off x="594360" y="5660136"/>
+            <a:ext cx="438912" cy="438912"/>
+          </a:xfrm>
+          <a:prstGeom prst="rect">
+            <a:avLst/>
+          </a:prstGeom>
+          <a:noFill/>
+        </p:spPr>
+        <p:txBody>
+          <a:bodyPr wrap="square" anchor="ctr"/>
+          <a:lstStyle/>
+          <a:p>
+            <a:pPr algn="ctr"/>
+            <a:r>
+              <a:rPr sz="1600" b="1" i="0">
+                <a:solidFill>
+                  <a:srgbClr val="FFFFFF"/>
+                </a:solidFill>
+                <a:latin typeface="Calibri"/>
+              </a:rPr>
+              <a:t>5</a:t>
+            </a:r>
+          </a:p>
+        </p:txBody>
+      </p:sp>
+      <p:sp>
+        <p:nvSpPr>
+          <p:cNvPr id="24" name="TextBox 23"/>
+          <p:cNvSpPr txBox="1"/>
+          <p:nvPr/>
+        </p:nvSpPr>
+        <p:spPr>
+          <a:xfrm>
+            <a:off x="1188720" y="5495544"/>
+            <a:ext cx="10271455" cy="786384"/>
+          </a:xfrm>
+          <a:prstGeom prst="rect">
+            <a:avLst/>
+          </a:prstGeom>
+          <a:noFill/>
+        </p:spPr>
+        <p:txBody>
+          <a:bodyPr wrap="square" anchor="ctr"/>
+          <a:lstStyle/>
+          <a:p>
+            <a:r>
+              <a:rPr sz="1400" b="1" i="0">
+                <a:solidFill>
+                  <a:srgbClr val="095292"/>
+                </a:solidFill>
+                <a:latin typeface="Calibri"/>
+              </a:rPr>
+              <a:t>En draw.io o Excalidraw arme el tablero con las columnas Por hacer / Modelando / En revision del cliente / Aprobado, ponga el limite de trabajo en curso en dos para las columnas del medio, distribuya las tarjetas en tres sprints con su objetivo y entregable de diseño, exporte a PDF y suba a la plataforma del curso.</a:t>
+            </a:r>
+          </a:p>
+        </p:txBody>
+      </p:sp>
+      <p:sp>
+        <p:nvSpPr>
+          <p:cNvPr id="25" name="TextBox 24"/>
+          <p:cNvSpPr txBox="1"/>
+          <p:nvPr/>
+        </p:nvSpPr>
+        <p:spPr>
+          <a:xfrm>
+            <a:off x="11185855" y="6473952"/>
+            <a:ext cx="640080" cy="274320"/>
+          </a:xfrm>
+          <a:prstGeom prst="rect">
+            <a:avLst/>
+          </a:prstGeom>
+          <a:noFill/>
+        </p:spPr>
+        <p:txBody>
+          <a:bodyPr wrap="square">
+            <a:spAutoFit/>
+          </a:bodyPr>
+          <a:lstStyle/>
+          <a:p>
+            <a:pPr algn="r"/>
+            <a:r>
+              <a:rPr sz="1100" b="0" i="0">
+                <a:solidFill>
+                  <a:srgbClr val="666666"/>
+                </a:solidFill>
+                <a:latin typeface="Calibri"/>
+              </a:rPr>
+              <a:t>14</a:t>
+            </a:r>
+          </a:p>
+        </p:txBody>
+      </p:sp>
+    </p:spTree>
+  </p:cSld>
+  <p:clrMapOvr>
+    <a:masterClrMapping/>
+  </p:clrMapOvr>
+</p:sld>
+</file>
+
+<file path=ppt/slides/slide15.xml><?xml version="1.0" encoding="utf-8"?>
+<p:sld xmlns:a="http://schemas.openxmlformats.org/drawingml/2006/main" xmlns:p="http://schemas.openxmlformats.org/presentationml/2006/main" xmlns:r="http://schemas.openxmlformats.org/officeDocument/2006/relationships">
+  <p:cSld>
+    <p:bg>
+      <p:bgPr>
+        <a:solidFill>
+          <a:srgbClr val="FFFFFF"/>
+        </a:solidFill>
+        <a:effectLst/>
+      </p:bgPr>
+    </p:bg>
+    <p:spTree>
+      <p:nvGrpSpPr>
+        <p:cNvPr id="1" name=""/>
+        <p:cNvGrpSpPr/>
+        <p:nvPr/>
+      </p:nvGrpSpPr>
+      <p:grpSpPr/>
+      <p:sp>
+        <p:nvSpPr>
+          <p:cNvPr id="2" name="Rectangle 1"/>
+          <p:cNvSpPr/>
+          <p:nvPr/>
+        </p:nvSpPr>
+        <p:spPr>
+          <a:xfrm>
+            <a:off x="0" y="0"/>
+            <a:ext cx="12191695" cy="960120"/>
+          </a:xfrm>
+          <a:prstGeom prst="rect">
+            <a:avLst/>
+          </a:prstGeom>
+          <a:solidFill>
+            <a:srgbClr val="095292"/>
+          </a:solidFill>
+          <a:ln>
+            <a:noFill/>
+          </a:ln>
+        </p:spPr>
+        <p:style>
+          <a:lnRef idx="1">
+            <a:schemeClr val="accent1"/>
+          </a:lnRef>
+          <a:fillRef idx="3">
+            <a:schemeClr val="accent1"/>
+          </a:fillRef>
+          <a:effectRef idx="2">
+            <a:schemeClr val="accent1"/>
+          </a:effectRef>
+          <a:fontRef idx="minor">
+            <a:schemeClr val="lt1"/>
+          </a:fontRef>
+        </p:style>
+        <p:txBody>
+          <a:bodyPr rtlCol="0" anchor="ctr"/>
+          <a:lstStyle/>
+          <a:p>
+            <a:pPr algn="ctr"/>
+          </a:p>
+        </p:txBody>
+      </p:sp>
+      <p:sp>
+        <p:nvSpPr>
+          <p:cNvPr id="3" name="Rectangle 2"/>
+          <p:cNvSpPr/>
+          <p:nvPr/>
+        </p:nvSpPr>
+        <p:spPr>
+          <a:xfrm>
+            <a:off x="0" y="960120"/>
+            <a:ext cx="12191695" cy="41148"/>
+          </a:xfrm>
+          <a:prstGeom prst="rect">
+            <a:avLst/>
+          </a:prstGeom>
+          <a:solidFill>
+            <a:srgbClr val="FFD000"/>
+          </a:solidFill>
+          <a:ln>
+            <a:noFill/>
+          </a:ln>
+        </p:spPr>
+        <p:style>
+          <a:lnRef idx="1">
+            <a:schemeClr val="accent1"/>
+          </a:lnRef>
+          <a:fillRef idx="3">
+            <a:schemeClr val="accent1"/>
+          </a:fillRef>
+          <a:effectRef idx="2">
+            <a:schemeClr val="accent1"/>
+          </a:effectRef>
+          <a:fontRef idx="minor">
+            <a:schemeClr val="lt1"/>
+          </a:fontRef>
+        </p:style>
+        <p:txBody>
+          <a:bodyPr rtlCol="0" anchor="ctr"/>
+          <a:lstStyle/>
+          <a:p>
+            <a:pPr algn="ctr"/>
+          </a:p>
+        </p:txBody>
+      </p:sp>
+      <p:sp>
+        <p:nvSpPr>
+          <p:cNvPr id="4" name="TextBox 3"/>
+          <p:cNvSpPr txBox="1"/>
+          <p:nvPr/>
+        </p:nvSpPr>
+        <p:spPr>
+          <a:xfrm>
+            <a:off x="457200" y="164592"/>
+            <a:ext cx="11277295" cy="502920"/>
+          </a:xfrm>
+          <a:prstGeom prst="rect">
+            <a:avLst/>
+          </a:prstGeom>
+          <a:noFill/>
+        </p:spPr>
+        <p:txBody>
+          <a:bodyPr wrap="square">
+            <a:spAutoFit/>
+          </a:bodyPr>
+          <a:lstStyle/>
+          <a:p>
+            <a:r>
+              <a:rPr sz="2600" b="1" i="0">
+                <a:solidFill>
+                  <a:srgbClr val="FFFFFF"/>
+                </a:solidFill>
+                <a:latin typeface="Calibri"/>
+              </a:rPr>
+              <a:t>Antes de entregar — autochequeo</a:t>
+            </a:r>
+          </a:p>
+        </p:txBody>
+      </p:sp>
+      <p:sp>
+        <p:nvSpPr>
+          <p:cNvPr id="5" name="Rounded Rectangle 4"/>
+          <p:cNvSpPr/>
+          <p:nvPr/>
+        </p:nvSpPr>
+        <p:spPr>
+          <a:xfrm>
+            <a:off x="457200" y="1261872"/>
+            <a:ext cx="11277295" cy="566928"/>
+          </a:xfrm>
+          <a:prstGeom prst="roundRect">
+            <a:avLst>
+              <a:gd name="adj" fmla="val 12000"/>
+            </a:avLst>
+          </a:prstGeom>
+          <a:solidFill>
+            <a:srgbClr val="F2F2F2"/>
+          </a:solidFill>
+          <a:ln>
+            <a:noFill/>
+          </a:ln>
+        </p:spPr>
+        <p:style>
+          <a:lnRef idx="1">
+            <a:schemeClr val="accent1"/>
+          </a:lnRef>
+          <a:fillRef idx="3">
+            <a:schemeClr val="accent1"/>
+          </a:fillRef>
+          <a:effectRef idx="2">
+            <a:schemeClr val="accent1"/>
+          </a:effectRef>
+          <a:fontRef idx="minor">
+            <a:schemeClr val="lt1"/>
+          </a:fontRef>
+        </p:style>
+        <p:txBody>
+          <a:bodyPr rtlCol="0" anchor="ctr"/>
+          <a:lstStyle/>
+          <a:p>
+            <a:pPr algn="ctr"/>
+          </a:p>
+        </p:txBody>
+      </p:sp>
+      <p:sp>
+        <p:nvSpPr>
+          <p:cNvPr id="6" name="Rectangle 5"/>
+          <p:cNvSpPr/>
+          <p:nvPr/>
+        </p:nvSpPr>
+        <p:spPr>
+          <a:xfrm>
+            <a:off x="640080" y="1408175"/>
+            <a:ext cx="274320" cy="274320"/>
+          </a:xfrm>
+          <a:prstGeom prst="rect">
+            <a:avLst/>
+          </a:prstGeom>
+          <a:solidFill>
+            <a:srgbClr val="FFFFFF"/>
+          </a:solidFill>
+          <a:ln>
+            <a:solidFill>
+              <a:srgbClr val="333333"/>
+            </a:solidFill>
+          </a:ln>
+        </p:spPr>
+        <p:style>
+          <a:lnRef idx="1">
+            <a:schemeClr val="accent1"/>
+          </a:lnRef>
+          <a:fillRef idx="3">
+            <a:schemeClr val="accent1"/>
+          </a:fillRef>
+          <a:effectRef idx="2">
+            <a:schemeClr val="accent1"/>
+          </a:effectRef>
+          <a:fontRef idx="minor">
+            <a:schemeClr val="lt1"/>
+          </a:fontRef>
+        </p:style>
+        <p:txBody>
+          <a:bodyPr rtlCol="0" anchor="ctr"/>
+          <a:lstStyle/>
+          <a:p>
+            <a:pPr algn="ctr"/>
+          </a:p>
+        </p:txBody>
+      </p:sp>
+      <p:sp>
+        <p:nvSpPr>
+          <p:cNvPr id="7" name="Rectangle 6"/>
+          <p:cNvSpPr/>
+          <p:nvPr/>
+        </p:nvSpPr>
+        <p:spPr>
+          <a:xfrm>
+            <a:off x="640080" y="1408175"/>
+            <a:ext cx="73152" cy="274320"/>
+          </a:xfrm>
+          <a:prstGeom prst="rect">
+            <a:avLst/>
+          </a:prstGeom>
+          <a:solidFill>
+            <a:srgbClr val="269CCB"/>
+          </a:solidFill>
+          <a:ln>
+            <a:noFill/>
+          </a:ln>
+        </p:spPr>
+        <p:style>
+          <a:lnRef idx="1">
+            <a:schemeClr val="accent1"/>
+          </a:lnRef>
+          <a:fillRef idx="3">
+            <a:schemeClr val="accent1"/>
+          </a:fillRef>
+          <a:effectRef idx="2">
+            <a:schemeClr val="accent1"/>
+          </a:effectRef>
+          <a:fontRef idx="minor">
+            <a:schemeClr val="lt1"/>
+          </a:fontRef>
+        </p:style>
+        <p:txBody>
+          <a:bodyPr rtlCol="0" anchor="ctr"/>
+          <a:lstStyle/>
+          <a:p>
+            <a:pPr algn="ctr"/>
+          </a:p>
+        </p:txBody>
+      </p:sp>
+      <p:sp>
+        <p:nvSpPr>
+          <p:cNvPr id="8" name="TextBox 7"/>
+          <p:cNvSpPr txBox="1"/>
+          <p:nvPr/>
+        </p:nvSpPr>
+        <p:spPr>
+          <a:xfrm>
+            <a:off x="1097280" y="1353312"/>
+            <a:ext cx="10362895" cy="402336"/>
+          </a:xfrm>
+          <a:prstGeom prst="rect">
+            <a:avLst/>
+          </a:prstGeom>
+          <a:noFill/>
+        </p:spPr>
+        <p:txBody>
+          <a:bodyPr wrap="square" anchor="ctr"/>
+          <a:lstStyle/>
+          <a:p>
+            <a:r>
+              <a:rPr sz="1500" b="0" i="0">
+                <a:solidFill>
+                  <a:srgbClr val="333333"/>
+                </a:solidFill>
+                <a:latin typeface="Calibri"/>
+              </a:rPr>
+              <a:t>Si su sprint 1 se llama 'analisis' y el sprint 2 'diseño', que le va a mostrar a la veterinaria al terminar el sprint 1 que ella pueda entender y criticar?</a:t>
+            </a:r>
+          </a:p>
+        </p:txBody>
+      </p:sp>
+      <p:sp>
+        <p:nvSpPr>
+          <p:cNvPr id="9" name="Rounded Rectangle 8"/>
+          <p:cNvSpPr/>
+          <p:nvPr/>
+        </p:nvSpPr>
+        <p:spPr>
+          <a:xfrm>
+            <a:off x="457200" y="1938528"/>
+            <a:ext cx="11277295" cy="566928"/>
+          </a:xfrm>
+          <a:prstGeom prst="roundRect">
+            <a:avLst>
+              <a:gd name="adj" fmla="val 12000"/>
+            </a:avLst>
+          </a:prstGeom>
+          <a:solidFill>
+            <a:srgbClr val="F2F2F2"/>
+          </a:solidFill>
+          <a:ln>
+            <a:noFill/>
+          </a:ln>
+        </p:spPr>
+        <p:style>
+          <a:lnRef idx="1">
+            <a:schemeClr val="accent1"/>
+          </a:lnRef>
+          <a:fillRef idx="3">
+            <a:schemeClr val="accent1"/>
+          </a:fillRef>
+          <a:effectRef idx="2">
+            <a:schemeClr val="accent1"/>
+          </a:effectRef>
+          <a:fontRef idx="minor">
+            <a:schemeClr val="lt1"/>
+          </a:fontRef>
+        </p:style>
+        <p:txBody>
+          <a:bodyPr rtlCol="0" anchor="ctr"/>
+          <a:lstStyle/>
+          <a:p>
+            <a:pPr algn="ctr"/>
+          </a:p>
+        </p:txBody>
+      </p:sp>
+      <p:sp>
+        <p:nvSpPr>
+          <p:cNvPr id="10" name="Rectangle 9"/>
+          <p:cNvSpPr/>
+          <p:nvPr/>
+        </p:nvSpPr>
+        <p:spPr>
+          <a:xfrm>
+            <a:off x="640080" y="2084832"/>
+            <a:ext cx="274320" cy="274320"/>
+          </a:xfrm>
+          <a:prstGeom prst="rect">
+            <a:avLst/>
+          </a:prstGeom>
+          <a:solidFill>
+            <a:srgbClr val="FFFFFF"/>
+          </a:solidFill>
+          <a:ln>
+            <a:solidFill>
+              <a:srgbClr val="333333"/>
+            </a:solidFill>
+          </a:ln>
+        </p:spPr>
+        <p:style>
+          <a:lnRef idx="1">
+            <a:schemeClr val="accent1"/>
+          </a:lnRef>
+          <a:fillRef idx="3">
+            <a:schemeClr val="accent1"/>
+          </a:fillRef>
+          <a:effectRef idx="2">
+            <a:schemeClr val="accent1"/>
+          </a:effectRef>
+          <a:fontRef idx="minor">
+            <a:schemeClr val="lt1"/>
+          </a:fontRef>
+        </p:style>
+        <p:txBody>
+          <a:bodyPr rtlCol="0" anchor="ctr"/>
+          <a:lstStyle/>
+          <a:p>
+            <a:pPr algn="ctr"/>
+          </a:p>
+        </p:txBody>
+      </p:sp>
+      <p:sp>
+        <p:nvSpPr>
+          <p:cNvPr id="11" name="Rectangle 10"/>
+          <p:cNvSpPr/>
+          <p:nvPr/>
+        </p:nvSpPr>
+        <p:spPr>
+          <a:xfrm>
+            <a:off x="640080" y="2084832"/>
+            <a:ext cx="73152" cy="274320"/>
+          </a:xfrm>
+          <a:prstGeom prst="rect">
+            <a:avLst/>
+          </a:prstGeom>
+          <a:solidFill>
+            <a:srgbClr val="269CCB"/>
+          </a:solidFill>
+          <a:ln>
+            <a:noFill/>
+          </a:ln>
+        </p:spPr>
+        <p:style>
+          <a:lnRef idx="1">
+            <a:schemeClr val="accent1"/>
+          </a:lnRef>
+          <a:fillRef idx="3">
+            <a:schemeClr val="accent1"/>
+          </a:fillRef>
+          <a:effectRef idx="2">
+            <a:schemeClr val="accent1"/>
+          </a:effectRef>
+          <a:fontRef idx="minor">
+            <a:schemeClr val="lt1"/>
+          </a:fontRef>
+        </p:style>
+        <p:txBody>
+          <a:bodyPr rtlCol="0" anchor="ctr"/>
+          <a:lstStyle/>
+          <a:p>
+            <a:pPr algn="ctr"/>
+          </a:p>
+        </p:txBody>
+      </p:sp>
+      <p:sp>
+        <p:nvSpPr>
+          <p:cNvPr id="12" name="TextBox 11"/>
+          <p:cNvSpPr txBox="1"/>
+          <p:nvPr/>
+        </p:nvSpPr>
+        <p:spPr>
+          <a:xfrm>
+            <a:off x="1097280" y="2029968"/>
+            <a:ext cx="10362895" cy="402336"/>
+          </a:xfrm>
+          <a:prstGeom prst="rect">
+            <a:avLst/>
+          </a:prstGeom>
+          <a:noFill/>
+        </p:spPr>
+        <p:txBody>
+          <a:bodyPr wrap="square" anchor="ctr"/>
+          <a:lstStyle/>
+          <a:p>
+            <a:r>
+              <a:rPr sz="1500" b="0" i="0">
+                <a:solidFill>
+                  <a:srgbClr val="333333"/>
+                </a:solidFill>
+                <a:latin typeface="Calibri"/>
+              </a:rPr>
+              <a:t>Sus criterios de aceptacion describen solo el camino feliz? Que pasa si la mascota no existe, si el nombre esta repetido o si la conexion se cae?</a:t>
+            </a:r>
+          </a:p>
+        </p:txBody>
+      </p:sp>
+      <p:sp>
+        <p:nvSpPr>
+          <p:cNvPr id="13" name="Rounded Rectangle 12"/>
+          <p:cNvSpPr/>
+          <p:nvPr/>
+        </p:nvSpPr>
+        <p:spPr>
+          <a:xfrm>
+            <a:off x="457200" y="2615184"/>
+            <a:ext cx="11277295" cy="566928"/>
+          </a:xfrm>
+          <a:prstGeom prst="roundRect">
+            <a:avLst>
+              <a:gd name="adj" fmla="val 12000"/>
+            </a:avLst>
+          </a:prstGeom>
+          <a:solidFill>
+            <a:srgbClr val="F2F2F2"/>
+          </a:solidFill>
+          <a:ln>
+            <a:noFill/>
+          </a:ln>
+        </p:spPr>
+        <p:style>
+          <a:lnRef idx="1">
+            <a:schemeClr val="accent1"/>
+          </a:lnRef>
+          <a:fillRef idx="3">
+            <a:schemeClr val="accent1"/>
+          </a:fillRef>
+          <a:effectRef idx="2">
+            <a:schemeClr val="accent1"/>
+          </a:effectRef>
+          <a:fontRef idx="minor">
+            <a:schemeClr val="lt1"/>
+          </a:fontRef>
+        </p:style>
+        <p:txBody>
+          <a:bodyPr rtlCol="0" anchor="ctr"/>
+          <a:lstStyle/>
+          <a:p>
+            <a:pPr algn="ctr"/>
+          </a:p>
+        </p:txBody>
+      </p:sp>
+      <p:sp>
+        <p:nvSpPr>
+          <p:cNvPr id="14" name="Rectangle 13"/>
+          <p:cNvSpPr/>
+          <p:nvPr/>
+        </p:nvSpPr>
+        <p:spPr>
+          <a:xfrm>
+            <a:off x="640080" y="2761488"/>
+            <a:ext cx="274320" cy="274320"/>
+          </a:xfrm>
+          <a:prstGeom prst="rect">
+            <a:avLst/>
+          </a:prstGeom>
+          <a:solidFill>
+            <a:srgbClr val="FFFFFF"/>
+          </a:solidFill>
+          <a:ln>
+            <a:solidFill>
+              <a:srgbClr val="333333"/>
+            </a:solidFill>
+          </a:ln>
+        </p:spPr>
+        <p:style>
+          <a:lnRef idx="1">
+            <a:schemeClr val="accent1"/>
+          </a:lnRef>
+          <a:fillRef idx="3">
+            <a:schemeClr val="accent1"/>
+          </a:fillRef>
+          <a:effectRef idx="2">
+            <a:schemeClr val="accent1"/>
+          </a:effectRef>
+          <a:fontRef idx="minor">
+            <a:schemeClr val="lt1"/>
+          </a:fontRef>
+        </p:style>
+        <p:txBody>
+          <a:bodyPr rtlCol="0" anchor="ctr"/>
+          <a:lstStyle/>
+          <a:p>
+            <a:pPr algn="ctr"/>
+          </a:p>
+        </p:txBody>
+      </p:sp>
+      <p:sp>
+        <p:nvSpPr>
+          <p:cNvPr id="15" name="Rectangle 14"/>
+          <p:cNvSpPr/>
+          <p:nvPr/>
+        </p:nvSpPr>
+        <p:spPr>
+          <a:xfrm>
+            <a:off x="640080" y="2761488"/>
+            <a:ext cx="73152" cy="274320"/>
+          </a:xfrm>
+          <a:prstGeom prst="rect">
+            <a:avLst/>
+          </a:prstGeom>
+          <a:solidFill>
+            <a:srgbClr val="269CCB"/>
+          </a:solidFill>
+          <a:ln>
+            <a:noFill/>
+          </a:ln>
+        </p:spPr>
+        <p:style>
+          <a:lnRef idx="1">
+            <a:schemeClr val="accent1"/>
+          </a:lnRef>
+          <a:fillRef idx="3">
+            <a:schemeClr val="accent1"/>
+          </a:fillRef>
+          <a:effectRef idx="2">
+            <a:schemeClr val="accent1"/>
+          </a:effectRef>
+          <a:fontRef idx="minor">
+            <a:schemeClr val="lt1"/>
+          </a:fontRef>
+        </p:style>
+        <p:txBody>
+          <a:bodyPr rtlCol="0" anchor="ctr"/>
+          <a:lstStyle/>
+          <a:p>
+            <a:pPr algn="ctr"/>
+          </a:p>
+        </p:txBody>
+      </p:sp>
+      <p:sp>
+        <p:nvSpPr>
+          <p:cNvPr id="16" name="TextBox 15"/>
+          <p:cNvSpPr txBox="1"/>
+          <p:nvPr/>
+        </p:nvSpPr>
+        <p:spPr>
+          <a:xfrm>
+            <a:off x="1097280" y="2706624"/>
+            <a:ext cx="10362895" cy="402336"/>
+          </a:xfrm>
+          <a:prstGeom prst="rect">
+            <a:avLst/>
+          </a:prstGeom>
+          <a:noFill/>
+        </p:spPr>
+        <p:txBody>
+          <a:bodyPr wrap="square" anchor="ctr"/>
+          <a:lstStyle/>
+          <a:p>
+            <a:r>
+              <a:rPr sz="1500" b="0" i="0">
+                <a:solidFill>
+                  <a:srgbClr val="333333"/>
+                </a:solidFill>
+                <a:latin typeface="Calibri"/>
+              </a:rPr>
+              <a:t>Su Definicion de Terminado se puede verificar mirando el tablero, o incluye frases como 'que quede bien hecho' que nadie puede comprobar?</a:t>
+            </a:r>
+          </a:p>
+        </p:txBody>
+      </p:sp>
+      <p:sp>
+        <p:nvSpPr>
+          <p:cNvPr id="17" name="TextBox 16"/>
+          <p:cNvSpPr txBox="1"/>
+          <p:nvPr/>
+        </p:nvSpPr>
+        <p:spPr>
+          <a:xfrm>
+            <a:off x="11185855" y="6473952"/>
+            <a:ext cx="640080" cy="274320"/>
+          </a:xfrm>
+          <a:prstGeom prst="rect">
+            <a:avLst/>
+          </a:prstGeom>
+          <a:noFill/>
+        </p:spPr>
+        <p:txBody>
+          <a:bodyPr wrap="square">
+            <a:spAutoFit/>
+          </a:bodyPr>
+          <a:lstStyle/>
+          <a:p>
+            <a:pPr algn="r"/>
+            <a:r>
+              <a:rPr sz="1100" b="0" i="0">
+                <a:solidFill>
+                  <a:srgbClr val="666666"/>
+                </a:solidFill>
+                <a:latin typeface="Calibri"/>
+              </a:rPr>
+              <a:t>15</a:t>
+            </a:r>
+          </a:p>
+        </p:txBody>
+      </p:sp>
+    </p:spTree>
+  </p:cSld>
+  <p:clrMapOvr>
+    <a:masterClrMapping/>
+  </p:clrMapOvr>
+</p:sld>
+</file>
+
+<file path=ppt/slides/slide16.xml><?xml version="1.0" encoding="utf-8"?>
+<p:sld xmlns:a="http://schemas.openxmlformats.org/drawingml/2006/main" xmlns:p="http://schemas.openxmlformats.org/presentationml/2006/main" xmlns:r="http://schemas.openxmlformats.org/officeDocument/2006/relationships">
+  <p:cSld>
+    <p:bg>
+      <p:bgPr>
+        <a:solidFill>
+          <a:srgbClr val="FFFFFF"/>
+        </a:solidFill>
+        <a:effectLst/>
+      </p:bgPr>
+    </p:bg>
+    <p:spTree>
+      <p:nvGrpSpPr>
+        <p:cNvPr id="1" name=""/>
+        <p:cNvGrpSpPr/>
+        <p:nvPr/>
+      </p:nvGrpSpPr>
+      <p:grpSpPr/>
+      <p:sp>
+        <p:nvSpPr>
+          <p:cNvPr id="2" name="Rectangle 1"/>
+          <p:cNvSpPr/>
+          <p:nvPr/>
+        </p:nvSpPr>
+        <p:spPr>
+          <a:xfrm>
+            <a:off x="0" y="0"/>
+            <a:ext cx="12191695" cy="960120"/>
+          </a:xfrm>
+          <a:prstGeom prst="rect">
+            <a:avLst/>
+          </a:prstGeom>
+          <a:solidFill>
+            <a:srgbClr val="095292"/>
+          </a:solidFill>
+          <a:ln>
+            <a:noFill/>
+          </a:ln>
+        </p:spPr>
+        <p:style>
+          <a:lnRef idx="1">
+            <a:schemeClr val="accent1"/>
+          </a:lnRef>
+          <a:fillRef idx="3">
+            <a:schemeClr val="accent1"/>
+          </a:fillRef>
+          <a:effectRef idx="2">
+            <a:schemeClr val="accent1"/>
+          </a:effectRef>
+          <a:fontRef idx="minor">
+            <a:schemeClr val="lt1"/>
+          </a:fontRef>
+        </p:style>
+        <p:txBody>
+          <a:bodyPr rtlCol="0" anchor="ctr"/>
+          <a:lstStyle/>
+          <a:p>
+            <a:pPr algn="ctr"/>
+          </a:p>
+        </p:txBody>
+      </p:sp>
+      <p:sp>
+        <p:nvSpPr>
+          <p:cNvPr id="3" name="Rectangle 2"/>
+          <p:cNvSpPr/>
+          <p:nvPr/>
+        </p:nvSpPr>
+        <p:spPr>
+          <a:xfrm>
+            <a:off x="0" y="960120"/>
+            <a:ext cx="12191695" cy="41148"/>
+          </a:xfrm>
+          <a:prstGeom prst="rect">
+            <a:avLst/>
+          </a:prstGeom>
+          <a:solidFill>
+            <a:srgbClr val="FFD000"/>
+          </a:solidFill>
+          <a:ln>
+            <a:noFill/>
+          </a:ln>
+        </p:spPr>
+        <p:style>
+          <a:lnRef idx="1">
+            <a:schemeClr val="accent1"/>
+          </a:lnRef>
+          <a:fillRef idx="3">
+            <a:schemeClr val="accent1"/>
+          </a:fillRef>
+          <a:effectRef idx="2">
+            <a:schemeClr val="accent1"/>
+          </a:effectRef>
+          <a:fontRef idx="minor">
+            <a:schemeClr val="lt1"/>
+          </a:fontRef>
+        </p:style>
+        <p:txBody>
+          <a:bodyPr rtlCol="0" anchor="ctr"/>
+          <a:lstStyle/>
+          <a:p>
+            <a:pPr algn="ctr"/>
+          </a:p>
+        </p:txBody>
+      </p:sp>
+      <p:sp>
+        <p:nvSpPr>
+          <p:cNvPr id="4" name="TextBox 3"/>
+          <p:cNvSpPr txBox="1"/>
+          <p:nvPr/>
+        </p:nvSpPr>
+        <p:spPr>
+          <a:xfrm>
+            <a:off x="457200" y="164592"/>
+            <a:ext cx="11277295" cy="502920"/>
+          </a:xfrm>
+          <a:prstGeom prst="rect">
+            <a:avLst/>
+          </a:prstGeom>
+          <a:noFill/>
+        </p:spPr>
+        <p:txBody>
+          <a:bodyPr wrap="square">
+            <a:spAutoFit/>
+          </a:bodyPr>
+          <a:lstStyle/>
+          <a:p>
+            <a:r>
+              <a:rPr sz="2600" b="1" i="0">
+                <a:solidFill>
+                  <a:srgbClr val="FFFFFF"/>
+                </a:solidFill>
+                <a:latin typeface="Calibri"/>
+              </a:rPr>
+              <a:t>Criterios de exito / entregable</a:t>
+            </a:r>
+          </a:p>
+        </p:txBody>
+      </p:sp>
+      <p:sp>
+        <p:nvSpPr>
+          <p:cNvPr id="5" name="TextBox 4"/>
+          <p:cNvSpPr txBox="1"/>
+          <p:nvPr/>
+        </p:nvSpPr>
+        <p:spPr>
+          <a:xfrm>
+            <a:off x="457200" y="1170432"/>
+            <a:ext cx="11277295" cy="5230368"/>
+          </a:xfrm>
+          <a:prstGeom prst="rect">
+            <a:avLst/>
+          </a:prstGeom>
+          <a:noFill/>
+        </p:spPr>
+        <p:txBody>
+          <a:bodyPr wrap="square">
+            <a:spAutoFit/>
+          </a:bodyPr>
+          <a:lstStyle/>
+          <a:p>
+            <a:pPr>
+              <a:spcAft>
+                <a:spcPts val="800"/>
+              </a:spcAft>
+            </a:pPr>
+            <a:r>
+              <a:rPr sz="2000" b="0" i="0">
+                <a:solidFill>
+                  <a:srgbClr val="333333"/>
+                </a:solidFill>
+                <a:latin typeface="Calibri"/>
+              </a:rPr>
+              <a:t>–   </a:t>
+            </a:r>
+            <a:r>
+              <a:rPr sz="2000" b="1" i="0">
+                <a:solidFill>
+                  <a:srgbClr val="333333"/>
+                </a:solidFill>
+                <a:latin typeface="Calibri"/>
+              </a:rPr>
+              <a:t>Entregable:</a:t>
+            </a:r>
+            <a:r>
+              <a:rPr sz="2000" b="0" i="0">
+                <a:solidFill>
+                  <a:srgbClr val="333333"/>
+                </a:solidFill>
+                <a:latin typeface="Calibri"/>
+              </a:rPr>
+              <a:t> Un tablero en draw.io o Excalidraw con el Product Backlog priorizado de VetCare y las columnas de flujo con limite de trabajo en curso, mas un documento con el plan de tres sprints (objetivo y entregable de diseño de cada uno), la Definicion de Terminado y tres historias de usuario con criterios en formato Dado/Cuando/Entonces.</a:t>
+            </a:r>
+          </a:p>
+          <a:p>
+            <a:pPr>
+              <a:spcAft>
+                <a:spcPts val="800"/>
+              </a:spcAft>
+            </a:pPr>
+            <a:r>
+              <a:rPr sz="2000" b="0" i="0">
+                <a:solidFill>
+                  <a:srgbClr val="333333"/>
+                </a:solidFill>
+                <a:latin typeface="Calibri"/>
+              </a:rPr>
+              <a:t>–   </a:t>
+            </a:r>
+            <a:r>
+              <a:rPr sz="2000" b="1" i="0">
+                <a:solidFill>
+                  <a:srgbClr val="333333"/>
+                </a:solidFill>
+                <a:latin typeface="Calibri"/>
+              </a:rPr>
+              <a:t>Exito:</a:t>
+            </a:r>
+            <a:r>
+              <a:rPr sz="2000" b="0" i="0">
+                <a:solidFill>
+                  <a:srgbClr val="333333"/>
+                </a:solidFill>
+                <a:latin typeface="Calibri"/>
+              </a:rPr>
+              <a:t> El backlog esta priorizado con un orden explicito y cada item tiene una justificacion de valor para la clinica, no un orden arbitrario.</a:t>
+            </a:r>
+          </a:p>
+          <a:p>
+            <a:pPr>
+              <a:spcAft>
+                <a:spcPts val="800"/>
+              </a:spcAft>
+            </a:pPr>
+            <a:r>
+              <a:rPr sz="2000" b="0" i="0">
+                <a:solidFill>
+                  <a:srgbClr val="333333"/>
+                </a:solidFill>
+                <a:latin typeface="Calibri"/>
+              </a:rPr>
+              <a:t>–   </a:t>
+            </a:r>
+            <a:r>
+              <a:rPr sz="2000" b="1" i="0">
+                <a:solidFill>
+                  <a:srgbClr val="333333"/>
+                </a:solidFill>
+                <a:latin typeface="Calibri"/>
+              </a:rPr>
+              <a:t>Exito:</a:t>
+            </a:r>
+            <a:r>
+              <a:rPr sz="2000" b="0" i="0">
+                <a:solidFill>
+                  <a:srgbClr val="333333"/>
+                </a:solidFill>
+                <a:latin typeface="Calibri"/>
+              </a:rPr>
+              <a:t> Las tres historias siguen la estructura Como / quiero / para y cada una tiene al menos dos escenarios en Dado/Cuando/Entonces, incluido uno alternativo o de error.</a:t>
+            </a:r>
+          </a:p>
+          <a:p>
+            <a:pPr>
+              <a:spcAft>
+                <a:spcPts val="800"/>
+              </a:spcAft>
+            </a:pPr>
+            <a:r>
+              <a:rPr sz="2000" b="0" i="0">
+                <a:solidFill>
+                  <a:srgbClr val="333333"/>
+                </a:solidFill>
+                <a:latin typeface="Calibri"/>
+              </a:rPr>
+              <a:t>–   </a:t>
+            </a:r>
+            <a:r>
+              <a:rPr sz="2000" b="1" i="0">
+                <a:solidFill>
+                  <a:srgbClr val="333333"/>
+                </a:solidFill>
+                <a:latin typeface="Calibri"/>
+              </a:rPr>
+              <a:t>Exito:</a:t>
+            </a:r>
+            <a:r>
+              <a:rPr sz="2000" b="0" i="0">
+                <a:solidFill>
+                  <a:srgbClr val="333333"/>
+                </a:solidFill>
+                <a:latin typeface="Calibri"/>
+              </a:rPr>
+              <a:t> Cada sprint del plan termina en un incremento que la clinica podria ver y opinar (mockup, prototipo, diagrama revisado), no en trabajo interno invisible.</a:t>
+            </a:r>
+          </a:p>
+          <a:p>
+            <a:pPr>
+              <a:spcAft>
+                <a:spcPts val="800"/>
+              </a:spcAft>
+            </a:pPr>
+            <a:r>
+              <a:rPr sz="2000" b="0" i="0">
+                <a:solidFill>
+                  <a:srgbClr val="333333"/>
+                </a:solidFill>
+                <a:latin typeface="Calibri"/>
+              </a:rPr>
+              <a:t>–   </a:t>
+            </a:r>
+            <a:r>
+              <a:rPr sz="2000" b="1" i="0">
+                <a:solidFill>
+                  <a:srgbClr val="333333"/>
+                </a:solidFill>
+                <a:latin typeface="Calibri"/>
+              </a:rPr>
+              <a:t>Exito:</a:t>
+            </a:r>
+            <a:r>
+              <a:rPr sz="2000" b="0" i="0">
+                <a:solidFill>
+                  <a:srgbClr val="333333"/>
+                </a:solidFill>
+                <a:latin typeface="Calibri"/>
+              </a:rPr>
+              <a:t> El tablero declara la Definicion de Terminado y el limite de trabajo en curso, y ninguna columna del medio tiene mas tarjetas que su limite.</a:t>
+            </a:r>
+          </a:p>
+          <a:p>
+            <a:pPr>
+              <a:spcAft>
+                <a:spcPts val="800"/>
+              </a:spcAft>
+            </a:pPr>
+            <a:r>
+              <a:rPr sz="2000" b="0" i="0">
+                <a:solidFill>
+                  <a:srgbClr val="333333"/>
+                </a:solidFill>
+                <a:latin typeface="Calibri"/>
+              </a:rPr>
+              <a:t>–   </a:t>
+            </a:r>
+            <a:r>
+              <a:rPr sz="2000" b="1" i="0">
+                <a:solidFill>
+                  <a:srgbClr val="333333"/>
+                </a:solidFill>
+                <a:latin typeface="Calibri"/>
+              </a:rPr>
+              <a:t>Entrega en la plataforma del curso</a:t>
+            </a:r>
+            <a:r>
+              <a:rPr sz="2000" b="0" i="0">
+                <a:solidFill>
+                  <a:srgbClr val="333333"/>
+                </a:solidFill>
+                <a:latin typeface="Calibri"/>
+              </a:rPr>
+              <a:t> — en la fecha que indique el docente.</a:t>
+            </a:r>
+          </a:p>
+        </p:txBody>
+      </p:sp>
+      <p:sp>
+        <p:nvSpPr>
+          <p:cNvPr id="6" name="TextBox 5"/>
+          <p:cNvSpPr txBox="1"/>
+          <p:nvPr/>
+        </p:nvSpPr>
+        <p:spPr>
+          <a:xfrm>
+            <a:off x="11185855" y="6473952"/>
+            <a:ext cx="640080" cy="274320"/>
+          </a:xfrm>
+          <a:prstGeom prst="rect">
+            <a:avLst/>
+          </a:prstGeom>
+          <a:noFill/>
+        </p:spPr>
+        <p:txBody>
+          <a:bodyPr wrap="square">
+            <a:spAutoFit/>
+          </a:bodyPr>
+          <a:lstStyle/>
+          <a:p>
+            <a:pPr algn="r"/>
+            <a:r>
+              <a:rPr sz="1100" b="0" i="0">
+                <a:solidFill>
+                  <a:srgbClr val="666666"/>
+                </a:solidFill>
+                <a:latin typeface="Calibri"/>
+              </a:rPr>
+              <a:t>16</a:t>
+            </a:r>
+          </a:p>
+        </p:txBody>
+      </p:sp>
+    </p:spTree>
+  </p:cSld>
+  <p:clrMapOvr>
+    <a:masterClrMapping/>
+  </p:clrMapOvr>
+</p:sld>
+</file>
+
+<file path=ppt/slides/slide17.xml><?xml version="1.0" encoding="utf-8"?>
+<p:sld xmlns:a="http://schemas.openxmlformats.org/drawingml/2006/main" xmlns:p="http://schemas.openxmlformats.org/presentationml/2006/main" xmlns:r="http://schemas.openxmlformats.org/officeDocument/2006/relationships">
+  <p:cSld>
+    <p:bg>
+      <p:bgPr>
+        <a:solidFill>
+          <a:srgbClr val="FFFFFF"/>
+        </a:solidFill>
+        <a:effectLst/>
+      </p:bgPr>
+    </p:bg>
+    <p:spTree>
+      <p:nvGrpSpPr>
+        <p:cNvPr id="1" name=""/>
+        <p:cNvGrpSpPr/>
+        <p:nvPr/>
+      </p:nvGrpSpPr>
+      <p:grpSpPr/>
+      <p:sp>
+        <p:nvSpPr>
+          <p:cNvPr id="2" name="Rectangle 1"/>
+          <p:cNvSpPr/>
+          <p:nvPr/>
+        </p:nvSpPr>
+        <p:spPr>
+          <a:xfrm>
+            <a:off x="0" y="0"/>
+            <a:ext cx="12191695" cy="960120"/>
+          </a:xfrm>
+          <a:prstGeom prst="rect">
+            <a:avLst/>
+          </a:prstGeom>
+          <a:solidFill>
+            <a:srgbClr val="095292"/>
+          </a:solidFill>
+          <a:ln>
+            <a:noFill/>
+          </a:ln>
+        </p:spPr>
+        <p:style>
+          <a:lnRef idx="1">
+            <a:schemeClr val="accent1"/>
+          </a:lnRef>
+          <a:fillRef idx="3">
+            <a:schemeClr val="accent1"/>
+          </a:fillRef>
+          <a:effectRef idx="2">
+            <a:schemeClr val="accent1"/>
+          </a:effectRef>
+          <a:fontRef idx="minor">
+            <a:schemeClr val="lt1"/>
+          </a:fontRef>
+        </p:style>
+        <p:txBody>
+          <a:bodyPr rtlCol="0" anchor="ctr"/>
+          <a:lstStyle/>
+          <a:p>
+            <a:pPr algn="ctr"/>
+          </a:p>
+        </p:txBody>
+      </p:sp>
+      <p:sp>
+        <p:nvSpPr>
+          <p:cNvPr id="3" name="Rectangle 2"/>
+          <p:cNvSpPr/>
+          <p:nvPr/>
+        </p:nvSpPr>
+        <p:spPr>
+          <a:xfrm>
+            <a:off x="0" y="960120"/>
+            <a:ext cx="12191695" cy="41148"/>
+          </a:xfrm>
+          <a:prstGeom prst="rect">
+            <a:avLst/>
+          </a:prstGeom>
+          <a:solidFill>
+            <a:srgbClr val="FFD000"/>
+          </a:solidFill>
+          <a:ln>
+            <a:noFill/>
+          </a:ln>
+        </p:spPr>
+        <p:style>
+          <a:lnRef idx="1">
+            <a:schemeClr val="accent1"/>
+          </a:lnRef>
+          <a:fillRef idx="3">
+            <a:schemeClr val="accent1"/>
+          </a:fillRef>
+          <a:effectRef idx="2">
+            <a:schemeClr val="accent1"/>
+          </a:effectRef>
+          <a:fontRef idx="minor">
+            <a:schemeClr val="lt1"/>
+          </a:fontRef>
+        </p:style>
+        <p:txBody>
+          <a:bodyPr rtlCol="0" anchor="ctr"/>
+          <a:lstStyle/>
+          <a:p>
+            <a:pPr algn="ctr"/>
+          </a:p>
+        </p:txBody>
+      </p:sp>
+      <p:sp>
+        <p:nvSpPr>
+          <p:cNvPr id="4" name="TextBox 3"/>
+          <p:cNvSpPr txBox="1"/>
+          <p:nvPr/>
+        </p:nvSpPr>
+        <p:spPr>
+          <a:xfrm>
+            <a:off x="457200" y="164592"/>
+            <a:ext cx="11277295" cy="502920"/>
+          </a:xfrm>
+          <a:prstGeom prst="rect">
+            <a:avLst/>
+          </a:prstGeom>
+          <a:noFill/>
+        </p:spPr>
+        <p:txBody>
+          <a:bodyPr wrap="square">
+            <a:spAutoFit/>
+          </a:bodyPr>
+          <a:lstStyle/>
+          <a:p>
+            <a:r>
+              <a:rPr sz="2600" b="1" i="0">
+                <a:solidFill>
+                  <a:srgbClr val="FFFFFF"/>
+                </a:solidFill>
+                <a:latin typeface="Calibri"/>
+              </a:rPr>
+              <a:t>Para el PI esta semana</a:t>
+            </a:r>
+          </a:p>
+        </p:txBody>
+      </p:sp>
+      <p:sp>
+        <p:nvSpPr>
+          <p:cNvPr id="5" name="Rounded Rectangle 4"/>
+          <p:cNvSpPr/>
+          <p:nvPr/>
+        </p:nvSpPr>
+        <p:spPr>
+          <a:xfrm>
+            <a:off x="457200" y="1261872"/>
+            <a:ext cx="11277295" cy="1051560"/>
+          </a:xfrm>
+          <a:prstGeom prst="roundRect">
+            <a:avLst>
+              <a:gd name="adj" fmla="val 12000"/>
+            </a:avLst>
+          </a:prstGeom>
+          <a:solidFill>
+            <a:srgbClr val="E8F4FA"/>
+          </a:solidFill>
+          <a:ln>
+            <a:noFill/>
+          </a:ln>
+        </p:spPr>
+        <p:style>
+          <a:lnRef idx="1">
+            <a:schemeClr val="accent1"/>
+          </a:lnRef>
+          <a:fillRef idx="3">
+            <a:schemeClr val="accent1"/>
+          </a:fillRef>
+          <a:effectRef idx="2">
+            <a:schemeClr val="accent1"/>
+          </a:effectRef>
+          <a:fontRef idx="minor">
+            <a:schemeClr val="lt1"/>
+          </a:fontRef>
+        </p:style>
+        <p:txBody>
+          <a:bodyPr rtlCol="0" anchor="ctr"/>
+          <a:lstStyle/>
+          <a:p>
+            <a:pPr algn="ctr"/>
+          </a:p>
+        </p:txBody>
+      </p:sp>
+      <p:sp>
+        <p:nvSpPr>
+          <p:cNvPr id="6" name="Rectangle 5"/>
+          <p:cNvSpPr/>
+          <p:nvPr/>
+        </p:nvSpPr>
+        <p:spPr>
+          <a:xfrm>
+            <a:off x="457200" y="1261872"/>
+            <a:ext cx="128016" cy="1051560"/>
+          </a:xfrm>
+          <a:prstGeom prst="rect">
+            <a:avLst/>
+          </a:prstGeom>
+          <a:solidFill>
+            <a:srgbClr val="269CCB"/>
+          </a:solidFill>
+          <a:ln>
+            <a:noFill/>
+          </a:ln>
+        </p:spPr>
+        <p:style>
+          <a:lnRef idx="1">
+            <a:schemeClr val="accent1"/>
+          </a:lnRef>
+          <a:fillRef idx="3">
+            <a:schemeClr val="accent1"/>
+          </a:fillRef>
+          <a:effectRef idx="2">
+            <a:schemeClr val="accent1"/>
+          </a:effectRef>
+          <a:fontRef idx="minor">
+            <a:schemeClr val="lt1"/>
+          </a:fontRef>
+        </p:style>
+        <p:txBody>
+          <a:bodyPr rtlCol="0" anchor="ctr"/>
+          <a:lstStyle/>
+          <a:p>
+            <a:pPr algn="ctr"/>
+          </a:p>
+        </p:txBody>
+      </p:sp>
+      <p:sp>
+        <p:nvSpPr>
+          <p:cNvPr id="7" name="TextBox 6"/>
+          <p:cNvSpPr txBox="1"/>
+          <p:nvPr/>
+        </p:nvSpPr>
+        <p:spPr>
+          <a:xfrm>
+            <a:off x="777240" y="1399031"/>
+            <a:ext cx="10774375" cy="822959"/>
+          </a:xfrm>
+          <a:prstGeom prst="rect">
+            <a:avLst/>
+          </a:prstGeom>
+          <a:noFill/>
+        </p:spPr>
+        <p:txBody>
+          <a:bodyPr wrap="square">
+            <a:spAutoFit/>
+          </a:bodyPr>
+          <a:lstStyle/>
+          <a:p>
+            <a:r>
+              <a:rPr sz="1200" b="1" i="0">
+                <a:solidFill>
+                  <a:srgbClr val="269CCB"/>
+                </a:solidFill>
+                <a:latin typeface="Calibri"/>
+              </a:rPr>
+              <a:t>Info</a:t>
+            </a:r>
+          </a:p>
+          <a:p>
+            <a:pPr>
+              <a:spcBef>
+                <a:spcPts val="400"/>
+              </a:spcBef>
+            </a:pPr>
+            <a:r>
+              <a:rPr sz="1400" b="0" i="0">
+                <a:solidFill>
+                  <a:srgbClr val="333333"/>
+                </a:solidFill>
+                <a:latin typeface="Calibri"/>
+              </a:rPr>
+              <a:t>Hito: Queda listo el backlog priorizado de VetCare repartido en sprints del semestre, con las primeras historias de usuario escritas con criterios de aceptacion.</a:t>
+            </a:r>
+          </a:p>
+        </p:txBody>
+      </p:sp>
+      <p:sp>
+        <p:nvSpPr>
+          <p:cNvPr id="8" name="Rounded Rectangle 7"/>
+          <p:cNvSpPr/>
+          <p:nvPr/>
+        </p:nvSpPr>
+        <p:spPr>
+          <a:xfrm>
+            <a:off x="457200" y="2478024"/>
+            <a:ext cx="11277295" cy="1051560"/>
+          </a:xfrm>
+          <a:prstGeom prst="roundRect">
+            <a:avLst>
+              <a:gd name="adj" fmla="val 12000"/>
+            </a:avLst>
+          </a:prstGeom>
+          <a:solidFill>
+            <a:srgbClr val="FFF8E1"/>
+          </a:solidFill>
+          <a:ln>
+            <a:noFill/>
+          </a:ln>
+        </p:spPr>
+        <p:style>
+          <a:lnRef idx="1">
+            <a:schemeClr val="accent1"/>
+          </a:lnRef>
+          <a:fillRef idx="3">
+            <a:schemeClr val="accent1"/>
+          </a:fillRef>
+          <a:effectRef idx="2">
+            <a:schemeClr val="accent1"/>
+          </a:effectRef>
+          <a:fontRef idx="minor">
+            <a:schemeClr val="lt1"/>
+          </a:fontRef>
+        </p:style>
+        <p:txBody>
+          <a:bodyPr rtlCol="0" anchor="ctr"/>
+          <a:lstStyle/>
+          <a:p>
+            <a:pPr algn="ctr"/>
+          </a:p>
+        </p:txBody>
+      </p:sp>
+      <p:sp>
+        <p:nvSpPr>
+          <p:cNvPr id="9" name="Rectangle 8"/>
+          <p:cNvSpPr/>
+          <p:nvPr/>
+        </p:nvSpPr>
+        <p:spPr>
+          <a:xfrm>
+            <a:off x="457200" y="2478024"/>
+            <a:ext cx="128016" cy="1051560"/>
+          </a:xfrm>
+          <a:prstGeom prst="rect">
+            <a:avLst/>
+          </a:prstGeom>
+          <a:solidFill>
+            <a:srgbClr val="FFD000"/>
+          </a:solidFill>
+          <a:ln>
+            <a:noFill/>
+          </a:ln>
+        </p:spPr>
+        <p:style>
+          <a:lnRef idx="1">
+            <a:schemeClr val="accent1"/>
+          </a:lnRef>
+          <a:fillRef idx="3">
+            <a:schemeClr val="accent1"/>
+          </a:fillRef>
+          <a:effectRef idx="2">
+            <a:schemeClr val="accent1"/>
+          </a:effectRef>
+          <a:fontRef idx="minor">
+            <a:schemeClr val="lt1"/>
+          </a:fontRef>
+        </p:style>
+        <p:txBody>
+          <a:bodyPr rtlCol="0" anchor="ctr"/>
+          <a:lstStyle/>
+          <a:p>
+            <a:pPr algn="ctr"/>
+          </a:p>
+        </p:txBody>
+      </p:sp>
+      <p:sp>
+        <p:nvSpPr>
+          <p:cNvPr id="10" name="TextBox 9"/>
+          <p:cNvSpPr txBox="1"/>
+          <p:nvPr/>
+        </p:nvSpPr>
+        <p:spPr>
+          <a:xfrm>
+            <a:off x="777240" y="2615184"/>
+            <a:ext cx="10774375" cy="822959"/>
+          </a:xfrm>
+          <a:prstGeom prst="rect">
+            <a:avLst/>
+          </a:prstGeom>
+          <a:noFill/>
+        </p:spPr>
+        <p:txBody>
+          <a:bodyPr wrap="square">
+            <a:spAutoFit/>
+          </a:bodyPr>
+          <a:lstStyle/>
+          <a:p>
+            <a:r>
+              <a:rPr sz="1200" b="1" i="0">
+                <a:solidFill>
+                  <a:srgbClr val="FFD000"/>
+                </a:solidFill>
+                <a:latin typeface="Calibri"/>
+              </a:rPr>
+              <a:t>Aclaración</a:t>
+            </a:r>
+          </a:p>
+          <a:p>
+            <a:pPr>
+              <a:spcBef>
+                <a:spcPts val="400"/>
+              </a:spcBef>
+            </a:pPr>
+            <a:r>
+              <a:rPr sz="1400" b="0" i="0">
+                <a:solidFill>
+                  <a:srgbClr val="333333"/>
+                </a:solidFill>
+                <a:latin typeface="Calibri"/>
+              </a:rPr>
+              <a:t>Enunciado completo: Clases/Proyecto Integrador/ (VetCare).</a:t>
+            </a:r>
+          </a:p>
+        </p:txBody>
+      </p:sp>
+      <p:sp>
+        <p:nvSpPr>
+          <p:cNvPr id="11" name="Rounded Rectangle 10"/>
+          <p:cNvSpPr/>
+          <p:nvPr/>
+        </p:nvSpPr>
+        <p:spPr>
+          <a:xfrm>
+            <a:off x="457200" y="3694176"/>
+            <a:ext cx="11277295" cy="1051560"/>
+          </a:xfrm>
+          <a:prstGeom prst="roundRect">
+            <a:avLst>
+              <a:gd name="adj" fmla="val 12000"/>
+            </a:avLst>
+          </a:prstGeom>
+          <a:solidFill>
+            <a:srgbClr val="FBE4E4"/>
+          </a:solidFill>
+          <a:ln>
+            <a:noFill/>
+          </a:ln>
+        </p:spPr>
+        <p:style>
+          <a:lnRef idx="1">
+            <a:schemeClr val="accent1"/>
+          </a:lnRef>
+          <a:fillRef idx="3">
+            <a:schemeClr val="accent1"/>
+          </a:fillRef>
+          <a:effectRef idx="2">
+            <a:schemeClr val="accent1"/>
+          </a:effectRef>
+          <a:fontRef idx="minor">
+            <a:schemeClr val="lt1"/>
+          </a:fontRef>
+        </p:style>
+        <p:txBody>
+          <a:bodyPr rtlCol="0" anchor="ctr"/>
+          <a:lstStyle/>
+          <a:p>
+            <a:pPr algn="ctr"/>
+          </a:p>
+        </p:txBody>
+      </p:sp>
+      <p:sp>
+        <p:nvSpPr>
+          <p:cNvPr id="12" name="Rectangle 11"/>
+          <p:cNvSpPr/>
+          <p:nvPr/>
+        </p:nvSpPr>
+        <p:spPr>
+          <a:xfrm>
+            <a:off x="457200" y="3694176"/>
+            <a:ext cx="128016" cy="1051560"/>
+          </a:xfrm>
+          <a:prstGeom prst="rect">
+            <a:avLst/>
+          </a:prstGeom>
+          <a:solidFill>
+            <a:srgbClr val="A02030"/>
+          </a:solidFill>
+          <a:ln>
+            <a:noFill/>
+          </a:ln>
+        </p:spPr>
+        <p:style>
+          <a:lnRef idx="1">
+            <a:schemeClr val="accent1"/>
+          </a:lnRef>
+          <a:fillRef idx="3">
+            <a:schemeClr val="accent1"/>
+          </a:fillRef>
+          <a:effectRef idx="2">
+            <a:schemeClr val="accent1"/>
+          </a:effectRef>
+          <a:fontRef idx="minor">
+            <a:schemeClr val="lt1"/>
+          </a:fontRef>
+        </p:style>
+        <p:txBody>
+          <a:bodyPr rtlCol="0" anchor="ctr"/>
+          <a:lstStyle/>
+          <a:p>
+            <a:pPr algn="ctr"/>
+          </a:p>
+        </p:txBody>
+      </p:sp>
+      <p:sp>
+        <p:nvSpPr>
+          <p:cNvPr id="13" name="TextBox 12"/>
+          <p:cNvSpPr txBox="1"/>
+          <p:nvPr/>
+        </p:nvSpPr>
+        <p:spPr>
+          <a:xfrm>
+            <a:off x="777240" y="3831336"/>
+            <a:ext cx="10774375" cy="822959"/>
+          </a:xfrm>
+          <a:prstGeom prst="rect">
+            <a:avLst/>
+          </a:prstGeom>
+          <a:noFill/>
+        </p:spPr>
+        <p:txBody>
+          <a:bodyPr wrap="square">
+            <a:spAutoFit/>
+          </a:bodyPr>
+          <a:lstStyle/>
+          <a:p>
+            <a:r>
+              <a:rPr sz="1200" b="1" i="0">
+                <a:solidFill>
+                  <a:srgbClr val="A02030"/>
+                </a:solidFill>
+                <a:latin typeface="Calibri"/>
+              </a:rPr>
+              <a:t>Atención</a:t>
+            </a:r>
+          </a:p>
+          <a:p>
+            <a:pPr>
+              <a:spcBef>
+                <a:spcPts val="400"/>
+              </a:spcBef>
+            </a:pPr>
+            <a:r>
+              <a:rPr sz="1400" b="0" i="0">
+                <a:solidFill>
+                  <a:srgbClr val="333333"/>
+                </a:solidFill>
+                <a:latin typeface="Calibri"/>
+              </a:rPr>
+              <a:t>Entrega del taller, si el docente lo asigna · en la fecha que indique el docente.</a:t>
+            </a:r>
+          </a:p>
+        </p:txBody>
+      </p:sp>
+      <p:sp>
+        <p:nvSpPr>
+          <p:cNvPr id="14" name="TextBox 13"/>
+          <p:cNvSpPr txBox="1"/>
+          <p:nvPr/>
+        </p:nvSpPr>
+        <p:spPr>
+          <a:xfrm>
+            <a:off x="11185855" y="6473952"/>
+            <a:ext cx="640080" cy="274320"/>
+          </a:xfrm>
+          <a:prstGeom prst="rect">
+            <a:avLst/>
+          </a:prstGeom>
+          <a:noFill/>
+        </p:spPr>
+        <p:txBody>
+          <a:bodyPr wrap="square">
+            <a:spAutoFit/>
+          </a:bodyPr>
+          <a:lstStyle/>
+          <a:p>
+            <a:pPr algn="r"/>
+            <a:r>
+              <a:rPr sz="1100" b="0" i="0">
+                <a:solidFill>
+                  <a:srgbClr val="666666"/>
+                </a:solidFill>
+                <a:latin typeface="Calibri"/>
+              </a:rPr>
+              <a:t>17</a:t>
+            </a:r>
+          </a:p>
+        </p:txBody>
+      </p:sp>
+    </p:spTree>
+  </p:cSld>
+  <p:clrMapOvr>
+    <a:masterClrMapping/>
+  </p:clrMapOvr>
+</p:sld>
+</file>
+
+<file path=ppt/slides/slide18.xml><?xml version="1.0" encoding="utf-8"?>
+<p:sld xmlns:a="http://schemas.openxmlformats.org/drawingml/2006/main" xmlns:p="http://schemas.openxmlformats.org/presentationml/2006/main" xmlns:r="http://schemas.openxmlformats.org/officeDocument/2006/relationships">
+  <p:cSld>
+    <p:bg>
+      <p:bgPr>
+        <a:solidFill>
+          <a:srgbClr val="FFFFFF"/>
+        </a:solidFill>
+        <a:effectLst/>
+      </p:bgPr>
+    </p:bg>
+    <p:spTree>
+      <p:nvGrpSpPr>
+        <p:cNvPr id="1" name=""/>
+        <p:cNvGrpSpPr/>
+        <p:nvPr/>
+      </p:nvGrpSpPr>
+      <p:grpSpPr/>
+      <p:sp>
+        <p:nvSpPr>
+          <p:cNvPr id="2" name="Rectangle 1"/>
+          <p:cNvSpPr/>
+          <p:nvPr/>
+        </p:nvSpPr>
+        <p:spPr>
+          <a:xfrm>
+            <a:off x="0" y="0"/>
             <a:ext cx="12191695" cy="164592"/>
           </a:xfrm>
           <a:prstGeom prst="rect">
@@ -7669,7 +9514,7 @@
                 </a:solidFill>
                 <a:latin typeface="Calibri"/>
               </a:rPr>
-              <a:t>Teoria Core</a:t>
+              <a:t>El manifiesto agil se firmo en 2001 por diecisiete personas cansadas de...</a:t>
             </a:r>
           </a:p>
         </p:txBody>
@@ -7708,7 +9553,7 @@
                 </a:solidFill>
                 <a:latin typeface="Calibri"/>
               </a:rPr>
-              <a:t>–   El manifiesto agil se firmo en 2001 por diecisiete personas cansadas de proyectos que entregaban documentos…</a:t>
+              <a:t>–   El manifiesto agil se firmo en 2001 por diecisiete personas cansadas de proyectos que entregaban documentos perfectos y sistemas inservibles.</a:t>
             </a:r>
           </a:p>
           <a:p>
@@ -7724,7 +9569,7 @@
                 </a:solidFill>
                 <a:latin typeface="Calibri"/>
               </a:rPr>
-              <a:t>–   Scrum es un marco de trabajo, no una metodologia completa: define lo minimo y deja que cada equipo llene el resto</a:t>
+              <a:t>–   Tiene cuatro valores y la clave esta en la palabra que los une: 'sobre'.</a:t>
             </a:r>
           </a:p>
           <a:p>
@@ -7740,7 +9585,7 @@
                 </a:solidFill>
                 <a:latin typeface="Calibri"/>
               </a:rPr>
-              <a:t>–   Kanban viene de otra tradicion y su promesa es distinta: no impone iteraciones ni roles, sino que hace visible el…</a:t>
+              <a:t>–   Individuos e interacciones SOBRE procesos y herramientas; software funcionando SOBRE documentacion exhaustiva; colaboracion con el cliente SOBRE negociacion contractual; respuesta ante el cambio SOBRE seguir un plan.</a:t>
             </a:r>
           </a:p>
           <a:p>
@@ -7756,7 +9601,7 @@
                 </a:solidFill>
                 <a:latin typeface="Calibri"/>
               </a:rPr>
-              <a:t>–   Hay dos palabras que se usan como sinonimos y significan cosas distintas: iteracion e incremento</a:t>
+              <a:t>–   Dice sobre, no 'en vez de': lo de la derecha sigue teniendo valor, solo que lo de la izquierda tiene mas.</a:t>
             </a:r>
           </a:p>
           <a:p>
@@ -7772,7 +9617,23 @@
                 </a:solidFill>
                 <a:latin typeface="Calibri"/>
               </a:rPr>
-              <a:t>–   Agil no significa trabajar sin documentacion, y este es el malentendido que mas daño hace</a:t>
+              <a:t>–   Ademas hay doce principios, y tres son muy utiles aqui: entregar valor pronto y con frecuencia, aceptar el cambio incluso tarde, y mantener un ritmo sostenible.</a:t>
+            </a:r>
+          </a:p>
+          <a:p>
+            <a:pPr>
+              <a:spcAft>
+                <a:spcPts val="800"/>
+              </a:spcAft>
+            </a:pPr>
+            <a:r>
+              <a:rPr sz="2000" b="0" i="0">
+                <a:solidFill>
+                  <a:srgbClr val="333333"/>
+                </a:solidFill>
+                <a:latin typeface="Calibri"/>
+              </a:rPr>
+              <a:t>–   En VetCare esto se traduce en algo muy concreto: es mejor mostrarle a Huellitas un mockup imperfecto de la ficha en la semana tres que un documento de ochenta paginas en la semana quince.</a:t>
             </a:r>
           </a:p>
         </p:txBody>
@@ -7953,141 +9814,21 @@
                 </a:solidFill>
                 <a:latin typeface="Calibri"/>
               </a:rPr>
-              <a:t>Historia de usuario de VetCare con criterios de aceptacion</a:t>
-            </a:r>
-          </a:p>
-        </p:txBody>
-      </p:sp>
-      <p:sp>
-        <p:nvSpPr>
-          <p:cNvPr id="5" name="Rounded Rectangle 4"/>
-          <p:cNvSpPr/>
-          <p:nvPr/>
-        </p:nvSpPr>
-        <p:spPr>
-          <a:xfrm>
-            <a:off x="457200" y="1261872"/>
-            <a:ext cx="11277295" cy="4773168"/>
-          </a:xfrm>
-          <a:prstGeom prst="roundRect">
-            <a:avLst>
-              <a:gd name="adj" fmla="val 12000"/>
-            </a:avLst>
-          </a:prstGeom>
-          <a:solidFill>
-            <a:srgbClr val="1E2A38"/>
-          </a:solidFill>
-          <a:ln>
-            <a:noFill/>
-          </a:ln>
-        </p:spPr>
-        <p:style>
-          <a:lnRef idx="1">
-            <a:schemeClr val="accent1"/>
-          </a:lnRef>
-          <a:fillRef idx="3">
-            <a:schemeClr val="accent1"/>
-          </a:fillRef>
-          <a:effectRef idx="2">
-            <a:schemeClr val="accent1"/>
-          </a:effectRef>
-          <a:fontRef idx="minor">
-            <a:schemeClr val="lt1"/>
-          </a:fontRef>
-        </p:style>
-        <p:txBody>
-          <a:bodyPr rtlCol="0" anchor="ctr"/>
-          <a:lstStyle/>
-          <a:p>
-            <a:pPr algn="ctr"/>
-          </a:p>
-        </p:txBody>
-      </p:sp>
-      <p:sp>
-        <p:nvSpPr>
-          <p:cNvPr id="6" name="Rectangle 5"/>
-          <p:cNvSpPr/>
-          <p:nvPr/>
-        </p:nvSpPr>
-        <p:spPr>
-          <a:xfrm>
-            <a:off x="457200" y="1261872"/>
-            <a:ext cx="11277295" cy="320040"/>
-          </a:xfrm>
-          <a:prstGeom prst="rect">
-            <a:avLst/>
-          </a:prstGeom>
-          <a:solidFill>
-            <a:srgbClr val="095292"/>
-          </a:solidFill>
-          <a:ln>
-            <a:noFill/>
-          </a:ln>
-        </p:spPr>
-        <p:style>
-          <a:lnRef idx="1">
-            <a:schemeClr val="accent1"/>
-          </a:lnRef>
-          <a:fillRef idx="3">
-            <a:schemeClr val="accent1"/>
-          </a:fillRef>
-          <a:effectRef idx="2">
-            <a:schemeClr val="accent1"/>
-          </a:effectRef>
-          <a:fontRef idx="minor">
-            <a:schemeClr val="lt1"/>
-          </a:fontRef>
-        </p:style>
-        <p:txBody>
-          <a:bodyPr rtlCol="0" anchor="ctr"/>
-          <a:lstStyle/>
-          <a:p>
-            <a:pPr algn="ctr"/>
-          </a:p>
-        </p:txBody>
-      </p:sp>
-      <p:sp>
-        <p:nvSpPr>
-          <p:cNvPr id="7" name="TextBox 6"/>
+              <a:t>Scrum es un marco de trabajo, no una metodologia completa: define lo...</a:t>
+            </a:r>
+          </a:p>
+        </p:txBody>
+      </p:sp>
+      <p:sp>
+        <p:nvSpPr>
+          <p:cNvPr id="5" name="TextBox 4"/>
           <p:cNvSpPr txBox="1"/>
           <p:nvPr/>
         </p:nvSpPr>
         <p:spPr>
           <a:xfrm>
-            <a:off x="685800" y="1307592"/>
-            <a:ext cx="10820095" cy="256032"/>
-          </a:xfrm>
-          <a:prstGeom prst="rect">
-            <a:avLst/>
-          </a:prstGeom>
-          <a:noFill/>
-        </p:spPr>
-        <p:txBody>
-          <a:bodyPr wrap="square" anchor="ctr"/>
-          <a:lstStyle/>
-          <a:p>
-            <a:r>
-              <a:rPr sz="1000" b="1" i="0">
-                <a:solidFill>
-                  <a:srgbClr val="269CCB"/>
-                </a:solidFill>
-                <a:latin typeface="Calibri"/>
-              </a:rPr>
-              <a:t>● ● ●</a:t>
-            </a:r>
-          </a:p>
-        </p:txBody>
-      </p:sp>
-      <p:sp>
-        <p:nvSpPr>
-          <p:cNvPr id="8" name="TextBox 7"/>
-          <p:cNvSpPr txBox="1"/>
-          <p:nvPr/>
-        </p:nvSpPr>
-        <p:spPr>
-          <a:xfrm>
-            <a:off x="777240" y="1719072"/>
-            <a:ext cx="10637215" cy="4133087"/>
+            <a:off x="457200" y="1170432"/>
+            <a:ext cx="11277295" cy="5230368"/>
           </a:xfrm>
           <a:prstGeom prst="rect">
             <a:avLst/>
@@ -8102,267 +9843,120 @@
           <a:p>
             <a:pPr>
               <a:spcAft>
-                <a:spcPts val="400"/>
+                <a:spcPts val="800"/>
               </a:spcAft>
             </a:pPr>
             <a:r>
-              <a:rPr sz="1400" b="0" i="0">
-                <a:solidFill>
-                  <a:srgbClr val="FFFFFF"/>
-                </a:solidFill>
-                <a:latin typeface="Calibri"/>
-              </a:rPr>
-              <a:t>HU-07  Buscar historia clinica</a:t>
+              <a:rPr sz="2000" b="0" i="0">
+                <a:solidFill>
+                  <a:srgbClr val="333333"/>
+                </a:solidFill>
+                <a:latin typeface="Calibri"/>
+              </a:rPr>
+              <a:t>–   Scrum es un marco de trabajo, no una metodologia completa: define lo minimo y deja que cada equipo llene el resto.</a:t>
             </a:r>
           </a:p>
           <a:p>
             <a:pPr>
               <a:spcAft>
-                <a:spcPts val="400"/>
+                <a:spcPts val="800"/>
               </a:spcAft>
             </a:pPr>
             <a:r>
-              <a:rPr sz="1400" b="0" i="0">
-                <a:solidFill>
-                  <a:srgbClr val="FFFFFF"/>
-                </a:solidFill>
-                <a:latin typeface="Calibri"/>
-              </a:rPr>
-              <a:t>  Como veterinaria de la clinica Huellitas</a:t>
+              <a:rPr sz="2000" b="0" i="0">
+                <a:solidFill>
+                  <a:srgbClr val="333333"/>
+                </a:solidFill>
+                <a:latin typeface="Calibri"/>
+              </a:rPr>
+              <a:t>–   Tiene tres roles: el Product Owner, que decide QUE se hace y en que orden, y es el dueño del Product Backlog; el Scrum Master, que facilita, protege al equipo y quita impedimentos</a:t>
             </a:r>
           </a:p>
           <a:p>
             <a:pPr>
               <a:spcAft>
-                <a:spcPts val="400"/>
+                <a:spcPts val="800"/>
               </a:spcAft>
             </a:pPr>
             <a:r>
-              <a:rPr sz="1400" b="0" i="0">
-                <a:solidFill>
-                  <a:srgbClr val="FFFFFF"/>
-                </a:solidFill>
-                <a:latin typeface="Calibri"/>
-              </a:rPr>
-              <a:t>  quiero buscar la historia clinica de una mascota por nombre o documento</a:t>
+              <a:rPr sz="2000" b="0" i="0">
+                <a:solidFill>
+                  <a:srgbClr val="333333"/>
+                </a:solidFill>
+                <a:latin typeface="Calibri"/>
+              </a:rPr>
+              <a:t>–   Y que no es el jefe; y el equipo de desarrollo, que decide COMO hacerlo y se autoorganiza.</a:t>
             </a:r>
           </a:p>
           <a:p>
             <a:pPr>
               <a:spcAft>
-                <a:spcPts val="400"/>
+                <a:spcPts val="800"/>
               </a:spcAft>
             </a:pPr>
             <a:r>
-              <a:rPr sz="1400" b="0" i="0">
-                <a:solidFill>
-                  <a:srgbClr val="FFFFFF"/>
-                </a:solidFill>
-                <a:latin typeface="Calibri"/>
-              </a:rPr>
-              <a:t>  para atender la consulta sin ir al archivador de papel.</a:t>
+              <a:rPr sz="2000" b="0" i="0">
+                <a:solidFill>
+                  <a:srgbClr val="333333"/>
+                </a:solidFill>
+                <a:latin typeface="Calibri"/>
+              </a:rPr>
+              <a:t>–   Tiene cinco eventos: el Sprint, que es el contenedor de duracion fija (una a cuatro semanas), la Planificacion, la Reunion diaria de quince minutos para sincronizarse</a:t>
             </a:r>
           </a:p>
           <a:p>
             <a:pPr>
               <a:spcAft>
-                <a:spcPts val="400"/>
+                <a:spcPts val="800"/>
               </a:spcAft>
             </a:pPr>
             <a:r>
-              <a:rPr sz="1400" b="0" i="0">
-                <a:solidFill>
-                  <a:srgbClr val="FFFFFF"/>
-                </a:solidFill>
-                <a:latin typeface="Calibri"/>
-              </a:rPr>
-              <a:t/>
+              <a:rPr sz="2000" b="0" i="0">
+                <a:solidFill>
+                  <a:srgbClr val="333333"/>
+                </a:solidFill>
+                <a:latin typeface="Calibri"/>
+              </a:rPr>
+              <a:t>–   La Revision donde se le muestra el incremento al cliente, y la Retrospectiva donde se mejora la forma de trabajar.</a:t>
             </a:r>
           </a:p>
           <a:p>
             <a:pPr>
               <a:spcAft>
-                <a:spcPts val="400"/>
+                <a:spcPts val="800"/>
               </a:spcAft>
             </a:pPr>
             <a:r>
-              <a:rPr sz="1400" b="0" i="0">
-                <a:solidFill>
-                  <a:srgbClr val="FFFFFF"/>
-                </a:solidFill>
-                <a:latin typeface="Calibri"/>
-              </a:rPr>
-              <a:t>Criterios de aceptacion</a:t>
+              <a:rPr sz="2000" b="0" i="0">
+                <a:solidFill>
+                  <a:srgbClr val="333333"/>
+                </a:solidFill>
+                <a:latin typeface="Calibri"/>
+              </a:rPr>
+              <a:t>–   Y tiene tres artefactos: Product Backlog, Sprint Backlog e Incremento, este ultimo gobernado por la Definicion de Terminado.</a:t>
             </a:r>
           </a:p>
           <a:p>
             <a:pPr>
               <a:spcAft>
-                <a:spcPts val="400"/>
+                <a:spcPts val="800"/>
               </a:spcAft>
             </a:pPr>
             <a:r>
-              <a:rPr sz="1400" b="0" i="0">
-                <a:solidFill>
-                  <a:srgbClr val="FFFFFF"/>
-                </a:solidFill>
-                <a:latin typeface="Calibri"/>
-              </a:rPr>
-              <a:t>  Dado que la mascota Rocky esta registrada con el dueño CC 1.144.556</a:t>
-            </a:r>
-          </a:p>
-          <a:p>
-            <a:pPr>
-              <a:spcAft>
-                <a:spcPts val="400"/>
-              </a:spcAft>
-            </a:pPr>
-            <a:r>
-              <a:rPr sz="1400" b="0" i="0">
-                <a:solidFill>
-                  <a:srgbClr val="FFFFFF"/>
-                </a:solidFill>
-                <a:latin typeface="Calibri"/>
-              </a:rPr>
-              <a:t>  Cuando escribo Rocky en el buscador y presiono Enter</a:t>
-            </a:r>
-          </a:p>
-          <a:p>
-            <a:pPr>
-              <a:spcAft>
-                <a:spcPts val="400"/>
-              </a:spcAft>
-            </a:pPr>
-            <a:r>
-              <a:rPr sz="1400" b="0" i="0">
-                <a:solidFill>
-                  <a:srgbClr val="FFFFFF"/>
-                </a:solidFill>
-                <a:latin typeface="Calibri"/>
-              </a:rPr>
-              <a:t>  Entonces veo la ficha con especie, edad y las ultimas 3 consultas en &lt;= 3 s</a:t>
-            </a:r>
-          </a:p>
-          <a:p>
-            <a:pPr>
-              <a:spcAft>
-                <a:spcPts val="400"/>
-              </a:spcAft>
-            </a:pPr>
-            <a:r>
-              <a:rPr sz="1400" b="0" i="0">
-                <a:solidFill>
-                  <a:srgbClr val="FFFFFF"/>
-                </a:solidFill>
-                <a:latin typeface="Calibri"/>
-              </a:rPr>
-              <a:t/>
-            </a:r>
-          </a:p>
-          <a:p>
-            <a:pPr>
-              <a:spcAft>
-                <a:spcPts val="400"/>
-              </a:spcAft>
-            </a:pPr>
-            <a:r>
-              <a:rPr sz="1400" b="0" i="0">
-                <a:solidFill>
-                  <a:srgbClr val="FFFFFF"/>
-                </a:solidFill>
-                <a:latin typeface="Calibri"/>
-              </a:rPr>
-              <a:t>  Dado que escribo un nombre que no existe en el sistema</a:t>
-            </a:r>
-          </a:p>
-          <a:p>
-            <a:pPr>
-              <a:spcAft>
-                <a:spcPts val="400"/>
-              </a:spcAft>
-            </a:pPr>
-            <a:r>
-              <a:rPr sz="1400" b="0" i="0">
-                <a:solidFill>
-                  <a:srgbClr val="FFFFFF"/>
-                </a:solidFill>
-                <a:latin typeface="Calibri"/>
-              </a:rPr>
-              <a:t>  Cuando presiono Enter</a:t>
-            </a:r>
-          </a:p>
-          <a:p>
-            <a:pPr>
-              <a:spcAft>
-                <a:spcPts val="400"/>
-              </a:spcAft>
-            </a:pPr>
-            <a:r>
-              <a:rPr sz="1400" b="0" i="0">
-                <a:solidFill>
-                  <a:srgbClr val="FFFFFF"/>
-                </a:solidFill>
-                <a:latin typeface="Calibri"/>
-              </a:rPr>
-              <a:t>  Entonces veo 'No se encontro el paciente' y el boton Registrar nuevo</a:t>
-            </a:r>
-          </a:p>
-          <a:p>
-            <a:pPr>
-              <a:spcAft>
-                <a:spcPts val="400"/>
-              </a:spcAft>
-            </a:pPr>
-            <a:r>
-              <a:rPr sz="1400" b="0" i="0">
-                <a:solidFill>
-                  <a:srgbClr val="FFFFFF"/>
-                </a:solidFill>
-                <a:latin typeface="Calibri"/>
-              </a:rPr>
-              <a:t>Terminado = caso de uso + mockup + revision de un compañero + visto bueno del cliente</a:t>
-            </a:r>
-          </a:p>
-        </p:txBody>
-      </p:sp>
-      <p:sp>
-        <p:nvSpPr>
-          <p:cNvPr id="9" name="TextBox 8"/>
-          <p:cNvSpPr txBox="1"/>
-          <p:nvPr/>
-        </p:nvSpPr>
-        <p:spPr>
-          <a:xfrm>
-            <a:off x="457200" y="6080760"/>
-            <a:ext cx="11277295" cy="320040"/>
-          </a:xfrm>
-          <a:prstGeom prst="rect">
-            <a:avLst/>
-          </a:prstGeom>
-          <a:noFill/>
-        </p:spPr>
-        <p:txBody>
-          <a:bodyPr wrap="square">
-            <a:spAutoFit/>
-          </a:bodyPr>
-          <a:lstStyle/>
-          <a:p>
-            <a:pPr algn="ctr"/>
-            <a:r>
-              <a:rPr sz="1200" b="0" i="1">
-                <a:solidFill>
-                  <a:srgbClr val="666666"/>
-                </a:solidFill>
-                <a:latin typeface="Calibri"/>
-              </a:rPr>
-              <a:t>La historia dice quien la necesita y para que; los criterios dicen como se demuestra que quedo lista, incluido el camino que sale mal.</a:t>
-            </a:r>
-          </a:p>
-        </p:txBody>
-      </p:sp>
-      <p:sp>
-        <p:nvSpPr>
-          <p:cNvPr id="10" name="TextBox 9"/>
+              <a:rPr sz="2000" b="0" i="0">
+                <a:solidFill>
+                  <a:srgbClr val="333333"/>
+                </a:solidFill>
+                <a:latin typeface="Calibri"/>
+              </a:rPr>
+              <a:t>–   En VetCare el docente actua como vocero de Huellitas en el rol de Product Owner, y cada estudiante -o cada equipo, si el docente lo autoriza- hace de equipo de desarrollo que se compromete con un objetivo de sprint.</a:t>
+            </a:r>
+          </a:p>
+        </p:txBody>
+      </p:sp>
+      <p:sp>
+        <p:nvSpPr>
+          <p:cNvPr id="6" name="TextBox 5"/>
           <p:cNvSpPr txBox="1"/>
           <p:nvPr/>
         </p:nvSpPr>
@@ -8536,7 +10130,7 @@
                 </a:solidFill>
                 <a:latin typeface="Calibri"/>
               </a:rPr>
-              <a:t>Demo del dia</a:t>
+              <a:t>Kanban viene de otra tradicion y su promesa es distinta: no impone...</a:t>
             </a:r>
           </a:p>
         </p:txBody>
@@ -8575,25 +10169,7 @@
                 </a:solidFill>
                 <a:latin typeface="Calibri"/>
               </a:rPr>
-              <a:t>–   </a:t>
-            </a:r>
-            <a:r>
-              <a:rPr sz="2000" b="1" i="0">
-                <a:solidFill>
-                  <a:srgbClr val="333333"/>
-                </a:solidFill>
-                <a:latin typeface="Calibri"/>
-              </a:rPr>
-              <a:t>Herramienta:</a:t>
-            </a:r>
-            <a:r>
-              <a:rPr sz="2000" b="0" i="0">
-                <a:solidFill>
-                  <a:srgbClr val="333333"/>
-                </a:solidFill>
-                <a:latin typeface="Calibri"/>
-              </a:rPr>
-              <a:t> draw.io · Excalidraw · Google Docs</a:t>
+              <a:t>–   Kanban viene de otra tradicion y su promesa es distinta: no impone iteraciones ni roles, sino que hace visible el flujo del trabajo.</a:t>
             </a:r>
           </a:p>
           <a:p>
@@ -8609,25 +10185,7 @@
                 </a:solidFill>
                 <a:latin typeface="Calibri"/>
               </a:rPr>
-              <a:t>–   </a:t>
-            </a:r>
-            <a:r>
-              <a:rPr sz="2000" b="1" i="0">
-                <a:solidFill>
-                  <a:srgbClr val="333333"/>
-                </a:solidFill>
-                <a:latin typeface="Calibri"/>
-              </a:rPr>
-              <a:t>Demo:</a:t>
-            </a:r>
-            <a:r>
-              <a:rPr sz="2000" b="0" i="0">
-                <a:solidFill>
-                  <a:srgbClr val="333333"/>
-                </a:solidFill>
-                <a:latin typeface="Calibri"/>
-              </a:rPr>
-              <a:t> El docente arma en pantalla el tablero de VetCare, arrastra una tarjeta de 'Por hacer' a 'En revision del cliente' y muestra que pasa cuando se rompe el limite de trabajo en curso.</a:t>
+              <a:t>–   Sus practicas centrales son visualizar el trabajo en un tablero, limitar el trabajo en curso, gestionar el flujo detectando donde se acumulan las tarjetas, hacer explicitas las politicas de cada columna y mejorar de forma continua.</a:t>
             </a:r>
           </a:p>
           <a:p>
@@ -8643,7 +10201,39 @@
                 </a:solidFill>
                 <a:latin typeface="Calibri"/>
               </a:rPr>
-              <a:t>–   Mismo dominio VetCare — no otro ejemplo. Aqui se diseña, no se programa.</a:t>
+              <a:t>–   El limite de trabajo en curso es la parte que mas cuesta y la que mas sirve: si el equipo pone limite dos en la columna 'Modelando', nadie puede empezar una tercera tarea sin terminar alguna.</a:t>
+            </a:r>
+          </a:p>
+          <a:p>
+            <a:pPr>
+              <a:spcAft>
+                <a:spcPts val="800"/>
+              </a:spcAft>
+            </a:pPr>
+            <a:r>
+              <a:rPr sz="2000" b="0" i="0">
+                <a:solidFill>
+                  <a:srgbClr val="333333"/>
+                </a:solidFill>
+                <a:latin typeface="Calibri"/>
+              </a:rPr>
+              <a:t>–   En VetCare el tablero seria Por hacer / Modelando / En revision del cliente / Aprobado, y la politica de la ultima columna podria ser 'solo pasa a Aprobado si tiene diagrama, mockup y visto bueno de la clinica'.</a:t>
+            </a:r>
+          </a:p>
+          <a:p>
+            <a:pPr>
+              <a:spcAft>
+                <a:spcPts val="800"/>
+              </a:spcAft>
+            </a:pPr>
+            <a:r>
+              <a:rPr sz="2000" b="0" i="0">
+                <a:solidFill>
+                  <a:srgbClr val="333333"/>
+                </a:solidFill>
+                <a:latin typeface="Calibri"/>
+              </a:rPr>
+              <a:t>–   El estudiante que abre cinco diagramas al tiempo y no termina ninguno es exactamente el problema que el limite de trabajo en curso resuelve.</a:t>
             </a:r>
           </a:p>
         </p:txBody>
@@ -8718,7 +10308,7 @@
         <p:spPr>
           <a:xfrm>
             <a:off x="0" y="0"/>
-            <a:ext cx="12191695" cy="1170432"/>
+            <a:ext cx="12191695" cy="960120"/>
           </a:xfrm>
           <a:prstGeom prst="rect">
             <a:avLst/>
@@ -8760,7 +10350,7 @@
         </p:nvSpPr>
         <p:spPr>
           <a:xfrm>
-            <a:off x="0" y="1170432"/>
+            <a:off x="0" y="960120"/>
             <a:ext cx="12191695" cy="41148"/>
           </a:xfrm>
           <a:prstGeom prst="rect">
@@ -8804,7 +10394,7 @@
         <p:spPr>
           <a:xfrm>
             <a:off x="457200" y="164592"/>
-            <a:ext cx="11277295" cy="384048"/>
+            <a:ext cx="11277295" cy="502920"/>
           </a:xfrm>
           <a:prstGeom prst="rect">
             <a:avLst/>
@@ -8824,7 +10414,7 @@
                 </a:solidFill>
                 <a:latin typeface="Calibri"/>
               </a:rPr>
-              <a:t>Herramientas de hoy</a:t>
+              <a:t>Hay dos palabras que se usan como sinonimos y significan cosas...</a:t>
             </a:r>
           </a:p>
         </p:txBody>
@@ -8837,8 +10427,8 @@
         </p:nvSpPr>
         <p:spPr>
           <a:xfrm>
-            <a:off x="457200" y="566928"/>
-            <a:ext cx="11277295" cy="411480"/>
+            <a:off x="457200" y="1170432"/>
+            <a:ext cx="11277295" cy="5230368"/>
           </a:xfrm>
           <a:prstGeom prst="rect">
             <a:avLst/>
@@ -8851,837 +10441,106 @@
           </a:bodyPr>
           <a:lstStyle/>
           <a:p>
-            <a:r>
-              <a:rPr sz="1400" b="0" i="0">
-                <a:solidFill>
-                  <a:srgbClr val="B8D8EE"/>
-                </a:solidFill>
-                <a:latin typeface="Calibri"/>
-              </a:rPr>
-              <a:t>Gratis · funcionan en el navegador</a:t>
-            </a:r>
-          </a:p>
-        </p:txBody>
-      </p:sp>
-      <p:sp>
-        <p:nvSpPr>
-          <p:cNvPr id="6" name="Rounded Rectangle 5"/>
-          <p:cNvSpPr/>
-          <p:nvPr/>
-        </p:nvSpPr>
-        <p:spPr>
-          <a:xfrm>
-            <a:off x="457200" y="1591056"/>
-            <a:ext cx="3624986" cy="2299716"/>
-          </a:xfrm>
-          <a:prstGeom prst="roundRect">
-            <a:avLst>
-              <a:gd name="adj" fmla="val 12000"/>
-            </a:avLst>
-          </a:prstGeom>
-          <a:solidFill>
-            <a:srgbClr val="F2F2F2"/>
-          </a:solidFill>
-          <a:ln>
-            <a:noFill/>
-          </a:ln>
-        </p:spPr>
-        <p:style>
-          <a:lnRef idx="1">
-            <a:schemeClr val="accent1"/>
-          </a:lnRef>
-          <a:fillRef idx="3">
-            <a:schemeClr val="accent1"/>
-          </a:fillRef>
-          <a:effectRef idx="2">
-            <a:schemeClr val="accent1"/>
-          </a:effectRef>
-          <a:fontRef idx="minor">
-            <a:schemeClr val="lt1"/>
-          </a:fontRef>
-        </p:style>
-        <p:txBody>
-          <a:bodyPr rtlCol="0" anchor="ctr"/>
-          <a:lstStyle/>
-          <a:p>
-            <a:pPr algn="ctr"/>
-          </a:p>
-        </p:txBody>
-      </p:sp>
-      <p:sp>
-        <p:nvSpPr>
-          <p:cNvPr id="7" name="Rectangle 6"/>
-          <p:cNvSpPr/>
-          <p:nvPr/>
-        </p:nvSpPr>
-        <p:spPr>
-          <a:xfrm>
-            <a:off x="457200" y="1591056"/>
-            <a:ext cx="3624986" cy="64008"/>
-          </a:xfrm>
-          <a:prstGeom prst="rect">
-            <a:avLst/>
-          </a:prstGeom>
-          <a:solidFill>
-            <a:srgbClr val="095292"/>
-          </a:solidFill>
-          <a:ln>
-            <a:noFill/>
-          </a:ln>
-        </p:spPr>
-        <p:style>
-          <a:lnRef idx="1">
-            <a:schemeClr val="accent1"/>
-          </a:lnRef>
-          <a:fillRef idx="3">
-            <a:schemeClr val="accent1"/>
-          </a:fillRef>
-          <a:effectRef idx="2">
-            <a:schemeClr val="accent1"/>
-          </a:effectRef>
-          <a:fontRef idx="minor">
-            <a:schemeClr val="lt1"/>
-          </a:fontRef>
-        </p:style>
-        <p:txBody>
-          <a:bodyPr rtlCol="0" anchor="ctr"/>
-          <a:lstStyle/>
-          <a:p>
-            <a:pPr algn="ctr"/>
-          </a:p>
-        </p:txBody>
-      </p:sp>
-      <p:sp>
-        <p:nvSpPr>
-          <p:cNvPr id="8" name="Rectangle 7"/>
-          <p:cNvSpPr/>
-          <p:nvPr/>
-        </p:nvSpPr>
-        <p:spPr>
-          <a:xfrm>
-            <a:off x="457200" y="1655064"/>
-            <a:ext cx="3624986" cy="27432"/>
-          </a:xfrm>
-          <a:prstGeom prst="rect">
-            <a:avLst/>
-          </a:prstGeom>
-          <a:solidFill>
-            <a:srgbClr val="FFD000"/>
-          </a:solidFill>
-          <a:ln>
-            <a:noFill/>
-          </a:ln>
-        </p:spPr>
-        <p:style>
-          <a:lnRef idx="1">
-            <a:schemeClr val="accent1"/>
-          </a:lnRef>
-          <a:fillRef idx="3">
-            <a:schemeClr val="accent1"/>
-          </a:fillRef>
-          <a:effectRef idx="2">
-            <a:schemeClr val="accent1"/>
-          </a:effectRef>
-          <a:fontRef idx="minor">
-            <a:schemeClr val="lt1"/>
-          </a:fontRef>
-        </p:style>
-        <p:txBody>
-          <a:bodyPr rtlCol="0" anchor="ctr"/>
-          <a:lstStyle/>
-          <a:p>
-            <a:pPr algn="ctr"/>
-          </a:p>
-        </p:txBody>
-      </p:sp>
-      <p:pic>
-        <p:nvPicPr>
-          <p:cNvPr id="9" name="Picture 8" descr="drawio.png"/>
-          <p:cNvPicPr>
-            <a:picLocks noChangeAspect="1"/>
-          </p:cNvPicPr>
-          <p:nvPr/>
-        </p:nvPicPr>
-        <p:blipFill>
-          <a:blip r:embed="rId2"/>
-          <a:stretch>
-            <a:fillRect/>
-          </a:stretch>
-        </p:blipFill>
-        <p:spPr>
-          <a:xfrm>
-            <a:off x="1659331" y="1847087"/>
-            <a:ext cx="1220724" cy="1220724"/>
-          </a:xfrm>
-          <a:prstGeom prst="rect">
-            <a:avLst/>
-          </a:prstGeom>
-        </p:spPr>
-      </p:pic>
-      <p:sp>
-        <p:nvSpPr>
-          <p:cNvPr id="10" name="TextBox 9"/>
-          <p:cNvSpPr txBox="1"/>
-          <p:nvPr/>
-        </p:nvSpPr>
-        <p:spPr>
-          <a:xfrm>
-            <a:off x="530352" y="3159251"/>
-            <a:ext cx="3478682" cy="621792"/>
-          </a:xfrm>
-          <a:prstGeom prst="rect">
-            <a:avLst/>
-          </a:prstGeom>
-          <a:noFill/>
-        </p:spPr>
-        <p:txBody>
-          <a:bodyPr wrap="square" anchor="t"/>
-          <a:lstStyle/>
-          <a:p>
-            <a:pPr algn="ctr"/>
-            <a:r>
-              <a:rPr sz="1300" b="1" i="0">
-                <a:solidFill>
-                  <a:srgbClr val="095292"/>
-                </a:solidFill>
-                <a:latin typeface="Calibri"/>
-              </a:rPr>
-              <a:t>Draw.Io</a:t>
-            </a:r>
-          </a:p>
-          <a:p>
-            <a:pPr algn="ctr">
-              <a:spcBef>
-                <a:spcPts val="200"/>
-              </a:spcBef>
+            <a:pPr>
+              <a:spcAft>
+                <a:spcPts val="800"/>
+              </a:spcAft>
             </a:pPr>
             <a:r>
-              <a:rPr sz="1000" b="0" i="0">
-                <a:solidFill>
-                  <a:srgbClr val="666666"/>
-                </a:solidFill>
-                <a:latin typeface="Calibri"/>
-              </a:rPr>
-              <a:t>Diagramas UML y de contexto</a:t>
-            </a:r>
-          </a:p>
-        </p:txBody>
-      </p:sp>
-      <p:sp>
-        <p:nvSpPr>
-          <p:cNvPr id="11" name="Rounded Rectangle 10"/>
-          <p:cNvSpPr/>
-          <p:nvPr/>
-        </p:nvSpPr>
-        <p:spPr>
-          <a:xfrm>
-            <a:off x="4283354" y="1591056"/>
-            <a:ext cx="3624986" cy="2299716"/>
-          </a:xfrm>
-          <a:prstGeom prst="roundRect">
-            <a:avLst>
-              <a:gd name="adj" fmla="val 12000"/>
-            </a:avLst>
-          </a:prstGeom>
-          <a:solidFill>
-            <a:srgbClr val="F2F2F2"/>
-          </a:solidFill>
-          <a:ln>
-            <a:noFill/>
-          </a:ln>
-        </p:spPr>
-        <p:style>
-          <a:lnRef idx="1">
-            <a:schemeClr val="accent1"/>
-          </a:lnRef>
-          <a:fillRef idx="3">
-            <a:schemeClr val="accent1"/>
-          </a:fillRef>
-          <a:effectRef idx="2">
-            <a:schemeClr val="accent1"/>
-          </a:effectRef>
-          <a:fontRef idx="minor">
-            <a:schemeClr val="lt1"/>
-          </a:fontRef>
-        </p:style>
-        <p:txBody>
-          <a:bodyPr rtlCol="0" anchor="ctr"/>
-          <a:lstStyle/>
-          <a:p>
-            <a:pPr algn="ctr"/>
-          </a:p>
-        </p:txBody>
-      </p:sp>
-      <p:sp>
-        <p:nvSpPr>
-          <p:cNvPr id="12" name="Rectangle 11"/>
-          <p:cNvSpPr/>
-          <p:nvPr/>
-        </p:nvSpPr>
-        <p:spPr>
-          <a:xfrm>
-            <a:off x="4283354" y="1591056"/>
-            <a:ext cx="3624986" cy="64008"/>
-          </a:xfrm>
-          <a:prstGeom prst="rect">
-            <a:avLst/>
-          </a:prstGeom>
-          <a:solidFill>
-            <a:srgbClr val="095292"/>
-          </a:solidFill>
-          <a:ln>
-            <a:noFill/>
-          </a:ln>
-        </p:spPr>
-        <p:style>
-          <a:lnRef idx="1">
-            <a:schemeClr val="accent1"/>
-          </a:lnRef>
-          <a:fillRef idx="3">
-            <a:schemeClr val="accent1"/>
-          </a:fillRef>
-          <a:effectRef idx="2">
-            <a:schemeClr val="accent1"/>
-          </a:effectRef>
-          <a:fontRef idx="minor">
-            <a:schemeClr val="lt1"/>
-          </a:fontRef>
-        </p:style>
-        <p:txBody>
-          <a:bodyPr rtlCol="0" anchor="ctr"/>
-          <a:lstStyle/>
-          <a:p>
-            <a:pPr algn="ctr"/>
-          </a:p>
-        </p:txBody>
-      </p:sp>
-      <p:sp>
-        <p:nvSpPr>
-          <p:cNvPr id="13" name="Rectangle 12"/>
-          <p:cNvSpPr/>
-          <p:nvPr/>
-        </p:nvSpPr>
-        <p:spPr>
-          <a:xfrm>
-            <a:off x="4283354" y="1655064"/>
-            <a:ext cx="3624986" cy="27432"/>
-          </a:xfrm>
-          <a:prstGeom prst="rect">
-            <a:avLst/>
-          </a:prstGeom>
-          <a:solidFill>
-            <a:srgbClr val="FFD000"/>
-          </a:solidFill>
-          <a:ln>
-            <a:noFill/>
-          </a:ln>
-        </p:spPr>
-        <p:style>
-          <a:lnRef idx="1">
-            <a:schemeClr val="accent1"/>
-          </a:lnRef>
-          <a:fillRef idx="3">
-            <a:schemeClr val="accent1"/>
-          </a:fillRef>
-          <a:effectRef idx="2">
-            <a:schemeClr val="accent1"/>
-          </a:effectRef>
-          <a:fontRef idx="minor">
-            <a:schemeClr val="lt1"/>
-          </a:fontRef>
-        </p:style>
-        <p:txBody>
-          <a:bodyPr rtlCol="0" anchor="ctr"/>
-          <a:lstStyle/>
-          <a:p>
-            <a:pPr algn="ctr"/>
-          </a:p>
-        </p:txBody>
-      </p:sp>
-      <p:pic>
-        <p:nvPicPr>
-          <p:cNvPr id="14" name="Picture 13" descr="excalidraw.png"/>
-          <p:cNvPicPr>
-            <a:picLocks noChangeAspect="1"/>
-          </p:cNvPicPr>
-          <p:nvPr/>
-        </p:nvPicPr>
-        <p:blipFill>
-          <a:blip r:embed="rId3"/>
-          <a:stretch>
-            <a:fillRect/>
-          </a:stretch>
-        </p:blipFill>
-        <p:spPr>
-          <a:xfrm>
-            <a:off x="5485485" y="1847087"/>
-            <a:ext cx="1220724" cy="1220724"/>
-          </a:xfrm>
-          <a:prstGeom prst="rect">
-            <a:avLst/>
-          </a:prstGeom>
-        </p:spPr>
-      </p:pic>
-      <p:sp>
-        <p:nvSpPr>
-          <p:cNvPr id="15" name="TextBox 14"/>
-          <p:cNvSpPr txBox="1"/>
-          <p:nvPr/>
-        </p:nvSpPr>
-        <p:spPr>
-          <a:xfrm>
-            <a:off x="4356506" y="3159251"/>
-            <a:ext cx="3478682" cy="621792"/>
-          </a:xfrm>
-          <a:prstGeom prst="rect">
-            <a:avLst/>
-          </a:prstGeom>
-          <a:noFill/>
-        </p:spPr>
-        <p:txBody>
-          <a:bodyPr wrap="square" anchor="t"/>
-          <a:lstStyle/>
-          <a:p>
-            <a:pPr algn="ctr"/>
-            <a:r>
-              <a:rPr sz="1300" b="1" i="0">
-                <a:solidFill>
-                  <a:srgbClr val="095292"/>
-                </a:solidFill>
-                <a:latin typeface="Calibri"/>
-              </a:rPr>
-              <a:t>Excalidraw</a:t>
-            </a:r>
-          </a:p>
-          <a:p>
-            <a:pPr algn="ctr">
-              <a:spcBef>
-                <a:spcPts val="200"/>
-              </a:spcBef>
+              <a:rPr sz="2000" b="0" i="0">
+                <a:solidFill>
+                  <a:srgbClr val="333333"/>
+                </a:solidFill>
+                <a:latin typeface="Calibri"/>
+              </a:rPr>
+              <a:t>–   Hay dos palabras que se usan como sinonimos y significan cosas distintas: iteracion e incremento.</a:t>
+            </a:r>
+          </a:p>
+          <a:p>
+            <a:pPr>
+              <a:spcAft>
+                <a:spcPts val="800"/>
+              </a:spcAft>
             </a:pPr>
             <a:r>
-              <a:rPr sz="1000" b="0" i="0">
-                <a:solidFill>
-                  <a:srgbClr val="666666"/>
-                </a:solidFill>
-                <a:latin typeface="Calibri"/>
-              </a:rPr>
-              <a:t>Bocetos rapidos a mano alzada</a:t>
-            </a:r>
-          </a:p>
-        </p:txBody>
-      </p:sp>
-      <p:sp>
-        <p:nvSpPr>
-          <p:cNvPr id="16" name="Rounded Rectangle 15"/>
-          <p:cNvSpPr/>
-          <p:nvPr/>
-        </p:nvSpPr>
-        <p:spPr>
-          <a:xfrm>
-            <a:off x="8109508" y="1591056"/>
-            <a:ext cx="3624986" cy="2299716"/>
-          </a:xfrm>
-          <a:prstGeom prst="roundRect">
-            <a:avLst>
-              <a:gd name="adj" fmla="val 12000"/>
-            </a:avLst>
-          </a:prstGeom>
-          <a:solidFill>
-            <a:srgbClr val="F2F2F2"/>
-          </a:solidFill>
-          <a:ln>
-            <a:noFill/>
-          </a:ln>
-        </p:spPr>
-        <p:style>
-          <a:lnRef idx="1">
-            <a:schemeClr val="accent1"/>
-          </a:lnRef>
-          <a:fillRef idx="3">
-            <a:schemeClr val="accent1"/>
-          </a:fillRef>
-          <a:effectRef idx="2">
-            <a:schemeClr val="accent1"/>
-          </a:effectRef>
-          <a:fontRef idx="minor">
-            <a:schemeClr val="lt1"/>
-          </a:fontRef>
-        </p:style>
-        <p:txBody>
-          <a:bodyPr rtlCol="0" anchor="ctr"/>
-          <a:lstStyle/>
-          <a:p>
-            <a:pPr algn="ctr"/>
-          </a:p>
-        </p:txBody>
-      </p:sp>
-      <p:sp>
-        <p:nvSpPr>
-          <p:cNvPr id="17" name="Rectangle 16"/>
-          <p:cNvSpPr/>
-          <p:nvPr/>
-        </p:nvSpPr>
-        <p:spPr>
-          <a:xfrm>
-            <a:off x="8109508" y="1591056"/>
-            <a:ext cx="3624986" cy="64008"/>
-          </a:xfrm>
-          <a:prstGeom prst="rect">
-            <a:avLst/>
-          </a:prstGeom>
-          <a:solidFill>
-            <a:srgbClr val="095292"/>
-          </a:solidFill>
-          <a:ln>
-            <a:noFill/>
-          </a:ln>
-        </p:spPr>
-        <p:style>
-          <a:lnRef idx="1">
-            <a:schemeClr val="accent1"/>
-          </a:lnRef>
-          <a:fillRef idx="3">
-            <a:schemeClr val="accent1"/>
-          </a:fillRef>
-          <a:effectRef idx="2">
-            <a:schemeClr val="accent1"/>
-          </a:effectRef>
-          <a:fontRef idx="minor">
-            <a:schemeClr val="lt1"/>
-          </a:fontRef>
-        </p:style>
-        <p:txBody>
-          <a:bodyPr rtlCol="0" anchor="ctr"/>
-          <a:lstStyle/>
-          <a:p>
-            <a:pPr algn="ctr"/>
-          </a:p>
-        </p:txBody>
-      </p:sp>
-      <p:sp>
-        <p:nvSpPr>
-          <p:cNvPr id="18" name="Rectangle 17"/>
-          <p:cNvSpPr/>
-          <p:nvPr/>
-        </p:nvSpPr>
-        <p:spPr>
-          <a:xfrm>
-            <a:off x="8109508" y="1655064"/>
-            <a:ext cx="3624986" cy="27432"/>
-          </a:xfrm>
-          <a:prstGeom prst="rect">
-            <a:avLst/>
-          </a:prstGeom>
-          <a:solidFill>
-            <a:srgbClr val="FFD000"/>
-          </a:solidFill>
-          <a:ln>
-            <a:noFill/>
-          </a:ln>
-        </p:spPr>
-        <p:style>
-          <a:lnRef idx="1">
-            <a:schemeClr val="accent1"/>
-          </a:lnRef>
-          <a:fillRef idx="3">
-            <a:schemeClr val="accent1"/>
-          </a:fillRef>
-          <a:effectRef idx="2">
-            <a:schemeClr val="accent1"/>
-          </a:effectRef>
-          <a:fontRef idx="minor">
-            <a:schemeClr val="lt1"/>
-          </a:fontRef>
-        </p:style>
-        <p:txBody>
-          <a:bodyPr rtlCol="0" anchor="ctr"/>
-          <a:lstStyle/>
-          <a:p>
-            <a:pPr algn="ctr"/>
-          </a:p>
-        </p:txBody>
-      </p:sp>
-      <p:pic>
-        <p:nvPicPr>
-          <p:cNvPr id="19" name="Picture 18" descr="google_docs.png"/>
-          <p:cNvPicPr>
-            <a:picLocks noChangeAspect="1"/>
-          </p:cNvPicPr>
-          <p:nvPr/>
-        </p:nvPicPr>
-        <p:blipFill>
-          <a:blip r:embed="rId4"/>
-          <a:stretch>
-            <a:fillRect/>
-          </a:stretch>
-        </p:blipFill>
-        <p:spPr>
-          <a:xfrm>
-            <a:off x="9311640" y="1847087"/>
-            <a:ext cx="1220724" cy="1220724"/>
-          </a:xfrm>
-          <a:prstGeom prst="rect">
-            <a:avLst/>
-          </a:prstGeom>
-        </p:spPr>
-      </p:pic>
-      <p:sp>
-        <p:nvSpPr>
-          <p:cNvPr id="20" name="TextBox 19"/>
-          <p:cNvSpPr txBox="1"/>
-          <p:nvPr/>
-        </p:nvSpPr>
-        <p:spPr>
-          <a:xfrm>
-            <a:off x="8182660" y="3159251"/>
-            <a:ext cx="3478682" cy="621792"/>
-          </a:xfrm>
-          <a:prstGeom prst="rect">
-            <a:avLst/>
-          </a:prstGeom>
-          <a:noFill/>
-        </p:spPr>
-        <p:txBody>
-          <a:bodyPr wrap="square" anchor="t"/>
-          <a:lstStyle/>
-          <a:p>
-            <a:pPr algn="ctr"/>
-            <a:r>
-              <a:rPr sz="1300" b="1" i="0">
-                <a:solidFill>
-                  <a:srgbClr val="095292"/>
-                </a:solidFill>
-                <a:latin typeface="Calibri"/>
-              </a:rPr>
-              <a:t>google docs</a:t>
-            </a:r>
-          </a:p>
-          <a:p>
-            <a:pPr algn="ctr">
-              <a:spcBef>
-                <a:spcPts val="200"/>
-              </a:spcBef>
+              <a:rPr sz="2000" b="0" i="0">
+                <a:solidFill>
+                  <a:srgbClr val="333333"/>
+                </a:solidFill>
+                <a:latin typeface="Calibri"/>
+              </a:rPr>
+              <a:t>–   Incremento es agregar un pedazo nuevo y utilizable al sistema; iteracion es volver sobre algo que ya existe y mejorarlo con base en la retroalimentacion.</a:t>
+            </a:r>
+          </a:p>
+          <a:p>
+            <a:pPr>
+              <a:spcAft>
+                <a:spcPts val="800"/>
+              </a:spcAft>
             </a:pPr>
             <a:r>
-              <a:rPr sz="1000" b="0" i="0">
-                <a:solidFill>
-                  <a:srgbClr val="666666"/>
-                </a:solidFill>
-                <a:latin typeface="Calibri"/>
-              </a:rPr>
-              <a:t>Documentos del paquete de diseño</a:t>
-            </a:r>
-          </a:p>
-        </p:txBody>
-      </p:sp>
-      <p:sp>
-        <p:nvSpPr>
-          <p:cNvPr id="21" name="Rounded Rectangle 20"/>
-          <p:cNvSpPr/>
-          <p:nvPr/>
-        </p:nvSpPr>
-        <p:spPr>
-          <a:xfrm>
-            <a:off x="4283354" y="4055364"/>
-            <a:ext cx="3624986" cy="2299716"/>
-          </a:xfrm>
-          <a:prstGeom prst="roundRect">
-            <a:avLst>
-              <a:gd name="adj" fmla="val 12000"/>
-            </a:avLst>
-          </a:prstGeom>
-          <a:solidFill>
-            <a:srgbClr val="F2F2F2"/>
-          </a:solidFill>
-          <a:ln>
-            <a:noFill/>
-          </a:ln>
-        </p:spPr>
-        <p:style>
-          <a:lnRef idx="1">
-            <a:schemeClr val="accent1"/>
-          </a:lnRef>
-          <a:fillRef idx="3">
-            <a:schemeClr val="accent1"/>
-          </a:fillRef>
-          <a:effectRef idx="2">
-            <a:schemeClr val="accent1"/>
-          </a:effectRef>
-          <a:fontRef idx="minor">
-            <a:schemeClr val="lt1"/>
-          </a:fontRef>
-        </p:style>
-        <p:txBody>
-          <a:bodyPr rtlCol="0" anchor="ctr"/>
-          <a:lstStyle/>
-          <a:p>
-            <a:pPr algn="ctr"/>
-          </a:p>
-        </p:txBody>
-      </p:sp>
-      <p:sp>
-        <p:nvSpPr>
-          <p:cNvPr id="22" name="Rectangle 21"/>
-          <p:cNvSpPr/>
-          <p:nvPr/>
-        </p:nvSpPr>
-        <p:spPr>
-          <a:xfrm>
-            <a:off x="4283354" y="4055364"/>
-            <a:ext cx="3624986" cy="64008"/>
-          </a:xfrm>
-          <a:prstGeom prst="rect">
-            <a:avLst/>
-          </a:prstGeom>
-          <a:solidFill>
-            <a:srgbClr val="095292"/>
-          </a:solidFill>
-          <a:ln>
-            <a:noFill/>
-          </a:ln>
-        </p:spPr>
-        <p:style>
-          <a:lnRef idx="1">
-            <a:schemeClr val="accent1"/>
-          </a:lnRef>
-          <a:fillRef idx="3">
-            <a:schemeClr val="accent1"/>
-          </a:fillRef>
-          <a:effectRef idx="2">
-            <a:schemeClr val="accent1"/>
-          </a:effectRef>
-          <a:fontRef idx="minor">
-            <a:schemeClr val="lt1"/>
-          </a:fontRef>
-        </p:style>
-        <p:txBody>
-          <a:bodyPr rtlCol="0" anchor="ctr"/>
-          <a:lstStyle/>
-          <a:p>
-            <a:pPr algn="ctr"/>
-          </a:p>
-        </p:txBody>
-      </p:sp>
-      <p:sp>
-        <p:nvSpPr>
-          <p:cNvPr id="23" name="Rectangle 22"/>
-          <p:cNvSpPr/>
-          <p:nvPr/>
-        </p:nvSpPr>
-        <p:spPr>
-          <a:xfrm>
-            <a:off x="4283354" y="4119372"/>
-            <a:ext cx="3624986" cy="27432"/>
-          </a:xfrm>
-          <a:prstGeom prst="rect">
-            <a:avLst/>
-          </a:prstGeom>
-          <a:solidFill>
-            <a:srgbClr val="FFD000"/>
-          </a:solidFill>
-          <a:ln>
-            <a:noFill/>
-          </a:ln>
-        </p:spPr>
-        <p:style>
-          <a:lnRef idx="1">
-            <a:schemeClr val="accent1"/>
-          </a:lnRef>
-          <a:fillRef idx="3">
-            <a:schemeClr val="accent1"/>
-          </a:fillRef>
-          <a:effectRef idx="2">
-            <a:schemeClr val="accent1"/>
-          </a:effectRef>
-          <a:fontRef idx="minor">
-            <a:schemeClr val="lt1"/>
-          </a:fontRef>
-        </p:style>
-        <p:txBody>
-          <a:bodyPr rtlCol="0" anchor="ctr"/>
-          <a:lstStyle/>
-          <a:p>
-            <a:pPr algn="ctr"/>
-          </a:p>
-        </p:txBody>
-      </p:sp>
-      <p:pic>
-        <p:nvPicPr>
-          <p:cNvPr id="24" name="Picture 23" descr="examlab.png"/>
-          <p:cNvPicPr>
-            <a:picLocks noChangeAspect="1"/>
-          </p:cNvPicPr>
-          <p:nvPr/>
-        </p:nvPicPr>
-        <p:blipFill>
-          <a:blip r:embed="rId5"/>
-          <a:stretch>
-            <a:fillRect/>
-          </a:stretch>
-        </p:blipFill>
-        <p:spPr>
-          <a:xfrm>
-            <a:off x="5485485" y="4311396"/>
-            <a:ext cx="1220724" cy="1220724"/>
-          </a:xfrm>
-          <a:prstGeom prst="rect">
-            <a:avLst/>
-          </a:prstGeom>
-        </p:spPr>
-      </p:pic>
-      <p:sp>
-        <p:nvSpPr>
-          <p:cNvPr id="25" name="TextBox 24"/>
-          <p:cNvSpPr txBox="1"/>
-          <p:nvPr/>
-        </p:nvSpPr>
-        <p:spPr>
-          <a:xfrm>
-            <a:off x="4356506" y="5623560"/>
-            <a:ext cx="3478682" cy="621792"/>
-          </a:xfrm>
-          <a:prstGeom prst="rect">
-            <a:avLst/>
-          </a:prstGeom>
-          <a:noFill/>
-        </p:spPr>
-        <p:txBody>
-          <a:bodyPr wrap="square" anchor="t"/>
-          <a:lstStyle/>
-          <a:p>
-            <a:pPr algn="ctr"/>
-            <a:r>
-              <a:rPr sz="1300" b="1" i="0">
-                <a:solidFill>
-                  <a:srgbClr val="095292"/>
-                </a:solidFill>
-                <a:latin typeface="Calibri"/>
-              </a:rPr>
-              <a:t>la plataforma del curso</a:t>
-            </a:r>
-          </a:p>
-          <a:p>
-            <a:pPr algn="ctr">
-              <a:spcBef>
-                <a:spcPts val="200"/>
-              </a:spcBef>
+              <a:rPr sz="2000" b="0" i="0">
+                <a:solidFill>
+                  <a:srgbClr val="333333"/>
+                </a:solidFill>
+                <a:latin typeface="Calibri"/>
+              </a:rPr>
+              <a:t>–   Agil hace las dos cosas al mismo tiempo.</a:t>
+            </a:r>
+          </a:p>
+          <a:p>
+            <a:pPr>
+              <a:spcAft>
+                <a:spcPts val="800"/>
+              </a:spcAft>
             </a:pPr>
             <a:r>
-              <a:rPr sz="1000" b="0" i="0">
-                <a:solidFill>
-                  <a:srgbClr val="666666"/>
-                </a:solidFill>
-                <a:latin typeface="Calibri"/>
-              </a:rPr>
-              <a:t>Entrega del taller · en la fecha que indique el docente</a:t>
-            </a:r>
-          </a:p>
-        </p:txBody>
-      </p:sp>
-      <p:sp>
-        <p:nvSpPr>
-          <p:cNvPr id="26" name="TextBox 25"/>
+              <a:rPr sz="2000" b="0" i="0">
+                <a:solidFill>
+                  <a:srgbClr val="333333"/>
+                </a:solidFill>
+                <a:latin typeface="Calibri"/>
+              </a:rPr>
+              <a:t>–   En VetCare el incremento 1 es el mockup de la ficha del paciente; cuando la veterinaria lo mira y dice 'me falta el campo de alergias y la foto de la mascota', y el equipo produce la version 2 de ese mismo mockup, eso es iteracion.</a:t>
+            </a:r>
+          </a:p>
+          <a:p>
+            <a:pPr>
+              <a:spcAft>
+                <a:spcPts val="800"/>
+              </a:spcAft>
+            </a:pPr>
+            <a:r>
+              <a:rPr sz="2000" b="0" i="0">
+                <a:solidFill>
+                  <a:srgbClr val="333333"/>
+                </a:solidFill>
+                <a:latin typeface="Calibri"/>
+              </a:rPr>
+              <a:t>–   Y aqui aparece una regla practica que salva proyectos: cada entrega debe ser una rebanada vertical, algo que el cliente pueda ver y opinar, no una capa horizontal invisible.</a:t>
+            </a:r>
+          </a:p>
+          <a:p>
+            <a:pPr>
+              <a:spcAft>
+                <a:spcPts val="800"/>
+              </a:spcAft>
+            </a:pPr>
+            <a:r>
+              <a:rPr sz="2000" b="0" i="0">
+                <a:solidFill>
+                  <a:srgbClr val="333333"/>
+                </a:solidFill>
+                <a:latin typeface="Calibri"/>
+              </a:rPr>
+              <a:t>–   Entregar 'todas las tablas de la base de datos' no es un incremento util para Huellitas; entregar 'registrar y consultar una ficha completa de principio a fin' si lo es.</a:t>
+            </a:r>
+          </a:p>
+        </p:txBody>
+      </p:sp>
+      <p:sp>
+        <p:nvSpPr>
+          <p:cNvPr id="6" name="TextBox 5"/>
           <p:cNvSpPr txBox="1"/>
           <p:nvPr/>
         </p:nvSpPr>
@@ -9855,7 +10714,7 @@
                 </a:solidFill>
                 <a:latin typeface="Calibri"/>
               </a:rPr>
-              <a:t>Taller PI — por que importa</a:t>
+              <a:t>Agil no significa trabajar sin documentacion, y este es el malentendido...</a:t>
             </a:r>
           </a:p>
         </p:txBody>
@@ -9894,25 +10753,7 @@
                 </a:solidFill>
                 <a:latin typeface="Calibri"/>
               </a:rPr>
-              <a:t>–   </a:t>
-            </a:r>
-            <a:r>
-              <a:rPr sz="2000" b="1" i="0">
-                <a:solidFill>
-                  <a:srgbClr val="333333"/>
-                </a:solidFill>
-                <a:latin typeface="Calibri"/>
-              </a:rPr>
-              <a:t>Por que importa al PI:</a:t>
-            </a:r>
-            <a:r>
-              <a:rPr sz="2000" b="0" i="0">
-                <a:solidFill>
-                  <a:srgbClr val="333333"/>
-                </a:solidFill>
-                <a:latin typeface="Calibri"/>
-              </a:rPr>
-              <a:t> el semestre completo de VetCare se va a organizar como sprints, y lo que se defina hoy en el backlog es literalmente el orden en que se van a producir los planos.</a:t>
+              <a:t>–   Agil no significa trabajar sin documentacion, y este es el malentendido que mas daño hace.</a:t>
             </a:r>
           </a:p>
           <a:p>
@@ -9928,7 +10769,7 @@
                 </a:solidFill>
                 <a:latin typeface="Calibri"/>
               </a:rPr>
-              <a:t>–   Ya vimos el enfoque tradicional y su documentacion formal; hoy se ve el otro extremo del espectro y se aprende a decidir cual parte de VetCare conviene tratar de cada forma.</a:t>
+              <a:t>–   El manifiesto dice software funcionando sobre documentacion exhaustiva: lo que se rechaza es el documento inflado que nadie lee, no el documento util.</a:t>
             </a:r>
           </a:p>
           <a:p>
@@ -9944,7 +10785,39 @@
                 </a:solidFill>
                 <a:latin typeface="Calibri"/>
               </a:rPr>
-              <a:t>–   Aqui se aclara de una vez el malentendido mas costoso del curso: agil no es la excusa para no documentar, y en esta asignatura la documentacion de diseño es justamente el incremento entregable.</a:t>
+              <a:t>–   Un equipo agil documenta historias de usuario con criterios de aceptacion, la Definicion de Terminado, las decisiones de arquitectura, el diccionario de datos y los diagramas que hagan falta, pero los escribe justo a tiempo y los mantiene vivos.</a:t>
+            </a:r>
+          </a:p>
+          <a:p>
+            <a:pPr>
+              <a:spcAft>
+                <a:spcPts val="800"/>
+              </a:spcAft>
+            </a:pPr>
+            <a:r>
+              <a:rPr sz="2000" b="0" i="0">
+                <a:solidFill>
+                  <a:srgbClr val="333333"/>
+                </a:solidFill>
+                <a:latin typeface="Calibri"/>
+              </a:rPr>
+              <a:t>–   Para nuestro Proyecto Integrador esto es central: en Seminario de Sistemas el entregable ES documentacion de diseño, y aun asi el trabajo puede ser perfectamente agil, porque se produce por incrementos, se revisa con el cliente y se corrige.</a:t>
+            </a:r>
+          </a:p>
+          <a:p>
+            <a:pPr>
+              <a:spcAft>
+                <a:spcPts val="800"/>
+              </a:spcAft>
+            </a:pPr>
+            <a:r>
+              <a:rPr sz="2000" b="0" i="0">
+                <a:solidFill>
+                  <a:srgbClr val="333333"/>
+                </a:solidFill>
+                <a:latin typeface="Calibri"/>
+              </a:rPr>
+              <a:t>–   El estudiante que solo cursa esta materia trabaja con sprints igual que los demas: sus incrementos son mockups, casos de uso y diccionario de datos, y cierra con un prototipo navegable que se puede recorrer y criticar.</a:t>
             </a:r>
           </a:p>
         </p:txBody>
@@ -10125,21 +10998,141 @@
                 </a:solidFill>
                 <a:latin typeface="Calibri"/>
               </a:rPr>
-              <a:t>Taller PI — punto de partida</a:t>
-            </a:r>
-          </a:p>
-        </p:txBody>
-      </p:sp>
-      <p:sp>
-        <p:nvSpPr>
-          <p:cNvPr id="5" name="TextBox 4"/>
+              <a:t>Historia de usuario de VetCare con criterios de aceptacion</a:t>
+            </a:r>
+          </a:p>
+        </p:txBody>
+      </p:sp>
+      <p:sp>
+        <p:nvSpPr>
+          <p:cNvPr id="5" name="Rounded Rectangle 4"/>
+          <p:cNvSpPr/>
+          <p:nvPr/>
+        </p:nvSpPr>
+        <p:spPr>
+          <a:xfrm>
+            <a:off x="457200" y="1261872"/>
+            <a:ext cx="11277295" cy="4773168"/>
+          </a:xfrm>
+          <a:prstGeom prst="roundRect">
+            <a:avLst>
+              <a:gd name="adj" fmla="val 12000"/>
+            </a:avLst>
+          </a:prstGeom>
+          <a:solidFill>
+            <a:srgbClr val="1E2A38"/>
+          </a:solidFill>
+          <a:ln>
+            <a:noFill/>
+          </a:ln>
+        </p:spPr>
+        <p:style>
+          <a:lnRef idx="1">
+            <a:schemeClr val="accent1"/>
+          </a:lnRef>
+          <a:fillRef idx="3">
+            <a:schemeClr val="accent1"/>
+          </a:fillRef>
+          <a:effectRef idx="2">
+            <a:schemeClr val="accent1"/>
+          </a:effectRef>
+          <a:fontRef idx="minor">
+            <a:schemeClr val="lt1"/>
+          </a:fontRef>
+        </p:style>
+        <p:txBody>
+          <a:bodyPr rtlCol="0" anchor="ctr"/>
+          <a:lstStyle/>
+          <a:p>
+            <a:pPr algn="ctr"/>
+          </a:p>
+        </p:txBody>
+      </p:sp>
+      <p:sp>
+        <p:nvSpPr>
+          <p:cNvPr id="6" name="Rectangle 5"/>
+          <p:cNvSpPr/>
+          <p:nvPr/>
+        </p:nvSpPr>
+        <p:spPr>
+          <a:xfrm>
+            <a:off x="457200" y="1261872"/>
+            <a:ext cx="11277295" cy="320040"/>
+          </a:xfrm>
+          <a:prstGeom prst="rect">
+            <a:avLst/>
+          </a:prstGeom>
+          <a:solidFill>
+            <a:srgbClr val="095292"/>
+          </a:solidFill>
+          <a:ln>
+            <a:noFill/>
+          </a:ln>
+        </p:spPr>
+        <p:style>
+          <a:lnRef idx="1">
+            <a:schemeClr val="accent1"/>
+          </a:lnRef>
+          <a:fillRef idx="3">
+            <a:schemeClr val="accent1"/>
+          </a:fillRef>
+          <a:effectRef idx="2">
+            <a:schemeClr val="accent1"/>
+          </a:effectRef>
+          <a:fontRef idx="minor">
+            <a:schemeClr val="lt1"/>
+          </a:fontRef>
+        </p:style>
+        <p:txBody>
+          <a:bodyPr rtlCol="0" anchor="ctr"/>
+          <a:lstStyle/>
+          <a:p>
+            <a:pPr algn="ctr"/>
+          </a:p>
+        </p:txBody>
+      </p:sp>
+      <p:sp>
+        <p:nvSpPr>
+          <p:cNvPr id="7" name="TextBox 6"/>
           <p:cNvSpPr txBox="1"/>
           <p:nvPr/>
         </p:nvSpPr>
         <p:spPr>
           <a:xfrm>
-            <a:off x="457200" y="1170432"/>
-            <a:ext cx="11277295" cy="5230368"/>
+            <a:off x="685800" y="1307592"/>
+            <a:ext cx="10820095" cy="256032"/>
+          </a:xfrm>
+          <a:prstGeom prst="rect">
+            <a:avLst/>
+          </a:prstGeom>
+          <a:noFill/>
+        </p:spPr>
+        <p:txBody>
+          <a:bodyPr wrap="square" anchor="ctr"/>
+          <a:lstStyle/>
+          <a:p>
+            <a:r>
+              <a:rPr sz="1000" b="1" i="0">
+                <a:solidFill>
+                  <a:srgbClr val="269CCB"/>
+                </a:solidFill>
+                <a:latin typeface="Calibri"/>
+              </a:rPr>
+              <a:t>● ● ●</a:t>
+            </a:r>
+          </a:p>
+        </p:txBody>
+      </p:sp>
+      <p:sp>
+        <p:nvSpPr>
+          <p:cNvPr id="8" name="TextBox 7"/>
+          <p:cNvSpPr txBox="1"/>
+          <p:nvPr/>
+        </p:nvSpPr>
+        <p:spPr>
+          <a:xfrm>
+            <a:off x="777240" y="1719072"/>
+            <a:ext cx="10637215" cy="4133087"/>
           </a:xfrm>
           <a:prstGeom prst="rect">
             <a:avLst/>
@@ -10154,56 +11147,267 @@
           <a:p>
             <a:pPr>
               <a:spcAft>
-                <a:spcPts val="800"/>
+                <a:spcPts val="400"/>
               </a:spcAft>
             </a:pPr>
             <a:r>
-              <a:rPr sz="2000" b="0" i="0">
-                <a:solidFill>
-                  <a:srgbClr val="333333"/>
-                </a:solidFill>
-                <a:latin typeface="Calibri"/>
-              </a:rPr>
-              <a:t>–   El equipo tiene requisitos escritos y un mapa de fases, pero no tiene ningun orden de trabajo: todos quieren empezar por la pantalla que les parece mas bonita.</a:t>
+              <a:rPr sz="1400" b="0" i="0">
+                <a:solidFill>
+                  <a:srgbClr val="FFFFFF"/>
+                </a:solidFill>
+                <a:latin typeface="Calibri"/>
+              </a:rPr>
+              <a:t>HU-07  Buscar historia clinica</a:t>
             </a:r>
           </a:p>
           <a:p>
             <a:pPr>
               <a:spcAft>
-                <a:spcPts val="800"/>
+                <a:spcPts val="400"/>
               </a:spcAft>
             </a:pPr>
             <a:r>
-              <a:rPr sz="2000" b="0" i="0">
-                <a:solidFill>
-                  <a:srgbClr val="333333"/>
-                </a:solidFill>
-                <a:latin typeface="Calibri"/>
-              </a:rPr>
-              <a:t>–   La administradora de Huellitas puede dar retroalimentacion corta cada dos o tres semanas, pero no puede sentarse a leer un documento de ochenta paginas.</a:t>
+              <a:rPr sz="1400" b="0" i="0">
+                <a:solidFill>
+                  <a:srgbClr val="FFFFFF"/>
+                </a:solidFill>
+                <a:latin typeface="Calibri"/>
+              </a:rPr>
+              <a:t>  Como veterinaria de la clinica Huellitas</a:t>
             </a:r>
           </a:p>
           <a:p>
             <a:pPr>
               <a:spcAft>
-                <a:spcPts val="800"/>
+                <a:spcPts val="400"/>
               </a:spcAft>
             </a:pPr>
             <a:r>
-              <a:rPr sz="2000" b="0" i="0">
-                <a:solidFill>
-                  <a:srgbClr val="333333"/>
-                </a:solidFill>
-                <a:latin typeface="Calibri"/>
-              </a:rPr>
-              <a:t>–   En el grupo circula la idea de que agil significa no escribir nada y que 'ya lo iremos viendo sobre la marcha'.</a:t>
-            </a:r>
-          </a:p>
-        </p:txBody>
-      </p:sp>
-      <p:sp>
-        <p:nvSpPr>
-          <p:cNvPr id="6" name="TextBox 5"/>
+              <a:rPr sz="1400" b="0" i="0">
+                <a:solidFill>
+                  <a:srgbClr val="FFFFFF"/>
+                </a:solidFill>
+                <a:latin typeface="Calibri"/>
+              </a:rPr>
+              <a:t>  quiero buscar la historia clinica de una mascota por nombre o documento</a:t>
+            </a:r>
+          </a:p>
+          <a:p>
+            <a:pPr>
+              <a:spcAft>
+                <a:spcPts val="400"/>
+              </a:spcAft>
+            </a:pPr>
+            <a:r>
+              <a:rPr sz="1400" b="0" i="0">
+                <a:solidFill>
+                  <a:srgbClr val="FFFFFF"/>
+                </a:solidFill>
+                <a:latin typeface="Calibri"/>
+              </a:rPr>
+              <a:t>  para atender la consulta sin ir al archivador de papel.</a:t>
+            </a:r>
+          </a:p>
+          <a:p>
+            <a:pPr>
+              <a:spcAft>
+                <a:spcPts val="400"/>
+              </a:spcAft>
+            </a:pPr>
+            <a:r>
+              <a:rPr sz="1400" b="0" i="0">
+                <a:solidFill>
+                  <a:srgbClr val="FFFFFF"/>
+                </a:solidFill>
+                <a:latin typeface="Calibri"/>
+              </a:rPr>
+              <a:t/>
+            </a:r>
+          </a:p>
+          <a:p>
+            <a:pPr>
+              <a:spcAft>
+                <a:spcPts val="400"/>
+              </a:spcAft>
+            </a:pPr>
+            <a:r>
+              <a:rPr sz="1400" b="0" i="0">
+                <a:solidFill>
+                  <a:srgbClr val="FFFFFF"/>
+                </a:solidFill>
+                <a:latin typeface="Calibri"/>
+              </a:rPr>
+              <a:t>Criterios de aceptacion</a:t>
+            </a:r>
+          </a:p>
+          <a:p>
+            <a:pPr>
+              <a:spcAft>
+                <a:spcPts val="400"/>
+              </a:spcAft>
+            </a:pPr>
+            <a:r>
+              <a:rPr sz="1400" b="0" i="0">
+                <a:solidFill>
+                  <a:srgbClr val="FFFFFF"/>
+                </a:solidFill>
+                <a:latin typeface="Calibri"/>
+              </a:rPr>
+              <a:t>  Dado que la mascota Rocky esta registrada con el dueño CC 1.144.556</a:t>
+            </a:r>
+          </a:p>
+          <a:p>
+            <a:pPr>
+              <a:spcAft>
+                <a:spcPts val="400"/>
+              </a:spcAft>
+            </a:pPr>
+            <a:r>
+              <a:rPr sz="1400" b="0" i="0">
+                <a:solidFill>
+                  <a:srgbClr val="FFFFFF"/>
+                </a:solidFill>
+                <a:latin typeface="Calibri"/>
+              </a:rPr>
+              <a:t>  Cuando escribo Rocky en el buscador y presiono Enter</a:t>
+            </a:r>
+          </a:p>
+          <a:p>
+            <a:pPr>
+              <a:spcAft>
+                <a:spcPts val="400"/>
+              </a:spcAft>
+            </a:pPr>
+            <a:r>
+              <a:rPr sz="1400" b="0" i="0">
+                <a:solidFill>
+                  <a:srgbClr val="FFFFFF"/>
+                </a:solidFill>
+                <a:latin typeface="Calibri"/>
+              </a:rPr>
+              <a:t>  Entonces veo la ficha con especie, edad y las ultimas 3 consultas en &lt;= 3 s</a:t>
+            </a:r>
+          </a:p>
+          <a:p>
+            <a:pPr>
+              <a:spcAft>
+                <a:spcPts val="400"/>
+              </a:spcAft>
+            </a:pPr>
+            <a:r>
+              <a:rPr sz="1400" b="0" i="0">
+                <a:solidFill>
+                  <a:srgbClr val="FFFFFF"/>
+                </a:solidFill>
+                <a:latin typeface="Calibri"/>
+              </a:rPr>
+              <a:t/>
+            </a:r>
+          </a:p>
+          <a:p>
+            <a:pPr>
+              <a:spcAft>
+                <a:spcPts val="400"/>
+              </a:spcAft>
+            </a:pPr>
+            <a:r>
+              <a:rPr sz="1400" b="0" i="0">
+                <a:solidFill>
+                  <a:srgbClr val="FFFFFF"/>
+                </a:solidFill>
+                <a:latin typeface="Calibri"/>
+              </a:rPr>
+              <a:t>  Dado que escribo un nombre que no existe en el sistema</a:t>
+            </a:r>
+          </a:p>
+          <a:p>
+            <a:pPr>
+              <a:spcAft>
+                <a:spcPts val="400"/>
+              </a:spcAft>
+            </a:pPr>
+            <a:r>
+              <a:rPr sz="1400" b="0" i="0">
+                <a:solidFill>
+                  <a:srgbClr val="FFFFFF"/>
+                </a:solidFill>
+                <a:latin typeface="Calibri"/>
+              </a:rPr>
+              <a:t>  Cuando presiono Enter</a:t>
+            </a:r>
+          </a:p>
+          <a:p>
+            <a:pPr>
+              <a:spcAft>
+                <a:spcPts val="400"/>
+              </a:spcAft>
+            </a:pPr>
+            <a:r>
+              <a:rPr sz="1400" b="0" i="0">
+                <a:solidFill>
+                  <a:srgbClr val="FFFFFF"/>
+                </a:solidFill>
+                <a:latin typeface="Calibri"/>
+              </a:rPr>
+              <a:t>  Entonces veo 'No se encontro el paciente' y el boton Registrar nuevo</a:t>
+            </a:r>
+          </a:p>
+          <a:p>
+            <a:pPr>
+              <a:spcAft>
+                <a:spcPts val="400"/>
+              </a:spcAft>
+            </a:pPr>
+            <a:r>
+              <a:rPr sz="1400" b="0" i="0">
+                <a:solidFill>
+                  <a:srgbClr val="FFFFFF"/>
+                </a:solidFill>
+                <a:latin typeface="Calibri"/>
+              </a:rPr>
+              <a:t>Terminado = caso de uso + mockup + revision de un compañero + visto bueno del cliente</a:t>
+            </a:r>
+          </a:p>
+        </p:txBody>
+      </p:sp>
+      <p:sp>
+        <p:nvSpPr>
+          <p:cNvPr id="9" name="TextBox 8"/>
+          <p:cNvSpPr txBox="1"/>
+          <p:nvPr/>
+        </p:nvSpPr>
+        <p:spPr>
+          <a:xfrm>
+            <a:off x="457200" y="6080760"/>
+            <a:ext cx="11277295" cy="320040"/>
+          </a:xfrm>
+          <a:prstGeom prst="rect">
+            <a:avLst/>
+          </a:prstGeom>
+          <a:noFill/>
+        </p:spPr>
+        <p:txBody>
+          <a:bodyPr wrap="square">
+            <a:spAutoFit/>
+          </a:bodyPr>
+          <a:lstStyle/>
+          <a:p>
+            <a:pPr algn="ctr"/>
+            <a:r>
+              <a:rPr sz="1200" b="0" i="1">
+                <a:solidFill>
+                  <a:srgbClr val="666666"/>
+                </a:solidFill>
+                <a:latin typeface="Calibri"/>
+              </a:rPr>
+              <a:t>La historia dice quien la necesita y para que; los criterios dicen como se demuestra que quedo lista, incluido el camino que sale mal.</a:t>
+            </a:r>
+          </a:p>
+        </p:txBody>
+      </p:sp>
+      <p:sp>
+        <p:nvSpPr>
+          <p:cNvPr id="10" name="TextBox 9"/>
           <p:cNvSpPr txBox="1"/>
           <p:nvPr/>
         </p:nvSpPr>

--- a/Seminario de Sistemas/Clases/Clase 4 - Metodologias agiles/Presentacion.pptx
+++ b/Seminario de Sistemas/Clases/Clase 4 - Metodologias agiles/Presentacion.pptx
@@ -23,6 +23,7 @@
     <p:sldId id="271" r:id="rId22"/>
     <p:sldId id="272" r:id="rId23"/>
     <p:sldId id="273" r:id="rId24"/>
+    <p:sldId id="274" r:id="rId25"/>
   </p:sldIdLst>
   <p:sldSz cx="12191695" cy="6858000" type="screen4x3"/>
   <p:notesSz cx="6858000" cy="9144000"/>
@@ -3623,21 +3624,141 @@
                 </a:solidFill>
                 <a:latin typeface="Calibri"/>
               </a:rPr>
-              <a:t>Demo del dia</a:t>
-            </a:r>
-          </a:p>
-        </p:txBody>
-      </p:sp>
-      <p:sp>
-        <p:nvSpPr>
-          <p:cNvPr id="5" name="TextBox 4"/>
+              <a:t>Historia de usuario de VetCare con criterios de aceptacion</a:t>
+            </a:r>
+          </a:p>
+        </p:txBody>
+      </p:sp>
+      <p:sp>
+        <p:nvSpPr>
+          <p:cNvPr id="5" name="Rounded Rectangle 4"/>
+          <p:cNvSpPr/>
+          <p:nvPr/>
+        </p:nvSpPr>
+        <p:spPr>
+          <a:xfrm>
+            <a:off x="457200" y="1261872"/>
+            <a:ext cx="11277295" cy="4773168"/>
+          </a:xfrm>
+          <a:prstGeom prst="roundRect">
+            <a:avLst>
+              <a:gd name="adj" fmla="val 12000"/>
+            </a:avLst>
+          </a:prstGeom>
+          <a:solidFill>
+            <a:srgbClr val="1E2A38"/>
+          </a:solidFill>
+          <a:ln>
+            <a:noFill/>
+          </a:ln>
+        </p:spPr>
+        <p:style>
+          <a:lnRef idx="1">
+            <a:schemeClr val="accent1"/>
+          </a:lnRef>
+          <a:fillRef idx="3">
+            <a:schemeClr val="accent1"/>
+          </a:fillRef>
+          <a:effectRef idx="2">
+            <a:schemeClr val="accent1"/>
+          </a:effectRef>
+          <a:fontRef idx="minor">
+            <a:schemeClr val="lt1"/>
+          </a:fontRef>
+        </p:style>
+        <p:txBody>
+          <a:bodyPr rtlCol="0" anchor="ctr"/>
+          <a:lstStyle/>
+          <a:p>
+            <a:pPr algn="ctr"/>
+          </a:p>
+        </p:txBody>
+      </p:sp>
+      <p:sp>
+        <p:nvSpPr>
+          <p:cNvPr id="6" name="Rectangle 5"/>
+          <p:cNvSpPr/>
+          <p:nvPr/>
+        </p:nvSpPr>
+        <p:spPr>
+          <a:xfrm>
+            <a:off x="457200" y="1261872"/>
+            <a:ext cx="11277295" cy="320040"/>
+          </a:xfrm>
+          <a:prstGeom prst="rect">
+            <a:avLst/>
+          </a:prstGeom>
+          <a:solidFill>
+            <a:srgbClr val="095292"/>
+          </a:solidFill>
+          <a:ln>
+            <a:noFill/>
+          </a:ln>
+        </p:spPr>
+        <p:style>
+          <a:lnRef idx="1">
+            <a:schemeClr val="accent1"/>
+          </a:lnRef>
+          <a:fillRef idx="3">
+            <a:schemeClr val="accent1"/>
+          </a:fillRef>
+          <a:effectRef idx="2">
+            <a:schemeClr val="accent1"/>
+          </a:effectRef>
+          <a:fontRef idx="minor">
+            <a:schemeClr val="lt1"/>
+          </a:fontRef>
+        </p:style>
+        <p:txBody>
+          <a:bodyPr rtlCol="0" anchor="ctr"/>
+          <a:lstStyle/>
+          <a:p>
+            <a:pPr algn="ctr"/>
+          </a:p>
+        </p:txBody>
+      </p:sp>
+      <p:sp>
+        <p:nvSpPr>
+          <p:cNvPr id="7" name="TextBox 6"/>
           <p:cNvSpPr txBox="1"/>
           <p:nvPr/>
         </p:nvSpPr>
         <p:spPr>
           <a:xfrm>
-            <a:off x="457200" y="1170432"/>
-            <a:ext cx="11277295" cy="5230368"/>
+            <a:off x="685800" y="1307592"/>
+            <a:ext cx="10820095" cy="256032"/>
+          </a:xfrm>
+          <a:prstGeom prst="rect">
+            <a:avLst/>
+          </a:prstGeom>
+          <a:noFill/>
+        </p:spPr>
+        <p:txBody>
+          <a:bodyPr wrap="square" anchor="ctr"/>
+          <a:lstStyle/>
+          <a:p>
+            <a:r>
+              <a:rPr sz="1000" b="1" i="0">
+                <a:solidFill>
+                  <a:srgbClr val="269CCB"/>
+                </a:solidFill>
+                <a:latin typeface="Calibri"/>
+              </a:rPr>
+              <a:t>● ● ●</a:t>
+            </a:r>
+          </a:p>
+        </p:txBody>
+      </p:sp>
+      <p:sp>
+        <p:nvSpPr>
+          <p:cNvPr id="8" name="TextBox 7"/>
+          <p:cNvSpPr txBox="1"/>
+          <p:nvPr/>
+        </p:nvSpPr>
+        <p:spPr>
+          <a:xfrm>
+            <a:off x="777240" y="1719072"/>
+            <a:ext cx="10637215" cy="4133087"/>
           </a:xfrm>
           <a:prstGeom prst="rect">
             <a:avLst/>
@@ -3652,92 +3773,267 @@
           <a:p>
             <a:pPr>
               <a:spcAft>
-                <a:spcPts val="800"/>
+                <a:spcPts val="400"/>
               </a:spcAft>
             </a:pPr>
             <a:r>
-              <a:rPr sz="2000" b="0" i="0">
-                <a:solidFill>
-                  <a:srgbClr val="333333"/>
-                </a:solidFill>
-                <a:latin typeface="Calibri"/>
-              </a:rPr>
-              <a:t>–   </a:t>
-            </a:r>
-            <a:r>
-              <a:rPr sz="2000" b="1" i="0">
-                <a:solidFill>
-                  <a:srgbClr val="333333"/>
-                </a:solidFill>
-                <a:latin typeface="Calibri"/>
-              </a:rPr>
-              <a:t>Herramienta:</a:t>
-            </a:r>
-            <a:r>
-              <a:rPr sz="2000" b="0" i="0">
-                <a:solidFill>
-                  <a:srgbClr val="333333"/>
-                </a:solidFill>
-                <a:latin typeface="Calibri"/>
-              </a:rPr>
-              <a:t> draw.io · Excalidraw · Google Docs</a:t>
+              <a:rPr sz="1400" b="0" i="0">
+                <a:solidFill>
+                  <a:srgbClr val="FFFFFF"/>
+                </a:solidFill>
+                <a:latin typeface="Calibri"/>
+              </a:rPr>
+              <a:t>HU-07  Buscar historia clinica</a:t>
             </a:r>
           </a:p>
           <a:p>
             <a:pPr>
               <a:spcAft>
-                <a:spcPts val="800"/>
+                <a:spcPts val="400"/>
               </a:spcAft>
             </a:pPr>
             <a:r>
-              <a:rPr sz="2000" b="0" i="0">
-                <a:solidFill>
-                  <a:srgbClr val="333333"/>
-                </a:solidFill>
-                <a:latin typeface="Calibri"/>
-              </a:rPr>
-              <a:t>–   </a:t>
-            </a:r>
-            <a:r>
-              <a:rPr sz="2000" b="1" i="0">
-                <a:solidFill>
-                  <a:srgbClr val="333333"/>
-                </a:solidFill>
-                <a:latin typeface="Calibri"/>
-              </a:rPr>
-              <a:t>Demo:</a:t>
-            </a:r>
-            <a:r>
-              <a:rPr sz="2000" b="0" i="0">
-                <a:solidFill>
-                  <a:srgbClr val="333333"/>
-                </a:solidFill>
-                <a:latin typeface="Calibri"/>
-              </a:rPr>
-              <a:t> El docente arma en pantalla el tablero de VetCare, arrastra una tarjeta de 'Por hacer' a 'En revision del cliente' y muestra que pasa cuando se rompe el limite de trabajo en curso.</a:t>
+              <a:rPr sz="1400" b="0" i="0">
+                <a:solidFill>
+                  <a:srgbClr val="FFFFFF"/>
+                </a:solidFill>
+                <a:latin typeface="Calibri"/>
+              </a:rPr>
+              <a:t>  Como veterinaria de la clinica Huellitas</a:t>
             </a:r>
           </a:p>
           <a:p>
             <a:pPr>
               <a:spcAft>
-                <a:spcPts val="800"/>
+                <a:spcPts val="400"/>
               </a:spcAft>
             </a:pPr>
             <a:r>
-              <a:rPr sz="2000" b="0" i="0">
-                <a:solidFill>
-                  <a:srgbClr val="333333"/>
-                </a:solidFill>
-                <a:latin typeface="Calibri"/>
-              </a:rPr>
-              <a:t>–   Mismo dominio VetCare — no otro ejemplo. Aqui se diseña, no se programa.</a:t>
-            </a:r>
-          </a:p>
-        </p:txBody>
-      </p:sp>
-      <p:sp>
-        <p:nvSpPr>
-          <p:cNvPr id="6" name="TextBox 5"/>
+              <a:rPr sz="1400" b="0" i="0">
+                <a:solidFill>
+                  <a:srgbClr val="FFFFFF"/>
+                </a:solidFill>
+                <a:latin typeface="Calibri"/>
+              </a:rPr>
+              <a:t>  quiero buscar la historia clinica de una mascota por nombre o documento</a:t>
+            </a:r>
+          </a:p>
+          <a:p>
+            <a:pPr>
+              <a:spcAft>
+                <a:spcPts val="400"/>
+              </a:spcAft>
+            </a:pPr>
+            <a:r>
+              <a:rPr sz="1400" b="0" i="0">
+                <a:solidFill>
+                  <a:srgbClr val="FFFFFF"/>
+                </a:solidFill>
+                <a:latin typeface="Calibri"/>
+              </a:rPr>
+              <a:t>  para atender la consulta sin ir al archivador de papel.</a:t>
+            </a:r>
+          </a:p>
+          <a:p>
+            <a:pPr>
+              <a:spcAft>
+                <a:spcPts val="400"/>
+              </a:spcAft>
+            </a:pPr>
+            <a:r>
+              <a:rPr sz="1400" b="0" i="0">
+                <a:solidFill>
+                  <a:srgbClr val="FFFFFF"/>
+                </a:solidFill>
+                <a:latin typeface="Calibri"/>
+              </a:rPr>
+              <a:t/>
+            </a:r>
+          </a:p>
+          <a:p>
+            <a:pPr>
+              <a:spcAft>
+                <a:spcPts val="400"/>
+              </a:spcAft>
+            </a:pPr>
+            <a:r>
+              <a:rPr sz="1400" b="0" i="0">
+                <a:solidFill>
+                  <a:srgbClr val="FFFFFF"/>
+                </a:solidFill>
+                <a:latin typeface="Calibri"/>
+              </a:rPr>
+              <a:t>Criterios de aceptacion</a:t>
+            </a:r>
+          </a:p>
+          <a:p>
+            <a:pPr>
+              <a:spcAft>
+                <a:spcPts val="400"/>
+              </a:spcAft>
+            </a:pPr>
+            <a:r>
+              <a:rPr sz="1400" b="0" i="0">
+                <a:solidFill>
+                  <a:srgbClr val="FFFFFF"/>
+                </a:solidFill>
+                <a:latin typeface="Calibri"/>
+              </a:rPr>
+              <a:t>  Dado que la mascota Rocky esta registrada con el dueño CC 1.144.556</a:t>
+            </a:r>
+          </a:p>
+          <a:p>
+            <a:pPr>
+              <a:spcAft>
+                <a:spcPts val="400"/>
+              </a:spcAft>
+            </a:pPr>
+            <a:r>
+              <a:rPr sz="1400" b="0" i="0">
+                <a:solidFill>
+                  <a:srgbClr val="FFFFFF"/>
+                </a:solidFill>
+                <a:latin typeface="Calibri"/>
+              </a:rPr>
+              <a:t>  Cuando escribo Rocky en el buscador y presiono Enter</a:t>
+            </a:r>
+          </a:p>
+          <a:p>
+            <a:pPr>
+              <a:spcAft>
+                <a:spcPts val="400"/>
+              </a:spcAft>
+            </a:pPr>
+            <a:r>
+              <a:rPr sz="1400" b="0" i="0">
+                <a:solidFill>
+                  <a:srgbClr val="FFFFFF"/>
+                </a:solidFill>
+                <a:latin typeface="Calibri"/>
+              </a:rPr>
+              <a:t>  Entonces veo la ficha con especie, edad y las ultimas 3 consultas en &lt;= 3 s</a:t>
+            </a:r>
+          </a:p>
+          <a:p>
+            <a:pPr>
+              <a:spcAft>
+                <a:spcPts val="400"/>
+              </a:spcAft>
+            </a:pPr>
+            <a:r>
+              <a:rPr sz="1400" b="0" i="0">
+                <a:solidFill>
+                  <a:srgbClr val="FFFFFF"/>
+                </a:solidFill>
+                <a:latin typeface="Calibri"/>
+              </a:rPr>
+              <a:t/>
+            </a:r>
+          </a:p>
+          <a:p>
+            <a:pPr>
+              <a:spcAft>
+                <a:spcPts val="400"/>
+              </a:spcAft>
+            </a:pPr>
+            <a:r>
+              <a:rPr sz="1400" b="0" i="0">
+                <a:solidFill>
+                  <a:srgbClr val="FFFFFF"/>
+                </a:solidFill>
+                <a:latin typeface="Calibri"/>
+              </a:rPr>
+              <a:t>  Dado que escribo un nombre que no existe en el sistema</a:t>
+            </a:r>
+          </a:p>
+          <a:p>
+            <a:pPr>
+              <a:spcAft>
+                <a:spcPts val="400"/>
+              </a:spcAft>
+            </a:pPr>
+            <a:r>
+              <a:rPr sz="1400" b="0" i="0">
+                <a:solidFill>
+                  <a:srgbClr val="FFFFFF"/>
+                </a:solidFill>
+                <a:latin typeface="Calibri"/>
+              </a:rPr>
+              <a:t>  Cuando presiono Enter</a:t>
+            </a:r>
+          </a:p>
+          <a:p>
+            <a:pPr>
+              <a:spcAft>
+                <a:spcPts val="400"/>
+              </a:spcAft>
+            </a:pPr>
+            <a:r>
+              <a:rPr sz="1400" b="0" i="0">
+                <a:solidFill>
+                  <a:srgbClr val="FFFFFF"/>
+                </a:solidFill>
+                <a:latin typeface="Calibri"/>
+              </a:rPr>
+              <a:t>  Entonces veo 'No se encontro el paciente' y el boton Registrar nuevo</a:t>
+            </a:r>
+          </a:p>
+          <a:p>
+            <a:pPr>
+              <a:spcAft>
+                <a:spcPts val="400"/>
+              </a:spcAft>
+            </a:pPr>
+            <a:r>
+              <a:rPr sz="1400" b="0" i="0">
+                <a:solidFill>
+                  <a:srgbClr val="FFFFFF"/>
+                </a:solidFill>
+                <a:latin typeface="Calibri"/>
+              </a:rPr>
+              <a:t>Terminado = caso de uso + mockup + revision de un compañero + visto bueno del cliente</a:t>
+            </a:r>
+          </a:p>
+        </p:txBody>
+      </p:sp>
+      <p:sp>
+        <p:nvSpPr>
+          <p:cNvPr id="9" name="TextBox 8"/>
+          <p:cNvSpPr txBox="1"/>
+          <p:nvPr/>
+        </p:nvSpPr>
+        <p:spPr>
+          <a:xfrm>
+            <a:off x="457200" y="6080760"/>
+            <a:ext cx="11277295" cy="320040"/>
+          </a:xfrm>
+          <a:prstGeom prst="rect">
+            <a:avLst/>
+          </a:prstGeom>
+          <a:noFill/>
+        </p:spPr>
+        <p:txBody>
+          <a:bodyPr wrap="square">
+            <a:spAutoFit/>
+          </a:bodyPr>
+          <a:lstStyle/>
+          <a:p>
+            <a:pPr algn="ctr"/>
+            <a:r>
+              <a:rPr sz="1200" b="0" i="1">
+                <a:solidFill>
+                  <a:srgbClr val="666666"/>
+                </a:solidFill>
+                <a:latin typeface="Calibri"/>
+              </a:rPr>
+              <a:t>La historia dice quien la necesita y para que; los criterios dicen como se demuestra que quedo lista, incluido el camino que sale mal.</a:t>
+            </a:r>
+          </a:p>
+        </p:txBody>
+      </p:sp>
+      <p:sp>
+        <p:nvSpPr>
+          <p:cNvPr id="10" name="TextBox 9"/>
           <p:cNvSpPr txBox="1"/>
           <p:nvPr/>
         </p:nvSpPr>
@@ -3805,7 +4101,7 @@
         <p:spPr>
           <a:xfrm>
             <a:off x="0" y="0"/>
-            <a:ext cx="12191695" cy="1170432"/>
+            <a:ext cx="12191695" cy="960120"/>
           </a:xfrm>
           <a:prstGeom prst="rect">
             <a:avLst/>
@@ -3847,7 +4143,7 @@
         </p:nvSpPr>
         <p:spPr>
           <a:xfrm>
-            <a:off x="0" y="1170432"/>
+            <a:off x="0" y="960120"/>
             <a:ext cx="12191695" cy="41148"/>
           </a:xfrm>
           <a:prstGeom prst="rect">
@@ -3891,7 +4187,7 @@
         <p:spPr>
           <a:xfrm>
             <a:off x="457200" y="164592"/>
-            <a:ext cx="11277295" cy="384048"/>
+            <a:ext cx="11277295" cy="502920"/>
           </a:xfrm>
           <a:prstGeom prst="rect">
             <a:avLst/>
@@ -3911,7 +4207,7 @@
                 </a:solidFill>
                 <a:latin typeface="Calibri"/>
               </a:rPr>
-              <a:t>Herramientas de hoy</a:t>
+              <a:t>Demo del dia</a:t>
             </a:r>
           </a:p>
         </p:txBody>
@@ -3924,8 +4220,8 @@
         </p:nvSpPr>
         <p:spPr>
           <a:xfrm>
-            <a:off x="457200" y="566928"/>
-            <a:ext cx="11277295" cy="411480"/>
+            <a:off x="457200" y="1170432"/>
+            <a:ext cx="11277295" cy="5230368"/>
           </a:xfrm>
           <a:prstGeom prst="rect">
             <a:avLst/>
@@ -3938,837 +4234,94 @@
           </a:bodyPr>
           <a:lstStyle/>
           <a:p>
-            <a:r>
-              <a:rPr sz="1400" b="0" i="0">
-                <a:solidFill>
-                  <a:srgbClr val="B8D8EE"/>
-                </a:solidFill>
-                <a:latin typeface="Calibri"/>
-              </a:rPr>
-              <a:t>Gratis · funcionan en el navegador</a:t>
-            </a:r>
-          </a:p>
-        </p:txBody>
-      </p:sp>
-      <p:sp>
-        <p:nvSpPr>
-          <p:cNvPr id="6" name="Rounded Rectangle 5"/>
-          <p:cNvSpPr/>
-          <p:nvPr/>
-        </p:nvSpPr>
-        <p:spPr>
-          <a:xfrm>
-            <a:off x="457200" y="1591056"/>
-            <a:ext cx="3624986" cy="2299716"/>
-          </a:xfrm>
-          <a:prstGeom prst="roundRect">
-            <a:avLst>
-              <a:gd name="adj" fmla="val 12000"/>
-            </a:avLst>
-          </a:prstGeom>
-          <a:solidFill>
-            <a:srgbClr val="F2F2F2"/>
-          </a:solidFill>
-          <a:ln>
-            <a:noFill/>
-          </a:ln>
-        </p:spPr>
-        <p:style>
-          <a:lnRef idx="1">
-            <a:schemeClr val="accent1"/>
-          </a:lnRef>
-          <a:fillRef idx="3">
-            <a:schemeClr val="accent1"/>
-          </a:fillRef>
-          <a:effectRef idx="2">
-            <a:schemeClr val="accent1"/>
-          </a:effectRef>
-          <a:fontRef idx="minor">
-            <a:schemeClr val="lt1"/>
-          </a:fontRef>
-        </p:style>
-        <p:txBody>
-          <a:bodyPr rtlCol="0" anchor="ctr"/>
-          <a:lstStyle/>
-          <a:p>
-            <a:pPr algn="ctr"/>
-          </a:p>
-        </p:txBody>
-      </p:sp>
-      <p:sp>
-        <p:nvSpPr>
-          <p:cNvPr id="7" name="Rectangle 6"/>
-          <p:cNvSpPr/>
-          <p:nvPr/>
-        </p:nvSpPr>
-        <p:spPr>
-          <a:xfrm>
-            <a:off x="457200" y="1591056"/>
-            <a:ext cx="3624986" cy="64008"/>
-          </a:xfrm>
-          <a:prstGeom prst="rect">
-            <a:avLst/>
-          </a:prstGeom>
-          <a:solidFill>
-            <a:srgbClr val="095292"/>
-          </a:solidFill>
-          <a:ln>
-            <a:noFill/>
-          </a:ln>
-        </p:spPr>
-        <p:style>
-          <a:lnRef idx="1">
-            <a:schemeClr val="accent1"/>
-          </a:lnRef>
-          <a:fillRef idx="3">
-            <a:schemeClr val="accent1"/>
-          </a:fillRef>
-          <a:effectRef idx="2">
-            <a:schemeClr val="accent1"/>
-          </a:effectRef>
-          <a:fontRef idx="minor">
-            <a:schemeClr val="lt1"/>
-          </a:fontRef>
-        </p:style>
-        <p:txBody>
-          <a:bodyPr rtlCol="0" anchor="ctr"/>
-          <a:lstStyle/>
-          <a:p>
-            <a:pPr algn="ctr"/>
-          </a:p>
-        </p:txBody>
-      </p:sp>
-      <p:sp>
-        <p:nvSpPr>
-          <p:cNvPr id="8" name="Rectangle 7"/>
-          <p:cNvSpPr/>
-          <p:nvPr/>
-        </p:nvSpPr>
-        <p:spPr>
-          <a:xfrm>
-            <a:off x="457200" y="1655064"/>
-            <a:ext cx="3624986" cy="27432"/>
-          </a:xfrm>
-          <a:prstGeom prst="rect">
-            <a:avLst/>
-          </a:prstGeom>
-          <a:solidFill>
-            <a:srgbClr val="FFD000"/>
-          </a:solidFill>
-          <a:ln>
-            <a:noFill/>
-          </a:ln>
-        </p:spPr>
-        <p:style>
-          <a:lnRef idx="1">
-            <a:schemeClr val="accent1"/>
-          </a:lnRef>
-          <a:fillRef idx="3">
-            <a:schemeClr val="accent1"/>
-          </a:fillRef>
-          <a:effectRef idx="2">
-            <a:schemeClr val="accent1"/>
-          </a:effectRef>
-          <a:fontRef idx="minor">
-            <a:schemeClr val="lt1"/>
-          </a:fontRef>
-        </p:style>
-        <p:txBody>
-          <a:bodyPr rtlCol="0" anchor="ctr"/>
-          <a:lstStyle/>
-          <a:p>
-            <a:pPr algn="ctr"/>
-          </a:p>
-        </p:txBody>
-      </p:sp>
-      <p:pic>
-        <p:nvPicPr>
-          <p:cNvPr id="9" name="Picture 8" descr="drawio.png"/>
-          <p:cNvPicPr>
-            <a:picLocks noChangeAspect="1"/>
-          </p:cNvPicPr>
-          <p:nvPr/>
-        </p:nvPicPr>
-        <p:blipFill>
-          <a:blip r:embed="rId2"/>
-          <a:stretch>
-            <a:fillRect/>
-          </a:stretch>
-        </p:blipFill>
-        <p:spPr>
-          <a:xfrm>
-            <a:off x="1659331" y="1847087"/>
-            <a:ext cx="1220724" cy="1220724"/>
-          </a:xfrm>
-          <a:prstGeom prst="rect">
-            <a:avLst/>
-          </a:prstGeom>
-        </p:spPr>
-      </p:pic>
-      <p:sp>
-        <p:nvSpPr>
-          <p:cNvPr id="10" name="TextBox 9"/>
-          <p:cNvSpPr txBox="1"/>
-          <p:nvPr/>
-        </p:nvSpPr>
-        <p:spPr>
-          <a:xfrm>
-            <a:off x="530352" y="3159251"/>
-            <a:ext cx="3478682" cy="621792"/>
-          </a:xfrm>
-          <a:prstGeom prst="rect">
-            <a:avLst/>
-          </a:prstGeom>
-          <a:noFill/>
-        </p:spPr>
-        <p:txBody>
-          <a:bodyPr wrap="square" anchor="t"/>
-          <a:lstStyle/>
-          <a:p>
-            <a:pPr algn="ctr"/>
-            <a:r>
-              <a:rPr sz="1300" b="1" i="0">
-                <a:solidFill>
-                  <a:srgbClr val="095292"/>
-                </a:solidFill>
-                <a:latin typeface="Calibri"/>
-              </a:rPr>
-              <a:t>Draw.Io</a:t>
-            </a:r>
-          </a:p>
-          <a:p>
-            <a:pPr algn="ctr">
-              <a:spcBef>
-                <a:spcPts val="200"/>
-              </a:spcBef>
+            <a:pPr>
+              <a:spcAft>
+                <a:spcPts val="800"/>
+              </a:spcAft>
             </a:pPr>
             <a:r>
-              <a:rPr sz="1000" b="0" i="0">
-                <a:solidFill>
-                  <a:srgbClr val="666666"/>
-                </a:solidFill>
-                <a:latin typeface="Calibri"/>
-              </a:rPr>
-              <a:t>Diagramas UML y de contexto</a:t>
-            </a:r>
-          </a:p>
-        </p:txBody>
-      </p:sp>
-      <p:sp>
-        <p:nvSpPr>
-          <p:cNvPr id="11" name="Rounded Rectangle 10"/>
-          <p:cNvSpPr/>
-          <p:nvPr/>
-        </p:nvSpPr>
-        <p:spPr>
-          <a:xfrm>
-            <a:off x="4283354" y="1591056"/>
-            <a:ext cx="3624986" cy="2299716"/>
-          </a:xfrm>
-          <a:prstGeom prst="roundRect">
-            <a:avLst>
-              <a:gd name="adj" fmla="val 12000"/>
-            </a:avLst>
-          </a:prstGeom>
-          <a:solidFill>
-            <a:srgbClr val="F2F2F2"/>
-          </a:solidFill>
-          <a:ln>
-            <a:noFill/>
-          </a:ln>
-        </p:spPr>
-        <p:style>
-          <a:lnRef idx="1">
-            <a:schemeClr val="accent1"/>
-          </a:lnRef>
-          <a:fillRef idx="3">
-            <a:schemeClr val="accent1"/>
-          </a:fillRef>
-          <a:effectRef idx="2">
-            <a:schemeClr val="accent1"/>
-          </a:effectRef>
-          <a:fontRef idx="minor">
-            <a:schemeClr val="lt1"/>
-          </a:fontRef>
-        </p:style>
-        <p:txBody>
-          <a:bodyPr rtlCol="0" anchor="ctr"/>
-          <a:lstStyle/>
-          <a:p>
-            <a:pPr algn="ctr"/>
-          </a:p>
-        </p:txBody>
-      </p:sp>
-      <p:sp>
-        <p:nvSpPr>
-          <p:cNvPr id="12" name="Rectangle 11"/>
-          <p:cNvSpPr/>
-          <p:nvPr/>
-        </p:nvSpPr>
-        <p:spPr>
-          <a:xfrm>
-            <a:off x="4283354" y="1591056"/>
-            <a:ext cx="3624986" cy="64008"/>
-          </a:xfrm>
-          <a:prstGeom prst="rect">
-            <a:avLst/>
-          </a:prstGeom>
-          <a:solidFill>
-            <a:srgbClr val="095292"/>
-          </a:solidFill>
-          <a:ln>
-            <a:noFill/>
-          </a:ln>
-        </p:spPr>
-        <p:style>
-          <a:lnRef idx="1">
-            <a:schemeClr val="accent1"/>
-          </a:lnRef>
-          <a:fillRef idx="3">
-            <a:schemeClr val="accent1"/>
-          </a:fillRef>
-          <a:effectRef idx="2">
-            <a:schemeClr val="accent1"/>
-          </a:effectRef>
-          <a:fontRef idx="minor">
-            <a:schemeClr val="lt1"/>
-          </a:fontRef>
-        </p:style>
-        <p:txBody>
-          <a:bodyPr rtlCol="0" anchor="ctr"/>
-          <a:lstStyle/>
-          <a:p>
-            <a:pPr algn="ctr"/>
-          </a:p>
-        </p:txBody>
-      </p:sp>
-      <p:sp>
-        <p:nvSpPr>
-          <p:cNvPr id="13" name="Rectangle 12"/>
-          <p:cNvSpPr/>
-          <p:nvPr/>
-        </p:nvSpPr>
-        <p:spPr>
-          <a:xfrm>
-            <a:off x="4283354" y="1655064"/>
-            <a:ext cx="3624986" cy="27432"/>
-          </a:xfrm>
-          <a:prstGeom prst="rect">
-            <a:avLst/>
-          </a:prstGeom>
-          <a:solidFill>
-            <a:srgbClr val="FFD000"/>
-          </a:solidFill>
-          <a:ln>
-            <a:noFill/>
-          </a:ln>
-        </p:spPr>
-        <p:style>
-          <a:lnRef idx="1">
-            <a:schemeClr val="accent1"/>
-          </a:lnRef>
-          <a:fillRef idx="3">
-            <a:schemeClr val="accent1"/>
-          </a:fillRef>
-          <a:effectRef idx="2">
-            <a:schemeClr val="accent1"/>
-          </a:effectRef>
-          <a:fontRef idx="minor">
-            <a:schemeClr val="lt1"/>
-          </a:fontRef>
-        </p:style>
-        <p:txBody>
-          <a:bodyPr rtlCol="0" anchor="ctr"/>
-          <a:lstStyle/>
-          <a:p>
-            <a:pPr algn="ctr"/>
-          </a:p>
-        </p:txBody>
-      </p:sp>
-      <p:pic>
-        <p:nvPicPr>
-          <p:cNvPr id="14" name="Picture 13" descr="excalidraw.png"/>
-          <p:cNvPicPr>
-            <a:picLocks noChangeAspect="1"/>
-          </p:cNvPicPr>
-          <p:nvPr/>
-        </p:nvPicPr>
-        <p:blipFill>
-          <a:blip r:embed="rId3"/>
-          <a:stretch>
-            <a:fillRect/>
-          </a:stretch>
-        </p:blipFill>
-        <p:spPr>
-          <a:xfrm>
-            <a:off x="5485485" y="1847087"/>
-            <a:ext cx="1220724" cy="1220724"/>
-          </a:xfrm>
-          <a:prstGeom prst="rect">
-            <a:avLst/>
-          </a:prstGeom>
-        </p:spPr>
-      </p:pic>
-      <p:sp>
-        <p:nvSpPr>
-          <p:cNvPr id="15" name="TextBox 14"/>
-          <p:cNvSpPr txBox="1"/>
-          <p:nvPr/>
-        </p:nvSpPr>
-        <p:spPr>
-          <a:xfrm>
-            <a:off x="4356506" y="3159251"/>
-            <a:ext cx="3478682" cy="621792"/>
-          </a:xfrm>
-          <a:prstGeom prst="rect">
-            <a:avLst/>
-          </a:prstGeom>
-          <a:noFill/>
-        </p:spPr>
-        <p:txBody>
-          <a:bodyPr wrap="square" anchor="t"/>
-          <a:lstStyle/>
-          <a:p>
-            <a:pPr algn="ctr"/>
-            <a:r>
-              <a:rPr sz="1300" b="1" i="0">
-                <a:solidFill>
-                  <a:srgbClr val="095292"/>
-                </a:solidFill>
-                <a:latin typeface="Calibri"/>
-              </a:rPr>
-              <a:t>Excalidraw</a:t>
-            </a:r>
-          </a:p>
-          <a:p>
-            <a:pPr algn="ctr">
-              <a:spcBef>
-                <a:spcPts val="200"/>
-              </a:spcBef>
+              <a:rPr sz="2000" b="0" i="0">
+                <a:solidFill>
+                  <a:srgbClr val="333333"/>
+                </a:solidFill>
+                <a:latin typeface="Calibri"/>
+              </a:rPr>
+              <a:t>–   </a:t>
+            </a:r>
+            <a:r>
+              <a:rPr sz="2000" b="1" i="0">
+                <a:solidFill>
+                  <a:srgbClr val="333333"/>
+                </a:solidFill>
+                <a:latin typeface="Calibri"/>
+              </a:rPr>
+              <a:t>Herramienta:</a:t>
+            </a:r>
+            <a:r>
+              <a:rPr sz="2000" b="0" i="0">
+                <a:solidFill>
+                  <a:srgbClr val="333333"/>
+                </a:solidFill>
+                <a:latin typeface="Calibri"/>
+              </a:rPr>
+              <a:t> draw.io · Excalidraw · Google Docs</a:t>
+            </a:r>
+          </a:p>
+          <a:p>
+            <a:pPr>
+              <a:spcAft>
+                <a:spcPts val="800"/>
+              </a:spcAft>
             </a:pPr>
             <a:r>
-              <a:rPr sz="1000" b="0" i="0">
-                <a:solidFill>
-                  <a:srgbClr val="666666"/>
-                </a:solidFill>
-                <a:latin typeface="Calibri"/>
-              </a:rPr>
-              <a:t>Bocetos rapidos a mano alzada</a:t>
-            </a:r>
-          </a:p>
-        </p:txBody>
-      </p:sp>
-      <p:sp>
-        <p:nvSpPr>
-          <p:cNvPr id="16" name="Rounded Rectangle 15"/>
-          <p:cNvSpPr/>
-          <p:nvPr/>
-        </p:nvSpPr>
-        <p:spPr>
-          <a:xfrm>
-            <a:off x="8109508" y="1591056"/>
-            <a:ext cx="3624986" cy="2299716"/>
-          </a:xfrm>
-          <a:prstGeom prst="roundRect">
-            <a:avLst>
-              <a:gd name="adj" fmla="val 12000"/>
-            </a:avLst>
-          </a:prstGeom>
-          <a:solidFill>
-            <a:srgbClr val="F2F2F2"/>
-          </a:solidFill>
-          <a:ln>
-            <a:noFill/>
-          </a:ln>
-        </p:spPr>
-        <p:style>
-          <a:lnRef idx="1">
-            <a:schemeClr val="accent1"/>
-          </a:lnRef>
-          <a:fillRef idx="3">
-            <a:schemeClr val="accent1"/>
-          </a:fillRef>
-          <a:effectRef idx="2">
-            <a:schemeClr val="accent1"/>
-          </a:effectRef>
-          <a:fontRef idx="minor">
-            <a:schemeClr val="lt1"/>
-          </a:fontRef>
-        </p:style>
-        <p:txBody>
-          <a:bodyPr rtlCol="0" anchor="ctr"/>
-          <a:lstStyle/>
-          <a:p>
-            <a:pPr algn="ctr"/>
-          </a:p>
-        </p:txBody>
-      </p:sp>
-      <p:sp>
-        <p:nvSpPr>
-          <p:cNvPr id="17" name="Rectangle 16"/>
-          <p:cNvSpPr/>
-          <p:nvPr/>
-        </p:nvSpPr>
-        <p:spPr>
-          <a:xfrm>
-            <a:off x="8109508" y="1591056"/>
-            <a:ext cx="3624986" cy="64008"/>
-          </a:xfrm>
-          <a:prstGeom prst="rect">
-            <a:avLst/>
-          </a:prstGeom>
-          <a:solidFill>
-            <a:srgbClr val="095292"/>
-          </a:solidFill>
-          <a:ln>
-            <a:noFill/>
-          </a:ln>
-        </p:spPr>
-        <p:style>
-          <a:lnRef idx="1">
-            <a:schemeClr val="accent1"/>
-          </a:lnRef>
-          <a:fillRef idx="3">
-            <a:schemeClr val="accent1"/>
-          </a:fillRef>
-          <a:effectRef idx="2">
-            <a:schemeClr val="accent1"/>
-          </a:effectRef>
-          <a:fontRef idx="minor">
-            <a:schemeClr val="lt1"/>
-          </a:fontRef>
-        </p:style>
-        <p:txBody>
-          <a:bodyPr rtlCol="0" anchor="ctr"/>
-          <a:lstStyle/>
-          <a:p>
-            <a:pPr algn="ctr"/>
-          </a:p>
-        </p:txBody>
-      </p:sp>
-      <p:sp>
-        <p:nvSpPr>
-          <p:cNvPr id="18" name="Rectangle 17"/>
-          <p:cNvSpPr/>
-          <p:nvPr/>
-        </p:nvSpPr>
-        <p:spPr>
-          <a:xfrm>
-            <a:off x="8109508" y="1655064"/>
-            <a:ext cx="3624986" cy="27432"/>
-          </a:xfrm>
-          <a:prstGeom prst="rect">
-            <a:avLst/>
-          </a:prstGeom>
-          <a:solidFill>
-            <a:srgbClr val="FFD000"/>
-          </a:solidFill>
-          <a:ln>
-            <a:noFill/>
-          </a:ln>
-        </p:spPr>
-        <p:style>
-          <a:lnRef idx="1">
-            <a:schemeClr val="accent1"/>
-          </a:lnRef>
-          <a:fillRef idx="3">
-            <a:schemeClr val="accent1"/>
-          </a:fillRef>
-          <a:effectRef idx="2">
-            <a:schemeClr val="accent1"/>
-          </a:effectRef>
-          <a:fontRef idx="minor">
-            <a:schemeClr val="lt1"/>
-          </a:fontRef>
-        </p:style>
-        <p:txBody>
-          <a:bodyPr rtlCol="0" anchor="ctr"/>
-          <a:lstStyle/>
-          <a:p>
-            <a:pPr algn="ctr"/>
-          </a:p>
-        </p:txBody>
-      </p:sp>
-      <p:pic>
-        <p:nvPicPr>
-          <p:cNvPr id="19" name="Picture 18" descr="google_docs.png"/>
-          <p:cNvPicPr>
-            <a:picLocks noChangeAspect="1"/>
-          </p:cNvPicPr>
-          <p:nvPr/>
-        </p:nvPicPr>
-        <p:blipFill>
-          <a:blip r:embed="rId4"/>
-          <a:stretch>
-            <a:fillRect/>
-          </a:stretch>
-        </p:blipFill>
-        <p:spPr>
-          <a:xfrm>
-            <a:off x="9311640" y="1847087"/>
-            <a:ext cx="1220724" cy="1220724"/>
-          </a:xfrm>
-          <a:prstGeom prst="rect">
-            <a:avLst/>
-          </a:prstGeom>
-        </p:spPr>
-      </p:pic>
-      <p:sp>
-        <p:nvSpPr>
-          <p:cNvPr id="20" name="TextBox 19"/>
-          <p:cNvSpPr txBox="1"/>
-          <p:nvPr/>
-        </p:nvSpPr>
-        <p:spPr>
-          <a:xfrm>
-            <a:off x="8182660" y="3159251"/>
-            <a:ext cx="3478682" cy="621792"/>
-          </a:xfrm>
-          <a:prstGeom prst="rect">
-            <a:avLst/>
-          </a:prstGeom>
-          <a:noFill/>
-        </p:spPr>
-        <p:txBody>
-          <a:bodyPr wrap="square" anchor="t"/>
-          <a:lstStyle/>
-          <a:p>
-            <a:pPr algn="ctr"/>
-            <a:r>
-              <a:rPr sz="1300" b="1" i="0">
-                <a:solidFill>
-                  <a:srgbClr val="095292"/>
-                </a:solidFill>
-                <a:latin typeface="Calibri"/>
-              </a:rPr>
-              <a:t>google docs</a:t>
-            </a:r>
-          </a:p>
-          <a:p>
-            <a:pPr algn="ctr">
-              <a:spcBef>
-                <a:spcPts val="200"/>
-              </a:spcBef>
+              <a:rPr sz="2000" b="0" i="0">
+                <a:solidFill>
+                  <a:srgbClr val="333333"/>
+                </a:solidFill>
+                <a:latin typeface="Calibri"/>
+              </a:rPr>
+              <a:t>–   </a:t>
+            </a:r>
+            <a:r>
+              <a:rPr sz="2000" b="1" i="0">
+                <a:solidFill>
+                  <a:srgbClr val="333333"/>
+                </a:solidFill>
+                <a:latin typeface="Calibri"/>
+              </a:rPr>
+              <a:t>Demo:</a:t>
+            </a:r>
+            <a:r>
+              <a:rPr sz="2000" b="0" i="0">
+                <a:solidFill>
+                  <a:srgbClr val="333333"/>
+                </a:solidFill>
+                <a:latin typeface="Calibri"/>
+              </a:rPr>
+              <a:t> El docente arma en pantalla el tablero de VetCare, arrastra una tarjeta de 'Por hacer' a 'En revision del cliente' y muestra que pasa cuando se rompe el limite de trabajo en curso.</a:t>
+            </a:r>
+          </a:p>
+          <a:p>
+            <a:pPr>
+              <a:spcAft>
+                <a:spcPts val="800"/>
+              </a:spcAft>
             </a:pPr>
             <a:r>
-              <a:rPr sz="1000" b="0" i="0">
-                <a:solidFill>
-                  <a:srgbClr val="666666"/>
-                </a:solidFill>
-                <a:latin typeface="Calibri"/>
-              </a:rPr>
-              <a:t>Documentos del paquete de diseño</a:t>
-            </a:r>
-          </a:p>
-        </p:txBody>
-      </p:sp>
-      <p:sp>
-        <p:nvSpPr>
-          <p:cNvPr id="21" name="Rounded Rectangle 20"/>
-          <p:cNvSpPr/>
-          <p:nvPr/>
-        </p:nvSpPr>
-        <p:spPr>
-          <a:xfrm>
-            <a:off x="4283354" y="4055364"/>
-            <a:ext cx="3624986" cy="2299716"/>
-          </a:xfrm>
-          <a:prstGeom prst="roundRect">
-            <a:avLst>
-              <a:gd name="adj" fmla="val 12000"/>
-            </a:avLst>
-          </a:prstGeom>
-          <a:solidFill>
-            <a:srgbClr val="F2F2F2"/>
-          </a:solidFill>
-          <a:ln>
-            <a:noFill/>
-          </a:ln>
-        </p:spPr>
-        <p:style>
-          <a:lnRef idx="1">
-            <a:schemeClr val="accent1"/>
-          </a:lnRef>
-          <a:fillRef idx="3">
-            <a:schemeClr val="accent1"/>
-          </a:fillRef>
-          <a:effectRef idx="2">
-            <a:schemeClr val="accent1"/>
-          </a:effectRef>
-          <a:fontRef idx="minor">
-            <a:schemeClr val="lt1"/>
-          </a:fontRef>
-        </p:style>
-        <p:txBody>
-          <a:bodyPr rtlCol="0" anchor="ctr"/>
-          <a:lstStyle/>
-          <a:p>
-            <a:pPr algn="ctr"/>
-          </a:p>
-        </p:txBody>
-      </p:sp>
-      <p:sp>
-        <p:nvSpPr>
-          <p:cNvPr id="22" name="Rectangle 21"/>
-          <p:cNvSpPr/>
-          <p:nvPr/>
-        </p:nvSpPr>
-        <p:spPr>
-          <a:xfrm>
-            <a:off x="4283354" y="4055364"/>
-            <a:ext cx="3624986" cy="64008"/>
-          </a:xfrm>
-          <a:prstGeom prst="rect">
-            <a:avLst/>
-          </a:prstGeom>
-          <a:solidFill>
-            <a:srgbClr val="095292"/>
-          </a:solidFill>
-          <a:ln>
-            <a:noFill/>
-          </a:ln>
-        </p:spPr>
-        <p:style>
-          <a:lnRef idx="1">
-            <a:schemeClr val="accent1"/>
-          </a:lnRef>
-          <a:fillRef idx="3">
-            <a:schemeClr val="accent1"/>
-          </a:fillRef>
-          <a:effectRef idx="2">
-            <a:schemeClr val="accent1"/>
-          </a:effectRef>
-          <a:fontRef idx="minor">
-            <a:schemeClr val="lt1"/>
-          </a:fontRef>
-        </p:style>
-        <p:txBody>
-          <a:bodyPr rtlCol="0" anchor="ctr"/>
-          <a:lstStyle/>
-          <a:p>
-            <a:pPr algn="ctr"/>
-          </a:p>
-        </p:txBody>
-      </p:sp>
-      <p:sp>
-        <p:nvSpPr>
-          <p:cNvPr id="23" name="Rectangle 22"/>
-          <p:cNvSpPr/>
-          <p:nvPr/>
-        </p:nvSpPr>
-        <p:spPr>
-          <a:xfrm>
-            <a:off x="4283354" y="4119372"/>
-            <a:ext cx="3624986" cy="27432"/>
-          </a:xfrm>
-          <a:prstGeom prst="rect">
-            <a:avLst/>
-          </a:prstGeom>
-          <a:solidFill>
-            <a:srgbClr val="FFD000"/>
-          </a:solidFill>
-          <a:ln>
-            <a:noFill/>
-          </a:ln>
-        </p:spPr>
-        <p:style>
-          <a:lnRef idx="1">
-            <a:schemeClr val="accent1"/>
-          </a:lnRef>
-          <a:fillRef idx="3">
-            <a:schemeClr val="accent1"/>
-          </a:fillRef>
-          <a:effectRef idx="2">
-            <a:schemeClr val="accent1"/>
-          </a:effectRef>
-          <a:fontRef idx="minor">
-            <a:schemeClr val="lt1"/>
-          </a:fontRef>
-        </p:style>
-        <p:txBody>
-          <a:bodyPr rtlCol="0" anchor="ctr"/>
-          <a:lstStyle/>
-          <a:p>
-            <a:pPr algn="ctr"/>
-          </a:p>
-        </p:txBody>
-      </p:sp>
-      <p:pic>
-        <p:nvPicPr>
-          <p:cNvPr id="24" name="Picture 23" descr="examlab.png"/>
-          <p:cNvPicPr>
-            <a:picLocks noChangeAspect="1"/>
-          </p:cNvPicPr>
-          <p:nvPr/>
-        </p:nvPicPr>
-        <p:blipFill>
-          <a:blip r:embed="rId5"/>
-          <a:stretch>
-            <a:fillRect/>
-          </a:stretch>
-        </p:blipFill>
-        <p:spPr>
-          <a:xfrm>
-            <a:off x="5485485" y="4311396"/>
-            <a:ext cx="1220724" cy="1220724"/>
-          </a:xfrm>
-          <a:prstGeom prst="rect">
-            <a:avLst/>
-          </a:prstGeom>
-        </p:spPr>
-      </p:pic>
-      <p:sp>
-        <p:nvSpPr>
-          <p:cNvPr id="25" name="TextBox 24"/>
-          <p:cNvSpPr txBox="1"/>
-          <p:nvPr/>
-        </p:nvSpPr>
-        <p:spPr>
-          <a:xfrm>
-            <a:off x="4356506" y="5623560"/>
-            <a:ext cx="3478682" cy="621792"/>
-          </a:xfrm>
-          <a:prstGeom prst="rect">
-            <a:avLst/>
-          </a:prstGeom>
-          <a:noFill/>
-        </p:spPr>
-        <p:txBody>
-          <a:bodyPr wrap="square" anchor="t"/>
-          <a:lstStyle/>
-          <a:p>
-            <a:pPr algn="ctr"/>
-            <a:r>
-              <a:rPr sz="1300" b="1" i="0">
-                <a:solidFill>
-                  <a:srgbClr val="095292"/>
-                </a:solidFill>
-                <a:latin typeface="Calibri"/>
-              </a:rPr>
-              <a:t>la plataforma del curso</a:t>
-            </a:r>
-          </a:p>
-          <a:p>
-            <a:pPr algn="ctr">
-              <a:spcBef>
-                <a:spcPts val="200"/>
-              </a:spcBef>
-            </a:pPr>
-            <a:r>
-              <a:rPr sz="1000" b="0" i="0">
-                <a:solidFill>
-                  <a:srgbClr val="666666"/>
-                </a:solidFill>
-                <a:latin typeface="Calibri"/>
-              </a:rPr>
-              <a:t>Entrega del taller · en la fecha que indique el docente</a:t>
-            </a:r>
-          </a:p>
-        </p:txBody>
-      </p:sp>
-      <p:sp>
-        <p:nvSpPr>
-          <p:cNvPr id="26" name="TextBox 25"/>
+              <a:rPr sz="2000" b="0" i="0">
+                <a:solidFill>
+                  <a:srgbClr val="333333"/>
+                </a:solidFill>
+                <a:latin typeface="Calibri"/>
+              </a:rPr>
+              <a:t>–   Mismo dominio VetCare — no otro ejemplo. Aqui se diseña, no se programa.</a:t>
+            </a:r>
+          </a:p>
+        </p:txBody>
+      </p:sp>
+      <p:sp>
+        <p:nvSpPr>
+          <p:cNvPr id="6" name="TextBox 5"/>
           <p:cNvSpPr txBox="1"/>
           <p:nvPr/>
         </p:nvSpPr>
@@ -4836,7 +4389,7 @@
         <p:spPr>
           <a:xfrm>
             <a:off x="0" y="0"/>
-            <a:ext cx="12191695" cy="960120"/>
+            <a:ext cx="12191695" cy="1170432"/>
           </a:xfrm>
           <a:prstGeom prst="rect">
             <a:avLst/>
@@ -4878,7 +4431,7 @@
         </p:nvSpPr>
         <p:spPr>
           <a:xfrm>
-            <a:off x="0" y="960120"/>
+            <a:off x="0" y="1170432"/>
             <a:ext cx="12191695" cy="41148"/>
           </a:xfrm>
           <a:prstGeom prst="rect">
@@ -4922,7 +4475,7 @@
         <p:spPr>
           <a:xfrm>
             <a:off x="457200" y="164592"/>
-            <a:ext cx="11277295" cy="502920"/>
+            <a:ext cx="11277295" cy="384048"/>
           </a:xfrm>
           <a:prstGeom prst="rect">
             <a:avLst/>
@@ -4942,7 +4495,7 @@
                 </a:solidFill>
                 <a:latin typeface="Calibri"/>
               </a:rPr>
-              <a:t>Taller PI — por que importa</a:t>
+              <a:t>Herramientas de hoy</a:t>
             </a:r>
           </a:p>
         </p:txBody>
@@ -4955,8 +4508,8 @@
         </p:nvSpPr>
         <p:spPr>
           <a:xfrm>
-            <a:off x="457200" y="1170432"/>
-            <a:ext cx="11277295" cy="5230368"/>
+            <a:off x="457200" y="566928"/>
+            <a:ext cx="11277295" cy="411480"/>
           </a:xfrm>
           <a:prstGeom prst="rect">
             <a:avLst/>
@@ -4969,76 +4522,837 @@
           </a:bodyPr>
           <a:lstStyle/>
           <a:p>
-            <a:pPr>
-              <a:spcAft>
-                <a:spcPts val="800"/>
-              </a:spcAft>
+            <a:r>
+              <a:rPr sz="1400" b="0" i="0">
+                <a:solidFill>
+                  <a:srgbClr val="B8D8EE"/>
+                </a:solidFill>
+                <a:latin typeface="Calibri"/>
+              </a:rPr>
+              <a:t>Gratis · funcionan en el navegador</a:t>
+            </a:r>
+          </a:p>
+        </p:txBody>
+      </p:sp>
+      <p:sp>
+        <p:nvSpPr>
+          <p:cNvPr id="6" name="Rounded Rectangle 5"/>
+          <p:cNvSpPr/>
+          <p:nvPr/>
+        </p:nvSpPr>
+        <p:spPr>
+          <a:xfrm>
+            <a:off x="457200" y="1591056"/>
+            <a:ext cx="3624986" cy="2299716"/>
+          </a:xfrm>
+          <a:prstGeom prst="roundRect">
+            <a:avLst>
+              <a:gd name="adj" fmla="val 12000"/>
+            </a:avLst>
+          </a:prstGeom>
+          <a:solidFill>
+            <a:srgbClr val="F2F2F2"/>
+          </a:solidFill>
+          <a:ln>
+            <a:noFill/>
+          </a:ln>
+        </p:spPr>
+        <p:style>
+          <a:lnRef idx="1">
+            <a:schemeClr val="accent1"/>
+          </a:lnRef>
+          <a:fillRef idx="3">
+            <a:schemeClr val="accent1"/>
+          </a:fillRef>
+          <a:effectRef idx="2">
+            <a:schemeClr val="accent1"/>
+          </a:effectRef>
+          <a:fontRef idx="minor">
+            <a:schemeClr val="lt1"/>
+          </a:fontRef>
+        </p:style>
+        <p:txBody>
+          <a:bodyPr rtlCol="0" anchor="ctr"/>
+          <a:lstStyle/>
+          <a:p>
+            <a:pPr algn="ctr"/>
+          </a:p>
+        </p:txBody>
+      </p:sp>
+      <p:sp>
+        <p:nvSpPr>
+          <p:cNvPr id="7" name="Rectangle 6"/>
+          <p:cNvSpPr/>
+          <p:nvPr/>
+        </p:nvSpPr>
+        <p:spPr>
+          <a:xfrm>
+            <a:off x="457200" y="1591056"/>
+            <a:ext cx="3624986" cy="64008"/>
+          </a:xfrm>
+          <a:prstGeom prst="rect">
+            <a:avLst/>
+          </a:prstGeom>
+          <a:solidFill>
+            <a:srgbClr val="095292"/>
+          </a:solidFill>
+          <a:ln>
+            <a:noFill/>
+          </a:ln>
+        </p:spPr>
+        <p:style>
+          <a:lnRef idx="1">
+            <a:schemeClr val="accent1"/>
+          </a:lnRef>
+          <a:fillRef idx="3">
+            <a:schemeClr val="accent1"/>
+          </a:fillRef>
+          <a:effectRef idx="2">
+            <a:schemeClr val="accent1"/>
+          </a:effectRef>
+          <a:fontRef idx="minor">
+            <a:schemeClr val="lt1"/>
+          </a:fontRef>
+        </p:style>
+        <p:txBody>
+          <a:bodyPr rtlCol="0" anchor="ctr"/>
+          <a:lstStyle/>
+          <a:p>
+            <a:pPr algn="ctr"/>
+          </a:p>
+        </p:txBody>
+      </p:sp>
+      <p:sp>
+        <p:nvSpPr>
+          <p:cNvPr id="8" name="Rectangle 7"/>
+          <p:cNvSpPr/>
+          <p:nvPr/>
+        </p:nvSpPr>
+        <p:spPr>
+          <a:xfrm>
+            <a:off x="457200" y="1655064"/>
+            <a:ext cx="3624986" cy="27432"/>
+          </a:xfrm>
+          <a:prstGeom prst="rect">
+            <a:avLst/>
+          </a:prstGeom>
+          <a:solidFill>
+            <a:srgbClr val="FFD000"/>
+          </a:solidFill>
+          <a:ln>
+            <a:noFill/>
+          </a:ln>
+        </p:spPr>
+        <p:style>
+          <a:lnRef idx="1">
+            <a:schemeClr val="accent1"/>
+          </a:lnRef>
+          <a:fillRef idx="3">
+            <a:schemeClr val="accent1"/>
+          </a:fillRef>
+          <a:effectRef idx="2">
+            <a:schemeClr val="accent1"/>
+          </a:effectRef>
+          <a:fontRef idx="minor">
+            <a:schemeClr val="lt1"/>
+          </a:fontRef>
+        </p:style>
+        <p:txBody>
+          <a:bodyPr rtlCol="0" anchor="ctr"/>
+          <a:lstStyle/>
+          <a:p>
+            <a:pPr algn="ctr"/>
+          </a:p>
+        </p:txBody>
+      </p:sp>
+      <p:pic>
+        <p:nvPicPr>
+          <p:cNvPr id="9" name="Picture 8" descr="drawio.png"/>
+          <p:cNvPicPr>
+            <a:picLocks noChangeAspect="1"/>
+          </p:cNvPicPr>
+          <p:nvPr/>
+        </p:nvPicPr>
+        <p:blipFill>
+          <a:blip r:embed="rId2"/>
+          <a:stretch>
+            <a:fillRect/>
+          </a:stretch>
+        </p:blipFill>
+        <p:spPr>
+          <a:xfrm>
+            <a:off x="1659331" y="1847087"/>
+            <a:ext cx="1220724" cy="1220724"/>
+          </a:xfrm>
+          <a:prstGeom prst="rect">
+            <a:avLst/>
+          </a:prstGeom>
+        </p:spPr>
+      </p:pic>
+      <p:sp>
+        <p:nvSpPr>
+          <p:cNvPr id="10" name="TextBox 9"/>
+          <p:cNvSpPr txBox="1"/>
+          <p:nvPr/>
+        </p:nvSpPr>
+        <p:spPr>
+          <a:xfrm>
+            <a:off x="530352" y="3159251"/>
+            <a:ext cx="3478682" cy="621792"/>
+          </a:xfrm>
+          <a:prstGeom prst="rect">
+            <a:avLst/>
+          </a:prstGeom>
+          <a:noFill/>
+        </p:spPr>
+        <p:txBody>
+          <a:bodyPr wrap="square" anchor="t"/>
+          <a:lstStyle/>
+          <a:p>
+            <a:pPr algn="ctr"/>
+            <a:r>
+              <a:rPr sz="1300" b="1" i="0">
+                <a:solidFill>
+                  <a:srgbClr val="095292"/>
+                </a:solidFill>
+                <a:latin typeface="Calibri"/>
+              </a:rPr>
+              <a:t>Draw.Io</a:t>
+            </a:r>
+          </a:p>
+          <a:p>
+            <a:pPr algn="ctr">
+              <a:spcBef>
+                <a:spcPts val="200"/>
+              </a:spcBef>
             </a:pPr>
             <a:r>
-              <a:rPr sz="2000" b="0" i="0">
-                <a:solidFill>
-                  <a:srgbClr val="333333"/>
-                </a:solidFill>
-                <a:latin typeface="Calibri"/>
-              </a:rPr>
-              <a:t>–   </a:t>
-            </a:r>
-            <a:r>
-              <a:rPr sz="2000" b="1" i="0">
-                <a:solidFill>
-                  <a:srgbClr val="333333"/>
-                </a:solidFill>
-                <a:latin typeface="Calibri"/>
-              </a:rPr>
-              <a:t>Por que importa al PI:</a:t>
-            </a:r>
-            <a:r>
-              <a:rPr sz="2000" b="0" i="0">
-                <a:solidFill>
-                  <a:srgbClr val="333333"/>
-                </a:solidFill>
-                <a:latin typeface="Calibri"/>
-              </a:rPr>
-              <a:t> el semestre completo de VetCare se va a organizar como sprints, y lo que se defina hoy en el backlog es literalmente el orden en que se van a producir los planos.</a:t>
-            </a:r>
-          </a:p>
-          <a:p>
-            <a:pPr>
-              <a:spcAft>
-                <a:spcPts val="800"/>
-              </a:spcAft>
+              <a:rPr sz="1000" b="0" i="0">
+                <a:solidFill>
+                  <a:srgbClr val="666666"/>
+                </a:solidFill>
+                <a:latin typeface="Calibri"/>
+              </a:rPr>
+              <a:t>Diagramas UML y de contexto</a:t>
+            </a:r>
+          </a:p>
+        </p:txBody>
+      </p:sp>
+      <p:sp>
+        <p:nvSpPr>
+          <p:cNvPr id="11" name="Rounded Rectangle 10"/>
+          <p:cNvSpPr/>
+          <p:nvPr/>
+        </p:nvSpPr>
+        <p:spPr>
+          <a:xfrm>
+            <a:off x="4283354" y="1591056"/>
+            <a:ext cx="3624986" cy="2299716"/>
+          </a:xfrm>
+          <a:prstGeom prst="roundRect">
+            <a:avLst>
+              <a:gd name="adj" fmla="val 12000"/>
+            </a:avLst>
+          </a:prstGeom>
+          <a:solidFill>
+            <a:srgbClr val="F2F2F2"/>
+          </a:solidFill>
+          <a:ln>
+            <a:noFill/>
+          </a:ln>
+        </p:spPr>
+        <p:style>
+          <a:lnRef idx="1">
+            <a:schemeClr val="accent1"/>
+          </a:lnRef>
+          <a:fillRef idx="3">
+            <a:schemeClr val="accent1"/>
+          </a:fillRef>
+          <a:effectRef idx="2">
+            <a:schemeClr val="accent1"/>
+          </a:effectRef>
+          <a:fontRef idx="minor">
+            <a:schemeClr val="lt1"/>
+          </a:fontRef>
+        </p:style>
+        <p:txBody>
+          <a:bodyPr rtlCol="0" anchor="ctr"/>
+          <a:lstStyle/>
+          <a:p>
+            <a:pPr algn="ctr"/>
+          </a:p>
+        </p:txBody>
+      </p:sp>
+      <p:sp>
+        <p:nvSpPr>
+          <p:cNvPr id="12" name="Rectangle 11"/>
+          <p:cNvSpPr/>
+          <p:nvPr/>
+        </p:nvSpPr>
+        <p:spPr>
+          <a:xfrm>
+            <a:off x="4283354" y="1591056"/>
+            <a:ext cx="3624986" cy="64008"/>
+          </a:xfrm>
+          <a:prstGeom prst="rect">
+            <a:avLst/>
+          </a:prstGeom>
+          <a:solidFill>
+            <a:srgbClr val="095292"/>
+          </a:solidFill>
+          <a:ln>
+            <a:noFill/>
+          </a:ln>
+        </p:spPr>
+        <p:style>
+          <a:lnRef idx="1">
+            <a:schemeClr val="accent1"/>
+          </a:lnRef>
+          <a:fillRef idx="3">
+            <a:schemeClr val="accent1"/>
+          </a:fillRef>
+          <a:effectRef idx="2">
+            <a:schemeClr val="accent1"/>
+          </a:effectRef>
+          <a:fontRef idx="minor">
+            <a:schemeClr val="lt1"/>
+          </a:fontRef>
+        </p:style>
+        <p:txBody>
+          <a:bodyPr rtlCol="0" anchor="ctr"/>
+          <a:lstStyle/>
+          <a:p>
+            <a:pPr algn="ctr"/>
+          </a:p>
+        </p:txBody>
+      </p:sp>
+      <p:sp>
+        <p:nvSpPr>
+          <p:cNvPr id="13" name="Rectangle 12"/>
+          <p:cNvSpPr/>
+          <p:nvPr/>
+        </p:nvSpPr>
+        <p:spPr>
+          <a:xfrm>
+            <a:off x="4283354" y="1655064"/>
+            <a:ext cx="3624986" cy="27432"/>
+          </a:xfrm>
+          <a:prstGeom prst="rect">
+            <a:avLst/>
+          </a:prstGeom>
+          <a:solidFill>
+            <a:srgbClr val="FFD000"/>
+          </a:solidFill>
+          <a:ln>
+            <a:noFill/>
+          </a:ln>
+        </p:spPr>
+        <p:style>
+          <a:lnRef idx="1">
+            <a:schemeClr val="accent1"/>
+          </a:lnRef>
+          <a:fillRef idx="3">
+            <a:schemeClr val="accent1"/>
+          </a:fillRef>
+          <a:effectRef idx="2">
+            <a:schemeClr val="accent1"/>
+          </a:effectRef>
+          <a:fontRef idx="minor">
+            <a:schemeClr val="lt1"/>
+          </a:fontRef>
+        </p:style>
+        <p:txBody>
+          <a:bodyPr rtlCol="0" anchor="ctr"/>
+          <a:lstStyle/>
+          <a:p>
+            <a:pPr algn="ctr"/>
+          </a:p>
+        </p:txBody>
+      </p:sp>
+      <p:pic>
+        <p:nvPicPr>
+          <p:cNvPr id="14" name="Picture 13" descr="excalidraw.png"/>
+          <p:cNvPicPr>
+            <a:picLocks noChangeAspect="1"/>
+          </p:cNvPicPr>
+          <p:nvPr/>
+        </p:nvPicPr>
+        <p:blipFill>
+          <a:blip r:embed="rId3"/>
+          <a:stretch>
+            <a:fillRect/>
+          </a:stretch>
+        </p:blipFill>
+        <p:spPr>
+          <a:xfrm>
+            <a:off x="5485485" y="1847087"/>
+            <a:ext cx="1220724" cy="1220724"/>
+          </a:xfrm>
+          <a:prstGeom prst="rect">
+            <a:avLst/>
+          </a:prstGeom>
+        </p:spPr>
+      </p:pic>
+      <p:sp>
+        <p:nvSpPr>
+          <p:cNvPr id="15" name="TextBox 14"/>
+          <p:cNvSpPr txBox="1"/>
+          <p:nvPr/>
+        </p:nvSpPr>
+        <p:spPr>
+          <a:xfrm>
+            <a:off x="4356506" y="3159251"/>
+            <a:ext cx="3478682" cy="621792"/>
+          </a:xfrm>
+          <a:prstGeom prst="rect">
+            <a:avLst/>
+          </a:prstGeom>
+          <a:noFill/>
+        </p:spPr>
+        <p:txBody>
+          <a:bodyPr wrap="square" anchor="t"/>
+          <a:lstStyle/>
+          <a:p>
+            <a:pPr algn="ctr"/>
+            <a:r>
+              <a:rPr sz="1300" b="1" i="0">
+                <a:solidFill>
+                  <a:srgbClr val="095292"/>
+                </a:solidFill>
+                <a:latin typeface="Calibri"/>
+              </a:rPr>
+              <a:t>Excalidraw</a:t>
+            </a:r>
+          </a:p>
+          <a:p>
+            <a:pPr algn="ctr">
+              <a:spcBef>
+                <a:spcPts val="200"/>
+              </a:spcBef>
             </a:pPr>
             <a:r>
-              <a:rPr sz="2000" b="0" i="0">
-                <a:solidFill>
-                  <a:srgbClr val="333333"/>
-                </a:solidFill>
-                <a:latin typeface="Calibri"/>
-              </a:rPr>
-              <a:t>–   Ya vimos el enfoque tradicional y su documentacion formal; hoy se ve el otro extremo del espectro y se aprende a decidir cual parte de VetCare conviene tratar de cada forma.</a:t>
-            </a:r>
-          </a:p>
-          <a:p>
-            <a:pPr>
-              <a:spcAft>
-                <a:spcPts val="800"/>
-              </a:spcAft>
+              <a:rPr sz="1000" b="0" i="0">
+                <a:solidFill>
+                  <a:srgbClr val="666666"/>
+                </a:solidFill>
+                <a:latin typeface="Calibri"/>
+              </a:rPr>
+              <a:t>Bocetos rapidos a mano alzada</a:t>
+            </a:r>
+          </a:p>
+        </p:txBody>
+      </p:sp>
+      <p:sp>
+        <p:nvSpPr>
+          <p:cNvPr id="16" name="Rounded Rectangle 15"/>
+          <p:cNvSpPr/>
+          <p:nvPr/>
+        </p:nvSpPr>
+        <p:spPr>
+          <a:xfrm>
+            <a:off x="8109508" y="1591056"/>
+            <a:ext cx="3624986" cy="2299716"/>
+          </a:xfrm>
+          <a:prstGeom prst="roundRect">
+            <a:avLst>
+              <a:gd name="adj" fmla="val 12000"/>
+            </a:avLst>
+          </a:prstGeom>
+          <a:solidFill>
+            <a:srgbClr val="F2F2F2"/>
+          </a:solidFill>
+          <a:ln>
+            <a:noFill/>
+          </a:ln>
+        </p:spPr>
+        <p:style>
+          <a:lnRef idx="1">
+            <a:schemeClr val="accent1"/>
+          </a:lnRef>
+          <a:fillRef idx="3">
+            <a:schemeClr val="accent1"/>
+          </a:fillRef>
+          <a:effectRef idx="2">
+            <a:schemeClr val="accent1"/>
+          </a:effectRef>
+          <a:fontRef idx="minor">
+            <a:schemeClr val="lt1"/>
+          </a:fontRef>
+        </p:style>
+        <p:txBody>
+          <a:bodyPr rtlCol="0" anchor="ctr"/>
+          <a:lstStyle/>
+          <a:p>
+            <a:pPr algn="ctr"/>
+          </a:p>
+        </p:txBody>
+      </p:sp>
+      <p:sp>
+        <p:nvSpPr>
+          <p:cNvPr id="17" name="Rectangle 16"/>
+          <p:cNvSpPr/>
+          <p:nvPr/>
+        </p:nvSpPr>
+        <p:spPr>
+          <a:xfrm>
+            <a:off x="8109508" y="1591056"/>
+            <a:ext cx="3624986" cy="64008"/>
+          </a:xfrm>
+          <a:prstGeom prst="rect">
+            <a:avLst/>
+          </a:prstGeom>
+          <a:solidFill>
+            <a:srgbClr val="095292"/>
+          </a:solidFill>
+          <a:ln>
+            <a:noFill/>
+          </a:ln>
+        </p:spPr>
+        <p:style>
+          <a:lnRef idx="1">
+            <a:schemeClr val="accent1"/>
+          </a:lnRef>
+          <a:fillRef idx="3">
+            <a:schemeClr val="accent1"/>
+          </a:fillRef>
+          <a:effectRef idx="2">
+            <a:schemeClr val="accent1"/>
+          </a:effectRef>
+          <a:fontRef idx="minor">
+            <a:schemeClr val="lt1"/>
+          </a:fontRef>
+        </p:style>
+        <p:txBody>
+          <a:bodyPr rtlCol="0" anchor="ctr"/>
+          <a:lstStyle/>
+          <a:p>
+            <a:pPr algn="ctr"/>
+          </a:p>
+        </p:txBody>
+      </p:sp>
+      <p:sp>
+        <p:nvSpPr>
+          <p:cNvPr id="18" name="Rectangle 17"/>
+          <p:cNvSpPr/>
+          <p:nvPr/>
+        </p:nvSpPr>
+        <p:spPr>
+          <a:xfrm>
+            <a:off x="8109508" y="1655064"/>
+            <a:ext cx="3624986" cy="27432"/>
+          </a:xfrm>
+          <a:prstGeom prst="rect">
+            <a:avLst/>
+          </a:prstGeom>
+          <a:solidFill>
+            <a:srgbClr val="FFD000"/>
+          </a:solidFill>
+          <a:ln>
+            <a:noFill/>
+          </a:ln>
+        </p:spPr>
+        <p:style>
+          <a:lnRef idx="1">
+            <a:schemeClr val="accent1"/>
+          </a:lnRef>
+          <a:fillRef idx="3">
+            <a:schemeClr val="accent1"/>
+          </a:fillRef>
+          <a:effectRef idx="2">
+            <a:schemeClr val="accent1"/>
+          </a:effectRef>
+          <a:fontRef idx="minor">
+            <a:schemeClr val="lt1"/>
+          </a:fontRef>
+        </p:style>
+        <p:txBody>
+          <a:bodyPr rtlCol="0" anchor="ctr"/>
+          <a:lstStyle/>
+          <a:p>
+            <a:pPr algn="ctr"/>
+          </a:p>
+        </p:txBody>
+      </p:sp>
+      <p:pic>
+        <p:nvPicPr>
+          <p:cNvPr id="19" name="Picture 18" descr="google_docs.png"/>
+          <p:cNvPicPr>
+            <a:picLocks noChangeAspect="1"/>
+          </p:cNvPicPr>
+          <p:nvPr/>
+        </p:nvPicPr>
+        <p:blipFill>
+          <a:blip r:embed="rId4"/>
+          <a:stretch>
+            <a:fillRect/>
+          </a:stretch>
+        </p:blipFill>
+        <p:spPr>
+          <a:xfrm>
+            <a:off x="9311640" y="1847087"/>
+            <a:ext cx="1220724" cy="1220724"/>
+          </a:xfrm>
+          <a:prstGeom prst="rect">
+            <a:avLst/>
+          </a:prstGeom>
+        </p:spPr>
+      </p:pic>
+      <p:sp>
+        <p:nvSpPr>
+          <p:cNvPr id="20" name="TextBox 19"/>
+          <p:cNvSpPr txBox="1"/>
+          <p:nvPr/>
+        </p:nvSpPr>
+        <p:spPr>
+          <a:xfrm>
+            <a:off x="8182660" y="3159251"/>
+            <a:ext cx="3478682" cy="621792"/>
+          </a:xfrm>
+          <a:prstGeom prst="rect">
+            <a:avLst/>
+          </a:prstGeom>
+          <a:noFill/>
+        </p:spPr>
+        <p:txBody>
+          <a:bodyPr wrap="square" anchor="t"/>
+          <a:lstStyle/>
+          <a:p>
+            <a:pPr algn="ctr"/>
+            <a:r>
+              <a:rPr sz="1300" b="1" i="0">
+                <a:solidFill>
+                  <a:srgbClr val="095292"/>
+                </a:solidFill>
+                <a:latin typeface="Calibri"/>
+              </a:rPr>
+              <a:t>google docs</a:t>
+            </a:r>
+          </a:p>
+          <a:p>
+            <a:pPr algn="ctr">
+              <a:spcBef>
+                <a:spcPts val="200"/>
+              </a:spcBef>
             </a:pPr>
             <a:r>
-              <a:rPr sz="2000" b="0" i="0">
-                <a:solidFill>
-                  <a:srgbClr val="333333"/>
-                </a:solidFill>
-                <a:latin typeface="Calibri"/>
-              </a:rPr>
-              <a:t>–   Aqui se aclara de una vez el malentendido mas costoso del curso: agil no es la excusa para no documentar, y en esta asignatura la documentacion de diseño es justamente el incremento entregable.</a:t>
-            </a:r>
-          </a:p>
-        </p:txBody>
-      </p:sp>
-      <p:sp>
-        <p:nvSpPr>
-          <p:cNvPr id="6" name="TextBox 5"/>
+              <a:rPr sz="1000" b="0" i="0">
+                <a:solidFill>
+                  <a:srgbClr val="666666"/>
+                </a:solidFill>
+                <a:latin typeface="Calibri"/>
+              </a:rPr>
+              <a:t>Documentos del paquete de diseño</a:t>
+            </a:r>
+          </a:p>
+        </p:txBody>
+      </p:sp>
+      <p:sp>
+        <p:nvSpPr>
+          <p:cNvPr id="21" name="Rounded Rectangle 20"/>
+          <p:cNvSpPr/>
+          <p:nvPr/>
+        </p:nvSpPr>
+        <p:spPr>
+          <a:xfrm>
+            <a:off x="4283354" y="4055364"/>
+            <a:ext cx="3624986" cy="2299716"/>
+          </a:xfrm>
+          <a:prstGeom prst="roundRect">
+            <a:avLst>
+              <a:gd name="adj" fmla="val 12000"/>
+            </a:avLst>
+          </a:prstGeom>
+          <a:solidFill>
+            <a:srgbClr val="F2F2F2"/>
+          </a:solidFill>
+          <a:ln>
+            <a:noFill/>
+          </a:ln>
+        </p:spPr>
+        <p:style>
+          <a:lnRef idx="1">
+            <a:schemeClr val="accent1"/>
+          </a:lnRef>
+          <a:fillRef idx="3">
+            <a:schemeClr val="accent1"/>
+          </a:fillRef>
+          <a:effectRef idx="2">
+            <a:schemeClr val="accent1"/>
+          </a:effectRef>
+          <a:fontRef idx="minor">
+            <a:schemeClr val="lt1"/>
+          </a:fontRef>
+        </p:style>
+        <p:txBody>
+          <a:bodyPr rtlCol="0" anchor="ctr"/>
+          <a:lstStyle/>
+          <a:p>
+            <a:pPr algn="ctr"/>
+          </a:p>
+        </p:txBody>
+      </p:sp>
+      <p:sp>
+        <p:nvSpPr>
+          <p:cNvPr id="22" name="Rectangle 21"/>
+          <p:cNvSpPr/>
+          <p:nvPr/>
+        </p:nvSpPr>
+        <p:spPr>
+          <a:xfrm>
+            <a:off x="4283354" y="4055364"/>
+            <a:ext cx="3624986" cy="64008"/>
+          </a:xfrm>
+          <a:prstGeom prst="rect">
+            <a:avLst/>
+          </a:prstGeom>
+          <a:solidFill>
+            <a:srgbClr val="095292"/>
+          </a:solidFill>
+          <a:ln>
+            <a:noFill/>
+          </a:ln>
+        </p:spPr>
+        <p:style>
+          <a:lnRef idx="1">
+            <a:schemeClr val="accent1"/>
+          </a:lnRef>
+          <a:fillRef idx="3">
+            <a:schemeClr val="accent1"/>
+          </a:fillRef>
+          <a:effectRef idx="2">
+            <a:schemeClr val="accent1"/>
+          </a:effectRef>
+          <a:fontRef idx="minor">
+            <a:schemeClr val="lt1"/>
+          </a:fontRef>
+        </p:style>
+        <p:txBody>
+          <a:bodyPr rtlCol="0" anchor="ctr"/>
+          <a:lstStyle/>
+          <a:p>
+            <a:pPr algn="ctr"/>
+          </a:p>
+        </p:txBody>
+      </p:sp>
+      <p:sp>
+        <p:nvSpPr>
+          <p:cNvPr id="23" name="Rectangle 22"/>
+          <p:cNvSpPr/>
+          <p:nvPr/>
+        </p:nvSpPr>
+        <p:spPr>
+          <a:xfrm>
+            <a:off x="4283354" y="4119372"/>
+            <a:ext cx="3624986" cy="27432"/>
+          </a:xfrm>
+          <a:prstGeom prst="rect">
+            <a:avLst/>
+          </a:prstGeom>
+          <a:solidFill>
+            <a:srgbClr val="FFD000"/>
+          </a:solidFill>
+          <a:ln>
+            <a:noFill/>
+          </a:ln>
+        </p:spPr>
+        <p:style>
+          <a:lnRef idx="1">
+            <a:schemeClr val="accent1"/>
+          </a:lnRef>
+          <a:fillRef idx="3">
+            <a:schemeClr val="accent1"/>
+          </a:fillRef>
+          <a:effectRef idx="2">
+            <a:schemeClr val="accent1"/>
+          </a:effectRef>
+          <a:fontRef idx="minor">
+            <a:schemeClr val="lt1"/>
+          </a:fontRef>
+        </p:style>
+        <p:txBody>
+          <a:bodyPr rtlCol="0" anchor="ctr"/>
+          <a:lstStyle/>
+          <a:p>
+            <a:pPr algn="ctr"/>
+          </a:p>
+        </p:txBody>
+      </p:sp>
+      <p:pic>
+        <p:nvPicPr>
+          <p:cNvPr id="24" name="Picture 23" descr="examlab.png"/>
+          <p:cNvPicPr>
+            <a:picLocks noChangeAspect="1"/>
+          </p:cNvPicPr>
+          <p:nvPr/>
+        </p:nvPicPr>
+        <p:blipFill>
+          <a:blip r:embed="rId5"/>
+          <a:stretch>
+            <a:fillRect/>
+          </a:stretch>
+        </p:blipFill>
+        <p:spPr>
+          <a:xfrm>
+            <a:off x="5485485" y="4311396"/>
+            <a:ext cx="1220724" cy="1220724"/>
+          </a:xfrm>
+          <a:prstGeom prst="rect">
+            <a:avLst/>
+          </a:prstGeom>
+        </p:spPr>
+      </p:pic>
+      <p:sp>
+        <p:nvSpPr>
+          <p:cNvPr id="25" name="TextBox 24"/>
+          <p:cNvSpPr txBox="1"/>
+          <p:nvPr/>
+        </p:nvSpPr>
+        <p:spPr>
+          <a:xfrm>
+            <a:off x="4356506" y="5623560"/>
+            <a:ext cx="3478682" cy="621792"/>
+          </a:xfrm>
+          <a:prstGeom prst="rect">
+            <a:avLst/>
+          </a:prstGeom>
+          <a:noFill/>
+        </p:spPr>
+        <p:txBody>
+          <a:bodyPr wrap="square" anchor="t"/>
+          <a:lstStyle/>
+          <a:p>
+            <a:pPr algn="ctr"/>
+            <a:r>
+              <a:rPr sz="1300" b="1" i="0">
+                <a:solidFill>
+                  <a:srgbClr val="095292"/>
+                </a:solidFill>
+                <a:latin typeface="Calibri"/>
+              </a:rPr>
+              <a:t>la plataforma del curso</a:t>
+            </a:r>
+          </a:p>
+          <a:p>
+            <a:pPr algn="ctr">
+              <a:spcBef>
+                <a:spcPts val="200"/>
+              </a:spcBef>
+            </a:pPr>
+            <a:r>
+              <a:rPr sz="1000" b="0" i="0">
+                <a:solidFill>
+                  <a:srgbClr val="666666"/>
+                </a:solidFill>
+                <a:latin typeface="Calibri"/>
+              </a:rPr>
+              <a:t>Entrega del taller · en la fecha que indique el docente</a:t>
+            </a:r>
+          </a:p>
+        </p:txBody>
+      </p:sp>
+      <p:sp>
+        <p:nvSpPr>
+          <p:cNvPr id="26" name="TextBox 25"/>
           <p:cNvSpPr txBox="1"/>
           <p:nvPr/>
         </p:nvSpPr>
@@ -5212,7 +5526,7 @@
                 </a:solidFill>
                 <a:latin typeface="Calibri"/>
               </a:rPr>
-              <a:t>Taller PI — punto de partida</a:t>
+              <a:t>Taller PI — por que importa</a:t>
             </a:r>
           </a:p>
         </p:txBody>
@@ -5251,7 +5565,25 @@
                 </a:solidFill>
                 <a:latin typeface="Calibri"/>
               </a:rPr>
-              <a:t>–   El equipo tiene requisitos escritos y un mapa de fases, pero no tiene ningun orden de trabajo: todos quieren empezar por la pantalla que les parece mas bonita.</a:t>
+              <a:t>–   </a:t>
+            </a:r>
+            <a:r>
+              <a:rPr sz="2000" b="1" i="0">
+                <a:solidFill>
+                  <a:srgbClr val="333333"/>
+                </a:solidFill>
+                <a:latin typeface="Calibri"/>
+              </a:rPr>
+              <a:t>Por que importa al PI:</a:t>
+            </a:r>
+            <a:r>
+              <a:rPr sz="2000" b="0" i="0">
+                <a:solidFill>
+                  <a:srgbClr val="333333"/>
+                </a:solidFill>
+                <a:latin typeface="Calibri"/>
+              </a:rPr>
+              <a:t> el semestre completo de VetCare se va a organizar como sprints, y lo que se defina hoy en el backlog es literalmente el orden en que se van a producir los planos.</a:t>
             </a:r>
           </a:p>
           <a:p>
@@ -5267,7 +5599,7 @@
                 </a:solidFill>
                 <a:latin typeface="Calibri"/>
               </a:rPr>
-              <a:t>–   La administradora de Huellitas puede dar retroalimentacion corta cada dos o tres semanas, pero no puede sentarse a leer un documento de ochenta paginas.</a:t>
+              <a:t>–   Ya vimos el enfoque tradicional y su documentacion formal; hoy se ve el otro extremo del espectro y se aprende a decidir cual parte de VetCare conviene tratar de cada forma.</a:t>
             </a:r>
           </a:p>
           <a:p>
@@ -5283,7 +5615,7 @@
                 </a:solidFill>
                 <a:latin typeface="Calibri"/>
               </a:rPr>
-              <a:t>–   En el grupo circula la idea de que agil significa no escribir nada y que 'ya lo iremos viendo sobre la marcha'.</a:t>
+              <a:t>–   Aqui se aclara de una vez el malentendido mas costoso del curso: agil no es la excusa para no documentar, y en esta asignatura la documentacion de diseño es justamente el incremento entregable.</a:t>
             </a:r>
           </a:p>
         </p:txBody>
@@ -5464,111 +5796,21 @@
                 </a:solidFill>
                 <a:latin typeface="Calibri"/>
               </a:rPr>
-              <a:t>Taller PI — pasos guiados</a:t>
-            </a:r>
-          </a:p>
-        </p:txBody>
-      </p:sp>
-      <p:sp>
-        <p:nvSpPr>
-          <p:cNvPr id="5" name="Rounded Rectangle 4"/>
-          <p:cNvSpPr/>
-          <p:nvPr/>
-        </p:nvSpPr>
-        <p:spPr>
-          <a:xfrm>
-            <a:off x="457200" y="1234440"/>
-            <a:ext cx="11277295" cy="950976"/>
-          </a:xfrm>
-          <a:prstGeom prst="roundRect">
-            <a:avLst>
-              <a:gd name="adj" fmla="val 12000"/>
-            </a:avLst>
-          </a:prstGeom>
-          <a:solidFill>
-            <a:srgbClr val="F2F2F2"/>
-          </a:solidFill>
-          <a:ln>
-            <a:noFill/>
-          </a:ln>
-        </p:spPr>
-        <p:style>
-          <a:lnRef idx="1">
-            <a:schemeClr val="accent1"/>
-          </a:lnRef>
-          <a:fillRef idx="3">
-            <a:schemeClr val="accent1"/>
-          </a:fillRef>
-          <a:effectRef idx="2">
-            <a:schemeClr val="accent1"/>
-          </a:effectRef>
-          <a:fontRef idx="minor">
-            <a:schemeClr val="lt1"/>
-          </a:fontRef>
-        </p:style>
-        <p:txBody>
-          <a:bodyPr rtlCol="0" anchor="ctr"/>
-          <a:lstStyle/>
-          <a:p>
-            <a:pPr algn="ctr"/>
-          </a:p>
-        </p:txBody>
-      </p:sp>
-      <p:sp>
-        <p:nvSpPr>
-          <p:cNvPr id="6" name="Rounded Rectangle 5"/>
-          <p:cNvSpPr/>
-          <p:nvPr/>
-        </p:nvSpPr>
-        <p:spPr>
-          <a:xfrm>
-            <a:off x="594360" y="1490472"/>
-            <a:ext cx="438912" cy="438912"/>
-          </a:xfrm>
-          <a:prstGeom prst="roundRect">
-            <a:avLst>
-              <a:gd name="adj" fmla="val 12000"/>
-            </a:avLst>
-          </a:prstGeom>
-          <a:solidFill>
-            <a:srgbClr val="095292"/>
-          </a:solidFill>
-          <a:ln>
-            <a:noFill/>
-          </a:ln>
-        </p:spPr>
-        <p:style>
-          <a:lnRef idx="1">
-            <a:schemeClr val="accent1"/>
-          </a:lnRef>
-          <a:fillRef idx="3">
-            <a:schemeClr val="accent1"/>
-          </a:fillRef>
-          <a:effectRef idx="2">
-            <a:schemeClr val="accent1"/>
-          </a:effectRef>
-          <a:fontRef idx="minor">
-            <a:schemeClr val="lt1"/>
-          </a:fontRef>
-        </p:style>
-        <p:txBody>
-          <a:bodyPr rtlCol="0" anchor="ctr"/>
-          <a:lstStyle/>
-          <a:p>
-            <a:pPr algn="ctr"/>
-          </a:p>
-        </p:txBody>
-      </p:sp>
-      <p:sp>
-        <p:nvSpPr>
-          <p:cNvPr id="7" name="TextBox 6"/>
+              <a:t>Taller PI — punto de partida</a:t>
+            </a:r>
+          </a:p>
+        </p:txBody>
+      </p:sp>
+      <p:sp>
+        <p:nvSpPr>
+          <p:cNvPr id="5" name="TextBox 4"/>
           <p:cNvSpPr txBox="1"/>
           <p:nvPr/>
         </p:nvSpPr>
         <p:spPr>
           <a:xfrm>
-            <a:off x="594360" y="1490472"/>
-            <a:ext cx="438912" cy="438912"/>
+            <a:off x="457200" y="1170432"/>
+            <a:ext cx="11277295" cy="5230368"/>
           </a:xfrm>
           <a:prstGeom prst="rect">
             <a:avLst/>
@@ -5576,677 +5818,63 @@
           <a:noFill/>
         </p:spPr>
         <p:txBody>
-          <a:bodyPr wrap="square" anchor="ctr"/>
-          <a:lstStyle/>
-          <a:p>
-            <a:pPr algn="ctr"/>
-            <a:r>
-              <a:rPr sz="1600" b="1" i="0">
-                <a:solidFill>
-                  <a:srgbClr val="FFFFFF"/>
-                </a:solidFill>
-                <a:latin typeface="Calibri"/>
-              </a:rPr>
-              <a:t>1</a:t>
-            </a:r>
-          </a:p>
-        </p:txBody>
-      </p:sp>
-      <p:sp>
-        <p:nvSpPr>
-          <p:cNvPr id="8" name="TextBox 7"/>
-          <p:cNvSpPr txBox="1"/>
-          <p:nvPr/>
-        </p:nvSpPr>
-        <p:spPr>
-          <a:xfrm>
-            <a:off x="1188720" y="1325880"/>
-            <a:ext cx="10271455" cy="786384"/>
-          </a:xfrm>
-          <a:prstGeom prst="rect">
-            <a:avLst/>
-          </a:prstGeom>
-          <a:noFill/>
-        </p:spPr>
-        <p:txBody>
-          <a:bodyPr wrap="square" anchor="ctr"/>
-          <a:lstStyle/>
-          <a:p>
-            <a:r>
-              <a:rPr sz="1500" b="1" i="0">
-                <a:solidFill>
-                  <a:srgbClr val="095292"/>
-                </a:solidFill>
-                <a:latin typeface="Calibri"/>
-              </a:rPr>
-              <a:t>En Google Docs escriba el Product Backlog de VetCare con al menos ocho items redactados como historias de usuario cortas, cada uno con prioridad (Alta/Media/Baja) y una justificacion de valor para Huellitas en una linea.</a:t>
-            </a:r>
-          </a:p>
-        </p:txBody>
-      </p:sp>
-      <p:sp>
-        <p:nvSpPr>
-          <p:cNvPr id="9" name="Rounded Rectangle 8"/>
-          <p:cNvSpPr/>
-          <p:nvPr/>
-        </p:nvSpPr>
-        <p:spPr>
-          <a:xfrm>
-            <a:off x="457200" y="2276856"/>
-            <a:ext cx="11277295" cy="950976"/>
-          </a:xfrm>
-          <a:prstGeom prst="roundRect">
-            <a:avLst>
-              <a:gd name="adj" fmla="val 12000"/>
-            </a:avLst>
-          </a:prstGeom>
-          <a:solidFill>
-            <a:srgbClr val="E8F4FA"/>
-          </a:solidFill>
-          <a:ln>
-            <a:noFill/>
-          </a:ln>
-        </p:spPr>
-        <p:style>
-          <a:lnRef idx="1">
-            <a:schemeClr val="accent1"/>
-          </a:lnRef>
-          <a:fillRef idx="3">
-            <a:schemeClr val="accent1"/>
-          </a:fillRef>
-          <a:effectRef idx="2">
-            <a:schemeClr val="accent1"/>
-          </a:effectRef>
-          <a:fontRef idx="minor">
-            <a:schemeClr val="lt1"/>
-          </a:fontRef>
-        </p:style>
-        <p:txBody>
-          <a:bodyPr rtlCol="0" anchor="ctr"/>
-          <a:lstStyle/>
-          <a:p>
-            <a:pPr algn="ctr"/>
-          </a:p>
-        </p:txBody>
-      </p:sp>
-      <p:sp>
-        <p:nvSpPr>
-          <p:cNvPr id="10" name="Rounded Rectangle 9"/>
-          <p:cNvSpPr/>
-          <p:nvPr/>
-        </p:nvSpPr>
-        <p:spPr>
-          <a:xfrm>
-            <a:off x="594360" y="2532888"/>
-            <a:ext cx="438912" cy="438912"/>
-          </a:xfrm>
-          <a:prstGeom prst="roundRect">
-            <a:avLst>
-              <a:gd name="adj" fmla="val 12000"/>
-            </a:avLst>
-          </a:prstGeom>
-          <a:solidFill>
-            <a:srgbClr val="095292"/>
-          </a:solidFill>
-          <a:ln>
-            <a:noFill/>
-          </a:ln>
-        </p:spPr>
-        <p:style>
-          <a:lnRef idx="1">
-            <a:schemeClr val="accent1"/>
-          </a:lnRef>
-          <a:fillRef idx="3">
-            <a:schemeClr val="accent1"/>
-          </a:fillRef>
-          <a:effectRef idx="2">
-            <a:schemeClr val="accent1"/>
-          </a:effectRef>
-          <a:fontRef idx="minor">
-            <a:schemeClr val="lt1"/>
-          </a:fontRef>
-        </p:style>
-        <p:txBody>
-          <a:bodyPr rtlCol="0" anchor="ctr"/>
-          <a:lstStyle/>
-          <a:p>
-            <a:pPr algn="ctr"/>
-          </a:p>
-        </p:txBody>
-      </p:sp>
-      <p:sp>
-        <p:nvSpPr>
-          <p:cNvPr id="11" name="TextBox 10"/>
-          <p:cNvSpPr txBox="1"/>
-          <p:nvPr/>
-        </p:nvSpPr>
-        <p:spPr>
-          <a:xfrm>
-            <a:off x="594360" y="2532888"/>
-            <a:ext cx="438912" cy="438912"/>
-          </a:xfrm>
-          <a:prstGeom prst="rect">
-            <a:avLst/>
-          </a:prstGeom>
-          <a:noFill/>
-        </p:spPr>
-        <p:txBody>
-          <a:bodyPr wrap="square" anchor="ctr"/>
-          <a:lstStyle/>
-          <a:p>
-            <a:pPr algn="ctr"/>
-            <a:r>
-              <a:rPr sz="1600" b="1" i="0">
-                <a:solidFill>
-                  <a:srgbClr val="FFFFFF"/>
-                </a:solidFill>
-                <a:latin typeface="Calibri"/>
-              </a:rPr>
-              <a:t>2</a:t>
-            </a:r>
-          </a:p>
-        </p:txBody>
-      </p:sp>
-      <p:sp>
-        <p:nvSpPr>
-          <p:cNvPr id="12" name="TextBox 11"/>
-          <p:cNvSpPr txBox="1"/>
-          <p:nvPr/>
-        </p:nvSpPr>
-        <p:spPr>
-          <a:xfrm>
-            <a:off x="1188720" y="2368296"/>
-            <a:ext cx="10271455" cy="786384"/>
-          </a:xfrm>
-          <a:prstGeom prst="rect">
-            <a:avLst/>
-          </a:prstGeom>
-          <a:noFill/>
-        </p:spPr>
-        <p:txBody>
-          <a:bodyPr wrap="square" anchor="ctr"/>
-          <a:lstStyle/>
-          <a:p>
-            <a:r>
-              <a:rPr sz="1500" b="1" i="0">
-                <a:solidFill>
-                  <a:srgbClr val="095292"/>
-                </a:solidFill>
-                <a:latin typeface="Calibri"/>
-              </a:rPr>
-              <a:t>Priorice el backlog en orden de arriba hacia abajo y explique por escrito, en dos renglones, por que el primer item es el primero (pista: resuelve uno de los tres dolores de la clinica).</a:t>
-            </a:r>
-          </a:p>
-        </p:txBody>
-      </p:sp>
-      <p:sp>
-        <p:nvSpPr>
-          <p:cNvPr id="13" name="Rounded Rectangle 12"/>
-          <p:cNvSpPr/>
-          <p:nvPr/>
-        </p:nvSpPr>
-        <p:spPr>
-          <a:xfrm>
-            <a:off x="457200" y="3319272"/>
-            <a:ext cx="11277295" cy="950976"/>
-          </a:xfrm>
-          <a:prstGeom prst="roundRect">
-            <a:avLst>
-              <a:gd name="adj" fmla="val 12000"/>
-            </a:avLst>
-          </a:prstGeom>
-          <a:solidFill>
-            <a:srgbClr val="F2F2F2"/>
-          </a:solidFill>
-          <a:ln>
-            <a:noFill/>
-          </a:ln>
-        </p:spPr>
-        <p:style>
-          <a:lnRef idx="1">
-            <a:schemeClr val="accent1"/>
-          </a:lnRef>
-          <a:fillRef idx="3">
-            <a:schemeClr val="accent1"/>
-          </a:fillRef>
-          <a:effectRef idx="2">
-            <a:schemeClr val="accent1"/>
-          </a:effectRef>
-          <a:fontRef idx="minor">
-            <a:schemeClr val="lt1"/>
-          </a:fontRef>
-        </p:style>
-        <p:txBody>
-          <a:bodyPr rtlCol="0" anchor="ctr"/>
-          <a:lstStyle/>
-          <a:p>
-            <a:pPr algn="ctr"/>
-          </a:p>
-        </p:txBody>
-      </p:sp>
-      <p:sp>
-        <p:nvSpPr>
-          <p:cNvPr id="14" name="Rounded Rectangle 13"/>
-          <p:cNvSpPr/>
-          <p:nvPr/>
-        </p:nvSpPr>
-        <p:spPr>
-          <a:xfrm>
-            <a:off x="594360" y="3575304"/>
-            <a:ext cx="438912" cy="438912"/>
-          </a:xfrm>
-          <a:prstGeom prst="roundRect">
-            <a:avLst>
-              <a:gd name="adj" fmla="val 12000"/>
-            </a:avLst>
-          </a:prstGeom>
-          <a:solidFill>
-            <a:srgbClr val="095292"/>
-          </a:solidFill>
-          <a:ln>
-            <a:noFill/>
-          </a:ln>
-        </p:spPr>
-        <p:style>
-          <a:lnRef idx="1">
-            <a:schemeClr val="accent1"/>
-          </a:lnRef>
-          <a:fillRef idx="3">
-            <a:schemeClr val="accent1"/>
-          </a:fillRef>
-          <a:effectRef idx="2">
-            <a:schemeClr val="accent1"/>
-          </a:effectRef>
-          <a:fontRef idx="minor">
-            <a:schemeClr val="lt1"/>
-          </a:fontRef>
-        </p:style>
-        <p:txBody>
-          <a:bodyPr rtlCol="0" anchor="ctr"/>
-          <a:lstStyle/>
-          <a:p>
-            <a:pPr algn="ctr"/>
-          </a:p>
-        </p:txBody>
-      </p:sp>
-      <p:sp>
-        <p:nvSpPr>
-          <p:cNvPr id="15" name="TextBox 14"/>
-          <p:cNvSpPr txBox="1"/>
-          <p:nvPr/>
-        </p:nvSpPr>
-        <p:spPr>
-          <a:xfrm>
-            <a:off x="594360" y="3575304"/>
-            <a:ext cx="438912" cy="438912"/>
-          </a:xfrm>
-          <a:prstGeom prst="rect">
-            <a:avLst/>
-          </a:prstGeom>
-          <a:noFill/>
-        </p:spPr>
-        <p:txBody>
-          <a:bodyPr wrap="square" anchor="ctr"/>
-          <a:lstStyle/>
-          <a:p>
-            <a:pPr algn="ctr"/>
-            <a:r>
-              <a:rPr sz="1600" b="1" i="0">
-                <a:solidFill>
-                  <a:srgbClr val="FFFFFF"/>
-                </a:solidFill>
-                <a:latin typeface="Calibri"/>
-              </a:rPr>
-              <a:t>3</a:t>
-            </a:r>
-          </a:p>
-        </p:txBody>
-      </p:sp>
-      <p:sp>
-        <p:nvSpPr>
-          <p:cNvPr id="16" name="TextBox 15"/>
-          <p:cNvSpPr txBox="1"/>
-          <p:nvPr/>
-        </p:nvSpPr>
-        <p:spPr>
-          <a:xfrm>
-            <a:off x="1188720" y="3410712"/>
-            <a:ext cx="10271455" cy="786384"/>
-          </a:xfrm>
-          <a:prstGeom prst="rect">
-            <a:avLst/>
-          </a:prstGeom>
-          <a:noFill/>
-        </p:spPr>
-        <p:txBody>
-          <a:bodyPr wrap="square" anchor="ctr"/>
-          <a:lstStyle/>
-          <a:p>
-            <a:r>
-              <a:rPr sz="1500" b="1" i="0">
-                <a:solidFill>
-                  <a:srgbClr val="095292"/>
-                </a:solidFill>
-                <a:latin typeface="Calibri"/>
-              </a:rPr>
-              <a:t>Escriba tres historias completas con criterios de aceptacion en formato Dado/Cuando/Entonces, y asegurese de que cada historia tenga al menos un escenario alternativo o de error, no solo el camino feliz.</a:t>
-            </a:r>
-          </a:p>
-        </p:txBody>
-      </p:sp>
-      <p:sp>
-        <p:nvSpPr>
-          <p:cNvPr id="17" name="Rounded Rectangle 16"/>
-          <p:cNvSpPr/>
-          <p:nvPr/>
-        </p:nvSpPr>
-        <p:spPr>
-          <a:xfrm>
-            <a:off x="457200" y="4361688"/>
-            <a:ext cx="11277295" cy="950976"/>
-          </a:xfrm>
-          <a:prstGeom prst="roundRect">
-            <a:avLst>
-              <a:gd name="adj" fmla="val 12000"/>
-            </a:avLst>
-          </a:prstGeom>
-          <a:solidFill>
-            <a:srgbClr val="E8F4FA"/>
-          </a:solidFill>
-          <a:ln>
-            <a:noFill/>
-          </a:ln>
-        </p:spPr>
-        <p:style>
-          <a:lnRef idx="1">
-            <a:schemeClr val="accent1"/>
-          </a:lnRef>
-          <a:fillRef idx="3">
-            <a:schemeClr val="accent1"/>
-          </a:fillRef>
-          <a:effectRef idx="2">
-            <a:schemeClr val="accent1"/>
-          </a:effectRef>
-          <a:fontRef idx="minor">
-            <a:schemeClr val="lt1"/>
-          </a:fontRef>
-        </p:style>
-        <p:txBody>
-          <a:bodyPr rtlCol="0" anchor="ctr"/>
-          <a:lstStyle/>
-          <a:p>
-            <a:pPr algn="ctr"/>
-          </a:p>
-        </p:txBody>
-      </p:sp>
-      <p:sp>
-        <p:nvSpPr>
-          <p:cNvPr id="18" name="Rounded Rectangle 17"/>
-          <p:cNvSpPr/>
-          <p:nvPr/>
-        </p:nvSpPr>
-        <p:spPr>
-          <a:xfrm>
-            <a:off x="594360" y="4617720"/>
-            <a:ext cx="438912" cy="438912"/>
-          </a:xfrm>
-          <a:prstGeom prst="roundRect">
-            <a:avLst>
-              <a:gd name="adj" fmla="val 12000"/>
-            </a:avLst>
-          </a:prstGeom>
-          <a:solidFill>
-            <a:srgbClr val="095292"/>
-          </a:solidFill>
-          <a:ln>
-            <a:noFill/>
-          </a:ln>
-        </p:spPr>
-        <p:style>
-          <a:lnRef idx="1">
-            <a:schemeClr val="accent1"/>
-          </a:lnRef>
-          <a:fillRef idx="3">
-            <a:schemeClr val="accent1"/>
-          </a:fillRef>
-          <a:effectRef idx="2">
-            <a:schemeClr val="accent1"/>
-          </a:effectRef>
-          <a:fontRef idx="minor">
-            <a:schemeClr val="lt1"/>
-          </a:fontRef>
-        </p:style>
-        <p:txBody>
-          <a:bodyPr rtlCol="0" anchor="ctr"/>
-          <a:lstStyle/>
-          <a:p>
-            <a:pPr algn="ctr"/>
-          </a:p>
-        </p:txBody>
-      </p:sp>
-      <p:sp>
-        <p:nvSpPr>
-          <p:cNvPr id="19" name="TextBox 18"/>
-          <p:cNvSpPr txBox="1"/>
-          <p:nvPr/>
-        </p:nvSpPr>
-        <p:spPr>
-          <a:xfrm>
-            <a:off x="594360" y="4617720"/>
-            <a:ext cx="438912" cy="438912"/>
-          </a:xfrm>
-          <a:prstGeom prst="rect">
-            <a:avLst/>
-          </a:prstGeom>
-          <a:noFill/>
-        </p:spPr>
-        <p:txBody>
-          <a:bodyPr wrap="square" anchor="ctr"/>
-          <a:lstStyle/>
-          <a:p>
-            <a:pPr algn="ctr"/>
-            <a:r>
-              <a:rPr sz="1600" b="1" i="0">
-                <a:solidFill>
-                  <a:srgbClr val="FFFFFF"/>
-                </a:solidFill>
-                <a:latin typeface="Calibri"/>
-              </a:rPr>
-              <a:t>4</a:t>
-            </a:r>
-          </a:p>
-        </p:txBody>
-      </p:sp>
-      <p:sp>
-        <p:nvSpPr>
-          <p:cNvPr id="20" name="TextBox 19"/>
-          <p:cNvSpPr txBox="1"/>
-          <p:nvPr/>
-        </p:nvSpPr>
-        <p:spPr>
-          <a:xfrm>
-            <a:off x="1188720" y="4453128"/>
-            <a:ext cx="10271455" cy="786384"/>
-          </a:xfrm>
-          <a:prstGeom prst="rect">
-            <a:avLst/>
-          </a:prstGeom>
-          <a:noFill/>
-        </p:spPr>
-        <p:txBody>
-          <a:bodyPr wrap="square" anchor="ctr"/>
-          <a:lstStyle/>
-          <a:p>
-            <a:r>
-              <a:rPr sz="1500" b="1" i="0">
-                <a:solidFill>
-                  <a:srgbClr val="095292"/>
-                </a:solidFill>
-                <a:latin typeface="Calibri"/>
-              </a:rPr>
-              <a:t>Redacte la Definicion de Terminado para artefactos de diseño (por ejemplo: tiene diagrama en draw.io, tiene mockup, esta revisado por un compañero y tiene el visto bueno del cliente) y escribala en la cabecera del tablero.</a:t>
-            </a:r>
-          </a:p>
-        </p:txBody>
-      </p:sp>
-      <p:sp>
-        <p:nvSpPr>
-          <p:cNvPr id="21" name="Rounded Rectangle 20"/>
-          <p:cNvSpPr/>
-          <p:nvPr/>
-        </p:nvSpPr>
-        <p:spPr>
-          <a:xfrm>
-            <a:off x="457200" y="5404104"/>
-            <a:ext cx="11277295" cy="950976"/>
-          </a:xfrm>
-          <a:prstGeom prst="roundRect">
-            <a:avLst>
-              <a:gd name="adj" fmla="val 12000"/>
-            </a:avLst>
-          </a:prstGeom>
-          <a:solidFill>
-            <a:srgbClr val="F2F2F2"/>
-          </a:solidFill>
-          <a:ln>
-            <a:noFill/>
-          </a:ln>
-        </p:spPr>
-        <p:style>
-          <a:lnRef idx="1">
-            <a:schemeClr val="accent1"/>
-          </a:lnRef>
-          <a:fillRef idx="3">
-            <a:schemeClr val="accent1"/>
-          </a:fillRef>
-          <a:effectRef idx="2">
-            <a:schemeClr val="accent1"/>
-          </a:effectRef>
-          <a:fontRef idx="minor">
-            <a:schemeClr val="lt1"/>
-          </a:fontRef>
-        </p:style>
-        <p:txBody>
-          <a:bodyPr rtlCol="0" anchor="ctr"/>
-          <a:lstStyle/>
-          <a:p>
-            <a:pPr algn="ctr"/>
-          </a:p>
-        </p:txBody>
-      </p:sp>
-      <p:sp>
-        <p:nvSpPr>
-          <p:cNvPr id="22" name="Rounded Rectangle 21"/>
-          <p:cNvSpPr/>
-          <p:nvPr/>
-        </p:nvSpPr>
-        <p:spPr>
-          <a:xfrm>
-            <a:off x="594360" y="5660136"/>
-            <a:ext cx="438912" cy="438912"/>
-          </a:xfrm>
-          <a:prstGeom prst="roundRect">
-            <a:avLst>
-              <a:gd name="adj" fmla="val 12000"/>
-            </a:avLst>
-          </a:prstGeom>
-          <a:solidFill>
-            <a:srgbClr val="095292"/>
-          </a:solidFill>
-          <a:ln>
-            <a:noFill/>
-          </a:ln>
-        </p:spPr>
-        <p:style>
-          <a:lnRef idx="1">
-            <a:schemeClr val="accent1"/>
-          </a:lnRef>
-          <a:fillRef idx="3">
-            <a:schemeClr val="accent1"/>
-          </a:fillRef>
-          <a:effectRef idx="2">
-            <a:schemeClr val="accent1"/>
-          </a:effectRef>
-          <a:fontRef idx="minor">
-            <a:schemeClr val="lt1"/>
-          </a:fontRef>
-        </p:style>
-        <p:txBody>
-          <a:bodyPr rtlCol="0" anchor="ctr"/>
-          <a:lstStyle/>
-          <a:p>
-            <a:pPr algn="ctr"/>
-          </a:p>
-        </p:txBody>
-      </p:sp>
-      <p:sp>
-        <p:nvSpPr>
-          <p:cNvPr id="23" name="TextBox 22"/>
-          <p:cNvSpPr txBox="1"/>
-          <p:nvPr/>
-        </p:nvSpPr>
-        <p:spPr>
-          <a:xfrm>
-            <a:off x="594360" y="5660136"/>
-            <a:ext cx="438912" cy="438912"/>
-          </a:xfrm>
-          <a:prstGeom prst="rect">
-            <a:avLst/>
-          </a:prstGeom>
-          <a:noFill/>
-        </p:spPr>
-        <p:txBody>
-          <a:bodyPr wrap="square" anchor="ctr"/>
-          <a:lstStyle/>
-          <a:p>
-            <a:pPr algn="ctr"/>
-            <a:r>
-              <a:rPr sz="1600" b="1" i="0">
-                <a:solidFill>
-                  <a:srgbClr val="FFFFFF"/>
-                </a:solidFill>
-                <a:latin typeface="Calibri"/>
-              </a:rPr>
-              <a:t>5</a:t>
-            </a:r>
-          </a:p>
-        </p:txBody>
-      </p:sp>
-      <p:sp>
-        <p:nvSpPr>
-          <p:cNvPr id="24" name="TextBox 23"/>
-          <p:cNvSpPr txBox="1"/>
-          <p:nvPr/>
-        </p:nvSpPr>
-        <p:spPr>
-          <a:xfrm>
-            <a:off x="1188720" y="5495544"/>
-            <a:ext cx="10271455" cy="786384"/>
-          </a:xfrm>
-          <a:prstGeom prst="rect">
-            <a:avLst/>
-          </a:prstGeom>
-          <a:noFill/>
-        </p:spPr>
-        <p:txBody>
-          <a:bodyPr wrap="square" anchor="ctr"/>
-          <a:lstStyle/>
-          <a:p>
-            <a:r>
-              <a:rPr sz="1400" b="1" i="0">
-                <a:solidFill>
-                  <a:srgbClr val="095292"/>
-                </a:solidFill>
-                <a:latin typeface="Calibri"/>
-              </a:rPr>
-              <a:t>En draw.io o Excalidraw arme el tablero con las columnas Por hacer / Modelando / En revision del cliente / Aprobado, ponga el limite de trabajo en curso en dos para las columnas del medio, distribuya las tarjetas en tres sprints con su objetivo y entregable de diseño, exporte a PDF y suba a la plataforma del curso.</a:t>
-            </a:r>
-          </a:p>
-        </p:txBody>
-      </p:sp>
-      <p:sp>
-        <p:nvSpPr>
-          <p:cNvPr id="25" name="TextBox 24"/>
+          <a:bodyPr wrap="square">
+            <a:spAutoFit/>
+          </a:bodyPr>
+          <a:lstStyle/>
+          <a:p>
+            <a:pPr>
+              <a:spcAft>
+                <a:spcPts val="800"/>
+              </a:spcAft>
+            </a:pPr>
+            <a:r>
+              <a:rPr sz="2000" b="0" i="0">
+                <a:solidFill>
+                  <a:srgbClr val="333333"/>
+                </a:solidFill>
+                <a:latin typeface="Calibri"/>
+              </a:rPr>
+              <a:t>–   El equipo tiene requisitos escritos y un mapa de fases, pero no tiene ningun orden de trabajo: todos quieren empezar por la pantalla que les parece mas bonita.</a:t>
+            </a:r>
+          </a:p>
+          <a:p>
+            <a:pPr>
+              <a:spcAft>
+                <a:spcPts val="800"/>
+              </a:spcAft>
+            </a:pPr>
+            <a:r>
+              <a:rPr sz="2000" b="0" i="0">
+                <a:solidFill>
+                  <a:srgbClr val="333333"/>
+                </a:solidFill>
+                <a:latin typeface="Calibri"/>
+              </a:rPr>
+              <a:t>–   La administradora de Huellitas puede dar retroalimentacion corta cada dos o tres semanas, pero no puede sentarse a leer un documento de ochenta paginas.</a:t>
+            </a:r>
+          </a:p>
+          <a:p>
+            <a:pPr>
+              <a:spcAft>
+                <a:spcPts val="800"/>
+              </a:spcAft>
+            </a:pPr>
+            <a:r>
+              <a:rPr sz="2000" b="0" i="0">
+                <a:solidFill>
+                  <a:srgbClr val="333333"/>
+                </a:solidFill>
+                <a:latin typeface="Calibri"/>
+              </a:rPr>
+              <a:t>–   En el grupo circula la idea de que agil significa no escribir nada y que 'ya lo iremos viendo sobre la marcha'.</a:t>
+            </a:r>
+          </a:p>
+        </p:txBody>
+      </p:sp>
+      <p:sp>
+        <p:nvSpPr>
+          <p:cNvPr id="6" name="TextBox 5"/>
           <p:cNvSpPr txBox="1"/>
           <p:nvPr/>
         </p:nvSpPr>
@@ -6420,7 +6048,7 @@
                 </a:solidFill>
                 <a:latin typeface="Calibri"/>
               </a:rPr>
-              <a:t>Antes de entregar — autochequeo</a:t>
+              <a:t>Taller PI — pasos guiados</a:t>
             </a:r>
           </a:p>
         </p:txBody>
@@ -6433,8 +6061,8 @@
         </p:nvSpPr>
         <p:spPr>
           <a:xfrm>
-            <a:off x="457200" y="1261872"/>
-            <a:ext cx="11277295" cy="566928"/>
+            <a:off x="457200" y="1234440"/>
+            <a:ext cx="11277295" cy="950976"/>
           </a:xfrm>
           <a:prstGeom prst="roundRect">
             <a:avLst>
@@ -6472,25 +6100,25 @@
       </p:sp>
       <p:sp>
         <p:nvSpPr>
-          <p:cNvPr id="6" name="Rectangle 5"/>
+          <p:cNvPr id="6" name="Rounded Rectangle 5"/>
           <p:cNvSpPr/>
           <p:nvPr/>
         </p:nvSpPr>
         <p:spPr>
           <a:xfrm>
-            <a:off x="640080" y="1408175"/>
-            <a:ext cx="274320" cy="274320"/>
-          </a:xfrm>
-          <a:prstGeom prst="rect">
-            <a:avLst/>
+            <a:off x="594360" y="1490472"/>
+            <a:ext cx="438912" cy="438912"/>
+          </a:xfrm>
+          <a:prstGeom prst="roundRect">
+            <a:avLst>
+              <a:gd name="adj" fmla="val 12000"/>
+            </a:avLst>
           </a:prstGeom>
           <a:solidFill>
-            <a:srgbClr val="FFFFFF"/>
+            <a:srgbClr val="095292"/>
           </a:solidFill>
           <a:ln>
-            <a:solidFill>
-              <a:srgbClr val="333333"/>
-            </a:solidFill>
+            <a:noFill/>
           </a:ln>
         </p:spPr>
         <p:style>
@@ -6517,20 +6145,87 @@
       </p:sp>
       <p:sp>
         <p:nvSpPr>
-          <p:cNvPr id="7" name="Rectangle 6"/>
+          <p:cNvPr id="7" name="TextBox 6"/>
+          <p:cNvSpPr txBox="1"/>
+          <p:nvPr/>
+        </p:nvSpPr>
+        <p:spPr>
+          <a:xfrm>
+            <a:off x="594360" y="1490472"/>
+            <a:ext cx="438912" cy="438912"/>
+          </a:xfrm>
+          <a:prstGeom prst="rect">
+            <a:avLst/>
+          </a:prstGeom>
+          <a:noFill/>
+        </p:spPr>
+        <p:txBody>
+          <a:bodyPr wrap="square" anchor="ctr"/>
+          <a:lstStyle/>
+          <a:p>
+            <a:pPr algn="ctr"/>
+            <a:r>
+              <a:rPr sz="1600" b="1" i="0">
+                <a:solidFill>
+                  <a:srgbClr val="FFFFFF"/>
+                </a:solidFill>
+                <a:latin typeface="Calibri"/>
+              </a:rPr>
+              <a:t>1</a:t>
+            </a:r>
+          </a:p>
+        </p:txBody>
+      </p:sp>
+      <p:sp>
+        <p:nvSpPr>
+          <p:cNvPr id="8" name="TextBox 7"/>
+          <p:cNvSpPr txBox="1"/>
+          <p:nvPr/>
+        </p:nvSpPr>
+        <p:spPr>
+          <a:xfrm>
+            <a:off x="1188720" y="1325880"/>
+            <a:ext cx="10271455" cy="786384"/>
+          </a:xfrm>
+          <a:prstGeom prst="rect">
+            <a:avLst/>
+          </a:prstGeom>
+          <a:noFill/>
+        </p:spPr>
+        <p:txBody>
+          <a:bodyPr wrap="square" anchor="ctr"/>
+          <a:lstStyle/>
+          <a:p>
+            <a:r>
+              <a:rPr sz="1500" b="1" i="0">
+                <a:solidFill>
+                  <a:srgbClr val="095292"/>
+                </a:solidFill>
+                <a:latin typeface="Calibri"/>
+              </a:rPr>
+              <a:t>En Google Docs escriba el Product Backlog de VetCare con al menos ocho items redactados como historias de usuario cortas, cada uno con prioridad (Alta/Media/Baja) y una justificacion de valor para Huellitas en una linea.</a:t>
+            </a:r>
+          </a:p>
+        </p:txBody>
+      </p:sp>
+      <p:sp>
+        <p:nvSpPr>
+          <p:cNvPr id="9" name="Rounded Rectangle 8"/>
           <p:cNvSpPr/>
           <p:nvPr/>
         </p:nvSpPr>
         <p:spPr>
           <a:xfrm>
-            <a:off x="640080" y="1408175"/>
-            <a:ext cx="73152" cy="274320"/>
-          </a:xfrm>
-          <a:prstGeom prst="rect">
-            <a:avLst/>
+            <a:off x="457200" y="2276856"/>
+            <a:ext cx="11277295" cy="950976"/>
+          </a:xfrm>
+          <a:prstGeom prst="roundRect">
+            <a:avLst>
+              <a:gd name="adj" fmla="val 12000"/>
+            </a:avLst>
           </a:prstGeom>
           <a:solidFill>
-            <a:srgbClr val="269CCB"/>
+            <a:srgbClr val="E8F4FA"/>
           </a:solidFill>
           <a:ln>
             <a:noFill/>
@@ -6560,14 +6255,59 @@
       </p:sp>
       <p:sp>
         <p:nvSpPr>
-          <p:cNvPr id="8" name="TextBox 7"/>
+          <p:cNvPr id="10" name="Rounded Rectangle 9"/>
+          <p:cNvSpPr/>
+          <p:nvPr/>
+        </p:nvSpPr>
+        <p:spPr>
+          <a:xfrm>
+            <a:off x="594360" y="2532888"/>
+            <a:ext cx="438912" cy="438912"/>
+          </a:xfrm>
+          <a:prstGeom prst="roundRect">
+            <a:avLst>
+              <a:gd name="adj" fmla="val 12000"/>
+            </a:avLst>
+          </a:prstGeom>
+          <a:solidFill>
+            <a:srgbClr val="095292"/>
+          </a:solidFill>
+          <a:ln>
+            <a:noFill/>
+          </a:ln>
+        </p:spPr>
+        <p:style>
+          <a:lnRef idx="1">
+            <a:schemeClr val="accent1"/>
+          </a:lnRef>
+          <a:fillRef idx="3">
+            <a:schemeClr val="accent1"/>
+          </a:fillRef>
+          <a:effectRef idx="2">
+            <a:schemeClr val="accent1"/>
+          </a:effectRef>
+          <a:fontRef idx="minor">
+            <a:schemeClr val="lt1"/>
+          </a:fontRef>
+        </p:style>
+        <p:txBody>
+          <a:bodyPr rtlCol="0" anchor="ctr"/>
+          <a:lstStyle/>
+          <a:p>
+            <a:pPr algn="ctr"/>
+          </a:p>
+        </p:txBody>
+      </p:sp>
+      <p:sp>
+        <p:nvSpPr>
+          <p:cNvPr id="11" name="TextBox 10"/>
           <p:cNvSpPr txBox="1"/>
           <p:nvPr/>
         </p:nvSpPr>
         <p:spPr>
           <a:xfrm>
-            <a:off x="1097280" y="1353312"/>
-            <a:ext cx="10362895" cy="402336"/>
+            <a:off x="594360" y="2532888"/>
+            <a:ext cx="438912" cy="438912"/>
           </a:xfrm>
           <a:prstGeom prst="rect">
             <a:avLst/>
@@ -6578,28 +6318,61 @@
           <a:bodyPr wrap="square" anchor="ctr"/>
           <a:lstStyle/>
           <a:p>
-            <a:r>
-              <a:rPr sz="1500" b="0" i="0">
-                <a:solidFill>
-                  <a:srgbClr val="333333"/>
-                </a:solidFill>
-                <a:latin typeface="Calibri"/>
-              </a:rPr>
-              <a:t>Si su sprint 1 se llama 'analisis' y el sprint 2 'diseño', que le va a mostrar a la veterinaria al terminar el sprint 1 que ella pueda entender y criticar?</a:t>
-            </a:r>
-          </a:p>
-        </p:txBody>
-      </p:sp>
-      <p:sp>
-        <p:nvSpPr>
-          <p:cNvPr id="9" name="Rounded Rectangle 8"/>
+            <a:pPr algn="ctr"/>
+            <a:r>
+              <a:rPr sz="1600" b="1" i="0">
+                <a:solidFill>
+                  <a:srgbClr val="FFFFFF"/>
+                </a:solidFill>
+                <a:latin typeface="Calibri"/>
+              </a:rPr>
+              <a:t>2</a:t>
+            </a:r>
+          </a:p>
+        </p:txBody>
+      </p:sp>
+      <p:sp>
+        <p:nvSpPr>
+          <p:cNvPr id="12" name="TextBox 11"/>
+          <p:cNvSpPr txBox="1"/>
+          <p:nvPr/>
+        </p:nvSpPr>
+        <p:spPr>
+          <a:xfrm>
+            <a:off x="1188720" y="2368296"/>
+            <a:ext cx="10271455" cy="786384"/>
+          </a:xfrm>
+          <a:prstGeom prst="rect">
+            <a:avLst/>
+          </a:prstGeom>
+          <a:noFill/>
+        </p:spPr>
+        <p:txBody>
+          <a:bodyPr wrap="square" anchor="ctr"/>
+          <a:lstStyle/>
+          <a:p>
+            <a:r>
+              <a:rPr sz="1500" b="1" i="0">
+                <a:solidFill>
+                  <a:srgbClr val="095292"/>
+                </a:solidFill>
+                <a:latin typeface="Calibri"/>
+              </a:rPr>
+              <a:t>Priorice el backlog en orden de arriba hacia abajo y explique por escrito, en dos renglones, por que el primer item es el primero (pista: resuelve uno de los tres dolores de la clinica).</a:t>
+            </a:r>
+          </a:p>
+        </p:txBody>
+      </p:sp>
+      <p:sp>
+        <p:nvSpPr>
+          <p:cNvPr id="13" name="Rounded Rectangle 12"/>
           <p:cNvSpPr/>
           <p:nvPr/>
         </p:nvSpPr>
         <p:spPr>
           <a:xfrm>
-            <a:off x="457200" y="1938528"/>
-            <a:ext cx="11277295" cy="566928"/>
+            <a:off x="457200" y="3319272"/>
+            <a:ext cx="11277295" cy="950976"/>
           </a:xfrm>
           <a:prstGeom prst="roundRect">
             <a:avLst>
@@ -6637,25 +6410,25 @@
       </p:sp>
       <p:sp>
         <p:nvSpPr>
-          <p:cNvPr id="10" name="Rectangle 9"/>
+          <p:cNvPr id="14" name="Rounded Rectangle 13"/>
           <p:cNvSpPr/>
           <p:nvPr/>
         </p:nvSpPr>
         <p:spPr>
           <a:xfrm>
-            <a:off x="640080" y="2084832"/>
-            <a:ext cx="274320" cy="274320"/>
-          </a:xfrm>
-          <a:prstGeom prst="rect">
-            <a:avLst/>
+            <a:off x="594360" y="3575304"/>
+            <a:ext cx="438912" cy="438912"/>
+          </a:xfrm>
+          <a:prstGeom prst="roundRect">
+            <a:avLst>
+              <a:gd name="adj" fmla="val 12000"/>
+            </a:avLst>
           </a:prstGeom>
           <a:solidFill>
-            <a:srgbClr val="FFFFFF"/>
+            <a:srgbClr val="095292"/>
           </a:solidFill>
           <a:ln>
-            <a:solidFill>
-              <a:srgbClr val="333333"/>
-            </a:solidFill>
+            <a:noFill/>
           </a:ln>
         </p:spPr>
         <p:style>
@@ -6682,20 +6455,87 @@
       </p:sp>
       <p:sp>
         <p:nvSpPr>
-          <p:cNvPr id="11" name="Rectangle 10"/>
+          <p:cNvPr id="15" name="TextBox 14"/>
+          <p:cNvSpPr txBox="1"/>
+          <p:nvPr/>
+        </p:nvSpPr>
+        <p:spPr>
+          <a:xfrm>
+            <a:off x="594360" y="3575304"/>
+            <a:ext cx="438912" cy="438912"/>
+          </a:xfrm>
+          <a:prstGeom prst="rect">
+            <a:avLst/>
+          </a:prstGeom>
+          <a:noFill/>
+        </p:spPr>
+        <p:txBody>
+          <a:bodyPr wrap="square" anchor="ctr"/>
+          <a:lstStyle/>
+          <a:p>
+            <a:pPr algn="ctr"/>
+            <a:r>
+              <a:rPr sz="1600" b="1" i="0">
+                <a:solidFill>
+                  <a:srgbClr val="FFFFFF"/>
+                </a:solidFill>
+                <a:latin typeface="Calibri"/>
+              </a:rPr>
+              <a:t>3</a:t>
+            </a:r>
+          </a:p>
+        </p:txBody>
+      </p:sp>
+      <p:sp>
+        <p:nvSpPr>
+          <p:cNvPr id="16" name="TextBox 15"/>
+          <p:cNvSpPr txBox="1"/>
+          <p:nvPr/>
+        </p:nvSpPr>
+        <p:spPr>
+          <a:xfrm>
+            <a:off x="1188720" y="3410712"/>
+            <a:ext cx="10271455" cy="786384"/>
+          </a:xfrm>
+          <a:prstGeom prst="rect">
+            <a:avLst/>
+          </a:prstGeom>
+          <a:noFill/>
+        </p:spPr>
+        <p:txBody>
+          <a:bodyPr wrap="square" anchor="ctr"/>
+          <a:lstStyle/>
+          <a:p>
+            <a:r>
+              <a:rPr sz="1500" b="1" i="0">
+                <a:solidFill>
+                  <a:srgbClr val="095292"/>
+                </a:solidFill>
+                <a:latin typeface="Calibri"/>
+              </a:rPr>
+              <a:t>Escriba tres historias completas con criterios de aceptacion en formato Dado/Cuando/Entonces, y asegurese de que cada historia tenga al menos un escenario alternativo o de error, no solo el camino feliz.</a:t>
+            </a:r>
+          </a:p>
+        </p:txBody>
+      </p:sp>
+      <p:sp>
+        <p:nvSpPr>
+          <p:cNvPr id="17" name="Rounded Rectangle 16"/>
           <p:cNvSpPr/>
           <p:nvPr/>
         </p:nvSpPr>
         <p:spPr>
           <a:xfrm>
-            <a:off x="640080" y="2084832"/>
-            <a:ext cx="73152" cy="274320"/>
-          </a:xfrm>
-          <a:prstGeom prst="rect">
-            <a:avLst/>
+            <a:off x="457200" y="4361688"/>
+            <a:ext cx="11277295" cy="950976"/>
+          </a:xfrm>
+          <a:prstGeom prst="roundRect">
+            <a:avLst>
+              <a:gd name="adj" fmla="val 12000"/>
+            </a:avLst>
           </a:prstGeom>
           <a:solidFill>
-            <a:srgbClr val="269CCB"/>
+            <a:srgbClr val="E8F4FA"/>
           </a:solidFill>
           <a:ln>
             <a:noFill/>
@@ -6725,14 +6565,59 @@
       </p:sp>
       <p:sp>
         <p:nvSpPr>
-          <p:cNvPr id="12" name="TextBox 11"/>
+          <p:cNvPr id="18" name="Rounded Rectangle 17"/>
+          <p:cNvSpPr/>
+          <p:nvPr/>
+        </p:nvSpPr>
+        <p:spPr>
+          <a:xfrm>
+            <a:off x="594360" y="4617720"/>
+            <a:ext cx="438912" cy="438912"/>
+          </a:xfrm>
+          <a:prstGeom prst="roundRect">
+            <a:avLst>
+              <a:gd name="adj" fmla="val 12000"/>
+            </a:avLst>
+          </a:prstGeom>
+          <a:solidFill>
+            <a:srgbClr val="095292"/>
+          </a:solidFill>
+          <a:ln>
+            <a:noFill/>
+          </a:ln>
+        </p:spPr>
+        <p:style>
+          <a:lnRef idx="1">
+            <a:schemeClr val="accent1"/>
+          </a:lnRef>
+          <a:fillRef idx="3">
+            <a:schemeClr val="accent1"/>
+          </a:fillRef>
+          <a:effectRef idx="2">
+            <a:schemeClr val="accent1"/>
+          </a:effectRef>
+          <a:fontRef idx="minor">
+            <a:schemeClr val="lt1"/>
+          </a:fontRef>
+        </p:style>
+        <p:txBody>
+          <a:bodyPr rtlCol="0" anchor="ctr"/>
+          <a:lstStyle/>
+          <a:p>
+            <a:pPr algn="ctr"/>
+          </a:p>
+        </p:txBody>
+      </p:sp>
+      <p:sp>
+        <p:nvSpPr>
+          <p:cNvPr id="19" name="TextBox 18"/>
           <p:cNvSpPr txBox="1"/>
           <p:nvPr/>
         </p:nvSpPr>
         <p:spPr>
           <a:xfrm>
-            <a:off x="1097280" y="2029968"/>
-            <a:ext cx="10362895" cy="402336"/>
+            <a:off x="594360" y="4617720"/>
+            <a:ext cx="438912" cy="438912"/>
           </a:xfrm>
           <a:prstGeom prst="rect">
             <a:avLst/>
@@ -6743,28 +6628,61 @@
           <a:bodyPr wrap="square" anchor="ctr"/>
           <a:lstStyle/>
           <a:p>
-            <a:r>
-              <a:rPr sz="1500" b="0" i="0">
-                <a:solidFill>
-                  <a:srgbClr val="333333"/>
-                </a:solidFill>
-                <a:latin typeface="Calibri"/>
-              </a:rPr>
-              <a:t>Sus criterios de aceptacion describen solo el camino feliz? Que pasa si la mascota no existe, si el nombre esta repetido o si la conexion se cae?</a:t>
-            </a:r>
-          </a:p>
-        </p:txBody>
-      </p:sp>
-      <p:sp>
-        <p:nvSpPr>
-          <p:cNvPr id="13" name="Rounded Rectangle 12"/>
+            <a:pPr algn="ctr"/>
+            <a:r>
+              <a:rPr sz="1600" b="1" i="0">
+                <a:solidFill>
+                  <a:srgbClr val="FFFFFF"/>
+                </a:solidFill>
+                <a:latin typeface="Calibri"/>
+              </a:rPr>
+              <a:t>4</a:t>
+            </a:r>
+          </a:p>
+        </p:txBody>
+      </p:sp>
+      <p:sp>
+        <p:nvSpPr>
+          <p:cNvPr id="20" name="TextBox 19"/>
+          <p:cNvSpPr txBox="1"/>
+          <p:nvPr/>
+        </p:nvSpPr>
+        <p:spPr>
+          <a:xfrm>
+            <a:off x="1188720" y="4453128"/>
+            <a:ext cx="10271455" cy="786384"/>
+          </a:xfrm>
+          <a:prstGeom prst="rect">
+            <a:avLst/>
+          </a:prstGeom>
+          <a:noFill/>
+        </p:spPr>
+        <p:txBody>
+          <a:bodyPr wrap="square" anchor="ctr"/>
+          <a:lstStyle/>
+          <a:p>
+            <a:r>
+              <a:rPr sz="1500" b="1" i="0">
+                <a:solidFill>
+                  <a:srgbClr val="095292"/>
+                </a:solidFill>
+                <a:latin typeface="Calibri"/>
+              </a:rPr>
+              <a:t>Redacte la Definicion de Terminado para artefactos de diseño (por ejemplo: tiene diagrama en draw.io, tiene mockup, esta revisado por un compañero y tiene el visto bueno del cliente) y escribala en la cabecera del tablero.</a:t>
+            </a:r>
+          </a:p>
+        </p:txBody>
+      </p:sp>
+      <p:sp>
+        <p:nvSpPr>
+          <p:cNvPr id="21" name="Rounded Rectangle 20"/>
           <p:cNvSpPr/>
           <p:nvPr/>
         </p:nvSpPr>
         <p:spPr>
           <a:xfrm>
-            <a:off x="457200" y="2615184"/>
-            <a:ext cx="11277295" cy="566928"/>
+            <a:off x="457200" y="5404104"/>
+            <a:ext cx="11277295" cy="950976"/>
           </a:xfrm>
           <a:prstGeom prst="roundRect">
             <a:avLst>
@@ -6802,25 +6720,25 @@
       </p:sp>
       <p:sp>
         <p:nvSpPr>
-          <p:cNvPr id="14" name="Rectangle 13"/>
+          <p:cNvPr id="22" name="Rounded Rectangle 21"/>
           <p:cNvSpPr/>
           <p:nvPr/>
         </p:nvSpPr>
         <p:spPr>
           <a:xfrm>
-            <a:off x="640080" y="2761488"/>
-            <a:ext cx="274320" cy="274320"/>
-          </a:xfrm>
-          <a:prstGeom prst="rect">
-            <a:avLst/>
+            <a:off x="594360" y="5660136"/>
+            <a:ext cx="438912" cy="438912"/>
+          </a:xfrm>
+          <a:prstGeom prst="roundRect">
+            <a:avLst>
+              <a:gd name="adj" fmla="val 12000"/>
+            </a:avLst>
           </a:prstGeom>
           <a:solidFill>
-            <a:srgbClr val="FFFFFF"/>
+            <a:srgbClr val="095292"/>
           </a:solidFill>
           <a:ln>
-            <a:solidFill>
-              <a:srgbClr val="333333"/>
-            </a:solidFill>
+            <a:noFill/>
           </a:ln>
         </p:spPr>
         <p:style>
@@ -6847,57 +6765,47 @@
       </p:sp>
       <p:sp>
         <p:nvSpPr>
-          <p:cNvPr id="15" name="Rectangle 14"/>
-          <p:cNvSpPr/>
-          <p:nvPr/>
-        </p:nvSpPr>
-        <p:spPr>
-          <a:xfrm>
-            <a:off x="640080" y="2761488"/>
-            <a:ext cx="73152" cy="274320"/>
-          </a:xfrm>
-          <a:prstGeom prst="rect">
-            <a:avLst/>
-          </a:prstGeom>
-          <a:solidFill>
-            <a:srgbClr val="269CCB"/>
-          </a:solidFill>
-          <a:ln>
-            <a:noFill/>
-          </a:ln>
-        </p:spPr>
-        <p:style>
-          <a:lnRef idx="1">
-            <a:schemeClr val="accent1"/>
-          </a:lnRef>
-          <a:fillRef idx="3">
-            <a:schemeClr val="accent1"/>
-          </a:fillRef>
-          <a:effectRef idx="2">
-            <a:schemeClr val="accent1"/>
-          </a:effectRef>
-          <a:fontRef idx="minor">
-            <a:schemeClr val="lt1"/>
-          </a:fontRef>
-        </p:style>
-        <p:txBody>
-          <a:bodyPr rtlCol="0" anchor="ctr"/>
+          <p:cNvPr id="23" name="TextBox 22"/>
+          <p:cNvSpPr txBox="1"/>
+          <p:nvPr/>
+        </p:nvSpPr>
+        <p:spPr>
+          <a:xfrm>
+            <a:off x="594360" y="5660136"/>
+            <a:ext cx="438912" cy="438912"/>
+          </a:xfrm>
+          <a:prstGeom prst="rect">
+            <a:avLst/>
+          </a:prstGeom>
+          <a:noFill/>
+        </p:spPr>
+        <p:txBody>
+          <a:bodyPr wrap="square" anchor="ctr"/>
           <a:lstStyle/>
           <a:p>
             <a:pPr algn="ctr"/>
-          </a:p>
-        </p:txBody>
-      </p:sp>
-      <p:sp>
-        <p:nvSpPr>
-          <p:cNvPr id="16" name="TextBox 15"/>
+            <a:r>
+              <a:rPr sz="1600" b="1" i="0">
+                <a:solidFill>
+                  <a:srgbClr val="FFFFFF"/>
+                </a:solidFill>
+                <a:latin typeface="Calibri"/>
+              </a:rPr>
+              <a:t>5</a:t>
+            </a:r>
+          </a:p>
+        </p:txBody>
+      </p:sp>
+      <p:sp>
+        <p:nvSpPr>
+          <p:cNvPr id="24" name="TextBox 23"/>
           <p:cNvSpPr txBox="1"/>
           <p:nvPr/>
         </p:nvSpPr>
         <p:spPr>
           <a:xfrm>
-            <a:off x="1097280" y="2706624"/>
-            <a:ext cx="10362895" cy="402336"/>
+            <a:off x="1188720" y="5495544"/>
+            <a:ext cx="10271455" cy="786384"/>
           </a:xfrm>
           <a:prstGeom prst="rect">
             <a:avLst/>
@@ -6909,20 +6817,20 @@
           <a:lstStyle/>
           <a:p>
             <a:r>
-              <a:rPr sz="1500" b="0" i="0">
-                <a:solidFill>
-                  <a:srgbClr val="333333"/>
-                </a:solidFill>
-                <a:latin typeface="Calibri"/>
-              </a:rPr>
-              <a:t>Su Definicion de Terminado se puede verificar mirando el tablero, o incluye frases como 'que quede bien hecho' que nadie puede comprobar?</a:t>
-            </a:r>
-          </a:p>
-        </p:txBody>
-      </p:sp>
-      <p:sp>
-        <p:nvSpPr>
-          <p:cNvPr id="17" name="TextBox 16"/>
+              <a:rPr sz="1400" b="1" i="0">
+                <a:solidFill>
+                  <a:srgbClr val="095292"/>
+                </a:solidFill>
+                <a:latin typeface="Calibri"/>
+              </a:rPr>
+              <a:t>En draw.io o Excalidraw arme el tablero con las columnas Por hacer / Modelando / En revision del cliente / Aprobado, ponga el limite de trabajo en curso en dos para las columnas del medio, distribuya las tarjetas en tres sprints con su objetivo y entregable de diseño, exporte a PDF y suba a la plataforma del curso.</a:t>
+            </a:r>
+          </a:p>
+        </p:txBody>
+      </p:sp>
+      <p:sp>
+        <p:nvSpPr>
+          <p:cNvPr id="25" name="TextBox 24"/>
           <p:cNvSpPr txBox="1"/>
           <p:nvPr/>
         </p:nvSpPr>
@@ -7096,21 +7004,154 @@
                 </a:solidFill>
                 <a:latin typeface="Calibri"/>
               </a:rPr>
-              <a:t>Criterios de exito / entregable</a:t>
-            </a:r>
-          </a:p>
-        </p:txBody>
-      </p:sp>
-      <p:sp>
-        <p:nvSpPr>
-          <p:cNvPr id="5" name="TextBox 4"/>
+              <a:t>Antes de entregar — autochequeo</a:t>
+            </a:r>
+          </a:p>
+        </p:txBody>
+      </p:sp>
+      <p:sp>
+        <p:nvSpPr>
+          <p:cNvPr id="5" name="Rounded Rectangle 4"/>
+          <p:cNvSpPr/>
+          <p:nvPr/>
+        </p:nvSpPr>
+        <p:spPr>
+          <a:xfrm>
+            <a:off x="457200" y="1261872"/>
+            <a:ext cx="11277295" cy="566928"/>
+          </a:xfrm>
+          <a:prstGeom prst="roundRect">
+            <a:avLst>
+              <a:gd name="adj" fmla="val 12000"/>
+            </a:avLst>
+          </a:prstGeom>
+          <a:solidFill>
+            <a:srgbClr val="F2F2F2"/>
+          </a:solidFill>
+          <a:ln>
+            <a:noFill/>
+          </a:ln>
+        </p:spPr>
+        <p:style>
+          <a:lnRef idx="1">
+            <a:schemeClr val="accent1"/>
+          </a:lnRef>
+          <a:fillRef idx="3">
+            <a:schemeClr val="accent1"/>
+          </a:fillRef>
+          <a:effectRef idx="2">
+            <a:schemeClr val="accent1"/>
+          </a:effectRef>
+          <a:fontRef idx="minor">
+            <a:schemeClr val="lt1"/>
+          </a:fontRef>
+        </p:style>
+        <p:txBody>
+          <a:bodyPr rtlCol="0" anchor="ctr"/>
+          <a:lstStyle/>
+          <a:p>
+            <a:pPr algn="ctr"/>
+          </a:p>
+        </p:txBody>
+      </p:sp>
+      <p:sp>
+        <p:nvSpPr>
+          <p:cNvPr id="6" name="Rectangle 5"/>
+          <p:cNvSpPr/>
+          <p:nvPr/>
+        </p:nvSpPr>
+        <p:spPr>
+          <a:xfrm>
+            <a:off x="640080" y="1408175"/>
+            <a:ext cx="274320" cy="274320"/>
+          </a:xfrm>
+          <a:prstGeom prst="rect">
+            <a:avLst/>
+          </a:prstGeom>
+          <a:solidFill>
+            <a:srgbClr val="FFFFFF"/>
+          </a:solidFill>
+          <a:ln>
+            <a:solidFill>
+              <a:srgbClr val="333333"/>
+            </a:solidFill>
+          </a:ln>
+        </p:spPr>
+        <p:style>
+          <a:lnRef idx="1">
+            <a:schemeClr val="accent1"/>
+          </a:lnRef>
+          <a:fillRef idx="3">
+            <a:schemeClr val="accent1"/>
+          </a:fillRef>
+          <a:effectRef idx="2">
+            <a:schemeClr val="accent1"/>
+          </a:effectRef>
+          <a:fontRef idx="minor">
+            <a:schemeClr val="lt1"/>
+          </a:fontRef>
+        </p:style>
+        <p:txBody>
+          <a:bodyPr rtlCol="0" anchor="ctr"/>
+          <a:lstStyle/>
+          <a:p>
+            <a:pPr algn="ctr"/>
+          </a:p>
+        </p:txBody>
+      </p:sp>
+      <p:sp>
+        <p:nvSpPr>
+          <p:cNvPr id="7" name="Rectangle 6"/>
+          <p:cNvSpPr/>
+          <p:nvPr/>
+        </p:nvSpPr>
+        <p:spPr>
+          <a:xfrm>
+            <a:off x="640080" y="1408175"/>
+            <a:ext cx="73152" cy="274320"/>
+          </a:xfrm>
+          <a:prstGeom prst="rect">
+            <a:avLst/>
+          </a:prstGeom>
+          <a:solidFill>
+            <a:srgbClr val="269CCB"/>
+          </a:solidFill>
+          <a:ln>
+            <a:noFill/>
+          </a:ln>
+        </p:spPr>
+        <p:style>
+          <a:lnRef idx="1">
+            <a:schemeClr val="accent1"/>
+          </a:lnRef>
+          <a:fillRef idx="3">
+            <a:schemeClr val="accent1"/>
+          </a:fillRef>
+          <a:effectRef idx="2">
+            <a:schemeClr val="accent1"/>
+          </a:effectRef>
+          <a:fontRef idx="minor">
+            <a:schemeClr val="lt1"/>
+          </a:fontRef>
+        </p:style>
+        <p:txBody>
+          <a:bodyPr rtlCol="0" anchor="ctr"/>
+          <a:lstStyle/>
+          <a:p>
+            <a:pPr algn="ctr"/>
+          </a:p>
+        </p:txBody>
+      </p:sp>
+      <p:sp>
+        <p:nvSpPr>
+          <p:cNvPr id="8" name="TextBox 7"/>
           <p:cNvSpPr txBox="1"/>
           <p:nvPr/>
         </p:nvSpPr>
         <p:spPr>
           <a:xfrm>
-            <a:off x="457200" y="1170432"/>
-            <a:ext cx="11277295" cy="5230368"/>
+            <a:off x="1097280" y="1353312"/>
+            <a:ext cx="10362895" cy="402336"/>
           </a:xfrm>
           <a:prstGeom prst="rect">
             <a:avLst/>
@@ -7118,219 +7159,354 @@
           <a:noFill/>
         </p:spPr>
         <p:txBody>
-          <a:bodyPr wrap="square">
-            <a:spAutoFit/>
-          </a:bodyPr>
-          <a:lstStyle/>
-          <a:p>
-            <a:pPr>
-              <a:spcAft>
-                <a:spcPts val="800"/>
-              </a:spcAft>
-            </a:pPr>
-            <a:r>
-              <a:rPr sz="2000" b="0" i="0">
+          <a:bodyPr wrap="square" anchor="ctr"/>
+          <a:lstStyle/>
+          <a:p>
+            <a:r>
+              <a:rPr sz="1500" b="0" i="0">
                 <a:solidFill>
                   <a:srgbClr val="333333"/>
                 </a:solidFill>
                 <a:latin typeface="Calibri"/>
               </a:rPr>
-              <a:t>–   </a:t>
-            </a:r>
-            <a:r>
-              <a:rPr sz="2000" b="1" i="0">
+              <a:t>Si su sprint 1 se llama 'analisis' y el sprint 2 'diseño', que le va a mostrar a la veterinaria al terminar el sprint 1 que ella pueda entender y criticar?</a:t>
+            </a:r>
+          </a:p>
+        </p:txBody>
+      </p:sp>
+      <p:sp>
+        <p:nvSpPr>
+          <p:cNvPr id="9" name="Rounded Rectangle 8"/>
+          <p:cNvSpPr/>
+          <p:nvPr/>
+        </p:nvSpPr>
+        <p:spPr>
+          <a:xfrm>
+            <a:off x="457200" y="1938528"/>
+            <a:ext cx="11277295" cy="566928"/>
+          </a:xfrm>
+          <a:prstGeom prst="roundRect">
+            <a:avLst>
+              <a:gd name="adj" fmla="val 12000"/>
+            </a:avLst>
+          </a:prstGeom>
+          <a:solidFill>
+            <a:srgbClr val="F2F2F2"/>
+          </a:solidFill>
+          <a:ln>
+            <a:noFill/>
+          </a:ln>
+        </p:spPr>
+        <p:style>
+          <a:lnRef idx="1">
+            <a:schemeClr val="accent1"/>
+          </a:lnRef>
+          <a:fillRef idx="3">
+            <a:schemeClr val="accent1"/>
+          </a:fillRef>
+          <a:effectRef idx="2">
+            <a:schemeClr val="accent1"/>
+          </a:effectRef>
+          <a:fontRef idx="minor">
+            <a:schemeClr val="lt1"/>
+          </a:fontRef>
+        </p:style>
+        <p:txBody>
+          <a:bodyPr rtlCol="0" anchor="ctr"/>
+          <a:lstStyle/>
+          <a:p>
+            <a:pPr algn="ctr"/>
+          </a:p>
+        </p:txBody>
+      </p:sp>
+      <p:sp>
+        <p:nvSpPr>
+          <p:cNvPr id="10" name="Rectangle 9"/>
+          <p:cNvSpPr/>
+          <p:nvPr/>
+        </p:nvSpPr>
+        <p:spPr>
+          <a:xfrm>
+            <a:off x="640080" y="2084832"/>
+            <a:ext cx="274320" cy="274320"/>
+          </a:xfrm>
+          <a:prstGeom prst="rect">
+            <a:avLst/>
+          </a:prstGeom>
+          <a:solidFill>
+            <a:srgbClr val="FFFFFF"/>
+          </a:solidFill>
+          <a:ln>
+            <a:solidFill>
+              <a:srgbClr val="333333"/>
+            </a:solidFill>
+          </a:ln>
+        </p:spPr>
+        <p:style>
+          <a:lnRef idx="1">
+            <a:schemeClr val="accent1"/>
+          </a:lnRef>
+          <a:fillRef idx="3">
+            <a:schemeClr val="accent1"/>
+          </a:fillRef>
+          <a:effectRef idx="2">
+            <a:schemeClr val="accent1"/>
+          </a:effectRef>
+          <a:fontRef idx="minor">
+            <a:schemeClr val="lt1"/>
+          </a:fontRef>
+        </p:style>
+        <p:txBody>
+          <a:bodyPr rtlCol="0" anchor="ctr"/>
+          <a:lstStyle/>
+          <a:p>
+            <a:pPr algn="ctr"/>
+          </a:p>
+        </p:txBody>
+      </p:sp>
+      <p:sp>
+        <p:nvSpPr>
+          <p:cNvPr id="11" name="Rectangle 10"/>
+          <p:cNvSpPr/>
+          <p:nvPr/>
+        </p:nvSpPr>
+        <p:spPr>
+          <a:xfrm>
+            <a:off x="640080" y="2084832"/>
+            <a:ext cx="73152" cy="274320"/>
+          </a:xfrm>
+          <a:prstGeom prst="rect">
+            <a:avLst/>
+          </a:prstGeom>
+          <a:solidFill>
+            <a:srgbClr val="269CCB"/>
+          </a:solidFill>
+          <a:ln>
+            <a:noFill/>
+          </a:ln>
+        </p:spPr>
+        <p:style>
+          <a:lnRef idx="1">
+            <a:schemeClr val="accent1"/>
+          </a:lnRef>
+          <a:fillRef idx="3">
+            <a:schemeClr val="accent1"/>
+          </a:fillRef>
+          <a:effectRef idx="2">
+            <a:schemeClr val="accent1"/>
+          </a:effectRef>
+          <a:fontRef idx="minor">
+            <a:schemeClr val="lt1"/>
+          </a:fontRef>
+        </p:style>
+        <p:txBody>
+          <a:bodyPr rtlCol="0" anchor="ctr"/>
+          <a:lstStyle/>
+          <a:p>
+            <a:pPr algn="ctr"/>
+          </a:p>
+        </p:txBody>
+      </p:sp>
+      <p:sp>
+        <p:nvSpPr>
+          <p:cNvPr id="12" name="TextBox 11"/>
+          <p:cNvSpPr txBox="1"/>
+          <p:nvPr/>
+        </p:nvSpPr>
+        <p:spPr>
+          <a:xfrm>
+            <a:off x="1097280" y="2029968"/>
+            <a:ext cx="10362895" cy="402336"/>
+          </a:xfrm>
+          <a:prstGeom prst="rect">
+            <a:avLst/>
+          </a:prstGeom>
+          <a:noFill/>
+        </p:spPr>
+        <p:txBody>
+          <a:bodyPr wrap="square" anchor="ctr"/>
+          <a:lstStyle/>
+          <a:p>
+            <a:r>
+              <a:rPr sz="1500" b="0" i="0">
                 <a:solidFill>
                   <a:srgbClr val="333333"/>
                 </a:solidFill>
                 <a:latin typeface="Calibri"/>
               </a:rPr>
-              <a:t>Entregable:</a:t>
-            </a:r>
-            <a:r>
-              <a:rPr sz="2000" b="0" i="0">
+              <a:t>Sus criterios de aceptacion describen solo el camino feliz? Que pasa si la mascota no existe, si el nombre esta repetido o si la conexion se cae?</a:t>
+            </a:r>
+          </a:p>
+        </p:txBody>
+      </p:sp>
+      <p:sp>
+        <p:nvSpPr>
+          <p:cNvPr id="13" name="Rounded Rectangle 12"/>
+          <p:cNvSpPr/>
+          <p:nvPr/>
+        </p:nvSpPr>
+        <p:spPr>
+          <a:xfrm>
+            <a:off x="457200" y="2615184"/>
+            <a:ext cx="11277295" cy="566928"/>
+          </a:xfrm>
+          <a:prstGeom prst="roundRect">
+            <a:avLst>
+              <a:gd name="adj" fmla="val 12000"/>
+            </a:avLst>
+          </a:prstGeom>
+          <a:solidFill>
+            <a:srgbClr val="F2F2F2"/>
+          </a:solidFill>
+          <a:ln>
+            <a:noFill/>
+          </a:ln>
+        </p:spPr>
+        <p:style>
+          <a:lnRef idx="1">
+            <a:schemeClr val="accent1"/>
+          </a:lnRef>
+          <a:fillRef idx="3">
+            <a:schemeClr val="accent1"/>
+          </a:fillRef>
+          <a:effectRef idx="2">
+            <a:schemeClr val="accent1"/>
+          </a:effectRef>
+          <a:fontRef idx="minor">
+            <a:schemeClr val="lt1"/>
+          </a:fontRef>
+        </p:style>
+        <p:txBody>
+          <a:bodyPr rtlCol="0" anchor="ctr"/>
+          <a:lstStyle/>
+          <a:p>
+            <a:pPr algn="ctr"/>
+          </a:p>
+        </p:txBody>
+      </p:sp>
+      <p:sp>
+        <p:nvSpPr>
+          <p:cNvPr id="14" name="Rectangle 13"/>
+          <p:cNvSpPr/>
+          <p:nvPr/>
+        </p:nvSpPr>
+        <p:spPr>
+          <a:xfrm>
+            <a:off x="640080" y="2761488"/>
+            <a:ext cx="274320" cy="274320"/>
+          </a:xfrm>
+          <a:prstGeom prst="rect">
+            <a:avLst/>
+          </a:prstGeom>
+          <a:solidFill>
+            <a:srgbClr val="FFFFFF"/>
+          </a:solidFill>
+          <a:ln>
+            <a:solidFill>
+              <a:srgbClr val="333333"/>
+            </a:solidFill>
+          </a:ln>
+        </p:spPr>
+        <p:style>
+          <a:lnRef idx="1">
+            <a:schemeClr val="accent1"/>
+          </a:lnRef>
+          <a:fillRef idx="3">
+            <a:schemeClr val="accent1"/>
+          </a:fillRef>
+          <a:effectRef idx="2">
+            <a:schemeClr val="accent1"/>
+          </a:effectRef>
+          <a:fontRef idx="minor">
+            <a:schemeClr val="lt1"/>
+          </a:fontRef>
+        </p:style>
+        <p:txBody>
+          <a:bodyPr rtlCol="0" anchor="ctr"/>
+          <a:lstStyle/>
+          <a:p>
+            <a:pPr algn="ctr"/>
+          </a:p>
+        </p:txBody>
+      </p:sp>
+      <p:sp>
+        <p:nvSpPr>
+          <p:cNvPr id="15" name="Rectangle 14"/>
+          <p:cNvSpPr/>
+          <p:nvPr/>
+        </p:nvSpPr>
+        <p:spPr>
+          <a:xfrm>
+            <a:off x="640080" y="2761488"/>
+            <a:ext cx="73152" cy="274320"/>
+          </a:xfrm>
+          <a:prstGeom prst="rect">
+            <a:avLst/>
+          </a:prstGeom>
+          <a:solidFill>
+            <a:srgbClr val="269CCB"/>
+          </a:solidFill>
+          <a:ln>
+            <a:noFill/>
+          </a:ln>
+        </p:spPr>
+        <p:style>
+          <a:lnRef idx="1">
+            <a:schemeClr val="accent1"/>
+          </a:lnRef>
+          <a:fillRef idx="3">
+            <a:schemeClr val="accent1"/>
+          </a:fillRef>
+          <a:effectRef idx="2">
+            <a:schemeClr val="accent1"/>
+          </a:effectRef>
+          <a:fontRef idx="minor">
+            <a:schemeClr val="lt1"/>
+          </a:fontRef>
+        </p:style>
+        <p:txBody>
+          <a:bodyPr rtlCol="0" anchor="ctr"/>
+          <a:lstStyle/>
+          <a:p>
+            <a:pPr algn="ctr"/>
+          </a:p>
+        </p:txBody>
+      </p:sp>
+      <p:sp>
+        <p:nvSpPr>
+          <p:cNvPr id="16" name="TextBox 15"/>
+          <p:cNvSpPr txBox="1"/>
+          <p:nvPr/>
+        </p:nvSpPr>
+        <p:spPr>
+          <a:xfrm>
+            <a:off x="1097280" y="2706624"/>
+            <a:ext cx="10362895" cy="402336"/>
+          </a:xfrm>
+          <a:prstGeom prst="rect">
+            <a:avLst/>
+          </a:prstGeom>
+          <a:noFill/>
+        </p:spPr>
+        <p:txBody>
+          <a:bodyPr wrap="square" anchor="ctr"/>
+          <a:lstStyle/>
+          <a:p>
+            <a:r>
+              <a:rPr sz="1500" b="0" i="0">
                 <a:solidFill>
                   <a:srgbClr val="333333"/>
                 </a:solidFill>
                 <a:latin typeface="Calibri"/>
               </a:rPr>
-              <a:t> Un tablero en draw.io o Excalidraw con el Product Backlog priorizado de VetCare y las columnas de flujo con limite de trabajo en curso, mas un documento con el plan de tres sprints (objetivo y entregable de diseño de cada uno), la Definicion de Terminado y tres historias de usuario con criterios en formato Dado/Cuando/Entonces.</a:t>
-            </a:r>
-          </a:p>
-          <a:p>
-            <a:pPr>
-              <a:spcAft>
-                <a:spcPts val="800"/>
-              </a:spcAft>
-            </a:pPr>
-            <a:r>
-              <a:rPr sz="2000" b="0" i="0">
-                <a:solidFill>
-                  <a:srgbClr val="333333"/>
-                </a:solidFill>
-                <a:latin typeface="Calibri"/>
-              </a:rPr>
-              <a:t>–   </a:t>
-            </a:r>
-            <a:r>
-              <a:rPr sz="2000" b="1" i="0">
-                <a:solidFill>
-                  <a:srgbClr val="333333"/>
-                </a:solidFill>
-                <a:latin typeface="Calibri"/>
-              </a:rPr>
-              <a:t>Exito:</a:t>
-            </a:r>
-            <a:r>
-              <a:rPr sz="2000" b="0" i="0">
-                <a:solidFill>
-                  <a:srgbClr val="333333"/>
-                </a:solidFill>
-                <a:latin typeface="Calibri"/>
-              </a:rPr>
-              <a:t> El backlog esta priorizado con un orden explicito y cada item tiene una justificacion de valor para la clinica, no un orden arbitrario.</a:t>
-            </a:r>
-          </a:p>
-          <a:p>
-            <a:pPr>
-              <a:spcAft>
-                <a:spcPts val="800"/>
-              </a:spcAft>
-            </a:pPr>
-            <a:r>
-              <a:rPr sz="2000" b="0" i="0">
-                <a:solidFill>
-                  <a:srgbClr val="333333"/>
-                </a:solidFill>
-                <a:latin typeface="Calibri"/>
-              </a:rPr>
-              <a:t>–   </a:t>
-            </a:r>
-            <a:r>
-              <a:rPr sz="2000" b="1" i="0">
-                <a:solidFill>
-                  <a:srgbClr val="333333"/>
-                </a:solidFill>
-                <a:latin typeface="Calibri"/>
-              </a:rPr>
-              <a:t>Exito:</a:t>
-            </a:r>
-            <a:r>
-              <a:rPr sz="2000" b="0" i="0">
-                <a:solidFill>
-                  <a:srgbClr val="333333"/>
-                </a:solidFill>
-                <a:latin typeface="Calibri"/>
-              </a:rPr>
-              <a:t> Las tres historias siguen la estructura Como / quiero / para y cada una tiene al menos dos escenarios en Dado/Cuando/Entonces, incluido uno alternativo o de error.</a:t>
-            </a:r>
-          </a:p>
-          <a:p>
-            <a:pPr>
-              <a:spcAft>
-                <a:spcPts val="800"/>
-              </a:spcAft>
-            </a:pPr>
-            <a:r>
-              <a:rPr sz="2000" b="0" i="0">
-                <a:solidFill>
-                  <a:srgbClr val="333333"/>
-                </a:solidFill>
-                <a:latin typeface="Calibri"/>
-              </a:rPr>
-              <a:t>–   </a:t>
-            </a:r>
-            <a:r>
-              <a:rPr sz="2000" b="1" i="0">
-                <a:solidFill>
-                  <a:srgbClr val="333333"/>
-                </a:solidFill>
-                <a:latin typeface="Calibri"/>
-              </a:rPr>
-              <a:t>Exito:</a:t>
-            </a:r>
-            <a:r>
-              <a:rPr sz="2000" b="0" i="0">
-                <a:solidFill>
-                  <a:srgbClr val="333333"/>
-                </a:solidFill>
-                <a:latin typeface="Calibri"/>
-              </a:rPr>
-              <a:t> Cada sprint del plan termina en un incremento que la clinica podria ver y opinar (mockup, prototipo, diagrama revisado), no en trabajo interno invisible.</a:t>
-            </a:r>
-          </a:p>
-          <a:p>
-            <a:pPr>
-              <a:spcAft>
-                <a:spcPts val="800"/>
-              </a:spcAft>
-            </a:pPr>
-            <a:r>
-              <a:rPr sz="2000" b="0" i="0">
-                <a:solidFill>
-                  <a:srgbClr val="333333"/>
-                </a:solidFill>
-                <a:latin typeface="Calibri"/>
-              </a:rPr>
-              <a:t>–   </a:t>
-            </a:r>
-            <a:r>
-              <a:rPr sz="2000" b="1" i="0">
-                <a:solidFill>
-                  <a:srgbClr val="333333"/>
-                </a:solidFill>
-                <a:latin typeface="Calibri"/>
-              </a:rPr>
-              <a:t>Exito:</a:t>
-            </a:r>
-            <a:r>
-              <a:rPr sz="2000" b="0" i="0">
-                <a:solidFill>
-                  <a:srgbClr val="333333"/>
-                </a:solidFill>
-                <a:latin typeface="Calibri"/>
-              </a:rPr>
-              <a:t> El tablero declara la Definicion de Terminado y el limite de trabajo en curso, y ninguna columna del medio tiene mas tarjetas que su limite.</a:t>
-            </a:r>
-          </a:p>
-          <a:p>
-            <a:pPr>
-              <a:spcAft>
-                <a:spcPts val="800"/>
-              </a:spcAft>
-            </a:pPr>
-            <a:r>
-              <a:rPr sz="2000" b="0" i="0">
-                <a:solidFill>
-                  <a:srgbClr val="333333"/>
-                </a:solidFill>
-                <a:latin typeface="Calibri"/>
-              </a:rPr>
-              <a:t>–   </a:t>
-            </a:r>
-            <a:r>
-              <a:rPr sz="2000" b="1" i="0">
-                <a:solidFill>
-                  <a:srgbClr val="333333"/>
-                </a:solidFill>
-                <a:latin typeface="Calibri"/>
-              </a:rPr>
-              <a:t>Entrega en la plataforma del curso</a:t>
-            </a:r>
-            <a:r>
-              <a:rPr sz="2000" b="0" i="0">
-                <a:solidFill>
-                  <a:srgbClr val="333333"/>
-                </a:solidFill>
-                <a:latin typeface="Calibri"/>
-              </a:rPr>
-              <a:t> — en la fecha que indique el docente.</a:t>
-            </a:r>
-          </a:p>
-        </p:txBody>
-      </p:sp>
-      <p:sp>
-        <p:nvSpPr>
-          <p:cNvPr id="6" name="TextBox 5"/>
+              <a:t>Su Definicion de Terminado se puede verificar mirando el tablero, o incluye frases como 'que quede bien hecho' que nadie puede comprobar?</a:t>
+            </a:r>
+          </a:p>
+        </p:txBody>
+      </p:sp>
+      <p:sp>
+        <p:nvSpPr>
+          <p:cNvPr id="17" name="TextBox 16"/>
           <p:cNvSpPr txBox="1"/>
           <p:nvPr/>
         </p:nvSpPr>
@@ -7504,109 +7680,21 @@
                 </a:solidFill>
                 <a:latin typeface="Calibri"/>
               </a:rPr>
-              <a:t>Para el PI esta semana</a:t>
-            </a:r>
-          </a:p>
-        </p:txBody>
-      </p:sp>
-      <p:sp>
-        <p:nvSpPr>
-          <p:cNvPr id="5" name="Rounded Rectangle 4"/>
-          <p:cNvSpPr/>
-          <p:nvPr/>
-        </p:nvSpPr>
-        <p:spPr>
-          <a:xfrm>
-            <a:off x="457200" y="1261872"/>
-            <a:ext cx="11277295" cy="1051560"/>
-          </a:xfrm>
-          <a:prstGeom prst="roundRect">
-            <a:avLst>
-              <a:gd name="adj" fmla="val 12000"/>
-            </a:avLst>
-          </a:prstGeom>
-          <a:solidFill>
-            <a:srgbClr val="E8F4FA"/>
-          </a:solidFill>
-          <a:ln>
-            <a:noFill/>
-          </a:ln>
-        </p:spPr>
-        <p:style>
-          <a:lnRef idx="1">
-            <a:schemeClr val="accent1"/>
-          </a:lnRef>
-          <a:fillRef idx="3">
-            <a:schemeClr val="accent1"/>
-          </a:fillRef>
-          <a:effectRef idx="2">
-            <a:schemeClr val="accent1"/>
-          </a:effectRef>
-          <a:fontRef idx="minor">
-            <a:schemeClr val="lt1"/>
-          </a:fontRef>
-        </p:style>
-        <p:txBody>
-          <a:bodyPr rtlCol="0" anchor="ctr"/>
-          <a:lstStyle/>
-          <a:p>
-            <a:pPr algn="ctr"/>
-          </a:p>
-        </p:txBody>
-      </p:sp>
-      <p:sp>
-        <p:nvSpPr>
-          <p:cNvPr id="6" name="Rectangle 5"/>
-          <p:cNvSpPr/>
-          <p:nvPr/>
-        </p:nvSpPr>
-        <p:spPr>
-          <a:xfrm>
-            <a:off x="457200" y="1261872"/>
-            <a:ext cx="128016" cy="1051560"/>
-          </a:xfrm>
-          <a:prstGeom prst="rect">
-            <a:avLst/>
-          </a:prstGeom>
-          <a:solidFill>
-            <a:srgbClr val="269CCB"/>
-          </a:solidFill>
-          <a:ln>
-            <a:noFill/>
-          </a:ln>
-        </p:spPr>
-        <p:style>
-          <a:lnRef idx="1">
-            <a:schemeClr val="accent1"/>
-          </a:lnRef>
-          <a:fillRef idx="3">
-            <a:schemeClr val="accent1"/>
-          </a:fillRef>
-          <a:effectRef idx="2">
-            <a:schemeClr val="accent1"/>
-          </a:effectRef>
-          <a:fontRef idx="minor">
-            <a:schemeClr val="lt1"/>
-          </a:fontRef>
-        </p:style>
-        <p:txBody>
-          <a:bodyPr rtlCol="0" anchor="ctr"/>
-          <a:lstStyle/>
-          <a:p>
-            <a:pPr algn="ctr"/>
-          </a:p>
-        </p:txBody>
-      </p:sp>
-      <p:sp>
-        <p:nvSpPr>
-          <p:cNvPr id="7" name="TextBox 6"/>
+              <a:t>Criterios de exito / entregable</a:t>
+            </a:r>
+          </a:p>
+        </p:txBody>
+      </p:sp>
+      <p:sp>
+        <p:nvSpPr>
+          <p:cNvPr id="5" name="TextBox 4"/>
           <p:cNvSpPr txBox="1"/>
           <p:nvPr/>
         </p:nvSpPr>
         <p:spPr>
           <a:xfrm>
-            <a:off x="777240" y="1399031"/>
-            <a:ext cx="10774375" cy="822959"/>
+            <a:off x="457200" y="1170432"/>
+            <a:ext cx="11277295" cy="5230368"/>
           </a:xfrm>
           <a:prstGeom prst="rect">
             <a:avLst/>
@@ -7619,313 +7707,214 @@
           </a:bodyPr>
           <a:lstStyle/>
           <a:p>
-            <a:r>
-              <a:rPr sz="1200" b="1" i="0">
-                <a:solidFill>
-                  <a:srgbClr val="269CCB"/>
-                </a:solidFill>
-                <a:latin typeface="Calibri"/>
-              </a:rPr>
-              <a:t>Info</a:t>
-            </a:r>
-          </a:p>
-          <a:p>
             <a:pPr>
-              <a:spcBef>
-                <a:spcPts val="400"/>
-              </a:spcBef>
+              <a:spcAft>
+                <a:spcPts val="800"/>
+              </a:spcAft>
             </a:pPr>
             <a:r>
-              <a:rPr sz="1400" b="0" i="0">
+              <a:rPr sz="2000" b="0" i="0">
                 <a:solidFill>
                   <a:srgbClr val="333333"/>
                 </a:solidFill>
                 <a:latin typeface="Calibri"/>
               </a:rPr>
-              <a:t>Hito: Queda listo el backlog priorizado de VetCare repartido en sprints del semestre, con las primeras historias de usuario escritas con criterios de aceptacion.</a:t>
-            </a:r>
-          </a:p>
-        </p:txBody>
-      </p:sp>
-      <p:sp>
-        <p:nvSpPr>
-          <p:cNvPr id="8" name="Rounded Rectangle 7"/>
-          <p:cNvSpPr/>
-          <p:nvPr/>
-        </p:nvSpPr>
-        <p:spPr>
-          <a:xfrm>
-            <a:off x="457200" y="2478024"/>
-            <a:ext cx="11277295" cy="1051560"/>
-          </a:xfrm>
-          <a:prstGeom prst="roundRect">
-            <a:avLst>
-              <a:gd name="adj" fmla="val 12000"/>
-            </a:avLst>
-          </a:prstGeom>
-          <a:solidFill>
-            <a:srgbClr val="FFF8E1"/>
-          </a:solidFill>
-          <a:ln>
-            <a:noFill/>
-          </a:ln>
-        </p:spPr>
-        <p:style>
-          <a:lnRef idx="1">
-            <a:schemeClr val="accent1"/>
-          </a:lnRef>
-          <a:fillRef idx="3">
-            <a:schemeClr val="accent1"/>
-          </a:fillRef>
-          <a:effectRef idx="2">
-            <a:schemeClr val="accent1"/>
-          </a:effectRef>
-          <a:fontRef idx="minor">
-            <a:schemeClr val="lt1"/>
-          </a:fontRef>
-        </p:style>
-        <p:txBody>
-          <a:bodyPr rtlCol="0" anchor="ctr"/>
-          <a:lstStyle/>
-          <a:p>
-            <a:pPr algn="ctr"/>
-          </a:p>
-        </p:txBody>
-      </p:sp>
-      <p:sp>
-        <p:nvSpPr>
-          <p:cNvPr id="9" name="Rectangle 8"/>
-          <p:cNvSpPr/>
-          <p:nvPr/>
-        </p:nvSpPr>
-        <p:spPr>
-          <a:xfrm>
-            <a:off x="457200" y="2478024"/>
-            <a:ext cx="128016" cy="1051560"/>
-          </a:xfrm>
-          <a:prstGeom prst="rect">
-            <a:avLst/>
-          </a:prstGeom>
-          <a:solidFill>
-            <a:srgbClr val="FFD000"/>
-          </a:solidFill>
-          <a:ln>
-            <a:noFill/>
-          </a:ln>
-        </p:spPr>
-        <p:style>
-          <a:lnRef idx="1">
-            <a:schemeClr val="accent1"/>
-          </a:lnRef>
-          <a:fillRef idx="3">
-            <a:schemeClr val="accent1"/>
-          </a:fillRef>
-          <a:effectRef idx="2">
-            <a:schemeClr val="accent1"/>
-          </a:effectRef>
-          <a:fontRef idx="minor">
-            <a:schemeClr val="lt1"/>
-          </a:fontRef>
-        </p:style>
-        <p:txBody>
-          <a:bodyPr rtlCol="0" anchor="ctr"/>
-          <a:lstStyle/>
-          <a:p>
-            <a:pPr algn="ctr"/>
-          </a:p>
-        </p:txBody>
-      </p:sp>
-      <p:sp>
-        <p:nvSpPr>
-          <p:cNvPr id="10" name="TextBox 9"/>
-          <p:cNvSpPr txBox="1"/>
-          <p:nvPr/>
-        </p:nvSpPr>
-        <p:spPr>
-          <a:xfrm>
-            <a:off x="777240" y="2615184"/>
-            <a:ext cx="10774375" cy="822959"/>
-          </a:xfrm>
-          <a:prstGeom prst="rect">
-            <a:avLst/>
-          </a:prstGeom>
-          <a:noFill/>
-        </p:spPr>
-        <p:txBody>
-          <a:bodyPr wrap="square">
-            <a:spAutoFit/>
-          </a:bodyPr>
-          <a:lstStyle/>
-          <a:p>
-            <a:r>
-              <a:rPr sz="1200" b="1" i="0">
-                <a:solidFill>
-                  <a:srgbClr val="FFD000"/>
-                </a:solidFill>
-                <a:latin typeface="Calibri"/>
-              </a:rPr>
-              <a:t>Aclaración</a:t>
+              <a:t>–   </a:t>
+            </a:r>
+            <a:r>
+              <a:rPr sz="2000" b="1" i="0">
+                <a:solidFill>
+                  <a:srgbClr val="333333"/>
+                </a:solidFill>
+                <a:latin typeface="Calibri"/>
+              </a:rPr>
+              <a:t>Entregable:</a:t>
+            </a:r>
+            <a:r>
+              <a:rPr sz="2000" b="0" i="0">
+                <a:solidFill>
+                  <a:srgbClr val="333333"/>
+                </a:solidFill>
+                <a:latin typeface="Calibri"/>
+              </a:rPr>
+              <a:t> Un tablero en draw.io o Excalidraw con el Product Backlog priorizado de VetCare y las columnas de flujo con limite de trabajo en curso, mas un documento con el plan de tres sprints (objetivo y entregable de diseño de cada uno), la Definicion de Terminado y tres historias de usuario con criterios en formato Dado/Cuando/Entonces.</a:t>
             </a:r>
           </a:p>
           <a:p>
             <a:pPr>
-              <a:spcBef>
-                <a:spcPts val="400"/>
-              </a:spcBef>
+              <a:spcAft>
+                <a:spcPts val="800"/>
+              </a:spcAft>
             </a:pPr>
             <a:r>
-              <a:rPr sz="1400" b="0" i="0">
+              <a:rPr sz="2000" b="0" i="0">
                 <a:solidFill>
                   <a:srgbClr val="333333"/>
                 </a:solidFill>
                 <a:latin typeface="Calibri"/>
               </a:rPr>
-              <a:t>Enunciado completo: Clases/Proyecto Integrador/ (VetCare).</a:t>
-            </a:r>
-          </a:p>
-        </p:txBody>
-      </p:sp>
-      <p:sp>
-        <p:nvSpPr>
-          <p:cNvPr id="11" name="Rounded Rectangle 10"/>
-          <p:cNvSpPr/>
-          <p:nvPr/>
-        </p:nvSpPr>
-        <p:spPr>
-          <a:xfrm>
-            <a:off x="457200" y="3694176"/>
-            <a:ext cx="11277295" cy="1051560"/>
-          </a:xfrm>
-          <a:prstGeom prst="roundRect">
-            <a:avLst>
-              <a:gd name="adj" fmla="val 12000"/>
-            </a:avLst>
-          </a:prstGeom>
-          <a:solidFill>
-            <a:srgbClr val="FBE4E4"/>
-          </a:solidFill>
-          <a:ln>
-            <a:noFill/>
-          </a:ln>
-        </p:spPr>
-        <p:style>
-          <a:lnRef idx="1">
-            <a:schemeClr val="accent1"/>
-          </a:lnRef>
-          <a:fillRef idx="3">
-            <a:schemeClr val="accent1"/>
-          </a:fillRef>
-          <a:effectRef idx="2">
-            <a:schemeClr val="accent1"/>
-          </a:effectRef>
-          <a:fontRef idx="minor">
-            <a:schemeClr val="lt1"/>
-          </a:fontRef>
-        </p:style>
-        <p:txBody>
-          <a:bodyPr rtlCol="0" anchor="ctr"/>
-          <a:lstStyle/>
-          <a:p>
-            <a:pPr algn="ctr"/>
-          </a:p>
-        </p:txBody>
-      </p:sp>
-      <p:sp>
-        <p:nvSpPr>
-          <p:cNvPr id="12" name="Rectangle 11"/>
-          <p:cNvSpPr/>
-          <p:nvPr/>
-        </p:nvSpPr>
-        <p:spPr>
-          <a:xfrm>
-            <a:off x="457200" y="3694176"/>
-            <a:ext cx="128016" cy="1051560"/>
-          </a:xfrm>
-          <a:prstGeom prst="rect">
-            <a:avLst/>
-          </a:prstGeom>
-          <a:solidFill>
-            <a:srgbClr val="A02030"/>
-          </a:solidFill>
-          <a:ln>
-            <a:noFill/>
-          </a:ln>
-        </p:spPr>
-        <p:style>
-          <a:lnRef idx="1">
-            <a:schemeClr val="accent1"/>
-          </a:lnRef>
-          <a:fillRef idx="3">
-            <a:schemeClr val="accent1"/>
-          </a:fillRef>
-          <a:effectRef idx="2">
-            <a:schemeClr val="accent1"/>
-          </a:effectRef>
-          <a:fontRef idx="minor">
-            <a:schemeClr val="lt1"/>
-          </a:fontRef>
-        </p:style>
-        <p:txBody>
-          <a:bodyPr rtlCol="0" anchor="ctr"/>
-          <a:lstStyle/>
-          <a:p>
-            <a:pPr algn="ctr"/>
-          </a:p>
-        </p:txBody>
-      </p:sp>
-      <p:sp>
-        <p:nvSpPr>
-          <p:cNvPr id="13" name="TextBox 12"/>
-          <p:cNvSpPr txBox="1"/>
-          <p:nvPr/>
-        </p:nvSpPr>
-        <p:spPr>
-          <a:xfrm>
-            <a:off x="777240" y="3831336"/>
-            <a:ext cx="10774375" cy="822959"/>
-          </a:xfrm>
-          <a:prstGeom prst="rect">
-            <a:avLst/>
-          </a:prstGeom>
-          <a:noFill/>
-        </p:spPr>
-        <p:txBody>
-          <a:bodyPr wrap="square">
-            <a:spAutoFit/>
-          </a:bodyPr>
-          <a:lstStyle/>
-          <a:p>
-            <a:r>
-              <a:rPr sz="1200" b="1" i="0">
-                <a:solidFill>
-                  <a:srgbClr val="A02030"/>
-                </a:solidFill>
-                <a:latin typeface="Calibri"/>
-              </a:rPr>
-              <a:t>Atención</a:t>
+              <a:t>–   </a:t>
+            </a:r>
+            <a:r>
+              <a:rPr sz="2000" b="1" i="0">
+                <a:solidFill>
+                  <a:srgbClr val="333333"/>
+                </a:solidFill>
+                <a:latin typeface="Calibri"/>
+              </a:rPr>
+              <a:t>Exito:</a:t>
+            </a:r>
+            <a:r>
+              <a:rPr sz="2000" b="0" i="0">
+                <a:solidFill>
+                  <a:srgbClr val="333333"/>
+                </a:solidFill>
+                <a:latin typeface="Calibri"/>
+              </a:rPr>
+              <a:t> El backlog esta priorizado con un orden explicito y cada item tiene una justificacion de valor para la clinica, no un orden arbitrario.</a:t>
             </a:r>
           </a:p>
           <a:p>
             <a:pPr>
-              <a:spcBef>
-                <a:spcPts val="400"/>
-              </a:spcBef>
+              <a:spcAft>
+                <a:spcPts val="800"/>
+              </a:spcAft>
             </a:pPr>
             <a:r>
-              <a:rPr sz="1400" b="0" i="0">
+              <a:rPr sz="2000" b="0" i="0">
                 <a:solidFill>
                   <a:srgbClr val="333333"/>
                 </a:solidFill>
                 <a:latin typeface="Calibri"/>
               </a:rPr>
-              <a:t>Entrega del taller, si el docente lo asigna · en la fecha que indique el docente.</a:t>
-            </a:r>
-          </a:p>
-        </p:txBody>
-      </p:sp>
-      <p:sp>
-        <p:nvSpPr>
-          <p:cNvPr id="14" name="TextBox 13"/>
+              <a:t>–   </a:t>
+            </a:r>
+            <a:r>
+              <a:rPr sz="2000" b="1" i="0">
+                <a:solidFill>
+                  <a:srgbClr val="333333"/>
+                </a:solidFill>
+                <a:latin typeface="Calibri"/>
+              </a:rPr>
+              <a:t>Exito:</a:t>
+            </a:r>
+            <a:r>
+              <a:rPr sz="2000" b="0" i="0">
+                <a:solidFill>
+                  <a:srgbClr val="333333"/>
+                </a:solidFill>
+                <a:latin typeface="Calibri"/>
+              </a:rPr>
+              <a:t> Las tres historias siguen la estructura Como / quiero / para y cada una tiene al menos dos escenarios en Dado/Cuando/Entonces, incluido uno alternativo o de error.</a:t>
+            </a:r>
+          </a:p>
+          <a:p>
+            <a:pPr>
+              <a:spcAft>
+                <a:spcPts val="800"/>
+              </a:spcAft>
+            </a:pPr>
+            <a:r>
+              <a:rPr sz="2000" b="0" i="0">
+                <a:solidFill>
+                  <a:srgbClr val="333333"/>
+                </a:solidFill>
+                <a:latin typeface="Calibri"/>
+              </a:rPr>
+              <a:t>–   </a:t>
+            </a:r>
+            <a:r>
+              <a:rPr sz="2000" b="1" i="0">
+                <a:solidFill>
+                  <a:srgbClr val="333333"/>
+                </a:solidFill>
+                <a:latin typeface="Calibri"/>
+              </a:rPr>
+              <a:t>Exito:</a:t>
+            </a:r>
+            <a:r>
+              <a:rPr sz="2000" b="0" i="0">
+                <a:solidFill>
+                  <a:srgbClr val="333333"/>
+                </a:solidFill>
+                <a:latin typeface="Calibri"/>
+              </a:rPr>
+              <a:t> Cada sprint del plan termina en un incremento que la clinica podria ver y opinar (mockup, prototipo, diagrama revisado), no en trabajo interno invisible.</a:t>
+            </a:r>
+          </a:p>
+          <a:p>
+            <a:pPr>
+              <a:spcAft>
+                <a:spcPts val="800"/>
+              </a:spcAft>
+            </a:pPr>
+            <a:r>
+              <a:rPr sz="2000" b="0" i="0">
+                <a:solidFill>
+                  <a:srgbClr val="333333"/>
+                </a:solidFill>
+                <a:latin typeface="Calibri"/>
+              </a:rPr>
+              <a:t>–   </a:t>
+            </a:r>
+            <a:r>
+              <a:rPr sz="2000" b="1" i="0">
+                <a:solidFill>
+                  <a:srgbClr val="333333"/>
+                </a:solidFill>
+                <a:latin typeface="Calibri"/>
+              </a:rPr>
+              <a:t>Exito:</a:t>
+            </a:r>
+            <a:r>
+              <a:rPr sz="2000" b="0" i="0">
+                <a:solidFill>
+                  <a:srgbClr val="333333"/>
+                </a:solidFill>
+                <a:latin typeface="Calibri"/>
+              </a:rPr>
+              <a:t> El tablero declara la Definicion de Terminado y el limite de trabajo en curso, y ninguna columna del medio tiene mas tarjetas que su limite.</a:t>
+            </a:r>
+          </a:p>
+          <a:p>
+            <a:pPr>
+              <a:spcAft>
+                <a:spcPts val="800"/>
+              </a:spcAft>
+            </a:pPr>
+            <a:r>
+              <a:rPr sz="2000" b="0" i="0">
+                <a:solidFill>
+                  <a:srgbClr val="333333"/>
+                </a:solidFill>
+                <a:latin typeface="Calibri"/>
+              </a:rPr>
+              <a:t>–   </a:t>
+            </a:r>
+            <a:r>
+              <a:rPr sz="2000" b="1" i="0">
+                <a:solidFill>
+                  <a:srgbClr val="333333"/>
+                </a:solidFill>
+                <a:latin typeface="Calibri"/>
+              </a:rPr>
+              <a:t>Entrega en la plataforma del curso</a:t>
+            </a:r>
+            <a:r>
+              <a:rPr sz="2000" b="0" i="0">
+                <a:solidFill>
+                  <a:srgbClr val="333333"/>
+                </a:solidFill>
+                <a:latin typeface="Calibri"/>
+              </a:rPr>
+              <a:t> — en la fecha que indique el docente.</a:t>
+            </a:r>
+          </a:p>
+        </p:txBody>
+      </p:sp>
+      <p:sp>
+        <p:nvSpPr>
+          <p:cNvPr id="6" name="TextBox 5"/>
           <p:cNvSpPr txBox="1"/>
           <p:nvPr/>
         </p:nvSpPr>
@@ -7993,6 +7982,601 @@
         <p:spPr>
           <a:xfrm>
             <a:off x="0" y="0"/>
+            <a:ext cx="12191695" cy="960120"/>
+          </a:xfrm>
+          <a:prstGeom prst="rect">
+            <a:avLst/>
+          </a:prstGeom>
+          <a:solidFill>
+            <a:srgbClr val="095292"/>
+          </a:solidFill>
+          <a:ln>
+            <a:noFill/>
+          </a:ln>
+        </p:spPr>
+        <p:style>
+          <a:lnRef idx="1">
+            <a:schemeClr val="accent1"/>
+          </a:lnRef>
+          <a:fillRef idx="3">
+            <a:schemeClr val="accent1"/>
+          </a:fillRef>
+          <a:effectRef idx="2">
+            <a:schemeClr val="accent1"/>
+          </a:effectRef>
+          <a:fontRef idx="minor">
+            <a:schemeClr val="lt1"/>
+          </a:fontRef>
+        </p:style>
+        <p:txBody>
+          <a:bodyPr rtlCol="0" anchor="ctr"/>
+          <a:lstStyle/>
+          <a:p>
+            <a:pPr algn="ctr"/>
+          </a:p>
+        </p:txBody>
+      </p:sp>
+      <p:sp>
+        <p:nvSpPr>
+          <p:cNvPr id="3" name="Rectangle 2"/>
+          <p:cNvSpPr/>
+          <p:nvPr/>
+        </p:nvSpPr>
+        <p:spPr>
+          <a:xfrm>
+            <a:off x="0" y="960120"/>
+            <a:ext cx="12191695" cy="41148"/>
+          </a:xfrm>
+          <a:prstGeom prst="rect">
+            <a:avLst/>
+          </a:prstGeom>
+          <a:solidFill>
+            <a:srgbClr val="FFD000"/>
+          </a:solidFill>
+          <a:ln>
+            <a:noFill/>
+          </a:ln>
+        </p:spPr>
+        <p:style>
+          <a:lnRef idx="1">
+            <a:schemeClr val="accent1"/>
+          </a:lnRef>
+          <a:fillRef idx="3">
+            <a:schemeClr val="accent1"/>
+          </a:fillRef>
+          <a:effectRef idx="2">
+            <a:schemeClr val="accent1"/>
+          </a:effectRef>
+          <a:fontRef idx="minor">
+            <a:schemeClr val="lt1"/>
+          </a:fontRef>
+        </p:style>
+        <p:txBody>
+          <a:bodyPr rtlCol="0" anchor="ctr"/>
+          <a:lstStyle/>
+          <a:p>
+            <a:pPr algn="ctr"/>
+          </a:p>
+        </p:txBody>
+      </p:sp>
+      <p:sp>
+        <p:nvSpPr>
+          <p:cNvPr id="4" name="TextBox 3"/>
+          <p:cNvSpPr txBox="1"/>
+          <p:nvPr/>
+        </p:nvSpPr>
+        <p:spPr>
+          <a:xfrm>
+            <a:off x="457200" y="164592"/>
+            <a:ext cx="11277295" cy="502920"/>
+          </a:xfrm>
+          <a:prstGeom prst="rect">
+            <a:avLst/>
+          </a:prstGeom>
+          <a:noFill/>
+        </p:spPr>
+        <p:txBody>
+          <a:bodyPr wrap="square">
+            <a:spAutoFit/>
+          </a:bodyPr>
+          <a:lstStyle/>
+          <a:p>
+            <a:r>
+              <a:rPr sz="2600" b="1" i="0">
+                <a:solidFill>
+                  <a:srgbClr val="FFFFFF"/>
+                </a:solidFill>
+                <a:latin typeface="Calibri"/>
+              </a:rPr>
+              <a:t>Para el PI esta semana</a:t>
+            </a:r>
+          </a:p>
+        </p:txBody>
+      </p:sp>
+      <p:sp>
+        <p:nvSpPr>
+          <p:cNvPr id="5" name="Rounded Rectangle 4"/>
+          <p:cNvSpPr/>
+          <p:nvPr/>
+        </p:nvSpPr>
+        <p:spPr>
+          <a:xfrm>
+            <a:off x="457200" y="1261872"/>
+            <a:ext cx="11277295" cy="1051560"/>
+          </a:xfrm>
+          <a:prstGeom prst="roundRect">
+            <a:avLst>
+              <a:gd name="adj" fmla="val 12000"/>
+            </a:avLst>
+          </a:prstGeom>
+          <a:solidFill>
+            <a:srgbClr val="E8F4FA"/>
+          </a:solidFill>
+          <a:ln>
+            <a:noFill/>
+          </a:ln>
+        </p:spPr>
+        <p:style>
+          <a:lnRef idx="1">
+            <a:schemeClr val="accent1"/>
+          </a:lnRef>
+          <a:fillRef idx="3">
+            <a:schemeClr val="accent1"/>
+          </a:fillRef>
+          <a:effectRef idx="2">
+            <a:schemeClr val="accent1"/>
+          </a:effectRef>
+          <a:fontRef idx="minor">
+            <a:schemeClr val="lt1"/>
+          </a:fontRef>
+        </p:style>
+        <p:txBody>
+          <a:bodyPr rtlCol="0" anchor="ctr"/>
+          <a:lstStyle/>
+          <a:p>
+            <a:pPr algn="ctr"/>
+          </a:p>
+        </p:txBody>
+      </p:sp>
+      <p:sp>
+        <p:nvSpPr>
+          <p:cNvPr id="6" name="Rectangle 5"/>
+          <p:cNvSpPr/>
+          <p:nvPr/>
+        </p:nvSpPr>
+        <p:spPr>
+          <a:xfrm>
+            <a:off x="457200" y="1261872"/>
+            <a:ext cx="128016" cy="1051560"/>
+          </a:xfrm>
+          <a:prstGeom prst="rect">
+            <a:avLst/>
+          </a:prstGeom>
+          <a:solidFill>
+            <a:srgbClr val="269CCB"/>
+          </a:solidFill>
+          <a:ln>
+            <a:noFill/>
+          </a:ln>
+        </p:spPr>
+        <p:style>
+          <a:lnRef idx="1">
+            <a:schemeClr val="accent1"/>
+          </a:lnRef>
+          <a:fillRef idx="3">
+            <a:schemeClr val="accent1"/>
+          </a:fillRef>
+          <a:effectRef idx="2">
+            <a:schemeClr val="accent1"/>
+          </a:effectRef>
+          <a:fontRef idx="minor">
+            <a:schemeClr val="lt1"/>
+          </a:fontRef>
+        </p:style>
+        <p:txBody>
+          <a:bodyPr rtlCol="0" anchor="ctr"/>
+          <a:lstStyle/>
+          <a:p>
+            <a:pPr algn="ctr"/>
+          </a:p>
+        </p:txBody>
+      </p:sp>
+      <p:sp>
+        <p:nvSpPr>
+          <p:cNvPr id="7" name="TextBox 6"/>
+          <p:cNvSpPr txBox="1"/>
+          <p:nvPr/>
+        </p:nvSpPr>
+        <p:spPr>
+          <a:xfrm>
+            <a:off x="777240" y="1399031"/>
+            <a:ext cx="10774375" cy="822959"/>
+          </a:xfrm>
+          <a:prstGeom prst="rect">
+            <a:avLst/>
+          </a:prstGeom>
+          <a:noFill/>
+        </p:spPr>
+        <p:txBody>
+          <a:bodyPr wrap="square">
+            <a:spAutoFit/>
+          </a:bodyPr>
+          <a:lstStyle/>
+          <a:p>
+            <a:r>
+              <a:rPr sz="1200" b="1" i="0">
+                <a:solidFill>
+                  <a:srgbClr val="269CCB"/>
+                </a:solidFill>
+                <a:latin typeface="Calibri"/>
+              </a:rPr>
+              <a:t>Info</a:t>
+            </a:r>
+          </a:p>
+          <a:p>
+            <a:pPr>
+              <a:spcBef>
+                <a:spcPts val="400"/>
+              </a:spcBef>
+            </a:pPr>
+            <a:r>
+              <a:rPr sz="1400" b="0" i="0">
+                <a:solidFill>
+                  <a:srgbClr val="333333"/>
+                </a:solidFill>
+                <a:latin typeface="Calibri"/>
+              </a:rPr>
+              <a:t>Hito: Queda listo el backlog priorizado de VetCare repartido en sprints del semestre, con las primeras historias de usuario escritas con criterios de aceptacion.</a:t>
+            </a:r>
+          </a:p>
+        </p:txBody>
+      </p:sp>
+      <p:sp>
+        <p:nvSpPr>
+          <p:cNvPr id="8" name="Rounded Rectangle 7"/>
+          <p:cNvSpPr/>
+          <p:nvPr/>
+        </p:nvSpPr>
+        <p:spPr>
+          <a:xfrm>
+            <a:off x="457200" y="2478024"/>
+            <a:ext cx="11277295" cy="1051560"/>
+          </a:xfrm>
+          <a:prstGeom prst="roundRect">
+            <a:avLst>
+              <a:gd name="adj" fmla="val 12000"/>
+            </a:avLst>
+          </a:prstGeom>
+          <a:solidFill>
+            <a:srgbClr val="FFF8E1"/>
+          </a:solidFill>
+          <a:ln>
+            <a:noFill/>
+          </a:ln>
+        </p:spPr>
+        <p:style>
+          <a:lnRef idx="1">
+            <a:schemeClr val="accent1"/>
+          </a:lnRef>
+          <a:fillRef idx="3">
+            <a:schemeClr val="accent1"/>
+          </a:fillRef>
+          <a:effectRef idx="2">
+            <a:schemeClr val="accent1"/>
+          </a:effectRef>
+          <a:fontRef idx="minor">
+            <a:schemeClr val="lt1"/>
+          </a:fontRef>
+        </p:style>
+        <p:txBody>
+          <a:bodyPr rtlCol="0" anchor="ctr"/>
+          <a:lstStyle/>
+          <a:p>
+            <a:pPr algn="ctr"/>
+          </a:p>
+        </p:txBody>
+      </p:sp>
+      <p:sp>
+        <p:nvSpPr>
+          <p:cNvPr id="9" name="Rectangle 8"/>
+          <p:cNvSpPr/>
+          <p:nvPr/>
+        </p:nvSpPr>
+        <p:spPr>
+          <a:xfrm>
+            <a:off x="457200" y="2478024"/>
+            <a:ext cx="128016" cy="1051560"/>
+          </a:xfrm>
+          <a:prstGeom prst="rect">
+            <a:avLst/>
+          </a:prstGeom>
+          <a:solidFill>
+            <a:srgbClr val="FFD000"/>
+          </a:solidFill>
+          <a:ln>
+            <a:noFill/>
+          </a:ln>
+        </p:spPr>
+        <p:style>
+          <a:lnRef idx="1">
+            <a:schemeClr val="accent1"/>
+          </a:lnRef>
+          <a:fillRef idx="3">
+            <a:schemeClr val="accent1"/>
+          </a:fillRef>
+          <a:effectRef idx="2">
+            <a:schemeClr val="accent1"/>
+          </a:effectRef>
+          <a:fontRef idx="minor">
+            <a:schemeClr val="lt1"/>
+          </a:fontRef>
+        </p:style>
+        <p:txBody>
+          <a:bodyPr rtlCol="0" anchor="ctr"/>
+          <a:lstStyle/>
+          <a:p>
+            <a:pPr algn="ctr"/>
+          </a:p>
+        </p:txBody>
+      </p:sp>
+      <p:sp>
+        <p:nvSpPr>
+          <p:cNvPr id="10" name="TextBox 9"/>
+          <p:cNvSpPr txBox="1"/>
+          <p:nvPr/>
+        </p:nvSpPr>
+        <p:spPr>
+          <a:xfrm>
+            <a:off x="777240" y="2615184"/>
+            <a:ext cx="10774375" cy="822959"/>
+          </a:xfrm>
+          <a:prstGeom prst="rect">
+            <a:avLst/>
+          </a:prstGeom>
+          <a:noFill/>
+        </p:spPr>
+        <p:txBody>
+          <a:bodyPr wrap="square">
+            <a:spAutoFit/>
+          </a:bodyPr>
+          <a:lstStyle/>
+          <a:p>
+            <a:r>
+              <a:rPr sz="1200" b="1" i="0">
+                <a:solidFill>
+                  <a:srgbClr val="FFD000"/>
+                </a:solidFill>
+                <a:latin typeface="Calibri"/>
+              </a:rPr>
+              <a:t>Aclaración</a:t>
+            </a:r>
+          </a:p>
+          <a:p>
+            <a:pPr>
+              <a:spcBef>
+                <a:spcPts val="400"/>
+              </a:spcBef>
+            </a:pPr>
+            <a:r>
+              <a:rPr sz="1400" b="0" i="0">
+                <a:solidFill>
+                  <a:srgbClr val="333333"/>
+                </a:solidFill>
+                <a:latin typeface="Calibri"/>
+              </a:rPr>
+              <a:t>Enunciado completo: Clases/Proyecto Integrador/ (VetCare).</a:t>
+            </a:r>
+          </a:p>
+        </p:txBody>
+      </p:sp>
+      <p:sp>
+        <p:nvSpPr>
+          <p:cNvPr id="11" name="Rounded Rectangle 10"/>
+          <p:cNvSpPr/>
+          <p:nvPr/>
+        </p:nvSpPr>
+        <p:spPr>
+          <a:xfrm>
+            <a:off x="457200" y="3694176"/>
+            <a:ext cx="11277295" cy="1051560"/>
+          </a:xfrm>
+          <a:prstGeom prst="roundRect">
+            <a:avLst>
+              <a:gd name="adj" fmla="val 12000"/>
+            </a:avLst>
+          </a:prstGeom>
+          <a:solidFill>
+            <a:srgbClr val="FBE4E4"/>
+          </a:solidFill>
+          <a:ln>
+            <a:noFill/>
+          </a:ln>
+        </p:spPr>
+        <p:style>
+          <a:lnRef idx="1">
+            <a:schemeClr val="accent1"/>
+          </a:lnRef>
+          <a:fillRef idx="3">
+            <a:schemeClr val="accent1"/>
+          </a:fillRef>
+          <a:effectRef idx="2">
+            <a:schemeClr val="accent1"/>
+          </a:effectRef>
+          <a:fontRef idx="minor">
+            <a:schemeClr val="lt1"/>
+          </a:fontRef>
+        </p:style>
+        <p:txBody>
+          <a:bodyPr rtlCol="0" anchor="ctr"/>
+          <a:lstStyle/>
+          <a:p>
+            <a:pPr algn="ctr"/>
+          </a:p>
+        </p:txBody>
+      </p:sp>
+      <p:sp>
+        <p:nvSpPr>
+          <p:cNvPr id="12" name="Rectangle 11"/>
+          <p:cNvSpPr/>
+          <p:nvPr/>
+        </p:nvSpPr>
+        <p:spPr>
+          <a:xfrm>
+            <a:off x="457200" y="3694176"/>
+            <a:ext cx="128016" cy="1051560"/>
+          </a:xfrm>
+          <a:prstGeom prst="rect">
+            <a:avLst/>
+          </a:prstGeom>
+          <a:solidFill>
+            <a:srgbClr val="A02030"/>
+          </a:solidFill>
+          <a:ln>
+            <a:noFill/>
+          </a:ln>
+        </p:spPr>
+        <p:style>
+          <a:lnRef idx="1">
+            <a:schemeClr val="accent1"/>
+          </a:lnRef>
+          <a:fillRef idx="3">
+            <a:schemeClr val="accent1"/>
+          </a:fillRef>
+          <a:effectRef idx="2">
+            <a:schemeClr val="accent1"/>
+          </a:effectRef>
+          <a:fontRef idx="minor">
+            <a:schemeClr val="lt1"/>
+          </a:fontRef>
+        </p:style>
+        <p:txBody>
+          <a:bodyPr rtlCol="0" anchor="ctr"/>
+          <a:lstStyle/>
+          <a:p>
+            <a:pPr algn="ctr"/>
+          </a:p>
+        </p:txBody>
+      </p:sp>
+      <p:sp>
+        <p:nvSpPr>
+          <p:cNvPr id="13" name="TextBox 12"/>
+          <p:cNvSpPr txBox="1"/>
+          <p:nvPr/>
+        </p:nvSpPr>
+        <p:spPr>
+          <a:xfrm>
+            <a:off x="777240" y="3831336"/>
+            <a:ext cx="10774375" cy="822959"/>
+          </a:xfrm>
+          <a:prstGeom prst="rect">
+            <a:avLst/>
+          </a:prstGeom>
+          <a:noFill/>
+        </p:spPr>
+        <p:txBody>
+          <a:bodyPr wrap="square">
+            <a:spAutoFit/>
+          </a:bodyPr>
+          <a:lstStyle/>
+          <a:p>
+            <a:r>
+              <a:rPr sz="1200" b="1" i="0">
+                <a:solidFill>
+                  <a:srgbClr val="A02030"/>
+                </a:solidFill>
+                <a:latin typeface="Calibri"/>
+              </a:rPr>
+              <a:t>Atención</a:t>
+            </a:r>
+          </a:p>
+          <a:p>
+            <a:pPr>
+              <a:spcBef>
+                <a:spcPts val="400"/>
+              </a:spcBef>
+            </a:pPr>
+            <a:r>
+              <a:rPr sz="1400" b="0" i="0">
+                <a:solidFill>
+                  <a:srgbClr val="333333"/>
+                </a:solidFill>
+                <a:latin typeface="Calibri"/>
+              </a:rPr>
+              <a:t>Entrega del taller, si el docente lo asigna · en la fecha que indique el docente.</a:t>
+            </a:r>
+          </a:p>
+        </p:txBody>
+      </p:sp>
+      <p:sp>
+        <p:nvSpPr>
+          <p:cNvPr id="14" name="TextBox 13"/>
+          <p:cNvSpPr txBox="1"/>
+          <p:nvPr/>
+        </p:nvSpPr>
+        <p:spPr>
+          <a:xfrm>
+            <a:off x="11185855" y="6473952"/>
+            <a:ext cx="640080" cy="274320"/>
+          </a:xfrm>
+          <a:prstGeom prst="rect">
+            <a:avLst/>
+          </a:prstGeom>
+          <a:noFill/>
+        </p:spPr>
+        <p:txBody>
+          <a:bodyPr wrap="square">
+            <a:spAutoFit/>
+          </a:bodyPr>
+          <a:lstStyle/>
+          <a:p>
+            <a:pPr algn="r"/>
+            <a:r>
+              <a:rPr sz="1100" b="0" i="0">
+                <a:solidFill>
+                  <a:srgbClr val="666666"/>
+                </a:solidFill>
+                <a:latin typeface="Calibri"/>
+              </a:rPr>
+              <a:t>18</a:t>
+            </a:r>
+          </a:p>
+        </p:txBody>
+      </p:sp>
+    </p:spTree>
+  </p:cSld>
+  <p:clrMapOvr>
+    <a:masterClrMapping/>
+  </p:clrMapOvr>
+</p:sld>
+</file>
+
+<file path=ppt/slides/slide19.xml><?xml version="1.0" encoding="utf-8"?>
+<p:sld xmlns:a="http://schemas.openxmlformats.org/drawingml/2006/main" xmlns:p="http://schemas.openxmlformats.org/presentationml/2006/main" xmlns:r="http://schemas.openxmlformats.org/officeDocument/2006/relationships">
+  <p:cSld>
+    <p:bg>
+      <p:bgPr>
+        <a:solidFill>
+          <a:srgbClr val="FFFFFF"/>
+        </a:solidFill>
+        <a:effectLst/>
+      </p:bgPr>
+    </p:bg>
+    <p:spTree>
+      <p:nvGrpSpPr>
+        <p:cNvPr id="1" name=""/>
+        <p:cNvGrpSpPr/>
+        <p:nvPr/>
+      </p:nvGrpSpPr>
+      <p:grpSpPr/>
+      <p:sp>
+        <p:nvSpPr>
+          <p:cNvPr id="2" name="Rectangle 1"/>
+          <p:cNvSpPr/>
+          <p:nvPr/>
+        </p:nvSpPr>
+        <p:spPr>
+          <a:xfrm>
+            <a:off x="0" y="0"/>
             <a:ext cx="12191695" cy="164592"/>
           </a:xfrm>
           <a:prstGeom prst="rect">
@@ -9585,22 +10169,6 @@
                 </a:solidFill>
                 <a:latin typeface="Calibri"/>
               </a:rPr>
-              <a:t>–   Individuos e interacciones SOBRE procesos y herramientas; software funcionando SOBRE documentacion exhaustiva; colaboracion con el cliente SOBRE negociacion contractual; respuesta ante el cambio SOBRE seguir un plan.</a:t>
-            </a:r>
-          </a:p>
-          <a:p>
-            <a:pPr>
-              <a:spcAft>
-                <a:spcPts val="800"/>
-              </a:spcAft>
-            </a:pPr>
-            <a:r>
-              <a:rPr sz="2000" b="0" i="0">
-                <a:solidFill>
-                  <a:srgbClr val="333333"/>
-                </a:solidFill>
-                <a:latin typeface="Calibri"/>
-              </a:rPr>
               <a:t>–   Dice sobre, no 'en vez de': lo de la derecha sigue teniendo valor, solo que lo de la izquierda tiene mas.</a:t>
             </a:r>
           </a:p>
@@ -9936,22 +10504,6 @@
               <a:t>–   Y tiene tres artefactos: Product Backlog, Sprint Backlog e Incremento, este ultimo gobernado por la Definicion de Terminado.</a:t>
             </a:r>
           </a:p>
-          <a:p>
-            <a:pPr>
-              <a:spcAft>
-                <a:spcPts val="800"/>
-              </a:spcAft>
-            </a:pPr>
-            <a:r>
-              <a:rPr sz="2000" b="0" i="0">
-                <a:solidFill>
-                  <a:srgbClr val="333333"/>
-                </a:solidFill>
-                <a:latin typeface="Calibri"/>
-              </a:rPr>
-              <a:t>–   En VetCare el docente actua como vocero de Huellitas en el rol de Product Owner, y cada estudiante -o cada equipo, si el docente lo autoriza- hace de equipo de desarrollo que se compromete con un objetivo de sprint.</a:t>
-            </a:r>
-          </a:p>
         </p:txBody>
       </p:sp>
       <p:sp>
@@ -10217,22 +10769,6 @@
                 </a:solidFill>
                 <a:latin typeface="Calibri"/>
               </a:rPr>
-              <a:t>–   En VetCare el tablero seria Por hacer / Modelando / En revision del cliente / Aprobado, y la politica de la ultima columna podria ser 'solo pasa a Aprobado si tiene diagrama, mockup y visto bueno de la clinica'.</a:t>
-            </a:r>
-          </a:p>
-          <a:p>
-            <a:pPr>
-              <a:spcAft>
-                <a:spcPts val="800"/>
-              </a:spcAft>
-            </a:pPr>
-            <a:r>
-              <a:rPr sz="2000" b="0" i="0">
-                <a:solidFill>
-                  <a:srgbClr val="333333"/>
-                </a:solidFill>
-                <a:latin typeface="Calibri"/>
-              </a:rPr>
               <a:t>–   El estudiante que abre cinco diagramas al tiempo y no termina ninguno es exactamente el problema que el limite de trabajo en curso resuelve.</a:t>
             </a:r>
           </a:p>
@@ -10414,7 +10950,7 @@
                 </a:solidFill>
                 <a:latin typeface="Calibri"/>
               </a:rPr>
-              <a:t>Hay dos palabras que se usan como sinonimos y significan cosas...</a:t>
+              <a:t>Hay dos palabras que se usan como sinonimos y significan cosas... (1/2)</a:t>
             </a:r>
           </a:p>
         </p:txBody>
@@ -10485,55 +11021,7 @@
                 </a:solidFill>
                 <a:latin typeface="Calibri"/>
               </a:rPr>
-              <a:t>–   Agil hace las dos cosas al mismo tiempo.</a:t>
-            </a:r>
-          </a:p>
-          <a:p>
-            <a:pPr>
-              <a:spcAft>
-                <a:spcPts val="800"/>
-              </a:spcAft>
-            </a:pPr>
-            <a:r>
-              <a:rPr sz="2000" b="0" i="0">
-                <a:solidFill>
-                  <a:srgbClr val="333333"/>
-                </a:solidFill>
-                <a:latin typeface="Calibri"/>
-              </a:rPr>
               <a:t>–   En VetCare el incremento 1 es el mockup de la ficha del paciente; cuando la veterinaria lo mira y dice 'me falta el campo de alergias y la foto de la mascota', y el equipo produce la version 2 de ese mismo mockup, eso es iteracion.</a:t>
-            </a:r>
-          </a:p>
-          <a:p>
-            <a:pPr>
-              <a:spcAft>
-                <a:spcPts val="800"/>
-              </a:spcAft>
-            </a:pPr>
-            <a:r>
-              <a:rPr sz="2000" b="0" i="0">
-                <a:solidFill>
-                  <a:srgbClr val="333333"/>
-                </a:solidFill>
-                <a:latin typeface="Calibri"/>
-              </a:rPr>
-              <a:t>–   Y aqui aparece una regla practica que salva proyectos: cada entrega debe ser una rebanada vertical, algo que el cliente pueda ver y opinar, no una capa horizontal invisible.</a:t>
-            </a:r>
-          </a:p>
-          <a:p>
-            <a:pPr>
-              <a:spcAft>
-                <a:spcPts val="800"/>
-              </a:spcAft>
-            </a:pPr>
-            <a:r>
-              <a:rPr sz="2000" b="0" i="0">
-                <a:solidFill>
-                  <a:srgbClr val="333333"/>
-                </a:solidFill>
-                <a:latin typeface="Calibri"/>
-              </a:rPr>
-              <a:t>–   Entregar 'todas las tablas de la base de datos' no es un incremento util para Huellitas; entregar 'registrar y consultar una ficha completa de principio a fin' si lo es.</a:t>
             </a:r>
           </a:p>
         </p:txBody>
@@ -10714,7 +11202,7 @@
                 </a:solidFill>
                 <a:latin typeface="Calibri"/>
               </a:rPr>
-              <a:t>Agil no significa trabajar sin documentacion, y este es el malentendido...</a:t>
+              <a:t>Hay dos palabras que se usan como sinonimos y significan cosas... (2/2)</a:t>
             </a:r>
           </a:p>
         </p:txBody>
@@ -10753,7 +11241,7 @@
                 </a:solidFill>
                 <a:latin typeface="Calibri"/>
               </a:rPr>
-              <a:t>–   Agil no significa trabajar sin documentacion, y este es el malentendido que mas daño hace.</a:t>
+              <a:t>–   Y aqui aparece una regla practica que salva proyectos: cada entrega debe ser una rebanada vertical, algo que el cliente pueda ver y opinar, no una capa horizontal invisible.</a:t>
             </a:r>
           </a:p>
           <a:p>
@@ -10769,55 +11257,7 @@
                 </a:solidFill>
                 <a:latin typeface="Calibri"/>
               </a:rPr>
-              <a:t>–   El manifiesto dice software funcionando sobre documentacion exhaustiva: lo que se rechaza es el documento inflado que nadie lee, no el documento util.</a:t>
-            </a:r>
-          </a:p>
-          <a:p>
-            <a:pPr>
-              <a:spcAft>
-                <a:spcPts val="800"/>
-              </a:spcAft>
-            </a:pPr>
-            <a:r>
-              <a:rPr sz="2000" b="0" i="0">
-                <a:solidFill>
-                  <a:srgbClr val="333333"/>
-                </a:solidFill>
-                <a:latin typeface="Calibri"/>
-              </a:rPr>
-              <a:t>–   Un equipo agil documenta historias de usuario con criterios de aceptacion, la Definicion de Terminado, las decisiones de arquitectura, el diccionario de datos y los diagramas que hagan falta, pero los escribe justo a tiempo y los mantiene vivos.</a:t>
-            </a:r>
-          </a:p>
-          <a:p>
-            <a:pPr>
-              <a:spcAft>
-                <a:spcPts val="800"/>
-              </a:spcAft>
-            </a:pPr>
-            <a:r>
-              <a:rPr sz="2000" b="0" i="0">
-                <a:solidFill>
-                  <a:srgbClr val="333333"/>
-                </a:solidFill>
-                <a:latin typeface="Calibri"/>
-              </a:rPr>
-              <a:t>–   Para nuestro Proyecto Integrador esto es central: en Seminario de Sistemas el entregable ES documentacion de diseño, y aun asi el trabajo puede ser perfectamente agil, porque se produce por incrementos, se revisa con el cliente y se corrige.</a:t>
-            </a:r>
-          </a:p>
-          <a:p>
-            <a:pPr>
-              <a:spcAft>
-                <a:spcPts val="800"/>
-              </a:spcAft>
-            </a:pPr>
-            <a:r>
-              <a:rPr sz="2000" b="0" i="0">
-                <a:solidFill>
-                  <a:srgbClr val="333333"/>
-                </a:solidFill>
-                <a:latin typeface="Calibri"/>
-              </a:rPr>
-              <a:t>–   El estudiante que solo cursa esta materia trabaja con sprints igual que los demas: sus incrementos son mockups, casos de uso y diccionario de datos, y cierra con un prototipo navegable que se puede recorrer y criticar.</a:t>
+              <a:t>–   Entregar 'todas las tablas de la base de datos' no es un incremento util para Huellitas; entregar 'registrar y consultar una ficha completa de principio a fin' si lo es.</a:t>
             </a:r>
           </a:p>
         </p:txBody>
@@ -10998,141 +11438,21 @@
                 </a:solidFill>
                 <a:latin typeface="Calibri"/>
               </a:rPr>
-              <a:t>Historia de usuario de VetCare con criterios de aceptacion</a:t>
-            </a:r>
-          </a:p>
-        </p:txBody>
-      </p:sp>
-      <p:sp>
-        <p:nvSpPr>
-          <p:cNvPr id="5" name="Rounded Rectangle 4"/>
-          <p:cNvSpPr/>
-          <p:nvPr/>
-        </p:nvSpPr>
-        <p:spPr>
-          <a:xfrm>
-            <a:off x="457200" y="1261872"/>
-            <a:ext cx="11277295" cy="4773168"/>
-          </a:xfrm>
-          <a:prstGeom prst="roundRect">
-            <a:avLst>
-              <a:gd name="adj" fmla="val 12000"/>
-            </a:avLst>
-          </a:prstGeom>
-          <a:solidFill>
-            <a:srgbClr val="1E2A38"/>
-          </a:solidFill>
-          <a:ln>
-            <a:noFill/>
-          </a:ln>
-        </p:spPr>
-        <p:style>
-          <a:lnRef idx="1">
-            <a:schemeClr val="accent1"/>
-          </a:lnRef>
-          <a:fillRef idx="3">
-            <a:schemeClr val="accent1"/>
-          </a:fillRef>
-          <a:effectRef idx="2">
-            <a:schemeClr val="accent1"/>
-          </a:effectRef>
-          <a:fontRef idx="minor">
-            <a:schemeClr val="lt1"/>
-          </a:fontRef>
-        </p:style>
-        <p:txBody>
-          <a:bodyPr rtlCol="0" anchor="ctr"/>
-          <a:lstStyle/>
-          <a:p>
-            <a:pPr algn="ctr"/>
-          </a:p>
-        </p:txBody>
-      </p:sp>
-      <p:sp>
-        <p:nvSpPr>
-          <p:cNvPr id="6" name="Rectangle 5"/>
-          <p:cNvSpPr/>
-          <p:nvPr/>
-        </p:nvSpPr>
-        <p:spPr>
-          <a:xfrm>
-            <a:off x="457200" y="1261872"/>
-            <a:ext cx="11277295" cy="320040"/>
-          </a:xfrm>
-          <a:prstGeom prst="rect">
-            <a:avLst/>
-          </a:prstGeom>
-          <a:solidFill>
-            <a:srgbClr val="095292"/>
-          </a:solidFill>
-          <a:ln>
-            <a:noFill/>
-          </a:ln>
-        </p:spPr>
-        <p:style>
-          <a:lnRef idx="1">
-            <a:schemeClr val="accent1"/>
-          </a:lnRef>
-          <a:fillRef idx="3">
-            <a:schemeClr val="accent1"/>
-          </a:fillRef>
-          <a:effectRef idx="2">
-            <a:schemeClr val="accent1"/>
-          </a:effectRef>
-          <a:fontRef idx="minor">
-            <a:schemeClr val="lt1"/>
-          </a:fontRef>
-        </p:style>
-        <p:txBody>
-          <a:bodyPr rtlCol="0" anchor="ctr"/>
-          <a:lstStyle/>
-          <a:p>
-            <a:pPr algn="ctr"/>
-          </a:p>
-        </p:txBody>
-      </p:sp>
-      <p:sp>
-        <p:nvSpPr>
-          <p:cNvPr id="7" name="TextBox 6"/>
+              <a:t>Agil no significa trabajar sin documentacion, y este es el malentendido...</a:t>
+            </a:r>
+          </a:p>
+        </p:txBody>
+      </p:sp>
+      <p:sp>
+        <p:nvSpPr>
+          <p:cNvPr id="5" name="TextBox 4"/>
           <p:cNvSpPr txBox="1"/>
           <p:nvPr/>
         </p:nvSpPr>
         <p:spPr>
           <a:xfrm>
-            <a:off x="685800" y="1307592"/>
-            <a:ext cx="10820095" cy="256032"/>
-          </a:xfrm>
-          <a:prstGeom prst="rect">
-            <a:avLst/>
-          </a:prstGeom>
-          <a:noFill/>
-        </p:spPr>
-        <p:txBody>
-          <a:bodyPr wrap="square" anchor="ctr"/>
-          <a:lstStyle/>
-          <a:p>
-            <a:r>
-              <a:rPr sz="1000" b="1" i="0">
-                <a:solidFill>
-                  <a:srgbClr val="269CCB"/>
-                </a:solidFill>
-                <a:latin typeface="Calibri"/>
-              </a:rPr>
-              <a:t>● ● ●</a:t>
-            </a:r>
-          </a:p>
-        </p:txBody>
-      </p:sp>
-      <p:sp>
-        <p:nvSpPr>
-          <p:cNvPr id="8" name="TextBox 7"/>
-          <p:cNvSpPr txBox="1"/>
-          <p:nvPr/>
-        </p:nvSpPr>
-        <p:spPr>
-          <a:xfrm>
-            <a:off x="777240" y="1719072"/>
-            <a:ext cx="10637215" cy="4133087"/>
+            <a:off x="457200" y="1170432"/>
+            <a:ext cx="11277295" cy="5230368"/>
           </a:xfrm>
           <a:prstGeom prst="rect">
             <a:avLst/>
@@ -11147,267 +11467,72 @@
           <a:p>
             <a:pPr>
               <a:spcAft>
-                <a:spcPts val="400"/>
+                <a:spcPts val="800"/>
               </a:spcAft>
             </a:pPr>
             <a:r>
-              <a:rPr sz="1400" b="0" i="0">
-                <a:solidFill>
-                  <a:srgbClr val="FFFFFF"/>
-                </a:solidFill>
-                <a:latin typeface="Calibri"/>
-              </a:rPr>
-              <a:t>HU-07  Buscar historia clinica</a:t>
+              <a:rPr sz="2000" b="0" i="0">
+                <a:solidFill>
+                  <a:srgbClr val="333333"/>
+                </a:solidFill>
+                <a:latin typeface="Calibri"/>
+              </a:rPr>
+              <a:t>–   Agil no significa trabajar sin documentacion, y este es el malentendido que mas daño hace.</a:t>
             </a:r>
           </a:p>
           <a:p>
             <a:pPr>
               <a:spcAft>
-                <a:spcPts val="400"/>
+                <a:spcPts val="800"/>
               </a:spcAft>
             </a:pPr>
             <a:r>
-              <a:rPr sz="1400" b="0" i="0">
-                <a:solidFill>
-                  <a:srgbClr val="FFFFFF"/>
-                </a:solidFill>
-                <a:latin typeface="Calibri"/>
-              </a:rPr>
-              <a:t>  Como veterinaria de la clinica Huellitas</a:t>
+              <a:rPr sz="2000" b="0" i="0">
+                <a:solidFill>
+                  <a:srgbClr val="333333"/>
+                </a:solidFill>
+                <a:latin typeface="Calibri"/>
+              </a:rPr>
+              <a:t>–   El manifiesto dice software funcionando sobre documentacion exhaustiva: lo que se rechaza es el documento inflado que nadie lee, no el documento util.</a:t>
             </a:r>
           </a:p>
           <a:p>
             <a:pPr>
               <a:spcAft>
-                <a:spcPts val="400"/>
+                <a:spcPts val="800"/>
               </a:spcAft>
             </a:pPr>
             <a:r>
-              <a:rPr sz="1400" b="0" i="0">
-                <a:solidFill>
-                  <a:srgbClr val="FFFFFF"/>
-                </a:solidFill>
-                <a:latin typeface="Calibri"/>
-              </a:rPr>
-              <a:t>  quiero buscar la historia clinica de una mascota por nombre o documento</a:t>
+              <a:rPr sz="2000" b="0" i="0">
+                <a:solidFill>
+                  <a:srgbClr val="333333"/>
+                </a:solidFill>
+                <a:latin typeface="Calibri"/>
+              </a:rPr>
+              <a:t>–   Para nuestro Proyecto Integrador esto es central: en Seminario de Sistemas el entregable ES documentacion de diseño, y aun asi el trabajo puede ser perfectamente agil, porque se produce por incrementos, se revisa con el cliente y se corrige.</a:t>
             </a:r>
           </a:p>
           <a:p>
             <a:pPr>
               <a:spcAft>
-                <a:spcPts val="400"/>
+                <a:spcPts val="800"/>
               </a:spcAft>
             </a:pPr>
             <a:r>
-              <a:rPr sz="1400" b="0" i="0">
-                <a:solidFill>
-                  <a:srgbClr val="FFFFFF"/>
-                </a:solidFill>
-                <a:latin typeface="Calibri"/>
-              </a:rPr>
-              <a:t>  para atender la consulta sin ir al archivador de papel.</a:t>
-            </a:r>
-          </a:p>
-          <a:p>
-            <a:pPr>
-              <a:spcAft>
-                <a:spcPts val="400"/>
-              </a:spcAft>
-            </a:pPr>
-            <a:r>
-              <a:rPr sz="1400" b="0" i="0">
-                <a:solidFill>
-                  <a:srgbClr val="FFFFFF"/>
-                </a:solidFill>
-                <a:latin typeface="Calibri"/>
-              </a:rPr>
-              <a:t/>
-            </a:r>
-          </a:p>
-          <a:p>
-            <a:pPr>
-              <a:spcAft>
-                <a:spcPts val="400"/>
-              </a:spcAft>
-            </a:pPr>
-            <a:r>
-              <a:rPr sz="1400" b="0" i="0">
-                <a:solidFill>
-                  <a:srgbClr val="FFFFFF"/>
-                </a:solidFill>
-                <a:latin typeface="Calibri"/>
-              </a:rPr>
-              <a:t>Criterios de aceptacion</a:t>
-            </a:r>
-          </a:p>
-          <a:p>
-            <a:pPr>
-              <a:spcAft>
-                <a:spcPts val="400"/>
-              </a:spcAft>
-            </a:pPr>
-            <a:r>
-              <a:rPr sz="1400" b="0" i="0">
-                <a:solidFill>
-                  <a:srgbClr val="FFFFFF"/>
-                </a:solidFill>
-                <a:latin typeface="Calibri"/>
-              </a:rPr>
-              <a:t>  Dado que la mascota Rocky esta registrada con el dueño CC 1.144.556</a:t>
-            </a:r>
-          </a:p>
-          <a:p>
-            <a:pPr>
-              <a:spcAft>
-                <a:spcPts val="400"/>
-              </a:spcAft>
-            </a:pPr>
-            <a:r>
-              <a:rPr sz="1400" b="0" i="0">
-                <a:solidFill>
-                  <a:srgbClr val="FFFFFF"/>
-                </a:solidFill>
-                <a:latin typeface="Calibri"/>
-              </a:rPr>
-              <a:t>  Cuando escribo Rocky en el buscador y presiono Enter</a:t>
-            </a:r>
-          </a:p>
-          <a:p>
-            <a:pPr>
-              <a:spcAft>
-                <a:spcPts val="400"/>
-              </a:spcAft>
-            </a:pPr>
-            <a:r>
-              <a:rPr sz="1400" b="0" i="0">
-                <a:solidFill>
-                  <a:srgbClr val="FFFFFF"/>
-                </a:solidFill>
-                <a:latin typeface="Calibri"/>
-              </a:rPr>
-              <a:t>  Entonces veo la ficha con especie, edad y las ultimas 3 consultas en &lt;= 3 s</a:t>
-            </a:r>
-          </a:p>
-          <a:p>
-            <a:pPr>
-              <a:spcAft>
-                <a:spcPts val="400"/>
-              </a:spcAft>
-            </a:pPr>
-            <a:r>
-              <a:rPr sz="1400" b="0" i="0">
-                <a:solidFill>
-                  <a:srgbClr val="FFFFFF"/>
-                </a:solidFill>
-                <a:latin typeface="Calibri"/>
-              </a:rPr>
-              <a:t/>
-            </a:r>
-          </a:p>
-          <a:p>
-            <a:pPr>
-              <a:spcAft>
-                <a:spcPts val="400"/>
-              </a:spcAft>
-            </a:pPr>
-            <a:r>
-              <a:rPr sz="1400" b="0" i="0">
-                <a:solidFill>
-                  <a:srgbClr val="FFFFFF"/>
-                </a:solidFill>
-                <a:latin typeface="Calibri"/>
-              </a:rPr>
-              <a:t>  Dado que escribo un nombre que no existe en el sistema</a:t>
-            </a:r>
-          </a:p>
-          <a:p>
-            <a:pPr>
-              <a:spcAft>
-                <a:spcPts val="400"/>
-              </a:spcAft>
-            </a:pPr>
-            <a:r>
-              <a:rPr sz="1400" b="0" i="0">
-                <a:solidFill>
-                  <a:srgbClr val="FFFFFF"/>
-                </a:solidFill>
-                <a:latin typeface="Calibri"/>
-              </a:rPr>
-              <a:t>  Cuando presiono Enter</a:t>
-            </a:r>
-          </a:p>
-          <a:p>
-            <a:pPr>
-              <a:spcAft>
-                <a:spcPts val="400"/>
-              </a:spcAft>
-            </a:pPr>
-            <a:r>
-              <a:rPr sz="1400" b="0" i="0">
-                <a:solidFill>
-                  <a:srgbClr val="FFFFFF"/>
-                </a:solidFill>
-                <a:latin typeface="Calibri"/>
-              </a:rPr>
-              <a:t>  Entonces veo 'No se encontro el paciente' y el boton Registrar nuevo</a:t>
-            </a:r>
-          </a:p>
-          <a:p>
-            <a:pPr>
-              <a:spcAft>
-                <a:spcPts val="400"/>
-              </a:spcAft>
-            </a:pPr>
-            <a:r>
-              <a:rPr sz="1400" b="0" i="0">
-                <a:solidFill>
-                  <a:srgbClr val="FFFFFF"/>
-                </a:solidFill>
-                <a:latin typeface="Calibri"/>
-              </a:rPr>
-              <a:t>Terminado = caso de uso + mockup + revision de un compañero + visto bueno del cliente</a:t>
-            </a:r>
-          </a:p>
-        </p:txBody>
-      </p:sp>
-      <p:sp>
-        <p:nvSpPr>
-          <p:cNvPr id="9" name="TextBox 8"/>
-          <p:cNvSpPr txBox="1"/>
-          <p:nvPr/>
-        </p:nvSpPr>
-        <p:spPr>
-          <a:xfrm>
-            <a:off x="457200" y="6080760"/>
-            <a:ext cx="11277295" cy="320040"/>
-          </a:xfrm>
-          <a:prstGeom prst="rect">
-            <a:avLst/>
-          </a:prstGeom>
-          <a:noFill/>
-        </p:spPr>
-        <p:txBody>
-          <a:bodyPr wrap="square">
-            <a:spAutoFit/>
-          </a:bodyPr>
-          <a:lstStyle/>
-          <a:p>
-            <a:pPr algn="ctr"/>
-            <a:r>
-              <a:rPr sz="1200" b="0" i="1">
-                <a:solidFill>
-                  <a:srgbClr val="666666"/>
-                </a:solidFill>
-                <a:latin typeface="Calibri"/>
-              </a:rPr>
-              <a:t>La historia dice quien la necesita y para que; los criterios dicen como se demuestra que quedo lista, incluido el camino que sale mal.</a:t>
-            </a:r>
-          </a:p>
-        </p:txBody>
-      </p:sp>
-      <p:sp>
-        <p:nvSpPr>
-          <p:cNvPr id="10" name="TextBox 9"/>
+              <a:rPr sz="2000" b="0" i="0">
+                <a:solidFill>
+                  <a:srgbClr val="333333"/>
+                </a:solidFill>
+                <a:latin typeface="Calibri"/>
+              </a:rPr>
+              <a:t>–   El estudiante que solo cursa esta materia trabaja con sprints igual que los demas: sus incrementos son mockups, casos de uso y diccionario de datos, y cierra con un prototipo navegable que se puede recorrer y criticar.</a:t>
+            </a:r>
+          </a:p>
+        </p:txBody>
+      </p:sp>
+      <p:sp>
+        <p:nvSpPr>
+          <p:cNvPr id="6" name="TextBox 5"/>
           <p:cNvSpPr txBox="1"/>
           <p:nvPr/>
         </p:nvSpPr>

--- a/Seminario de Sistemas/Clases/Clase 4 - Metodologias agiles/Presentacion.pptx
+++ b/Seminario de Sistemas/Clases/Clase 4 - Metodologias agiles/Presentacion.pptx
@@ -24,6 +24,8 @@
     <p:sldId id="272" r:id="rId23"/>
     <p:sldId id="273" r:id="rId24"/>
     <p:sldId id="274" r:id="rId25"/>
+    <p:sldId id="275" r:id="rId26"/>
+    <p:sldId id="276" r:id="rId27"/>
   </p:sldIdLst>
   <p:sldSz cx="12191695" cy="6858000" type="screen4x3"/>
   <p:notesSz cx="6858000" cy="9144000"/>
@@ -3624,7 +3626,7 @@
                 </a:solidFill>
                 <a:latin typeface="Calibri"/>
               </a:rPr>
-              <a:t>Historia de usuario de VetCare con criterios de aceptacion</a:t>
+              <a:t>El plan de sprints en Mermaid (gantt)</a:t>
             </a:r>
           </a:p>
         </p:txBody>
@@ -3638,7 +3640,7 @@
         <p:spPr>
           <a:xfrm>
             <a:off x="457200" y="1261872"/>
-            <a:ext cx="11277295" cy="4773168"/>
+            <a:ext cx="11277295" cy="5093208"/>
           </a:xfrm>
           <a:prstGeom prst="roundRect">
             <a:avLst>
@@ -3758,7 +3760,7 @@
         <p:spPr>
           <a:xfrm>
             <a:off x="777240" y="1719072"/>
-            <a:ext cx="10637215" cy="4133087"/>
+            <a:ext cx="10637215" cy="4453128"/>
           </a:xfrm>
           <a:prstGeom prst="rect">
             <a:avLst/>
@@ -3783,7 +3785,7 @@
                 </a:solidFill>
                 <a:latin typeface="Calibri"/>
               </a:rPr>
-              <a:t>HU-07  Buscar historia clinica</a:t>
+              <a:t>gantt</a:t>
             </a:r>
           </a:p>
           <a:p>
@@ -3799,7 +3801,7 @@
                 </a:solidFill>
                 <a:latin typeface="Calibri"/>
               </a:rPr>
-              <a:t>  Como veterinaria de la clinica Huellitas</a:t>
+              <a:t>  title Tres sprints de diseno de VetCare</a:t>
             </a:r>
           </a:p>
           <a:p>
@@ -3815,7 +3817,7 @@
                 </a:solidFill>
                 <a:latin typeface="Calibri"/>
               </a:rPr>
-              <a:t>  quiero buscar la historia clinica de una mascota por nombre o documento</a:t>
+              <a:t>  dateFormat YYYY-MM-DD</a:t>
             </a:r>
           </a:p>
           <a:p>
@@ -3831,7 +3833,7 @@
                 </a:solidFill>
                 <a:latin typeface="Calibri"/>
               </a:rPr>
-              <a:t>  para atender la consulta sin ir al archivador de papel.</a:t>
+              <a:t>  axisFormat %d/%m</a:t>
             </a:r>
           </a:p>
           <a:p>
@@ -3863,7 +3865,7 @@
                 </a:solidFill>
                 <a:latin typeface="Calibri"/>
               </a:rPr>
-              <a:t>Criterios de aceptacion</a:t>
+              <a:t>  section Sprint 1</a:t>
             </a:r>
           </a:p>
           <a:p>
@@ -3879,7 +3881,7 @@
                 </a:solidFill>
                 <a:latin typeface="Calibri"/>
               </a:rPr>
-              <a:t>  Dado que la mascota Rocky esta registrada con el dueño CC 1.144.556</a:t>
+              <a:t>  Modelo de dominio      :s1a, 2026-09-01, 7d</a:t>
             </a:r>
           </a:p>
           <a:p>
@@ -3895,7 +3897,7 @@
                 </a:solidFill>
                 <a:latin typeface="Calibri"/>
               </a:rPr>
-              <a:t>  Cuando escribo Rocky en el buscador y presiono Enter</a:t>
+              <a:t>  Casos de uso nucleo    :s1b, after s1a, 7d</a:t>
             </a:r>
           </a:p>
           <a:p>
@@ -3911,7 +3913,7 @@
                 </a:solidFill>
                 <a:latin typeface="Calibri"/>
               </a:rPr>
-              <a:t>  Entonces veo la ficha con especie, edad y las ultimas 3 consultas en &lt;= 3 s</a:t>
+              <a:t/>
             </a:r>
           </a:p>
           <a:p>
@@ -3927,7 +3929,7 @@
                 </a:solidFill>
                 <a:latin typeface="Calibri"/>
               </a:rPr>
-              <a:t/>
+              <a:t>  section Sprint 2</a:t>
             </a:r>
           </a:p>
           <a:p>
@@ -3943,7 +3945,7 @@
                 </a:solidFill>
                 <a:latin typeface="Calibri"/>
               </a:rPr>
-              <a:t>  Dado que escribo un nombre que no existe en el sistema</a:t>
+              <a:t>  Secuencia de agendar   :s2a, after s1b, 7d</a:t>
             </a:r>
           </a:p>
           <a:p>
@@ -3959,7 +3961,7 @@
                 </a:solidFill>
                 <a:latin typeface="Calibri"/>
               </a:rPr>
-              <a:t>  Cuando presiono Enter</a:t>
+              <a:t>  Wireframes principales :s2b, after s2a, 7d</a:t>
             </a:r>
           </a:p>
           <a:p>
@@ -3975,7 +3977,7 @@
                 </a:solidFill>
                 <a:latin typeface="Calibri"/>
               </a:rPr>
-              <a:t>  Entonces veo 'No se encontro el paciente' y el boton Registrar nuevo</a:t>
+              <a:t/>
             </a:r>
           </a:p>
           <a:p>
@@ -3991,7 +3993,23 @@
                 </a:solidFill>
                 <a:latin typeface="Calibri"/>
               </a:rPr>
-              <a:t>Terminado = caso de uso + mockup + revision de un compañero + visto bueno del cliente</a:t>
+              <a:t>  section Sprint 3</a:t>
+            </a:r>
+          </a:p>
+          <a:p>
+            <a:pPr>
+              <a:spcAft>
+                <a:spcPts val="400"/>
+              </a:spcAft>
+            </a:pPr>
+            <a:r>
+              <a:rPr sz="1400" b="0" i="0">
+                <a:solidFill>
+                  <a:srgbClr val="FFFFFF"/>
+                </a:solidFill>
+                <a:latin typeface="Calibri"/>
+              </a:rPr>
+              <a:t>  Consolidacion paquete  :s3a, after s2b, 7d</a:t>
             </a:r>
           </a:p>
         </p:txBody>
@@ -3999,41 +4017,6 @@
       <p:sp>
         <p:nvSpPr>
           <p:cNvPr id="9" name="TextBox 8"/>
-          <p:cNvSpPr txBox="1"/>
-          <p:nvPr/>
-        </p:nvSpPr>
-        <p:spPr>
-          <a:xfrm>
-            <a:off x="457200" y="6080760"/>
-            <a:ext cx="11277295" cy="320040"/>
-          </a:xfrm>
-          <a:prstGeom prst="rect">
-            <a:avLst/>
-          </a:prstGeom>
-          <a:noFill/>
-        </p:spPr>
-        <p:txBody>
-          <a:bodyPr wrap="square">
-            <a:spAutoFit/>
-          </a:bodyPr>
-          <a:lstStyle/>
-          <a:p>
-            <a:pPr algn="ctr"/>
-            <a:r>
-              <a:rPr sz="1200" b="0" i="1">
-                <a:solidFill>
-                  <a:srgbClr val="666666"/>
-                </a:solidFill>
-                <a:latin typeface="Calibri"/>
-              </a:rPr>
-              <a:t>La historia dice quien la necesita y para que; los criterios dicen como se demuestra que quedo lista, incluido el camino que sale mal.</a:t>
-            </a:r>
-          </a:p>
-        </p:txBody>
-      </p:sp>
-      <p:sp>
-        <p:nvSpPr>
-          <p:cNvPr id="10" name="TextBox 9"/>
           <p:cNvSpPr txBox="1"/>
           <p:nvPr/>
         </p:nvSpPr>
@@ -4207,21 +4190,141 @@
                 </a:solidFill>
                 <a:latin typeface="Calibri"/>
               </a:rPr>
-              <a:t>Demo del dia</a:t>
-            </a:r>
-          </a:p>
-        </p:txBody>
-      </p:sp>
-      <p:sp>
-        <p:nvSpPr>
-          <p:cNvPr id="5" name="TextBox 4"/>
+              <a:t>El tablero de flujo con limite de trabajo en curso</a:t>
+            </a:r>
+          </a:p>
+        </p:txBody>
+      </p:sp>
+      <p:sp>
+        <p:nvSpPr>
+          <p:cNvPr id="5" name="Rounded Rectangle 4"/>
+          <p:cNvSpPr/>
+          <p:nvPr/>
+        </p:nvSpPr>
+        <p:spPr>
+          <a:xfrm>
+            <a:off x="457200" y="1261872"/>
+            <a:ext cx="11277295" cy="5093208"/>
+          </a:xfrm>
+          <a:prstGeom prst="roundRect">
+            <a:avLst>
+              <a:gd name="adj" fmla="val 12000"/>
+            </a:avLst>
+          </a:prstGeom>
+          <a:solidFill>
+            <a:srgbClr val="1E2A38"/>
+          </a:solidFill>
+          <a:ln>
+            <a:noFill/>
+          </a:ln>
+        </p:spPr>
+        <p:style>
+          <a:lnRef idx="1">
+            <a:schemeClr val="accent1"/>
+          </a:lnRef>
+          <a:fillRef idx="3">
+            <a:schemeClr val="accent1"/>
+          </a:fillRef>
+          <a:effectRef idx="2">
+            <a:schemeClr val="accent1"/>
+          </a:effectRef>
+          <a:fontRef idx="minor">
+            <a:schemeClr val="lt1"/>
+          </a:fontRef>
+        </p:style>
+        <p:txBody>
+          <a:bodyPr rtlCol="0" anchor="ctr"/>
+          <a:lstStyle/>
+          <a:p>
+            <a:pPr algn="ctr"/>
+          </a:p>
+        </p:txBody>
+      </p:sp>
+      <p:sp>
+        <p:nvSpPr>
+          <p:cNvPr id="6" name="Rectangle 5"/>
+          <p:cNvSpPr/>
+          <p:nvPr/>
+        </p:nvSpPr>
+        <p:spPr>
+          <a:xfrm>
+            <a:off x="457200" y="1261872"/>
+            <a:ext cx="11277295" cy="320040"/>
+          </a:xfrm>
+          <a:prstGeom prst="rect">
+            <a:avLst/>
+          </a:prstGeom>
+          <a:solidFill>
+            <a:srgbClr val="095292"/>
+          </a:solidFill>
+          <a:ln>
+            <a:noFill/>
+          </a:ln>
+        </p:spPr>
+        <p:style>
+          <a:lnRef idx="1">
+            <a:schemeClr val="accent1"/>
+          </a:lnRef>
+          <a:fillRef idx="3">
+            <a:schemeClr val="accent1"/>
+          </a:fillRef>
+          <a:effectRef idx="2">
+            <a:schemeClr val="accent1"/>
+          </a:effectRef>
+          <a:fontRef idx="minor">
+            <a:schemeClr val="lt1"/>
+          </a:fontRef>
+        </p:style>
+        <p:txBody>
+          <a:bodyPr rtlCol="0" anchor="ctr"/>
+          <a:lstStyle/>
+          <a:p>
+            <a:pPr algn="ctr"/>
+          </a:p>
+        </p:txBody>
+      </p:sp>
+      <p:sp>
+        <p:nvSpPr>
+          <p:cNvPr id="7" name="TextBox 6"/>
           <p:cNvSpPr txBox="1"/>
           <p:nvPr/>
         </p:nvSpPr>
         <p:spPr>
           <a:xfrm>
-            <a:off x="457200" y="1170432"/>
-            <a:ext cx="11277295" cy="5230368"/>
+            <a:off x="685800" y="1307592"/>
+            <a:ext cx="10820095" cy="256032"/>
+          </a:xfrm>
+          <a:prstGeom prst="rect">
+            <a:avLst/>
+          </a:prstGeom>
+          <a:noFill/>
+        </p:spPr>
+        <p:txBody>
+          <a:bodyPr wrap="square" anchor="ctr"/>
+          <a:lstStyle/>
+          <a:p>
+            <a:r>
+              <a:rPr sz="1000" b="1" i="0">
+                <a:solidFill>
+                  <a:srgbClr val="269CCB"/>
+                </a:solidFill>
+                <a:latin typeface="Calibri"/>
+              </a:rPr>
+              <a:t>● ● ●</a:t>
+            </a:r>
+          </a:p>
+        </p:txBody>
+      </p:sp>
+      <p:sp>
+        <p:nvSpPr>
+          <p:cNvPr id="8" name="TextBox 7"/>
+          <p:cNvSpPr txBox="1"/>
+          <p:nvPr/>
+        </p:nvSpPr>
+        <p:spPr>
+          <a:xfrm>
+            <a:off x="777240" y="1719072"/>
+            <a:ext cx="5181447" cy="4453128"/>
           </a:xfrm>
           <a:prstGeom prst="rect">
             <a:avLst/>
@@ -4236,92 +4339,351 @@
           <a:p>
             <a:pPr>
               <a:spcAft>
-                <a:spcPts val="800"/>
+                <a:spcPts val="400"/>
               </a:spcAft>
             </a:pPr>
             <a:r>
-              <a:rPr sz="2000" b="0" i="0">
-                <a:solidFill>
-                  <a:srgbClr val="333333"/>
-                </a:solidFill>
-                <a:latin typeface="Calibri"/>
-              </a:rPr>
-              <a:t>–   </a:t>
-            </a:r>
-            <a:r>
-              <a:rPr sz="2000" b="1" i="0">
-                <a:solidFill>
-                  <a:srgbClr val="333333"/>
-                </a:solidFill>
-                <a:latin typeface="Calibri"/>
-              </a:rPr>
-              <a:t>Herramienta:</a:t>
-            </a:r>
-            <a:r>
-              <a:rPr sz="2000" b="0" i="0">
-                <a:solidFill>
-                  <a:srgbClr val="333333"/>
-                </a:solidFill>
-                <a:latin typeface="Calibri"/>
-              </a:rPr>
-              <a:t> draw.io · Excalidraw · Google Docs</a:t>
+              <a:rPr sz="1400" b="0" i="0">
+                <a:solidFill>
+                  <a:srgbClr val="FFFFFF"/>
+                </a:solidFill>
+                <a:latin typeface="Calibri"/>
+              </a:rPr>
+              <a:t>flowchart LR</a:t>
             </a:r>
           </a:p>
           <a:p>
             <a:pPr>
               <a:spcAft>
-                <a:spcPts val="800"/>
+                <a:spcPts val="400"/>
               </a:spcAft>
             </a:pPr>
             <a:r>
-              <a:rPr sz="2000" b="0" i="0">
-                <a:solidFill>
-                  <a:srgbClr val="333333"/>
-                </a:solidFill>
-                <a:latin typeface="Calibri"/>
-              </a:rPr>
-              <a:t>–   </a:t>
-            </a:r>
-            <a:r>
-              <a:rPr sz="2000" b="1" i="0">
-                <a:solidFill>
-                  <a:srgbClr val="333333"/>
-                </a:solidFill>
-                <a:latin typeface="Calibri"/>
-              </a:rPr>
-              <a:t>Demo:</a:t>
-            </a:r>
-            <a:r>
-              <a:rPr sz="2000" b="0" i="0">
-                <a:solidFill>
-                  <a:srgbClr val="333333"/>
-                </a:solidFill>
-                <a:latin typeface="Calibri"/>
-              </a:rPr>
-              <a:t> El docente arma en pantalla el tablero de VetCare, arrastra una tarjeta de 'Por hacer' a 'En revision del cliente' y muestra que pasa cuando se rompe el limite de trabajo en curso.</a:t>
+              <a:rPr sz="1400" b="0" i="0">
+                <a:solidFill>
+                  <a:srgbClr val="FFFFFF"/>
+                </a:solidFill>
+                <a:latin typeface="Calibri"/>
+              </a:rPr>
+              <a:t>  subgraph backlog[Backlog]</a:t>
             </a:r>
           </a:p>
           <a:p>
             <a:pPr>
               <a:spcAft>
-                <a:spcPts val="800"/>
+                <a:spcPts val="400"/>
               </a:spcAft>
             </a:pPr>
             <a:r>
-              <a:rPr sz="2000" b="0" i="0">
-                <a:solidFill>
-                  <a:srgbClr val="333333"/>
-                </a:solidFill>
-                <a:latin typeface="Calibri"/>
-              </a:rPr>
-              <a:t>–   Mismo dominio VetCare — no otro ejemplo. Aqui se diseña, no se programa.</a:t>
-            </a:r>
-          </a:p>
-        </p:txBody>
-      </p:sp>
-      <p:sp>
-        <p:nvSpPr>
-          <p:cNvPr id="6" name="TextBox 5"/>
+              <a:rPr sz="1400" b="0" i="0">
+                <a:solidFill>
+                  <a:srgbClr val="FFFFFF"/>
+                </a:solidFill>
+                <a:latin typeface="Calibri"/>
+              </a:rPr>
+              <a:t>    b1[HU-04]</a:t>
+            </a:r>
+          </a:p>
+          <a:p>
+            <a:pPr>
+              <a:spcAft>
+                <a:spcPts val="400"/>
+              </a:spcAft>
+            </a:pPr>
+            <a:r>
+              <a:rPr sz="1400" b="0" i="0">
+                <a:solidFill>
+                  <a:srgbClr val="FFFFFF"/>
+                </a:solidFill>
+                <a:latin typeface="Calibri"/>
+              </a:rPr>
+              <a:t>    b2[HU-05]</a:t>
+            </a:r>
+          </a:p>
+          <a:p>
+            <a:pPr>
+              <a:spcAft>
+                <a:spcPts val="400"/>
+              </a:spcAft>
+            </a:pPr>
+            <a:r>
+              <a:rPr sz="1400" b="0" i="0">
+                <a:solidFill>
+                  <a:srgbClr val="FFFFFF"/>
+                </a:solidFill>
+                <a:latin typeface="Calibri"/>
+              </a:rPr>
+              <a:t>  end</a:t>
+            </a:r>
+          </a:p>
+          <a:p>
+            <a:pPr>
+              <a:spcAft>
+                <a:spcPts val="400"/>
+              </a:spcAft>
+            </a:pPr>
+            <a:r>
+              <a:rPr sz="1400" b="0" i="0">
+                <a:solidFill>
+                  <a:srgbClr val="FFFFFF"/>
+                </a:solidFill>
+                <a:latin typeface="Calibri"/>
+              </a:rPr>
+              <a:t>  subgraph curso[En curso - LIMITE 2]</a:t>
+            </a:r>
+          </a:p>
+          <a:p>
+            <a:pPr>
+              <a:spcAft>
+                <a:spcPts val="400"/>
+              </a:spcAft>
+            </a:pPr>
+            <a:r>
+              <a:rPr sz="1400" b="0" i="0">
+                <a:solidFill>
+                  <a:srgbClr val="FFFFFF"/>
+                </a:solidFill>
+                <a:latin typeface="Calibri"/>
+              </a:rPr>
+              <a:t>    c1[HU-02]</a:t>
+            </a:r>
+          </a:p>
+          <a:p>
+            <a:pPr>
+              <a:spcAft>
+                <a:spcPts val="400"/>
+              </a:spcAft>
+            </a:pPr>
+            <a:r>
+              <a:rPr sz="1400" b="0" i="0">
+                <a:solidFill>
+                  <a:srgbClr val="FFFFFF"/>
+                </a:solidFill>
+                <a:latin typeface="Calibri"/>
+              </a:rPr>
+              <a:t>    c2[HU-03]</a:t>
+            </a:r>
+          </a:p>
+          <a:p>
+            <a:pPr>
+              <a:spcAft>
+                <a:spcPts val="400"/>
+              </a:spcAft>
+            </a:pPr>
+            <a:r>
+              <a:rPr sz="1400" b="0" i="0">
+                <a:solidFill>
+                  <a:srgbClr val="FFFFFF"/>
+                </a:solidFill>
+                <a:latin typeface="Calibri"/>
+              </a:rPr>
+              <a:t>  end</a:t>
+            </a:r>
+          </a:p>
+          <a:p>
+            <a:pPr>
+              <a:spcAft>
+                <a:spcPts val="400"/>
+              </a:spcAft>
+            </a:pPr>
+            <a:r>
+              <a:rPr sz="1400" b="0" i="0">
+                <a:solidFill>
+                  <a:srgbClr val="FFFFFF"/>
+                </a:solidFill>
+                <a:latin typeface="Calibri"/>
+              </a:rPr>
+              <a:t>  subgraph rev[En revision - LIMITE 1]</a:t>
+            </a:r>
+          </a:p>
+        </p:txBody>
+      </p:sp>
+      <p:sp>
+        <p:nvSpPr>
+          <p:cNvPr id="9" name="TextBox 8"/>
+          <p:cNvSpPr txBox="1"/>
+          <p:nvPr/>
+        </p:nvSpPr>
+        <p:spPr>
+          <a:xfrm>
+            <a:off x="6233007" y="1719072"/>
+            <a:ext cx="5181447" cy="4453128"/>
+          </a:xfrm>
+          <a:prstGeom prst="rect">
+            <a:avLst/>
+          </a:prstGeom>
+          <a:noFill/>
+        </p:spPr>
+        <p:txBody>
+          <a:bodyPr wrap="square">
+            <a:spAutoFit/>
+          </a:bodyPr>
+          <a:lstStyle/>
+          <a:p>
+            <a:pPr>
+              <a:spcAft>
+                <a:spcPts val="400"/>
+              </a:spcAft>
+            </a:pPr>
+            <a:r>
+              <a:rPr sz="1400" b="0" i="0">
+                <a:solidFill>
+                  <a:srgbClr val="FFFFFF"/>
+                </a:solidFill>
+                <a:latin typeface="Calibri"/>
+              </a:rPr>
+              <a:t>    r1[HU-01]</a:t>
+            </a:r>
+          </a:p>
+          <a:p>
+            <a:pPr>
+              <a:spcAft>
+                <a:spcPts val="400"/>
+              </a:spcAft>
+            </a:pPr>
+            <a:r>
+              <a:rPr sz="1400" b="0" i="0">
+                <a:solidFill>
+                  <a:srgbClr val="FFFFFF"/>
+                </a:solidFill>
+                <a:latin typeface="Calibri"/>
+              </a:rPr>
+              <a:t>  end</a:t>
+            </a:r>
+          </a:p>
+          <a:p>
+            <a:pPr>
+              <a:spcAft>
+                <a:spcPts val="400"/>
+              </a:spcAft>
+            </a:pPr>
+            <a:r>
+              <a:rPr sz="1400" b="0" i="0">
+                <a:solidFill>
+                  <a:srgbClr val="FFFFFF"/>
+                </a:solidFill>
+                <a:latin typeface="Calibri"/>
+              </a:rPr>
+              <a:t>  subgraph listo[Terminado]</a:t>
+            </a:r>
+          </a:p>
+          <a:p>
+            <a:pPr>
+              <a:spcAft>
+                <a:spcPts val="400"/>
+              </a:spcAft>
+            </a:pPr>
+            <a:r>
+              <a:rPr sz="1400" b="0" i="0">
+                <a:solidFill>
+                  <a:srgbClr val="FFFFFF"/>
+                </a:solidFill>
+                <a:latin typeface="Calibri"/>
+              </a:rPr>
+              <a:t>    l1[HU-00]</a:t>
+            </a:r>
+          </a:p>
+          <a:p>
+            <a:pPr>
+              <a:spcAft>
+                <a:spcPts val="400"/>
+              </a:spcAft>
+            </a:pPr>
+            <a:r>
+              <a:rPr sz="1400" b="0" i="0">
+                <a:solidFill>
+                  <a:srgbClr val="FFFFFF"/>
+                </a:solidFill>
+                <a:latin typeface="Calibri"/>
+              </a:rPr>
+              <a:t>  end</a:t>
+            </a:r>
+          </a:p>
+          <a:p>
+            <a:pPr>
+              <a:spcAft>
+                <a:spcPts val="400"/>
+              </a:spcAft>
+            </a:pPr>
+            <a:r>
+              <a:rPr sz="1400" b="0" i="0">
+                <a:solidFill>
+                  <a:srgbClr val="FFFFFF"/>
+                </a:solidFill>
+                <a:latin typeface="Calibri"/>
+              </a:rPr>
+              <a:t/>
+            </a:r>
+          </a:p>
+          <a:p>
+            <a:pPr>
+              <a:spcAft>
+                <a:spcPts val="400"/>
+              </a:spcAft>
+            </a:pPr>
+            <a:r>
+              <a:rPr sz="1400" b="0" i="0">
+                <a:solidFill>
+                  <a:srgbClr val="FFFFFF"/>
+                </a:solidFill>
+                <a:latin typeface="Calibri"/>
+              </a:rPr>
+              <a:t>  backlog --&gt; curso --&gt; rev --&gt; listo</a:t>
+            </a:r>
+          </a:p>
+          <a:p>
+            <a:pPr>
+              <a:spcAft>
+                <a:spcPts val="400"/>
+              </a:spcAft>
+            </a:pPr>
+            <a:r>
+              <a:rPr sz="1400" b="0" i="0">
+                <a:solidFill>
+                  <a:srgbClr val="FFFFFF"/>
+                </a:solidFill>
+                <a:latin typeface="Calibri"/>
+              </a:rPr>
+              <a:t/>
+            </a:r>
+          </a:p>
+          <a:p>
+            <a:pPr>
+              <a:spcAft>
+                <a:spcPts val="400"/>
+              </a:spcAft>
+            </a:pPr>
+            <a:r>
+              <a:rPr sz="1400" b="0" i="0">
+                <a:solidFill>
+                  <a:srgbClr val="FFFFFF"/>
+                </a:solidFill>
+                <a:latin typeface="Calibri"/>
+              </a:rPr>
+              <a:t>%% El LIMITE es lo que hace que el tablero sirva: sin el, todo esta</a:t>
+            </a:r>
+          </a:p>
+          <a:p>
+            <a:pPr>
+              <a:spcAft>
+                <a:spcPts val="400"/>
+              </a:spcAft>
+            </a:pPr>
+            <a:r>
+              <a:rPr sz="1400" b="0" i="0">
+                <a:solidFill>
+                  <a:srgbClr val="FFFFFF"/>
+                </a:solidFill>
+                <a:latin typeface="Calibri"/>
+              </a:rPr>
+              <a:t>%% «en curso» y nada termina. Para empezar HU-04 hay que cerrar una.</a:t>
+            </a:r>
+          </a:p>
+        </p:txBody>
+      </p:sp>
+      <p:sp>
+        <p:nvSpPr>
+          <p:cNvPr id="10" name="TextBox 9"/>
           <p:cNvSpPr txBox="1"/>
           <p:nvPr/>
         </p:nvSpPr>
@@ -4389,7 +4751,7 @@
         <p:spPr>
           <a:xfrm>
             <a:off x="0" y="0"/>
-            <a:ext cx="12191695" cy="1170432"/>
+            <a:ext cx="12191695" cy="960120"/>
           </a:xfrm>
           <a:prstGeom prst="rect">
             <a:avLst/>
@@ -4431,7 +4793,7 @@
         </p:nvSpPr>
         <p:spPr>
           <a:xfrm>
-            <a:off x="0" y="1170432"/>
+            <a:off x="0" y="960120"/>
             <a:ext cx="12191695" cy="41148"/>
           </a:xfrm>
           <a:prstGeom prst="rect">
@@ -4475,7 +4837,7 @@
         <p:spPr>
           <a:xfrm>
             <a:off x="457200" y="164592"/>
-            <a:ext cx="11277295" cy="384048"/>
+            <a:ext cx="11277295" cy="502920"/>
           </a:xfrm>
           <a:prstGeom prst="rect">
             <a:avLst/>
@@ -4495,55 +4857,21 @@
                 </a:solidFill>
                 <a:latin typeface="Calibri"/>
               </a:rPr>
-              <a:t>Herramientas de hoy</a:t>
-            </a:r>
-          </a:p>
-        </p:txBody>
-      </p:sp>
-      <p:sp>
-        <p:nvSpPr>
-          <p:cNvPr id="5" name="TextBox 4"/>
-          <p:cNvSpPr txBox="1"/>
-          <p:nvPr/>
-        </p:nvSpPr>
-        <p:spPr>
-          <a:xfrm>
-            <a:off x="457200" y="566928"/>
-            <a:ext cx="11277295" cy="411480"/>
-          </a:xfrm>
-          <a:prstGeom prst="rect">
-            <a:avLst/>
-          </a:prstGeom>
-          <a:noFill/>
-        </p:spPr>
-        <p:txBody>
-          <a:bodyPr wrap="square">
-            <a:spAutoFit/>
-          </a:bodyPr>
-          <a:lstStyle/>
-          <a:p>
-            <a:r>
-              <a:rPr sz="1400" b="0" i="0">
-                <a:solidFill>
-                  <a:srgbClr val="B8D8EE"/>
-                </a:solidFill>
-                <a:latin typeface="Calibri"/>
-              </a:rPr>
-              <a:t>Gratis · funcionan en el navegador</a:t>
-            </a:r>
-          </a:p>
-        </p:txBody>
-      </p:sp>
-      <p:sp>
-        <p:nvSpPr>
-          <p:cNvPr id="6" name="Rounded Rectangle 5"/>
+              <a:t>Historia de usuario de VetCare con criterios de aceptacion</a:t>
+            </a:r>
+          </a:p>
+        </p:txBody>
+      </p:sp>
+      <p:sp>
+        <p:nvSpPr>
+          <p:cNvPr id="5" name="Rounded Rectangle 4"/>
           <p:cNvSpPr/>
           <p:nvPr/>
         </p:nvSpPr>
         <p:spPr>
           <a:xfrm>
-            <a:off x="457200" y="1591056"/>
-            <a:ext cx="3624986" cy="2299716"/>
+            <a:off x="457200" y="1261872"/>
+            <a:ext cx="11277295" cy="4773168"/>
           </a:xfrm>
           <a:prstGeom prst="roundRect">
             <a:avLst>
@@ -4551,7 +4879,7 @@
             </a:avLst>
           </a:prstGeom>
           <a:solidFill>
-            <a:srgbClr val="F2F2F2"/>
+            <a:srgbClr val="1E2A38"/>
           </a:solidFill>
           <a:ln>
             <a:noFill/>
@@ -4581,14 +4909,14 @@
       </p:sp>
       <p:sp>
         <p:nvSpPr>
-          <p:cNvPr id="7" name="Rectangle 6"/>
+          <p:cNvPr id="6" name="Rectangle 5"/>
           <p:cNvSpPr/>
           <p:nvPr/>
         </p:nvSpPr>
         <p:spPr>
           <a:xfrm>
-            <a:off x="457200" y="1591056"/>
-            <a:ext cx="3624986" cy="64008"/>
+            <a:off x="457200" y="1261872"/>
+            <a:ext cx="11277295" cy="320040"/>
           </a:xfrm>
           <a:prstGeom prst="rect">
             <a:avLst/>
@@ -4624,735 +4952,321 @@
       </p:sp>
       <p:sp>
         <p:nvSpPr>
-          <p:cNvPr id="8" name="Rectangle 7"/>
-          <p:cNvSpPr/>
-          <p:nvPr/>
-        </p:nvSpPr>
-        <p:spPr>
-          <a:xfrm>
-            <a:off x="457200" y="1655064"/>
-            <a:ext cx="3624986" cy="27432"/>
-          </a:xfrm>
-          <a:prstGeom prst="rect">
-            <a:avLst/>
-          </a:prstGeom>
-          <a:solidFill>
-            <a:srgbClr val="FFD000"/>
-          </a:solidFill>
-          <a:ln>
-            <a:noFill/>
-          </a:ln>
-        </p:spPr>
-        <p:style>
-          <a:lnRef idx="1">
-            <a:schemeClr val="accent1"/>
-          </a:lnRef>
-          <a:fillRef idx="3">
-            <a:schemeClr val="accent1"/>
-          </a:fillRef>
-          <a:effectRef idx="2">
-            <a:schemeClr val="accent1"/>
-          </a:effectRef>
-          <a:fontRef idx="minor">
-            <a:schemeClr val="lt1"/>
-          </a:fontRef>
-        </p:style>
-        <p:txBody>
-          <a:bodyPr rtlCol="0" anchor="ctr"/>
+          <p:cNvPr id="7" name="TextBox 6"/>
+          <p:cNvSpPr txBox="1"/>
+          <p:nvPr/>
+        </p:nvSpPr>
+        <p:spPr>
+          <a:xfrm>
+            <a:off x="685800" y="1307592"/>
+            <a:ext cx="10820095" cy="256032"/>
+          </a:xfrm>
+          <a:prstGeom prst="rect">
+            <a:avLst/>
+          </a:prstGeom>
+          <a:noFill/>
+        </p:spPr>
+        <p:txBody>
+          <a:bodyPr wrap="square" anchor="ctr"/>
+          <a:lstStyle/>
+          <a:p>
+            <a:r>
+              <a:rPr sz="1000" b="1" i="0">
+                <a:solidFill>
+                  <a:srgbClr val="269CCB"/>
+                </a:solidFill>
+                <a:latin typeface="Calibri"/>
+              </a:rPr>
+              <a:t>● ● ●</a:t>
+            </a:r>
+          </a:p>
+        </p:txBody>
+      </p:sp>
+      <p:sp>
+        <p:nvSpPr>
+          <p:cNvPr id="8" name="TextBox 7"/>
+          <p:cNvSpPr txBox="1"/>
+          <p:nvPr/>
+        </p:nvSpPr>
+        <p:spPr>
+          <a:xfrm>
+            <a:off x="777240" y="1719072"/>
+            <a:ext cx="10637215" cy="4133087"/>
+          </a:xfrm>
+          <a:prstGeom prst="rect">
+            <a:avLst/>
+          </a:prstGeom>
+          <a:noFill/>
+        </p:spPr>
+        <p:txBody>
+          <a:bodyPr wrap="square">
+            <a:spAutoFit/>
+          </a:bodyPr>
+          <a:lstStyle/>
+          <a:p>
+            <a:pPr>
+              <a:spcAft>
+                <a:spcPts val="400"/>
+              </a:spcAft>
+            </a:pPr>
+            <a:r>
+              <a:rPr sz="1400" b="0" i="0">
+                <a:solidFill>
+                  <a:srgbClr val="FFFFFF"/>
+                </a:solidFill>
+                <a:latin typeface="Calibri"/>
+              </a:rPr>
+              <a:t>HU-07  Buscar historia clinica</a:t>
+            </a:r>
+          </a:p>
+          <a:p>
+            <a:pPr>
+              <a:spcAft>
+                <a:spcPts val="400"/>
+              </a:spcAft>
+            </a:pPr>
+            <a:r>
+              <a:rPr sz="1400" b="0" i="0">
+                <a:solidFill>
+                  <a:srgbClr val="FFFFFF"/>
+                </a:solidFill>
+                <a:latin typeface="Calibri"/>
+              </a:rPr>
+              <a:t>  Como veterinaria de la clinica Huellitas</a:t>
+            </a:r>
+          </a:p>
+          <a:p>
+            <a:pPr>
+              <a:spcAft>
+                <a:spcPts val="400"/>
+              </a:spcAft>
+            </a:pPr>
+            <a:r>
+              <a:rPr sz="1400" b="0" i="0">
+                <a:solidFill>
+                  <a:srgbClr val="FFFFFF"/>
+                </a:solidFill>
+                <a:latin typeface="Calibri"/>
+              </a:rPr>
+              <a:t>  quiero buscar la historia clinica de una mascota por nombre o documento</a:t>
+            </a:r>
+          </a:p>
+          <a:p>
+            <a:pPr>
+              <a:spcAft>
+                <a:spcPts val="400"/>
+              </a:spcAft>
+            </a:pPr>
+            <a:r>
+              <a:rPr sz="1400" b="0" i="0">
+                <a:solidFill>
+                  <a:srgbClr val="FFFFFF"/>
+                </a:solidFill>
+                <a:latin typeface="Calibri"/>
+              </a:rPr>
+              <a:t>  para atender la consulta sin ir al archivador de papel.</a:t>
+            </a:r>
+          </a:p>
+          <a:p>
+            <a:pPr>
+              <a:spcAft>
+                <a:spcPts val="400"/>
+              </a:spcAft>
+            </a:pPr>
+            <a:r>
+              <a:rPr sz="1400" b="0" i="0">
+                <a:solidFill>
+                  <a:srgbClr val="FFFFFF"/>
+                </a:solidFill>
+                <a:latin typeface="Calibri"/>
+              </a:rPr>
+              <a:t/>
+            </a:r>
+          </a:p>
+          <a:p>
+            <a:pPr>
+              <a:spcAft>
+                <a:spcPts val="400"/>
+              </a:spcAft>
+            </a:pPr>
+            <a:r>
+              <a:rPr sz="1400" b="0" i="0">
+                <a:solidFill>
+                  <a:srgbClr val="FFFFFF"/>
+                </a:solidFill>
+                <a:latin typeface="Calibri"/>
+              </a:rPr>
+              <a:t>Criterios de aceptacion</a:t>
+            </a:r>
+          </a:p>
+          <a:p>
+            <a:pPr>
+              <a:spcAft>
+                <a:spcPts val="400"/>
+              </a:spcAft>
+            </a:pPr>
+            <a:r>
+              <a:rPr sz="1400" b="0" i="0">
+                <a:solidFill>
+                  <a:srgbClr val="FFFFFF"/>
+                </a:solidFill>
+                <a:latin typeface="Calibri"/>
+              </a:rPr>
+              <a:t>  Dado que la mascota Rocky esta registrada con el dueño CC 1.144.556</a:t>
+            </a:r>
+          </a:p>
+          <a:p>
+            <a:pPr>
+              <a:spcAft>
+                <a:spcPts val="400"/>
+              </a:spcAft>
+            </a:pPr>
+            <a:r>
+              <a:rPr sz="1400" b="0" i="0">
+                <a:solidFill>
+                  <a:srgbClr val="FFFFFF"/>
+                </a:solidFill>
+                <a:latin typeface="Calibri"/>
+              </a:rPr>
+              <a:t>  Cuando escribo Rocky en el buscador y presiono Enter</a:t>
+            </a:r>
+          </a:p>
+          <a:p>
+            <a:pPr>
+              <a:spcAft>
+                <a:spcPts val="400"/>
+              </a:spcAft>
+            </a:pPr>
+            <a:r>
+              <a:rPr sz="1400" b="0" i="0">
+                <a:solidFill>
+                  <a:srgbClr val="FFFFFF"/>
+                </a:solidFill>
+                <a:latin typeface="Calibri"/>
+              </a:rPr>
+              <a:t>  Entonces veo la ficha con especie, edad y las ultimas 3 consultas en &lt;= 3 s</a:t>
+            </a:r>
+          </a:p>
+          <a:p>
+            <a:pPr>
+              <a:spcAft>
+                <a:spcPts val="400"/>
+              </a:spcAft>
+            </a:pPr>
+            <a:r>
+              <a:rPr sz="1400" b="0" i="0">
+                <a:solidFill>
+                  <a:srgbClr val="FFFFFF"/>
+                </a:solidFill>
+                <a:latin typeface="Calibri"/>
+              </a:rPr>
+              <a:t/>
+            </a:r>
+          </a:p>
+          <a:p>
+            <a:pPr>
+              <a:spcAft>
+                <a:spcPts val="400"/>
+              </a:spcAft>
+            </a:pPr>
+            <a:r>
+              <a:rPr sz="1400" b="0" i="0">
+                <a:solidFill>
+                  <a:srgbClr val="FFFFFF"/>
+                </a:solidFill>
+                <a:latin typeface="Calibri"/>
+              </a:rPr>
+              <a:t>  Dado que escribo un nombre que no existe en el sistema</a:t>
+            </a:r>
+          </a:p>
+          <a:p>
+            <a:pPr>
+              <a:spcAft>
+                <a:spcPts val="400"/>
+              </a:spcAft>
+            </a:pPr>
+            <a:r>
+              <a:rPr sz="1400" b="0" i="0">
+                <a:solidFill>
+                  <a:srgbClr val="FFFFFF"/>
+                </a:solidFill>
+                <a:latin typeface="Calibri"/>
+              </a:rPr>
+              <a:t>  Cuando presiono Enter</a:t>
+            </a:r>
+          </a:p>
+          <a:p>
+            <a:pPr>
+              <a:spcAft>
+                <a:spcPts val="400"/>
+              </a:spcAft>
+            </a:pPr>
+            <a:r>
+              <a:rPr sz="1400" b="0" i="0">
+                <a:solidFill>
+                  <a:srgbClr val="FFFFFF"/>
+                </a:solidFill>
+                <a:latin typeface="Calibri"/>
+              </a:rPr>
+              <a:t>  Entonces veo 'No se encontro el paciente' y el boton Registrar nuevo</a:t>
+            </a:r>
+          </a:p>
+          <a:p>
+            <a:pPr>
+              <a:spcAft>
+                <a:spcPts val="400"/>
+              </a:spcAft>
+            </a:pPr>
+            <a:r>
+              <a:rPr sz="1400" b="0" i="0">
+                <a:solidFill>
+                  <a:srgbClr val="FFFFFF"/>
+                </a:solidFill>
+                <a:latin typeface="Calibri"/>
+              </a:rPr>
+              <a:t>Terminado = caso de uso + mockup + revision de un compañero + visto bueno del cliente</a:t>
+            </a:r>
+          </a:p>
+        </p:txBody>
+      </p:sp>
+      <p:sp>
+        <p:nvSpPr>
+          <p:cNvPr id="9" name="TextBox 8"/>
+          <p:cNvSpPr txBox="1"/>
+          <p:nvPr/>
+        </p:nvSpPr>
+        <p:spPr>
+          <a:xfrm>
+            <a:off x="457200" y="6080760"/>
+            <a:ext cx="11277295" cy="320040"/>
+          </a:xfrm>
+          <a:prstGeom prst="rect">
+            <a:avLst/>
+          </a:prstGeom>
+          <a:noFill/>
+        </p:spPr>
+        <p:txBody>
+          <a:bodyPr wrap="square">
+            <a:spAutoFit/>
+          </a:bodyPr>
           <a:lstStyle/>
           <a:p>
             <a:pPr algn="ctr"/>
-          </a:p>
-        </p:txBody>
-      </p:sp>
-      <p:pic>
-        <p:nvPicPr>
-          <p:cNvPr id="9" name="Picture 8" descr="drawio.png"/>
-          <p:cNvPicPr>
-            <a:picLocks noChangeAspect="1"/>
-          </p:cNvPicPr>
-          <p:nvPr/>
-        </p:nvPicPr>
-        <p:blipFill>
-          <a:blip r:embed="rId2"/>
-          <a:stretch>
-            <a:fillRect/>
-          </a:stretch>
-        </p:blipFill>
-        <p:spPr>
-          <a:xfrm>
-            <a:off x="1659331" y="1847087"/>
-            <a:ext cx="1220724" cy="1220724"/>
-          </a:xfrm>
-          <a:prstGeom prst="rect">
-            <a:avLst/>
-          </a:prstGeom>
-        </p:spPr>
-      </p:pic>
+            <a:r>
+              <a:rPr sz="1200" b="0" i="1">
+                <a:solidFill>
+                  <a:srgbClr val="666666"/>
+                </a:solidFill>
+                <a:latin typeface="Calibri"/>
+              </a:rPr>
+              <a:t>La historia dice quien la necesita y para que; los criterios dicen como se demuestra que quedo lista, incluido el camino que sale mal.</a:t>
+            </a:r>
+          </a:p>
+        </p:txBody>
+      </p:sp>
       <p:sp>
         <p:nvSpPr>
           <p:cNvPr id="10" name="TextBox 9"/>
-          <p:cNvSpPr txBox="1"/>
-          <p:nvPr/>
-        </p:nvSpPr>
-        <p:spPr>
-          <a:xfrm>
-            <a:off x="530352" y="3159251"/>
-            <a:ext cx="3478682" cy="621792"/>
-          </a:xfrm>
-          <a:prstGeom prst="rect">
-            <a:avLst/>
-          </a:prstGeom>
-          <a:noFill/>
-        </p:spPr>
-        <p:txBody>
-          <a:bodyPr wrap="square" anchor="t"/>
-          <a:lstStyle/>
-          <a:p>
-            <a:pPr algn="ctr"/>
-            <a:r>
-              <a:rPr sz="1300" b="1" i="0">
-                <a:solidFill>
-                  <a:srgbClr val="095292"/>
-                </a:solidFill>
-                <a:latin typeface="Calibri"/>
-              </a:rPr>
-              <a:t>Draw.Io</a:t>
-            </a:r>
-          </a:p>
-          <a:p>
-            <a:pPr algn="ctr">
-              <a:spcBef>
-                <a:spcPts val="200"/>
-              </a:spcBef>
-            </a:pPr>
-            <a:r>
-              <a:rPr sz="1000" b="0" i="0">
-                <a:solidFill>
-                  <a:srgbClr val="666666"/>
-                </a:solidFill>
-                <a:latin typeface="Calibri"/>
-              </a:rPr>
-              <a:t>Diagramas UML y de contexto</a:t>
-            </a:r>
-          </a:p>
-        </p:txBody>
-      </p:sp>
-      <p:sp>
-        <p:nvSpPr>
-          <p:cNvPr id="11" name="Rounded Rectangle 10"/>
-          <p:cNvSpPr/>
-          <p:nvPr/>
-        </p:nvSpPr>
-        <p:spPr>
-          <a:xfrm>
-            <a:off x="4283354" y="1591056"/>
-            <a:ext cx="3624986" cy="2299716"/>
-          </a:xfrm>
-          <a:prstGeom prst="roundRect">
-            <a:avLst>
-              <a:gd name="adj" fmla="val 12000"/>
-            </a:avLst>
-          </a:prstGeom>
-          <a:solidFill>
-            <a:srgbClr val="F2F2F2"/>
-          </a:solidFill>
-          <a:ln>
-            <a:noFill/>
-          </a:ln>
-        </p:spPr>
-        <p:style>
-          <a:lnRef idx="1">
-            <a:schemeClr val="accent1"/>
-          </a:lnRef>
-          <a:fillRef idx="3">
-            <a:schemeClr val="accent1"/>
-          </a:fillRef>
-          <a:effectRef idx="2">
-            <a:schemeClr val="accent1"/>
-          </a:effectRef>
-          <a:fontRef idx="minor">
-            <a:schemeClr val="lt1"/>
-          </a:fontRef>
-        </p:style>
-        <p:txBody>
-          <a:bodyPr rtlCol="0" anchor="ctr"/>
-          <a:lstStyle/>
-          <a:p>
-            <a:pPr algn="ctr"/>
-          </a:p>
-        </p:txBody>
-      </p:sp>
-      <p:sp>
-        <p:nvSpPr>
-          <p:cNvPr id="12" name="Rectangle 11"/>
-          <p:cNvSpPr/>
-          <p:nvPr/>
-        </p:nvSpPr>
-        <p:spPr>
-          <a:xfrm>
-            <a:off x="4283354" y="1591056"/>
-            <a:ext cx="3624986" cy="64008"/>
-          </a:xfrm>
-          <a:prstGeom prst="rect">
-            <a:avLst/>
-          </a:prstGeom>
-          <a:solidFill>
-            <a:srgbClr val="095292"/>
-          </a:solidFill>
-          <a:ln>
-            <a:noFill/>
-          </a:ln>
-        </p:spPr>
-        <p:style>
-          <a:lnRef idx="1">
-            <a:schemeClr val="accent1"/>
-          </a:lnRef>
-          <a:fillRef idx="3">
-            <a:schemeClr val="accent1"/>
-          </a:fillRef>
-          <a:effectRef idx="2">
-            <a:schemeClr val="accent1"/>
-          </a:effectRef>
-          <a:fontRef idx="minor">
-            <a:schemeClr val="lt1"/>
-          </a:fontRef>
-        </p:style>
-        <p:txBody>
-          <a:bodyPr rtlCol="0" anchor="ctr"/>
-          <a:lstStyle/>
-          <a:p>
-            <a:pPr algn="ctr"/>
-          </a:p>
-        </p:txBody>
-      </p:sp>
-      <p:sp>
-        <p:nvSpPr>
-          <p:cNvPr id="13" name="Rectangle 12"/>
-          <p:cNvSpPr/>
-          <p:nvPr/>
-        </p:nvSpPr>
-        <p:spPr>
-          <a:xfrm>
-            <a:off x="4283354" y="1655064"/>
-            <a:ext cx="3624986" cy="27432"/>
-          </a:xfrm>
-          <a:prstGeom prst="rect">
-            <a:avLst/>
-          </a:prstGeom>
-          <a:solidFill>
-            <a:srgbClr val="FFD000"/>
-          </a:solidFill>
-          <a:ln>
-            <a:noFill/>
-          </a:ln>
-        </p:spPr>
-        <p:style>
-          <a:lnRef idx="1">
-            <a:schemeClr val="accent1"/>
-          </a:lnRef>
-          <a:fillRef idx="3">
-            <a:schemeClr val="accent1"/>
-          </a:fillRef>
-          <a:effectRef idx="2">
-            <a:schemeClr val="accent1"/>
-          </a:effectRef>
-          <a:fontRef idx="minor">
-            <a:schemeClr val="lt1"/>
-          </a:fontRef>
-        </p:style>
-        <p:txBody>
-          <a:bodyPr rtlCol="0" anchor="ctr"/>
-          <a:lstStyle/>
-          <a:p>
-            <a:pPr algn="ctr"/>
-          </a:p>
-        </p:txBody>
-      </p:sp>
-      <p:pic>
-        <p:nvPicPr>
-          <p:cNvPr id="14" name="Picture 13" descr="excalidraw.png"/>
-          <p:cNvPicPr>
-            <a:picLocks noChangeAspect="1"/>
-          </p:cNvPicPr>
-          <p:nvPr/>
-        </p:nvPicPr>
-        <p:blipFill>
-          <a:blip r:embed="rId3"/>
-          <a:stretch>
-            <a:fillRect/>
-          </a:stretch>
-        </p:blipFill>
-        <p:spPr>
-          <a:xfrm>
-            <a:off x="5485485" y="1847087"/>
-            <a:ext cx="1220724" cy="1220724"/>
-          </a:xfrm>
-          <a:prstGeom prst="rect">
-            <a:avLst/>
-          </a:prstGeom>
-        </p:spPr>
-      </p:pic>
-      <p:sp>
-        <p:nvSpPr>
-          <p:cNvPr id="15" name="TextBox 14"/>
-          <p:cNvSpPr txBox="1"/>
-          <p:nvPr/>
-        </p:nvSpPr>
-        <p:spPr>
-          <a:xfrm>
-            <a:off x="4356506" y="3159251"/>
-            <a:ext cx="3478682" cy="621792"/>
-          </a:xfrm>
-          <a:prstGeom prst="rect">
-            <a:avLst/>
-          </a:prstGeom>
-          <a:noFill/>
-        </p:spPr>
-        <p:txBody>
-          <a:bodyPr wrap="square" anchor="t"/>
-          <a:lstStyle/>
-          <a:p>
-            <a:pPr algn="ctr"/>
-            <a:r>
-              <a:rPr sz="1300" b="1" i="0">
-                <a:solidFill>
-                  <a:srgbClr val="095292"/>
-                </a:solidFill>
-                <a:latin typeface="Calibri"/>
-              </a:rPr>
-              <a:t>Excalidraw</a:t>
-            </a:r>
-          </a:p>
-          <a:p>
-            <a:pPr algn="ctr">
-              <a:spcBef>
-                <a:spcPts val="200"/>
-              </a:spcBef>
-            </a:pPr>
-            <a:r>
-              <a:rPr sz="1000" b="0" i="0">
-                <a:solidFill>
-                  <a:srgbClr val="666666"/>
-                </a:solidFill>
-                <a:latin typeface="Calibri"/>
-              </a:rPr>
-              <a:t>Bocetos rapidos a mano alzada</a:t>
-            </a:r>
-          </a:p>
-        </p:txBody>
-      </p:sp>
-      <p:sp>
-        <p:nvSpPr>
-          <p:cNvPr id="16" name="Rounded Rectangle 15"/>
-          <p:cNvSpPr/>
-          <p:nvPr/>
-        </p:nvSpPr>
-        <p:spPr>
-          <a:xfrm>
-            <a:off x="8109508" y="1591056"/>
-            <a:ext cx="3624986" cy="2299716"/>
-          </a:xfrm>
-          <a:prstGeom prst="roundRect">
-            <a:avLst>
-              <a:gd name="adj" fmla="val 12000"/>
-            </a:avLst>
-          </a:prstGeom>
-          <a:solidFill>
-            <a:srgbClr val="F2F2F2"/>
-          </a:solidFill>
-          <a:ln>
-            <a:noFill/>
-          </a:ln>
-        </p:spPr>
-        <p:style>
-          <a:lnRef idx="1">
-            <a:schemeClr val="accent1"/>
-          </a:lnRef>
-          <a:fillRef idx="3">
-            <a:schemeClr val="accent1"/>
-          </a:fillRef>
-          <a:effectRef idx="2">
-            <a:schemeClr val="accent1"/>
-          </a:effectRef>
-          <a:fontRef idx="minor">
-            <a:schemeClr val="lt1"/>
-          </a:fontRef>
-        </p:style>
-        <p:txBody>
-          <a:bodyPr rtlCol="0" anchor="ctr"/>
-          <a:lstStyle/>
-          <a:p>
-            <a:pPr algn="ctr"/>
-          </a:p>
-        </p:txBody>
-      </p:sp>
-      <p:sp>
-        <p:nvSpPr>
-          <p:cNvPr id="17" name="Rectangle 16"/>
-          <p:cNvSpPr/>
-          <p:nvPr/>
-        </p:nvSpPr>
-        <p:spPr>
-          <a:xfrm>
-            <a:off x="8109508" y="1591056"/>
-            <a:ext cx="3624986" cy="64008"/>
-          </a:xfrm>
-          <a:prstGeom prst="rect">
-            <a:avLst/>
-          </a:prstGeom>
-          <a:solidFill>
-            <a:srgbClr val="095292"/>
-          </a:solidFill>
-          <a:ln>
-            <a:noFill/>
-          </a:ln>
-        </p:spPr>
-        <p:style>
-          <a:lnRef idx="1">
-            <a:schemeClr val="accent1"/>
-          </a:lnRef>
-          <a:fillRef idx="3">
-            <a:schemeClr val="accent1"/>
-          </a:fillRef>
-          <a:effectRef idx="2">
-            <a:schemeClr val="accent1"/>
-          </a:effectRef>
-          <a:fontRef idx="minor">
-            <a:schemeClr val="lt1"/>
-          </a:fontRef>
-        </p:style>
-        <p:txBody>
-          <a:bodyPr rtlCol="0" anchor="ctr"/>
-          <a:lstStyle/>
-          <a:p>
-            <a:pPr algn="ctr"/>
-          </a:p>
-        </p:txBody>
-      </p:sp>
-      <p:sp>
-        <p:nvSpPr>
-          <p:cNvPr id="18" name="Rectangle 17"/>
-          <p:cNvSpPr/>
-          <p:nvPr/>
-        </p:nvSpPr>
-        <p:spPr>
-          <a:xfrm>
-            <a:off x="8109508" y="1655064"/>
-            <a:ext cx="3624986" cy="27432"/>
-          </a:xfrm>
-          <a:prstGeom prst="rect">
-            <a:avLst/>
-          </a:prstGeom>
-          <a:solidFill>
-            <a:srgbClr val="FFD000"/>
-          </a:solidFill>
-          <a:ln>
-            <a:noFill/>
-          </a:ln>
-        </p:spPr>
-        <p:style>
-          <a:lnRef idx="1">
-            <a:schemeClr val="accent1"/>
-          </a:lnRef>
-          <a:fillRef idx="3">
-            <a:schemeClr val="accent1"/>
-          </a:fillRef>
-          <a:effectRef idx="2">
-            <a:schemeClr val="accent1"/>
-          </a:effectRef>
-          <a:fontRef idx="minor">
-            <a:schemeClr val="lt1"/>
-          </a:fontRef>
-        </p:style>
-        <p:txBody>
-          <a:bodyPr rtlCol="0" anchor="ctr"/>
-          <a:lstStyle/>
-          <a:p>
-            <a:pPr algn="ctr"/>
-          </a:p>
-        </p:txBody>
-      </p:sp>
-      <p:pic>
-        <p:nvPicPr>
-          <p:cNvPr id="19" name="Picture 18" descr="google_docs.png"/>
-          <p:cNvPicPr>
-            <a:picLocks noChangeAspect="1"/>
-          </p:cNvPicPr>
-          <p:nvPr/>
-        </p:nvPicPr>
-        <p:blipFill>
-          <a:blip r:embed="rId4"/>
-          <a:stretch>
-            <a:fillRect/>
-          </a:stretch>
-        </p:blipFill>
-        <p:spPr>
-          <a:xfrm>
-            <a:off x="9311640" y="1847087"/>
-            <a:ext cx="1220724" cy="1220724"/>
-          </a:xfrm>
-          <a:prstGeom prst="rect">
-            <a:avLst/>
-          </a:prstGeom>
-        </p:spPr>
-      </p:pic>
-      <p:sp>
-        <p:nvSpPr>
-          <p:cNvPr id="20" name="TextBox 19"/>
-          <p:cNvSpPr txBox="1"/>
-          <p:nvPr/>
-        </p:nvSpPr>
-        <p:spPr>
-          <a:xfrm>
-            <a:off x="8182660" y="3159251"/>
-            <a:ext cx="3478682" cy="621792"/>
-          </a:xfrm>
-          <a:prstGeom prst="rect">
-            <a:avLst/>
-          </a:prstGeom>
-          <a:noFill/>
-        </p:spPr>
-        <p:txBody>
-          <a:bodyPr wrap="square" anchor="t"/>
-          <a:lstStyle/>
-          <a:p>
-            <a:pPr algn="ctr"/>
-            <a:r>
-              <a:rPr sz="1300" b="1" i="0">
-                <a:solidFill>
-                  <a:srgbClr val="095292"/>
-                </a:solidFill>
-                <a:latin typeface="Calibri"/>
-              </a:rPr>
-              <a:t>google docs</a:t>
-            </a:r>
-          </a:p>
-          <a:p>
-            <a:pPr algn="ctr">
-              <a:spcBef>
-                <a:spcPts val="200"/>
-              </a:spcBef>
-            </a:pPr>
-            <a:r>
-              <a:rPr sz="1000" b="0" i="0">
-                <a:solidFill>
-                  <a:srgbClr val="666666"/>
-                </a:solidFill>
-                <a:latin typeface="Calibri"/>
-              </a:rPr>
-              <a:t>Documentos del paquete de diseño</a:t>
-            </a:r>
-          </a:p>
-        </p:txBody>
-      </p:sp>
-      <p:sp>
-        <p:nvSpPr>
-          <p:cNvPr id="21" name="Rounded Rectangle 20"/>
-          <p:cNvSpPr/>
-          <p:nvPr/>
-        </p:nvSpPr>
-        <p:spPr>
-          <a:xfrm>
-            <a:off x="4283354" y="4055364"/>
-            <a:ext cx="3624986" cy="2299716"/>
-          </a:xfrm>
-          <a:prstGeom prst="roundRect">
-            <a:avLst>
-              <a:gd name="adj" fmla="val 12000"/>
-            </a:avLst>
-          </a:prstGeom>
-          <a:solidFill>
-            <a:srgbClr val="F2F2F2"/>
-          </a:solidFill>
-          <a:ln>
-            <a:noFill/>
-          </a:ln>
-        </p:spPr>
-        <p:style>
-          <a:lnRef idx="1">
-            <a:schemeClr val="accent1"/>
-          </a:lnRef>
-          <a:fillRef idx="3">
-            <a:schemeClr val="accent1"/>
-          </a:fillRef>
-          <a:effectRef idx="2">
-            <a:schemeClr val="accent1"/>
-          </a:effectRef>
-          <a:fontRef idx="minor">
-            <a:schemeClr val="lt1"/>
-          </a:fontRef>
-        </p:style>
-        <p:txBody>
-          <a:bodyPr rtlCol="0" anchor="ctr"/>
-          <a:lstStyle/>
-          <a:p>
-            <a:pPr algn="ctr"/>
-          </a:p>
-        </p:txBody>
-      </p:sp>
-      <p:sp>
-        <p:nvSpPr>
-          <p:cNvPr id="22" name="Rectangle 21"/>
-          <p:cNvSpPr/>
-          <p:nvPr/>
-        </p:nvSpPr>
-        <p:spPr>
-          <a:xfrm>
-            <a:off x="4283354" y="4055364"/>
-            <a:ext cx="3624986" cy="64008"/>
-          </a:xfrm>
-          <a:prstGeom prst="rect">
-            <a:avLst/>
-          </a:prstGeom>
-          <a:solidFill>
-            <a:srgbClr val="095292"/>
-          </a:solidFill>
-          <a:ln>
-            <a:noFill/>
-          </a:ln>
-        </p:spPr>
-        <p:style>
-          <a:lnRef idx="1">
-            <a:schemeClr val="accent1"/>
-          </a:lnRef>
-          <a:fillRef idx="3">
-            <a:schemeClr val="accent1"/>
-          </a:fillRef>
-          <a:effectRef idx="2">
-            <a:schemeClr val="accent1"/>
-          </a:effectRef>
-          <a:fontRef idx="minor">
-            <a:schemeClr val="lt1"/>
-          </a:fontRef>
-        </p:style>
-        <p:txBody>
-          <a:bodyPr rtlCol="0" anchor="ctr"/>
-          <a:lstStyle/>
-          <a:p>
-            <a:pPr algn="ctr"/>
-          </a:p>
-        </p:txBody>
-      </p:sp>
-      <p:sp>
-        <p:nvSpPr>
-          <p:cNvPr id="23" name="Rectangle 22"/>
-          <p:cNvSpPr/>
-          <p:nvPr/>
-        </p:nvSpPr>
-        <p:spPr>
-          <a:xfrm>
-            <a:off x="4283354" y="4119372"/>
-            <a:ext cx="3624986" cy="27432"/>
-          </a:xfrm>
-          <a:prstGeom prst="rect">
-            <a:avLst/>
-          </a:prstGeom>
-          <a:solidFill>
-            <a:srgbClr val="FFD000"/>
-          </a:solidFill>
-          <a:ln>
-            <a:noFill/>
-          </a:ln>
-        </p:spPr>
-        <p:style>
-          <a:lnRef idx="1">
-            <a:schemeClr val="accent1"/>
-          </a:lnRef>
-          <a:fillRef idx="3">
-            <a:schemeClr val="accent1"/>
-          </a:fillRef>
-          <a:effectRef idx="2">
-            <a:schemeClr val="accent1"/>
-          </a:effectRef>
-          <a:fontRef idx="minor">
-            <a:schemeClr val="lt1"/>
-          </a:fontRef>
-        </p:style>
-        <p:txBody>
-          <a:bodyPr rtlCol="0" anchor="ctr"/>
-          <a:lstStyle/>
-          <a:p>
-            <a:pPr algn="ctr"/>
-          </a:p>
-        </p:txBody>
-      </p:sp>
-      <p:pic>
-        <p:nvPicPr>
-          <p:cNvPr id="24" name="Picture 23" descr="examlab.png"/>
-          <p:cNvPicPr>
-            <a:picLocks noChangeAspect="1"/>
-          </p:cNvPicPr>
-          <p:nvPr/>
-        </p:nvPicPr>
-        <p:blipFill>
-          <a:blip r:embed="rId5"/>
-          <a:stretch>
-            <a:fillRect/>
-          </a:stretch>
-        </p:blipFill>
-        <p:spPr>
-          <a:xfrm>
-            <a:off x="5485485" y="4311396"/>
-            <a:ext cx="1220724" cy="1220724"/>
-          </a:xfrm>
-          <a:prstGeom prst="rect">
-            <a:avLst/>
-          </a:prstGeom>
-        </p:spPr>
-      </p:pic>
-      <p:sp>
-        <p:nvSpPr>
-          <p:cNvPr id="25" name="TextBox 24"/>
-          <p:cNvSpPr txBox="1"/>
-          <p:nvPr/>
-        </p:nvSpPr>
-        <p:spPr>
-          <a:xfrm>
-            <a:off x="4356506" y="5623560"/>
-            <a:ext cx="3478682" cy="621792"/>
-          </a:xfrm>
-          <a:prstGeom prst="rect">
-            <a:avLst/>
-          </a:prstGeom>
-          <a:noFill/>
-        </p:spPr>
-        <p:txBody>
-          <a:bodyPr wrap="square" anchor="t"/>
-          <a:lstStyle/>
-          <a:p>
-            <a:pPr algn="ctr"/>
-            <a:r>
-              <a:rPr sz="1300" b="1" i="0">
-                <a:solidFill>
-                  <a:srgbClr val="095292"/>
-                </a:solidFill>
-                <a:latin typeface="Calibri"/>
-              </a:rPr>
-              <a:t>la plataforma del curso</a:t>
-            </a:r>
-          </a:p>
-          <a:p>
-            <a:pPr algn="ctr">
-              <a:spcBef>
-                <a:spcPts val="200"/>
-              </a:spcBef>
-            </a:pPr>
-            <a:r>
-              <a:rPr sz="1000" b="0" i="0">
-                <a:solidFill>
-                  <a:srgbClr val="666666"/>
-                </a:solidFill>
-                <a:latin typeface="Calibri"/>
-              </a:rPr>
-              <a:t>Entrega del taller · en la fecha que indique el docente</a:t>
-            </a:r>
-          </a:p>
-        </p:txBody>
-      </p:sp>
-      <p:sp>
-        <p:nvSpPr>
-          <p:cNvPr id="26" name="TextBox 25"/>
           <p:cNvSpPr txBox="1"/>
           <p:nvPr/>
         </p:nvSpPr>
@@ -5526,7 +5440,7 @@
                 </a:solidFill>
                 <a:latin typeface="Calibri"/>
               </a:rPr>
-              <a:t>Taller PI — por que importa</a:t>
+              <a:t>Demo del dia</a:t>
             </a:r>
           </a:p>
         </p:txBody>
@@ -5574,7 +5488,7 @@
                 </a:solidFill>
                 <a:latin typeface="Calibri"/>
               </a:rPr>
-              <a:t>Por que importa al PI:</a:t>
+              <a:t>Herramienta:</a:t>
             </a:r>
             <a:r>
               <a:rPr sz="2000" b="0" i="0">
@@ -5583,7 +5497,7 @@
                 </a:solidFill>
                 <a:latin typeface="Calibri"/>
               </a:rPr>
-              <a:t> el semestre completo de VetCare se va a organizar como sprints, y lo que se defina hoy en el backlog es literalmente el orden en que se van a producir los planos.</a:t>
+              <a:t> draw.io · Excalidraw · Google Docs</a:t>
             </a:r>
           </a:p>
           <a:p>
@@ -5599,7 +5513,25 @@
                 </a:solidFill>
                 <a:latin typeface="Calibri"/>
               </a:rPr>
-              <a:t>–   Ya vimos el enfoque tradicional y su documentacion formal; hoy se ve el otro extremo del espectro y se aprende a decidir cual parte de VetCare conviene tratar de cada forma.</a:t>
+              <a:t>–   </a:t>
+            </a:r>
+            <a:r>
+              <a:rPr sz="2000" b="1" i="0">
+                <a:solidFill>
+                  <a:srgbClr val="333333"/>
+                </a:solidFill>
+                <a:latin typeface="Calibri"/>
+              </a:rPr>
+              <a:t>Demo:</a:t>
+            </a:r>
+            <a:r>
+              <a:rPr sz="2000" b="0" i="0">
+                <a:solidFill>
+                  <a:srgbClr val="333333"/>
+                </a:solidFill>
+                <a:latin typeface="Calibri"/>
+              </a:rPr>
+              <a:t> El docente arma en pantalla el tablero de VetCare, arrastra una tarjeta de 'Por hacer' a 'En revision del cliente' y muestra que pasa cuando se rompe el limite de trabajo en curso.</a:t>
             </a:r>
           </a:p>
           <a:p>
@@ -5615,7 +5547,7 @@
                 </a:solidFill>
                 <a:latin typeface="Calibri"/>
               </a:rPr>
-              <a:t>–   Aqui se aclara de una vez el malentendido mas costoso del curso: agil no es la excusa para no documentar, y en esta asignatura la documentacion de diseño es justamente el incremento entregable.</a:t>
+              <a:t>–   Mismo dominio VetCare — no otro ejemplo. Aqui se diseña, no se programa.</a:t>
             </a:r>
           </a:p>
         </p:txBody>
@@ -5690,7 +5622,7 @@
         <p:spPr>
           <a:xfrm>
             <a:off x="0" y="0"/>
-            <a:ext cx="12191695" cy="960120"/>
+            <a:ext cx="12191695" cy="1170432"/>
           </a:xfrm>
           <a:prstGeom prst="rect">
             <a:avLst/>
@@ -5732,7 +5664,7 @@
         </p:nvSpPr>
         <p:spPr>
           <a:xfrm>
-            <a:off x="0" y="960120"/>
+            <a:off x="0" y="1170432"/>
             <a:ext cx="12191695" cy="41148"/>
           </a:xfrm>
           <a:prstGeom prst="rect">
@@ -5776,7 +5708,7 @@
         <p:spPr>
           <a:xfrm>
             <a:off x="457200" y="164592"/>
-            <a:ext cx="11277295" cy="502920"/>
+            <a:ext cx="11277295" cy="384048"/>
           </a:xfrm>
           <a:prstGeom prst="rect">
             <a:avLst/>
@@ -5796,7 +5728,7 @@
                 </a:solidFill>
                 <a:latin typeface="Calibri"/>
               </a:rPr>
-              <a:t>Taller PI — punto de partida</a:t>
+              <a:t>Herramientas de hoy</a:t>
             </a:r>
           </a:p>
         </p:txBody>
@@ -5809,8 +5741,8 @@
         </p:nvSpPr>
         <p:spPr>
           <a:xfrm>
-            <a:off x="457200" y="1170432"/>
-            <a:ext cx="11277295" cy="5230368"/>
+            <a:off x="457200" y="566928"/>
+            <a:ext cx="11277295" cy="411480"/>
           </a:xfrm>
           <a:prstGeom prst="rect">
             <a:avLst/>
@@ -5823,58 +5755,837 @@
           </a:bodyPr>
           <a:lstStyle/>
           <a:p>
-            <a:pPr>
-              <a:spcAft>
-                <a:spcPts val="800"/>
-              </a:spcAft>
+            <a:r>
+              <a:rPr sz="1400" b="0" i="0">
+                <a:solidFill>
+                  <a:srgbClr val="B8D8EE"/>
+                </a:solidFill>
+                <a:latin typeface="Calibri"/>
+              </a:rPr>
+              <a:t>Gratis · funcionan en el navegador</a:t>
+            </a:r>
+          </a:p>
+        </p:txBody>
+      </p:sp>
+      <p:sp>
+        <p:nvSpPr>
+          <p:cNvPr id="6" name="Rounded Rectangle 5"/>
+          <p:cNvSpPr/>
+          <p:nvPr/>
+        </p:nvSpPr>
+        <p:spPr>
+          <a:xfrm>
+            <a:off x="457200" y="1591056"/>
+            <a:ext cx="3624986" cy="2299716"/>
+          </a:xfrm>
+          <a:prstGeom prst="roundRect">
+            <a:avLst>
+              <a:gd name="adj" fmla="val 12000"/>
+            </a:avLst>
+          </a:prstGeom>
+          <a:solidFill>
+            <a:srgbClr val="F2F2F2"/>
+          </a:solidFill>
+          <a:ln>
+            <a:noFill/>
+          </a:ln>
+        </p:spPr>
+        <p:style>
+          <a:lnRef idx="1">
+            <a:schemeClr val="accent1"/>
+          </a:lnRef>
+          <a:fillRef idx="3">
+            <a:schemeClr val="accent1"/>
+          </a:fillRef>
+          <a:effectRef idx="2">
+            <a:schemeClr val="accent1"/>
+          </a:effectRef>
+          <a:fontRef idx="minor">
+            <a:schemeClr val="lt1"/>
+          </a:fontRef>
+        </p:style>
+        <p:txBody>
+          <a:bodyPr rtlCol="0" anchor="ctr"/>
+          <a:lstStyle/>
+          <a:p>
+            <a:pPr algn="ctr"/>
+          </a:p>
+        </p:txBody>
+      </p:sp>
+      <p:sp>
+        <p:nvSpPr>
+          <p:cNvPr id="7" name="Rectangle 6"/>
+          <p:cNvSpPr/>
+          <p:nvPr/>
+        </p:nvSpPr>
+        <p:spPr>
+          <a:xfrm>
+            <a:off x="457200" y="1591056"/>
+            <a:ext cx="3624986" cy="64008"/>
+          </a:xfrm>
+          <a:prstGeom prst="rect">
+            <a:avLst/>
+          </a:prstGeom>
+          <a:solidFill>
+            <a:srgbClr val="095292"/>
+          </a:solidFill>
+          <a:ln>
+            <a:noFill/>
+          </a:ln>
+        </p:spPr>
+        <p:style>
+          <a:lnRef idx="1">
+            <a:schemeClr val="accent1"/>
+          </a:lnRef>
+          <a:fillRef idx="3">
+            <a:schemeClr val="accent1"/>
+          </a:fillRef>
+          <a:effectRef idx="2">
+            <a:schemeClr val="accent1"/>
+          </a:effectRef>
+          <a:fontRef idx="minor">
+            <a:schemeClr val="lt1"/>
+          </a:fontRef>
+        </p:style>
+        <p:txBody>
+          <a:bodyPr rtlCol="0" anchor="ctr"/>
+          <a:lstStyle/>
+          <a:p>
+            <a:pPr algn="ctr"/>
+          </a:p>
+        </p:txBody>
+      </p:sp>
+      <p:sp>
+        <p:nvSpPr>
+          <p:cNvPr id="8" name="Rectangle 7"/>
+          <p:cNvSpPr/>
+          <p:nvPr/>
+        </p:nvSpPr>
+        <p:spPr>
+          <a:xfrm>
+            <a:off x="457200" y="1655064"/>
+            <a:ext cx="3624986" cy="27432"/>
+          </a:xfrm>
+          <a:prstGeom prst="rect">
+            <a:avLst/>
+          </a:prstGeom>
+          <a:solidFill>
+            <a:srgbClr val="FFD000"/>
+          </a:solidFill>
+          <a:ln>
+            <a:noFill/>
+          </a:ln>
+        </p:spPr>
+        <p:style>
+          <a:lnRef idx="1">
+            <a:schemeClr val="accent1"/>
+          </a:lnRef>
+          <a:fillRef idx="3">
+            <a:schemeClr val="accent1"/>
+          </a:fillRef>
+          <a:effectRef idx="2">
+            <a:schemeClr val="accent1"/>
+          </a:effectRef>
+          <a:fontRef idx="minor">
+            <a:schemeClr val="lt1"/>
+          </a:fontRef>
+        </p:style>
+        <p:txBody>
+          <a:bodyPr rtlCol="0" anchor="ctr"/>
+          <a:lstStyle/>
+          <a:p>
+            <a:pPr algn="ctr"/>
+          </a:p>
+        </p:txBody>
+      </p:sp>
+      <p:pic>
+        <p:nvPicPr>
+          <p:cNvPr id="9" name="Picture 8" descr="drawio.png"/>
+          <p:cNvPicPr>
+            <a:picLocks noChangeAspect="1"/>
+          </p:cNvPicPr>
+          <p:nvPr/>
+        </p:nvPicPr>
+        <p:blipFill>
+          <a:blip r:embed="rId2"/>
+          <a:stretch>
+            <a:fillRect/>
+          </a:stretch>
+        </p:blipFill>
+        <p:spPr>
+          <a:xfrm>
+            <a:off x="1659331" y="1847087"/>
+            <a:ext cx="1220724" cy="1220724"/>
+          </a:xfrm>
+          <a:prstGeom prst="rect">
+            <a:avLst/>
+          </a:prstGeom>
+        </p:spPr>
+      </p:pic>
+      <p:sp>
+        <p:nvSpPr>
+          <p:cNvPr id="10" name="TextBox 9"/>
+          <p:cNvSpPr txBox="1"/>
+          <p:nvPr/>
+        </p:nvSpPr>
+        <p:spPr>
+          <a:xfrm>
+            <a:off x="530352" y="3159251"/>
+            <a:ext cx="3478682" cy="621792"/>
+          </a:xfrm>
+          <a:prstGeom prst="rect">
+            <a:avLst/>
+          </a:prstGeom>
+          <a:noFill/>
+        </p:spPr>
+        <p:txBody>
+          <a:bodyPr wrap="square" anchor="t"/>
+          <a:lstStyle/>
+          <a:p>
+            <a:pPr algn="ctr"/>
+            <a:r>
+              <a:rPr sz="1300" b="1" i="0">
+                <a:solidFill>
+                  <a:srgbClr val="095292"/>
+                </a:solidFill>
+                <a:latin typeface="Calibri"/>
+              </a:rPr>
+              <a:t>Draw.Io</a:t>
+            </a:r>
+          </a:p>
+          <a:p>
+            <a:pPr algn="ctr">
+              <a:spcBef>
+                <a:spcPts val="200"/>
+              </a:spcBef>
             </a:pPr>
             <a:r>
-              <a:rPr sz="2000" b="0" i="0">
-                <a:solidFill>
-                  <a:srgbClr val="333333"/>
-                </a:solidFill>
-                <a:latin typeface="Calibri"/>
-              </a:rPr>
-              <a:t>–   El equipo tiene requisitos escritos y un mapa de fases, pero no tiene ningun orden de trabajo: todos quieren empezar por la pantalla que les parece mas bonita.</a:t>
-            </a:r>
-          </a:p>
-          <a:p>
-            <a:pPr>
-              <a:spcAft>
-                <a:spcPts val="800"/>
-              </a:spcAft>
+              <a:rPr sz="1000" b="0" i="0">
+                <a:solidFill>
+                  <a:srgbClr val="666666"/>
+                </a:solidFill>
+                <a:latin typeface="Calibri"/>
+              </a:rPr>
+              <a:t>Diagramas UML y de contexto</a:t>
+            </a:r>
+          </a:p>
+        </p:txBody>
+      </p:sp>
+      <p:sp>
+        <p:nvSpPr>
+          <p:cNvPr id="11" name="Rounded Rectangle 10"/>
+          <p:cNvSpPr/>
+          <p:nvPr/>
+        </p:nvSpPr>
+        <p:spPr>
+          <a:xfrm>
+            <a:off x="4283354" y="1591056"/>
+            <a:ext cx="3624986" cy="2299716"/>
+          </a:xfrm>
+          <a:prstGeom prst="roundRect">
+            <a:avLst>
+              <a:gd name="adj" fmla="val 12000"/>
+            </a:avLst>
+          </a:prstGeom>
+          <a:solidFill>
+            <a:srgbClr val="F2F2F2"/>
+          </a:solidFill>
+          <a:ln>
+            <a:noFill/>
+          </a:ln>
+        </p:spPr>
+        <p:style>
+          <a:lnRef idx="1">
+            <a:schemeClr val="accent1"/>
+          </a:lnRef>
+          <a:fillRef idx="3">
+            <a:schemeClr val="accent1"/>
+          </a:fillRef>
+          <a:effectRef idx="2">
+            <a:schemeClr val="accent1"/>
+          </a:effectRef>
+          <a:fontRef idx="minor">
+            <a:schemeClr val="lt1"/>
+          </a:fontRef>
+        </p:style>
+        <p:txBody>
+          <a:bodyPr rtlCol="0" anchor="ctr"/>
+          <a:lstStyle/>
+          <a:p>
+            <a:pPr algn="ctr"/>
+          </a:p>
+        </p:txBody>
+      </p:sp>
+      <p:sp>
+        <p:nvSpPr>
+          <p:cNvPr id="12" name="Rectangle 11"/>
+          <p:cNvSpPr/>
+          <p:nvPr/>
+        </p:nvSpPr>
+        <p:spPr>
+          <a:xfrm>
+            <a:off x="4283354" y="1591056"/>
+            <a:ext cx="3624986" cy="64008"/>
+          </a:xfrm>
+          <a:prstGeom prst="rect">
+            <a:avLst/>
+          </a:prstGeom>
+          <a:solidFill>
+            <a:srgbClr val="095292"/>
+          </a:solidFill>
+          <a:ln>
+            <a:noFill/>
+          </a:ln>
+        </p:spPr>
+        <p:style>
+          <a:lnRef idx="1">
+            <a:schemeClr val="accent1"/>
+          </a:lnRef>
+          <a:fillRef idx="3">
+            <a:schemeClr val="accent1"/>
+          </a:fillRef>
+          <a:effectRef idx="2">
+            <a:schemeClr val="accent1"/>
+          </a:effectRef>
+          <a:fontRef idx="minor">
+            <a:schemeClr val="lt1"/>
+          </a:fontRef>
+        </p:style>
+        <p:txBody>
+          <a:bodyPr rtlCol="0" anchor="ctr"/>
+          <a:lstStyle/>
+          <a:p>
+            <a:pPr algn="ctr"/>
+          </a:p>
+        </p:txBody>
+      </p:sp>
+      <p:sp>
+        <p:nvSpPr>
+          <p:cNvPr id="13" name="Rectangle 12"/>
+          <p:cNvSpPr/>
+          <p:nvPr/>
+        </p:nvSpPr>
+        <p:spPr>
+          <a:xfrm>
+            <a:off x="4283354" y="1655064"/>
+            <a:ext cx="3624986" cy="27432"/>
+          </a:xfrm>
+          <a:prstGeom prst="rect">
+            <a:avLst/>
+          </a:prstGeom>
+          <a:solidFill>
+            <a:srgbClr val="FFD000"/>
+          </a:solidFill>
+          <a:ln>
+            <a:noFill/>
+          </a:ln>
+        </p:spPr>
+        <p:style>
+          <a:lnRef idx="1">
+            <a:schemeClr val="accent1"/>
+          </a:lnRef>
+          <a:fillRef idx="3">
+            <a:schemeClr val="accent1"/>
+          </a:fillRef>
+          <a:effectRef idx="2">
+            <a:schemeClr val="accent1"/>
+          </a:effectRef>
+          <a:fontRef idx="minor">
+            <a:schemeClr val="lt1"/>
+          </a:fontRef>
+        </p:style>
+        <p:txBody>
+          <a:bodyPr rtlCol="0" anchor="ctr"/>
+          <a:lstStyle/>
+          <a:p>
+            <a:pPr algn="ctr"/>
+          </a:p>
+        </p:txBody>
+      </p:sp>
+      <p:pic>
+        <p:nvPicPr>
+          <p:cNvPr id="14" name="Picture 13" descr="excalidraw.png"/>
+          <p:cNvPicPr>
+            <a:picLocks noChangeAspect="1"/>
+          </p:cNvPicPr>
+          <p:nvPr/>
+        </p:nvPicPr>
+        <p:blipFill>
+          <a:blip r:embed="rId3"/>
+          <a:stretch>
+            <a:fillRect/>
+          </a:stretch>
+        </p:blipFill>
+        <p:spPr>
+          <a:xfrm>
+            <a:off x="5485485" y="1847087"/>
+            <a:ext cx="1220724" cy="1220724"/>
+          </a:xfrm>
+          <a:prstGeom prst="rect">
+            <a:avLst/>
+          </a:prstGeom>
+        </p:spPr>
+      </p:pic>
+      <p:sp>
+        <p:nvSpPr>
+          <p:cNvPr id="15" name="TextBox 14"/>
+          <p:cNvSpPr txBox="1"/>
+          <p:nvPr/>
+        </p:nvSpPr>
+        <p:spPr>
+          <a:xfrm>
+            <a:off x="4356506" y="3159251"/>
+            <a:ext cx="3478682" cy="621792"/>
+          </a:xfrm>
+          <a:prstGeom prst="rect">
+            <a:avLst/>
+          </a:prstGeom>
+          <a:noFill/>
+        </p:spPr>
+        <p:txBody>
+          <a:bodyPr wrap="square" anchor="t"/>
+          <a:lstStyle/>
+          <a:p>
+            <a:pPr algn="ctr"/>
+            <a:r>
+              <a:rPr sz="1300" b="1" i="0">
+                <a:solidFill>
+                  <a:srgbClr val="095292"/>
+                </a:solidFill>
+                <a:latin typeface="Calibri"/>
+              </a:rPr>
+              <a:t>Excalidraw</a:t>
+            </a:r>
+          </a:p>
+          <a:p>
+            <a:pPr algn="ctr">
+              <a:spcBef>
+                <a:spcPts val="200"/>
+              </a:spcBef>
             </a:pPr>
             <a:r>
-              <a:rPr sz="2000" b="0" i="0">
-                <a:solidFill>
-                  <a:srgbClr val="333333"/>
-                </a:solidFill>
-                <a:latin typeface="Calibri"/>
-              </a:rPr>
-              <a:t>–   La administradora de Huellitas puede dar retroalimentacion corta cada dos o tres semanas, pero no puede sentarse a leer un documento de ochenta paginas.</a:t>
-            </a:r>
-          </a:p>
-          <a:p>
-            <a:pPr>
-              <a:spcAft>
-                <a:spcPts val="800"/>
-              </a:spcAft>
+              <a:rPr sz="1000" b="0" i="0">
+                <a:solidFill>
+                  <a:srgbClr val="666666"/>
+                </a:solidFill>
+                <a:latin typeface="Calibri"/>
+              </a:rPr>
+              <a:t>Bocetos rapidos a mano alzada</a:t>
+            </a:r>
+          </a:p>
+        </p:txBody>
+      </p:sp>
+      <p:sp>
+        <p:nvSpPr>
+          <p:cNvPr id="16" name="Rounded Rectangle 15"/>
+          <p:cNvSpPr/>
+          <p:nvPr/>
+        </p:nvSpPr>
+        <p:spPr>
+          <a:xfrm>
+            <a:off x="8109508" y="1591056"/>
+            <a:ext cx="3624986" cy="2299716"/>
+          </a:xfrm>
+          <a:prstGeom prst="roundRect">
+            <a:avLst>
+              <a:gd name="adj" fmla="val 12000"/>
+            </a:avLst>
+          </a:prstGeom>
+          <a:solidFill>
+            <a:srgbClr val="F2F2F2"/>
+          </a:solidFill>
+          <a:ln>
+            <a:noFill/>
+          </a:ln>
+        </p:spPr>
+        <p:style>
+          <a:lnRef idx="1">
+            <a:schemeClr val="accent1"/>
+          </a:lnRef>
+          <a:fillRef idx="3">
+            <a:schemeClr val="accent1"/>
+          </a:fillRef>
+          <a:effectRef idx="2">
+            <a:schemeClr val="accent1"/>
+          </a:effectRef>
+          <a:fontRef idx="minor">
+            <a:schemeClr val="lt1"/>
+          </a:fontRef>
+        </p:style>
+        <p:txBody>
+          <a:bodyPr rtlCol="0" anchor="ctr"/>
+          <a:lstStyle/>
+          <a:p>
+            <a:pPr algn="ctr"/>
+          </a:p>
+        </p:txBody>
+      </p:sp>
+      <p:sp>
+        <p:nvSpPr>
+          <p:cNvPr id="17" name="Rectangle 16"/>
+          <p:cNvSpPr/>
+          <p:nvPr/>
+        </p:nvSpPr>
+        <p:spPr>
+          <a:xfrm>
+            <a:off x="8109508" y="1591056"/>
+            <a:ext cx="3624986" cy="64008"/>
+          </a:xfrm>
+          <a:prstGeom prst="rect">
+            <a:avLst/>
+          </a:prstGeom>
+          <a:solidFill>
+            <a:srgbClr val="095292"/>
+          </a:solidFill>
+          <a:ln>
+            <a:noFill/>
+          </a:ln>
+        </p:spPr>
+        <p:style>
+          <a:lnRef idx="1">
+            <a:schemeClr val="accent1"/>
+          </a:lnRef>
+          <a:fillRef idx="3">
+            <a:schemeClr val="accent1"/>
+          </a:fillRef>
+          <a:effectRef idx="2">
+            <a:schemeClr val="accent1"/>
+          </a:effectRef>
+          <a:fontRef idx="minor">
+            <a:schemeClr val="lt1"/>
+          </a:fontRef>
+        </p:style>
+        <p:txBody>
+          <a:bodyPr rtlCol="0" anchor="ctr"/>
+          <a:lstStyle/>
+          <a:p>
+            <a:pPr algn="ctr"/>
+          </a:p>
+        </p:txBody>
+      </p:sp>
+      <p:sp>
+        <p:nvSpPr>
+          <p:cNvPr id="18" name="Rectangle 17"/>
+          <p:cNvSpPr/>
+          <p:nvPr/>
+        </p:nvSpPr>
+        <p:spPr>
+          <a:xfrm>
+            <a:off x="8109508" y="1655064"/>
+            <a:ext cx="3624986" cy="27432"/>
+          </a:xfrm>
+          <a:prstGeom prst="rect">
+            <a:avLst/>
+          </a:prstGeom>
+          <a:solidFill>
+            <a:srgbClr val="FFD000"/>
+          </a:solidFill>
+          <a:ln>
+            <a:noFill/>
+          </a:ln>
+        </p:spPr>
+        <p:style>
+          <a:lnRef idx="1">
+            <a:schemeClr val="accent1"/>
+          </a:lnRef>
+          <a:fillRef idx="3">
+            <a:schemeClr val="accent1"/>
+          </a:fillRef>
+          <a:effectRef idx="2">
+            <a:schemeClr val="accent1"/>
+          </a:effectRef>
+          <a:fontRef idx="minor">
+            <a:schemeClr val="lt1"/>
+          </a:fontRef>
+        </p:style>
+        <p:txBody>
+          <a:bodyPr rtlCol="0" anchor="ctr"/>
+          <a:lstStyle/>
+          <a:p>
+            <a:pPr algn="ctr"/>
+          </a:p>
+        </p:txBody>
+      </p:sp>
+      <p:pic>
+        <p:nvPicPr>
+          <p:cNvPr id="19" name="Picture 18" descr="google_docs.png"/>
+          <p:cNvPicPr>
+            <a:picLocks noChangeAspect="1"/>
+          </p:cNvPicPr>
+          <p:nvPr/>
+        </p:nvPicPr>
+        <p:blipFill>
+          <a:blip r:embed="rId4"/>
+          <a:stretch>
+            <a:fillRect/>
+          </a:stretch>
+        </p:blipFill>
+        <p:spPr>
+          <a:xfrm>
+            <a:off x="9311640" y="1847087"/>
+            <a:ext cx="1220724" cy="1220724"/>
+          </a:xfrm>
+          <a:prstGeom prst="rect">
+            <a:avLst/>
+          </a:prstGeom>
+        </p:spPr>
+      </p:pic>
+      <p:sp>
+        <p:nvSpPr>
+          <p:cNvPr id="20" name="TextBox 19"/>
+          <p:cNvSpPr txBox="1"/>
+          <p:nvPr/>
+        </p:nvSpPr>
+        <p:spPr>
+          <a:xfrm>
+            <a:off x="8182660" y="3159251"/>
+            <a:ext cx="3478682" cy="621792"/>
+          </a:xfrm>
+          <a:prstGeom prst="rect">
+            <a:avLst/>
+          </a:prstGeom>
+          <a:noFill/>
+        </p:spPr>
+        <p:txBody>
+          <a:bodyPr wrap="square" anchor="t"/>
+          <a:lstStyle/>
+          <a:p>
+            <a:pPr algn="ctr"/>
+            <a:r>
+              <a:rPr sz="1300" b="1" i="0">
+                <a:solidFill>
+                  <a:srgbClr val="095292"/>
+                </a:solidFill>
+                <a:latin typeface="Calibri"/>
+              </a:rPr>
+              <a:t>google docs</a:t>
+            </a:r>
+          </a:p>
+          <a:p>
+            <a:pPr algn="ctr">
+              <a:spcBef>
+                <a:spcPts val="200"/>
+              </a:spcBef>
             </a:pPr>
             <a:r>
-              <a:rPr sz="2000" b="0" i="0">
-                <a:solidFill>
-                  <a:srgbClr val="333333"/>
-                </a:solidFill>
-                <a:latin typeface="Calibri"/>
-              </a:rPr>
-              <a:t>–   En el grupo circula la idea de que agil significa no escribir nada y que 'ya lo iremos viendo sobre la marcha'.</a:t>
-            </a:r>
-          </a:p>
-        </p:txBody>
-      </p:sp>
-      <p:sp>
-        <p:nvSpPr>
-          <p:cNvPr id="6" name="TextBox 5"/>
+              <a:rPr sz="1000" b="0" i="0">
+                <a:solidFill>
+                  <a:srgbClr val="666666"/>
+                </a:solidFill>
+                <a:latin typeface="Calibri"/>
+              </a:rPr>
+              <a:t>Documentos del paquete de diseño</a:t>
+            </a:r>
+          </a:p>
+        </p:txBody>
+      </p:sp>
+      <p:sp>
+        <p:nvSpPr>
+          <p:cNvPr id="21" name="Rounded Rectangle 20"/>
+          <p:cNvSpPr/>
+          <p:nvPr/>
+        </p:nvSpPr>
+        <p:spPr>
+          <a:xfrm>
+            <a:off x="4283354" y="4055364"/>
+            <a:ext cx="3624986" cy="2299716"/>
+          </a:xfrm>
+          <a:prstGeom prst="roundRect">
+            <a:avLst>
+              <a:gd name="adj" fmla="val 12000"/>
+            </a:avLst>
+          </a:prstGeom>
+          <a:solidFill>
+            <a:srgbClr val="F2F2F2"/>
+          </a:solidFill>
+          <a:ln>
+            <a:noFill/>
+          </a:ln>
+        </p:spPr>
+        <p:style>
+          <a:lnRef idx="1">
+            <a:schemeClr val="accent1"/>
+          </a:lnRef>
+          <a:fillRef idx="3">
+            <a:schemeClr val="accent1"/>
+          </a:fillRef>
+          <a:effectRef idx="2">
+            <a:schemeClr val="accent1"/>
+          </a:effectRef>
+          <a:fontRef idx="minor">
+            <a:schemeClr val="lt1"/>
+          </a:fontRef>
+        </p:style>
+        <p:txBody>
+          <a:bodyPr rtlCol="0" anchor="ctr"/>
+          <a:lstStyle/>
+          <a:p>
+            <a:pPr algn="ctr"/>
+          </a:p>
+        </p:txBody>
+      </p:sp>
+      <p:sp>
+        <p:nvSpPr>
+          <p:cNvPr id="22" name="Rectangle 21"/>
+          <p:cNvSpPr/>
+          <p:nvPr/>
+        </p:nvSpPr>
+        <p:spPr>
+          <a:xfrm>
+            <a:off x="4283354" y="4055364"/>
+            <a:ext cx="3624986" cy="64008"/>
+          </a:xfrm>
+          <a:prstGeom prst="rect">
+            <a:avLst/>
+          </a:prstGeom>
+          <a:solidFill>
+            <a:srgbClr val="095292"/>
+          </a:solidFill>
+          <a:ln>
+            <a:noFill/>
+          </a:ln>
+        </p:spPr>
+        <p:style>
+          <a:lnRef idx="1">
+            <a:schemeClr val="accent1"/>
+          </a:lnRef>
+          <a:fillRef idx="3">
+            <a:schemeClr val="accent1"/>
+          </a:fillRef>
+          <a:effectRef idx="2">
+            <a:schemeClr val="accent1"/>
+          </a:effectRef>
+          <a:fontRef idx="minor">
+            <a:schemeClr val="lt1"/>
+          </a:fontRef>
+        </p:style>
+        <p:txBody>
+          <a:bodyPr rtlCol="0" anchor="ctr"/>
+          <a:lstStyle/>
+          <a:p>
+            <a:pPr algn="ctr"/>
+          </a:p>
+        </p:txBody>
+      </p:sp>
+      <p:sp>
+        <p:nvSpPr>
+          <p:cNvPr id="23" name="Rectangle 22"/>
+          <p:cNvSpPr/>
+          <p:nvPr/>
+        </p:nvSpPr>
+        <p:spPr>
+          <a:xfrm>
+            <a:off x="4283354" y="4119372"/>
+            <a:ext cx="3624986" cy="27432"/>
+          </a:xfrm>
+          <a:prstGeom prst="rect">
+            <a:avLst/>
+          </a:prstGeom>
+          <a:solidFill>
+            <a:srgbClr val="FFD000"/>
+          </a:solidFill>
+          <a:ln>
+            <a:noFill/>
+          </a:ln>
+        </p:spPr>
+        <p:style>
+          <a:lnRef idx="1">
+            <a:schemeClr val="accent1"/>
+          </a:lnRef>
+          <a:fillRef idx="3">
+            <a:schemeClr val="accent1"/>
+          </a:fillRef>
+          <a:effectRef idx="2">
+            <a:schemeClr val="accent1"/>
+          </a:effectRef>
+          <a:fontRef idx="minor">
+            <a:schemeClr val="lt1"/>
+          </a:fontRef>
+        </p:style>
+        <p:txBody>
+          <a:bodyPr rtlCol="0" anchor="ctr"/>
+          <a:lstStyle/>
+          <a:p>
+            <a:pPr algn="ctr"/>
+          </a:p>
+        </p:txBody>
+      </p:sp>
+      <p:pic>
+        <p:nvPicPr>
+          <p:cNvPr id="24" name="Picture 23" descr="examlab.png"/>
+          <p:cNvPicPr>
+            <a:picLocks noChangeAspect="1"/>
+          </p:cNvPicPr>
+          <p:nvPr/>
+        </p:nvPicPr>
+        <p:blipFill>
+          <a:blip r:embed="rId5"/>
+          <a:stretch>
+            <a:fillRect/>
+          </a:stretch>
+        </p:blipFill>
+        <p:spPr>
+          <a:xfrm>
+            <a:off x="5485485" y="4311396"/>
+            <a:ext cx="1220724" cy="1220724"/>
+          </a:xfrm>
+          <a:prstGeom prst="rect">
+            <a:avLst/>
+          </a:prstGeom>
+        </p:spPr>
+      </p:pic>
+      <p:sp>
+        <p:nvSpPr>
+          <p:cNvPr id="25" name="TextBox 24"/>
+          <p:cNvSpPr txBox="1"/>
+          <p:nvPr/>
+        </p:nvSpPr>
+        <p:spPr>
+          <a:xfrm>
+            <a:off x="4356506" y="5623560"/>
+            <a:ext cx="3478682" cy="621792"/>
+          </a:xfrm>
+          <a:prstGeom prst="rect">
+            <a:avLst/>
+          </a:prstGeom>
+          <a:noFill/>
+        </p:spPr>
+        <p:txBody>
+          <a:bodyPr wrap="square" anchor="t"/>
+          <a:lstStyle/>
+          <a:p>
+            <a:pPr algn="ctr"/>
+            <a:r>
+              <a:rPr sz="1300" b="1" i="0">
+                <a:solidFill>
+                  <a:srgbClr val="095292"/>
+                </a:solidFill>
+                <a:latin typeface="Calibri"/>
+              </a:rPr>
+              <a:t>la plataforma del curso</a:t>
+            </a:r>
+          </a:p>
+          <a:p>
+            <a:pPr algn="ctr">
+              <a:spcBef>
+                <a:spcPts val="200"/>
+              </a:spcBef>
+            </a:pPr>
+            <a:r>
+              <a:rPr sz="1000" b="0" i="0">
+                <a:solidFill>
+                  <a:srgbClr val="666666"/>
+                </a:solidFill>
+                <a:latin typeface="Calibri"/>
+              </a:rPr>
+              <a:t>Entrega del taller · en la fecha que indique el docente</a:t>
+            </a:r>
+          </a:p>
+        </p:txBody>
+      </p:sp>
+      <p:sp>
+        <p:nvSpPr>
+          <p:cNvPr id="26" name="TextBox 25"/>
           <p:cNvSpPr txBox="1"/>
           <p:nvPr/>
         </p:nvSpPr>
@@ -6048,111 +6759,21 @@
                 </a:solidFill>
                 <a:latin typeface="Calibri"/>
               </a:rPr>
-              <a:t>Taller PI — pasos guiados</a:t>
-            </a:r>
-          </a:p>
-        </p:txBody>
-      </p:sp>
-      <p:sp>
-        <p:nvSpPr>
-          <p:cNvPr id="5" name="Rounded Rectangle 4"/>
-          <p:cNvSpPr/>
-          <p:nvPr/>
-        </p:nvSpPr>
-        <p:spPr>
-          <a:xfrm>
-            <a:off x="457200" y="1234440"/>
-            <a:ext cx="11277295" cy="950976"/>
-          </a:xfrm>
-          <a:prstGeom prst="roundRect">
-            <a:avLst>
-              <a:gd name="adj" fmla="val 12000"/>
-            </a:avLst>
-          </a:prstGeom>
-          <a:solidFill>
-            <a:srgbClr val="F2F2F2"/>
-          </a:solidFill>
-          <a:ln>
-            <a:noFill/>
-          </a:ln>
-        </p:spPr>
-        <p:style>
-          <a:lnRef idx="1">
-            <a:schemeClr val="accent1"/>
-          </a:lnRef>
-          <a:fillRef idx="3">
-            <a:schemeClr val="accent1"/>
-          </a:fillRef>
-          <a:effectRef idx="2">
-            <a:schemeClr val="accent1"/>
-          </a:effectRef>
-          <a:fontRef idx="minor">
-            <a:schemeClr val="lt1"/>
-          </a:fontRef>
-        </p:style>
-        <p:txBody>
-          <a:bodyPr rtlCol="0" anchor="ctr"/>
-          <a:lstStyle/>
-          <a:p>
-            <a:pPr algn="ctr"/>
-          </a:p>
-        </p:txBody>
-      </p:sp>
-      <p:sp>
-        <p:nvSpPr>
-          <p:cNvPr id="6" name="Rounded Rectangle 5"/>
-          <p:cNvSpPr/>
-          <p:nvPr/>
-        </p:nvSpPr>
-        <p:spPr>
-          <a:xfrm>
-            <a:off x="594360" y="1490472"/>
-            <a:ext cx="438912" cy="438912"/>
-          </a:xfrm>
-          <a:prstGeom prst="roundRect">
-            <a:avLst>
-              <a:gd name="adj" fmla="val 12000"/>
-            </a:avLst>
-          </a:prstGeom>
-          <a:solidFill>
-            <a:srgbClr val="095292"/>
-          </a:solidFill>
-          <a:ln>
-            <a:noFill/>
-          </a:ln>
-        </p:spPr>
-        <p:style>
-          <a:lnRef idx="1">
-            <a:schemeClr val="accent1"/>
-          </a:lnRef>
-          <a:fillRef idx="3">
-            <a:schemeClr val="accent1"/>
-          </a:fillRef>
-          <a:effectRef idx="2">
-            <a:schemeClr val="accent1"/>
-          </a:effectRef>
-          <a:fontRef idx="minor">
-            <a:schemeClr val="lt1"/>
-          </a:fontRef>
-        </p:style>
-        <p:txBody>
-          <a:bodyPr rtlCol="0" anchor="ctr"/>
-          <a:lstStyle/>
-          <a:p>
-            <a:pPr algn="ctr"/>
-          </a:p>
-        </p:txBody>
-      </p:sp>
-      <p:sp>
-        <p:nvSpPr>
-          <p:cNvPr id="7" name="TextBox 6"/>
+              <a:t>Taller PI — por que importa</a:t>
+            </a:r>
+          </a:p>
+        </p:txBody>
+      </p:sp>
+      <p:sp>
+        <p:nvSpPr>
+          <p:cNvPr id="5" name="TextBox 4"/>
           <p:cNvSpPr txBox="1"/>
           <p:nvPr/>
         </p:nvSpPr>
         <p:spPr>
           <a:xfrm>
-            <a:off x="594360" y="1490472"/>
-            <a:ext cx="438912" cy="438912"/>
+            <a:off x="457200" y="1170432"/>
+            <a:ext cx="11277295" cy="5230368"/>
           </a:xfrm>
           <a:prstGeom prst="rect">
             <a:avLst/>
@@ -6160,677 +6781,81 @@
           <a:noFill/>
         </p:spPr>
         <p:txBody>
-          <a:bodyPr wrap="square" anchor="ctr"/>
-          <a:lstStyle/>
-          <a:p>
-            <a:pPr algn="ctr"/>
-            <a:r>
-              <a:rPr sz="1600" b="1" i="0">
-                <a:solidFill>
-                  <a:srgbClr val="FFFFFF"/>
-                </a:solidFill>
-                <a:latin typeface="Calibri"/>
-              </a:rPr>
-              <a:t>1</a:t>
-            </a:r>
-          </a:p>
-        </p:txBody>
-      </p:sp>
-      <p:sp>
-        <p:nvSpPr>
-          <p:cNvPr id="8" name="TextBox 7"/>
-          <p:cNvSpPr txBox="1"/>
-          <p:nvPr/>
-        </p:nvSpPr>
-        <p:spPr>
-          <a:xfrm>
-            <a:off x="1188720" y="1325880"/>
-            <a:ext cx="10271455" cy="786384"/>
-          </a:xfrm>
-          <a:prstGeom prst="rect">
-            <a:avLst/>
-          </a:prstGeom>
-          <a:noFill/>
-        </p:spPr>
-        <p:txBody>
-          <a:bodyPr wrap="square" anchor="ctr"/>
-          <a:lstStyle/>
-          <a:p>
-            <a:r>
-              <a:rPr sz="1500" b="1" i="0">
-                <a:solidFill>
-                  <a:srgbClr val="095292"/>
-                </a:solidFill>
-                <a:latin typeface="Calibri"/>
-              </a:rPr>
-              <a:t>En Google Docs escriba el Product Backlog de VetCare con al menos ocho items redactados como historias de usuario cortas, cada uno con prioridad (Alta/Media/Baja) y una justificacion de valor para Huellitas en una linea.</a:t>
-            </a:r>
-          </a:p>
-        </p:txBody>
-      </p:sp>
-      <p:sp>
-        <p:nvSpPr>
-          <p:cNvPr id="9" name="Rounded Rectangle 8"/>
-          <p:cNvSpPr/>
-          <p:nvPr/>
-        </p:nvSpPr>
-        <p:spPr>
-          <a:xfrm>
-            <a:off x="457200" y="2276856"/>
-            <a:ext cx="11277295" cy="950976"/>
-          </a:xfrm>
-          <a:prstGeom prst="roundRect">
-            <a:avLst>
-              <a:gd name="adj" fmla="val 12000"/>
-            </a:avLst>
-          </a:prstGeom>
-          <a:solidFill>
-            <a:srgbClr val="E8F4FA"/>
-          </a:solidFill>
-          <a:ln>
-            <a:noFill/>
-          </a:ln>
-        </p:spPr>
-        <p:style>
-          <a:lnRef idx="1">
-            <a:schemeClr val="accent1"/>
-          </a:lnRef>
-          <a:fillRef idx="3">
-            <a:schemeClr val="accent1"/>
-          </a:fillRef>
-          <a:effectRef idx="2">
-            <a:schemeClr val="accent1"/>
-          </a:effectRef>
-          <a:fontRef idx="minor">
-            <a:schemeClr val="lt1"/>
-          </a:fontRef>
-        </p:style>
-        <p:txBody>
-          <a:bodyPr rtlCol="0" anchor="ctr"/>
-          <a:lstStyle/>
-          <a:p>
-            <a:pPr algn="ctr"/>
-          </a:p>
-        </p:txBody>
-      </p:sp>
-      <p:sp>
-        <p:nvSpPr>
-          <p:cNvPr id="10" name="Rounded Rectangle 9"/>
-          <p:cNvSpPr/>
-          <p:nvPr/>
-        </p:nvSpPr>
-        <p:spPr>
-          <a:xfrm>
-            <a:off x="594360" y="2532888"/>
-            <a:ext cx="438912" cy="438912"/>
-          </a:xfrm>
-          <a:prstGeom prst="roundRect">
-            <a:avLst>
-              <a:gd name="adj" fmla="val 12000"/>
-            </a:avLst>
-          </a:prstGeom>
-          <a:solidFill>
-            <a:srgbClr val="095292"/>
-          </a:solidFill>
-          <a:ln>
-            <a:noFill/>
-          </a:ln>
-        </p:spPr>
-        <p:style>
-          <a:lnRef idx="1">
-            <a:schemeClr val="accent1"/>
-          </a:lnRef>
-          <a:fillRef idx="3">
-            <a:schemeClr val="accent1"/>
-          </a:fillRef>
-          <a:effectRef idx="2">
-            <a:schemeClr val="accent1"/>
-          </a:effectRef>
-          <a:fontRef idx="minor">
-            <a:schemeClr val="lt1"/>
-          </a:fontRef>
-        </p:style>
-        <p:txBody>
-          <a:bodyPr rtlCol="0" anchor="ctr"/>
-          <a:lstStyle/>
-          <a:p>
-            <a:pPr algn="ctr"/>
-          </a:p>
-        </p:txBody>
-      </p:sp>
-      <p:sp>
-        <p:nvSpPr>
-          <p:cNvPr id="11" name="TextBox 10"/>
-          <p:cNvSpPr txBox="1"/>
-          <p:nvPr/>
-        </p:nvSpPr>
-        <p:spPr>
-          <a:xfrm>
-            <a:off x="594360" y="2532888"/>
-            <a:ext cx="438912" cy="438912"/>
-          </a:xfrm>
-          <a:prstGeom prst="rect">
-            <a:avLst/>
-          </a:prstGeom>
-          <a:noFill/>
-        </p:spPr>
-        <p:txBody>
-          <a:bodyPr wrap="square" anchor="ctr"/>
-          <a:lstStyle/>
-          <a:p>
-            <a:pPr algn="ctr"/>
-            <a:r>
-              <a:rPr sz="1600" b="1" i="0">
-                <a:solidFill>
-                  <a:srgbClr val="FFFFFF"/>
-                </a:solidFill>
-                <a:latin typeface="Calibri"/>
-              </a:rPr>
-              <a:t>2</a:t>
-            </a:r>
-          </a:p>
-        </p:txBody>
-      </p:sp>
-      <p:sp>
-        <p:nvSpPr>
-          <p:cNvPr id="12" name="TextBox 11"/>
-          <p:cNvSpPr txBox="1"/>
-          <p:nvPr/>
-        </p:nvSpPr>
-        <p:spPr>
-          <a:xfrm>
-            <a:off x="1188720" y="2368296"/>
-            <a:ext cx="10271455" cy="786384"/>
-          </a:xfrm>
-          <a:prstGeom prst="rect">
-            <a:avLst/>
-          </a:prstGeom>
-          <a:noFill/>
-        </p:spPr>
-        <p:txBody>
-          <a:bodyPr wrap="square" anchor="ctr"/>
-          <a:lstStyle/>
-          <a:p>
-            <a:r>
-              <a:rPr sz="1500" b="1" i="0">
-                <a:solidFill>
-                  <a:srgbClr val="095292"/>
-                </a:solidFill>
-                <a:latin typeface="Calibri"/>
-              </a:rPr>
-              <a:t>Priorice el backlog en orden de arriba hacia abajo y explique por escrito, en dos renglones, por que el primer item es el primero (pista: resuelve uno de los tres dolores de la clinica).</a:t>
-            </a:r>
-          </a:p>
-        </p:txBody>
-      </p:sp>
-      <p:sp>
-        <p:nvSpPr>
-          <p:cNvPr id="13" name="Rounded Rectangle 12"/>
-          <p:cNvSpPr/>
-          <p:nvPr/>
-        </p:nvSpPr>
-        <p:spPr>
-          <a:xfrm>
-            <a:off x="457200" y="3319272"/>
-            <a:ext cx="11277295" cy="950976"/>
-          </a:xfrm>
-          <a:prstGeom prst="roundRect">
-            <a:avLst>
-              <a:gd name="adj" fmla="val 12000"/>
-            </a:avLst>
-          </a:prstGeom>
-          <a:solidFill>
-            <a:srgbClr val="F2F2F2"/>
-          </a:solidFill>
-          <a:ln>
-            <a:noFill/>
-          </a:ln>
-        </p:spPr>
-        <p:style>
-          <a:lnRef idx="1">
-            <a:schemeClr val="accent1"/>
-          </a:lnRef>
-          <a:fillRef idx="3">
-            <a:schemeClr val="accent1"/>
-          </a:fillRef>
-          <a:effectRef idx="2">
-            <a:schemeClr val="accent1"/>
-          </a:effectRef>
-          <a:fontRef idx="minor">
-            <a:schemeClr val="lt1"/>
-          </a:fontRef>
-        </p:style>
-        <p:txBody>
-          <a:bodyPr rtlCol="0" anchor="ctr"/>
-          <a:lstStyle/>
-          <a:p>
-            <a:pPr algn="ctr"/>
-          </a:p>
-        </p:txBody>
-      </p:sp>
-      <p:sp>
-        <p:nvSpPr>
-          <p:cNvPr id="14" name="Rounded Rectangle 13"/>
-          <p:cNvSpPr/>
-          <p:nvPr/>
-        </p:nvSpPr>
-        <p:spPr>
-          <a:xfrm>
-            <a:off x="594360" y="3575304"/>
-            <a:ext cx="438912" cy="438912"/>
-          </a:xfrm>
-          <a:prstGeom prst="roundRect">
-            <a:avLst>
-              <a:gd name="adj" fmla="val 12000"/>
-            </a:avLst>
-          </a:prstGeom>
-          <a:solidFill>
-            <a:srgbClr val="095292"/>
-          </a:solidFill>
-          <a:ln>
-            <a:noFill/>
-          </a:ln>
-        </p:spPr>
-        <p:style>
-          <a:lnRef idx="1">
-            <a:schemeClr val="accent1"/>
-          </a:lnRef>
-          <a:fillRef idx="3">
-            <a:schemeClr val="accent1"/>
-          </a:fillRef>
-          <a:effectRef idx="2">
-            <a:schemeClr val="accent1"/>
-          </a:effectRef>
-          <a:fontRef idx="minor">
-            <a:schemeClr val="lt1"/>
-          </a:fontRef>
-        </p:style>
-        <p:txBody>
-          <a:bodyPr rtlCol="0" anchor="ctr"/>
-          <a:lstStyle/>
-          <a:p>
-            <a:pPr algn="ctr"/>
-          </a:p>
-        </p:txBody>
-      </p:sp>
-      <p:sp>
-        <p:nvSpPr>
-          <p:cNvPr id="15" name="TextBox 14"/>
-          <p:cNvSpPr txBox="1"/>
-          <p:nvPr/>
-        </p:nvSpPr>
-        <p:spPr>
-          <a:xfrm>
-            <a:off x="594360" y="3575304"/>
-            <a:ext cx="438912" cy="438912"/>
-          </a:xfrm>
-          <a:prstGeom prst="rect">
-            <a:avLst/>
-          </a:prstGeom>
-          <a:noFill/>
-        </p:spPr>
-        <p:txBody>
-          <a:bodyPr wrap="square" anchor="ctr"/>
-          <a:lstStyle/>
-          <a:p>
-            <a:pPr algn="ctr"/>
-            <a:r>
-              <a:rPr sz="1600" b="1" i="0">
-                <a:solidFill>
-                  <a:srgbClr val="FFFFFF"/>
-                </a:solidFill>
-                <a:latin typeface="Calibri"/>
-              </a:rPr>
-              <a:t>3</a:t>
-            </a:r>
-          </a:p>
-        </p:txBody>
-      </p:sp>
-      <p:sp>
-        <p:nvSpPr>
-          <p:cNvPr id="16" name="TextBox 15"/>
-          <p:cNvSpPr txBox="1"/>
-          <p:nvPr/>
-        </p:nvSpPr>
-        <p:spPr>
-          <a:xfrm>
-            <a:off x="1188720" y="3410712"/>
-            <a:ext cx="10271455" cy="786384"/>
-          </a:xfrm>
-          <a:prstGeom prst="rect">
-            <a:avLst/>
-          </a:prstGeom>
-          <a:noFill/>
-        </p:spPr>
-        <p:txBody>
-          <a:bodyPr wrap="square" anchor="ctr"/>
-          <a:lstStyle/>
-          <a:p>
-            <a:r>
-              <a:rPr sz="1500" b="1" i="0">
-                <a:solidFill>
-                  <a:srgbClr val="095292"/>
-                </a:solidFill>
-                <a:latin typeface="Calibri"/>
-              </a:rPr>
-              <a:t>Escriba tres historias completas con criterios de aceptacion en formato Dado/Cuando/Entonces, y asegurese de que cada historia tenga al menos un escenario alternativo o de error, no solo el camino feliz.</a:t>
-            </a:r>
-          </a:p>
-        </p:txBody>
-      </p:sp>
-      <p:sp>
-        <p:nvSpPr>
-          <p:cNvPr id="17" name="Rounded Rectangle 16"/>
-          <p:cNvSpPr/>
-          <p:nvPr/>
-        </p:nvSpPr>
-        <p:spPr>
-          <a:xfrm>
-            <a:off x="457200" y="4361688"/>
-            <a:ext cx="11277295" cy="950976"/>
-          </a:xfrm>
-          <a:prstGeom prst="roundRect">
-            <a:avLst>
-              <a:gd name="adj" fmla="val 12000"/>
-            </a:avLst>
-          </a:prstGeom>
-          <a:solidFill>
-            <a:srgbClr val="E8F4FA"/>
-          </a:solidFill>
-          <a:ln>
-            <a:noFill/>
-          </a:ln>
-        </p:spPr>
-        <p:style>
-          <a:lnRef idx="1">
-            <a:schemeClr val="accent1"/>
-          </a:lnRef>
-          <a:fillRef idx="3">
-            <a:schemeClr val="accent1"/>
-          </a:fillRef>
-          <a:effectRef idx="2">
-            <a:schemeClr val="accent1"/>
-          </a:effectRef>
-          <a:fontRef idx="minor">
-            <a:schemeClr val="lt1"/>
-          </a:fontRef>
-        </p:style>
-        <p:txBody>
-          <a:bodyPr rtlCol="0" anchor="ctr"/>
-          <a:lstStyle/>
-          <a:p>
-            <a:pPr algn="ctr"/>
-          </a:p>
-        </p:txBody>
-      </p:sp>
-      <p:sp>
-        <p:nvSpPr>
-          <p:cNvPr id="18" name="Rounded Rectangle 17"/>
-          <p:cNvSpPr/>
-          <p:nvPr/>
-        </p:nvSpPr>
-        <p:spPr>
-          <a:xfrm>
-            <a:off x="594360" y="4617720"/>
-            <a:ext cx="438912" cy="438912"/>
-          </a:xfrm>
-          <a:prstGeom prst="roundRect">
-            <a:avLst>
-              <a:gd name="adj" fmla="val 12000"/>
-            </a:avLst>
-          </a:prstGeom>
-          <a:solidFill>
-            <a:srgbClr val="095292"/>
-          </a:solidFill>
-          <a:ln>
-            <a:noFill/>
-          </a:ln>
-        </p:spPr>
-        <p:style>
-          <a:lnRef idx="1">
-            <a:schemeClr val="accent1"/>
-          </a:lnRef>
-          <a:fillRef idx="3">
-            <a:schemeClr val="accent1"/>
-          </a:fillRef>
-          <a:effectRef idx="2">
-            <a:schemeClr val="accent1"/>
-          </a:effectRef>
-          <a:fontRef idx="minor">
-            <a:schemeClr val="lt1"/>
-          </a:fontRef>
-        </p:style>
-        <p:txBody>
-          <a:bodyPr rtlCol="0" anchor="ctr"/>
-          <a:lstStyle/>
-          <a:p>
-            <a:pPr algn="ctr"/>
-          </a:p>
-        </p:txBody>
-      </p:sp>
-      <p:sp>
-        <p:nvSpPr>
-          <p:cNvPr id="19" name="TextBox 18"/>
-          <p:cNvSpPr txBox="1"/>
-          <p:nvPr/>
-        </p:nvSpPr>
-        <p:spPr>
-          <a:xfrm>
-            <a:off x="594360" y="4617720"/>
-            <a:ext cx="438912" cy="438912"/>
-          </a:xfrm>
-          <a:prstGeom prst="rect">
-            <a:avLst/>
-          </a:prstGeom>
-          <a:noFill/>
-        </p:spPr>
-        <p:txBody>
-          <a:bodyPr wrap="square" anchor="ctr"/>
-          <a:lstStyle/>
-          <a:p>
-            <a:pPr algn="ctr"/>
-            <a:r>
-              <a:rPr sz="1600" b="1" i="0">
-                <a:solidFill>
-                  <a:srgbClr val="FFFFFF"/>
-                </a:solidFill>
-                <a:latin typeface="Calibri"/>
-              </a:rPr>
-              <a:t>4</a:t>
-            </a:r>
-          </a:p>
-        </p:txBody>
-      </p:sp>
-      <p:sp>
-        <p:nvSpPr>
-          <p:cNvPr id="20" name="TextBox 19"/>
-          <p:cNvSpPr txBox="1"/>
-          <p:nvPr/>
-        </p:nvSpPr>
-        <p:spPr>
-          <a:xfrm>
-            <a:off x="1188720" y="4453128"/>
-            <a:ext cx="10271455" cy="786384"/>
-          </a:xfrm>
-          <a:prstGeom prst="rect">
-            <a:avLst/>
-          </a:prstGeom>
-          <a:noFill/>
-        </p:spPr>
-        <p:txBody>
-          <a:bodyPr wrap="square" anchor="ctr"/>
-          <a:lstStyle/>
-          <a:p>
-            <a:r>
-              <a:rPr sz="1500" b="1" i="0">
-                <a:solidFill>
-                  <a:srgbClr val="095292"/>
-                </a:solidFill>
-                <a:latin typeface="Calibri"/>
-              </a:rPr>
-              <a:t>Redacte la Definicion de Terminado para artefactos de diseño (por ejemplo: tiene diagrama en draw.io, tiene mockup, esta revisado por un compañero y tiene el visto bueno del cliente) y escribala en la cabecera del tablero.</a:t>
-            </a:r>
-          </a:p>
-        </p:txBody>
-      </p:sp>
-      <p:sp>
-        <p:nvSpPr>
-          <p:cNvPr id="21" name="Rounded Rectangle 20"/>
-          <p:cNvSpPr/>
-          <p:nvPr/>
-        </p:nvSpPr>
-        <p:spPr>
-          <a:xfrm>
-            <a:off x="457200" y="5404104"/>
-            <a:ext cx="11277295" cy="950976"/>
-          </a:xfrm>
-          <a:prstGeom prst="roundRect">
-            <a:avLst>
-              <a:gd name="adj" fmla="val 12000"/>
-            </a:avLst>
-          </a:prstGeom>
-          <a:solidFill>
-            <a:srgbClr val="F2F2F2"/>
-          </a:solidFill>
-          <a:ln>
-            <a:noFill/>
-          </a:ln>
-        </p:spPr>
-        <p:style>
-          <a:lnRef idx="1">
-            <a:schemeClr val="accent1"/>
-          </a:lnRef>
-          <a:fillRef idx="3">
-            <a:schemeClr val="accent1"/>
-          </a:fillRef>
-          <a:effectRef idx="2">
-            <a:schemeClr val="accent1"/>
-          </a:effectRef>
-          <a:fontRef idx="minor">
-            <a:schemeClr val="lt1"/>
-          </a:fontRef>
-        </p:style>
-        <p:txBody>
-          <a:bodyPr rtlCol="0" anchor="ctr"/>
-          <a:lstStyle/>
-          <a:p>
-            <a:pPr algn="ctr"/>
-          </a:p>
-        </p:txBody>
-      </p:sp>
-      <p:sp>
-        <p:nvSpPr>
-          <p:cNvPr id="22" name="Rounded Rectangle 21"/>
-          <p:cNvSpPr/>
-          <p:nvPr/>
-        </p:nvSpPr>
-        <p:spPr>
-          <a:xfrm>
-            <a:off x="594360" y="5660136"/>
-            <a:ext cx="438912" cy="438912"/>
-          </a:xfrm>
-          <a:prstGeom prst="roundRect">
-            <a:avLst>
-              <a:gd name="adj" fmla="val 12000"/>
-            </a:avLst>
-          </a:prstGeom>
-          <a:solidFill>
-            <a:srgbClr val="095292"/>
-          </a:solidFill>
-          <a:ln>
-            <a:noFill/>
-          </a:ln>
-        </p:spPr>
-        <p:style>
-          <a:lnRef idx="1">
-            <a:schemeClr val="accent1"/>
-          </a:lnRef>
-          <a:fillRef idx="3">
-            <a:schemeClr val="accent1"/>
-          </a:fillRef>
-          <a:effectRef idx="2">
-            <a:schemeClr val="accent1"/>
-          </a:effectRef>
-          <a:fontRef idx="minor">
-            <a:schemeClr val="lt1"/>
-          </a:fontRef>
-        </p:style>
-        <p:txBody>
-          <a:bodyPr rtlCol="0" anchor="ctr"/>
-          <a:lstStyle/>
-          <a:p>
-            <a:pPr algn="ctr"/>
-          </a:p>
-        </p:txBody>
-      </p:sp>
-      <p:sp>
-        <p:nvSpPr>
-          <p:cNvPr id="23" name="TextBox 22"/>
-          <p:cNvSpPr txBox="1"/>
-          <p:nvPr/>
-        </p:nvSpPr>
-        <p:spPr>
-          <a:xfrm>
-            <a:off x="594360" y="5660136"/>
-            <a:ext cx="438912" cy="438912"/>
-          </a:xfrm>
-          <a:prstGeom prst="rect">
-            <a:avLst/>
-          </a:prstGeom>
-          <a:noFill/>
-        </p:spPr>
-        <p:txBody>
-          <a:bodyPr wrap="square" anchor="ctr"/>
-          <a:lstStyle/>
-          <a:p>
-            <a:pPr algn="ctr"/>
-            <a:r>
-              <a:rPr sz="1600" b="1" i="0">
-                <a:solidFill>
-                  <a:srgbClr val="FFFFFF"/>
-                </a:solidFill>
-                <a:latin typeface="Calibri"/>
-              </a:rPr>
-              <a:t>5</a:t>
-            </a:r>
-          </a:p>
-        </p:txBody>
-      </p:sp>
-      <p:sp>
-        <p:nvSpPr>
-          <p:cNvPr id="24" name="TextBox 23"/>
-          <p:cNvSpPr txBox="1"/>
-          <p:nvPr/>
-        </p:nvSpPr>
-        <p:spPr>
-          <a:xfrm>
-            <a:off x="1188720" y="5495544"/>
-            <a:ext cx="10271455" cy="786384"/>
-          </a:xfrm>
-          <a:prstGeom prst="rect">
-            <a:avLst/>
-          </a:prstGeom>
-          <a:noFill/>
-        </p:spPr>
-        <p:txBody>
-          <a:bodyPr wrap="square" anchor="ctr"/>
-          <a:lstStyle/>
-          <a:p>
-            <a:r>
-              <a:rPr sz="1400" b="1" i="0">
-                <a:solidFill>
-                  <a:srgbClr val="095292"/>
-                </a:solidFill>
-                <a:latin typeface="Calibri"/>
-              </a:rPr>
-              <a:t>En draw.io o Excalidraw arme el tablero con las columnas Por hacer / Modelando / En revision del cliente / Aprobado, ponga el limite de trabajo en curso en dos para las columnas del medio, distribuya las tarjetas en tres sprints con su objetivo y entregable de diseño, exporte a PDF y suba a la plataforma del curso.</a:t>
-            </a:r>
-          </a:p>
-        </p:txBody>
-      </p:sp>
-      <p:sp>
-        <p:nvSpPr>
-          <p:cNvPr id="25" name="TextBox 24"/>
+          <a:bodyPr wrap="square">
+            <a:spAutoFit/>
+          </a:bodyPr>
+          <a:lstStyle/>
+          <a:p>
+            <a:pPr>
+              <a:spcAft>
+                <a:spcPts val="800"/>
+              </a:spcAft>
+            </a:pPr>
+            <a:r>
+              <a:rPr sz="2000" b="0" i="0">
+                <a:solidFill>
+                  <a:srgbClr val="333333"/>
+                </a:solidFill>
+                <a:latin typeface="Calibri"/>
+              </a:rPr>
+              <a:t>–   </a:t>
+            </a:r>
+            <a:r>
+              <a:rPr sz="2000" b="1" i="0">
+                <a:solidFill>
+                  <a:srgbClr val="333333"/>
+                </a:solidFill>
+                <a:latin typeface="Calibri"/>
+              </a:rPr>
+              <a:t>Por que importa al PI:</a:t>
+            </a:r>
+            <a:r>
+              <a:rPr sz="2000" b="0" i="0">
+                <a:solidFill>
+                  <a:srgbClr val="333333"/>
+                </a:solidFill>
+                <a:latin typeface="Calibri"/>
+              </a:rPr>
+              <a:t> el semestre completo de VetCare se va a organizar como sprints, y lo que se defina hoy en el backlog es literalmente el orden en que se van a producir los planos.</a:t>
+            </a:r>
+          </a:p>
+          <a:p>
+            <a:pPr>
+              <a:spcAft>
+                <a:spcPts val="800"/>
+              </a:spcAft>
+            </a:pPr>
+            <a:r>
+              <a:rPr sz="2000" b="0" i="0">
+                <a:solidFill>
+                  <a:srgbClr val="333333"/>
+                </a:solidFill>
+                <a:latin typeface="Calibri"/>
+              </a:rPr>
+              <a:t>–   Ya vimos el enfoque tradicional y su documentacion formal; hoy se ve el otro extremo del espectro y se aprende a decidir cual parte de VetCare conviene tratar de cada forma.</a:t>
+            </a:r>
+          </a:p>
+          <a:p>
+            <a:pPr>
+              <a:spcAft>
+                <a:spcPts val="800"/>
+              </a:spcAft>
+            </a:pPr>
+            <a:r>
+              <a:rPr sz="2000" b="0" i="0">
+                <a:solidFill>
+                  <a:srgbClr val="333333"/>
+                </a:solidFill>
+                <a:latin typeface="Calibri"/>
+              </a:rPr>
+              <a:t>–   Aqui se aclara de una vez el malentendido mas costoso del curso: agil no es la excusa para no documentar, y en esta asignatura la documentacion de diseño es justamente el incremento entregable.</a:t>
+            </a:r>
+          </a:p>
+        </p:txBody>
+      </p:sp>
+      <p:sp>
+        <p:nvSpPr>
+          <p:cNvPr id="6" name="TextBox 5"/>
           <p:cNvSpPr txBox="1"/>
           <p:nvPr/>
         </p:nvSpPr>
@@ -7004,154 +7029,21 @@
                 </a:solidFill>
                 <a:latin typeface="Calibri"/>
               </a:rPr>
-              <a:t>Antes de entregar — autochequeo</a:t>
-            </a:r>
-          </a:p>
-        </p:txBody>
-      </p:sp>
-      <p:sp>
-        <p:nvSpPr>
-          <p:cNvPr id="5" name="Rounded Rectangle 4"/>
-          <p:cNvSpPr/>
-          <p:nvPr/>
-        </p:nvSpPr>
-        <p:spPr>
-          <a:xfrm>
-            <a:off x="457200" y="1261872"/>
-            <a:ext cx="11277295" cy="566928"/>
-          </a:xfrm>
-          <a:prstGeom prst="roundRect">
-            <a:avLst>
-              <a:gd name="adj" fmla="val 12000"/>
-            </a:avLst>
-          </a:prstGeom>
-          <a:solidFill>
-            <a:srgbClr val="F2F2F2"/>
-          </a:solidFill>
-          <a:ln>
-            <a:noFill/>
-          </a:ln>
-        </p:spPr>
-        <p:style>
-          <a:lnRef idx="1">
-            <a:schemeClr val="accent1"/>
-          </a:lnRef>
-          <a:fillRef idx="3">
-            <a:schemeClr val="accent1"/>
-          </a:fillRef>
-          <a:effectRef idx="2">
-            <a:schemeClr val="accent1"/>
-          </a:effectRef>
-          <a:fontRef idx="minor">
-            <a:schemeClr val="lt1"/>
-          </a:fontRef>
-        </p:style>
-        <p:txBody>
-          <a:bodyPr rtlCol="0" anchor="ctr"/>
-          <a:lstStyle/>
-          <a:p>
-            <a:pPr algn="ctr"/>
-          </a:p>
-        </p:txBody>
-      </p:sp>
-      <p:sp>
-        <p:nvSpPr>
-          <p:cNvPr id="6" name="Rectangle 5"/>
-          <p:cNvSpPr/>
-          <p:nvPr/>
-        </p:nvSpPr>
-        <p:spPr>
-          <a:xfrm>
-            <a:off x="640080" y="1408175"/>
-            <a:ext cx="274320" cy="274320"/>
-          </a:xfrm>
-          <a:prstGeom prst="rect">
-            <a:avLst/>
-          </a:prstGeom>
-          <a:solidFill>
-            <a:srgbClr val="FFFFFF"/>
-          </a:solidFill>
-          <a:ln>
-            <a:solidFill>
-              <a:srgbClr val="333333"/>
-            </a:solidFill>
-          </a:ln>
-        </p:spPr>
-        <p:style>
-          <a:lnRef idx="1">
-            <a:schemeClr val="accent1"/>
-          </a:lnRef>
-          <a:fillRef idx="3">
-            <a:schemeClr val="accent1"/>
-          </a:fillRef>
-          <a:effectRef idx="2">
-            <a:schemeClr val="accent1"/>
-          </a:effectRef>
-          <a:fontRef idx="minor">
-            <a:schemeClr val="lt1"/>
-          </a:fontRef>
-        </p:style>
-        <p:txBody>
-          <a:bodyPr rtlCol="0" anchor="ctr"/>
-          <a:lstStyle/>
-          <a:p>
-            <a:pPr algn="ctr"/>
-          </a:p>
-        </p:txBody>
-      </p:sp>
-      <p:sp>
-        <p:nvSpPr>
-          <p:cNvPr id="7" name="Rectangle 6"/>
-          <p:cNvSpPr/>
-          <p:nvPr/>
-        </p:nvSpPr>
-        <p:spPr>
-          <a:xfrm>
-            <a:off x="640080" y="1408175"/>
-            <a:ext cx="73152" cy="274320"/>
-          </a:xfrm>
-          <a:prstGeom prst="rect">
-            <a:avLst/>
-          </a:prstGeom>
-          <a:solidFill>
-            <a:srgbClr val="269CCB"/>
-          </a:solidFill>
-          <a:ln>
-            <a:noFill/>
-          </a:ln>
-        </p:spPr>
-        <p:style>
-          <a:lnRef idx="1">
-            <a:schemeClr val="accent1"/>
-          </a:lnRef>
-          <a:fillRef idx="3">
-            <a:schemeClr val="accent1"/>
-          </a:fillRef>
-          <a:effectRef idx="2">
-            <a:schemeClr val="accent1"/>
-          </a:effectRef>
-          <a:fontRef idx="minor">
-            <a:schemeClr val="lt1"/>
-          </a:fontRef>
-        </p:style>
-        <p:txBody>
-          <a:bodyPr rtlCol="0" anchor="ctr"/>
-          <a:lstStyle/>
-          <a:p>
-            <a:pPr algn="ctr"/>
-          </a:p>
-        </p:txBody>
-      </p:sp>
-      <p:sp>
-        <p:nvSpPr>
-          <p:cNvPr id="8" name="TextBox 7"/>
+              <a:t>Taller PI — punto de partida</a:t>
+            </a:r>
+          </a:p>
+        </p:txBody>
+      </p:sp>
+      <p:sp>
+        <p:nvSpPr>
+          <p:cNvPr id="5" name="TextBox 4"/>
           <p:cNvSpPr txBox="1"/>
           <p:nvPr/>
         </p:nvSpPr>
         <p:spPr>
           <a:xfrm>
-            <a:off x="1097280" y="1353312"/>
-            <a:ext cx="10362895" cy="402336"/>
+            <a:off x="457200" y="1170432"/>
+            <a:ext cx="11277295" cy="5230368"/>
           </a:xfrm>
           <a:prstGeom prst="rect">
             <a:avLst/>
@@ -7159,354 +7051,63 @@
           <a:noFill/>
         </p:spPr>
         <p:txBody>
-          <a:bodyPr wrap="square" anchor="ctr"/>
-          <a:lstStyle/>
-          <a:p>
-            <a:r>
-              <a:rPr sz="1500" b="0" i="0">
+          <a:bodyPr wrap="square">
+            <a:spAutoFit/>
+          </a:bodyPr>
+          <a:lstStyle/>
+          <a:p>
+            <a:pPr>
+              <a:spcAft>
+                <a:spcPts val="800"/>
+              </a:spcAft>
+            </a:pPr>
+            <a:r>
+              <a:rPr sz="2000" b="0" i="0">
                 <a:solidFill>
                   <a:srgbClr val="333333"/>
                 </a:solidFill>
                 <a:latin typeface="Calibri"/>
               </a:rPr>
-              <a:t>Si su sprint 1 se llama 'analisis' y el sprint 2 'diseño', que le va a mostrar a la veterinaria al terminar el sprint 1 que ella pueda entender y criticar?</a:t>
-            </a:r>
-          </a:p>
-        </p:txBody>
-      </p:sp>
-      <p:sp>
-        <p:nvSpPr>
-          <p:cNvPr id="9" name="Rounded Rectangle 8"/>
-          <p:cNvSpPr/>
-          <p:nvPr/>
-        </p:nvSpPr>
-        <p:spPr>
-          <a:xfrm>
-            <a:off x="457200" y="1938528"/>
-            <a:ext cx="11277295" cy="566928"/>
-          </a:xfrm>
-          <a:prstGeom prst="roundRect">
-            <a:avLst>
-              <a:gd name="adj" fmla="val 12000"/>
-            </a:avLst>
-          </a:prstGeom>
-          <a:solidFill>
-            <a:srgbClr val="F2F2F2"/>
-          </a:solidFill>
-          <a:ln>
-            <a:noFill/>
-          </a:ln>
-        </p:spPr>
-        <p:style>
-          <a:lnRef idx="1">
-            <a:schemeClr val="accent1"/>
-          </a:lnRef>
-          <a:fillRef idx="3">
-            <a:schemeClr val="accent1"/>
-          </a:fillRef>
-          <a:effectRef idx="2">
-            <a:schemeClr val="accent1"/>
-          </a:effectRef>
-          <a:fontRef idx="minor">
-            <a:schemeClr val="lt1"/>
-          </a:fontRef>
-        </p:style>
-        <p:txBody>
-          <a:bodyPr rtlCol="0" anchor="ctr"/>
-          <a:lstStyle/>
-          <a:p>
-            <a:pPr algn="ctr"/>
-          </a:p>
-        </p:txBody>
-      </p:sp>
-      <p:sp>
-        <p:nvSpPr>
-          <p:cNvPr id="10" name="Rectangle 9"/>
-          <p:cNvSpPr/>
-          <p:nvPr/>
-        </p:nvSpPr>
-        <p:spPr>
-          <a:xfrm>
-            <a:off x="640080" y="2084832"/>
-            <a:ext cx="274320" cy="274320"/>
-          </a:xfrm>
-          <a:prstGeom prst="rect">
-            <a:avLst/>
-          </a:prstGeom>
-          <a:solidFill>
-            <a:srgbClr val="FFFFFF"/>
-          </a:solidFill>
-          <a:ln>
-            <a:solidFill>
-              <a:srgbClr val="333333"/>
-            </a:solidFill>
-          </a:ln>
-        </p:spPr>
-        <p:style>
-          <a:lnRef idx="1">
-            <a:schemeClr val="accent1"/>
-          </a:lnRef>
-          <a:fillRef idx="3">
-            <a:schemeClr val="accent1"/>
-          </a:fillRef>
-          <a:effectRef idx="2">
-            <a:schemeClr val="accent1"/>
-          </a:effectRef>
-          <a:fontRef idx="minor">
-            <a:schemeClr val="lt1"/>
-          </a:fontRef>
-        </p:style>
-        <p:txBody>
-          <a:bodyPr rtlCol="0" anchor="ctr"/>
-          <a:lstStyle/>
-          <a:p>
-            <a:pPr algn="ctr"/>
-          </a:p>
-        </p:txBody>
-      </p:sp>
-      <p:sp>
-        <p:nvSpPr>
-          <p:cNvPr id="11" name="Rectangle 10"/>
-          <p:cNvSpPr/>
-          <p:nvPr/>
-        </p:nvSpPr>
-        <p:spPr>
-          <a:xfrm>
-            <a:off x="640080" y="2084832"/>
-            <a:ext cx="73152" cy="274320"/>
-          </a:xfrm>
-          <a:prstGeom prst="rect">
-            <a:avLst/>
-          </a:prstGeom>
-          <a:solidFill>
-            <a:srgbClr val="269CCB"/>
-          </a:solidFill>
-          <a:ln>
-            <a:noFill/>
-          </a:ln>
-        </p:spPr>
-        <p:style>
-          <a:lnRef idx="1">
-            <a:schemeClr val="accent1"/>
-          </a:lnRef>
-          <a:fillRef idx="3">
-            <a:schemeClr val="accent1"/>
-          </a:fillRef>
-          <a:effectRef idx="2">
-            <a:schemeClr val="accent1"/>
-          </a:effectRef>
-          <a:fontRef idx="minor">
-            <a:schemeClr val="lt1"/>
-          </a:fontRef>
-        </p:style>
-        <p:txBody>
-          <a:bodyPr rtlCol="0" anchor="ctr"/>
-          <a:lstStyle/>
-          <a:p>
-            <a:pPr algn="ctr"/>
-          </a:p>
-        </p:txBody>
-      </p:sp>
-      <p:sp>
-        <p:nvSpPr>
-          <p:cNvPr id="12" name="TextBox 11"/>
-          <p:cNvSpPr txBox="1"/>
-          <p:nvPr/>
-        </p:nvSpPr>
-        <p:spPr>
-          <a:xfrm>
-            <a:off x="1097280" y="2029968"/>
-            <a:ext cx="10362895" cy="402336"/>
-          </a:xfrm>
-          <a:prstGeom prst="rect">
-            <a:avLst/>
-          </a:prstGeom>
-          <a:noFill/>
-        </p:spPr>
-        <p:txBody>
-          <a:bodyPr wrap="square" anchor="ctr"/>
-          <a:lstStyle/>
-          <a:p>
-            <a:r>
-              <a:rPr sz="1500" b="0" i="0">
+              <a:t>–   El equipo tiene requisitos escritos y un mapa de fases, pero no tiene ningun orden de trabajo: todos quieren empezar por la pantalla que les parece mas bonita.</a:t>
+            </a:r>
+          </a:p>
+          <a:p>
+            <a:pPr>
+              <a:spcAft>
+                <a:spcPts val="800"/>
+              </a:spcAft>
+            </a:pPr>
+            <a:r>
+              <a:rPr sz="2000" b="0" i="0">
                 <a:solidFill>
                   <a:srgbClr val="333333"/>
                 </a:solidFill>
                 <a:latin typeface="Calibri"/>
               </a:rPr>
-              <a:t>Sus criterios de aceptacion describen solo el camino feliz? Que pasa si la mascota no existe, si el nombre esta repetido o si la conexion se cae?</a:t>
-            </a:r>
-          </a:p>
-        </p:txBody>
-      </p:sp>
-      <p:sp>
-        <p:nvSpPr>
-          <p:cNvPr id="13" name="Rounded Rectangle 12"/>
-          <p:cNvSpPr/>
-          <p:nvPr/>
-        </p:nvSpPr>
-        <p:spPr>
-          <a:xfrm>
-            <a:off x="457200" y="2615184"/>
-            <a:ext cx="11277295" cy="566928"/>
-          </a:xfrm>
-          <a:prstGeom prst="roundRect">
-            <a:avLst>
-              <a:gd name="adj" fmla="val 12000"/>
-            </a:avLst>
-          </a:prstGeom>
-          <a:solidFill>
-            <a:srgbClr val="F2F2F2"/>
-          </a:solidFill>
-          <a:ln>
-            <a:noFill/>
-          </a:ln>
-        </p:spPr>
-        <p:style>
-          <a:lnRef idx="1">
-            <a:schemeClr val="accent1"/>
-          </a:lnRef>
-          <a:fillRef idx="3">
-            <a:schemeClr val="accent1"/>
-          </a:fillRef>
-          <a:effectRef idx="2">
-            <a:schemeClr val="accent1"/>
-          </a:effectRef>
-          <a:fontRef idx="minor">
-            <a:schemeClr val="lt1"/>
-          </a:fontRef>
-        </p:style>
-        <p:txBody>
-          <a:bodyPr rtlCol="0" anchor="ctr"/>
-          <a:lstStyle/>
-          <a:p>
-            <a:pPr algn="ctr"/>
-          </a:p>
-        </p:txBody>
-      </p:sp>
-      <p:sp>
-        <p:nvSpPr>
-          <p:cNvPr id="14" name="Rectangle 13"/>
-          <p:cNvSpPr/>
-          <p:nvPr/>
-        </p:nvSpPr>
-        <p:spPr>
-          <a:xfrm>
-            <a:off x="640080" y="2761488"/>
-            <a:ext cx="274320" cy="274320"/>
-          </a:xfrm>
-          <a:prstGeom prst="rect">
-            <a:avLst/>
-          </a:prstGeom>
-          <a:solidFill>
-            <a:srgbClr val="FFFFFF"/>
-          </a:solidFill>
-          <a:ln>
-            <a:solidFill>
-              <a:srgbClr val="333333"/>
-            </a:solidFill>
-          </a:ln>
-        </p:spPr>
-        <p:style>
-          <a:lnRef idx="1">
-            <a:schemeClr val="accent1"/>
-          </a:lnRef>
-          <a:fillRef idx="3">
-            <a:schemeClr val="accent1"/>
-          </a:fillRef>
-          <a:effectRef idx="2">
-            <a:schemeClr val="accent1"/>
-          </a:effectRef>
-          <a:fontRef idx="minor">
-            <a:schemeClr val="lt1"/>
-          </a:fontRef>
-        </p:style>
-        <p:txBody>
-          <a:bodyPr rtlCol="0" anchor="ctr"/>
-          <a:lstStyle/>
-          <a:p>
-            <a:pPr algn="ctr"/>
-          </a:p>
-        </p:txBody>
-      </p:sp>
-      <p:sp>
-        <p:nvSpPr>
-          <p:cNvPr id="15" name="Rectangle 14"/>
-          <p:cNvSpPr/>
-          <p:nvPr/>
-        </p:nvSpPr>
-        <p:spPr>
-          <a:xfrm>
-            <a:off x="640080" y="2761488"/>
-            <a:ext cx="73152" cy="274320"/>
-          </a:xfrm>
-          <a:prstGeom prst="rect">
-            <a:avLst/>
-          </a:prstGeom>
-          <a:solidFill>
-            <a:srgbClr val="269CCB"/>
-          </a:solidFill>
-          <a:ln>
-            <a:noFill/>
-          </a:ln>
-        </p:spPr>
-        <p:style>
-          <a:lnRef idx="1">
-            <a:schemeClr val="accent1"/>
-          </a:lnRef>
-          <a:fillRef idx="3">
-            <a:schemeClr val="accent1"/>
-          </a:fillRef>
-          <a:effectRef idx="2">
-            <a:schemeClr val="accent1"/>
-          </a:effectRef>
-          <a:fontRef idx="minor">
-            <a:schemeClr val="lt1"/>
-          </a:fontRef>
-        </p:style>
-        <p:txBody>
-          <a:bodyPr rtlCol="0" anchor="ctr"/>
-          <a:lstStyle/>
-          <a:p>
-            <a:pPr algn="ctr"/>
-          </a:p>
-        </p:txBody>
-      </p:sp>
-      <p:sp>
-        <p:nvSpPr>
-          <p:cNvPr id="16" name="TextBox 15"/>
-          <p:cNvSpPr txBox="1"/>
-          <p:nvPr/>
-        </p:nvSpPr>
-        <p:spPr>
-          <a:xfrm>
-            <a:off x="1097280" y="2706624"/>
-            <a:ext cx="10362895" cy="402336"/>
-          </a:xfrm>
-          <a:prstGeom prst="rect">
-            <a:avLst/>
-          </a:prstGeom>
-          <a:noFill/>
-        </p:spPr>
-        <p:txBody>
-          <a:bodyPr wrap="square" anchor="ctr"/>
-          <a:lstStyle/>
-          <a:p>
-            <a:r>
-              <a:rPr sz="1500" b="0" i="0">
+              <a:t>–   La administradora de Huellitas puede dar retroalimentacion corta cada dos o tres semanas, pero no puede sentarse a leer un documento de ochenta paginas.</a:t>
+            </a:r>
+          </a:p>
+          <a:p>
+            <a:pPr>
+              <a:spcAft>
+                <a:spcPts val="800"/>
+              </a:spcAft>
+            </a:pPr>
+            <a:r>
+              <a:rPr sz="2000" b="0" i="0">
                 <a:solidFill>
                   <a:srgbClr val="333333"/>
                 </a:solidFill>
                 <a:latin typeface="Calibri"/>
               </a:rPr>
-              <a:t>Su Definicion de Terminado se puede verificar mirando el tablero, o incluye frases como 'que quede bien hecho' que nadie puede comprobar?</a:t>
-            </a:r>
-          </a:p>
-        </p:txBody>
-      </p:sp>
-      <p:sp>
-        <p:nvSpPr>
-          <p:cNvPr id="17" name="TextBox 16"/>
+              <a:t>–   En el grupo circula la idea de que agil significa no escribir nada y que 'ya lo iremos viendo sobre la marcha'.</a:t>
+            </a:r>
+          </a:p>
+        </p:txBody>
+      </p:sp>
+      <p:sp>
+        <p:nvSpPr>
+          <p:cNvPr id="6" name="TextBox 5"/>
           <p:cNvSpPr txBox="1"/>
           <p:nvPr/>
         </p:nvSpPr>
@@ -7680,21 +7281,111 @@
                 </a:solidFill>
                 <a:latin typeface="Calibri"/>
               </a:rPr>
-              <a:t>Criterios de exito / entregable</a:t>
-            </a:r>
-          </a:p>
-        </p:txBody>
-      </p:sp>
-      <p:sp>
-        <p:nvSpPr>
-          <p:cNvPr id="5" name="TextBox 4"/>
+              <a:t>Taller PI — pasos guiados</a:t>
+            </a:r>
+          </a:p>
+        </p:txBody>
+      </p:sp>
+      <p:sp>
+        <p:nvSpPr>
+          <p:cNvPr id="5" name="Rounded Rectangle 4"/>
+          <p:cNvSpPr/>
+          <p:nvPr/>
+        </p:nvSpPr>
+        <p:spPr>
+          <a:xfrm>
+            <a:off x="457200" y="1234440"/>
+            <a:ext cx="11277295" cy="950976"/>
+          </a:xfrm>
+          <a:prstGeom prst="roundRect">
+            <a:avLst>
+              <a:gd name="adj" fmla="val 12000"/>
+            </a:avLst>
+          </a:prstGeom>
+          <a:solidFill>
+            <a:srgbClr val="F2F2F2"/>
+          </a:solidFill>
+          <a:ln>
+            <a:noFill/>
+          </a:ln>
+        </p:spPr>
+        <p:style>
+          <a:lnRef idx="1">
+            <a:schemeClr val="accent1"/>
+          </a:lnRef>
+          <a:fillRef idx="3">
+            <a:schemeClr val="accent1"/>
+          </a:fillRef>
+          <a:effectRef idx="2">
+            <a:schemeClr val="accent1"/>
+          </a:effectRef>
+          <a:fontRef idx="minor">
+            <a:schemeClr val="lt1"/>
+          </a:fontRef>
+        </p:style>
+        <p:txBody>
+          <a:bodyPr rtlCol="0" anchor="ctr"/>
+          <a:lstStyle/>
+          <a:p>
+            <a:pPr algn="ctr"/>
+          </a:p>
+        </p:txBody>
+      </p:sp>
+      <p:sp>
+        <p:nvSpPr>
+          <p:cNvPr id="6" name="Rounded Rectangle 5"/>
+          <p:cNvSpPr/>
+          <p:nvPr/>
+        </p:nvSpPr>
+        <p:spPr>
+          <a:xfrm>
+            <a:off x="594360" y="1490472"/>
+            <a:ext cx="438912" cy="438912"/>
+          </a:xfrm>
+          <a:prstGeom prst="roundRect">
+            <a:avLst>
+              <a:gd name="adj" fmla="val 12000"/>
+            </a:avLst>
+          </a:prstGeom>
+          <a:solidFill>
+            <a:srgbClr val="095292"/>
+          </a:solidFill>
+          <a:ln>
+            <a:noFill/>
+          </a:ln>
+        </p:spPr>
+        <p:style>
+          <a:lnRef idx="1">
+            <a:schemeClr val="accent1"/>
+          </a:lnRef>
+          <a:fillRef idx="3">
+            <a:schemeClr val="accent1"/>
+          </a:fillRef>
+          <a:effectRef idx="2">
+            <a:schemeClr val="accent1"/>
+          </a:effectRef>
+          <a:fontRef idx="minor">
+            <a:schemeClr val="lt1"/>
+          </a:fontRef>
+        </p:style>
+        <p:txBody>
+          <a:bodyPr rtlCol="0" anchor="ctr"/>
+          <a:lstStyle/>
+          <a:p>
+            <a:pPr algn="ctr"/>
+          </a:p>
+        </p:txBody>
+      </p:sp>
+      <p:sp>
+        <p:nvSpPr>
+          <p:cNvPr id="7" name="TextBox 6"/>
           <p:cNvSpPr txBox="1"/>
           <p:nvPr/>
         </p:nvSpPr>
         <p:spPr>
           <a:xfrm>
-            <a:off x="457200" y="1170432"/>
-            <a:ext cx="11277295" cy="5230368"/>
+            <a:off x="594360" y="1490472"/>
+            <a:ext cx="438912" cy="438912"/>
           </a:xfrm>
           <a:prstGeom prst="rect">
             <a:avLst/>
@@ -7702,219 +7393,677 @@
           <a:noFill/>
         </p:spPr>
         <p:txBody>
-          <a:bodyPr wrap="square">
-            <a:spAutoFit/>
-          </a:bodyPr>
-          <a:lstStyle/>
-          <a:p>
-            <a:pPr>
-              <a:spcAft>
-                <a:spcPts val="800"/>
-              </a:spcAft>
-            </a:pPr>
-            <a:r>
-              <a:rPr sz="2000" b="0" i="0">
-                <a:solidFill>
-                  <a:srgbClr val="333333"/>
-                </a:solidFill>
-                <a:latin typeface="Calibri"/>
-              </a:rPr>
-              <a:t>–   </a:t>
-            </a:r>
-            <a:r>
-              <a:rPr sz="2000" b="1" i="0">
-                <a:solidFill>
-                  <a:srgbClr val="333333"/>
-                </a:solidFill>
-                <a:latin typeface="Calibri"/>
-              </a:rPr>
-              <a:t>Entregable:</a:t>
-            </a:r>
-            <a:r>
-              <a:rPr sz="2000" b="0" i="0">
-                <a:solidFill>
-                  <a:srgbClr val="333333"/>
-                </a:solidFill>
-                <a:latin typeface="Calibri"/>
-              </a:rPr>
-              <a:t> Un tablero en draw.io o Excalidraw con el Product Backlog priorizado de VetCare y las columnas de flujo con limite de trabajo en curso, mas un documento con el plan de tres sprints (objetivo y entregable de diseño de cada uno), la Definicion de Terminado y tres historias de usuario con criterios en formato Dado/Cuando/Entonces.</a:t>
-            </a:r>
-          </a:p>
-          <a:p>
-            <a:pPr>
-              <a:spcAft>
-                <a:spcPts val="800"/>
-              </a:spcAft>
-            </a:pPr>
-            <a:r>
-              <a:rPr sz="2000" b="0" i="0">
-                <a:solidFill>
-                  <a:srgbClr val="333333"/>
-                </a:solidFill>
-                <a:latin typeface="Calibri"/>
-              </a:rPr>
-              <a:t>–   </a:t>
-            </a:r>
-            <a:r>
-              <a:rPr sz="2000" b="1" i="0">
-                <a:solidFill>
-                  <a:srgbClr val="333333"/>
-                </a:solidFill>
-                <a:latin typeface="Calibri"/>
-              </a:rPr>
-              <a:t>Exito:</a:t>
-            </a:r>
-            <a:r>
-              <a:rPr sz="2000" b="0" i="0">
-                <a:solidFill>
-                  <a:srgbClr val="333333"/>
-                </a:solidFill>
-                <a:latin typeface="Calibri"/>
-              </a:rPr>
-              <a:t> El backlog esta priorizado con un orden explicito y cada item tiene una justificacion de valor para la clinica, no un orden arbitrario.</a:t>
-            </a:r>
-          </a:p>
-          <a:p>
-            <a:pPr>
-              <a:spcAft>
-                <a:spcPts val="800"/>
-              </a:spcAft>
-            </a:pPr>
-            <a:r>
-              <a:rPr sz="2000" b="0" i="0">
-                <a:solidFill>
-                  <a:srgbClr val="333333"/>
-                </a:solidFill>
-                <a:latin typeface="Calibri"/>
-              </a:rPr>
-              <a:t>–   </a:t>
-            </a:r>
-            <a:r>
-              <a:rPr sz="2000" b="1" i="0">
-                <a:solidFill>
-                  <a:srgbClr val="333333"/>
-                </a:solidFill>
-                <a:latin typeface="Calibri"/>
-              </a:rPr>
-              <a:t>Exito:</a:t>
-            </a:r>
-            <a:r>
-              <a:rPr sz="2000" b="0" i="0">
-                <a:solidFill>
-                  <a:srgbClr val="333333"/>
-                </a:solidFill>
-                <a:latin typeface="Calibri"/>
-              </a:rPr>
-              <a:t> Las tres historias siguen la estructura Como / quiero / para y cada una tiene al menos dos escenarios en Dado/Cuando/Entonces, incluido uno alternativo o de error.</a:t>
-            </a:r>
-          </a:p>
-          <a:p>
-            <a:pPr>
-              <a:spcAft>
-                <a:spcPts val="800"/>
-              </a:spcAft>
-            </a:pPr>
-            <a:r>
-              <a:rPr sz="2000" b="0" i="0">
-                <a:solidFill>
-                  <a:srgbClr val="333333"/>
-                </a:solidFill>
-                <a:latin typeface="Calibri"/>
-              </a:rPr>
-              <a:t>–   </a:t>
-            </a:r>
-            <a:r>
-              <a:rPr sz="2000" b="1" i="0">
-                <a:solidFill>
-                  <a:srgbClr val="333333"/>
-                </a:solidFill>
-                <a:latin typeface="Calibri"/>
-              </a:rPr>
-              <a:t>Exito:</a:t>
-            </a:r>
-            <a:r>
-              <a:rPr sz="2000" b="0" i="0">
-                <a:solidFill>
-                  <a:srgbClr val="333333"/>
-                </a:solidFill>
-                <a:latin typeface="Calibri"/>
-              </a:rPr>
-              <a:t> Cada sprint del plan termina en un incremento que la clinica podria ver y opinar (mockup, prototipo, diagrama revisado), no en trabajo interno invisible.</a:t>
-            </a:r>
-          </a:p>
-          <a:p>
-            <a:pPr>
-              <a:spcAft>
-                <a:spcPts val="800"/>
-              </a:spcAft>
-            </a:pPr>
-            <a:r>
-              <a:rPr sz="2000" b="0" i="0">
-                <a:solidFill>
-                  <a:srgbClr val="333333"/>
-                </a:solidFill>
-                <a:latin typeface="Calibri"/>
-              </a:rPr>
-              <a:t>–   </a:t>
-            </a:r>
-            <a:r>
-              <a:rPr sz="2000" b="1" i="0">
-                <a:solidFill>
-                  <a:srgbClr val="333333"/>
-                </a:solidFill>
-                <a:latin typeface="Calibri"/>
-              </a:rPr>
-              <a:t>Exito:</a:t>
-            </a:r>
-            <a:r>
-              <a:rPr sz="2000" b="0" i="0">
-                <a:solidFill>
-                  <a:srgbClr val="333333"/>
-                </a:solidFill>
-                <a:latin typeface="Calibri"/>
-              </a:rPr>
-              <a:t> El tablero declara la Definicion de Terminado y el limite de trabajo en curso, y ninguna columna del medio tiene mas tarjetas que su limite.</a:t>
-            </a:r>
-          </a:p>
-          <a:p>
-            <a:pPr>
-              <a:spcAft>
-                <a:spcPts val="800"/>
-              </a:spcAft>
-            </a:pPr>
-            <a:r>
-              <a:rPr sz="2000" b="0" i="0">
-                <a:solidFill>
-                  <a:srgbClr val="333333"/>
-                </a:solidFill>
-                <a:latin typeface="Calibri"/>
-              </a:rPr>
-              <a:t>–   </a:t>
-            </a:r>
-            <a:r>
-              <a:rPr sz="2000" b="1" i="0">
-                <a:solidFill>
-                  <a:srgbClr val="333333"/>
-                </a:solidFill>
-                <a:latin typeface="Calibri"/>
-              </a:rPr>
-              <a:t>Entrega en la plataforma del curso</a:t>
-            </a:r>
-            <a:r>
-              <a:rPr sz="2000" b="0" i="0">
-                <a:solidFill>
-                  <a:srgbClr val="333333"/>
-                </a:solidFill>
-                <a:latin typeface="Calibri"/>
-              </a:rPr>
-              <a:t> — en la fecha que indique el docente.</a:t>
-            </a:r>
-          </a:p>
-        </p:txBody>
-      </p:sp>
-      <p:sp>
-        <p:nvSpPr>
-          <p:cNvPr id="6" name="TextBox 5"/>
+          <a:bodyPr wrap="square" anchor="ctr"/>
+          <a:lstStyle/>
+          <a:p>
+            <a:pPr algn="ctr"/>
+            <a:r>
+              <a:rPr sz="1600" b="1" i="0">
+                <a:solidFill>
+                  <a:srgbClr val="FFFFFF"/>
+                </a:solidFill>
+                <a:latin typeface="Calibri"/>
+              </a:rPr>
+              <a:t>1</a:t>
+            </a:r>
+          </a:p>
+        </p:txBody>
+      </p:sp>
+      <p:sp>
+        <p:nvSpPr>
+          <p:cNvPr id="8" name="TextBox 7"/>
+          <p:cNvSpPr txBox="1"/>
+          <p:nvPr/>
+        </p:nvSpPr>
+        <p:spPr>
+          <a:xfrm>
+            <a:off x="1188720" y="1325880"/>
+            <a:ext cx="10271455" cy="786384"/>
+          </a:xfrm>
+          <a:prstGeom prst="rect">
+            <a:avLst/>
+          </a:prstGeom>
+          <a:noFill/>
+        </p:spPr>
+        <p:txBody>
+          <a:bodyPr wrap="square" anchor="ctr"/>
+          <a:lstStyle/>
+          <a:p>
+            <a:r>
+              <a:rPr sz="1500" b="1" i="0">
+                <a:solidFill>
+                  <a:srgbClr val="095292"/>
+                </a:solidFill>
+                <a:latin typeface="Calibri"/>
+              </a:rPr>
+              <a:t>En Google Docs escriba el Product Backlog de VetCare con al menos ocho items redactados como historias de usuario cortas, cada uno con prioridad (Alta/Media/Baja) y una justificacion de valor para Huellitas en una linea.</a:t>
+            </a:r>
+          </a:p>
+        </p:txBody>
+      </p:sp>
+      <p:sp>
+        <p:nvSpPr>
+          <p:cNvPr id="9" name="Rounded Rectangle 8"/>
+          <p:cNvSpPr/>
+          <p:nvPr/>
+        </p:nvSpPr>
+        <p:spPr>
+          <a:xfrm>
+            <a:off x="457200" y="2276856"/>
+            <a:ext cx="11277295" cy="950976"/>
+          </a:xfrm>
+          <a:prstGeom prst="roundRect">
+            <a:avLst>
+              <a:gd name="adj" fmla="val 12000"/>
+            </a:avLst>
+          </a:prstGeom>
+          <a:solidFill>
+            <a:srgbClr val="E8F4FA"/>
+          </a:solidFill>
+          <a:ln>
+            <a:noFill/>
+          </a:ln>
+        </p:spPr>
+        <p:style>
+          <a:lnRef idx="1">
+            <a:schemeClr val="accent1"/>
+          </a:lnRef>
+          <a:fillRef idx="3">
+            <a:schemeClr val="accent1"/>
+          </a:fillRef>
+          <a:effectRef idx="2">
+            <a:schemeClr val="accent1"/>
+          </a:effectRef>
+          <a:fontRef idx="minor">
+            <a:schemeClr val="lt1"/>
+          </a:fontRef>
+        </p:style>
+        <p:txBody>
+          <a:bodyPr rtlCol="0" anchor="ctr"/>
+          <a:lstStyle/>
+          <a:p>
+            <a:pPr algn="ctr"/>
+          </a:p>
+        </p:txBody>
+      </p:sp>
+      <p:sp>
+        <p:nvSpPr>
+          <p:cNvPr id="10" name="Rounded Rectangle 9"/>
+          <p:cNvSpPr/>
+          <p:nvPr/>
+        </p:nvSpPr>
+        <p:spPr>
+          <a:xfrm>
+            <a:off x="594360" y="2532888"/>
+            <a:ext cx="438912" cy="438912"/>
+          </a:xfrm>
+          <a:prstGeom prst="roundRect">
+            <a:avLst>
+              <a:gd name="adj" fmla="val 12000"/>
+            </a:avLst>
+          </a:prstGeom>
+          <a:solidFill>
+            <a:srgbClr val="095292"/>
+          </a:solidFill>
+          <a:ln>
+            <a:noFill/>
+          </a:ln>
+        </p:spPr>
+        <p:style>
+          <a:lnRef idx="1">
+            <a:schemeClr val="accent1"/>
+          </a:lnRef>
+          <a:fillRef idx="3">
+            <a:schemeClr val="accent1"/>
+          </a:fillRef>
+          <a:effectRef idx="2">
+            <a:schemeClr val="accent1"/>
+          </a:effectRef>
+          <a:fontRef idx="minor">
+            <a:schemeClr val="lt1"/>
+          </a:fontRef>
+        </p:style>
+        <p:txBody>
+          <a:bodyPr rtlCol="0" anchor="ctr"/>
+          <a:lstStyle/>
+          <a:p>
+            <a:pPr algn="ctr"/>
+          </a:p>
+        </p:txBody>
+      </p:sp>
+      <p:sp>
+        <p:nvSpPr>
+          <p:cNvPr id="11" name="TextBox 10"/>
+          <p:cNvSpPr txBox="1"/>
+          <p:nvPr/>
+        </p:nvSpPr>
+        <p:spPr>
+          <a:xfrm>
+            <a:off x="594360" y="2532888"/>
+            <a:ext cx="438912" cy="438912"/>
+          </a:xfrm>
+          <a:prstGeom prst="rect">
+            <a:avLst/>
+          </a:prstGeom>
+          <a:noFill/>
+        </p:spPr>
+        <p:txBody>
+          <a:bodyPr wrap="square" anchor="ctr"/>
+          <a:lstStyle/>
+          <a:p>
+            <a:pPr algn="ctr"/>
+            <a:r>
+              <a:rPr sz="1600" b="1" i="0">
+                <a:solidFill>
+                  <a:srgbClr val="FFFFFF"/>
+                </a:solidFill>
+                <a:latin typeface="Calibri"/>
+              </a:rPr>
+              <a:t>2</a:t>
+            </a:r>
+          </a:p>
+        </p:txBody>
+      </p:sp>
+      <p:sp>
+        <p:nvSpPr>
+          <p:cNvPr id="12" name="TextBox 11"/>
+          <p:cNvSpPr txBox="1"/>
+          <p:nvPr/>
+        </p:nvSpPr>
+        <p:spPr>
+          <a:xfrm>
+            <a:off x="1188720" y="2368296"/>
+            <a:ext cx="10271455" cy="786384"/>
+          </a:xfrm>
+          <a:prstGeom prst="rect">
+            <a:avLst/>
+          </a:prstGeom>
+          <a:noFill/>
+        </p:spPr>
+        <p:txBody>
+          <a:bodyPr wrap="square" anchor="ctr"/>
+          <a:lstStyle/>
+          <a:p>
+            <a:r>
+              <a:rPr sz="1500" b="1" i="0">
+                <a:solidFill>
+                  <a:srgbClr val="095292"/>
+                </a:solidFill>
+                <a:latin typeface="Calibri"/>
+              </a:rPr>
+              <a:t>Priorice el backlog en orden de arriba hacia abajo y explique por escrito, en dos renglones, por que el primer item es el primero (pista: resuelve uno de los tres dolores de la clinica).</a:t>
+            </a:r>
+          </a:p>
+        </p:txBody>
+      </p:sp>
+      <p:sp>
+        <p:nvSpPr>
+          <p:cNvPr id="13" name="Rounded Rectangle 12"/>
+          <p:cNvSpPr/>
+          <p:nvPr/>
+        </p:nvSpPr>
+        <p:spPr>
+          <a:xfrm>
+            <a:off x="457200" y="3319272"/>
+            <a:ext cx="11277295" cy="950976"/>
+          </a:xfrm>
+          <a:prstGeom prst="roundRect">
+            <a:avLst>
+              <a:gd name="adj" fmla="val 12000"/>
+            </a:avLst>
+          </a:prstGeom>
+          <a:solidFill>
+            <a:srgbClr val="F2F2F2"/>
+          </a:solidFill>
+          <a:ln>
+            <a:noFill/>
+          </a:ln>
+        </p:spPr>
+        <p:style>
+          <a:lnRef idx="1">
+            <a:schemeClr val="accent1"/>
+          </a:lnRef>
+          <a:fillRef idx="3">
+            <a:schemeClr val="accent1"/>
+          </a:fillRef>
+          <a:effectRef idx="2">
+            <a:schemeClr val="accent1"/>
+          </a:effectRef>
+          <a:fontRef idx="minor">
+            <a:schemeClr val="lt1"/>
+          </a:fontRef>
+        </p:style>
+        <p:txBody>
+          <a:bodyPr rtlCol="0" anchor="ctr"/>
+          <a:lstStyle/>
+          <a:p>
+            <a:pPr algn="ctr"/>
+          </a:p>
+        </p:txBody>
+      </p:sp>
+      <p:sp>
+        <p:nvSpPr>
+          <p:cNvPr id="14" name="Rounded Rectangle 13"/>
+          <p:cNvSpPr/>
+          <p:nvPr/>
+        </p:nvSpPr>
+        <p:spPr>
+          <a:xfrm>
+            <a:off x="594360" y="3575304"/>
+            <a:ext cx="438912" cy="438912"/>
+          </a:xfrm>
+          <a:prstGeom prst="roundRect">
+            <a:avLst>
+              <a:gd name="adj" fmla="val 12000"/>
+            </a:avLst>
+          </a:prstGeom>
+          <a:solidFill>
+            <a:srgbClr val="095292"/>
+          </a:solidFill>
+          <a:ln>
+            <a:noFill/>
+          </a:ln>
+        </p:spPr>
+        <p:style>
+          <a:lnRef idx="1">
+            <a:schemeClr val="accent1"/>
+          </a:lnRef>
+          <a:fillRef idx="3">
+            <a:schemeClr val="accent1"/>
+          </a:fillRef>
+          <a:effectRef idx="2">
+            <a:schemeClr val="accent1"/>
+          </a:effectRef>
+          <a:fontRef idx="minor">
+            <a:schemeClr val="lt1"/>
+          </a:fontRef>
+        </p:style>
+        <p:txBody>
+          <a:bodyPr rtlCol="0" anchor="ctr"/>
+          <a:lstStyle/>
+          <a:p>
+            <a:pPr algn="ctr"/>
+          </a:p>
+        </p:txBody>
+      </p:sp>
+      <p:sp>
+        <p:nvSpPr>
+          <p:cNvPr id="15" name="TextBox 14"/>
+          <p:cNvSpPr txBox="1"/>
+          <p:nvPr/>
+        </p:nvSpPr>
+        <p:spPr>
+          <a:xfrm>
+            <a:off x="594360" y="3575304"/>
+            <a:ext cx="438912" cy="438912"/>
+          </a:xfrm>
+          <a:prstGeom prst="rect">
+            <a:avLst/>
+          </a:prstGeom>
+          <a:noFill/>
+        </p:spPr>
+        <p:txBody>
+          <a:bodyPr wrap="square" anchor="ctr"/>
+          <a:lstStyle/>
+          <a:p>
+            <a:pPr algn="ctr"/>
+            <a:r>
+              <a:rPr sz="1600" b="1" i="0">
+                <a:solidFill>
+                  <a:srgbClr val="FFFFFF"/>
+                </a:solidFill>
+                <a:latin typeface="Calibri"/>
+              </a:rPr>
+              <a:t>3</a:t>
+            </a:r>
+          </a:p>
+        </p:txBody>
+      </p:sp>
+      <p:sp>
+        <p:nvSpPr>
+          <p:cNvPr id="16" name="TextBox 15"/>
+          <p:cNvSpPr txBox="1"/>
+          <p:nvPr/>
+        </p:nvSpPr>
+        <p:spPr>
+          <a:xfrm>
+            <a:off x="1188720" y="3410712"/>
+            <a:ext cx="10271455" cy="786384"/>
+          </a:xfrm>
+          <a:prstGeom prst="rect">
+            <a:avLst/>
+          </a:prstGeom>
+          <a:noFill/>
+        </p:spPr>
+        <p:txBody>
+          <a:bodyPr wrap="square" anchor="ctr"/>
+          <a:lstStyle/>
+          <a:p>
+            <a:r>
+              <a:rPr sz="1500" b="1" i="0">
+                <a:solidFill>
+                  <a:srgbClr val="095292"/>
+                </a:solidFill>
+                <a:latin typeface="Calibri"/>
+              </a:rPr>
+              <a:t>Escriba tres historias completas con criterios de aceptacion en formato Dado/Cuando/Entonces, y asegurese de que cada historia tenga al menos un escenario alternativo o de error, no solo el camino feliz.</a:t>
+            </a:r>
+          </a:p>
+        </p:txBody>
+      </p:sp>
+      <p:sp>
+        <p:nvSpPr>
+          <p:cNvPr id="17" name="Rounded Rectangle 16"/>
+          <p:cNvSpPr/>
+          <p:nvPr/>
+        </p:nvSpPr>
+        <p:spPr>
+          <a:xfrm>
+            <a:off x="457200" y="4361688"/>
+            <a:ext cx="11277295" cy="950976"/>
+          </a:xfrm>
+          <a:prstGeom prst="roundRect">
+            <a:avLst>
+              <a:gd name="adj" fmla="val 12000"/>
+            </a:avLst>
+          </a:prstGeom>
+          <a:solidFill>
+            <a:srgbClr val="E8F4FA"/>
+          </a:solidFill>
+          <a:ln>
+            <a:noFill/>
+          </a:ln>
+        </p:spPr>
+        <p:style>
+          <a:lnRef idx="1">
+            <a:schemeClr val="accent1"/>
+          </a:lnRef>
+          <a:fillRef idx="3">
+            <a:schemeClr val="accent1"/>
+          </a:fillRef>
+          <a:effectRef idx="2">
+            <a:schemeClr val="accent1"/>
+          </a:effectRef>
+          <a:fontRef idx="minor">
+            <a:schemeClr val="lt1"/>
+          </a:fontRef>
+        </p:style>
+        <p:txBody>
+          <a:bodyPr rtlCol="0" anchor="ctr"/>
+          <a:lstStyle/>
+          <a:p>
+            <a:pPr algn="ctr"/>
+          </a:p>
+        </p:txBody>
+      </p:sp>
+      <p:sp>
+        <p:nvSpPr>
+          <p:cNvPr id="18" name="Rounded Rectangle 17"/>
+          <p:cNvSpPr/>
+          <p:nvPr/>
+        </p:nvSpPr>
+        <p:spPr>
+          <a:xfrm>
+            <a:off x="594360" y="4617720"/>
+            <a:ext cx="438912" cy="438912"/>
+          </a:xfrm>
+          <a:prstGeom prst="roundRect">
+            <a:avLst>
+              <a:gd name="adj" fmla="val 12000"/>
+            </a:avLst>
+          </a:prstGeom>
+          <a:solidFill>
+            <a:srgbClr val="095292"/>
+          </a:solidFill>
+          <a:ln>
+            <a:noFill/>
+          </a:ln>
+        </p:spPr>
+        <p:style>
+          <a:lnRef idx="1">
+            <a:schemeClr val="accent1"/>
+          </a:lnRef>
+          <a:fillRef idx="3">
+            <a:schemeClr val="accent1"/>
+          </a:fillRef>
+          <a:effectRef idx="2">
+            <a:schemeClr val="accent1"/>
+          </a:effectRef>
+          <a:fontRef idx="minor">
+            <a:schemeClr val="lt1"/>
+          </a:fontRef>
+        </p:style>
+        <p:txBody>
+          <a:bodyPr rtlCol="0" anchor="ctr"/>
+          <a:lstStyle/>
+          <a:p>
+            <a:pPr algn="ctr"/>
+          </a:p>
+        </p:txBody>
+      </p:sp>
+      <p:sp>
+        <p:nvSpPr>
+          <p:cNvPr id="19" name="TextBox 18"/>
+          <p:cNvSpPr txBox="1"/>
+          <p:nvPr/>
+        </p:nvSpPr>
+        <p:spPr>
+          <a:xfrm>
+            <a:off x="594360" y="4617720"/>
+            <a:ext cx="438912" cy="438912"/>
+          </a:xfrm>
+          <a:prstGeom prst="rect">
+            <a:avLst/>
+          </a:prstGeom>
+          <a:noFill/>
+        </p:spPr>
+        <p:txBody>
+          <a:bodyPr wrap="square" anchor="ctr"/>
+          <a:lstStyle/>
+          <a:p>
+            <a:pPr algn="ctr"/>
+            <a:r>
+              <a:rPr sz="1600" b="1" i="0">
+                <a:solidFill>
+                  <a:srgbClr val="FFFFFF"/>
+                </a:solidFill>
+                <a:latin typeface="Calibri"/>
+              </a:rPr>
+              <a:t>4</a:t>
+            </a:r>
+          </a:p>
+        </p:txBody>
+      </p:sp>
+      <p:sp>
+        <p:nvSpPr>
+          <p:cNvPr id="20" name="TextBox 19"/>
+          <p:cNvSpPr txBox="1"/>
+          <p:nvPr/>
+        </p:nvSpPr>
+        <p:spPr>
+          <a:xfrm>
+            <a:off x="1188720" y="4453128"/>
+            <a:ext cx="10271455" cy="786384"/>
+          </a:xfrm>
+          <a:prstGeom prst="rect">
+            <a:avLst/>
+          </a:prstGeom>
+          <a:noFill/>
+        </p:spPr>
+        <p:txBody>
+          <a:bodyPr wrap="square" anchor="ctr"/>
+          <a:lstStyle/>
+          <a:p>
+            <a:r>
+              <a:rPr sz="1500" b="1" i="0">
+                <a:solidFill>
+                  <a:srgbClr val="095292"/>
+                </a:solidFill>
+                <a:latin typeface="Calibri"/>
+              </a:rPr>
+              <a:t>Redacte la Definicion de Terminado para artefactos de diseño (por ejemplo: tiene diagrama en draw.io, tiene mockup, esta revisado por un compañero y tiene el visto bueno del cliente) y escribala en la cabecera del tablero.</a:t>
+            </a:r>
+          </a:p>
+        </p:txBody>
+      </p:sp>
+      <p:sp>
+        <p:nvSpPr>
+          <p:cNvPr id="21" name="Rounded Rectangle 20"/>
+          <p:cNvSpPr/>
+          <p:nvPr/>
+        </p:nvSpPr>
+        <p:spPr>
+          <a:xfrm>
+            <a:off x="457200" y="5404104"/>
+            <a:ext cx="11277295" cy="950976"/>
+          </a:xfrm>
+          <a:prstGeom prst="roundRect">
+            <a:avLst>
+              <a:gd name="adj" fmla="val 12000"/>
+            </a:avLst>
+          </a:prstGeom>
+          <a:solidFill>
+            <a:srgbClr val="F2F2F2"/>
+          </a:solidFill>
+          <a:ln>
+            <a:noFill/>
+          </a:ln>
+        </p:spPr>
+        <p:style>
+          <a:lnRef idx="1">
+            <a:schemeClr val="accent1"/>
+          </a:lnRef>
+          <a:fillRef idx="3">
+            <a:schemeClr val="accent1"/>
+          </a:fillRef>
+          <a:effectRef idx="2">
+            <a:schemeClr val="accent1"/>
+          </a:effectRef>
+          <a:fontRef idx="minor">
+            <a:schemeClr val="lt1"/>
+          </a:fontRef>
+        </p:style>
+        <p:txBody>
+          <a:bodyPr rtlCol="0" anchor="ctr"/>
+          <a:lstStyle/>
+          <a:p>
+            <a:pPr algn="ctr"/>
+          </a:p>
+        </p:txBody>
+      </p:sp>
+      <p:sp>
+        <p:nvSpPr>
+          <p:cNvPr id="22" name="Rounded Rectangle 21"/>
+          <p:cNvSpPr/>
+          <p:nvPr/>
+        </p:nvSpPr>
+        <p:spPr>
+          <a:xfrm>
+            <a:off x="594360" y="5660136"/>
+            <a:ext cx="438912" cy="438912"/>
+          </a:xfrm>
+          <a:prstGeom prst="roundRect">
+            <a:avLst>
+              <a:gd name="adj" fmla="val 12000"/>
+            </a:avLst>
+          </a:prstGeom>
+          <a:solidFill>
+            <a:srgbClr val="095292"/>
+          </a:solidFill>
+          <a:ln>
+            <a:noFill/>
+          </a:ln>
+        </p:spPr>
+        <p:style>
+          <a:lnRef idx="1">
+            <a:schemeClr val="accent1"/>
+          </a:lnRef>
+          <a:fillRef idx="3">
+            <a:schemeClr val="accent1"/>
+          </a:fillRef>
+          <a:effectRef idx="2">
+            <a:schemeClr val="accent1"/>
+          </a:effectRef>
+          <a:fontRef idx="minor">
+            <a:schemeClr val="lt1"/>
+          </a:fontRef>
+        </p:style>
+        <p:txBody>
+          <a:bodyPr rtlCol="0" anchor="ctr"/>
+          <a:lstStyle/>
+          <a:p>
+            <a:pPr algn="ctr"/>
+          </a:p>
+        </p:txBody>
+      </p:sp>
+      <p:sp>
+        <p:nvSpPr>
+          <p:cNvPr id="23" name="TextBox 22"/>
+          <p:cNvSpPr txBox="1"/>
+          <p:nvPr/>
+        </p:nvSpPr>
+        <p:spPr>
+          <a:xfrm>
+            <a:off x="594360" y="5660136"/>
+            <a:ext cx="438912" cy="438912"/>
+          </a:xfrm>
+          <a:prstGeom prst="rect">
+            <a:avLst/>
+          </a:prstGeom>
+          <a:noFill/>
+        </p:spPr>
+        <p:txBody>
+          <a:bodyPr wrap="square" anchor="ctr"/>
+          <a:lstStyle/>
+          <a:p>
+            <a:pPr algn="ctr"/>
+            <a:r>
+              <a:rPr sz="1600" b="1" i="0">
+                <a:solidFill>
+                  <a:srgbClr val="FFFFFF"/>
+                </a:solidFill>
+                <a:latin typeface="Calibri"/>
+              </a:rPr>
+              <a:t>5</a:t>
+            </a:r>
+          </a:p>
+        </p:txBody>
+      </p:sp>
+      <p:sp>
+        <p:nvSpPr>
+          <p:cNvPr id="24" name="TextBox 23"/>
+          <p:cNvSpPr txBox="1"/>
+          <p:nvPr/>
+        </p:nvSpPr>
+        <p:spPr>
+          <a:xfrm>
+            <a:off x="1188720" y="5495544"/>
+            <a:ext cx="10271455" cy="786384"/>
+          </a:xfrm>
+          <a:prstGeom prst="rect">
+            <a:avLst/>
+          </a:prstGeom>
+          <a:noFill/>
+        </p:spPr>
+        <p:txBody>
+          <a:bodyPr wrap="square" anchor="ctr"/>
+          <a:lstStyle/>
+          <a:p>
+            <a:r>
+              <a:rPr sz="1400" b="1" i="0">
+                <a:solidFill>
+                  <a:srgbClr val="095292"/>
+                </a:solidFill>
+                <a:latin typeface="Calibri"/>
+              </a:rPr>
+              <a:t>En draw.io o Excalidraw arme el tablero con las columnas Por hacer / Modelando / En revision del cliente / Aprobado, ponga el limite de trabajo en curso en dos para las columnas del medio, distribuya las tarjetas en tres sprints con su objetivo y entregable de diseño, exporte a PDF y suba a la plataforma del curso.</a:t>
+            </a:r>
+          </a:p>
+        </p:txBody>
+      </p:sp>
+      <p:sp>
+        <p:nvSpPr>
+          <p:cNvPr id="25" name="TextBox 24"/>
           <p:cNvSpPr txBox="1"/>
           <p:nvPr/>
         </p:nvSpPr>
@@ -8088,7 +8237,7 @@
                 </a:solidFill>
                 <a:latin typeface="Calibri"/>
               </a:rPr>
-              <a:t>Para el PI esta semana</a:t>
+              <a:t>Antes de entregar — autochequeo</a:t>
             </a:r>
           </a:p>
         </p:txBody>
@@ -8102,7 +8251,7 @@
         <p:spPr>
           <a:xfrm>
             <a:off x="457200" y="1261872"/>
-            <a:ext cx="11277295" cy="1051560"/>
+            <a:ext cx="11277295" cy="566928"/>
           </a:xfrm>
           <a:prstGeom prst="roundRect">
             <a:avLst>
@@ -8110,7 +8259,7 @@
             </a:avLst>
           </a:prstGeom>
           <a:solidFill>
-            <a:srgbClr val="E8F4FA"/>
+            <a:srgbClr val="F2F2F2"/>
           </a:solidFill>
           <a:ln>
             <a:noFill/>
@@ -8146,8 +8295,53 @@
         </p:nvSpPr>
         <p:spPr>
           <a:xfrm>
-            <a:off x="457200" y="1261872"/>
-            <a:ext cx="128016" cy="1051560"/>
+            <a:off x="640080" y="1408175"/>
+            <a:ext cx="274320" cy="274320"/>
+          </a:xfrm>
+          <a:prstGeom prst="rect">
+            <a:avLst/>
+          </a:prstGeom>
+          <a:solidFill>
+            <a:srgbClr val="FFFFFF"/>
+          </a:solidFill>
+          <a:ln>
+            <a:solidFill>
+              <a:srgbClr val="333333"/>
+            </a:solidFill>
+          </a:ln>
+        </p:spPr>
+        <p:style>
+          <a:lnRef idx="1">
+            <a:schemeClr val="accent1"/>
+          </a:lnRef>
+          <a:fillRef idx="3">
+            <a:schemeClr val="accent1"/>
+          </a:fillRef>
+          <a:effectRef idx="2">
+            <a:schemeClr val="accent1"/>
+          </a:effectRef>
+          <a:fontRef idx="minor">
+            <a:schemeClr val="lt1"/>
+          </a:fontRef>
+        </p:style>
+        <p:txBody>
+          <a:bodyPr rtlCol="0" anchor="ctr"/>
+          <a:lstStyle/>
+          <a:p>
+            <a:pPr algn="ctr"/>
+          </a:p>
+        </p:txBody>
+      </p:sp>
+      <p:sp>
+        <p:nvSpPr>
+          <p:cNvPr id="7" name="Rectangle 6"/>
+          <p:cNvSpPr/>
+          <p:nvPr/>
+        </p:nvSpPr>
+        <p:spPr>
+          <a:xfrm>
+            <a:off x="640080" y="1408175"/>
+            <a:ext cx="73152" cy="274320"/>
           </a:xfrm>
           <a:prstGeom prst="rect">
             <a:avLst/>
@@ -8183,14 +8377,14 @@
       </p:sp>
       <p:sp>
         <p:nvSpPr>
-          <p:cNvPr id="7" name="TextBox 6"/>
+          <p:cNvPr id="8" name="TextBox 7"/>
           <p:cNvSpPr txBox="1"/>
           <p:nvPr/>
         </p:nvSpPr>
         <p:spPr>
           <a:xfrm>
-            <a:off x="777240" y="1399031"/>
-            <a:ext cx="10774375" cy="822959"/>
+            <a:off x="1097280" y="1353312"/>
+            <a:ext cx="10362895" cy="402336"/>
           </a:xfrm>
           <a:prstGeom prst="rect">
             <a:avLst/>
@@ -8198,49 +8392,31 @@
           <a:noFill/>
         </p:spPr>
         <p:txBody>
-          <a:bodyPr wrap="square">
-            <a:spAutoFit/>
-          </a:bodyPr>
-          <a:lstStyle/>
-          <a:p>
-            <a:r>
-              <a:rPr sz="1200" b="1" i="0">
-                <a:solidFill>
-                  <a:srgbClr val="269CCB"/>
-                </a:solidFill>
-                <a:latin typeface="Calibri"/>
-              </a:rPr>
-              <a:t>Info</a:t>
-            </a:r>
-          </a:p>
-          <a:p>
-            <a:pPr>
-              <a:spcBef>
-                <a:spcPts val="400"/>
-              </a:spcBef>
-            </a:pPr>
-            <a:r>
-              <a:rPr sz="1400" b="0" i="0">
+          <a:bodyPr wrap="square" anchor="ctr"/>
+          <a:lstStyle/>
+          <a:p>
+            <a:r>
+              <a:rPr sz="1500" b="0" i="0">
                 <a:solidFill>
                   <a:srgbClr val="333333"/>
                 </a:solidFill>
                 <a:latin typeface="Calibri"/>
               </a:rPr>
-              <a:t>Hito: Queda listo el backlog priorizado de VetCare repartido en sprints del semestre, con las primeras historias de usuario escritas con criterios de aceptacion.</a:t>
-            </a:r>
-          </a:p>
-        </p:txBody>
-      </p:sp>
-      <p:sp>
-        <p:nvSpPr>
-          <p:cNvPr id="8" name="Rounded Rectangle 7"/>
+              <a:t>Si su sprint 1 se llama 'analisis' y el sprint 2 'diseño', que le va a mostrar a la veterinaria al terminar el sprint 1 que ella pueda entender y criticar?</a:t>
+            </a:r>
+          </a:p>
+        </p:txBody>
+      </p:sp>
+      <p:sp>
+        <p:nvSpPr>
+          <p:cNvPr id="9" name="Rounded Rectangle 8"/>
           <p:cNvSpPr/>
           <p:nvPr/>
         </p:nvSpPr>
         <p:spPr>
           <a:xfrm>
-            <a:off x="457200" y="2478024"/>
-            <a:ext cx="11277295" cy="1051560"/>
+            <a:off x="457200" y="1938528"/>
+            <a:ext cx="11277295" cy="566928"/>
           </a:xfrm>
           <a:prstGeom prst="roundRect">
             <a:avLst>
@@ -8248,7 +8424,7 @@
             </a:avLst>
           </a:prstGeom>
           <a:solidFill>
-            <a:srgbClr val="FFF8E1"/>
+            <a:srgbClr val="F2F2F2"/>
           </a:solidFill>
           <a:ln>
             <a:noFill/>
@@ -8278,23 +8454,25 @@
       </p:sp>
       <p:sp>
         <p:nvSpPr>
-          <p:cNvPr id="9" name="Rectangle 8"/>
+          <p:cNvPr id="10" name="Rectangle 9"/>
           <p:cNvSpPr/>
           <p:nvPr/>
         </p:nvSpPr>
         <p:spPr>
           <a:xfrm>
-            <a:off x="457200" y="2478024"/>
-            <a:ext cx="128016" cy="1051560"/>
+            <a:off x="640080" y="2084832"/>
+            <a:ext cx="274320" cy="274320"/>
           </a:xfrm>
           <a:prstGeom prst="rect">
             <a:avLst/>
           </a:prstGeom>
           <a:solidFill>
-            <a:srgbClr val="FFD000"/>
+            <a:srgbClr val="FFFFFF"/>
           </a:solidFill>
           <a:ln>
-            <a:noFill/>
+            <a:solidFill>
+              <a:srgbClr val="333333"/>
+            </a:solidFill>
           </a:ln>
         </p:spPr>
         <p:style>
@@ -8321,72 +8499,20 @@
       </p:sp>
       <p:sp>
         <p:nvSpPr>
-          <p:cNvPr id="10" name="TextBox 9"/>
-          <p:cNvSpPr txBox="1"/>
-          <p:nvPr/>
-        </p:nvSpPr>
-        <p:spPr>
-          <a:xfrm>
-            <a:off x="777240" y="2615184"/>
-            <a:ext cx="10774375" cy="822959"/>
-          </a:xfrm>
-          <a:prstGeom prst="rect">
-            <a:avLst/>
-          </a:prstGeom>
-          <a:noFill/>
-        </p:spPr>
-        <p:txBody>
-          <a:bodyPr wrap="square">
-            <a:spAutoFit/>
-          </a:bodyPr>
-          <a:lstStyle/>
-          <a:p>
-            <a:r>
-              <a:rPr sz="1200" b="1" i="0">
-                <a:solidFill>
-                  <a:srgbClr val="FFD000"/>
-                </a:solidFill>
-                <a:latin typeface="Calibri"/>
-              </a:rPr>
-              <a:t>Aclaración</a:t>
-            </a:r>
-          </a:p>
-          <a:p>
-            <a:pPr>
-              <a:spcBef>
-                <a:spcPts val="400"/>
-              </a:spcBef>
-            </a:pPr>
-            <a:r>
-              <a:rPr sz="1400" b="0" i="0">
-                <a:solidFill>
-                  <a:srgbClr val="333333"/>
-                </a:solidFill>
-                <a:latin typeface="Calibri"/>
-              </a:rPr>
-              <a:t>Enunciado completo: Clases/Proyecto Integrador/ (VetCare).</a:t>
-            </a:r>
-          </a:p>
-        </p:txBody>
-      </p:sp>
-      <p:sp>
-        <p:nvSpPr>
-          <p:cNvPr id="11" name="Rounded Rectangle 10"/>
+          <p:cNvPr id="11" name="Rectangle 10"/>
           <p:cNvSpPr/>
           <p:nvPr/>
         </p:nvSpPr>
         <p:spPr>
           <a:xfrm>
-            <a:off x="457200" y="3694176"/>
-            <a:ext cx="11277295" cy="1051560"/>
-          </a:xfrm>
-          <a:prstGeom prst="roundRect">
-            <a:avLst>
-              <a:gd name="adj" fmla="val 12000"/>
-            </a:avLst>
+            <a:off x="640080" y="2084832"/>
+            <a:ext cx="73152" cy="274320"/>
+          </a:xfrm>
+          <a:prstGeom prst="rect">
+            <a:avLst/>
           </a:prstGeom>
           <a:solidFill>
-            <a:srgbClr val="FBE4E4"/>
+            <a:srgbClr val="269CCB"/>
           </a:solidFill>
           <a:ln>
             <a:noFill/>
@@ -8416,20 +8542,54 @@
       </p:sp>
       <p:sp>
         <p:nvSpPr>
-          <p:cNvPr id="12" name="Rectangle 11"/>
+          <p:cNvPr id="12" name="TextBox 11"/>
+          <p:cNvSpPr txBox="1"/>
+          <p:nvPr/>
+        </p:nvSpPr>
+        <p:spPr>
+          <a:xfrm>
+            <a:off x="1097280" y="2029968"/>
+            <a:ext cx="10362895" cy="402336"/>
+          </a:xfrm>
+          <a:prstGeom prst="rect">
+            <a:avLst/>
+          </a:prstGeom>
+          <a:noFill/>
+        </p:spPr>
+        <p:txBody>
+          <a:bodyPr wrap="square" anchor="ctr"/>
+          <a:lstStyle/>
+          <a:p>
+            <a:r>
+              <a:rPr sz="1500" b="0" i="0">
+                <a:solidFill>
+                  <a:srgbClr val="333333"/>
+                </a:solidFill>
+                <a:latin typeface="Calibri"/>
+              </a:rPr>
+              <a:t>Sus criterios de aceptacion describen solo el camino feliz? Que pasa si la mascota no existe, si el nombre esta repetido o si la conexion se cae?</a:t>
+            </a:r>
+          </a:p>
+        </p:txBody>
+      </p:sp>
+      <p:sp>
+        <p:nvSpPr>
+          <p:cNvPr id="13" name="Rounded Rectangle 12"/>
           <p:cNvSpPr/>
           <p:nvPr/>
         </p:nvSpPr>
         <p:spPr>
           <a:xfrm>
-            <a:off x="457200" y="3694176"/>
-            <a:ext cx="128016" cy="1051560"/>
-          </a:xfrm>
-          <a:prstGeom prst="rect">
-            <a:avLst/>
+            <a:off x="457200" y="2615184"/>
+            <a:ext cx="11277295" cy="566928"/>
+          </a:xfrm>
+          <a:prstGeom prst="roundRect">
+            <a:avLst>
+              <a:gd name="adj" fmla="val 12000"/>
+            </a:avLst>
           </a:prstGeom>
           <a:solidFill>
-            <a:srgbClr val="A02030"/>
+            <a:srgbClr val="F2F2F2"/>
           </a:solidFill>
           <a:ln>
             <a:noFill/>
@@ -8459,14 +8619,102 @@
       </p:sp>
       <p:sp>
         <p:nvSpPr>
-          <p:cNvPr id="13" name="TextBox 12"/>
+          <p:cNvPr id="14" name="Rectangle 13"/>
+          <p:cNvSpPr/>
+          <p:nvPr/>
+        </p:nvSpPr>
+        <p:spPr>
+          <a:xfrm>
+            <a:off x="640080" y="2761488"/>
+            <a:ext cx="274320" cy="274320"/>
+          </a:xfrm>
+          <a:prstGeom prst="rect">
+            <a:avLst/>
+          </a:prstGeom>
+          <a:solidFill>
+            <a:srgbClr val="FFFFFF"/>
+          </a:solidFill>
+          <a:ln>
+            <a:solidFill>
+              <a:srgbClr val="333333"/>
+            </a:solidFill>
+          </a:ln>
+        </p:spPr>
+        <p:style>
+          <a:lnRef idx="1">
+            <a:schemeClr val="accent1"/>
+          </a:lnRef>
+          <a:fillRef idx="3">
+            <a:schemeClr val="accent1"/>
+          </a:fillRef>
+          <a:effectRef idx="2">
+            <a:schemeClr val="accent1"/>
+          </a:effectRef>
+          <a:fontRef idx="minor">
+            <a:schemeClr val="lt1"/>
+          </a:fontRef>
+        </p:style>
+        <p:txBody>
+          <a:bodyPr rtlCol="0" anchor="ctr"/>
+          <a:lstStyle/>
+          <a:p>
+            <a:pPr algn="ctr"/>
+          </a:p>
+        </p:txBody>
+      </p:sp>
+      <p:sp>
+        <p:nvSpPr>
+          <p:cNvPr id="15" name="Rectangle 14"/>
+          <p:cNvSpPr/>
+          <p:nvPr/>
+        </p:nvSpPr>
+        <p:spPr>
+          <a:xfrm>
+            <a:off x="640080" y="2761488"/>
+            <a:ext cx="73152" cy="274320"/>
+          </a:xfrm>
+          <a:prstGeom prst="rect">
+            <a:avLst/>
+          </a:prstGeom>
+          <a:solidFill>
+            <a:srgbClr val="269CCB"/>
+          </a:solidFill>
+          <a:ln>
+            <a:noFill/>
+          </a:ln>
+        </p:spPr>
+        <p:style>
+          <a:lnRef idx="1">
+            <a:schemeClr val="accent1"/>
+          </a:lnRef>
+          <a:fillRef idx="3">
+            <a:schemeClr val="accent1"/>
+          </a:fillRef>
+          <a:effectRef idx="2">
+            <a:schemeClr val="accent1"/>
+          </a:effectRef>
+          <a:fontRef idx="minor">
+            <a:schemeClr val="lt1"/>
+          </a:fontRef>
+        </p:style>
+        <p:txBody>
+          <a:bodyPr rtlCol="0" anchor="ctr"/>
+          <a:lstStyle/>
+          <a:p>
+            <a:pPr algn="ctr"/>
+          </a:p>
+        </p:txBody>
+      </p:sp>
+      <p:sp>
+        <p:nvSpPr>
+          <p:cNvPr id="16" name="TextBox 15"/>
           <p:cNvSpPr txBox="1"/>
           <p:nvPr/>
         </p:nvSpPr>
         <p:spPr>
           <a:xfrm>
-            <a:off x="777240" y="3831336"/>
-            <a:ext cx="10774375" cy="822959"/>
+            <a:off x="1097280" y="2706624"/>
+            <a:ext cx="10362895" cy="402336"/>
           </a:xfrm>
           <a:prstGeom prst="rect">
             <a:avLst/>
@@ -8474,42 +8722,24 @@
           <a:noFill/>
         </p:spPr>
         <p:txBody>
-          <a:bodyPr wrap="square">
-            <a:spAutoFit/>
-          </a:bodyPr>
-          <a:lstStyle/>
-          <a:p>
-            <a:r>
-              <a:rPr sz="1200" b="1" i="0">
-                <a:solidFill>
-                  <a:srgbClr val="A02030"/>
-                </a:solidFill>
-                <a:latin typeface="Calibri"/>
-              </a:rPr>
-              <a:t>Atención</a:t>
-            </a:r>
-          </a:p>
-          <a:p>
-            <a:pPr>
-              <a:spcBef>
-                <a:spcPts val="400"/>
-              </a:spcBef>
-            </a:pPr>
-            <a:r>
-              <a:rPr sz="1400" b="0" i="0">
+          <a:bodyPr wrap="square" anchor="ctr"/>
+          <a:lstStyle/>
+          <a:p>
+            <a:r>
+              <a:rPr sz="1500" b="0" i="0">
                 <a:solidFill>
                   <a:srgbClr val="333333"/>
                 </a:solidFill>
                 <a:latin typeface="Calibri"/>
               </a:rPr>
-              <a:t>Entrega del taller, si el docente lo asigna · en la fecha que indique el docente.</a:t>
-            </a:r>
-          </a:p>
-        </p:txBody>
-      </p:sp>
-      <p:sp>
-        <p:nvSpPr>
-          <p:cNvPr id="14" name="TextBox 13"/>
+              <a:t>Su Definicion de Terminado se puede verificar mirando el tablero, o incluye frases como 'que quede bien hecho' que nadie puede comprobar?</a:t>
+            </a:r>
+          </a:p>
+        </p:txBody>
+      </p:sp>
+      <p:sp>
+        <p:nvSpPr>
+          <p:cNvPr id="17" name="TextBox 16"/>
           <p:cNvSpPr txBox="1"/>
           <p:nvPr/>
         </p:nvSpPr>
@@ -8577,13 +8807,13 @@
         <p:spPr>
           <a:xfrm>
             <a:off x="0" y="0"/>
-            <a:ext cx="12191695" cy="164592"/>
+            <a:ext cx="12191695" cy="960120"/>
           </a:xfrm>
           <a:prstGeom prst="rect">
             <a:avLst/>
           </a:prstGeom>
           <a:solidFill>
-            <a:srgbClr val="269CCB"/>
+            <a:srgbClr val="095292"/>
           </a:solidFill>
           <a:ln>
             <a:noFill/>
@@ -8611,30 +8841,49 @@
           </a:p>
         </p:txBody>
       </p:sp>
-      <p:pic>
-        <p:nvPicPr>
-          <p:cNvPr id="3" name="Picture 2" descr="logo_uniajc_color.png"/>
-          <p:cNvPicPr>
-            <a:picLocks noChangeAspect="1"/>
-          </p:cNvPicPr>
-          <p:nvPr/>
-        </p:nvPicPr>
-        <p:blipFill>
-          <a:blip r:embed="rId2"/>
-          <a:stretch>
-            <a:fillRect/>
-          </a:stretch>
-        </p:blipFill>
-        <p:spPr>
-          <a:xfrm>
-            <a:off x="10271455" y="5998464"/>
-            <a:ext cx="1463040" cy="643233"/>
-          </a:xfrm>
-          <a:prstGeom prst="rect">
-            <a:avLst/>
-          </a:prstGeom>
-        </p:spPr>
-      </p:pic>
+      <p:sp>
+        <p:nvSpPr>
+          <p:cNvPr id="3" name="Rectangle 2"/>
+          <p:cNvSpPr/>
+          <p:nvPr/>
+        </p:nvSpPr>
+        <p:spPr>
+          <a:xfrm>
+            <a:off x="0" y="960120"/>
+            <a:ext cx="12191695" cy="41148"/>
+          </a:xfrm>
+          <a:prstGeom prst="rect">
+            <a:avLst/>
+          </a:prstGeom>
+          <a:solidFill>
+            <a:srgbClr val="FFD000"/>
+          </a:solidFill>
+          <a:ln>
+            <a:noFill/>
+          </a:ln>
+        </p:spPr>
+        <p:style>
+          <a:lnRef idx="1">
+            <a:schemeClr val="accent1"/>
+          </a:lnRef>
+          <a:fillRef idx="3">
+            <a:schemeClr val="accent1"/>
+          </a:fillRef>
+          <a:effectRef idx="2">
+            <a:schemeClr val="accent1"/>
+          </a:effectRef>
+          <a:fontRef idx="minor">
+            <a:schemeClr val="lt1"/>
+          </a:fontRef>
+        </p:style>
+        <p:txBody>
+          <a:bodyPr rtlCol="0" anchor="ctr"/>
+          <a:lstStyle/>
+          <a:p>
+            <a:pPr algn="ctr"/>
+          </a:p>
+        </p:txBody>
+      </p:sp>
       <p:sp>
         <p:nvSpPr>
           <p:cNvPr id="4" name="TextBox 3"/>
@@ -8643,41 +8892,8 @@
         </p:nvSpPr>
         <p:spPr>
           <a:xfrm>
-            <a:off x="457200" y="1737360"/>
-            <a:ext cx="11277295" cy="1097280"/>
-          </a:xfrm>
-          <a:prstGeom prst="rect">
-            <a:avLst/>
-          </a:prstGeom>
-          <a:noFill/>
-        </p:spPr>
-        <p:txBody>
-          <a:bodyPr wrap="square" anchor="ctr"/>
-          <a:lstStyle/>
-          <a:p>
-            <a:pPr algn="ctr"/>
-            <a:r>
-              <a:rPr sz="3400" b="1" i="0">
-                <a:solidFill>
-                  <a:srgbClr val="095292"/>
-                </a:solidFill>
-                <a:latin typeface="Calibri"/>
-              </a:rPr>
-              <a:t>Clase 4 · VetCare avanza</a:t>
-            </a:r>
-          </a:p>
-        </p:txBody>
-      </p:sp>
-      <p:sp>
-        <p:nvSpPr>
-          <p:cNvPr id="5" name="TextBox 4"/>
-          <p:cNvSpPr txBox="1"/>
-          <p:nvPr/>
-        </p:nvSpPr>
-        <p:spPr>
-          <a:xfrm>
-            <a:off x="457200" y="3017520"/>
-            <a:ext cx="11277295" cy="1645920"/>
+            <a:off x="457200" y="164592"/>
+            <a:ext cx="11277295" cy="502920"/>
           </a:xfrm>
           <a:prstGeom prst="rect">
             <a:avLst/>
@@ -8690,65 +8906,28 @@
           </a:bodyPr>
           <a:lstStyle/>
           <a:p>
-            <a:pPr algn="ctr">
-              <a:spcAft>
-                <a:spcPts val="600"/>
-              </a:spcAft>
-            </a:pPr>
-            <a:r>
-              <a:rPr sz="1600" b="0" i="0">
-                <a:solidFill>
-                  <a:srgbClr val="333333"/>
-                </a:solidFill>
-                <a:latin typeface="Calibri"/>
-              </a:rPr>
-              <a:t>Queda listo el backlog priorizado de VetCare repartido en sprints del semestre, con las primeras historias de usuario escritas con criterios de aceptacion.</a:t>
-            </a:r>
-          </a:p>
-          <a:p>
-            <a:pPr algn="ctr">
-              <a:spcAft>
-                <a:spcPts val="600"/>
-              </a:spcAft>
-            </a:pPr>
-            <a:r>
-              <a:rPr sz="1600" b="0" i="0">
-                <a:solidFill>
-                  <a:srgbClr val="333333"/>
-                </a:solidFill>
-                <a:latin typeface="Calibri"/>
-              </a:rPr>
-              <a:t>Entregable: Un tablero en draw.io o Excalidraw con el Product Backlog priorizado de VetCare y las columnas de flujo con limite de trabajo en curso, mas un documento con el plan de tres sprints (objetivo y entregable de diseño de cada uno), la Definicion de Terminado y tres historias de usuario con criterios en formato Dado/Cuando/Entonces.</a:t>
-            </a:r>
-          </a:p>
-          <a:p>
-            <a:pPr algn="ctr">
-              <a:spcAft>
-                <a:spcPts val="600"/>
-              </a:spcAft>
-            </a:pPr>
-            <a:r>
-              <a:rPr sz="1600" b="0" i="0">
-                <a:solidFill>
-                  <a:srgbClr val="333333"/>
-                </a:solidFill>
-                <a:latin typeface="Calibri"/>
-              </a:rPr>
-              <a:t>Siguiente clase: continuamos el hilo del PI</a:t>
-            </a:r>
-          </a:p>
-        </p:txBody>
-      </p:sp>
-      <p:sp>
-        <p:nvSpPr>
-          <p:cNvPr id="6" name="TextBox 5"/>
+            <a:r>
+              <a:rPr sz="2600" b="1" i="0">
+                <a:solidFill>
+                  <a:srgbClr val="FFFFFF"/>
+                </a:solidFill>
+                <a:latin typeface="Calibri"/>
+              </a:rPr>
+              <a:t>Criterios de exito / entregable</a:t>
+            </a:r>
+          </a:p>
+        </p:txBody>
+      </p:sp>
+      <p:sp>
+        <p:nvSpPr>
+          <p:cNvPr id="5" name="TextBox 4"/>
           <p:cNvSpPr txBox="1"/>
           <p:nvPr/>
         </p:nvSpPr>
         <p:spPr>
           <a:xfrm>
-            <a:off x="457200" y="4754880"/>
-            <a:ext cx="11277295" cy="640080"/>
+            <a:off x="457200" y="1170432"/>
+            <a:ext cx="11277295" cy="5230368"/>
           </a:xfrm>
           <a:prstGeom prst="rect">
             <a:avLst/>
@@ -8761,15 +8940,242 @@
           </a:bodyPr>
           <a:lstStyle/>
           <a:p>
-            <a:pPr algn="ctr"/>
+            <a:pPr>
+              <a:spcAft>
+                <a:spcPts val="800"/>
+              </a:spcAft>
+            </a:pPr>
+            <a:r>
+              <a:rPr sz="2000" b="0" i="0">
+                <a:solidFill>
+                  <a:srgbClr val="333333"/>
+                </a:solidFill>
+                <a:latin typeface="Calibri"/>
+              </a:rPr>
+              <a:t>–   </a:t>
+            </a:r>
             <a:r>
               <a:rPr sz="2000" b="1" i="0">
                 <a:solidFill>
-                  <a:srgbClr val="269CCB"/>
-                </a:solidFill>
-                <a:latin typeface="Calibri"/>
-              </a:rPr>
-              <a:t>Teoria al servicio del proyecto</a:t>
+                  <a:srgbClr val="333333"/>
+                </a:solidFill>
+                <a:latin typeface="Calibri"/>
+              </a:rPr>
+              <a:t>Entregable:</a:t>
+            </a:r>
+            <a:r>
+              <a:rPr sz="2000" b="0" i="0">
+                <a:solidFill>
+                  <a:srgbClr val="333333"/>
+                </a:solidFill>
+                <a:latin typeface="Calibri"/>
+              </a:rPr>
+              <a:t> Un tablero en draw.io o Excalidraw con el Product Backlog priorizado de VetCare y las columnas de flujo con limite de trabajo en curso, mas un documento con el plan de tres sprints (objetivo y entregable de diseño de cada uno), la Definicion de Terminado y tres historias de usuario con criterios en formato Dado/Cuando/Entonces.</a:t>
+            </a:r>
+          </a:p>
+          <a:p>
+            <a:pPr>
+              <a:spcAft>
+                <a:spcPts val="800"/>
+              </a:spcAft>
+            </a:pPr>
+            <a:r>
+              <a:rPr sz="2000" b="0" i="0">
+                <a:solidFill>
+                  <a:srgbClr val="333333"/>
+                </a:solidFill>
+                <a:latin typeface="Calibri"/>
+              </a:rPr>
+              <a:t>–   </a:t>
+            </a:r>
+            <a:r>
+              <a:rPr sz="2000" b="1" i="0">
+                <a:solidFill>
+                  <a:srgbClr val="333333"/>
+                </a:solidFill>
+                <a:latin typeface="Calibri"/>
+              </a:rPr>
+              <a:t>Exito:</a:t>
+            </a:r>
+            <a:r>
+              <a:rPr sz="2000" b="0" i="0">
+                <a:solidFill>
+                  <a:srgbClr val="333333"/>
+                </a:solidFill>
+                <a:latin typeface="Calibri"/>
+              </a:rPr>
+              <a:t> El backlog esta priorizado con un orden explicito y cada item tiene una justificacion de valor para la clinica, no un orden arbitrario.</a:t>
+            </a:r>
+          </a:p>
+          <a:p>
+            <a:pPr>
+              <a:spcAft>
+                <a:spcPts val="800"/>
+              </a:spcAft>
+            </a:pPr>
+            <a:r>
+              <a:rPr sz="2000" b="0" i="0">
+                <a:solidFill>
+                  <a:srgbClr val="333333"/>
+                </a:solidFill>
+                <a:latin typeface="Calibri"/>
+              </a:rPr>
+              <a:t>–   </a:t>
+            </a:r>
+            <a:r>
+              <a:rPr sz="2000" b="1" i="0">
+                <a:solidFill>
+                  <a:srgbClr val="333333"/>
+                </a:solidFill>
+                <a:latin typeface="Calibri"/>
+              </a:rPr>
+              <a:t>Exito:</a:t>
+            </a:r>
+            <a:r>
+              <a:rPr sz="2000" b="0" i="0">
+                <a:solidFill>
+                  <a:srgbClr val="333333"/>
+                </a:solidFill>
+                <a:latin typeface="Calibri"/>
+              </a:rPr>
+              <a:t> Las tres historias siguen la estructura Como / quiero / para y cada una tiene al menos dos escenarios en Dado/Cuando/Entonces, incluido uno alternativo o de error.</a:t>
+            </a:r>
+          </a:p>
+          <a:p>
+            <a:pPr>
+              <a:spcAft>
+                <a:spcPts val="800"/>
+              </a:spcAft>
+            </a:pPr>
+            <a:r>
+              <a:rPr sz="2000" b="0" i="0">
+                <a:solidFill>
+                  <a:srgbClr val="333333"/>
+                </a:solidFill>
+                <a:latin typeface="Calibri"/>
+              </a:rPr>
+              <a:t>–   </a:t>
+            </a:r>
+            <a:r>
+              <a:rPr sz="2000" b="1" i="0">
+                <a:solidFill>
+                  <a:srgbClr val="333333"/>
+                </a:solidFill>
+                <a:latin typeface="Calibri"/>
+              </a:rPr>
+              <a:t>Exito:</a:t>
+            </a:r>
+            <a:r>
+              <a:rPr sz="2000" b="0" i="0">
+                <a:solidFill>
+                  <a:srgbClr val="333333"/>
+                </a:solidFill>
+                <a:latin typeface="Calibri"/>
+              </a:rPr>
+              <a:t> Cada sprint del plan termina en un incremento que la clinica podria ver y opinar (mockup, prototipo, diagrama revisado), no en trabajo interno invisible.</a:t>
+            </a:r>
+          </a:p>
+          <a:p>
+            <a:pPr>
+              <a:spcAft>
+                <a:spcPts val="800"/>
+              </a:spcAft>
+            </a:pPr>
+            <a:r>
+              <a:rPr sz="2000" b="0" i="0">
+                <a:solidFill>
+                  <a:srgbClr val="333333"/>
+                </a:solidFill>
+                <a:latin typeface="Calibri"/>
+              </a:rPr>
+              <a:t>–   </a:t>
+            </a:r>
+            <a:r>
+              <a:rPr sz="2000" b="1" i="0">
+                <a:solidFill>
+                  <a:srgbClr val="333333"/>
+                </a:solidFill>
+                <a:latin typeface="Calibri"/>
+              </a:rPr>
+              <a:t>Exito:</a:t>
+            </a:r>
+            <a:r>
+              <a:rPr sz="2000" b="0" i="0">
+                <a:solidFill>
+                  <a:srgbClr val="333333"/>
+                </a:solidFill>
+                <a:latin typeface="Calibri"/>
+              </a:rPr>
+              <a:t> El tablero declara la Definicion de Terminado y el limite de trabajo en curso, y ninguna columna del medio tiene mas tarjetas que su limite.</a:t>
+            </a:r>
+          </a:p>
+          <a:p>
+            <a:pPr>
+              <a:spcAft>
+                <a:spcPts val="800"/>
+              </a:spcAft>
+            </a:pPr>
+            <a:r>
+              <a:rPr sz="2000" b="0" i="0">
+                <a:solidFill>
+                  <a:srgbClr val="333333"/>
+                </a:solidFill>
+                <a:latin typeface="Calibri"/>
+              </a:rPr>
+              <a:t>–   </a:t>
+            </a:r>
+            <a:r>
+              <a:rPr sz="2000" b="1" i="0">
+                <a:solidFill>
+                  <a:srgbClr val="333333"/>
+                </a:solidFill>
+                <a:latin typeface="Calibri"/>
+              </a:rPr>
+              <a:t>Entrega en la plataforma del curso</a:t>
+            </a:r>
+            <a:r>
+              <a:rPr sz="2000" b="0" i="0">
+                <a:solidFill>
+                  <a:srgbClr val="333333"/>
+                </a:solidFill>
+                <a:latin typeface="Calibri"/>
+              </a:rPr>
+              <a:t> — en la fecha que indique el docente.</a:t>
+            </a:r>
+          </a:p>
+        </p:txBody>
+      </p:sp>
+      <p:sp>
+        <p:nvSpPr>
+          <p:cNvPr id="6" name="TextBox 5"/>
+          <p:cNvSpPr txBox="1"/>
+          <p:nvPr/>
+        </p:nvSpPr>
+        <p:spPr>
+          <a:xfrm>
+            <a:off x="11185855" y="6473952"/>
+            <a:ext cx="640080" cy="274320"/>
+          </a:xfrm>
+          <a:prstGeom prst="rect">
+            <a:avLst/>
+          </a:prstGeom>
+          <a:noFill/>
+        </p:spPr>
+        <p:txBody>
+          <a:bodyPr wrap="square">
+            <a:spAutoFit/>
+          </a:bodyPr>
+          <a:lstStyle/>
+          <a:p>
+            <a:pPr algn="r"/>
+            <a:r>
+              <a:rPr sz="1100" b="0" i="0">
+                <a:solidFill>
+                  <a:srgbClr val="666666"/>
+                </a:solidFill>
+                <a:latin typeface="Calibri"/>
+              </a:rPr>
+              <a:t>19</a:t>
             </a:r>
           </a:p>
         </p:txBody>
@@ -9101,6 +9507,833 @@
                 <a:latin typeface="Calibri"/>
               </a:rPr>
               <a:t>2</a:t>
+            </a:r>
+          </a:p>
+        </p:txBody>
+      </p:sp>
+    </p:spTree>
+  </p:cSld>
+  <p:clrMapOvr>
+    <a:masterClrMapping/>
+  </p:clrMapOvr>
+</p:sld>
+</file>
+
+<file path=ppt/slides/slide20.xml><?xml version="1.0" encoding="utf-8"?>
+<p:sld xmlns:a="http://schemas.openxmlformats.org/drawingml/2006/main" xmlns:p="http://schemas.openxmlformats.org/presentationml/2006/main" xmlns:r="http://schemas.openxmlformats.org/officeDocument/2006/relationships">
+  <p:cSld>
+    <p:bg>
+      <p:bgPr>
+        <a:solidFill>
+          <a:srgbClr val="FFFFFF"/>
+        </a:solidFill>
+        <a:effectLst/>
+      </p:bgPr>
+    </p:bg>
+    <p:spTree>
+      <p:nvGrpSpPr>
+        <p:cNvPr id="1" name=""/>
+        <p:cNvGrpSpPr/>
+        <p:nvPr/>
+      </p:nvGrpSpPr>
+      <p:grpSpPr/>
+      <p:sp>
+        <p:nvSpPr>
+          <p:cNvPr id="2" name="Rectangle 1"/>
+          <p:cNvSpPr/>
+          <p:nvPr/>
+        </p:nvSpPr>
+        <p:spPr>
+          <a:xfrm>
+            <a:off x="0" y="0"/>
+            <a:ext cx="12191695" cy="960120"/>
+          </a:xfrm>
+          <a:prstGeom prst="rect">
+            <a:avLst/>
+          </a:prstGeom>
+          <a:solidFill>
+            <a:srgbClr val="095292"/>
+          </a:solidFill>
+          <a:ln>
+            <a:noFill/>
+          </a:ln>
+        </p:spPr>
+        <p:style>
+          <a:lnRef idx="1">
+            <a:schemeClr val="accent1"/>
+          </a:lnRef>
+          <a:fillRef idx="3">
+            <a:schemeClr val="accent1"/>
+          </a:fillRef>
+          <a:effectRef idx="2">
+            <a:schemeClr val="accent1"/>
+          </a:effectRef>
+          <a:fontRef idx="minor">
+            <a:schemeClr val="lt1"/>
+          </a:fontRef>
+        </p:style>
+        <p:txBody>
+          <a:bodyPr rtlCol="0" anchor="ctr"/>
+          <a:lstStyle/>
+          <a:p>
+            <a:pPr algn="ctr"/>
+          </a:p>
+        </p:txBody>
+      </p:sp>
+      <p:sp>
+        <p:nvSpPr>
+          <p:cNvPr id="3" name="Rectangle 2"/>
+          <p:cNvSpPr/>
+          <p:nvPr/>
+        </p:nvSpPr>
+        <p:spPr>
+          <a:xfrm>
+            <a:off x="0" y="960120"/>
+            <a:ext cx="12191695" cy="41148"/>
+          </a:xfrm>
+          <a:prstGeom prst="rect">
+            <a:avLst/>
+          </a:prstGeom>
+          <a:solidFill>
+            <a:srgbClr val="FFD000"/>
+          </a:solidFill>
+          <a:ln>
+            <a:noFill/>
+          </a:ln>
+        </p:spPr>
+        <p:style>
+          <a:lnRef idx="1">
+            <a:schemeClr val="accent1"/>
+          </a:lnRef>
+          <a:fillRef idx="3">
+            <a:schemeClr val="accent1"/>
+          </a:fillRef>
+          <a:effectRef idx="2">
+            <a:schemeClr val="accent1"/>
+          </a:effectRef>
+          <a:fontRef idx="minor">
+            <a:schemeClr val="lt1"/>
+          </a:fontRef>
+        </p:style>
+        <p:txBody>
+          <a:bodyPr rtlCol="0" anchor="ctr"/>
+          <a:lstStyle/>
+          <a:p>
+            <a:pPr algn="ctr"/>
+          </a:p>
+        </p:txBody>
+      </p:sp>
+      <p:sp>
+        <p:nvSpPr>
+          <p:cNvPr id="4" name="TextBox 3"/>
+          <p:cNvSpPr txBox="1"/>
+          <p:nvPr/>
+        </p:nvSpPr>
+        <p:spPr>
+          <a:xfrm>
+            <a:off x="457200" y="164592"/>
+            <a:ext cx="11277295" cy="502920"/>
+          </a:xfrm>
+          <a:prstGeom prst="rect">
+            <a:avLst/>
+          </a:prstGeom>
+          <a:noFill/>
+        </p:spPr>
+        <p:txBody>
+          <a:bodyPr wrap="square">
+            <a:spAutoFit/>
+          </a:bodyPr>
+          <a:lstStyle/>
+          <a:p>
+            <a:r>
+              <a:rPr sz="2600" b="1" i="0">
+                <a:solidFill>
+                  <a:srgbClr val="FFFFFF"/>
+                </a:solidFill>
+                <a:latin typeface="Calibri"/>
+              </a:rPr>
+              <a:t>Para el PI esta semana</a:t>
+            </a:r>
+          </a:p>
+        </p:txBody>
+      </p:sp>
+      <p:sp>
+        <p:nvSpPr>
+          <p:cNvPr id="5" name="Rounded Rectangle 4"/>
+          <p:cNvSpPr/>
+          <p:nvPr/>
+        </p:nvSpPr>
+        <p:spPr>
+          <a:xfrm>
+            <a:off x="457200" y="1261872"/>
+            <a:ext cx="11277295" cy="1051560"/>
+          </a:xfrm>
+          <a:prstGeom prst="roundRect">
+            <a:avLst>
+              <a:gd name="adj" fmla="val 12000"/>
+            </a:avLst>
+          </a:prstGeom>
+          <a:solidFill>
+            <a:srgbClr val="E8F4FA"/>
+          </a:solidFill>
+          <a:ln>
+            <a:noFill/>
+          </a:ln>
+        </p:spPr>
+        <p:style>
+          <a:lnRef idx="1">
+            <a:schemeClr val="accent1"/>
+          </a:lnRef>
+          <a:fillRef idx="3">
+            <a:schemeClr val="accent1"/>
+          </a:fillRef>
+          <a:effectRef idx="2">
+            <a:schemeClr val="accent1"/>
+          </a:effectRef>
+          <a:fontRef idx="minor">
+            <a:schemeClr val="lt1"/>
+          </a:fontRef>
+        </p:style>
+        <p:txBody>
+          <a:bodyPr rtlCol="0" anchor="ctr"/>
+          <a:lstStyle/>
+          <a:p>
+            <a:pPr algn="ctr"/>
+          </a:p>
+        </p:txBody>
+      </p:sp>
+      <p:sp>
+        <p:nvSpPr>
+          <p:cNvPr id="6" name="Rectangle 5"/>
+          <p:cNvSpPr/>
+          <p:nvPr/>
+        </p:nvSpPr>
+        <p:spPr>
+          <a:xfrm>
+            <a:off x="457200" y="1261872"/>
+            <a:ext cx="128016" cy="1051560"/>
+          </a:xfrm>
+          <a:prstGeom prst="rect">
+            <a:avLst/>
+          </a:prstGeom>
+          <a:solidFill>
+            <a:srgbClr val="269CCB"/>
+          </a:solidFill>
+          <a:ln>
+            <a:noFill/>
+          </a:ln>
+        </p:spPr>
+        <p:style>
+          <a:lnRef idx="1">
+            <a:schemeClr val="accent1"/>
+          </a:lnRef>
+          <a:fillRef idx="3">
+            <a:schemeClr val="accent1"/>
+          </a:fillRef>
+          <a:effectRef idx="2">
+            <a:schemeClr val="accent1"/>
+          </a:effectRef>
+          <a:fontRef idx="minor">
+            <a:schemeClr val="lt1"/>
+          </a:fontRef>
+        </p:style>
+        <p:txBody>
+          <a:bodyPr rtlCol="0" anchor="ctr"/>
+          <a:lstStyle/>
+          <a:p>
+            <a:pPr algn="ctr"/>
+          </a:p>
+        </p:txBody>
+      </p:sp>
+      <p:sp>
+        <p:nvSpPr>
+          <p:cNvPr id="7" name="TextBox 6"/>
+          <p:cNvSpPr txBox="1"/>
+          <p:nvPr/>
+        </p:nvSpPr>
+        <p:spPr>
+          <a:xfrm>
+            <a:off x="777240" y="1399031"/>
+            <a:ext cx="10774375" cy="822959"/>
+          </a:xfrm>
+          <a:prstGeom prst="rect">
+            <a:avLst/>
+          </a:prstGeom>
+          <a:noFill/>
+        </p:spPr>
+        <p:txBody>
+          <a:bodyPr wrap="square">
+            <a:spAutoFit/>
+          </a:bodyPr>
+          <a:lstStyle/>
+          <a:p>
+            <a:r>
+              <a:rPr sz="1200" b="1" i="0">
+                <a:solidFill>
+                  <a:srgbClr val="269CCB"/>
+                </a:solidFill>
+                <a:latin typeface="Calibri"/>
+              </a:rPr>
+              <a:t>Info</a:t>
+            </a:r>
+          </a:p>
+          <a:p>
+            <a:pPr>
+              <a:spcBef>
+                <a:spcPts val="400"/>
+              </a:spcBef>
+            </a:pPr>
+            <a:r>
+              <a:rPr sz="1400" b="0" i="0">
+                <a:solidFill>
+                  <a:srgbClr val="333333"/>
+                </a:solidFill>
+                <a:latin typeface="Calibri"/>
+              </a:rPr>
+              <a:t>Hito: Queda listo el backlog priorizado de VetCare repartido en sprints del semestre, con las primeras historias de usuario escritas con criterios de aceptacion.</a:t>
+            </a:r>
+          </a:p>
+        </p:txBody>
+      </p:sp>
+      <p:sp>
+        <p:nvSpPr>
+          <p:cNvPr id="8" name="Rounded Rectangle 7"/>
+          <p:cNvSpPr/>
+          <p:nvPr/>
+        </p:nvSpPr>
+        <p:spPr>
+          <a:xfrm>
+            <a:off x="457200" y="2478024"/>
+            <a:ext cx="11277295" cy="1051560"/>
+          </a:xfrm>
+          <a:prstGeom prst="roundRect">
+            <a:avLst>
+              <a:gd name="adj" fmla="val 12000"/>
+            </a:avLst>
+          </a:prstGeom>
+          <a:solidFill>
+            <a:srgbClr val="FFF8E1"/>
+          </a:solidFill>
+          <a:ln>
+            <a:noFill/>
+          </a:ln>
+        </p:spPr>
+        <p:style>
+          <a:lnRef idx="1">
+            <a:schemeClr val="accent1"/>
+          </a:lnRef>
+          <a:fillRef idx="3">
+            <a:schemeClr val="accent1"/>
+          </a:fillRef>
+          <a:effectRef idx="2">
+            <a:schemeClr val="accent1"/>
+          </a:effectRef>
+          <a:fontRef idx="minor">
+            <a:schemeClr val="lt1"/>
+          </a:fontRef>
+        </p:style>
+        <p:txBody>
+          <a:bodyPr rtlCol="0" anchor="ctr"/>
+          <a:lstStyle/>
+          <a:p>
+            <a:pPr algn="ctr"/>
+          </a:p>
+        </p:txBody>
+      </p:sp>
+      <p:sp>
+        <p:nvSpPr>
+          <p:cNvPr id="9" name="Rectangle 8"/>
+          <p:cNvSpPr/>
+          <p:nvPr/>
+        </p:nvSpPr>
+        <p:spPr>
+          <a:xfrm>
+            <a:off x="457200" y="2478024"/>
+            <a:ext cx="128016" cy="1051560"/>
+          </a:xfrm>
+          <a:prstGeom prst="rect">
+            <a:avLst/>
+          </a:prstGeom>
+          <a:solidFill>
+            <a:srgbClr val="FFD000"/>
+          </a:solidFill>
+          <a:ln>
+            <a:noFill/>
+          </a:ln>
+        </p:spPr>
+        <p:style>
+          <a:lnRef idx="1">
+            <a:schemeClr val="accent1"/>
+          </a:lnRef>
+          <a:fillRef idx="3">
+            <a:schemeClr val="accent1"/>
+          </a:fillRef>
+          <a:effectRef idx="2">
+            <a:schemeClr val="accent1"/>
+          </a:effectRef>
+          <a:fontRef idx="minor">
+            <a:schemeClr val="lt1"/>
+          </a:fontRef>
+        </p:style>
+        <p:txBody>
+          <a:bodyPr rtlCol="0" anchor="ctr"/>
+          <a:lstStyle/>
+          <a:p>
+            <a:pPr algn="ctr"/>
+          </a:p>
+        </p:txBody>
+      </p:sp>
+      <p:sp>
+        <p:nvSpPr>
+          <p:cNvPr id="10" name="TextBox 9"/>
+          <p:cNvSpPr txBox="1"/>
+          <p:nvPr/>
+        </p:nvSpPr>
+        <p:spPr>
+          <a:xfrm>
+            <a:off x="777240" y="2615184"/>
+            <a:ext cx="10774375" cy="822959"/>
+          </a:xfrm>
+          <a:prstGeom prst="rect">
+            <a:avLst/>
+          </a:prstGeom>
+          <a:noFill/>
+        </p:spPr>
+        <p:txBody>
+          <a:bodyPr wrap="square">
+            <a:spAutoFit/>
+          </a:bodyPr>
+          <a:lstStyle/>
+          <a:p>
+            <a:r>
+              <a:rPr sz="1200" b="1" i="0">
+                <a:solidFill>
+                  <a:srgbClr val="FFD000"/>
+                </a:solidFill>
+                <a:latin typeface="Calibri"/>
+              </a:rPr>
+              <a:t>Aclaración</a:t>
+            </a:r>
+          </a:p>
+          <a:p>
+            <a:pPr>
+              <a:spcBef>
+                <a:spcPts val="400"/>
+              </a:spcBef>
+            </a:pPr>
+            <a:r>
+              <a:rPr sz="1400" b="0" i="0">
+                <a:solidFill>
+                  <a:srgbClr val="333333"/>
+                </a:solidFill>
+                <a:latin typeface="Calibri"/>
+              </a:rPr>
+              <a:t>Enunciado completo: Clases/Proyecto Integrador/ (VetCare).</a:t>
+            </a:r>
+          </a:p>
+        </p:txBody>
+      </p:sp>
+      <p:sp>
+        <p:nvSpPr>
+          <p:cNvPr id="11" name="Rounded Rectangle 10"/>
+          <p:cNvSpPr/>
+          <p:nvPr/>
+        </p:nvSpPr>
+        <p:spPr>
+          <a:xfrm>
+            <a:off x="457200" y="3694176"/>
+            <a:ext cx="11277295" cy="1051560"/>
+          </a:xfrm>
+          <a:prstGeom prst="roundRect">
+            <a:avLst>
+              <a:gd name="adj" fmla="val 12000"/>
+            </a:avLst>
+          </a:prstGeom>
+          <a:solidFill>
+            <a:srgbClr val="FBE4E4"/>
+          </a:solidFill>
+          <a:ln>
+            <a:noFill/>
+          </a:ln>
+        </p:spPr>
+        <p:style>
+          <a:lnRef idx="1">
+            <a:schemeClr val="accent1"/>
+          </a:lnRef>
+          <a:fillRef idx="3">
+            <a:schemeClr val="accent1"/>
+          </a:fillRef>
+          <a:effectRef idx="2">
+            <a:schemeClr val="accent1"/>
+          </a:effectRef>
+          <a:fontRef idx="minor">
+            <a:schemeClr val="lt1"/>
+          </a:fontRef>
+        </p:style>
+        <p:txBody>
+          <a:bodyPr rtlCol="0" anchor="ctr"/>
+          <a:lstStyle/>
+          <a:p>
+            <a:pPr algn="ctr"/>
+          </a:p>
+        </p:txBody>
+      </p:sp>
+      <p:sp>
+        <p:nvSpPr>
+          <p:cNvPr id="12" name="Rectangle 11"/>
+          <p:cNvSpPr/>
+          <p:nvPr/>
+        </p:nvSpPr>
+        <p:spPr>
+          <a:xfrm>
+            <a:off x="457200" y="3694176"/>
+            <a:ext cx="128016" cy="1051560"/>
+          </a:xfrm>
+          <a:prstGeom prst="rect">
+            <a:avLst/>
+          </a:prstGeom>
+          <a:solidFill>
+            <a:srgbClr val="A02030"/>
+          </a:solidFill>
+          <a:ln>
+            <a:noFill/>
+          </a:ln>
+        </p:spPr>
+        <p:style>
+          <a:lnRef idx="1">
+            <a:schemeClr val="accent1"/>
+          </a:lnRef>
+          <a:fillRef idx="3">
+            <a:schemeClr val="accent1"/>
+          </a:fillRef>
+          <a:effectRef idx="2">
+            <a:schemeClr val="accent1"/>
+          </a:effectRef>
+          <a:fontRef idx="minor">
+            <a:schemeClr val="lt1"/>
+          </a:fontRef>
+        </p:style>
+        <p:txBody>
+          <a:bodyPr rtlCol="0" anchor="ctr"/>
+          <a:lstStyle/>
+          <a:p>
+            <a:pPr algn="ctr"/>
+          </a:p>
+        </p:txBody>
+      </p:sp>
+      <p:sp>
+        <p:nvSpPr>
+          <p:cNvPr id="13" name="TextBox 12"/>
+          <p:cNvSpPr txBox="1"/>
+          <p:nvPr/>
+        </p:nvSpPr>
+        <p:spPr>
+          <a:xfrm>
+            <a:off x="777240" y="3831336"/>
+            <a:ext cx="10774375" cy="822959"/>
+          </a:xfrm>
+          <a:prstGeom prst="rect">
+            <a:avLst/>
+          </a:prstGeom>
+          <a:noFill/>
+        </p:spPr>
+        <p:txBody>
+          <a:bodyPr wrap="square">
+            <a:spAutoFit/>
+          </a:bodyPr>
+          <a:lstStyle/>
+          <a:p>
+            <a:r>
+              <a:rPr sz="1200" b="1" i="0">
+                <a:solidFill>
+                  <a:srgbClr val="A02030"/>
+                </a:solidFill>
+                <a:latin typeface="Calibri"/>
+              </a:rPr>
+              <a:t>Atención</a:t>
+            </a:r>
+          </a:p>
+          <a:p>
+            <a:pPr>
+              <a:spcBef>
+                <a:spcPts val="400"/>
+              </a:spcBef>
+            </a:pPr>
+            <a:r>
+              <a:rPr sz="1400" b="0" i="0">
+                <a:solidFill>
+                  <a:srgbClr val="333333"/>
+                </a:solidFill>
+                <a:latin typeface="Calibri"/>
+              </a:rPr>
+              <a:t>Entrega del taller, si el docente lo asigna · en la fecha que indique el docente.</a:t>
+            </a:r>
+          </a:p>
+        </p:txBody>
+      </p:sp>
+      <p:sp>
+        <p:nvSpPr>
+          <p:cNvPr id="14" name="TextBox 13"/>
+          <p:cNvSpPr txBox="1"/>
+          <p:nvPr/>
+        </p:nvSpPr>
+        <p:spPr>
+          <a:xfrm>
+            <a:off x="11185855" y="6473952"/>
+            <a:ext cx="640080" cy="274320"/>
+          </a:xfrm>
+          <a:prstGeom prst="rect">
+            <a:avLst/>
+          </a:prstGeom>
+          <a:noFill/>
+        </p:spPr>
+        <p:txBody>
+          <a:bodyPr wrap="square">
+            <a:spAutoFit/>
+          </a:bodyPr>
+          <a:lstStyle/>
+          <a:p>
+            <a:pPr algn="r"/>
+            <a:r>
+              <a:rPr sz="1100" b="0" i="0">
+                <a:solidFill>
+                  <a:srgbClr val="666666"/>
+                </a:solidFill>
+                <a:latin typeface="Calibri"/>
+              </a:rPr>
+              <a:t>20</a:t>
+            </a:r>
+          </a:p>
+        </p:txBody>
+      </p:sp>
+    </p:spTree>
+  </p:cSld>
+  <p:clrMapOvr>
+    <a:masterClrMapping/>
+  </p:clrMapOvr>
+</p:sld>
+</file>
+
+<file path=ppt/slides/slide21.xml><?xml version="1.0" encoding="utf-8"?>
+<p:sld xmlns:a="http://schemas.openxmlformats.org/drawingml/2006/main" xmlns:p="http://schemas.openxmlformats.org/presentationml/2006/main" xmlns:r="http://schemas.openxmlformats.org/officeDocument/2006/relationships">
+  <p:cSld>
+    <p:bg>
+      <p:bgPr>
+        <a:solidFill>
+          <a:srgbClr val="FFFFFF"/>
+        </a:solidFill>
+        <a:effectLst/>
+      </p:bgPr>
+    </p:bg>
+    <p:spTree>
+      <p:nvGrpSpPr>
+        <p:cNvPr id="1" name=""/>
+        <p:cNvGrpSpPr/>
+        <p:nvPr/>
+      </p:nvGrpSpPr>
+      <p:grpSpPr/>
+      <p:sp>
+        <p:nvSpPr>
+          <p:cNvPr id="2" name="Rectangle 1"/>
+          <p:cNvSpPr/>
+          <p:nvPr/>
+        </p:nvSpPr>
+        <p:spPr>
+          <a:xfrm>
+            <a:off x="0" y="0"/>
+            <a:ext cx="12191695" cy="164592"/>
+          </a:xfrm>
+          <a:prstGeom prst="rect">
+            <a:avLst/>
+          </a:prstGeom>
+          <a:solidFill>
+            <a:srgbClr val="269CCB"/>
+          </a:solidFill>
+          <a:ln>
+            <a:noFill/>
+          </a:ln>
+        </p:spPr>
+        <p:style>
+          <a:lnRef idx="1">
+            <a:schemeClr val="accent1"/>
+          </a:lnRef>
+          <a:fillRef idx="3">
+            <a:schemeClr val="accent1"/>
+          </a:fillRef>
+          <a:effectRef idx="2">
+            <a:schemeClr val="accent1"/>
+          </a:effectRef>
+          <a:fontRef idx="minor">
+            <a:schemeClr val="lt1"/>
+          </a:fontRef>
+        </p:style>
+        <p:txBody>
+          <a:bodyPr rtlCol="0" anchor="ctr"/>
+          <a:lstStyle/>
+          <a:p>
+            <a:pPr algn="ctr"/>
+          </a:p>
+        </p:txBody>
+      </p:sp>
+      <p:pic>
+        <p:nvPicPr>
+          <p:cNvPr id="3" name="Picture 2" descr="logo_uniajc_color.png"/>
+          <p:cNvPicPr>
+            <a:picLocks noChangeAspect="1"/>
+          </p:cNvPicPr>
+          <p:nvPr/>
+        </p:nvPicPr>
+        <p:blipFill>
+          <a:blip r:embed="rId2"/>
+          <a:stretch>
+            <a:fillRect/>
+          </a:stretch>
+        </p:blipFill>
+        <p:spPr>
+          <a:xfrm>
+            <a:off x="10271455" y="5998464"/>
+            <a:ext cx="1463040" cy="643233"/>
+          </a:xfrm>
+          <a:prstGeom prst="rect">
+            <a:avLst/>
+          </a:prstGeom>
+        </p:spPr>
+      </p:pic>
+      <p:sp>
+        <p:nvSpPr>
+          <p:cNvPr id="4" name="TextBox 3"/>
+          <p:cNvSpPr txBox="1"/>
+          <p:nvPr/>
+        </p:nvSpPr>
+        <p:spPr>
+          <a:xfrm>
+            <a:off x="457200" y="1737360"/>
+            <a:ext cx="11277295" cy="1097280"/>
+          </a:xfrm>
+          <a:prstGeom prst="rect">
+            <a:avLst/>
+          </a:prstGeom>
+          <a:noFill/>
+        </p:spPr>
+        <p:txBody>
+          <a:bodyPr wrap="square" anchor="ctr"/>
+          <a:lstStyle/>
+          <a:p>
+            <a:pPr algn="ctr"/>
+            <a:r>
+              <a:rPr sz="3400" b="1" i="0">
+                <a:solidFill>
+                  <a:srgbClr val="095292"/>
+                </a:solidFill>
+                <a:latin typeface="Calibri"/>
+              </a:rPr>
+              <a:t>Clase 4 · VetCare avanza</a:t>
+            </a:r>
+          </a:p>
+        </p:txBody>
+      </p:sp>
+      <p:sp>
+        <p:nvSpPr>
+          <p:cNvPr id="5" name="TextBox 4"/>
+          <p:cNvSpPr txBox="1"/>
+          <p:nvPr/>
+        </p:nvSpPr>
+        <p:spPr>
+          <a:xfrm>
+            <a:off x="457200" y="3017520"/>
+            <a:ext cx="11277295" cy="1645920"/>
+          </a:xfrm>
+          <a:prstGeom prst="rect">
+            <a:avLst/>
+          </a:prstGeom>
+          <a:noFill/>
+        </p:spPr>
+        <p:txBody>
+          <a:bodyPr wrap="square">
+            <a:spAutoFit/>
+          </a:bodyPr>
+          <a:lstStyle/>
+          <a:p>
+            <a:pPr algn="ctr">
+              <a:spcAft>
+                <a:spcPts val="600"/>
+              </a:spcAft>
+            </a:pPr>
+            <a:r>
+              <a:rPr sz="1600" b="0" i="0">
+                <a:solidFill>
+                  <a:srgbClr val="333333"/>
+                </a:solidFill>
+                <a:latin typeface="Calibri"/>
+              </a:rPr>
+              <a:t>Queda listo el backlog priorizado de VetCare repartido en sprints del semestre, con las primeras historias de usuario escritas con criterios de aceptacion.</a:t>
+            </a:r>
+          </a:p>
+          <a:p>
+            <a:pPr algn="ctr">
+              <a:spcAft>
+                <a:spcPts val="600"/>
+              </a:spcAft>
+            </a:pPr>
+            <a:r>
+              <a:rPr sz="1600" b="0" i="0">
+                <a:solidFill>
+                  <a:srgbClr val="333333"/>
+                </a:solidFill>
+                <a:latin typeface="Calibri"/>
+              </a:rPr>
+              <a:t>Entregable: Un tablero en draw.io o Excalidraw con el Product Backlog priorizado de VetCare y las columnas de flujo con limite de trabajo en curso, mas un documento con el plan de tres sprints (objetivo y entregable de diseño de cada uno), la Definicion de Terminado y tres historias de usuario con criterios en formato Dado/Cuando/Entonces.</a:t>
+            </a:r>
+          </a:p>
+          <a:p>
+            <a:pPr algn="ctr">
+              <a:spcAft>
+                <a:spcPts val="600"/>
+              </a:spcAft>
+            </a:pPr>
+            <a:r>
+              <a:rPr sz="1600" b="0" i="0">
+                <a:solidFill>
+                  <a:srgbClr val="333333"/>
+                </a:solidFill>
+                <a:latin typeface="Calibri"/>
+              </a:rPr>
+              <a:t>Siguiente clase: continuamos el hilo del PI</a:t>
+            </a:r>
+          </a:p>
+        </p:txBody>
+      </p:sp>
+      <p:sp>
+        <p:nvSpPr>
+          <p:cNvPr id="6" name="TextBox 5"/>
+          <p:cNvSpPr txBox="1"/>
+          <p:nvPr/>
+        </p:nvSpPr>
+        <p:spPr>
+          <a:xfrm>
+            <a:off x="457200" y="4754880"/>
+            <a:ext cx="11277295" cy="640080"/>
+          </a:xfrm>
+          <a:prstGeom prst="rect">
+            <a:avLst/>
+          </a:prstGeom>
+          <a:noFill/>
+        </p:spPr>
+        <p:txBody>
+          <a:bodyPr wrap="square">
+            <a:spAutoFit/>
+          </a:bodyPr>
+          <a:lstStyle/>
+          <a:p>
+            <a:pPr algn="ctr"/>
+            <a:r>
+              <a:rPr sz="2000" b="1" i="0">
+                <a:solidFill>
+                  <a:srgbClr val="269CCB"/>
+                </a:solidFill>
+                <a:latin typeface="Calibri"/>
+              </a:rPr>
+              <a:t>Teoria al servicio del proyecto</a:t>
             </a:r>
           </a:p>
         </p:txBody>

--- a/Seminario de Sistemas/Clases/Clase 4 - Metodologias agiles/Presentacion.pptx
+++ b/Seminario de Sistemas/Clases/Clase 4 - Metodologias agiles/Presentacion.pptx
@@ -9,23 +9,16 @@
     <p:sldId id="257" r:id="rId8"/>
     <p:sldId id="258" r:id="rId9"/>
     <p:sldId id="259" r:id="rId10"/>
-    <p:sldId id="260" r:id="rId11"/>
-    <p:sldId id="261" r:id="rId12"/>
-    <p:sldId id="262" r:id="rId13"/>
-    <p:sldId id="263" r:id="rId14"/>
-    <p:sldId id="264" r:id="rId15"/>
-    <p:sldId id="265" r:id="rId16"/>
-    <p:sldId id="266" r:id="rId17"/>
-    <p:sldId id="267" r:id="rId18"/>
-    <p:sldId id="268" r:id="rId19"/>
-    <p:sldId id="269" r:id="rId20"/>
-    <p:sldId id="270" r:id="rId21"/>
-    <p:sldId id="271" r:id="rId22"/>
-    <p:sldId id="272" r:id="rId23"/>
-    <p:sldId id="273" r:id="rId24"/>
-    <p:sldId id="274" r:id="rId25"/>
-    <p:sldId id="275" r:id="rId26"/>
-    <p:sldId id="276" r:id="rId27"/>
+    <p:sldId id="260" r:id="rId12"/>
+    <p:sldId id="261" r:id="rId13"/>
+    <p:sldId id="262" r:id="rId14"/>
+    <p:sldId id="263" r:id="rId15"/>
+    <p:sldId id="264" r:id="rId16"/>
+    <p:sldId id="265" r:id="rId17"/>
+    <p:sldId id="266" r:id="rId18"/>
+    <p:sldId id="267" r:id="rId19"/>
+    <p:sldId id="268" r:id="rId20"/>
+    <p:sldId id="269" r:id="rId21"/>
   </p:sldIdLst>
   <p:sldSz cx="12191695" cy="6858000" type="screen4x3"/>
   <p:notesSz cx="6858000" cy="9144000"/>
@@ -125,6 +118,706 @@
     </a:lvl9pPr>
   </p:defaultTextStyle>
 </p:presentation>
+</file>
+
+<file path=ppt/notesMasters/notesMaster1.xml><?xml version="1.0" encoding="utf-8"?>
+<p:notesMaster xmlns:a="http://schemas.openxmlformats.org/drawingml/2006/main" xmlns:p="http://schemas.openxmlformats.org/presentationml/2006/main" xmlns:r="http://schemas.openxmlformats.org/officeDocument/2006/relationships">
+  <p:cSld>
+    <p:bg>
+      <p:bgRef idx="1001">
+        <a:schemeClr val="bg1"/>
+      </p:bgRef>
+    </p:bg>
+    <p:spTree>
+      <p:nvGrpSpPr>
+        <p:cNvPr id="1" name=""/>
+        <p:cNvGrpSpPr/>
+        <p:nvPr/>
+      </p:nvGrpSpPr>
+      <p:grpSpPr>
+        <a:xfrm>
+          <a:off x="0" y="0"/>
+          <a:ext cx="0" cy="0"/>
+          <a:chOff x="0" y="0"/>
+          <a:chExt cx="0" cy="0"/>
+        </a:xfrm>
+      </p:grpSpPr>
+      <p:sp>
+        <p:nvSpPr>
+          <p:cNvPr id="2" name="Header Placeholder 1"/>
+          <p:cNvSpPr>
+            <a:spLocks noGrp="1"/>
+          </p:cNvSpPr>
+          <p:nvPr>
+            <p:ph type="hdr" sz="quarter"/>
+          </p:nvPr>
+        </p:nvSpPr>
+        <p:spPr>
+          <a:xfrm>
+            <a:off x="0" y="0"/>
+            <a:ext cx="2971800" cy="457200"/>
+          </a:xfrm>
+          <a:prstGeom prst="rect">
+            <a:avLst/>
+          </a:prstGeom>
+        </p:spPr>
+        <p:txBody>
+          <a:bodyPr vert="horz" lIns="91440" tIns="45720" rIns="91440" bIns="45720" rtlCol="0"/>
+          <a:lstStyle>
+            <a:lvl1pPr algn="l">
+              <a:defRPr sz="1200"/>
+            </a:lvl1pPr>
+          </a:lstStyle>
+          <a:p>
+            <a:endParaRPr lang="en-US"/>
+          </a:p>
+        </p:txBody>
+      </p:sp>
+      <p:sp>
+        <p:nvSpPr>
+          <p:cNvPr id="3" name="Date Placeholder 2"/>
+          <p:cNvSpPr>
+            <a:spLocks noGrp="1"/>
+          </p:cNvSpPr>
+          <p:nvPr>
+            <p:ph type="dt" idx="1"/>
+          </p:nvPr>
+        </p:nvSpPr>
+        <p:spPr>
+          <a:xfrm>
+            <a:off x="3884613" y="0"/>
+            <a:ext cx="2971800" cy="457200"/>
+          </a:xfrm>
+          <a:prstGeom prst="rect">
+            <a:avLst/>
+          </a:prstGeom>
+        </p:spPr>
+        <p:txBody>
+          <a:bodyPr vert="horz" lIns="91440" tIns="45720" rIns="91440" bIns="45720" rtlCol="0"/>
+          <a:lstStyle>
+            <a:lvl1pPr algn="r">
+              <a:defRPr sz="1200"/>
+            </a:lvl1pPr>
+          </a:lstStyle>
+          <a:p>
+            <a:fld id="{0F89C1C7-3DCD-1040-A9CF-14679D8B5DDD}" type="datetimeFigureOut">
+              <a:rPr lang="en-US" smtClean="0"/>
+              <a:t>10/17/16</a:t>
+            </a:fld>
+            <a:endParaRPr lang="en-US"/>
+          </a:p>
+        </p:txBody>
+      </p:sp>
+      <p:sp>
+        <p:nvSpPr>
+          <p:cNvPr id="4" name="Slide Image Placeholder 3"/>
+          <p:cNvSpPr>
+            <a:spLocks noGrp="1" noRot="1" noChangeAspect="1"/>
+          </p:cNvSpPr>
+          <p:nvPr>
+            <p:ph type="sldImg" idx="2"/>
+          </p:nvPr>
+        </p:nvSpPr>
+        <p:spPr>
+          <a:xfrm>
+            <a:off x="1143000" y="685800"/>
+            <a:ext cx="4572000" cy="3429000"/>
+          </a:xfrm>
+          <a:prstGeom prst="rect">
+            <a:avLst/>
+          </a:prstGeom>
+          <a:noFill/>
+          <a:ln w="12700">
+            <a:solidFill>
+              <a:prstClr val="black"/>
+            </a:solidFill>
+          </a:ln>
+        </p:spPr>
+        <p:txBody>
+          <a:bodyPr vert="horz" lIns="91440" tIns="45720" rIns="91440" bIns="45720" rtlCol="0" anchor="ctr"/>
+          <a:lstStyle/>
+          <a:p>
+            <a:endParaRPr lang="en-US"/>
+          </a:p>
+        </p:txBody>
+      </p:sp>
+      <p:sp>
+        <p:nvSpPr>
+          <p:cNvPr id="5" name="Notes Placeholder 4"/>
+          <p:cNvSpPr>
+            <a:spLocks noGrp="1"/>
+          </p:cNvSpPr>
+          <p:nvPr>
+            <p:ph type="body" sz="quarter" idx="3"/>
+          </p:nvPr>
+        </p:nvSpPr>
+        <p:spPr>
+          <a:xfrm>
+            <a:off x="685800" y="4343400"/>
+            <a:ext cx="5486400" cy="4114800"/>
+          </a:xfrm>
+          <a:prstGeom prst="rect">
+            <a:avLst/>
+          </a:prstGeom>
+        </p:spPr>
+        <p:txBody>
+          <a:bodyPr vert="horz" lIns="91440" tIns="45720" rIns="91440" bIns="45720" rtlCol="0"/>
+          <a:lstStyle/>
+          <a:p>
+            <a:pPr lvl="0"/>
+            <a:r>
+              <a:rPr lang="en-US" smtClean="0"/>
+              <a:t>Click to edit Master text styles</a:t>
+            </a:r>
+          </a:p>
+          <a:p>
+            <a:pPr lvl="1"/>
+            <a:r>
+              <a:rPr lang="en-US" smtClean="0"/>
+              <a:t>Second level</a:t>
+            </a:r>
+          </a:p>
+          <a:p>
+            <a:pPr lvl="2"/>
+            <a:r>
+              <a:rPr lang="en-US" smtClean="0"/>
+              <a:t>Third level</a:t>
+            </a:r>
+          </a:p>
+          <a:p>
+            <a:pPr lvl="3"/>
+            <a:r>
+              <a:rPr lang="en-US" smtClean="0"/>
+              <a:t>Fourth level</a:t>
+            </a:r>
+          </a:p>
+          <a:p>
+            <a:pPr lvl="4"/>
+            <a:r>
+              <a:rPr lang="en-US" smtClean="0"/>
+              <a:t>Fifth level</a:t>
+            </a:r>
+            <a:endParaRPr lang="en-US"/>
+          </a:p>
+        </p:txBody>
+      </p:sp>
+      <p:sp>
+        <p:nvSpPr>
+          <p:cNvPr id="6" name="Footer Placeholder 5"/>
+          <p:cNvSpPr>
+            <a:spLocks noGrp="1"/>
+          </p:cNvSpPr>
+          <p:nvPr>
+            <p:ph type="ftr" sz="quarter" idx="4"/>
+          </p:nvPr>
+        </p:nvSpPr>
+        <p:spPr>
+          <a:xfrm>
+            <a:off x="0" y="8685213"/>
+            <a:ext cx="2971800" cy="457200"/>
+          </a:xfrm>
+          <a:prstGeom prst="rect">
+            <a:avLst/>
+          </a:prstGeom>
+        </p:spPr>
+        <p:txBody>
+          <a:bodyPr vert="horz" lIns="91440" tIns="45720" rIns="91440" bIns="45720" rtlCol="0" anchor="b"/>
+          <a:lstStyle>
+            <a:lvl1pPr algn="l">
+              <a:defRPr sz="1200"/>
+            </a:lvl1pPr>
+          </a:lstStyle>
+          <a:p>
+            <a:endParaRPr lang="en-US"/>
+          </a:p>
+        </p:txBody>
+      </p:sp>
+      <p:sp>
+        <p:nvSpPr>
+          <p:cNvPr id="7" name="Slide Number Placeholder 6"/>
+          <p:cNvSpPr>
+            <a:spLocks noGrp="1"/>
+          </p:cNvSpPr>
+          <p:nvPr>
+            <p:ph type="sldNum" sz="quarter" idx="5"/>
+          </p:nvPr>
+        </p:nvSpPr>
+        <p:spPr>
+          <a:xfrm>
+            <a:off x="3884613" y="8685213"/>
+            <a:ext cx="2971800" cy="457200"/>
+          </a:xfrm>
+          <a:prstGeom prst="rect">
+            <a:avLst/>
+          </a:prstGeom>
+        </p:spPr>
+        <p:txBody>
+          <a:bodyPr vert="horz" lIns="91440" tIns="45720" rIns="91440" bIns="45720" rtlCol="0" anchor="b"/>
+          <a:lstStyle>
+            <a:lvl1pPr algn="r">
+              <a:defRPr sz="1200"/>
+            </a:lvl1pPr>
+          </a:lstStyle>
+          <a:p>
+            <a:fld id="{BB5E49A5-4136-284D-997B-48E1D791AD67}" type="slidenum">
+              <a:rPr lang="en-US" smtClean="0"/>
+              <a:t>‹#›</a:t>
+            </a:fld>
+            <a:endParaRPr lang="en-US"/>
+          </a:p>
+        </p:txBody>
+      </p:sp>
+    </p:spTree>
+    <p:extLst>
+      <p:ext uri="{BB962C8B-B14F-4D97-AF65-F5344CB8AC3E}">
+        <p14:creationId xmlns:p14="http://schemas.microsoft.com/office/powerpoint/2010/main" val="2623252185"/>
+      </p:ext>
+    </p:extLst>
+  </p:cSld>
+  <p:clrMap bg1="lt1" tx1="dk1" bg2="lt2" tx2="dk2" accent1="accent1" accent2="accent2" accent3="accent3" accent4="accent4" accent5="accent5" accent6="accent6" hlink="hlink" folHlink="folHlink"/>
+  <p:notesStyle>
+    <a:lvl1pPr marL="0" algn="l" defTabSz="457200" rtl="0" eaLnBrk="1" latinLnBrk="0" hangingPunct="1">
+      <a:defRPr sz="1200" kern="1200">
+        <a:solidFill>
+          <a:schemeClr val="tx1"/>
+        </a:solidFill>
+        <a:latin typeface="+mn-lt"/>
+        <a:ea typeface="+mn-ea"/>
+        <a:cs typeface="+mn-cs"/>
+      </a:defRPr>
+    </a:lvl1pPr>
+    <a:lvl2pPr marL="457200" algn="l" defTabSz="457200" rtl="0" eaLnBrk="1" latinLnBrk="0" hangingPunct="1">
+      <a:defRPr sz="1200" kern="1200">
+        <a:solidFill>
+          <a:schemeClr val="tx1"/>
+        </a:solidFill>
+        <a:latin typeface="+mn-lt"/>
+        <a:ea typeface="+mn-ea"/>
+        <a:cs typeface="+mn-cs"/>
+      </a:defRPr>
+    </a:lvl2pPr>
+    <a:lvl3pPr marL="914400" algn="l" defTabSz="457200" rtl="0" eaLnBrk="1" latinLnBrk="0" hangingPunct="1">
+      <a:defRPr sz="1200" kern="1200">
+        <a:solidFill>
+          <a:schemeClr val="tx1"/>
+        </a:solidFill>
+        <a:latin typeface="+mn-lt"/>
+        <a:ea typeface="+mn-ea"/>
+        <a:cs typeface="+mn-cs"/>
+      </a:defRPr>
+    </a:lvl3pPr>
+    <a:lvl4pPr marL="1371600" algn="l" defTabSz="457200" rtl="0" eaLnBrk="1" latinLnBrk="0" hangingPunct="1">
+      <a:defRPr sz="1200" kern="1200">
+        <a:solidFill>
+          <a:schemeClr val="tx1"/>
+        </a:solidFill>
+        <a:latin typeface="+mn-lt"/>
+        <a:ea typeface="+mn-ea"/>
+        <a:cs typeface="+mn-cs"/>
+      </a:defRPr>
+    </a:lvl4pPr>
+    <a:lvl5pPr marL="1828800" algn="l" defTabSz="457200" rtl="0" eaLnBrk="1" latinLnBrk="0" hangingPunct="1">
+      <a:defRPr sz="1200" kern="1200">
+        <a:solidFill>
+          <a:schemeClr val="tx1"/>
+        </a:solidFill>
+        <a:latin typeface="+mn-lt"/>
+        <a:ea typeface="+mn-ea"/>
+        <a:cs typeface="+mn-cs"/>
+      </a:defRPr>
+    </a:lvl5pPr>
+    <a:lvl6pPr marL="2286000" algn="l" defTabSz="457200" rtl="0" eaLnBrk="1" latinLnBrk="0" hangingPunct="1">
+      <a:defRPr sz="1200" kern="1200">
+        <a:solidFill>
+          <a:schemeClr val="tx1"/>
+        </a:solidFill>
+        <a:latin typeface="+mn-lt"/>
+        <a:ea typeface="+mn-ea"/>
+        <a:cs typeface="+mn-cs"/>
+      </a:defRPr>
+    </a:lvl6pPr>
+    <a:lvl7pPr marL="2743200" algn="l" defTabSz="457200" rtl="0" eaLnBrk="1" latinLnBrk="0" hangingPunct="1">
+      <a:defRPr sz="1200" kern="1200">
+        <a:solidFill>
+          <a:schemeClr val="tx1"/>
+        </a:solidFill>
+        <a:latin typeface="+mn-lt"/>
+        <a:ea typeface="+mn-ea"/>
+        <a:cs typeface="+mn-cs"/>
+      </a:defRPr>
+    </a:lvl7pPr>
+    <a:lvl8pPr marL="3200400" algn="l" defTabSz="457200" rtl="0" eaLnBrk="1" latinLnBrk="0" hangingPunct="1">
+      <a:defRPr sz="1200" kern="1200">
+        <a:solidFill>
+          <a:schemeClr val="tx1"/>
+        </a:solidFill>
+        <a:latin typeface="+mn-lt"/>
+        <a:ea typeface="+mn-ea"/>
+        <a:cs typeface="+mn-cs"/>
+      </a:defRPr>
+    </a:lvl8pPr>
+    <a:lvl9pPr marL="3657600" algn="l" defTabSz="457200" rtl="0" eaLnBrk="1" latinLnBrk="0" hangingPunct="1">
+      <a:defRPr sz="1200" kern="1200">
+        <a:solidFill>
+          <a:schemeClr val="tx1"/>
+        </a:solidFill>
+        <a:latin typeface="+mn-lt"/>
+        <a:ea typeface="+mn-ea"/>
+        <a:cs typeface="+mn-cs"/>
+      </a:defRPr>
+    </a:lvl9pPr>
+  </p:notesStyle>
+</p:notesMaster>
+</file>
+
+<file path=ppt/notesSlides/notesSlide1.xml><?xml version="1.0" encoding="utf-8"?>
+<p:notes xmlns:a="http://schemas.openxmlformats.org/drawingml/2006/main" xmlns:p="http://schemas.openxmlformats.org/presentationml/2006/main" xmlns:r="http://schemas.openxmlformats.org/officeDocument/2006/relationships">
+  <p:cSld>
+    <p:spTree>
+      <p:nvGrpSpPr>
+        <p:cNvPr id="1" name=""/>
+        <p:cNvGrpSpPr/>
+        <p:nvPr/>
+      </p:nvGrpSpPr>
+      <p:grpSpPr>
+        <a:xfrm>
+          <a:off x="0" y="0"/>
+          <a:ext cx="0" cy="0"/>
+          <a:chOff x="0" y="0"/>
+          <a:chExt cx="0" cy="0"/>
+        </a:xfrm>
+      </p:grpSpPr>
+      <p:sp>
+        <p:nvSpPr>
+          <p:cNvPr id="2" name="Slide Image Placeholder 1"/>
+          <p:cNvSpPr>
+            <a:spLocks noGrp="1"/>
+          </p:cNvSpPr>
+          <p:nvPr>
+            <p:ph type="sldImg" idx="2"/>
+          </p:nvPr>
+        </p:nvSpPr>
+        <p:spPr/>
+      </p:sp>
+      <p:sp>
+        <p:nvSpPr>
+          <p:cNvPr id="3" name="Notes Placeholder 2"/>
+          <p:cNvSpPr>
+            <a:spLocks noGrp="1"/>
+          </p:cNvSpPr>
+          <p:nvPr>
+            <p:ph type="body" idx="3" sz="quarter"/>
+          </p:nvPr>
+        </p:nvSpPr>
+        <p:spPr/>
+        <p:txBody>
+          <a:bodyPr/>
+          <a:lstStyle/>
+          <a:p>
+            <a:r>
+              <a:t>Individuos e interacciones SOBRE procesos y herramientas; software funcionando SOBRE documentacion exhaustiva; colaboracion con el cliente SOBRE negociacion contractual; respuesta ante el cambio SOBRE seguir un plan.</a:t>
+            </a:r>
+          </a:p>
+        </p:txBody>
+      </p:sp>
+      <p:sp>
+        <p:nvSpPr>
+          <p:cNvPr id="4" name="Slide Number Placeholder 3"/>
+          <p:cNvSpPr>
+            <a:spLocks noGrp="1"/>
+          </p:cNvSpPr>
+          <p:nvPr>
+            <p:ph type="sldNum" idx="5" sz="quarter"/>
+          </p:nvPr>
+        </p:nvSpPr>
+        <p:spPr/>
+      </p:sp>
+    </p:spTree>
+  </p:cSld>
+  <p:clrMapOvr>
+    <a:masterClrMapping/>
+  </p:clrMapOvr>
+</p:notes>
+</file>
+
+<file path=ppt/notesSlides/notesSlide2.xml><?xml version="1.0" encoding="utf-8"?>
+<p:notes xmlns:a="http://schemas.openxmlformats.org/drawingml/2006/main" xmlns:p="http://schemas.openxmlformats.org/presentationml/2006/main" xmlns:r="http://schemas.openxmlformats.org/officeDocument/2006/relationships">
+  <p:cSld>
+    <p:spTree>
+      <p:nvGrpSpPr>
+        <p:cNvPr id="1" name=""/>
+        <p:cNvGrpSpPr/>
+        <p:nvPr/>
+      </p:nvGrpSpPr>
+      <p:grpSpPr>
+        <a:xfrm>
+          <a:off x="0" y="0"/>
+          <a:ext cx="0" cy="0"/>
+          <a:chOff x="0" y="0"/>
+          <a:chExt cx="0" cy="0"/>
+        </a:xfrm>
+      </p:grpSpPr>
+      <p:sp>
+        <p:nvSpPr>
+          <p:cNvPr id="2" name="Slide Image Placeholder 1"/>
+          <p:cNvSpPr>
+            <a:spLocks noGrp="1"/>
+          </p:cNvSpPr>
+          <p:nvPr>
+            <p:ph type="sldImg" idx="2"/>
+          </p:nvPr>
+        </p:nvSpPr>
+        <p:spPr/>
+      </p:sp>
+      <p:sp>
+        <p:nvSpPr>
+          <p:cNvPr id="3" name="Notes Placeholder 2"/>
+          <p:cNvSpPr>
+            <a:spLocks noGrp="1"/>
+          </p:cNvSpPr>
+          <p:nvPr>
+            <p:ph type="body" idx="3" sz="quarter"/>
+          </p:nvPr>
+        </p:nvSpPr>
+        <p:spPr/>
+        <p:txBody>
+          <a:bodyPr/>
+          <a:lstStyle/>
+          <a:p>
+            <a:r>
+              <a:t>En VetCare el docente actua como vocero de Huellitas en el rol de Product Owner, y cada estudiante -o cada equipo, si el docente lo autoriza- hace de equipo de desarrollo que se compromete con un objetivo de sprint.</a:t>
+            </a:r>
+          </a:p>
+        </p:txBody>
+      </p:sp>
+      <p:sp>
+        <p:nvSpPr>
+          <p:cNvPr id="4" name="Slide Number Placeholder 3"/>
+          <p:cNvSpPr>
+            <a:spLocks noGrp="1"/>
+          </p:cNvSpPr>
+          <p:nvPr>
+            <p:ph type="sldNum" idx="5" sz="quarter"/>
+          </p:nvPr>
+        </p:nvSpPr>
+        <p:spPr/>
+      </p:sp>
+    </p:spTree>
+  </p:cSld>
+  <p:clrMapOvr>
+    <a:masterClrMapping/>
+  </p:clrMapOvr>
+</p:notes>
+</file>
+
+<file path=ppt/notesSlides/notesSlide3.xml><?xml version="1.0" encoding="utf-8"?>
+<p:notes xmlns:a="http://schemas.openxmlformats.org/drawingml/2006/main" xmlns:p="http://schemas.openxmlformats.org/presentationml/2006/main" xmlns:r="http://schemas.openxmlformats.org/officeDocument/2006/relationships">
+  <p:cSld>
+    <p:spTree>
+      <p:nvGrpSpPr>
+        <p:cNvPr id="1" name=""/>
+        <p:cNvGrpSpPr/>
+        <p:nvPr/>
+      </p:nvGrpSpPr>
+      <p:grpSpPr>
+        <a:xfrm>
+          <a:off x="0" y="0"/>
+          <a:ext cx="0" cy="0"/>
+          <a:chOff x="0" y="0"/>
+          <a:chExt cx="0" cy="0"/>
+        </a:xfrm>
+      </p:grpSpPr>
+      <p:sp>
+        <p:nvSpPr>
+          <p:cNvPr id="2" name="Slide Image Placeholder 1"/>
+          <p:cNvSpPr>
+            <a:spLocks noGrp="1"/>
+          </p:cNvSpPr>
+          <p:nvPr>
+            <p:ph type="sldImg" idx="2"/>
+          </p:nvPr>
+        </p:nvSpPr>
+        <p:spPr/>
+      </p:sp>
+      <p:sp>
+        <p:nvSpPr>
+          <p:cNvPr id="3" name="Notes Placeholder 2"/>
+          <p:cNvSpPr>
+            <a:spLocks noGrp="1"/>
+          </p:cNvSpPr>
+          <p:nvPr>
+            <p:ph type="body" idx="3" sz="quarter"/>
+          </p:nvPr>
+        </p:nvSpPr>
+        <p:spPr/>
+        <p:txBody>
+          <a:bodyPr/>
+          <a:lstStyle/>
+          <a:p>
+            <a:r>
+              <a:t>En VetCare el tablero seria Por hacer / Modelando / En revision del cliente / Aprobado, y la politica de la ultima columna podria ser 'solo pasa a Aprobado si tiene diagrama, mockup y visto bueno de la clinica'.</a:t>
+            </a:r>
+          </a:p>
+        </p:txBody>
+      </p:sp>
+      <p:sp>
+        <p:nvSpPr>
+          <p:cNvPr id="4" name="Slide Number Placeholder 3"/>
+          <p:cNvSpPr>
+            <a:spLocks noGrp="1"/>
+          </p:cNvSpPr>
+          <p:nvPr>
+            <p:ph type="sldNum" idx="5" sz="quarter"/>
+          </p:nvPr>
+        </p:nvSpPr>
+        <p:spPr/>
+      </p:sp>
+    </p:spTree>
+  </p:cSld>
+  <p:clrMapOvr>
+    <a:masterClrMapping/>
+  </p:clrMapOvr>
+</p:notes>
+</file>
+
+<file path=ppt/notesSlides/notesSlide4.xml><?xml version="1.0" encoding="utf-8"?>
+<p:notes xmlns:a="http://schemas.openxmlformats.org/drawingml/2006/main" xmlns:p="http://schemas.openxmlformats.org/presentationml/2006/main" xmlns:r="http://schemas.openxmlformats.org/officeDocument/2006/relationships">
+  <p:cSld>
+    <p:spTree>
+      <p:nvGrpSpPr>
+        <p:cNvPr id="1" name=""/>
+        <p:cNvGrpSpPr/>
+        <p:nvPr/>
+      </p:nvGrpSpPr>
+      <p:grpSpPr>
+        <a:xfrm>
+          <a:off x="0" y="0"/>
+          <a:ext cx="0" cy="0"/>
+          <a:chOff x="0" y="0"/>
+          <a:chExt cx="0" cy="0"/>
+        </a:xfrm>
+      </p:grpSpPr>
+      <p:sp>
+        <p:nvSpPr>
+          <p:cNvPr id="2" name="Slide Image Placeholder 1"/>
+          <p:cNvSpPr>
+            <a:spLocks noGrp="1"/>
+          </p:cNvSpPr>
+          <p:nvPr>
+            <p:ph type="sldImg" idx="2"/>
+          </p:nvPr>
+        </p:nvSpPr>
+        <p:spPr/>
+      </p:sp>
+      <p:sp>
+        <p:nvSpPr>
+          <p:cNvPr id="3" name="Notes Placeholder 2"/>
+          <p:cNvSpPr>
+            <a:spLocks noGrp="1"/>
+          </p:cNvSpPr>
+          <p:nvPr>
+            <p:ph type="body" idx="3" sz="quarter"/>
+          </p:nvPr>
+        </p:nvSpPr>
+        <p:spPr/>
+        <p:txBody>
+          <a:bodyPr/>
+          <a:lstStyle/>
+          <a:p>
+            <a:r>
+              <a:t>Agil hace las dos cosas al mismo tiempo.</a:t>
+            </a:r>
+          </a:p>
+        </p:txBody>
+      </p:sp>
+      <p:sp>
+        <p:nvSpPr>
+          <p:cNvPr id="4" name="Slide Number Placeholder 3"/>
+          <p:cNvSpPr>
+            <a:spLocks noGrp="1"/>
+          </p:cNvSpPr>
+          <p:nvPr>
+            <p:ph type="sldNum" idx="5" sz="quarter"/>
+          </p:nvPr>
+        </p:nvSpPr>
+        <p:spPr/>
+      </p:sp>
+    </p:spTree>
+  </p:cSld>
+  <p:clrMapOvr>
+    <a:masterClrMapping/>
+  </p:clrMapOvr>
+</p:notes>
+</file>
+
+<file path=ppt/notesSlides/notesSlide5.xml><?xml version="1.0" encoding="utf-8"?>
+<p:notes xmlns:a="http://schemas.openxmlformats.org/drawingml/2006/main" xmlns:p="http://schemas.openxmlformats.org/presentationml/2006/main" xmlns:r="http://schemas.openxmlformats.org/officeDocument/2006/relationships">
+  <p:cSld>
+    <p:spTree>
+      <p:nvGrpSpPr>
+        <p:cNvPr id="1" name=""/>
+        <p:cNvGrpSpPr/>
+        <p:nvPr/>
+      </p:nvGrpSpPr>
+      <p:grpSpPr>
+        <a:xfrm>
+          <a:off x="0" y="0"/>
+          <a:ext cx="0" cy="0"/>
+          <a:chOff x="0" y="0"/>
+          <a:chExt cx="0" cy="0"/>
+        </a:xfrm>
+      </p:grpSpPr>
+      <p:sp>
+        <p:nvSpPr>
+          <p:cNvPr id="2" name="Slide Image Placeholder 1"/>
+          <p:cNvSpPr>
+            <a:spLocks noGrp="1"/>
+          </p:cNvSpPr>
+          <p:nvPr>
+            <p:ph type="sldImg" idx="2"/>
+          </p:nvPr>
+        </p:nvSpPr>
+        <p:spPr/>
+      </p:sp>
+      <p:sp>
+        <p:nvSpPr>
+          <p:cNvPr id="3" name="Notes Placeholder 2"/>
+          <p:cNvSpPr>
+            <a:spLocks noGrp="1"/>
+          </p:cNvSpPr>
+          <p:nvPr>
+            <p:ph type="body" idx="3" sz="quarter"/>
+          </p:nvPr>
+        </p:nvSpPr>
+        <p:spPr/>
+        <p:txBody>
+          <a:bodyPr/>
+          <a:lstStyle/>
+          <a:p>
+            <a:r>
+              <a:t>Un equipo agil documenta historias de usuario con criterios de aceptacion, la Definicion de Terminado, las decisiones de arquitectura, el diccionario de datos y los diagramas que hagan falta, pero los escribe justo a tiempo y los mantiene vivos.</a:t>
+            </a:r>
+          </a:p>
+        </p:txBody>
+      </p:sp>
+      <p:sp>
+        <p:nvSpPr>
+          <p:cNvPr id="4" name="Slide Number Placeholder 3"/>
+          <p:cNvSpPr>
+            <a:spLocks noGrp="1"/>
+          </p:cNvSpPr>
+          <p:nvPr>
+            <p:ph type="sldNum" idx="5" sz="quarter"/>
+          </p:nvPr>
+        </p:nvSpPr>
+        <p:spPr/>
+      </p:sp>
+    </p:spTree>
+  </p:cSld>
+  <p:clrMapOvr>
+    <a:masterClrMapping/>
+  </p:clrMapOvr>
+</p:notes>
 </file>
 
 <file path=ppt/slideLayouts/slideLayout1.xml><?xml version="1.0" encoding="utf-8"?>
@@ -5622,13 +6315,13 @@
         <p:spPr>
           <a:xfrm>
             <a:off x="0" y="0"/>
-            <a:ext cx="12191695" cy="1170432"/>
+            <a:ext cx="12191695" cy="164592"/>
           </a:xfrm>
           <a:prstGeom prst="rect">
             <a:avLst/>
           </a:prstGeom>
           <a:solidFill>
-            <a:srgbClr val="095292"/>
+            <a:srgbClr val="269CCB"/>
           </a:solidFill>
           <a:ln>
             <a:noFill/>
@@ -5656,251 +6349,9 @@
           </a:p>
         </p:txBody>
       </p:sp>
-      <p:sp>
-        <p:nvSpPr>
-          <p:cNvPr id="3" name="Rectangle 2"/>
-          <p:cNvSpPr/>
-          <p:nvPr/>
-        </p:nvSpPr>
-        <p:spPr>
-          <a:xfrm>
-            <a:off x="0" y="1170432"/>
-            <a:ext cx="12191695" cy="41148"/>
-          </a:xfrm>
-          <a:prstGeom prst="rect">
-            <a:avLst/>
-          </a:prstGeom>
-          <a:solidFill>
-            <a:srgbClr val="FFD000"/>
-          </a:solidFill>
-          <a:ln>
-            <a:noFill/>
-          </a:ln>
-        </p:spPr>
-        <p:style>
-          <a:lnRef idx="1">
-            <a:schemeClr val="accent1"/>
-          </a:lnRef>
-          <a:fillRef idx="3">
-            <a:schemeClr val="accent1"/>
-          </a:fillRef>
-          <a:effectRef idx="2">
-            <a:schemeClr val="accent1"/>
-          </a:effectRef>
-          <a:fontRef idx="minor">
-            <a:schemeClr val="lt1"/>
-          </a:fontRef>
-        </p:style>
-        <p:txBody>
-          <a:bodyPr rtlCol="0" anchor="ctr"/>
-          <a:lstStyle/>
-          <a:p>
-            <a:pPr algn="ctr"/>
-          </a:p>
-        </p:txBody>
-      </p:sp>
-      <p:sp>
-        <p:nvSpPr>
-          <p:cNvPr id="4" name="TextBox 3"/>
-          <p:cNvSpPr txBox="1"/>
-          <p:nvPr/>
-        </p:nvSpPr>
-        <p:spPr>
-          <a:xfrm>
-            <a:off x="457200" y="164592"/>
-            <a:ext cx="11277295" cy="384048"/>
-          </a:xfrm>
-          <a:prstGeom prst="rect">
-            <a:avLst/>
-          </a:prstGeom>
-          <a:noFill/>
-        </p:spPr>
-        <p:txBody>
-          <a:bodyPr wrap="square">
-            <a:spAutoFit/>
-          </a:bodyPr>
-          <a:lstStyle/>
-          <a:p>
-            <a:r>
-              <a:rPr sz="2600" b="1" i="0">
-                <a:solidFill>
-                  <a:srgbClr val="FFFFFF"/>
-                </a:solidFill>
-                <a:latin typeface="Calibri"/>
-              </a:rPr>
-              <a:t>Herramientas de hoy</a:t>
-            </a:r>
-          </a:p>
-        </p:txBody>
-      </p:sp>
-      <p:sp>
-        <p:nvSpPr>
-          <p:cNvPr id="5" name="TextBox 4"/>
-          <p:cNvSpPr txBox="1"/>
-          <p:nvPr/>
-        </p:nvSpPr>
-        <p:spPr>
-          <a:xfrm>
-            <a:off x="457200" y="566928"/>
-            <a:ext cx="11277295" cy="411480"/>
-          </a:xfrm>
-          <a:prstGeom prst="rect">
-            <a:avLst/>
-          </a:prstGeom>
-          <a:noFill/>
-        </p:spPr>
-        <p:txBody>
-          <a:bodyPr wrap="square">
-            <a:spAutoFit/>
-          </a:bodyPr>
-          <a:lstStyle/>
-          <a:p>
-            <a:r>
-              <a:rPr sz="1400" b="0" i="0">
-                <a:solidFill>
-                  <a:srgbClr val="B8D8EE"/>
-                </a:solidFill>
-                <a:latin typeface="Calibri"/>
-              </a:rPr>
-              <a:t>Gratis · funcionan en el navegador</a:t>
-            </a:r>
-          </a:p>
-        </p:txBody>
-      </p:sp>
-      <p:sp>
-        <p:nvSpPr>
-          <p:cNvPr id="6" name="Rounded Rectangle 5"/>
-          <p:cNvSpPr/>
-          <p:nvPr/>
-        </p:nvSpPr>
-        <p:spPr>
-          <a:xfrm>
-            <a:off x="457200" y="1591056"/>
-            <a:ext cx="3624986" cy="2299716"/>
-          </a:xfrm>
-          <a:prstGeom prst="roundRect">
-            <a:avLst>
-              <a:gd name="adj" fmla="val 12000"/>
-            </a:avLst>
-          </a:prstGeom>
-          <a:solidFill>
-            <a:srgbClr val="F2F2F2"/>
-          </a:solidFill>
-          <a:ln>
-            <a:noFill/>
-          </a:ln>
-        </p:spPr>
-        <p:style>
-          <a:lnRef idx="1">
-            <a:schemeClr val="accent1"/>
-          </a:lnRef>
-          <a:fillRef idx="3">
-            <a:schemeClr val="accent1"/>
-          </a:fillRef>
-          <a:effectRef idx="2">
-            <a:schemeClr val="accent1"/>
-          </a:effectRef>
-          <a:fontRef idx="minor">
-            <a:schemeClr val="lt1"/>
-          </a:fontRef>
-        </p:style>
-        <p:txBody>
-          <a:bodyPr rtlCol="0" anchor="ctr"/>
-          <a:lstStyle/>
-          <a:p>
-            <a:pPr algn="ctr"/>
-          </a:p>
-        </p:txBody>
-      </p:sp>
-      <p:sp>
-        <p:nvSpPr>
-          <p:cNvPr id="7" name="Rectangle 6"/>
-          <p:cNvSpPr/>
-          <p:nvPr/>
-        </p:nvSpPr>
-        <p:spPr>
-          <a:xfrm>
-            <a:off x="457200" y="1591056"/>
-            <a:ext cx="3624986" cy="64008"/>
-          </a:xfrm>
-          <a:prstGeom prst="rect">
-            <a:avLst/>
-          </a:prstGeom>
-          <a:solidFill>
-            <a:srgbClr val="095292"/>
-          </a:solidFill>
-          <a:ln>
-            <a:noFill/>
-          </a:ln>
-        </p:spPr>
-        <p:style>
-          <a:lnRef idx="1">
-            <a:schemeClr val="accent1"/>
-          </a:lnRef>
-          <a:fillRef idx="3">
-            <a:schemeClr val="accent1"/>
-          </a:fillRef>
-          <a:effectRef idx="2">
-            <a:schemeClr val="accent1"/>
-          </a:effectRef>
-          <a:fontRef idx="minor">
-            <a:schemeClr val="lt1"/>
-          </a:fontRef>
-        </p:style>
-        <p:txBody>
-          <a:bodyPr rtlCol="0" anchor="ctr"/>
-          <a:lstStyle/>
-          <a:p>
-            <a:pPr algn="ctr"/>
-          </a:p>
-        </p:txBody>
-      </p:sp>
-      <p:sp>
-        <p:nvSpPr>
-          <p:cNvPr id="8" name="Rectangle 7"/>
-          <p:cNvSpPr/>
-          <p:nvPr/>
-        </p:nvSpPr>
-        <p:spPr>
-          <a:xfrm>
-            <a:off x="457200" y="1655064"/>
-            <a:ext cx="3624986" cy="27432"/>
-          </a:xfrm>
-          <a:prstGeom prst="rect">
-            <a:avLst/>
-          </a:prstGeom>
-          <a:solidFill>
-            <a:srgbClr val="FFD000"/>
-          </a:solidFill>
-          <a:ln>
-            <a:noFill/>
-          </a:ln>
-        </p:spPr>
-        <p:style>
-          <a:lnRef idx="1">
-            <a:schemeClr val="accent1"/>
-          </a:lnRef>
-          <a:fillRef idx="3">
-            <a:schemeClr val="accent1"/>
-          </a:fillRef>
-          <a:effectRef idx="2">
-            <a:schemeClr val="accent1"/>
-          </a:effectRef>
-          <a:fontRef idx="minor">
-            <a:schemeClr val="lt1"/>
-          </a:fontRef>
-        </p:style>
-        <p:txBody>
-          <a:bodyPr rtlCol="0" anchor="ctr"/>
-          <a:lstStyle/>
-          <a:p>
-            <a:pPr algn="ctr"/>
-          </a:p>
-        </p:txBody>
-      </p:sp>
       <p:pic>
         <p:nvPicPr>
-          <p:cNvPr id="9" name="Picture 8" descr="drawio.png"/>
+          <p:cNvPr id="3" name="Picture 2" descr="logo_uniajc_color.png"/>
           <p:cNvPicPr>
             <a:picLocks noChangeAspect="1"/>
           </p:cNvPicPr>
@@ -5914,8 +6365,8 @@
         </p:blipFill>
         <p:spPr>
           <a:xfrm>
-            <a:off x="1659331" y="1847087"/>
-            <a:ext cx="1220724" cy="1220724"/>
+            <a:off x="10271455" y="5998464"/>
+            <a:ext cx="1463040" cy="643233"/>
           </a:xfrm>
           <a:prstGeom prst="rect">
             <a:avLst/>
@@ -5924,14 +6375,14 @@
       </p:pic>
       <p:sp>
         <p:nvSpPr>
-          <p:cNvPr id="10" name="TextBox 9"/>
+          <p:cNvPr id="4" name="TextBox 3"/>
           <p:cNvSpPr txBox="1"/>
           <p:nvPr/>
         </p:nvSpPr>
         <p:spPr>
           <a:xfrm>
-            <a:off x="530352" y="3159251"/>
-            <a:ext cx="3478682" cy="621792"/>
+            <a:off x="457200" y="1737360"/>
+            <a:ext cx="11277295" cy="1097280"/>
           </a:xfrm>
           <a:prstGeom prst="rect">
             <a:avLst/>
@@ -5939,660 +6390,32 @@
           <a:noFill/>
         </p:spPr>
         <p:txBody>
-          <a:bodyPr wrap="square" anchor="t"/>
+          <a:bodyPr wrap="square" anchor="ctr"/>
           <a:lstStyle/>
           <a:p>
             <a:pPr algn="ctr"/>
             <a:r>
-              <a:rPr sz="1300" b="1" i="0">
+              <a:rPr sz="3400" b="1" i="0">
                 <a:solidFill>
                   <a:srgbClr val="095292"/>
                 </a:solidFill>
                 <a:latin typeface="Calibri"/>
               </a:rPr>
-              <a:t>Draw.Io</a:t>
-            </a:r>
-          </a:p>
-          <a:p>
-            <a:pPr algn="ctr">
-              <a:spcBef>
-                <a:spcPts val="200"/>
-              </a:spcBef>
-            </a:pPr>
-            <a:r>
-              <a:rPr sz="1000" b="0" i="0">
-                <a:solidFill>
-                  <a:srgbClr val="666666"/>
-                </a:solidFill>
-                <a:latin typeface="Calibri"/>
-              </a:rPr>
-              <a:t>Diagramas UML y de contexto</a:t>
-            </a:r>
-          </a:p>
-        </p:txBody>
-      </p:sp>
-      <p:sp>
-        <p:nvSpPr>
-          <p:cNvPr id="11" name="Rounded Rectangle 10"/>
-          <p:cNvSpPr/>
-          <p:nvPr/>
-        </p:nvSpPr>
-        <p:spPr>
-          <a:xfrm>
-            <a:off x="4283354" y="1591056"/>
-            <a:ext cx="3624986" cy="2299716"/>
-          </a:xfrm>
-          <a:prstGeom prst="roundRect">
-            <a:avLst>
-              <a:gd name="adj" fmla="val 12000"/>
-            </a:avLst>
-          </a:prstGeom>
-          <a:solidFill>
-            <a:srgbClr val="F2F2F2"/>
-          </a:solidFill>
-          <a:ln>
-            <a:noFill/>
-          </a:ln>
-        </p:spPr>
-        <p:style>
-          <a:lnRef idx="1">
-            <a:schemeClr val="accent1"/>
-          </a:lnRef>
-          <a:fillRef idx="3">
-            <a:schemeClr val="accent1"/>
-          </a:fillRef>
-          <a:effectRef idx="2">
-            <a:schemeClr val="accent1"/>
-          </a:effectRef>
-          <a:fontRef idx="minor">
-            <a:schemeClr val="lt1"/>
-          </a:fontRef>
-        </p:style>
-        <p:txBody>
-          <a:bodyPr rtlCol="0" anchor="ctr"/>
-          <a:lstStyle/>
-          <a:p>
-            <a:pPr algn="ctr"/>
-          </a:p>
-        </p:txBody>
-      </p:sp>
-      <p:sp>
-        <p:nvSpPr>
-          <p:cNvPr id="12" name="Rectangle 11"/>
-          <p:cNvSpPr/>
-          <p:nvPr/>
-        </p:nvSpPr>
-        <p:spPr>
-          <a:xfrm>
-            <a:off x="4283354" y="1591056"/>
-            <a:ext cx="3624986" cy="64008"/>
-          </a:xfrm>
-          <a:prstGeom prst="rect">
-            <a:avLst/>
-          </a:prstGeom>
-          <a:solidFill>
-            <a:srgbClr val="095292"/>
-          </a:solidFill>
-          <a:ln>
-            <a:noFill/>
-          </a:ln>
-        </p:spPr>
-        <p:style>
-          <a:lnRef idx="1">
-            <a:schemeClr val="accent1"/>
-          </a:lnRef>
-          <a:fillRef idx="3">
-            <a:schemeClr val="accent1"/>
-          </a:fillRef>
-          <a:effectRef idx="2">
-            <a:schemeClr val="accent1"/>
-          </a:effectRef>
-          <a:fontRef idx="minor">
-            <a:schemeClr val="lt1"/>
-          </a:fontRef>
-        </p:style>
-        <p:txBody>
-          <a:bodyPr rtlCol="0" anchor="ctr"/>
-          <a:lstStyle/>
-          <a:p>
-            <a:pPr algn="ctr"/>
-          </a:p>
-        </p:txBody>
-      </p:sp>
-      <p:sp>
-        <p:nvSpPr>
-          <p:cNvPr id="13" name="Rectangle 12"/>
-          <p:cNvSpPr/>
-          <p:nvPr/>
-        </p:nvSpPr>
-        <p:spPr>
-          <a:xfrm>
-            <a:off x="4283354" y="1655064"/>
-            <a:ext cx="3624986" cy="27432"/>
-          </a:xfrm>
-          <a:prstGeom prst="rect">
-            <a:avLst/>
-          </a:prstGeom>
-          <a:solidFill>
-            <a:srgbClr val="FFD000"/>
-          </a:solidFill>
-          <a:ln>
-            <a:noFill/>
-          </a:ln>
-        </p:spPr>
-        <p:style>
-          <a:lnRef idx="1">
-            <a:schemeClr val="accent1"/>
-          </a:lnRef>
-          <a:fillRef idx="3">
-            <a:schemeClr val="accent1"/>
-          </a:fillRef>
-          <a:effectRef idx="2">
-            <a:schemeClr val="accent1"/>
-          </a:effectRef>
-          <a:fontRef idx="minor">
-            <a:schemeClr val="lt1"/>
-          </a:fontRef>
-        </p:style>
-        <p:txBody>
-          <a:bodyPr rtlCol="0" anchor="ctr"/>
-          <a:lstStyle/>
-          <a:p>
-            <a:pPr algn="ctr"/>
-          </a:p>
-        </p:txBody>
-      </p:sp>
-      <p:pic>
-        <p:nvPicPr>
-          <p:cNvPr id="14" name="Picture 13" descr="excalidraw.png"/>
-          <p:cNvPicPr>
-            <a:picLocks noChangeAspect="1"/>
-          </p:cNvPicPr>
-          <p:nvPr/>
-        </p:nvPicPr>
-        <p:blipFill>
-          <a:blip r:embed="rId3"/>
-          <a:stretch>
-            <a:fillRect/>
-          </a:stretch>
-        </p:blipFill>
-        <p:spPr>
-          <a:xfrm>
-            <a:off x="5485485" y="1847087"/>
-            <a:ext cx="1220724" cy="1220724"/>
-          </a:xfrm>
-          <a:prstGeom prst="rect">
-            <a:avLst/>
-          </a:prstGeom>
-        </p:spPr>
-      </p:pic>
-      <p:sp>
-        <p:nvSpPr>
-          <p:cNvPr id="15" name="TextBox 14"/>
+              <a:t>Clase 4 · Metodologias agiles</a:t>
+            </a:r>
+          </a:p>
+        </p:txBody>
+      </p:sp>
+      <p:sp>
+        <p:nvSpPr>
+          <p:cNvPr id="5" name="TextBox 4"/>
           <p:cNvSpPr txBox="1"/>
           <p:nvPr/>
         </p:nvSpPr>
         <p:spPr>
           <a:xfrm>
-            <a:off x="4356506" y="3159251"/>
-            <a:ext cx="3478682" cy="621792"/>
-          </a:xfrm>
-          <a:prstGeom prst="rect">
-            <a:avLst/>
-          </a:prstGeom>
-          <a:noFill/>
-        </p:spPr>
-        <p:txBody>
-          <a:bodyPr wrap="square" anchor="t"/>
-          <a:lstStyle/>
-          <a:p>
-            <a:pPr algn="ctr"/>
-            <a:r>
-              <a:rPr sz="1300" b="1" i="0">
-                <a:solidFill>
-                  <a:srgbClr val="095292"/>
-                </a:solidFill>
-                <a:latin typeface="Calibri"/>
-              </a:rPr>
-              <a:t>Excalidraw</a:t>
-            </a:r>
-          </a:p>
-          <a:p>
-            <a:pPr algn="ctr">
-              <a:spcBef>
-                <a:spcPts val="200"/>
-              </a:spcBef>
-            </a:pPr>
-            <a:r>
-              <a:rPr sz="1000" b="0" i="0">
-                <a:solidFill>
-                  <a:srgbClr val="666666"/>
-                </a:solidFill>
-                <a:latin typeface="Calibri"/>
-              </a:rPr>
-              <a:t>Bocetos rapidos a mano alzada</a:t>
-            </a:r>
-          </a:p>
-        </p:txBody>
-      </p:sp>
-      <p:sp>
-        <p:nvSpPr>
-          <p:cNvPr id="16" name="Rounded Rectangle 15"/>
-          <p:cNvSpPr/>
-          <p:nvPr/>
-        </p:nvSpPr>
-        <p:spPr>
-          <a:xfrm>
-            <a:off x="8109508" y="1591056"/>
-            <a:ext cx="3624986" cy="2299716"/>
-          </a:xfrm>
-          <a:prstGeom prst="roundRect">
-            <a:avLst>
-              <a:gd name="adj" fmla="val 12000"/>
-            </a:avLst>
-          </a:prstGeom>
-          <a:solidFill>
-            <a:srgbClr val="F2F2F2"/>
-          </a:solidFill>
-          <a:ln>
-            <a:noFill/>
-          </a:ln>
-        </p:spPr>
-        <p:style>
-          <a:lnRef idx="1">
-            <a:schemeClr val="accent1"/>
-          </a:lnRef>
-          <a:fillRef idx="3">
-            <a:schemeClr val="accent1"/>
-          </a:fillRef>
-          <a:effectRef idx="2">
-            <a:schemeClr val="accent1"/>
-          </a:effectRef>
-          <a:fontRef idx="minor">
-            <a:schemeClr val="lt1"/>
-          </a:fontRef>
-        </p:style>
-        <p:txBody>
-          <a:bodyPr rtlCol="0" anchor="ctr"/>
-          <a:lstStyle/>
-          <a:p>
-            <a:pPr algn="ctr"/>
-          </a:p>
-        </p:txBody>
-      </p:sp>
-      <p:sp>
-        <p:nvSpPr>
-          <p:cNvPr id="17" name="Rectangle 16"/>
-          <p:cNvSpPr/>
-          <p:nvPr/>
-        </p:nvSpPr>
-        <p:spPr>
-          <a:xfrm>
-            <a:off x="8109508" y="1591056"/>
-            <a:ext cx="3624986" cy="64008"/>
-          </a:xfrm>
-          <a:prstGeom prst="rect">
-            <a:avLst/>
-          </a:prstGeom>
-          <a:solidFill>
-            <a:srgbClr val="095292"/>
-          </a:solidFill>
-          <a:ln>
-            <a:noFill/>
-          </a:ln>
-        </p:spPr>
-        <p:style>
-          <a:lnRef idx="1">
-            <a:schemeClr val="accent1"/>
-          </a:lnRef>
-          <a:fillRef idx="3">
-            <a:schemeClr val="accent1"/>
-          </a:fillRef>
-          <a:effectRef idx="2">
-            <a:schemeClr val="accent1"/>
-          </a:effectRef>
-          <a:fontRef idx="minor">
-            <a:schemeClr val="lt1"/>
-          </a:fontRef>
-        </p:style>
-        <p:txBody>
-          <a:bodyPr rtlCol="0" anchor="ctr"/>
-          <a:lstStyle/>
-          <a:p>
-            <a:pPr algn="ctr"/>
-          </a:p>
-        </p:txBody>
-      </p:sp>
-      <p:sp>
-        <p:nvSpPr>
-          <p:cNvPr id="18" name="Rectangle 17"/>
-          <p:cNvSpPr/>
-          <p:nvPr/>
-        </p:nvSpPr>
-        <p:spPr>
-          <a:xfrm>
-            <a:off x="8109508" y="1655064"/>
-            <a:ext cx="3624986" cy="27432"/>
-          </a:xfrm>
-          <a:prstGeom prst="rect">
-            <a:avLst/>
-          </a:prstGeom>
-          <a:solidFill>
-            <a:srgbClr val="FFD000"/>
-          </a:solidFill>
-          <a:ln>
-            <a:noFill/>
-          </a:ln>
-        </p:spPr>
-        <p:style>
-          <a:lnRef idx="1">
-            <a:schemeClr val="accent1"/>
-          </a:lnRef>
-          <a:fillRef idx="3">
-            <a:schemeClr val="accent1"/>
-          </a:fillRef>
-          <a:effectRef idx="2">
-            <a:schemeClr val="accent1"/>
-          </a:effectRef>
-          <a:fontRef idx="minor">
-            <a:schemeClr val="lt1"/>
-          </a:fontRef>
-        </p:style>
-        <p:txBody>
-          <a:bodyPr rtlCol="0" anchor="ctr"/>
-          <a:lstStyle/>
-          <a:p>
-            <a:pPr algn="ctr"/>
-          </a:p>
-        </p:txBody>
-      </p:sp>
-      <p:pic>
-        <p:nvPicPr>
-          <p:cNvPr id="19" name="Picture 18" descr="google_docs.png"/>
-          <p:cNvPicPr>
-            <a:picLocks noChangeAspect="1"/>
-          </p:cNvPicPr>
-          <p:nvPr/>
-        </p:nvPicPr>
-        <p:blipFill>
-          <a:blip r:embed="rId4"/>
-          <a:stretch>
-            <a:fillRect/>
-          </a:stretch>
-        </p:blipFill>
-        <p:spPr>
-          <a:xfrm>
-            <a:off x="9311640" y="1847087"/>
-            <a:ext cx="1220724" cy="1220724"/>
-          </a:xfrm>
-          <a:prstGeom prst="rect">
-            <a:avLst/>
-          </a:prstGeom>
-        </p:spPr>
-      </p:pic>
-      <p:sp>
-        <p:nvSpPr>
-          <p:cNvPr id="20" name="TextBox 19"/>
-          <p:cNvSpPr txBox="1"/>
-          <p:nvPr/>
-        </p:nvSpPr>
-        <p:spPr>
-          <a:xfrm>
-            <a:off x="8182660" y="3159251"/>
-            <a:ext cx="3478682" cy="621792"/>
-          </a:xfrm>
-          <a:prstGeom prst="rect">
-            <a:avLst/>
-          </a:prstGeom>
-          <a:noFill/>
-        </p:spPr>
-        <p:txBody>
-          <a:bodyPr wrap="square" anchor="t"/>
-          <a:lstStyle/>
-          <a:p>
-            <a:pPr algn="ctr"/>
-            <a:r>
-              <a:rPr sz="1300" b="1" i="0">
-                <a:solidFill>
-                  <a:srgbClr val="095292"/>
-                </a:solidFill>
-                <a:latin typeface="Calibri"/>
-              </a:rPr>
-              <a:t>google docs</a:t>
-            </a:r>
-          </a:p>
-          <a:p>
-            <a:pPr algn="ctr">
-              <a:spcBef>
-                <a:spcPts val="200"/>
-              </a:spcBef>
-            </a:pPr>
-            <a:r>
-              <a:rPr sz="1000" b="0" i="0">
-                <a:solidFill>
-                  <a:srgbClr val="666666"/>
-                </a:solidFill>
-                <a:latin typeface="Calibri"/>
-              </a:rPr>
-              <a:t>Documentos del paquete de diseño</a:t>
-            </a:r>
-          </a:p>
-        </p:txBody>
-      </p:sp>
-      <p:sp>
-        <p:nvSpPr>
-          <p:cNvPr id="21" name="Rounded Rectangle 20"/>
-          <p:cNvSpPr/>
-          <p:nvPr/>
-        </p:nvSpPr>
-        <p:spPr>
-          <a:xfrm>
-            <a:off x="4283354" y="4055364"/>
-            <a:ext cx="3624986" cy="2299716"/>
-          </a:xfrm>
-          <a:prstGeom prst="roundRect">
-            <a:avLst>
-              <a:gd name="adj" fmla="val 12000"/>
-            </a:avLst>
-          </a:prstGeom>
-          <a:solidFill>
-            <a:srgbClr val="F2F2F2"/>
-          </a:solidFill>
-          <a:ln>
-            <a:noFill/>
-          </a:ln>
-        </p:spPr>
-        <p:style>
-          <a:lnRef idx="1">
-            <a:schemeClr val="accent1"/>
-          </a:lnRef>
-          <a:fillRef idx="3">
-            <a:schemeClr val="accent1"/>
-          </a:fillRef>
-          <a:effectRef idx="2">
-            <a:schemeClr val="accent1"/>
-          </a:effectRef>
-          <a:fontRef idx="minor">
-            <a:schemeClr val="lt1"/>
-          </a:fontRef>
-        </p:style>
-        <p:txBody>
-          <a:bodyPr rtlCol="0" anchor="ctr"/>
-          <a:lstStyle/>
-          <a:p>
-            <a:pPr algn="ctr"/>
-          </a:p>
-        </p:txBody>
-      </p:sp>
-      <p:sp>
-        <p:nvSpPr>
-          <p:cNvPr id="22" name="Rectangle 21"/>
-          <p:cNvSpPr/>
-          <p:nvPr/>
-        </p:nvSpPr>
-        <p:spPr>
-          <a:xfrm>
-            <a:off x="4283354" y="4055364"/>
-            <a:ext cx="3624986" cy="64008"/>
-          </a:xfrm>
-          <a:prstGeom prst="rect">
-            <a:avLst/>
-          </a:prstGeom>
-          <a:solidFill>
-            <a:srgbClr val="095292"/>
-          </a:solidFill>
-          <a:ln>
-            <a:noFill/>
-          </a:ln>
-        </p:spPr>
-        <p:style>
-          <a:lnRef idx="1">
-            <a:schemeClr val="accent1"/>
-          </a:lnRef>
-          <a:fillRef idx="3">
-            <a:schemeClr val="accent1"/>
-          </a:fillRef>
-          <a:effectRef idx="2">
-            <a:schemeClr val="accent1"/>
-          </a:effectRef>
-          <a:fontRef idx="minor">
-            <a:schemeClr val="lt1"/>
-          </a:fontRef>
-        </p:style>
-        <p:txBody>
-          <a:bodyPr rtlCol="0" anchor="ctr"/>
-          <a:lstStyle/>
-          <a:p>
-            <a:pPr algn="ctr"/>
-          </a:p>
-        </p:txBody>
-      </p:sp>
-      <p:sp>
-        <p:nvSpPr>
-          <p:cNvPr id="23" name="Rectangle 22"/>
-          <p:cNvSpPr/>
-          <p:nvPr/>
-        </p:nvSpPr>
-        <p:spPr>
-          <a:xfrm>
-            <a:off x="4283354" y="4119372"/>
-            <a:ext cx="3624986" cy="27432"/>
-          </a:xfrm>
-          <a:prstGeom prst="rect">
-            <a:avLst/>
-          </a:prstGeom>
-          <a:solidFill>
-            <a:srgbClr val="FFD000"/>
-          </a:solidFill>
-          <a:ln>
-            <a:noFill/>
-          </a:ln>
-        </p:spPr>
-        <p:style>
-          <a:lnRef idx="1">
-            <a:schemeClr val="accent1"/>
-          </a:lnRef>
-          <a:fillRef idx="3">
-            <a:schemeClr val="accent1"/>
-          </a:fillRef>
-          <a:effectRef idx="2">
-            <a:schemeClr val="accent1"/>
-          </a:effectRef>
-          <a:fontRef idx="minor">
-            <a:schemeClr val="lt1"/>
-          </a:fontRef>
-        </p:style>
-        <p:txBody>
-          <a:bodyPr rtlCol="0" anchor="ctr"/>
-          <a:lstStyle/>
-          <a:p>
-            <a:pPr algn="ctr"/>
-          </a:p>
-        </p:txBody>
-      </p:sp>
-      <p:pic>
-        <p:nvPicPr>
-          <p:cNvPr id="24" name="Picture 23" descr="examlab.png"/>
-          <p:cNvPicPr>
-            <a:picLocks noChangeAspect="1"/>
-          </p:cNvPicPr>
-          <p:nvPr/>
-        </p:nvPicPr>
-        <p:blipFill>
-          <a:blip r:embed="rId5"/>
-          <a:stretch>
-            <a:fillRect/>
-          </a:stretch>
-        </p:blipFill>
-        <p:spPr>
-          <a:xfrm>
-            <a:off x="5485485" y="4311396"/>
-            <a:ext cx="1220724" cy="1220724"/>
-          </a:xfrm>
-          <a:prstGeom prst="rect">
-            <a:avLst/>
-          </a:prstGeom>
-        </p:spPr>
-      </p:pic>
-      <p:sp>
-        <p:nvSpPr>
-          <p:cNvPr id="25" name="TextBox 24"/>
-          <p:cNvSpPr txBox="1"/>
-          <p:nvPr/>
-        </p:nvSpPr>
-        <p:spPr>
-          <a:xfrm>
-            <a:off x="4356506" y="5623560"/>
-            <a:ext cx="3478682" cy="621792"/>
-          </a:xfrm>
-          <a:prstGeom prst="rect">
-            <a:avLst/>
-          </a:prstGeom>
-          <a:noFill/>
-        </p:spPr>
-        <p:txBody>
-          <a:bodyPr wrap="square" anchor="t"/>
-          <a:lstStyle/>
-          <a:p>
-            <a:pPr algn="ctr"/>
-            <a:r>
-              <a:rPr sz="1300" b="1" i="0">
-                <a:solidFill>
-                  <a:srgbClr val="095292"/>
-                </a:solidFill>
-                <a:latin typeface="Calibri"/>
-              </a:rPr>
-              <a:t>la plataforma del curso</a:t>
-            </a:r>
-          </a:p>
-          <a:p>
-            <a:pPr algn="ctr">
-              <a:spcBef>
-                <a:spcPts val="200"/>
-              </a:spcBef>
-            </a:pPr>
-            <a:r>
-              <a:rPr sz="1000" b="0" i="0">
-                <a:solidFill>
-                  <a:srgbClr val="666666"/>
-                </a:solidFill>
-                <a:latin typeface="Calibri"/>
-              </a:rPr>
-              <a:t>Entrega del taller · en la fecha que indique el docente</a:t>
-            </a:r>
-          </a:p>
-        </p:txBody>
-      </p:sp>
-      <p:sp>
-        <p:nvSpPr>
-          <p:cNvPr id="26" name="TextBox 25"/>
-          <p:cNvSpPr txBox="1"/>
-          <p:nvPr/>
-        </p:nvSpPr>
-        <p:spPr>
-          <a:xfrm>
-            <a:off x="11185855" y="6473952"/>
-            <a:ext cx="640080" cy="274320"/>
+            <a:off x="457200" y="3017520"/>
+            <a:ext cx="11277295" cy="1645920"/>
           </a:xfrm>
           <a:prstGeom prst="rect">
             <a:avLst/>
@@ -6605,141 +6428,65 @@
           </a:bodyPr>
           <a:lstStyle/>
           <a:p>
-            <a:pPr algn="r"/>
-            <a:r>
-              <a:rPr sz="1100" b="0" i="0">
-                <a:solidFill>
-                  <a:srgbClr val="666666"/>
-                </a:solidFill>
-                <a:latin typeface="Calibri"/>
-              </a:rPr>
-              <a:t>14</a:t>
-            </a:r>
-          </a:p>
-        </p:txBody>
-      </p:sp>
-    </p:spTree>
-  </p:cSld>
-  <p:clrMapOvr>
-    <a:masterClrMapping/>
-  </p:clrMapOvr>
-</p:sld>
-</file>
-
-<file path=ppt/slides/slide15.xml><?xml version="1.0" encoding="utf-8"?>
-<p:sld xmlns:a="http://schemas.openxmlformats.org/drawingml/2006/main" xmlns:p="http://schemas.openxmlformats.org/presentationml/2006/main" xmlns:r="http://schemas.openxmlformats.org/officeDocument/2006/relationships">
-  <p:cSld>
-    <p:bg>
-      <p:bgPr>
-        <a:solidFill>
-          <a:srgbClr val="FFFFFF"/>
-        </a:solidFill>
-        <a:effectLst/>
-      </p:bgPr>
-    </p:bg>
-    <p:spTree>
-      <p:nvGrpSpPr>
-        <p:cNvPr id="1" name=""/>
-        <p:cNvGrpSpPr/>
-        <p:nvPr/>
-      </p:nvGrpSpPr>
-      <p:grpSpPr/>
-      <p:sp>
-        <p:nvSpPr>
-          <p:cNvPr id="2" name="Rectangle 1"/>
-          <p:cNvSpPr/>
-          <p:nvPr/>
-        </p:nvSpPr>
-        <p:spPr>
-          <a:xfrm>
-            <a:off x="0" y="0"/>
-            <a:ext cx="12191695" cy="960120"/>
-          </a:xfrm>
-          <a:prstGeom prst="rect">
-            <a:avLst/>
-          </a:prstGeom>
-          <a:solidFill>
-            <a:srgbClr val="095292"/>
-          </a:solidFill>
-          <a:ln>
-            <a:noFill/>
-          </a:ln>
-        </p:spPr>
-        <p:style>
-          <a:lnRef idx="1">
-            <a:schemeClr val="accent1"/>
-          </a:lnRef>
-          <a:fillRef idx="3">
-            <a:schemeClr val="accent1"/>
-          </a:fillRef>
-          <a:effectRef idx="2">
-            <a:schemeClr val="accent1"/>
-          </a:effectRef>
-          <a:fontRef idx="minor">
-            <a:schemeClr val="lt1"/>
-          </a:fontRef>
-        </p:style>
-        <p:txBody>
-          <a:bodyPr rtlCol="0" anchor="ctr"/>
-          <a:lstStyle/>
-          <a:p>
-            <a:pPr algn="ctr"/>
-          </a:p>
-        </p:txBody>
-      </p:sp>
-      <p:sp>
-        <p:nvSpPr>
-          <p:cNvPr id="3" name="Rectangle 2"/>
-          <p:cNvSpPr/>
-          <p:nvPr/>
-        </p:nvSpPr>
-        <p:spPr>
-          <a:xfrm>
-            <a:off x="0" y="960120"/>
-            <a:ext cx="12191695" cy="41148"/>
-          </a:xfrm>
-          <a:prstGeom prst="rect">
-            <a:avLst/>
-          </a:prstGeom>
-          <a:solidFill>
-            <a:srgbClr val="FFD000"/>
-          </a:solidFill>
-          <a:ln>
-            <a:noFill/>
-          </a:ln>
-        </p:spPr>
-        <p:style>
-          <a:lnRef idx="1">
-            <a:schemeClr val="accent1"/>
-          </a:lnRef>
-          <a:fillRef idx="3">
-            <a:schemeClr val="accent1"/>
-          </a:fillRef>
-          <a:effectRef idx="2">
-            <a:schemeClr val="accent1"/>
-          </a:effectRef>
-          <a:fontRef idx="minor">
-            <a:schemeClr val="lt1"/>
-          </a:fontRef>
-        </p:style>
-        <p:txBody>
-          <a:bodyPr rtlCol="0" anchor="ctr"/>
-          <a:lstStyle/>
-          <a:p>
-            <a:pPr algn="ctr"/>
-          </a:p>
-        </p:txBody>
-      </p:sp>
-      <p:sp>
-        <p:nvSpPr>
-          <p:cNvPr id="4" name="TextBox 3"/>
+            <a:pPr algn="ctr">
+              <a:spcAft>
+                <a:spcPts val="600"/>
+              </a:spcAft>
+            </a:pPr>
+            <a:r>
+              <a:rPr sz="1600" b="0" i="0">
+                <a:solidFill>
+                  <a:srgbClr val="333333"/>
+                </a:solidFill>
+                <a:latin typeface="Calibri"/>
+              </a:rPr>
+              <a:t>Iterar e incrementar sin dejar de documentar</a:t>
+            </a:r>
+          </a:p>
+          <a:p>
+            <a:pPr algn="ctr">
+              <a:spcAft>
+                <a:spcPts val="600"/>
+              </a:spcAft>
+            </a:pPr>
+            <a:r>
+              <a:rPr sz="1600" b="0" i="0">
+                <a:solidFill>
+                  <a:srgbClr val="333333"/>
+                </a:solidFill>
+                <a:latin typeface="Calibri"/>
+              </a:rPr>
+              <a:t>Repasen las laminas de teoria: cada concepto esta completo</a:t>
+            </a:r>
+          </a:p>
+          <a:p>
+            <a:pPr algn="ctr">
+              <a:spcAft>
+                <a:spcPts val="600"/>
+              </a:spcAft>
+            </a:pPr>
+            <a:r>
+              <a:rPr sz="1600" b="0" i="0">
+                <a:solidFill>
+                  <a:srgbClr val="333333"/>
+                </a:solidFill>
+                <a:latin typeface="Calibri"/>
+              </a:rPr>
+              <a:t>Siguiente clase: continuamos con el siguiente tema</a:t>
+            </a:r>
+          </a:p>
+        </p:txBody>
+      </p:sp>
+      <p:sp>
+        <p:nvSpPr>
+          <p:cNvPr id="6" name="TextBox 5"/>
           <p:cNvSpPr txBox="1"/>
           <p:nvPr/>
         </p:nvSpPr>
         <p:spPr>
           <a:xfrm>
-            <a:off x="457200" y="164592"/>
-            <a:ext cx="11277295" cy="502920"/>
+            <a:off x="457200" y="4754880"/>
+            <a:ext cx="11277295" cy="640080"/>
           </a:xfrm>
           <a:prstGeom prst="rect">
             <a:avLst/>
@@ -6752,2430 +6499,15 @@
           </a:bodyPr>
           <a:lstStyle/>
           <a:p>
-            <a:r>
-              <a:rPr sz="2600" b="1" i="0">
-                <a:solidFill>
-                  <a:srgbClr val="FFFFFF"/>
-                </a:solidFill>
-                <a:latin typeface="Calibri"/>
-              </a:rPr>
-              <a:t>Taller PI — por que importa</a:t>
-            </a:r>
-          </a:p>
-        </p:txBody>
-      </p:sp>
-      <p:sp>
-        <p:nvSpPr>
-          <p:cNvPr id="5" name="TextBox 4"/>
-          <p:cNvSpPr txBox="1"/>
-          <p:nvPr/>
-        </p:nvSpPr>
-        <p:spPr>
-          <a:xfrm>
-            <a:off x="457200" y="1170432"/>
-            <a:ext cx="11277295" cy="5230368"/>
-          </a:xfrm>
-          <a:prstGeom prst="rect">
-            <a:avLst/>
-          </a:prstGeom>
-          <a:noFill/>
-        </p:spPr>
-        <p:txBody>
-          <a:bodyPr wrap="square">
-            <a:spAutoFit/>
-          </a:bodyPr>
-          <a:lstStyle/>
-          <a:p>
-            <a:pPr>
-              <a:spcAft>
-                <a:spcPts val="800"/>
-              </a:spcAft>
-            </a:pPr>
-            <a:r>
-              <a:rPr sz="2000" b="0" i="0">
-                <a:solidFill>
-                  <a:srgbClr val="333333"/>
-                </a:solidFill>
-                <a:latin typeface="Calibri"/>
-              </a:rPr>
-              <a:t>–   </a:t>
-            </a:r>
+            <a:pPr algn="ctr"/>
             <a:r>
               <a:rPr sz="2000" b="1" i="0">
                 <a:solidFill>
-                  <a:srgbClr val="333333"/>
-                </a:solidFill>
-                <a:latin typeface="Calibri"/>
-              </a:rPr>
-              <a:t>Por que importa al PI:</a:t>
-            </a:r>
-            <a:r>
-              <a:rPr sz="2000" b="0" i="0">
-                <a:solidFill>
-                  <a:srgbClr val="333333"/>
-                </a:solidFill>
-                <a:latin typeface="Calibri"/>
-              </a:rPr>
-              <a:t> el semestre completo de VetCare se va a organizar como sprints, y lo que se defina hoy en el backlog es literalmente el orden en que se van a producir los planos.</a:t>
-            </a:r>
-          </a:p>
-          <a:p>
-            <a:pPr>
-              <a:spcAft>
-                <a:spcPts val="800"/>
-              </a:spcAft>
-            </a:pPr>
-            <a:r>
-              <a:rPr sz="2000" b="0" i="0">
-                <a:solidFill>
-                  <a:srgbClr val="333333"/>
-                </a:solidFill>
-                <a:latin typeface="Calibri"/>
-              </a:rPr>
-              <a:t>–   Ya vimos el enfoque tradicional y su documentacion formal; hoy se ve el otro extremo del espectro y se aprende a decidir cual parte de VetCare conviene tratar de cada forma.</a:t>
-            </a:r>
-          </a:p>
-          <a:p>
-            <a:pPr>
-              <a:spcAft>
-                <a:spcPts val="800"/>
-              </a:spcAft>
-            </a:pPr>
-            <a:r>
-              <a:rPr sz="2000" b="0" i="0">
-                <a:solidFill>
-                  <a:srgbClr val="333333"/>
-                </a:solidFill>
-                <a:latin typeface="Calibri"/>
-              </a:rPr>
-              <a:t>–   Aqui se aclara de una vez el malentendido mas costoso del curso: agil no es la excusa para no documentar, y en esta asignatura la documentacion de diseño es justamente el incremento entregable.</a:t>
-            </a:r>
-          </a:p>
-        </p:txBody>
-      </p:sp>
-      <p:sp>
-        <p:nvSpPr>
-          <p:cNvPr id="6" name="TextBox 5"/>
-          <p:cNvSpPr txBox="1"/>
-          <p:nvPr/>
-        </p:nvSpPr>
-        <p:spPr>
-          <a:xfrm>
-            <a:off x="11185855" y="6473952"/>
-            <a:ext cx="640080" cy="274320"/>
-          </a:xfrm>
-          <a:prstGeom prst="rect">
-            <a:avLst/>
-          </a:prstGeom>
-          <a:noFill/>
-        </p:spPr>
-        <p:txBody>
-          <a:bodyPr wrap="square">
-            <a:spAutoFit/>
-          </a:bodyPr>
-          <a:lstStyle/>
-          <a:p>
-            <a:pPr algn="r"/>
-            <a:r>
-              <a:rPr sz="1100" b="0" i="0">
-                <a:solidFill>
-                  <a:srgbClr val="666666"/>
-                </a:solidFill>
-                <a:latin typeface="Calibri"/>
-              </a:rPr>
-              <a:t>15</a:t>
-            </a:r>
-          </a:p>
-        </p:txBody>
-      </p:sp>
-    </p:spTree>
-  </p:cSld>
-  <p:clrMapOvr>
-    <a:masterClrMapping/>
-  </p:clrMapOvr>
-</p:sld>
-</file>
-
-<file path=ppt/slides/slide16.xml><?xml version="1.0" encoding="utf-8"?>
-<p:sld xmlns:a="http://schemas.openxmlformats.org/drawingml/2006/main" xmlns:p="http://schemas.openxmlformats.org/presentationml/2006/main" xmlns:r="http://schemas.openxmlformats.org/officeDocument/2006/relationships">
-  <p:cSld>
-    <p:bg>
-      <p:bgPr>
-        <a:solidFill>
-          <a:srgbClr val="FFFFFF"/>
-        </a:solidFill>
-        <a:effectLst/>
-      </p:bgPr>
-    </p:bg>
-    <p:spTree>
-      <p:nvGrpSpPr>
-        <p:cNvPr id="1" name=""/>
-        <p:cNvGrpSpPr/>
-        <p:nvPr/>
-      </p:nvGrpSpPr>
-      <p:grpSpPr/>
-      <p:sp>
-        <p:nvSpPr>
-          <p:cNvPr id="2" name="Rectangle 1"/>
-          <p:cNvSpPr/>
-          <p:nvPr/>
-        </p:nvSpPr>
-        <p:spPr>
-          <a:xfrm>
-            <a:off x="0" y="0"/>
-            <a:ext cx="12191695" cy="960120"/>
-          </a:xfrm>
-          <a:prstGeom prst="rect">
-            <a:avLst/>
-          </a:prstGeom>
-          <a:solidFill>
-            <a:srgbClr val="095292"/>
-          </a:solidFill>
-          <a:ln>
-            <a:noFill/>
-          </a:ln>
-        </p:spPr>
-        <p:style>
-          <a:lnRef idx="1">
-            <a:schemeClr val="accent1"/>
-          </a:lnRef>
-          <a:fillRef idx="3">
-            <a:schemeClr val="accent1"/>
-          </a:fillRef>
-          <a:effectRef idx="2">
-            <a:schemeClr val="accent1"/>
-          </a:effectRef>
-          <a:fontRef idx="minor">
-            <a:schemeClr val="lt1"/>
-          </a:fontRef>
-        </p:style>
-        <p:txBody>
-          <a:bodyPr rtlCol="0" anchor="ctr"/>
-          <a:lstStyle/>
-          <a:p>
-            <a:pPr algn="ctr"/>
-          </a:p>
-        </p:txBody>
-      </p:sp>
-      <p:sp>
-        <p:nvSpPr>
-          <p:cNvPr id="3" name="Rectangle 2"/>
-          <p:cNvSpPr/>
-          <p:nvPr/>
-        </p:nvSpPr>
-        <p:spPr>
-          <a:xfrm>
-            <a:off x="0" y="960120"/>
-            <a:ext cx="12191695" cy="41148"/>
-          </a:xfrm>
-          <a:prstGeom prst="rect">
-            <a:avLst/>
-          </a:prstGeom>
-          <a:solidFill>
-            <a:srgbClr val="FFD000"/>
-          </a:solidFill>
-          <a:ln>
-            <a:noFill/>
-          </a:ln>
-        </p:spPr>
-        <p:style>
-          <a:lnRef idx="1">
-            <a:schemeClr val="accent1"/>
-          </a:lnRef>
-          <a:fillRef idx="3">
-            <a:schemeClr val="accent1"/>
-          </a:fillRef>
-          <a:effectRef idx="2">
-            <a:schemeClr val="accent1"/>
-          </a:effectRef>
-          <a:fontRef idx="minor">
-            <a:schemeClr val="lt1"/>
-          </a:fontRef>
-        </p:style>
-        <p:txBody>
-          <a:bodyPr rtlCol="0" anchor="ctr"/>
-          <a:lstStyle/>
-          <a:p>
-            <a:pPr algn="ctr"/>
-          </a:p>
-        </p:txBody>
-      </p:sp>
-      <p:sp>
-        <p:nvSpPr>
-          <p:cNvPr id="4" name="TextBox 3"/>
-          <p:cNvSpPr txBox="1"/>
-          <p:nvPr/>
-        </p:nvSpPr>
-        <p:spPr>
-          <a:xfrm>
-            <a:off x="457200" y="164592"/>
-            <a:ext cx="11277295" cy="502920"/>
-          </a:xfrm>
-          <a:prstGeom prst="rect">
-            <a:avLst/>
-          </a:prstGeom>
-          <a:noFill/>
-        </p:spPr>
-        <p:txBody>
-          <a:bodyPr wrap="square">
-            <a:spAutoFit/>
-          </a:bodyPr>
-          <a:lstStyle/>
-          <a:p>
-            <a:r>
-              <a:rPr sz="2600" b="1" i="0">
-                <a:solidFill>
-                  <a:srgbClr val="FFFFFF"/>
-                </a:solidFill>
-                <a:latin typeface="Calibri"/>
-              </a:rPr>
-              <a:t>Taller PI — punto de partida</a:t>
-            </a:r>
-          </a:p>
-        </p:txBody>
-      </p:sp>
-      <p:sp>
-        <p:nvSpPr>
-          <p:cNvPr id="5" name="TextBox 4"/>
-          <p:cNvSpPr txBox="1"/>
-          <p:nvPr/>
-        </p:nvSpPr>
-        <p:spPr>
-          <a:xfrm>
-            <a:off x="457200" y="1170432"/>
-            <a:ext cx="11277295" cy="5230368"/>
-          </a:xfrm>
-          <a:prstGeom prst="rect">
-            <a:avLst/>
-          </a:prstGeom>
-          <a:noFill/>
-        </p:spPr>
-        <p:txBody>
-          <a:bodyPr wrap="square">
-            <a:spAutoFit/>
-          </a:bodyPr>
-          <a:lstStyle/>
-          <a:p>
-            <a:pPr>
-              <a:spcAft>
-                <a:spcPts val="800"/>
-              </a:spcAft>
-            </a:pPr>
-            <a:r>
-              <a:rPr sz="2000" b="0" i="0">
-                <a:solidFill>
-                  <a:srgbClr val="333333"/>
-                </a:solidFill>
-                <a:latin typeface="Calibri"/>
-              </a:rPr>
-              <a:t>–   El equipo tiene requisitos escritos y un mapa de fases, pero no tiene ningun orden de trabajo: todos quieren empezar por la pantalla que les parece mas bonita.</a:t>
-            </a:r>
-          </a:p>
-          <a:p>
-            <a:pPr>
-              <a:spcAft>
-                <a:spcPts val="800"/>
-              </a:spcAft>
-            </a:pPr>
-            <a:r>
-              <a:rPr sz="2000" b="0" i="0">
-                <a:solidFill>
-                  <a:srgbClr val="333333"/>
-                </a:solidFill>
-                <a:latin typeface="Calibri"/>
-              </a:rPr>
-              <a:t>–   La administradora de Huellitas puede dar retroalimentacion corta cada dos o tres semanas, pero no puede sentarse a leer un documento de ochenta paginas.</a:t>
-            </a:r>
-          </a:p>
-          <a:p>
-            <a:pPr>
-              <a:spcAft>
-                <a:spcPts val="800"/>
-              </a:spcAft>
-            </a:pPr>
-            <a:r>
-              <a:rPr sz="2000" b="0" i="0">
-                <a:solidFill>
-                  <a:srgbClr val="333333"/>
-                </a:solidFill>
-                <a:latin typeface="Calibri"/>
-              </a:rPr>
-              <a:t>–   En el grupo circula la idea de que agil significa no escribir nada y que 'ya lo iremos viendo sobre la marcha'.</a:t>
-            </a:r>
-          </a:p>
-        </p:txBody>
-      </p:sp>
-      <p:sp>
-        <p:nvSpPr>
-          <p:cNvPr id="6" name="TextBox 5"/>
-          <p:cNvSpPr txBox="1"/>
-          <p:nvPr/>
-        </p:nvSpPr>
-        <p:spPr>
-          <a:xfrm>
-            <a:off x="11185855" y="6473952"/>
-            <a:ext cx="640080" cy="274320"/>
-          </a:xfrm>
-          <a:prstGeom prst="rect">
-            <a:avLst/>
-          </a:prstGeom>
-          <a:noFill/>
-        </p:spPr>
-        <p:txBody>
-          <a:bodyPr wrap="square">
-            <a:spAutoFit/>
-          </a:bodyPr>
-          <a:lstStyle/>
-          <a:p>
-            <a:pPr algn="r"/>
-            <a:r>
-              <a:rPr sz="1100" b="0" i="0">
-                <a:solidFill>
-                  <a:srgbClr val="666666"/>
-                </a:solidFill>
-                <a:latin typeface="Calibri"/>
-              </a:rPr>
-              <a:t>16</a:t>
-            </a:r>
-          </a:p>
-        </p:txBody>
-      </p:sp>
-    </p:spTree>
-  </p:cSld>
-  <p:clrMapOvr>
-    <a:masterClrMapping/>
-  </p:clrMapOvr>
-</p:sld>
-</file>
-
-<file path=ppt/slides/slide17.xml><?xml version="1.0" encoding="utf-8"?>
-<p:sld xmlns:a="http://schemas.openxmlformats.org/drawingml/2006/main" xmlns:p="http://schemas.openxmlformats.org/presentationml/2006/main" xmlns:r="http://schemas.openxmlformats.org/officeDocument/2006/relationships">
-  <p:cSld>
-    <p:bg>
-      <p:bgPr>
-        <a:solidFill>
-          <a:srgbClr val="FFFFFF"/>
-        </a:solidFill>
-        <a:effectLst/>
-      </p:bgPr>
-    </p:bg>
-    <p:spTree>
-      <p:nvGrpSpPr>
-        <p:cNvPr id="1" name=""/>
-        <p:cNvGrpSpPr/>
-        <p:nvPr/>
-      </p:nvGrpSpPr>
-      <p:grpSpPr/>
-      <p:sp>
-        <p:nvSpPr>
-          <p:cNvPr id="2" name="Rectangle 1"/>
-          <p:cNvSpPr/>
-          <p:nvPr/>
-        </p:nvSpPr>
-        <p:spPr>
-          <a:xfrm>
-            <a:off x="0" y="0"/>
-            <a:ext cx="12191695" cy="960120"/>
-          </a:xfrm>
-          <a:prstGeom prst="rect">
-            <a:avLst/>
-          </a:prstGeom>
-          <a:solidFill>
-            <a:srgbClr val="095292"/>
-          </a:solidFill>
-          <a:ln>
-            <a:noFill/>
-          </a:ln>
-        </p:spPr>
-        <p:style>
-          <a:lnRef idx="1">
-            <a:schemeClr val="accent1"/>
-          </a:lnRef>
-          <a:fillRef idx="3">
-            <a:schemeClr val="accent1"/>
-          </a:fillRef>
-          <a:effectRef idx="2">
-            <a:schemeClr val="accent1"/>
-          </a:effectRef>
-          <a:fontRef idx="minor">
-            <a:schemeClr val="lt1"/>
-          </a:fontRef>
-        </p:style>
-        <p:txBody>
-          <a:bodyPr rtlCol="0" anchor="ctr"/>
-          <a:lstStyle/>
-          <a:p>
-            <a:pPr algn="ctr"/>
-          </a:p>
-        </p:txBody>
-      </p:sp>
-      <p:sp>
-        <p:nvSpPr>
-          <p:cNvPr id="3" name="Rectangle 2"/>
-          <p:cNvSpPr/>
-          <p:nvPr/>
-        </p:nvSpPr>
-        <p:spPr>
-          <a:xfrm>
-            <a:off x="0" y="960120"/>
-            <a:ext cx="12191695" cy="41148"/>
-          </a:xfrm>
-          <a:prstGeom prst="rect">
-            <a:avLst/>
-          </a:prstGeom>
-          <a:solidFill>
-            <a:srgbClr val="FFD000"/>
-          </a:solidFill>
-          <a:ln>
-            <a:noFill/>
-          </a:ln>
-        </p:spPr>
-        <p:style>
-          <a:lnRef idx="1">
-            <a:schemeClr val="accent1"/>
-          </a:lnRef>
-          <a:fillRef idx="3">
-            <a:schemeClr val="accent1"/>
-          </a:fillRef>
-          <a:effectRef idx="2">
-            <a:schemeClr val="accent1"/>
-          </a:effectRef>
-          <a:fontRef idx="minor">
-            <a:schemeClr val="lt1"/>
-          </a:fontRef>
-        </p:style>
-        <p:txBody>
-          <a:bodyPr rtlCol="0" anchor="ctr"/>
-          <a:lstStyle/>
-          <a:p>
-            <a:pPr algn="ctr"/>
-          </a:p>
-        </p:txBody>
-      </p:sp>
-      <p:sp>
-        <p:nvSpPr>
-          <p:cNvPr id="4" name="TextBox 3"/>
-          <p:cNvSpPr txBox="1"/>
-          <p:nvPr/>
-        </p:nvSpPr>
-        <p:spPr>
-          <a:xfrm>
-            <a:off x="457200" y="164592"/>
-            <a:ext cx="11277295" cy="502920"/>
-          </a:xfrm>
-          <a:prstGeom prst="rect">
-            <a:avLst/>
-          </a:prstGeom>
-          <a:noFill/>
-        </p:spPr>
-        <p:txBody>
-          <a:bodyPr wrap="square">
-            <a:spAutoFit/>
-          </a:bodyPr>
-          <a:lstStyle/>
-          <a:p>
-            <a:r>
-              <a:rPr sz="2600" b="1" i="0">
-                <a:solidFill>
-                  <a:srgbClr val="FFFFFF"/>
-                </a:solidFill>
-                <a:latin typeface="Calibri"/>
-              </a:rPr>
-              <a:t>Taller PI — pasos guiados</a:t>
-            </a:r>
-          </a:p>
-        </p:txBody>
-      </p:sp>
-      <p:sp>
-        <p:nvSpPr>
-          <p:cNvPr id="5" name="Rounded Rectangle 4"/>
-          <p:cNvSpPr/>
-          <p:nvPr/>
-        </p:nvSpPr>
-        <p:spPr>
-          <a:xfrm>
-            <a:off x="457200" y="1234440"/>
-            <a:ext cx="11277295" cy="950976"/>
-          </a:xfrm>
-          <a:prstGeom prst="roundRect">
-            <a:avLst>
-              <a:gd name="adj" fmla="val 12000"/>
-            </a:avLst>
-          </a:prstGeom>
-          <a:solidFill>
-            <a:srgbClr val="F2F2F2"/>
-          </a:solidFill>
-          <a:ln>
-            <a:noFill/>
-          </a:ln>
-        </p:spPr>
-        <p:style>
-          <a:lnRef idx="1">
-            <a:schemeClr val="accent1"/>
-          </a:lnRef>
-          <a:fillRef idx="3">
-            <a:schemeClr val="accent1"/>
-          </a:fillRef>
-          <a:effectRef idx="2">
-            <a:schemeClr val="accent1"/>
-          </a:effectRef>
-          <a:fontRef idx="minor">
-            <a:schemeClr val="lt1"/>
-          </a:fontRef>
-        </p:style>
-        <p:txBody>
-          <a:bodyPr rtlCol="0" anchor="ctr"/>
-          <a:lstStyle/>
-          <a:p>
-            <a:pPr algn="ctr"/>
-          </a:p>
-        </p:txBody>
-      </p:sp>
-      <p:sp>
-        <p:nvSpPr>
-          <p:cNvPr id="6" name="Rounded Rectangle 5"/>
-          <p:cNvSpPr/>
-          <p:nvPr/>
-        </p:nvSpPr>
-        <p:spPr>
-          <a:xfrm>
-            <a:off x="594360" y="1490472"/>
-            <a:ext cx="438912" cy="438912"/>
-          </a:xfrm>
-          <a:prstGeom prst="roundRect">
-            <a:avLst>
-              <a:gd name="adj" fmla="val 12000"/>
-            </a:avLst>
-          </a:prstGeom>
-          <a:solidFill>
-            <a:srgbClr val="095292"/>
-          </a:solidFill>
-          <a:ln>
-            <a:noFill/>
-          </a:ln>
-        </p:spPr>
-        <p:style>
-          <a:lnRef idx="1">
-            <a:schemeClr val="accent1"/>
-          </a:lnRef>
-          <a:fillRef idx="3">
-            <a:schemeClr val="accent1"/>
-          </a:fillRef>
-          <a:effectRef idx="2">
-            <a:schemeClr val="accent1"/>
-          </a:effectRef>
-          <a:fontRef idx="minor">
-            <a:schemeClr val="lt1"/>
-          </a:fontRef>
-        </p:style>
-        <p:txBody>
-          <a:bodyPr rtlCol="0" anchor="ctr"/>
-          <a:lstStyle/>
-          <a:p>
-            <a:pPr algn="ctr"/>
-          </a:p>
-        </p:txBody>
-      </p:sp>
-      <p:sp>
-        <p:nvSpPr>
-          <p:cNvPr id="7" name="TextBox 6"/>
-          <p:cNvSpPr txBox="1"/>
-          <p:nvPr/>
-        </p:nvSpPr>
-        <p:spPr>
-          <a:xfrm>
-            <a:off x="594360" y="1490472"/>
-            <a:ext cx="438912" cy="438912"/>
-          </a:xfrm>
-          <a:prstGeom prst="rect">
-            <a:avLst/>
-          </a:prstGeom>
-          <a:noFill/>
-        </p:spPr>
-        <p:txBody>
-          <a:bodyPr wrap="square" anchor="ctr"/>
-          <a:lstStyle/>
-          <a:p>
-            <a:pPr algn="ctr"/>
-            <a:r>
-              <a:rPr sz="1600" b="1" i="0">
-                <a:solidFill>
-                  <a:srgbClr val="FFFFFF"/>
-                </a:solidFill>
-                <a:latin typeface="Calibri"/>
-              </a:rPr>
-              <a:t>1</a:t>
-            </a:r>
-          </a:p>
-        </p:txBody>
-      </p:sp>
-      <p:sp>
-        <p:nvSpPr>
-          <p:cNvPr id="8" name="TextBox 7"/>
-          <p:cNvSpPr txBox="1"/>
-          <p:nvPr/>
-        </p:nvSpPr>
-        <p:spPr>
-          <a:xfrm>
-            <a:off x="1188720" y="1325880"/>
-            <a:ext cx="10271455" cy="786384"/>
-          </a:xfrm>
-          <a:prstGeom prst="rect">
-            <a:avLst/>
-          </a:prstGeom>
-          <a:noFill/>
-        </p:spPr>
-        <p:txBody>
-          <a:bodyPr wrap="square" anchor="ctr"/>
-          <a:lstStyle/>
-          <a:p>
-            <a:r>
-              <a:rPr sz="1500" b="1" i="0">
-                <a:solidFill>
-                  <a:srgbClr val="095292"/>
-                </a:solidFill>
-                <a:latin typeface="Calibri"/>
-              </a:rPr>
-              <a:t>En Google Docs escriba el Product Backlog de VetCare con al menos ocho items redactados como historias de usuario cortas, cada uno con prioridad (Alta/Media/Baja) y una justificacion de valor para Huellitas en una linea.</a:t>
-            </a:r>
-          </a:p>
-        </p:txBody>
-      </p:sp>
-      <p:sp>
-        <p:nvSpPr>
-          <p:cNvPr id="9" name="Rounded Rectangle 8"/>
-          <p:cNvSpPr/>
-          <p:nvPr/>
-        </p:nvSpPr>
-        <p:spPr>
-          <a:xfrm>
-            <a:off x="457200" y="2276856"/>
-            <a:ext cx="11277295" cy="950976"/>
-          </a:xfrm>
-          <a:prstGeom prst="roundRect">
-            <a:avLst>
-              <a:gd name="adj" fmla="val 12000"/>
-            </a:avLst>
-          </a:prstGeom>
-          <a:solidFill>
-            <a:srgbClr val="E8F4FA"/>
-          </a:solidFill>
-          <a:ln>
-            <a:noFill/>
-          </a:ln>
-        </p:spPr>
-        <p:style>
-          <a:lnRef idx="1">
-            <a:schemeClr val="accent1"/>
-          </a:lnRef>
-          <a:fillRef idx="3">
-            <a:schemeClr val="accent1"/>
-          </a:fillRef>
-          <a:effectRef idx="2">
-            <a:schemeClr val="accent1"/>
-          </a:effectRef>
-          <a:fontRef idx="minor">
-            <a:schemeClr val="lt1"/>
-          </a:fontRef>
-        </p:style>
-        <p:txBody>
-          <a:bodyPr rtlCol="0" anchor="ctr"/>
-          <a:lstStyle/>
-          <a:p>
-            <a:pPr algn="ctr"/>
-          </a:p>
-        </p:txBody>
-      </p:sp>
-      <p:sp>
-        <p:nvSpPr>
-          <p:cNvPr id="10" name="Rounded Rectangle 9"/>
-          <p:cNvSpPr/>
-          <p:nvPr/>
-        </p:nvSpPr>
-        <p:spPr>
-          <a:xfrm>
-            <a:off x="594360" y="2532888"/>
-            <a:ext cx="438912" cy="438912"/>
-          </a:xfrm>
-          <a:prstGeom prst="roundRect">
-            <a:avLst>
-              <a:gd name="adj" fmla="val 12000"/>
-            </a:avLst>
-          </a:prstGeom>
-          <a:solidFill>
-            <a:srgbClr val="095292"/>
-          </a:solidFill>
-          <a:ln>
-            <a:noFill/>
-          </a:ln>
-        </p:spPr>
-        <p:style>
-          <a:lnRef idx="1">
-            <a:schemeClr val="accent1"/>
-          </a:lnRef>
-          <a:fillRef idx="3">
-            <a:schemeClr val="accent1"/>
-          </a:fillRef>
-          <a:effectRef idx="2">
-            <a:schemeClr val="accent1"/>
-          </a:effectRef>
-          <a:fontRef idx="minor">
-            <a:schemeClr val="lt1"/>
-          </a:fontRef>
-        </p:style>
-        <p:txBody>
-          <a:bodyPr rtlCol="0" anchor="ctr"/>
-          <a:lstStyle/>
-          <a:p>
-            <a:pPr algn="ctr"/>
-          </a:p>
-        </p:txBody>
-      </p:sp>
-      <p:sp>
-        <p:nvSpPr>
-          <p:cNvPr id="11" name="TextBox 10"/>
-          <p:cNvSpPr txBox="1"/>
-          <p:nvPr/>
-        </p:nvSpPr>
-        <p:spPr>
-          <a:xfrm>
-            <a:off x="594360" y="2532888"/>
-            <a:ext cx="438912" cy="438912"/>
-          </a:xfrm>
-          <a:prstGeom prst="rect">
-            <a:avLst/>
-          </a:prstGeom>
-          <a:noFill/>
-        </p:spPr>
-        <p:txBody>
-          <a:bodyPr wrap="square" anchor="ctr"/>
-          <a:lstStyle/>
-          <a:p>
-            <a:pPr algn="ctr"/>
-            <a:r>
-              <a:rPr sz="1600" b="1" i="0">
-                <a:solidFill>
-                  <a:srgbClr val="FFFFFF"/>
-                </a:solidFill>
-                <a:latin typeface="Calibri"/>
-              </a:rPr>
-              <a:t>2</a:t>
-            </a:r>
-          </a:p>
-        </p:txBody>
-      </p:sp>
-      <p:sp>
-        <p:nvSpPr>
-          <p:cNvPr id="12" name="TextBox 11"/>
-          <p:cNvSpPr txBox="1"/>
-          <p:nvPr/>
-        </p:nvSpPr>
-        <p:spPr>
-          <a:xfrm>
-            <a:off x="1188720" y="2368296"/>
-            <a:ext cx="10271455" cy="786384"/>
-          </a:xfrm>
-          <a:prstGeom prst="rect">
-            <a:avLst/>
-          </a:prstGeom>
-          <a:noFill/>
-        </p:spPr>
-        <p:txBody>
-          <a:bodyPr wrap="square" anchor="ctr"/>
-          <a:lstStyle/>
-          <a:p>
-            <a:r>
-              <a:rPr sz="1500" b="1" i="0">
-                <a:solidFill>
-                  <a:srgbClr val="095292"/>
-                </a:solidFill>
-                <a:latin typeface="Calibri"/>
-              </a:rPr>
-              <a:t>Priorice el backlog en orden de arriba hacia abajo y explique por escrito, en dos renglones, por que el primer item es el primero (pista: resuelve uno de los tres dolores de la clinica).</a:t>
-            </a:r>
-          </a:p>
-        </p:txBody>
-      </p:sp>
-      <p:sp>
-        <p:nvSpPr>
-          <p:cNvPr id="13" name="Rounded Rectangle 12"/>
-          <p:cNvSpPr/>
-          <p:nvPr/>
-        </p:nvSpPr>
-        <p:spPr>
-          <a:xfrm>
-            <a:off x="457200" y="3319272"/>
-            <a:ext cx="11277295" cy="950976"/>
-          </a:xfrm>
-          <a:prstGeom prst="roundRect">
-            <a:avLst>
-              <a:gd name="adj" fmla="val 12000"/>
-            </a:avLst>
-          </a:prstGeom>
-          <a:solidFill>
-            <a:srgbClr val="F2F2F2"/>
-          </a:solidFill>
-          <a:ln>
-            <a:noFill/>
-          </a:ln>
-        </p:spPr>
-        <p:style>
-          <a:lnRef idx="1">
-            <a:schemeClr val="accent1"/>
-          </a:lnRef>
-          <a:fillRef idx="3">
-            <a:schemeClr val="accent1"/>
-          </a:fillRef>
-          <a:effectRef idx="2">
-            <a:schemeClr val="accent1"/>
-          </a:effectRef>
-          <a:fontRef idx="minor">
-            <a:schemeClr val="lt1"/>
-          </a:fontRef>
-        </p:style>
-        <p:txBody>
-          <a:bodyPr rtlCol="0" anchor="ctr"/>
-          <a:lstStyle/>
-          <a:p>
-            <a:pPr algn="ctr"/>
-          </a:p>
-        </p:txBody>
-      </p:sp>
-      <p:sp>
-        <p:nvSpPr>
-          <p:cNvPr id="14" name="Rounded Rectangle 13"/>
-          <p:cNvSpPr/>
-          <p:nvPr/>
-        </p:nvSpPr>
-        <p:spPr>
-          <a:xfrm>
-            <a:off x="594360" y="3575304"/>
-            <a:ext cx="438912" cy="438912"/>
-          </a:xfrm>
-          <a:prstGeom prst="roundRect">
-            <a:avLst>
-              <a:gd name="adj" fmla="val 12000"/>
-            </a:avLst>
-          </a:prstGeom>
-          <a:solidFill>
-            <a:srgbClr val="095292"/>
-          </a:solidFill>
-          <a:ln>
-            <a:noFill/>
-          </a:ln>
-        </p:spPr>
-        <p:style>
-          <a:lnRef idx="1">
-            <a:schemeClr val="accent1"/>
-          </a:lnRef>
-          <a:fillRef idx="3">
-            <a:schemeClr val="accent1"/>
-          </a:fillRef>
-          <a:effectRef idx="2">
-            <a:schemeClr val="accent1"/>
-          </a:effectRef>
-          <a:fontRef idx="minor">
-            <a:schemeClr val="lt1"/>
-          </a:fontRef>
-        </p:style>
-        <p:txBody>
-          <a:bodyPr rtlCol="0" anchor="ctr"/>
-          <a:lstStyle/>
-          <a:p>
-            <a:pPr algn="ctr"/>
-          </a:p>
-        </p:txBody>
-      </p:sp>
-      <p:sp>
-        <p:nvSpPr>
-          <p:cNvPr id="15" name="TextBox 14"/>
-          <p:cNvSpPr txBox="1"/>
-          <p:nvPr/>
-        </p:nvSpPr>
-        <p:spPr>
-          <a:xfrm>
-            <a:off x="594360" y="3575304"/>
-            <a:ext cx="438912" cy="438912"/>
-          </a:xfrm>
-          <a:prstGeom prst="rect">
-            <a:avLst/>
-          </a:prstGeom>
-          <a:noFill/>
-        </p:spPr>
-        <p:txBody>
-          <a:bodyPr wrap="square" anchor="ctr"/>
-          <a:lstStyle/>
-          <a:p>
-            <a:pPr algn="ctr"/>
-            <a:r>
-              <a:rPr sz="1600" b="1" i="0">
-                <a:solidFill>
-                  <a:srgbClr val="FFFFFF"/>
-                </a:solidFill>
-                <a:latin typeface="Calibri"/>
-              </a:rPr>
-              <a:t>3</a:t>
-            </a:r>
-          </a:p>
-        </p:txBody>
-      </p:sp>
-      <p:sp>
-        <p:nvSpPr>
-          <p:cNvPr id="16" name="TextBox 15"/>
-          <p:cNvSpPr txBox="1"/>
-          <p:nvPr/>
-        </p:nvSpPr>
-        <p:spPr>
-          <a:xfrm>
-            <a:off x="1188720" y="3410712"/>
-            <a:ext cx="10271455" cy="786384"/>
-          </a:xfrm>
-          <a:prstGeom prst="rect">
-            <a:avLst/>
-          </a:prstGeom>
-          <a:noFill/>
-        </p:spPr>
-        <p:txBody>
-          <a:bodyPr wrap="square" anchor="ctr"/>
-          <a:lstStyle/>
-          <a:p>
-            <a:r>
-              <a:rPr sz="1500" b="1" i="0">
-                <a:solidFill>
-                  <a:srgbClr val="095292"/>
-                </a:solidFill>
-                <a:latin typeface="Calibri"/>
-              </a:rPr>
-              <a:t>Escriba tres historias completas con criterios de aceptacion en formato Dado/Cuando/Entonces, y asegurese de que cada historia tenga al menos un escenario alternativo o de error, no solo el camino feliz.</a:t>
-            </a:r>
-          </a:p>
-        </p:txBody>
-      </p:sp>
-      <p:sp>
-        <p:nvSpPr>
-          <p:cNvPr id="17" name="Rounded Rectangle 16"/>
-          <p:cNvSpPr/>
-          <p:nvPr/>
-        </p:nvSpPr>
-        <p:spPr>
-          <a:xfrm>
-            <a:off x="457200" y="4361688"/>
-            <a:ext cx="11277295" cy="950976"/>
-          </a:xfrm>
-          <a:prstGeom prst="roundRect">
-            <a:avLst>
-              <a:gd name="adj" fmla="val 12000"/>
-            </a:avLst>
-          </a:prstGeom>
-          <a:solidFill>
-            <a:srgbClr val="E8F4FA"/>
-          </a:solidFill>
-          <a:ln>
-            <a:noFill/>
-          </a:ln>
-        </p:spPr>
-        <p:style>
-          <a:lnRef idx="1">
-            <a:schemeClr val="accent1"/>
-          </a:lnRef>
-          <a:fillRef idx="3">
-            <a:schemeClr val="accent1"/>
-          </a:fillRef>
-          <a:effectRef idx="2">
-            <a:schemeClr val="accent1"/>
-          </a:effectRef>
-          <a:fontRef idx="minor">
-            <a:schemeClr val="lt1"/>
-          </a:fontRef>
-        </p:style>
-        <p:txBody>
-          <a:bodyPr rtlCol="0" anchor="ctr"/>
-          <a:lstStyle/>
-          <a:p>
-            <a:pPr algn="ctr"/>
-          </a:p>
-        </p:txBody>
-      </p:sp>
-      <p:sp>
-        <p:nvSpPr>
-          <p:cNvPr id="18" name="Rounded Rectangle 17"/>
-          <p:cNvSpPr/>
-          <p:nvPr/>
-        </p:nvSpPr>
-        <p:spPr>
-          <a:xfrm>
-            <a:off x="594360" y="4617720"/>
-            <a:ext cx="438912" cy="438912"/>
-          </a:xfrm>
-          <a:prstGeom prst="roundRect">
-            <a:avLst>
-              <a:gd name="adj" fmla="val 12000"/>
-            </a:avLst>
-          </a:prstGeom>
-          <a:solidFill>
-            <a:srgbClr val="095292"/>
-          </a:solidFill>
-          <a:ln>
-            <a:noFill/>
-          </a:ln>
-        </p:spPr>
-        <p:style>
-          <a:lnRef idx="1">
-            <a:schemeClr val="accent1"/>
-          </a:lnRef>
-          <a:fillRef idx="3">
-            <a:schemeClr val="accent1"/>
-          </a:fillRef>
-          <a:effectRef idx="2">
-            <a:schemeClr val="accent1"/>
-          </a:effectRef>
-          <a:fontRef idx="minor">
-            <a:schemeClr val="lt1"/>
-          </a:fontRef>
-        </p:style>
-        <p:txBody>
-          <a:bodyPr rtlCol="0" anchor="ctr"/>
-          <a:lstStyle/>
-          <a:p>
-            <a:pPr algn="ctr"/>
-          </a:p>
-        </p:txBody>
-      </p:sp>
-      <p:sp>
-        <p:nvSpPr>
-          <p:cNvPr id="19" name="TextBox 18"/>
-          <p:cNvSpPr txBox="1"/>
-          <p:nvPr/>
-        </p:nvSpPr>
-        <p:spPr>
-          <a:xfrm>
-            <a:off x="594360" y="4617720"/>
-            <a:ext cx="438912" cy="438912"/>
-          </a:xfrm>
-          <a:prstGeom prst="rect">
-            <a:avLst/>
-          </a:prstGeom>
-          <a:noFill/>
-        </p:spPr>
-        <p:txBody>
-          <a:bodyPr wrap="square" anchor="ctr"/>
-          <a:lstStyle/>
-          <a:p>
-            <a:pPr algn="ctr"/>
-            <a:r>
-              <a:rPr sz="1600" b="1" i="0">
-                <a:solidFill>
-                  <a:srgbClr val="FFFFFF"/>
-                </a:solidFill>
-                <a:latin typeface="Calibri"/>
-              </a:rPr>
-              <a:t>4</a:t>
-            </a:r>
-          </a:p>
-        </p:txBody>
-      </p:sp>
-      <p:sp>
-        <p:nvSpPr>
-          <p:cNvPr id="20" name="TextBox 19"/>
-          <p:cNvSpPr txBox="1"/>
-          <p:nvPr/>
-        </p:nvSpPr>
-        <p:spPr>
-          <a:xfrm>
-            <a:off x="1188720" y="4453128"/>
-            <a:ext cx="10271455" cy="786384"/>
-          </a:xfrm>
-          <a:prstGeom prst="rect">
-            <a:avLst/>
-          </a:prstGeom>
-          <a:noFill/>
-        </p:spPr>
-        <p:txBody>
-          <a:bodyPr wrap="square" anchor="ctr"/>
-          <a:lstStyle/>
-          <a:p>
-            <a:r>
-              <a:rPr sz="1500" b="1" i="0">
-                <a:solidFill>
-                  <a:srgbClr val="095292"/>
-                </a:solidFill>
-                <a:latin typeface="Calibri"/>
-              </a:rPr>
-              <a:t>Redacte la Definicion de Terminado para artefactos de diseño (por ejemplo: tiene diagrama en draw.io, tiene mockup, esta revisado por un compañero y tiene el visto bueno del cliente) y escribala en la cabecera del tablero.</a:t>
-            </a:r>
-          </a:p>
-        </p:txBody>
-      </p:sp>
-      <p:sp>
-        <p:nvSpPr>
-          <p:cNvPr id="21" name="Rounded Rectangle 20"/>
-          <p:cNvSpPr/>
-          <p:nvPr/>
-        </p:nvSpPr>
-        <p:spPr>
-          <a:xfrm>
-            <a:off x="457200" y="5404104"/>
-            <a:ext cx="11277295" cy="950976"/>
-          </a:xfrm>
-          <a:prstGeom prst="roundRect">
-            <a:avLst>
-              <a:gd name="adj" fmla="val 12000"/>
-            </a:avLst>
-          </a:prstGeom>
-          <a:solidFill>
-            <a:srgbClr val="F2F2F2"/>
-          </a:solidFill>
-          <a:ln>
-            <a:noFill/>
-          </a:ln>
-        </p:spPr>
-        <p:style>
-          <a:lnRef idx="1">
-            <a:schemeClr val="accent1"/>
-          </a:lnRef>
-          <a:fillRef idx="3">
-            <a:schemeClr val="accent1"/>
-          </a:fillRef>
-          <a:effectRef idx="2">
-            <a:schemeClr val="accent1"/>
-          </a:effectRef>
-          <a:fontRef idx="minor">
-            <a:schemeClr val="lt1"/>
-          </a:fontRef>
-        </p:style>
-        <p:txBody>
-          <a:bodyPr rtlCol="0" anchor="ctr"/>
-          <a:lstStyle/>
-          <a:p>
-            <a:pPr algn="ctr"/>
-          </a:p>
-        </p:txBody>
-      </p:sp>
-      <p:sp>
-        <p:nvSpPr>
-          <p:cNvPr id="22" name="Rounded Rectangle 21"/>
-          <p:cNvSpPr/>
-          <p:nvPr/>
-        </p:nvSpPr>
-        <p:spPr>
-          <a:xfrm>
-            <a:off x="594360" y="5660136"/>
-            <a:ext cx="438912" cy="438912"/>
-          </a:xfrm>
-          <a:prstGeom prst="roundRect">
-            <a:avLst>
-              <a:gd name="adj" fmla="val 12000"/>
-            </a:avLst>
-          </a:prstGeom>
-          <a:solidFill>
-            <a:srgbClr val="095292"/>
-          </a:solidFill>
-          <a:ln>
-            <a:noFill/>
-          </a:ln>
-        </p:spPr>
-        <p:style>
-          <a:lnRef idx="1">
-            <a:schemeClr val="accent1"/>
-          </a:lnRef>
-          <a:fillRef idx="3">
-            <a:schemeClr val="accent1"/>
-          </a:fillRef>
-          <a:effectRef idx="2">
-            <a:schemeClr val="accent1"/>
-          </a:effectRef>
-          <a:fontRef idx="minor">
-            <a:schemeClr val="lt1"/>
-          </a:fontRef>
-        </p:style>
-        <p:txBody>
-          <a:bodyPr rtlCol="0" anchor="ctr"/>
-          <a:lstStyle/>
-          <a:p>
-            <a:pPr algn="ctr"/>
-          </a:p>
-        </p:txBody>
-      </p:sp>
-      <p:sp>
-        <p:nvSpPr>
-          <p:cNvPr id="23" name="TextBox 22"/>
-          <p:cNvSpPr txBox="1"/>
-          <p:nvPr/>
-        </p:nvSpPr>
-        <p:spPr>
-          <a:xfrm>
-            <a:off x="594360" y="5660136"/>
-            <a:ext cx="438912" cy="438912"/>
-          </a:xfrm>
-          <a:prstGeom prst="rect">
-            <a:avLst/>
-          </a:prstGeom>
-          <a:noFill/>
-        </p:spPr>
-        <p:txBody>
-          <a:bodyPr wrap="square" anchor="ctr"/>
-          <a:lstStyle/>
-          <a:p>
-            <a:pPr algn="ctr"/>
-            <a:r>
-              <a:rPr sz="1600" b="1" i="0">
-                <a:solidFill>
-                  <a:srgbClr val="FFFFFF"/>
-                </a:solidFill>
-                <a:latin typeface="Calibri"/>
-              </a:rPr>
-              <a:t>5</a:t>
-            </a:r>
-          </a:p>
-        </p:txBody>
-      </p:sp>
-      <p:sp>
-        <p:nvSpPr>
-          <p:cNvPr id="24" name="TextBox 23"/>
-          <p:cNvSpPr txBox="1"/>
-          <p:nvPr/>
-        </p:nvSpPr>
-        <p:spPr>
-          <a:xfrm>
-            <a:off x="1188720" y="5495544"/>
-            <a:ext cx="10271455" cy="786384"/>
-          </a:xfrm>
-          <a:prstGeom prst="rect">
-            <a:avLst/>
-          </a:prstGeom>
-          <a:noFill/>
-        </p:spPr>
-        <p:txBody>
-          <a:bodyPr wrap="square" anchor="ctr"/>
-          <a:lstStyle/>
-          <a:p>
-            <a:r>
-              <a:rPr sz="1400" b="1" i="0">
-                <a:solidFill>
-                  <a:srgbClr val="095292"/>
-                </a:solidFill>
-                <a:latin typeface="Calibri"/>
-              </a:rPr>
-              <a:t>En draw.io o Excalidraw arme el tablero con las columnas Por hacer / Modelando / En revision del cliente / Aprobado, ponga el limite de trabajo en curso en dos para las columnas del medio, distribuya las tarjetas en tres sprints con su objetivo y entregable de diseño, exporte a PDF y suba a la plataforma del curso.</a:t>
-            </a:r>
-          </a:p>
-        </p:txBody>
-      </p:sp>
-      <p:sp>
-        <p:nvSpPr>
-          <p:cNvPr id="25" name="TextBox 24"/>
-          <p:cNvSpPr txBox="1"/>
-          <p:nvPr/>
-        </p:nvSpPr>
-        <p:spPr>
-          <a:xfrm>
-            <a:off x="11185855" y="6473952"/>
-            <a:ext cx="640080" cy="274320"/>
-          </a:xfrm>
-          <a:prstGeom prst="rect">
-            <a:avLst/>
-          </a:prstGeom>
-          <a:noFill/>
-        </p:spPr>
-        <p:txBody>
-          <a:bodyPr wrap="square">
-            <a:spAutoFit/>
-          </a:bodyPr>
-          <a:lstStyle/>
-          <a:p>
-            <a:pPr algn="r"/>
-            <a:r>
-              <a:rPr sz="1100" b="0" i="0">
-                <a:solidFill>
-                  <a:srgbClr val="666666"/>
-                </a:solidFill>
-                <a:latin typeface="Calibri"/>
-              </a:rPr>
-              <a:t>17</a:t>
-            </a:r>
-          </a:p>
-        </p:txBody>
-      </p:sp>
-    </p:spTree>
-  </p:cSld>
-  <p:clrMapOvr>
-    <a:masterClrMapping/>
-  </p:clrMapOvr>
-</p:sld>
-</file>
-
-<file path=ppt/slides/slide18.xml><?xml version="1.0" encoding="utf-8"?>
-<p:sld xmlns:a="http://schemas.openxmlformats.org/drawingml/2006/main" xmlns:p="http://schemas.openxmlformats.org/presentationml/2006/main" xmlns:r="http://schemas.openxmlformats.org/officeDocument/2006/relationships">
-  <p:cSld>
-    <p:bg>
-      <p:bgPr>
-        <a:solidFill>
-          <a:srgbClr val="FFFFFF"/>
-        </a:solidFill>
-        <a:effectLst/>
-      </p:bgPr>
-    </p:bg>
-    <p:spTree>
-      <p:nvGrpSpPr>
-        <p:cNvPr id="1" name=""/>
-        <p:cNvGrpSpPr/>
-        <p:nvPr/>
-      </p:nvGrpSpPr>
-      <p:grpSpPr/>
-      <p:sp>
-        <p:nvSpPr>
-          <p:cNvPr id="2" name="Rectangle 1"/>
-          <p:cNvSpPr/>
-          <p:nvPr/>
-        </p:nvSpPr>
-        <p:spPr>
-          <a:xfrm>
-            <a:off x="0" y="0"/>
-            <a:ext cx="12191695" cy="960120"/>
-          </a:xfrm>
-          <a:prstGeom prst="rect">
-            <a:avLst/>
-          </a:prstGeom>
-          <a:solidFill>
-            <a:srgbClr val="095292"/>
-          </a:solidFill>
-          <a:ln>
-            <a:noFill/>
-          </a:ln>
-        </p:spPr>
-        <p:style>
-          <a:lnRef idx="1">
-            <a:schemeClr val="accent1"/>
-          </a:lnRef>
-          <a:fillRef idx="3">
-            <a:schemeClr val="accent1"/>
-          </a:fillRef>
-          <a:effectRef idx="2">
-            <a:schemeClr val="accent1"/>
-          </a:effectRef>
-          <a:fontRef idx="minor">
-            <a:schemeClr val="lt1"/>
-          </a:fontRef>
-        </p:style>
-        <p:txBody>
-          <a:bodyPr rtlCol="0" anchor="ctr"/>
-          <a:lstStyle/>
-          <a:p>
-            <a:pPr algn="ctr"/>
-          </a:p>
-        </p:txBody>
-      </p:sp>
-      <p:sp>
-        <p:nvSpPr>
-          <p:cNvPr id="3" name="Rectangle 2"/>
-          <p:cNvSpPr/>
-          <p:nvPr/>
-        </p:nvSpPr>
-        <p:spPr>
-          <a:xfrm>
-            <a:off x="0" y="960120"/>
-            <a:ext cx="12191695" cy="41148"/>
-          </a:xfrm>
-          <a:prstGeom prst="rect">
-            <a:avLst/>
-          </a:prstGeom>
-          <a:solidFill>
-            <a:srgbClr val="FFD000"/>
-          </a:solidFill>
-          <a:ln>
-            <a:noFill/>
-          </a:ln>
-        </p:spPr>
-        <p:style>
-          <a:lnRef idx="1">
-            <a:schemeClr val="accent1"/>
-          </a:lnRef>
-          <a:fillRef idx="3">
-            <a:schemeClr val="accent1"/>
-          </a:fillRef>
-          <a:effectRef idx="2">
-            <a:schemeClr val="accent1"/>
-          </a:effectRef>
-          <a:fontRef idx="minor">
-            <a:schemeClr val="lt1"/>
-          </a:fontRef>
-        </p:style>
-        <p:txBody>
-          <a:bodyPr rtlCol="0" anchor="ctr"/>
-          <a:lstStyle/>
-          <a:p>
-            <a:pPr algn="ctr"/>
-          </a:p>
-        </p:txBody>
-      </p:sp>
-      <p:sp>
-        <p:nvSpPr>
-          <p:cNvPr id="4" name="TextBox 3"/>
-          <p:cNvSpPr txBox="1"/>
-          <p:nvPr/>
-        </p:nvSpPr>
-        <p:spPr>
-          <a:xfrm>
-            <a:off x="457200" y="164592"/>
-            <a:ext cx="11277295" cy="502920"/>
-          </a:xfrm>
-          <a:prstGeom prst="rect">
-            <a:avLst/>
-          </a:prstGeom>
-          <a:noFill/>
-        </p:spPr>
-        <p:txBody>
-          <a:bodyPr wrap="square">
-            <a:spAutoFit/>
-          </a:bodyPr>
-          <a:lstStyle/>
-          <a:p>
-            <a:r>
-              <a:rPr sz="2600" b="1" i="0">
-                <a:solidFill>
-                  <a:srgbClr val="FFFFFF"/>
-                </a:solidFill>
-                <a:latin typeface="Calibri"/>
-              </a:rPr>
-              <a:t>Antes de entregar — autochequeo</a:t>
-            </a:r>
-          </a:p>
-        </p:txBody>
-      </p:sp>
-      <p:sp>
-        <p:nvSpPr>
-          <p:cNvPr id="5" name="Rounded Rectangle 4"/>
-          <p:cNvSpPr/>
-          <p:nvPr/>
-        </p:nvSpPr>
-        <p:spPr>
-          <a:xfrm>
-            <a:off x="457200" y="1261872"/>
-            <a:ext cx="11277295" cy="566928"/>
-          </a:xfrm>
-          <a:prstGeom prst="roundRect">
-            <a:avLst>
-              <a:gd name="adj" fmla="val 12000"/>
-            </a:avLst>
-          </a:prstGeom>
-          <a:solidFill>
-            <a:srgbClr val="F2F2F2"/>
-          </a:solidFill>
-          <a:ln>
-            <a:noFill/>
-          </a:ln>
-        </p:spPr>
-        <p:style>
-          <a:lnRef idx="1">
-            <a:schemeClr val="accent1"/>
-          </a:lnRef>
-          <a:fillRef idx="3">
-            <a:schemeClr val="accent1"/>
-          </a:fillRef>
-          <a:effectRef idx="2">
-            <a:schemeClr val="accent1"/>
-          </a:effectRef>
-          <a:fontRef idx="minor">
-            <a:schemeClr val="lt1"/>
-          </a:fontRef>
-        </p:style>
-        <p:txBody>
-          <a:bodyPr rtlCol="0" anchor="ctr"/>
-          <a:lstStyle/>
-          <a:p>
-            <a:pPr algn="ctr"/>
-          </a:p>
-        </p:txBody>
-      </p:sp>
-      <p:sp>
-        <p:nvSpPr>
-          <p:cNvPr id="6" name="Rectangle 5"/>
-          <p:cNvSpPr/>
-          <p:nvPr/>
-        </p:nvSpPr>
-        <p:spPr>
-          <a:xfrm>
-            <a:off x="640080" y="1408175"/>
-            <a:ext cx="274320" cy="274320"/>
-          </a:xfrm>
-          <a:prstGeom prst="rect">
-            <a:avLst/>
-          </a:prstGeom>
-          <a:solidFill>
-            <a:srgbClr val="FFFFFF"/>
-          </a:solidFill>
-          <a:ln>
-            <a:solidFill>
-              <a:srgbClr val="333333"/>
-            </a:solidFill>
-          </a:ln>
-        </p:spPr>
-        <p:style>
-          <a:lnRef idx="1">
-            <a:schemeClr val="accent1"/>
-          </a:lnRef>
-          <a:fillRef idx="3">
-            <a:schemeClr val="accent1"/>
-          </a:fillRef>
-          <a:effectRef idx="2">
-            <a:schemeClr val="accent1"/>
-          </a:effectRef>
-          <a:fontRef idx="minor">
-            <a:schemeClr val="lt1"/>
-          </a:fontRef>
-        </p:style>
-        <p:txBody>
-          <a:bodyPr rtlCol="0" anchor="ctr"/>
-          <a:lstStyle/>
-          <a:p>
-            <a:pPr algn="ctr"/>
-          </a:p>
-        </p:txBody>
-      </p:sp>
-      <p:sp>
-        <p:nvSpPr>
-          <p:cNvPr id="7" name="Rectangle 6"/>
-          <p:cNvSpPr/>
-          <p:nvPr/>
-        </p:nvSpPr>
-        <p:spPr>
-          <a:xfrm>
-            <a:off x="640080" y="1408175"/>
-            <a:ext cx="73152" cy="274320"/>
-          </a:xfrm>
-          <a:prstGeom prst="rect">
-            <a:avLst/>
-          </a:prstGeom>
-          <a:solidFill>
-            <a:srgbClr val="269CCB"/>
-          </a:solidFill>
-          <a:ln>
-            <a:noFill/>
-          </a:ln>
-        </p:spPr>
-        <p:style>
-          <a:lnRef idx="1">
-            <a:schemeClr val="accent1"/>
-          </a:lnRef>
-          <a:fillRef idx="3">
-            <a:schemeClr val="accent1"/>
-          </a:fillRef>
-          <a:effectRef idx="2">
-            <a:schemeClr val="accent1"/>
-          </a:effectRef>
-          <a:fontRef idx="minor">
-            <a:schemeClr val="lt1"/>
-          </a:fontRef>
-        </p:style>
-        <p:txBody>
-          <a:bodyPr rtlCol="0" anchor="ctr"/>
-          <a:lstStyle/>
-          <a:p>
-            <a:pPr algn="ctr"/>
-          </a:p>
-        </p:txBody>
-      </p:sp>
-      <p:sp>
-        <p:nvSpPr>
-          <p:cNvPr id="8" name="TextBox 7"/>
-          <p:cNvSpPr txBox="1"/>
-          <p:nvPr/>
-        </p:nvSpPr>
-        <p:spPr>
-          <a:xfrm>
-            <a:off x="1097280" y="1353312"/>
-            <a:ext cx="10362895" cy="402336"/>
-          </a:xfrm>
-          <a:prstGeom prst="rect">
-            <a:avLst/>
-          </a:prstGeom>
-          <a:noFill/>
-        </p:spPr>
-        <p:txBody>
-          <a:bodyPr wrap="square" anchor="ctr"/>
-          <a:lstStyle/>
-          <a:p>
-            <a:r>
-              <a:rPr sz="1500" b="0" i="0">
-                <a:solidFill>
-                  <a:srgbClr val="333333"/>
-                </a:solidFill>
-                <a:latin typeface="Calibri"/>
-              </a:rPr>
-              <a:t>Si su sprint 1 se llama 'analisis' y el sprint 2 'diseño', que le va a mostrar a la veterinaria al terminar el sprint 1 que ella pueda entender y criticar?</a:t>
-            </a:r>
-          </a:p>
-        </p:txBody>
-      </p:sp>
-      <p:sp>
-        <p:nvSpPr>
-          <p:cNvPr id="9" name="Rounded Rectangle 8"/>
-          <p:cNvSpPr/>
-          <p:nvPr/>
-        </p:nvSpPr>
-        <p:spPr>
-          <a:xfrm>
-            <a:off x="457200" y="1938528"/>
-            <a:ext cx="11277295" cy="566928"/>
-          </a:xfrm>
-          <a:prstGeom prst="roundRect">
-            <a:avLst>
-              <a:gd name="adj" fmla="val 12000"/>
-            </a:avLst>
-          </a:prstGeom>
-          <a:solidFill>
-            <a:srgbClr val="F2F2F2"/>
-          </a:solidFill>
-          <a:ln>
-            <a:noFill/>
-          </a:ln>
-        </p:spPr>
-        <p:style>
-          <a:lnRef idx="1">
-            <a:schemeClr val="accent1"/>
-          </a:lnRef>
-          <a:fillRef idx="3">
-            <a:schemeClr val="accent1"/>
-          </a:fillRef>
-          <a:effectRef idx="2">
-            <a:schemeClr val="accent1"/>
-          </a:effectRef>
-          <a:fontRef idx="minor">
-            <a:schemeClr val="lt1"/>
-          </a:fontRef>
-        </p:style>
-        <p:txBody>
-          <a:bodyPr rtlCol="0" anchor="ctr"/>
-          <a:lstStyle/>
-          <a:p>
-            <a:pPr algn="ctr"/>
-          </a:p>
-        </p:txBody>
-      </p:sp>
-      <p:sp>
-        <p:nvSpPr>
-          <p:cNvPr id="10" name="Rectangle 9"/>
-          <p:cNvSpPr/>
-          <p:nvPr/>
-        </p:nvSpPr>
-        <p:spPr>
-          <a:xfrm>
-            <a:off x="640080" y="2084832"/>
-            <a:ext cx="274320" cy="274320"/>
-          </a:xfrm>
-          <a:prstGeom prst="rect">
-            <a:avLst/>
-          </a:prstGeom>
-          <a:solidFill>
-            <a:srgbClr val="FFFFFF"/>
-          </a:solidFill>
-          <a:ln>
-            <a:solidFill>
-              <a:srgbClr val="333333"/>
-            </a:solidFill>
-          </a:ln>
-        </p:spPr>
-        <p:style>
-          <a:lnRef idx="1">
-            <a:schemeClr val="accent1"/>
-          </a:lnRef>
-          <a:fillRef idx="3">
-            <a:schemeClr val="accent1"/>
-          </a:fillRef>
-          <a:effectRef idx="2">
-            <a:schemeClr val="accent1"/>
-          </a:effectRef>
-          <a:fontRef idx="minor">
-            <a:schemeClr val="lt1"/>
-          </a:fontRef>
-        </p:style>
-        <p:txBody>
-          <a:bodyPr rtlCol="0" anchor="ctr"/>
-          <a:lstStyle/>
-          <a:p>
-            <a:pPr algn="ctr"/>
-          </a:p>
-        </p:txBody>
-      </p:sp>
-      <p:sp>
-        <p:nvSpPr>
-          <p:cNvPr id="11" name="Rectangle 10"/>
-          <p:cNvSpPr/>
-          <p:nvPr/>
-        </p:nvSpPr>
-        <p:spPr>
-          <a:xfrm>
-            <a:off x="640080" y="2084832"/>
-            <a:ext cx="73152" cy="274320"/>
-          </a:xfrm>
-          <a:prstGeom prst="rect">
-            <a:avLst/>
-          </a:prstGeom>
-          <a:solidFill>
-            <a:srgbClr val="269CCB"/>
-          </a:solidFill>
-          <a:ln>
-            <a:noFill/>
-          </a:ln>
-        </p:spPr>
-        <p:style>
-          <a:lnRef idx="1">
-            <a:schemeClr val="accent1"/>
-          </a:lnRef>
-          <a:fillRef idx="3">
-            <a:schemeClr val="accent1"/>
-          </a:fillRef>
-          <a:effectRef idx="2">
-            <a:schemeClr val="accent1"/>
-          </a:effectRef>
-          <a:fontRef idx="minor">
-            <a:schemeClr val="lt1"/>
-          </a:fontRef>
-        </p:style>
-        <p:txBody>
-          <a:bodyPr rtlCol="0" anchor="ctr"/>
-          <a:lstStyle/>
-          <a:p>
-            <a:pPr algn="ctr"/>
-          </a:p>
-        </p:txBody>
-      </p:sp>
-      <p:sp>
-        <p:nvSpPr>
-          <p:cNvPr id="12" name="TextBox 11"/>
-          <p:cNvSpPr txBox="1"/>
-          <p:nvPr/>
-        </p:nvSpPr>
-        <p:spPr>
-          <a:xfrm>
-            <a:off x="1097280" y="2029968"/>
-            <a:ext cx="10362895" cy="402336"/>
-          </a:xfrm>
-          <a:prstGeom prst="rect">
-            <a:avLst/>
-          </a:prstGeom>
-          <a:noFill/>
-        </p:spPr>
-        <p:txBody>
-          <a:bodyPr wrap="square" anchor="ctr"/>
-          <a:lstStyle/>
-          <a:p>
-            <a:r>
-              <a:rPr sz="1500" b="0" i="0">
-                <a:solidFill>
-                  <a:srgbClr val="333333"/>
-                </a:solidFill>
-                <a:latin typeface="Calibri"/>
-              </a:rPr>
-              <a:t>Sus criterios de aceptacion describen solo el camino feliz? Que pasa si la mascota no existe, si el nombre esta repetido o si la conexion se cae?</a:t>
-            </a:r>
-          </a:p>
-        </p:txBody>
-      </p:sp>
-      <p:sp>
-        <p:nvSpPr>
-          <p:cNvPr id="13" name="Rounded Rectangle 12"/>
-          <p:cNvSpPr/>
-          <p:nvPr/>
-        </p:nvSpPr>
-        <p:spPr>
-          <a:xfrm>
-            <a:off x="457200" y="2615184"/>
-            <a:ext cx="11277295" cy="566928"/>
-          </a:xfrm>
-          <a:prstGeom prst="roundRect">
-            <a:avLst>
-              <a:gd name="adj" fmla="val 12000"/>
-            </a:avLst>
-          </a:prstGeom>
-          <a:solidFill>
-            <a:srgbClr val="F2F2F2"/>
-          </a:solidFill>
-          <a:ln>
-            <a:noFill/>
-          </a:ln>
-        </p:spPr>
-        <p:style>
-          <a:lnRef idx="1">
-            <a:schemeClr val="accent1"/>
-          </a:lnRef>
-          <a:fillRef idx="3">
-            <a:schemeClr val="accent1"/>
-          </a:fillRef>
-          <a:effectRef idx="2">
-            <a:schemeClr val="accent1"/>
-          </a:effectRef>
-          <a:fontRef idx="minor">
-            <a:schemeClr val="lt1"/>
-          </a:fontRef>
-        </p:style>
-        <p:txBody>
-          <a:bodyPr rtlCol="0" anchor="ctr"/>
-          <a:lstStyle/>
-          <a:p>
-            <a:pPr algn="ctr"/>
-          </a:p>
-        </p:txBody>
-      </p:sp>
-      <p:sp>
-        <p:nvSpPr>
-          <p:cNvPr id="14" name="Rectangle 13"/>
-          <p:cNvSpPr/>
-          <p:nvPr/>
-        </p:nvSpPr>
-        <p:spPr>
-          <a:xfrm>
-            <a:off x="640080" y="2761488"/>
-            <a:ext cx="274320" cy="274320"/>
-          </a:xfrm>
-          <a:prstGeom prst="rect">
-            <a:avLst/>
-          </a:prstGeom>
-          <a:solidFill>
-            <a:srgbClr val="FFFFFF"/>
-          </a:solidFill>
-          <a:ln>
-            <a:solidFill>
-              <a:srgbClr val="333333"/>
-            </a:solidFill>
-          </a:ln>
-        </p:spPr>
-        <p:style>
-          <a:lnRef idx="1">
-            <a:schemeClr val="accent1"/>
-          </a:lnRef>
-          <a:fillRef idx="3">
-            <a:schemeClr val="accent1"/>
-          </a:fillRef>
-          <a:effectRef idx="2">
-            <a:schemeClr val="accent1"/>
-          </a:effectRef>
-          <a:fontRef idx="minor">
-            <a:schemeClr val="lt1"/>
-          </a:fontRef>
-        </p:style>
-        <p:txBody>
-          <a:bodyPr rtlCol="0" anchor="ctr"/>
-          <a:lstStyle/>
-          <a:p>
-            <a:pPr algn="ctr"/>
-          </a:p>
-        </p:txBody>
-      </p:sp>
-      <p:sp>
-        <p:nvSpPr>
-          <p:cNvPr id="15" name="Rectangle 14"/>
-          <p:cNvSpPr/>
-          <p:nvPr/>
-        </p:nvSpPr>
-        <p:spPr>
-          <a:xfrm>
-            <a:off x="640080" y="2761488"/>
-            <a:ext cx="73152" cy="274320"/>
-          </a:xfrm>
-          <a:prstGeom prst="rect">
-            <a:avLst/>
-          </a:prstGeom>
-          <a:solidFill>
-            <a:srgbClr val="269CCB"/>
-          </a:solidFill>
-          <a:ln>
-            <a:noFill/>
-          </a:ln>
-        </p:spPr>
-        <p:style>
-          <a:lnRef idx="1">
-            <a:schemeClr val="accent1"/>
-          </a:lnRef>
-          <a:fillRef idx="3">
-            <a:schemeClr val="accent1"/>
-          </a:fillRef>
-          <a:effectRef idx="2">
-            <a:schemeClr val="accent1"/>
-          </a:effectRef>
-          <a:fontRef idx="minor">
-            <a:schemeClr val="lt1"/>
-          </a:fontRef>
-        </p:style>
-        <p:txBody>
-          <a:bodyPr rtlCol="0" anchor="ctr"/>
-          <a:lstStyle/>
-          <a:p>
-            <a:pPr algn="ctr"/>
-          </a:p>
-        </p:txBody>
-      </p:sp>
-      <p:sp>
-        <p:nvSpPr>
-          <p:cNvPr id="16" name="TextBox 15"/>
-          <p:cNvSpPr txBox="1"/>
-          <p:nvPr/>
-        </p:nvSpPr>
-        <p:spPr>
-          <a:xfrm>
-            <a:off x="1097280" y="2706624"/>
-            <a:ext cx="10362895" cy="402336"/>
-          </a:xfrm>
-          <a:prstGeom prst="rect">
-            <a:avLst/>
-          </a:prstGeom>
-          <a:noFill/>
-        </p:spPr>
-        <p:txBody>
-          <a:bodyPr wrap="square" anchor="ctr"/>
-          <a:lstStyle/>
-          <a:p>
-            <a:r>
-              <a:rPr sz="1500" b="0" i="0">
-                <a:solidFill>
-                  <a:srgbClr val="333333"/>
-                </a:solidFill>
-                <a:latin typeface="Calibri"/>
-              </a:rPr>
-              <a:t>Su Definicion de Terminado se puede verificar mirando el tablero, o incluye frases como 'que quede bien hecho' que nadie puede comprobar?</a:t>
-            </a:r>
-          </a:p>
-        </p:txBody>
-      </p:sp>
-      <p:sp>
-        <p:nvSpPr>
-          <p:cNvPr id="17" name="TextBox 16"/>
-          <p:cNvSpPr txBox="1"/>
-          <p:nvPr/>
-        </p:nvSpPr>
-        <p:spPr>
-          <a:xfrm>
-            <a:off x="11185855" y="6473952"/>
-            <a:ext cx="640080" cy="274320"/>
-          </a:xfrm>
-          <a:prstGeom prst="rect">
-            <a:avLst/>
-          </a:prstGeom>
-          <a:noFill/>
-        </p:spPr>
-        <p:txBody>
-          <a:bodyPr wrap="square">
-            <a:spAutoFit/>
-          </a:bodyPr>
-          <a:lstStyle/>
-          <a:p>
-            <a:pPr algn="r"/>
-            <a:r>
-              <a:rPr sz="1100" b="0" i="0">
-                <a:solidFill>
-                  <a:srgbClr val="666666"/>
-                </a:solidFill>
-                <a:latin typeface="Calibri"/>
-              </a:rPr>
-              <a:t>18</a:t>
-            </a:r>
-          </a:p>
-        </p:txBody>
-      </p:sp>
-    </p:spTree>
-  </p:cSld>
-  <p:clrMapOvr>
-    <a:masterClrMapping/>
-  </p:clrMapOvr>
-</p:sld>
-</file>
-
-<file path=ppt/slides/slide19.xml><?xml version="1.0" encoding="utf-8"?>
-<p:sld xmlns:a="http://schemas.openxmlformats.org/drawingml/2006/main" xmlns:p="http://schemas.openxmlformats.org/presentationml/2006/main" xmlns:r="http://schemas.openxmlformats.org/officeDocument/2006/relationships">
-  <p:cSld>
-    <p:bg>
-      <p:bgPr>
-        <a:solidFill>
-          <a:srgbClr val="FFFFFF"/>
-        </a:solidFill>
-        <a:effectLst/>
-      </p:bgPr>
-    </p:bg>
-    <p:spTree>
-      <p:nvGrpSpPr>
-        <p:cNvPr id="1" name=""/>
-        <p:cNvGrpSpPr/>
-        <p:nvPr/>
-      </p:nvGrpSpPr>
-      <p:grpSpPr/>
-      <p:sp>
-        <p:nvSpPr>
-          <p:cNvPr id="2" name="Rectangle 1"/>
-          <p:cNvSpPr/>
-          <p:nvPr/>
-        </p:nvSpPr>
-        <p:spPr>
-          <a:xfrm>
-            <a:off x="0" y="0"/>
-            <a:ext cx="12191695" cy="960120"/>
-          </a:xfrm>
-          <a:prstGeom prst="rect">
-            <a:avLst/>
-          </a:prstGeom>
-          <a:solidFill>
-            <a:srgbClr val="095292"/>
-          </a:solidFill>
-          <a:ln>
-            <a:noFill/>
-          </a:ln>
-        </p:spPr>
-        <p:style>
-          <a:lnRef idx="1">
-            <a:schemeClr val="accent1"/>
-          </a:lnRef>
-          <a:fillRef idx="3">
-            <a:schemeClr val="accent1"/>
-          </a:fillRef>
-          <a:effectRef idx="2">
-            <a:schemeClr val="accent1"/>
-          </a:effectRef>
-          <a:fontRef idx="minor">
-            <a:schemeClr val="lt1"/>
-          </a:fontRef>
-        </p:style>
-        <p:txBody>
-          <a:bodyPr rtlCol="0" anchor="ctr"/>
-          <a:lstStyle/>
-          <a:p>
-            <a:pPr algn="ctr"/>
-          </a:p>
-        </p:txBody>
-      </p:sp>
-      <p:sp>
-        <p:nvSpPr>
-          <p:cNvPr id="3" name="Rectangle 2"/>
-          <p:cNvSpPr/>
-          <p:nvPr/>
-        </p:nvSpPr>
-        <p:spPr>
-          <a:xfrm>
-            <a:off x="0" y="960120"/>
-            <a:ext cx="12191695" cy="41148"/>
-          </a:xfrm>
-          <a:prstGeom prst="rect">
-            <a:avLst/>
-          </a:prstGeom>
-          <a:solidFill>
-            <a:srgbClr val="FFD000"/>
-          </a:solidFill>
-          <a:ln>
-            <a:noFill/>
-          </a:ln>
-        </p:spPr>
-        <p:style>
-          <a:lnRef idx="1">
-            <a:schemeClr val="accent1"/>
-          </a:lnRef>
-          <a:fillRef idx="3">
-            <a:schemeClr val="accent1"/>
-          </a:fillRef>
-          <a:effectRef idx="2">
-            <a:schemeClr val="accent1"/>
-          </a:effectRef>
-          <a:fontRef idx="minor">
-            <a:schemeClr val="lt1"/>
-          </a:fontRef>
-        </p:style>
-        <p:txBody>
-          <a:bodyPr rtlCol="0" anchor="ctr"/>
-          <a:lstStyle/>
-          <a:p>
-            <a:pPr algn="ctr"/>
-          </a:p>
-        </p:txBody>
-      </p:sp>
-      <p:sp>
-        <p:nvSpPr>
-          <p:cNvPr id="4" name="TextBox 3"/>
-          <p:cNvSpPr txBox="1"/>
-          <p:nvPr/>
-        </p:nvSpPr>
-        <p:spPr>
-          <a:xfrm>
-            <a:off x="457200" y="164592"/>
-            <a:ext cx="11277295" cy="502920"/>
-          </a:xfrm>
-          <a:prstGeom prst="rect">
-            <a:avLst/>
-          </a:prstGeom>
-          <a:noFill/>
-        </p:spPr>
-        <p:txBody>
-          <a:bodyPr wrap="square">
-            <a:spAutoFit/>
-          </a:bodyPr>
-          <a:lstStyle/>
-          <a:p>
-            <a:r>
-              <a:rPr sz="2600" b="1" i="0">
-                <a:solidFill>
-                  <a:srgbClr val="FFFFFF"/>
-                </a:solidFill>
-                <a:latin typeface="Calibri"/>
-              </a:rPr>
-              <a:t>Criterios de exito / entregable</a:t>
-            </a:r>
-          </a:p>
-        </p:txBody>
-      </p:sp>
-      <p:sp>
-        <p:nvSpPr>
-          <p:cNvPr id="5" name="TextBox 4"/>
-          <p:cNvSpPr txBox="1"/>
-          <p:nvPr/>
-        </p:nvSpPr>
-        <p:spPr>
-          <a:xfrm>
-            <a:off x="457200" y="1170432"/>
-            <a:ext cx="11277295" cy="5230368"/>
-          </a:xfrm>
-          <a:prstGeom prst="rect">
-            <a:avLst/>
-          </a:prstGeom>
-          <a:noFill/>
-        </p:spPr>
-        <p:txBody>
-          <a:bodyPr wrap="square">
-            <a:spAutoFit/>
-          </a:bodyPr>
-          <a:lstStyle/>
-          <a:p>
-            <a:pPr>
-              <a:spcAft>
-                <a:spcPts val="800"/>
-              </a:spcAft>
-            </a:pPr>
-            <a:r>
-              <a:rPr sz="2000" b="0" i="0">
-                <a:solidFill>
-                  <a:srgbClr val="333333"/>
-                </a:solidFill>
-                <a:latin typeface="Calibri"/>
-              </a:rPr>
-              <a:t>–   </a:t>
-            </a:r>
-            <a:r>
-              <a:rPr sz="2000" b="1" i="0">
-                <a:solidFill>
-                  <a:srgbClr val="333333"/>
-                </a:solidFill>
-                <a:latin typeface="Calibri"/>
-              </a:rPr>
-              <a:t>Entregable:</a:t>
-            </a:r>
-            <a:r>
-              <a:rPr sz="2000" b="0" i="0">
-                <a:solidFill>
-                  <a:srgbClr val="333333"/>
-                </a:solidFill>
-                <a:latin typeface="Calibri"/>
-              </a:rPr>
-              <a:t> Un tablero en draw.io o Excalidraw con el Product Backlog priorizado de VetCare y las columnas de flujo con limite de trabajo en curso, mas un documento con el plan de tres sprints (objetivo y entregable de diseño de cada uno), la Definicion de Terminado y tres historias de usuario con criterios en formato Dado/Cuando/Entonces.</a:t>
-            </a:r>
-          </a:p>
-          <a:p>
-            <a:pPr>
-              <a:spcAft>
-                <a:spcPts val="800"/>
-              </a:spcAft>
-            </a:pPr>
-            <a:r>
-              <a:rPr sz="2000" b="0" i="0">
-                <a:solidFill>
-                  <a:srgbClr val="333333"/>
-                </a:solidFill>
-                <a:latin typeface="Calibri"/>
-              </a:rPr>
-              <a:t>–   </a:t>
-            </a:r>
-            <a:r>
-              <a:rPr sz="2000" b="1" i="0">
-                <a:solidFill>
-                  <a:srgbClr val="333333"/>
-                </a:solidFill>
-                <a:latin typeface="Calibri"/>
-              </a:rPr>
-              <a:t>Exito:</a:t>
-            </a:r>
-            <a:r>
-              <a:rPr sz="2000" b="0" i="0">
-                <a:solidFill>
-                  <a:srgbClr val="333333"/>
-                </a:solidFill>
-                <a:latin typeface="Calibri"/>
-              </a:rPr>
-              <a:t> El backlog esta priorizado con un orden explicito y cada item tiene una justificacion de valor para la clinica, no un orden arbitrario.</a:t>
-            </a:r>
-          </a:p>
-          <a:p>
-            <a:pPr>
-              <a:spcAft>
-                <a:spcPts val="800"/>
-              </a:spcAft>
-            </a:pPr>
-            <a:r>
-              <a:rPr sz="2000" b="0" i="0">
-                <a:solidFill>
-                  <a:srgbClr val="333333"/>
-                </a:solidFill>
-                <a:latin typeface="Calibri"/>
-              </a:rPr>
-              <a:t>–   </a:t>
-            </a:r>
-            <a:r>
-              <a:rPr sz="2000" b="1" i="0">
-                <a:solidFill>
-                  <a:srgbClr val="333333"/>
-                </a:solidFill>
-                <a:latin typeface="Calibri"/>
-              </a:rPr>
-              <a:t>Exito:</a:t>
-            </a:r>
-            <a:r>
-              <a:rPr sz="2000" b="0" i="0">
-                <a:solidFill>
-                  <a:srgbClr val="333333"/>
-                </a:solidFill>
-                <a:latin typeface="Calibri"/>
-              </a:rPr>
-              <a:t> Las tres historias siguen la estructura Como / quiero / para y cada una tiene al menos dos escenarios en Dado/Cuando/Entonces, incluido uno alternativo o de error.</a:t>
-            </a:r>
-          </a:p>
-          <a:p>
-            <a:pPr>
-              <a:spcAft>
-                <a:spcPts val="800"/>
-              </a:spcAft>
-            </a:pPr>
-            <a:r>
-              <a:rPr sz="2000" b="0" i="0">
-                <a:solidFill>
-                  <a:srgbClr val="333333"/>
-                </a:solidFill>
-                <a:latin typeface="Calibri"/>
-              </a:rPr>
-              <a:t>–   </a:t>
-            </a:r>
-            <a:r>
-              <a:rPr sz="2000" b="1" i="0">
-                <a:solidFill>
-                  <a:srgbClr val="333333"/>
-                </a:solidFill>
-                <a:latin typeface="Calibri"/>
-              </a:rPr>
-              <a:t>Exito:</a:t>
-            </a:r>
-            <a:r>
-              <a:rPr sz="2000" b="0" i="0">
-                <a:solidFill>
-                  <a:srgbClr val="333333"/>
-                </a:solidFill>
-                <a:latin typeface="Calibri"/>
-              </a:rPr>
-              <a:t> Cada sprint del plan termina en un incremento que la clinica podria ver y opinar (mockup, prototipo, diagrama revisado), no en trabajo interno invisible.</a:t>
-            </a:r>
-          </a:p>
-          <a:p>
-            <a:pPr>
-              <a:spcAft>
-                <a:spcPts val="800"/>
-              </a:spcAft>
-            </a:pPr>
-            <a:r>
-              <a:rPr sz="2000" b="0" i="0">
-                <a:solidFill>
-                  <a:srgbClr val="333333"/>
-                </a:solidFill>
-                <a:latin typeface="Calibri"/>
-              </a:rPr>
-              <a:t>–   </a:t>
-            </a:r>
-            <a:r>
-              <a:rPr sz="2000" b="1" i="0">
-                <a:solidFill>
-                  <a:srgbClr val="333333"/>
-                </a:solidFill>
-                <a:latin typeface="Calibri"/>
-              </a:rPr>
-              <a:t>Exito:</a:t>
-            </a:r>
-            <a:r>
-              <a:rPr sz="2000" b="0" i="0">
-                <a:solidFill>
-                  <a:srgbClr val="333333"/>
-                </a:solidFill>
-                <a:latin typeface="Calibri"/>
-              </a:rPr>
-              <a:t> El tablero declara la Definicion de Terminado y el limite de trabajo en curso, y ninguna columna del medio tiene mas tarjetas que su limite.</a:t>
-            </a:r>
-          </a:p>
-          <a:p>
-            <a:pPr>
-              <a:spcAft>
-                <a:spcPts val="800"/>
-              </a:spcAft>
-            </a:pPr>
-            <a:r>
-              <a:rPr sz="2000" b="0" i="0">
-                <a:solidFill>
-                  <a:srgbClr val="333333"/>
-                </a:solidFill>
-                <a:latin typeface="Calibri"/>
-              </a:rPr>
-              <a:t>–   </a:t>
-            </a:r>
-            <a:r>
-              <a:rPr sz="2000" b="1" i="0">
-                <a:solidFill>
-                  <a:srgbClr val="333333"/>
-                </a:solidFill>
-                <a:latin typeface="Calibri"/>
-              </a:rPr>
-              <a:t>Entrega en la plataforma del curso</a:t>
-            </a:r>
-            <a:r>
-              <a:rPr sz="2000" b="0" i="0">
-                <a:solidFill>
-                  <a:srgbClr val="333333"/>
-                </a:solidFill>
-                <a:latin typeface="Calibri"/>
-              </a:rPr>
-              <a:t> — en la fecha que indique el docente.</a:t>
-            </a:r>
-          </a:p>
-        </p:txBody>
-      </p:sp>
-      <p:sp>
-        <p:nvSpPr>
-          <p:cNvPr id="6" name="TextBox 5"/>
-          <p:cNvSpPr txBox="1"/>
-          <p:nvPr/>
-        </p:nvSpPr>
-        <p:spPr>
-          <a:xfrm>
-            <a:off x="11185855" y="6473952"/>
-            <a:ext cx="640080" cy="274320"/>
-          </a:xfrm>
-          <a:prstGeom prst="rect">
-            <a:avLst/>
-          </a:prstGeom>
-          <a:noFill/>
-        </p:spPr>
-        <p:txBody>
-          <a:bodyPr wrap="square">
-            <a:spAutoFit/>
-          </a:bodyPr>
-          <a:lstStyle/>
-          <a:p>
-            <a:pPr algn="r"/>
-            <a:r>
-              <a:rPr sz="1100" b="0" i="0">
-                <a:solidFill>
-                  <a:srgbClr val="666666"/>
-                </a:solidFill>
-                <a:latin typeface="Calibri"/>
-              </a:rPr>
-              <a:t>19</a:t>
+                  <a:srgbClr val="269CCB"/>
+                </a:solidFill>
+                <a:latin typeface="Calibri"/>
+              </a:rPr>
+              <a:t>Teoria al servicio del diseño</a:t>
             </a:r>
           </a:p>
         </p:txBody>
@@ -9321,7 +6653,7 @@
                 </a:solidFill>
                 <a:latin typeface="Calibri"/>
               </a:rPr>
-              <a:t>Encuadre de hoy · Objetivo del PI</a:t>
+              <a:t>Encuadre de hoy</a:t>
             </a:r>
           </a:p>
         </p:txBody>
@@ -9369,7 +6701,7 @@
                 </a:solidFill>
                 <a:latin typeface="Calibri"/>
               </a:rPr>
-              <a:t>Hoy avanzamos VetCare en:</a:t>
+              <a:t>Tema:</a:t>
             </a:r>
             <a:r>
               <a:rPr sz="2000" b="0" i="0">
@@ -9378,7 +6710,7 @@
                 </a:solidFill>
                 <a:latin typeface="Calibri"/>
               </a:rPr>
-              <a:t> Queda listo el backlog priorizado de VetCare repartido en sprints del semestre, con las primeras historias de usuario escritas con criterios de aceptacion.</a:t>
+              <a:t> Metodologias agiles</a:t>
             </a:r>
           </a:p>
           <a:p>
@@ -9394,34 +6726,7 @@
                 </a:solidFill>
                 <a:latin typeface="Calibri"/>
               </a:rPr>
-              <a:t>–   Herramienta: </a:t>
-            </a:r>
-            <a:r>
-              <a:rPr sz="2000" b="1" i="0">
-                <a:solidFill>
-                  <a:srgbClr val="333333"/>
-                </a:solidFill>
-                <a:latin typeface="Calibri"/>
-              </a:rPr>
-              <a:t>draw.io · Excalidraw · Google Docs</a:t>
-            </a:r>
-            <a:r>
-              <a:rPr sz="2000" b="0" i="0">
-                <a:solidFill>
-                  <a:srgbClr val="333333"/>
-                </a:solidFill>
-                <a:latin typeface="Calibri"/>
-              </a:rPr>
-              <a:t> · Bloque </a:t>
-            </a:r>
-            <a:r>
-              <a:rPr sz="2000" b="1" i="0">
-                <a:solidFill>
-                  <a:srgbClr val="333333"/>
-                </a:solidFill>
-                <a:latin typeface="Calibri"/>
-              </a:rPr>
-              <a:t>120 min</a:t>
+              <a:t>–   Iterar e incrementar sin dejar de documentar</a:t>
             </a:r>
           </a:p>
           <a:p>
@@ -9437,7 +6742,7 @@
                 </a:solidFill>
                 <a:latin typeface="Calibri"/>
               </a:rPr>
-              <a:t>–   </a:t>
+              <a:t>–   Herramienta del tema: </a:t>
             </a:r>
             <a:r>
               <a:rPr sz="2000" b="1" i="0">
@@ -9446,7 +6751,7 @@
                 </a:solidFill>
                 <a:latin typeface="Calibri"/>
               </a:rPr>
-              <a:t>Entregable de hoy:</a:t>
+              <a:t>draw.io · Excalidraw · Google Docs</a:t>
             </a:r>
             <a:r>
               <a:rPr sz="2000" b="0" i="0">
@@ -9455,7 +6760,16 @@
                 </a:solidFill>
                 <a:latin typeface="Calibri"/>
               </a:rPr>
-              <a:t> Un tablero en draw.io o Excalidraw con el Product Backlog priorizado de VetCare y las columnas de flujo con limite de trabajo en curso, mas un documento con el plan de tres sprints (objetivo y entregable de diseño de cada uno), la Definicion de Terminado y tres historias de usuario con criterios en formato Dado/Cuando/Entonces.</a:t>
+              <a:t> · Bloque </a:t>
+            </a:r>
+            <a:r>
+              <a:rPr sz="2000" b="1" i="0">
+                <a:solidFill>
+                  <a:srgbClr val="333333"/>
+                </a:solidFill>
+                <a:latin typeface="Calibri"/>
+              </a:rPr>
+              <a:t>120 min</a:t>
             </a:r>
           </a:p>
           <a:p>
@@ -9471,7 +6785,7 @@
                 </a:solidFill>
                 <a:latin typeface="Calibri"/>
               </a:rPr>
-              <a:t>–   La teoria esta al servicio del producto: al salir, VetCare avanzo.</a:t>
+              <a:t>–   Ejemplo de toda la clase: VetCare, el sistema de la clinica «Huellitas».</a:t>
             </a:r>
           </a:p>
         </p:txBody>
@@ -9507,833 +6821,6 @@
                 <a:latin typeface="Calibri"/>
               </a:rPr>
               <a:t>2</a:t>
-            </a:r>
-          </a:p>
-        </p:txBody>
-      </p:sp>
-    </p:spTree>
-  </p:cSld>
-  <p:clrMapOvr>
-    <a:masterClrMapping/>
-  </p:clrMapOvr>
-</p:sld>
-</file>
-
-<file path=ppt/slides/slide20.xml><?xml version="1.0" encoding="utf-8"?>
-<p:sld xmlns:a="http://schemas.openxmlformats.org/drawingml/2006/main" xmlns:p="http://schemas.openxmlformats.org/presentationml/2006/main" xmlns:r="http://schemas.openxmlformats.org/officeDocument/2006/relationships">
-  <p:cSld>
-    <p:bg>
-      <p:bgPr>
-        <a:solidFill>
-          <a:srgbClr val="FFFFFF"/>
-        </a:solidFill>
-        <a:effectLst/>
-      </p:bgPr>
-    </p:bg>
-    <p:spTree>
-      <p:nvGrpSpPr>
-        <p:cNvPr id="1" name=""/>
-        <p:cNvGrpSpPr/>
-        <p:nvPr/>
-      </p:nvGrpSpPr>
-      <p:grpSpPr/>
-      <p:sp>
-        <p:nvSpPr>
-          <p:cNvPr id="2" name="Rectangle 1"/>
-          <p:cNvSpPr/>
-          <p:nvPr/>
-        </p:nvSpPr>
-        <p:spPr>
-          <a:xfrm>
-            <a:off x="0" y="0"/>
-            <a:ext cx="12191695" cy="960120"/>
-          </a:xfrm>
-          <a:prstGeom prst="rect">
-            <a:avLst/>
-          </a:prstGeom>
-          <a:solidFill>
-            <a:srgbClr val="095292"/>
-          </a:solidFill>
-          <a:ln>
-            <a:noFill/>
-          </a:ln>
-        </p:spPr>
-        <p:style>
-          <a:lnRef idx="1">
-            <a:schemeClr val="accent1"/>
-          </a:lnRef>
-          <a:fillRef idx="3">
-            <a:schemeClr val="accent1"/>
-          </a:fillRef>
-          <a:effectRef idx="2">
-            <a:schemeClr val="accent1"/>
-          </a:effectRef>
-          <a:fontRef idx="minor">
-            <a:schemeClr val="lt1"/>
-          </a:fontRef>
-        </p:style>
-        <p:txBody>
-          <a:bodyPr rtlCol="0" anchor="ctr"/>
-          <a:lstStyle/>
-          <a:p>
-            <a:pPr algn="ctr"/>
-          </a:p>
-        </p:txBody>
-      </p:sp>
-      <p:sp>
-        <p:nvSpPr>
-          <p:cNvPr id="3" name="Rectangle 2"/>
-          <p:cNvSpPr/>
-          <p:nvPr/>
-        </p:nvSpPr>
-        <p:spPr>
-          <a:xfrm>
-            <a:off x="0" y="960120"/>
-            <a:ext cx="12191695" cy="41148"/>
-          </a:xfrm>
-          <a:prstGeom prst="rect">
-            <a:avLst/>
-          </a:prstGeom>
-          <a:solidFill>
-            <a:srgbClr val="FFD000"/>
-          </a:solidFill>
-          <a:ln>
-            <a:noFill/>
-          </a:ln>
-        </p:spPr>
-        <p:style>
-          <a:lnRef idx="1">
-            <a:schemeClr val="accent1"/>
-          </a:lnRef>
-          <a:fillRef idx="3">
-            <a:schemeClr val="accent1"/>
-          </a:fillRef>
-          <a:effectRef idx="2">
-            <a:schemeClr val="accent1"/>
-          </a:effectRef>
-          <a:fontRef idx="minor">
-            <a:schemeClr val="lt1"/>
-          </a:fontRef>
-        </p:style>
-        <p:txBody>
-          <a:bodyPr rtlCol="0" anchor="ctr"/>
-          <a:lstStyle/>
-          <a:p>
-            <a:pPr algn="ctr"/>
-          </a:p>
-        </p:txBody>
-      </p:sp>
-      <p:sp>
-        <p:nvSpPr>
-          <p:cNvPr id="4" name="TextBox 3"/>
-          <p:cNvSpPr txBox="1"/>
-          <p:nvPr/>
-        </p:nvSpPr>
-        <p:spPr>
-          <a:xfrm>
-            <a:off x="457200" y="164592"/>
-            <a:ext cx="11277295" cy="502920"/>
-          </a:xfrm>
-          <a:prstGeom prst="rect">
-            <a:avLst/>
-          </a:prstGeom>
-          <a:noFill/>
-        </p:spPr>
-        <p:txBody>
-          <a:bodyPr wrap="square">
-            <a:spAutoFit/>
-          </a:bodyPr>
-          <a:lstStyle/>
-          <a:p>
-            <a:r>
-              <a:rPr sz="2600" b="1" i="0">
-                <a:solidFill>
-                  <a:srgbClr val="FFFFFF"/>
-                </a:solidFill>
-                <a:latin typeface="Calibri"/>
-              </a:rPr>
-              <a:t>Para el PI esta semana</a:t>
-            </a:r>
-          </a:p>
-        </p:txBody>
-      </p:sp>
-      <p:sp>
-        <p:nvSpPr>
-          <p:cNvPr id="5" name="Rounded Rectangle 4"/>
-          <p:cNvSpPr/>
-          <p:nvPr/>
-        </p:nvSpPr>
-        <p:spPr>
-          <a:xfrm>
-            <a:off x="457200" y="1261872"/>
-            <a:ext cx="11277295" cy="1051560"/>
-          </a:xfrm>
-          <a:prstGeom prst="roundRect">
-            <a:avLst>
-              <a:gd name="adj" fmla="val 12000"/>
-            </a:avLst>
-          </a:prstGeom>
-          <a:solidFill>
-            <a:srgbClr val="E8F4FA"/>
-          </a:solidFill>
-          <a:ln>
-            <a:noFill/>
-          </a:ln>
-        </p:spPr>
-        <p:style>
-          <a:lnRef idx="1">
-            <a:schemeClr val="accent1"/>
-          </a:lnRef>
-          <a:fillRef idx="3">
-            <a:schemeClr val="accent1"/>
-          </a:fillRef>
-          <a:effectRef idx="2">
-            <a:schemeClr val="accent1"/>
-          </a:effectRef>
-          <a:fontRef idx="minor">
-            <a:schemeClr val="lt1"/>
-          </a:fontRef>
-        </p:style>
-        <p:txBody>
-          <a:bodyPr rtlCol="0" anchor="ctr"/>
-          <a:lstStyle/>
-          <a:p>
-            <a:pPr algn="ctr"/>
-          </a:p>
-        </p:txBody>
-      </p:sp>
-      <p:sp>
-        <p:nvSpPr>
-          <p:cNvPr id="6" name="Rectangle 5"/>
-          <p:cNvSpPr/>
-          <p:nvPr/>
-        </p:nvSpPr>
-        <p:spPr>
-          <a:xfrm>
-            <a:off x="457200" y="1261872"/>
-            <a:ext cx="128016" cy="1051560"/>
-          </a:xfrm>
-          <a:prstGeom prst="rect">
-            <a:avLst/>
-          </a:prstGeom>
-          <a:solidFill>
-            <a:srgbClr val="269CCB"/>
-          </a:solidFill>
-          <a:ln>
-            <a:noFill/>
-          </a:ln>
-        </p:spPr>
-        <p:style>
-          <a:lnRef idx="1">
-            <a:schemeClr val="accent1"/>
-          </a:lnRef>
-          <a:fillRef idx="3">
-            <a:schemeClr val="accent1"/>
-          </a:fillRef>
-          <a:effectRef idx="2">
-            <a:schemeClr val="accent1"/>
-          </a:effectRef>
-          <a:fontRef idx="minor">
-            <a:schemeClr val="lt1"/>
-          </a:fontRef>
-        </p:style>
-        <p:txBody>
-          <a:bodyPr rtlCol="0" anchor="ctr"/>
-          <a:lstStyle/>
-          <a:p>
-            <a:pPr algn="ctr"/>
-          </a:p>
-        </p:txBody>
-      </p:sp>
-      <p:sp>
-        <p:nvSpPr>
-          <p:cNvPr id="7" name="TextBox 6"/>
-          <p:cNvSpPr txBox="1"/>
-          <p:nvPr/>
-        </p:nvSpPr>
-        <p:spPr>
-          <a:xfrm>
-            <a:off x="777240" y="1399031"/>
-            <a:ext cx="10774375" cy="822959"/>
-          </a:xfrm>
-          <a:prstGeom prst="rect">
-            <a:avLst/>
-          </a:prstGeom>
-          <a:noFill/>
-        </p:spPr>
-        <p:txBody>
-          <a:bodyPr wrap="square">
-            <a:spAutoFit/>
-          </a:bodyPr>
-          <a:lstStyle/>
-          <a:p>
-            <a:r>
-              <a:rPr sz="1200" b="1" i="0">
-                <a:solidFill>
-                  <a:srgbClr val="269CCB"/>
-                </a:solidFill>
-                <a:latin typeface="Calibri"/>
-              </a:rPr>
-              <a:t>Info</a:t>
-            </a:r>
-          </a:p>
-          <a:p>
-            <a:pPr>
-              <a:spcBef>
-                <a:spcPts val="400"/>
-              </a:spcBef>
-            </a:pPr>
-            <a:r>
-              <a:rPr sz="1400" b="0" i="0">
-                <a:solidFill>
-                  <a:srgbClr val="333333"/>
-                </a:solidFill>
-                <a:latin typeface="Calibri"/>
-              </a:rPr>
-              <a:t>Hito: Queda listo el backlog priorizado de VetCare repartido en sprints del semestre, con las primeras historias de usuario escritas con criterios de aceptacion.</a:t>
-            </a:r>
-          </a:p>
-        </p:txBody>
-      </p:sp>
-      <p:sp>
-        <p:nvSpPr>
-          <p:cNvPr id="8" name="Rounded Rectangle 7"/>
-          <p:cNvSpPr/>
-          <p:nvPr/>
-        </p:nvSpPr>
-        <p:spPr>
-          <a:xfrm>
-            <a:off x="457200" y="2478024"/>
-            <a:ext cx="11277295" cy="1051560"/>
-          </a:xfrm>
-          <a:prstGeom prst="roundRect">
-            <a:avLst>
-              <a:gd name="adj" fmla="val 12000"/>
-            </a:avLst>
-          </a:prstGeom>
-          <a:solidFill>
-            <a:srgbClr val="FFF8E1"/>
-          </a:solidFill>
-          <a:ln>
-            <a:noFill/>
-          </a:ln>
-        </p:spPr>
-        <p:style>
-          <a:lnRef idx="1">
-            <a:schemeClr val="accent1"/>
-          </a:lnRef>
-          <a:fillRef idx="3">
-            <a:schemeClr val="accent1"/>
-          </a:fillRef>
-          <a:effectRef idx="2">
-            <a:schemeClr val="accent1"/>
-          </a:effectRef>
-          <a:fontRef idx="minor">
-            <a:schemeClr val="lt1"/>
-          </a:fontRef>
-        </p:style>
-        <p:txBody>
-          <a:bodyPr rtlCol="0" anchor="ctr"/>
-          <a:lstStyle/>
-          <a:p>
-            <a:pPr algn="ctr"/>
-          </a:p>
-        </p:txBody>
-      </p:sp>
-      <p:sp>
-        <p:nvSpPr>
-          <p:cNvPr id="9" name="Rectangle 8"/>
-          <p:cNvSpPr/>
-          <p:nvPr/>
-        </p:nvSpPr>
-        <p:spPr>
-          <a:xfrm>
-            <a:off x="457200" y="2478024"/>
-            <a:ext cx="128016" cy="1051560"/>
-          </a:xfrm>
-          <a:prstGeom prst="rect">
-            <a:avLst/>
-          </a:prstGeom>
-          <a:solidFill>
-            <a:srgbClr val="FFD000"/>
-          </a:solidFill>
-          <a:ln>
-            <a:noFill/>
-          </a:ln>
-        </p:spPr>
-        <p:style>
-          <a:lnRef idx="1">
-            <a:schemeClr val="accent1"/>
-          </a:lnRef>
-          <a:fillRef idx="3">
-            <a:schemeClr val="accent1"/>
-          </a:fillRef>
-          <a:effectRef idx="2">
-            <a:schemeClr val="accent1"/>
-          </a:effectRef>
-          <a:fontRef idx="minor">
-            <a:schemeClr val="lt1"/>
-          </a:fontRef>
-        </p:style>
-        <p:txBody>
-          <a:bodyPr rtlCol="0" anchor="ctr"/>
-          <a:lstStyle/>
-          <a:p>
-            <a:pPr algn="ctr"/>
-          </a:p>
-        </p:txBody>
-      </p:sp>
-      <p:sp>
-        <p:nvSpPr>
-          <p:cNvPr id="10" name="TextBox 9"/>
-          <p:cNvSpPr txBox="1"/>
-          <p:nvPr/>
-        </p:nvSpPr>
-        <p:spPr>
-          <a:xfrm>
-            <a:off x="777240" y="2615184"/>
-            <a:ext cx="10774375" cy="822959"/>
-          </a:xfrm>
-          <a:prstGeom prst="rect">
-            <a:avLst/>
-          </a:prstGeom>
-          <a:noFill/>
-        </p:spPr>
-        <p:txBody>
-          <a:bodyPr wrap="square">
-            <a:spAutoFit/>
-          </a:bodyPr>
-          <a:lstStyle/>
-          <a:p>
-            <a:r>
-              <a:rPr sz="1200" b="1" i="0">
-                <a:solidFill>
-                  <a:srgbClr val="FFD000"/>
-                </a:solidFill>
-                <a:latin typeface="Calibri"/>
-              </a:rPr>
-              <a:t>Aclaración</a:t>
-            </a:r>
-          </a:p>
-          <a:p>
-            <a:pPr>
-              <a:spcBef>
-                <a:spcPts val="400"/>
-              </a:spcBef>
-            </a:pPr>
-            <a:r>
-              <a:rPr sz="1400" b="0" i="0">
-                <a:solidFill>
-                  <a:srgbClr val="333333"/>
-                </a:solidFill>
-                <a:latin typeface="Calibri"/>
-              </a:rPr>
-              <a:t>Enunciado completo: Clases/Proyecto Integrador/ (VetCare).</a:t>
-            </a:r>
-          </a:p>
-        </p:txBody>
-      </p:sp>
-      <p:sp>
-        <p:nvSpPr>
-          <p:cNvPr id="11" name="Rounded Rectangle 10"/>
-          <p:cNvSpPr/>
-          <p:nvPr/>
-        </p:nvSpPr>
-        <p:spPr>
-          <a:xfrm>
-            <a:off x="457200" y="3694176"/>
-            <a:ext cx="11277295" cy="1051560"/>
-          </a:xfrm>
-          <a:prstGeom prst="roundRect">
-            <a:avLst>
-              <a:gd name="adj" fmla="val 12000"/>
-            </a:avLst>
-          </a:prstGeom>
-          <a:solidFill>
-            <a:srgbClr val="FBE4E4"/>
-          </a:solidFill>
-          <a:ln>
-            <a:noFill/>
-          </a:ln>
-        </p:spPr>
-        <p:style>
-          <a:lnRef idx="1">
-            <a:schemeClr val="accent1"/>
-          </a:lnRef>
-          <a:fillRef idx="3">
-            <a:schemeClr val="accent1"/>
-          </a:fillRef>
-          <a:effectRef idx="2">
-            <a:schemeClr val="accent1"/>
-          </a:effectRef>
-          <a:fontRef idx="minor">
-            <a:schemeClr val="lt1"/>
-          </a:fontRef>
-        </p:style>
-        <p:txBody>
-          <a:bodyPr rtlCol="0" anchor="ctr"/>
-          <a:lstStyle/>
-          <a:p>
-            <a:pPr algn="ctr"/>
-          </a:p>
-        </p:txBody>
-      </p:sp>
-      <p:sp>
-        <p:nvSpPr>
-          <p:cNvPr id="12" name="Rectangle 11"/>
-          <p:cNvSpPr/>
-          <p:nvPr/>
-        </p:nvSpPr>
-        <p:spPr>
-          <a:xfrm>
-            <a:off x="457200" y="3694176"/>
-            <a:ext cx="128016" cy="1051560"/>
-          </a:xfrm>
-          <a:prstGeom prst="rect">
-            <a:avLst/>
-          </a:prstGeom>
-          <a:solidFill>
-            <a:srgbClr val="A02030"/>
-          </a:solidFill>
-          <a:ln>
-            <a:noFill/>
-          </a:ln>
-        </p:spPr>
-        <p:style>
-          <a:lnRef idx="1">
-            <a:schemeClr val="accent1"/>
-          </a:lnRef>
-          <a:fillRef idx="3">
-            <a:schemeClr val="accent1"/>
-          </a:fillRef>
-          <a:effectRef idx="2">
-            <a:schemeClr val="accent1"/>
-          </a:effectRef>
-          <a:fontRef idx="minor">
-            <a:schemeClr val="lt1"/>
-          </a:fontRef>
-        </p:style>
-        <p:txBody>
-          <a:bodyPr rtlCol="0" anchor="ctr"/>
-          <a:lstStyle/>
-          <a:p>
-            <a:pPr algn="ctr"/>
-          </a:p>
-        </p:txBody>
-      </p:sp>
-      <p:sp>
-        <p:nvSpPr>
-          <p:cNvPr id="13" name="TextBox 12"/>
-          <p:cNvSpPr txBox="1"/>
-          <p:nvPr/>
-        </p:nvSpPr>
-        <p:spPr>
-          <a:xfrm>
-            <a:off x="777240" y="3831336"/>
-            <a:ext cx="10774375" cy="822959"/>
-          </a:xfrm>
-          <a:prstGeom prst="rect">
-            <a:avLst/>
-          </a:prstGeom>
-          <a:noFill/>
-        </p:spPr>
-        <p:txBody>
-          <a:bodyPr wrap="square">
-            <a:spAutoFit/>
-          </a:bodyPr>
-          <a:lstStyle/>
-          <a:p>
-            <a:r>
-              <a:rPr sz="1200" b="1" i="0">
-                <a:solidFill>
-                  <a:srgbClr val="A02030"/>
-                </a:solidFill>
-                <a:latin typeface="Calibri"/>
-              </a:rPr>
-              <a:t>Atención</a:t>
-            </a:r>
-          </a:p>
-          <a:p>
-            <a:pPr>
-              <a:spcBef>
-                <a:spcPts val="400"/>
-              </a:spcBef>
-            </a:pPr>
-            <a:r>
-              <a:rPr sz="1400" b="0" i="0">
-                <a:solidFill>
-                  <a:srgbClr val="333333"/>
-                </a:solidFill>
-                <a:latin typeface="Calibri"/>
-              </a:rPr>
-              <a:t>Entrega del taller, si el docente lo asigna · en la fecha que indique el docente.</a:t>
-            </a:r>
-          </a:p>
-        </p:txBody>
-      </p:sp>
-      <p:sp>
-        <p:nvSpPr>
-          <p:cNvPr id="14" name="TextBox 13"/>
-          <p:cNvSpPr txBox="1"/>
-          <p:nvPr/>
-        </p:nvSpPr>
-        <p:spPr>
-          <a:xfrm>
-            <a:off x="11185855" y="6473952"/>
-            <a:ext cx="640080" cy="274320"/>
-          </a:xfrm>
-          <a:prstGeom prst="rect">
-            <a:avLst/>
-          </a:prstGeom>
-          <a:noFill/>
-        </p:spPr>
-        <p:txBody>
-          <a:bodyPr wrap="square">
-            <a:spAutoFit/>
-          </a:bodyPr>
-          <a:lstStyle/>
-          <a:p>
-            <a:pPr algn="r"/>
-            <a:r>
-              <a:rPr sz="1100" b="0" i="0">
-                <a:solidFill>
-                  <a:srgbClr val="666666"/>
-                </a:solidFill>
-                <a:latin typeface="Calibri"/>
-              </a:rPr>
-              <a:t>20</a:t>
-            </a:r>
-          </a:p>
-        </p:txBody>
-      </p:sp>
-    </p:spTree>
-  </p:cSld>
-  <p:clrMapOvr>
-    <a:masterClrMapping/>
-  </p:clrMapOvr>
-</p:sld>
-</file>
-
-<file path=ppt/slides/slide21.xml><?xml version="1.0" encoding="utf-8"?>
-<p:sld xmlns:a="http://schemas.openxmlformats.org/drawingml/2006/main" xmlns:p="http://schemas.openxmlformats.org/presentationml/2006/main" xmlns:r="http://schemas.openxmlformats.org/officeDocument/2006/relationships">
-  <p:cSld>
-    <p:bg>
-      <p:bgPr>
-        <a:solidFill>
-          <a:srgbClr val="FFFFFF"/>
-        </a:solidFill>
-        <a:effectLst/>
-      </p:bgPr>
-    </p:bg>
-    <p:spTree>
-      <p:nvGrpSpPr>
-        <p:cNvPr id="1" name=""/>
-        <p:cNvGrpSpPr/>
-        <p:nvPr/>
-      </p:nvGrpSpPr>
-      <p:grpSpPr/>
-      <p:sp>
-        <p:nvSpPr>
-          <p:cNvPr id="2" name="Rectangle 1"/>
-          <p:cNvSpPr/>
-          <p:nvPr/>
-        </p:nvSpPr>
-        <p:spPr>
-          <a:xfrm>
-            <a:off x="0" y="0"/>
-            <a:ext cx="12191695" cy="164592"/>
-          </a:xfrm>
-          <a:prstGeom prst="rect">
-            <a:avLst/>
-          </a:prstGeom>
-          <a:solidFill>
-            <a:srgbClr val="269CCB"/>
-          </a:solidFill>
-          <a:ln>
-            <a:noFill/>
-          </a:ln>
-        </p:spPr>
-        <p:style>
-          <a:lnRef idx="1">
-            <a:schemeClr val="accent1"/>
-          </a:lnRef>
-          <a:fillRef idx="3">
-            <a:schemeClr val="accent1"/>
-          </a:fillRef>
-          <a:effectRef idx="2">
-            <a:schemeClr val="accent1"/>
-          </a:effectRef>
-          <a:fontRef idx="minor">
-            <a:schemeClr val="lt1"/>
-          </a:fontRef>
-        </p:style>
-        <p:txBody>
-          <a:bodyPr rtlCol="0" anchor="ctr"/>
-          <a:lstStyle/>
-          <a:p>
-            <a:pPr algn="ctr"/>
-          </a:p>
-        </p:txBody>
-      </p:sp>
-      <p:pic>
-        <p:nvPicPr>
-          <p:cNvPr id="3" name="Picture 2" descr="logo_uniajc_color.png"/>
-          <p:cNvPicPr>
-            <a:picLocks noChangeAspect="1"/>
-          </p:cNvPicPr>
-          <p:nvPr/>
-        </p:nvPicPr>
-        <p:blipFill>
-          <a:blip r:embed="rId2"/>
-          <a:stretch>
-            <a:fillRect/>
-          </a:stretch>
-        </p:blipFill>
-        <p:spPr>
-          <a:xfrm>
-            <a:off x="10271455" y="5998464"/>
-            <a:ext cx="1463040" cy="643233"/>
-          </a:xfrm>
-          <a:prstGeom prst="rect">
-            <a:avLst/>
-          </a:prstGeom>
-        </p:spPr>
-      </p:pic>
-      <p:sp>
-        <p:nvSpPr>
-          <p:cNvPr id="4" name="TextBox 3"/>
-          <p:cNvSpPr txBox="1"/>
-          <p:nvPr/>
-        </p:nvSpPr>
-        <p:spPr>
-          <a:xfrm>
-            <a:off x="457200" y="1737360"/>
-            <a:ext cx="11277295" cy="1097280"/>
-          </a:xfrm>
-          <a:prstGeom prst="rect">
-            <a:avLst/>
-          </a:prstGeom>
-          <a:noFill/>
-        </p:spPr>
-        <p:txBody>
-          <a:bodyPr wrap="square" anchor="ctr"/>
-          <a:lstStyle/>
-          <a:p>
-            <a:pPr algn="ctr"/>
-            <a:r>
-              <a:rPr sz="3400" b="1" i="0">
-                <a:solidFill>
-                  <a:srgbClr val="095292"/>
-                </a:solidFill>
-                <a:latin typeface="Calibri"/>
-              </a:rPr>
-              <a:t>Clase 4 · VetCare avanza</a:t>
-            </a:r>
-          </a:p>
-        </p:txBody>
-      </p:sp>
-      <p:sp>
-        <p:nvSpPr>
-          <p:cNvPr id="5" name="TextBox 4"/>
-          <p:cNvSpPr txBox="1"/>
-          <p:nvPr/>
-        </p:nvSpPr>
-        <p:spPr>
-          <a:xfrm>
-            <a:off x="457200" y="3017520"/>
-            <a:ext cx="11277295" cy="1645920"/>
-          </a:xfrm>
-          <a:prstGeom prst="rect">
-            <a:avLst/>
-          </a:prstGeom>
-          <a:noFill/>
-        </p:spPr>
-        <p:txBody>
-          <a:bodyPr wrap="square">
-            <a:spAutoFit/>
-          </a:bodyPr>
-          <a:lstStyle/>
-          <a:p>
-            <a:pPr algn="ctr">
-              <a:spcAft>
-                <a:spcPts val="600"/>
-              </a:spcAft>
-            </a:pPr>
-            <a:r>
-              <a:rPr sz="1600" b="0" i="0">
-                <a:solidFill>
-                  <a:srgbClr val="333333"/>
-                </a:solidFill>
-                <a:latin typeface="Calibri"/>
-              </a:rPr>
-              <a:t>Queda listo el backlog priorizado de VetCare repartido en sprints del semestre, con las primeras historias de usuario escritas con criterios de aceptacion.</a:t>
-            </a:r>
-          </a:p>
-          <a:p>
-            <a:pPr algn="ctr">
-              <a:spcAft>
-                <a:spcPts val="600"/>
-              </a:spcAft>
-            </a:pPr>
-            <a:r>
-              <a:rPr sz="1600" b="0" i="0">
-                <a:solidFill>
-                  <a:srgbClr val="333333"/>
-                </a:solidFill>
-                <a:latin typeface="Calibri"/>
-              </a:rPr>
-              <a:t>Entregable: Un tablero en draw.io o Excalidraw con el Product Backlog priorizado de VetCare y las columnas de flujo con limite de trabajo en curso, mas un documento con el plan de tres sprints (objetivo y entregable de diseño de cada uno), la Definicion de Terminado y tres historias de usuario con criterios en formato Dado/Cuando/Entonces.</a:t>
-            </a:r>
-          </a:p>
-          <a:p>
-            <a:pPr algn="ctr">
-              <a:spcAft>
-                <a:spcPts val="600"/>
-              </a:spcAft>
-            </a:pPr>
-            <a:r>
-              <a:rPr sz="1600" b="0" i="0">
-                <a:solidFill>
-                  <a:srgbClr val="333333"/>
-                </a:solidFill>
-                <a:latin typeface="Calibri"/>
-              </a:rPr>
-              <a:t>Siguiente clase: continuamos el hilo del PI</a:t>
-            </a:r>
-          </a:p>
-        </p:txBody>
-      </p:sp>
-      <p:sp>
-        <p:nvSpPr>
-          <p:cNvPr id="6" name="TextBox 5"/>
-          <p:cNvSpPr txBox="1"/>
-          <p:nvPr/>
-        </p:nvSpPr>
-        <p:spPr>
-          <a:xfrm>
-            <a:off x="457200" y="4754880"/>
-            <a:ext cx="11277295" cy="640080"/>
-          </a:xfrm>
-          <a:prstGeom prst="rect">
-            <a:avLst/>
-          </a:prstGeom>
-          <a:noFill/>
-        </p:spPr>
-        <p:txBody>
-          <a:bodyPr wrap="square">
-            <a:spAutoFit/>
-          </a:bodyPr>
-          <a:lstStyle/>
-          <a:p>
-            <a:pPr algn="ctr"/>
-            <a:r>
-              <a:rPr sz="2000" b="1" i="0">
-                <a:solidFill>
-                  <a:srgbClr val="269CCB"/>
-                </a:solidFill>
-                <a:latin typeface="Calibri"/>
-              </a:rPr>
-              <a:t>Teoria al servicio del proyecto</a:t>
             </a:r>
           </a:p>
         </p:txBody>
@@ -10637,7 +7124,7 @@
                 </a:solidFill>
                 <a:latin typeface="Calibri"/>
               </a:rPr>
-              <a:t>Encuadre y repaso del avance</a:t>
+              <a:t>Encuadre y repaso</a:t>
             </a:r>
           </a:p>
         </p:txBody>
@@ -10982,7 +7469,7 @@
                 </a:solidFill>
                 <a:latin typeface="Calibri"/>
               </a:rPr>
-              <a:t>Taller guiado = avance del PI</a:t>
+              <a:t>Practica (opcional, guia en la carpeta)</a:t>
             </a:r>
           </a:p>
         </p:txBody>
@@ -11097,7 +7584,7 @@
                 </a:solidFill>
                 <a:latin typeface="Calibri"/>
               </a:rPr>
-              <a:t>Criterios de exito y cierre</a:t>
+              <a:t>Sintesis y cierre</a:t>
             </a:r>
           </a:p>
         </p:txBody>
@@ -13124,4 +9611,324 @@
   </a:objectDefaults>
   <a:extraClrSchemeLst/>
 </a:theme>
+</file>
+
+<file path=ppt/theme/theme2.xml><?xml version="1.0" encoding="utf-8"?>
+<a:theme xmlns:a="http://schemas.openxmlformats.org/drawingml/2006/main" name="Office Theme">
+  <a:themeElements>
+    <a:clrScheme name="Office">
+      <a:dk1>
+        <a:sysClr val="windowText" lastClr="000000"/>
+      </a:dk1>
+      <a:lt1>
+        <a:sysClr val="window" lastClr="FFFFFF"/>
+      </a:lt1>
+      <a:dk2>
+        <a:srgbClr val="1F497D"/>
+      </a:dk2>
+      <a:lt2>
+        <a:srgbClr val="EEECE1"/>
+      </a:lt2>
+      <a:accent1>
+        <a:srgbClr val="4F81BD"/>
+      </a:accent1>
+      <a:accent2>
+        <a:srgbClr val="C0504D"/>
+      </a:accent2>
+      <a:accent3>
+        <a:srgbClr val="9BBB59"/>
+      </a:accent3>
+      <a:accent4>
+        <a:srgbClr val="8064A2"/>
+      </a:accent4>
+      <a:accent5>
+        <a:srgbClr val="4BACC6"/>
+      </a:accent5>
+      <a:accent6>
+        <a:srgbClr val="F79646"/>
+      </a:accent6>
+      <a:hlink>
+        <a:srgbClr val="0000FF"/>
+      </a:hlink>
+      <a:folHlink>
+        <a:srgbClr val="800080"/>
+      </a:folHlink>
+    </a:clrScheme>
+    <a:fontScheme name="Office">
+      <a:majorFont>
+        <a:latin typeface="Calibri"/>
+        <a:ea typeface=""/>
+        <a:cs typeface=""/>
+        <a:font script="Jpan" typeface="ＭＳ Ｐゴシック"/>
+        <a:font script="Hang" typeface="맑은 고딕"/>
+        <a:font script="Hans" typeface="宋体"/>
+        <a:font script="Hant" typeface="新細明體"/>
+        <a:font script="Arab" typeface="Times New Roman"/>
+        <a:font script="Hebr" typeface="Times New Roman"/>
+        <a:font script="Thai" typeface="Angsana New"/>
+        <a:font script="Ethi" typeface="Nyala"/>
+        <a:font script="Beng" typeface="Vrinda"/>
+        <a:font script="Gujr" typeface="Shruti"/>
+        <a:font script="Khmr" typeface="MoolBoran"/>
+        <a:font script="Knda" typeface="Tunga"/>
+        <a:font script="Guru" typeface="Raavi"/>
+        <a:font script="Cans" typeface="Euphemia"/>
+        <a:font script="Cher" typeface="Plantagenet Cherokee"/>
+        <a:font script="Yiii" typeface="Microsoft Yi Baiti"/>
+        <a:font script="Tibt" typeface="Microsoft Himalaya"/>
+        <a:font script="Thaa" typeface="MV Boli"/>
+        <a:font script="Deva" typeface="Mangal"/>
+        <a:font script="Telu" typeface="Gautami"/>
+        <a:font script="Taml" typeface="Latha"/>
+        <a:font script="Syrc" typeface="Estrangelo Edessa"/>
+        <a:font script="Orya" typeface="Kalinga"/>
+        <a:font script="Mlym" typeface="Kartika"/>
+        <a:font script="Laoo" typeface="DokChampa"/>
+        <a:font script="Sinh" typeface="Iskoola Pota"/>
+        <a:font script="Mong" typeface="Mongolian Baiti"/>
+        <a:font script="Viet" typeface="Times New Roman"/>
+        <a:font script="Uigh" typeface="Microsoft Uighur"/>
+        <a:font script="Geor" typeface="Sylfaen"/>
+      </a:majorFont>
+      <a:minorFont>
+        <a:latin typeface="Calibri"/>
+        <a:ea typeface=""/>
+        <a:cs typeface=""/>
+        <a:font script="Jpan" typeface="ＭＳ Ｐゴシック"/>
+        <a:font script="Hang" typeface="맑은 고딕"/>
+        <a:font script="Hans" typeface="宋体"/>
+        <a:font script="Hant" typeface="新細明體"/>
+        <a:font script="Arab" typeface="Arial"/>
+        <a:font script="Hebr" typeface="Arial"/>
+        <a:font script="Thai" typeface="Cordia New"/>
+        <a:font script="Ethi" typeface="Nyala"/>
+        <a:font script="Beng" typeface="Vrinda"/>
+        <a:font script="Gujr" typeface="Shruti"/>
+        <a:font script="Khmr" typeface="DaunPenh"/>
+        <a:font script="Knda" typeface="Tunga"/>
+        <a:font script="Guru" typeface="Raavi"/>
+        <a:font script="Cans" typeface="Euphemia"/>
+        <a:font script="Cher" typeface="Plantagenet Cherokee"/>
+        <a:font script="Yiii" typeface="Microsoft Yi Baiti"/>
+        <a:font script="Tibt" typeface="Microsoft Himalaya"/>
+        <a:font script="Thaa" typeface="MV Boli"/>
+        <a:font script="Deva" typeface="Mangal"/>
+        <a:font script="Telu" typeface="Gautami"/>
+        <a:font script="Taml" typeface="Latha"/>
+        <a:font script="Syrc" typeface="Estrangelo Edessa"/>
+        <a:font script="Orya" typeface="Kalinga"/>
+        <a:font script="Mlym" typeface="Kartika"/>
+        <a:font script="Laoo" typeface="DokChampa"/>
+        <a:font script="Sinh" typeface="Iskoola Pota"/>
+        <a:font script="Mong" typeface="Mongolian Baiti"/>
+        <a:font script="Viet" typeface="Arial"/>
+        <a:font script="Uigh" typeface="Microsoft Uighur"/>
+        <a:font script="Geor" typeface="Sylfaen"/>
+      </a:minorFont>
+    </a:fontScheme>
+    <a:fmtScheme name="Office">
+      <a:fillStyleLst>
+        <a:solidFill>
+          <a:schemeClr val="phClr"/>
+        </a:solidFill>
+        <a:gradFill rotWithShape="1">
+          <a:gsLst>
+            <a:gs pos="0">
+              <a:schemeClr val="phClr">
+                <a:tint val="50000"/>
+                <a:satMod val="300000"/>
+              </a:schemeClr>
+            </a:gs>
+            <a:gs pos="35000">
+              <a:schemeClr val="phClr">
+                <a:tint val="37000"/>
+                <a:satMod val="300000"/>
+              </a:schemeClr>
+            </a:gs>
+            <a:gs pos="100000">
+              <a:schemeClr val="phClr">
+                <a:tint val="15000"/>
+                <a:satMod val="350000"/>
+              </a:schemeClr>
+            </a:gs>
+          </a:gsLst>
+          <a:lin ang="16200000" scaled="1"/>
+        </a:gradFill>
+        <a:gradFill rotWithShape="1">
+          <a:gsLst>
+            <a:gs pos="0">
+              <a:schemeClr val="phClr">
+                <a:tint val="100000"/>
+                <a:shade val="100000"/>
+                <a:satMod val="130000"/>
+              </a:schemeClr>
+            </a:gs>
+            <a:gs pos="100000">
+              <a:schemeClr val="phClr">
+                <a:tint val="50000"/>
+                <a:shade val="100000"/>
+                <a:satMod val="350000"/>
+              </a:schemeClr>
+            </a:gs>
+          </a:gsLst>
+          <a:lin ang="16200000" scaled="0"/>
+        </a:gradFill>
+      </a:fillStyleLst>
+      <a:lnStyleLst>
+        <a:ln w="9525" cap="flat" cmpd="sng" algn="ctr">
+          <a:solidFill>
+            <a:schemeClr val="phClr">
+              <a:shade val="95000"/>
+              <a:satMod val="105000"/>
+            </a:schemeClr>
+          </a:solidFill>
+          <a:prstDash val="solid"/>
+        </a:ln>
+        <a:ln w="25400" cap="flat" cmpd="sng" algn="ctr">
+          <a:solidFill>
+            <a:schemeClr val="phClr"/>
+          </a:solidFill>
+          <a:prstDash val="solid"/>
+        </a:ln>
+        <a:ln w="38100" cap="flat" cmpd="sng" algn="ctr">
+          <a:solidFill>
+            <a:schemeClr val="phClr"/>
+          </a:solidFill>
+          <a:prstDash val="solid"/>
+        </a:ln>
+      </a:lnStyleLst>
+      <a:effectStyleLst>
+        <a:effectStyle>
+          <a:effectLst>
+            <a:outerShdw blurRad="40000" dist="20000" dir="5400000" rotWithShape="0">
+              <a:srgbClr val="000000">
+                <a:alpha val="38000"/>
+              </a:srgbClr>
+            </a:outerShdw>
+          </a:effectLst>
+        </a:effectStyle>
+        <a:effectStyle>
+          <a:effectLst>
+            <a:outerShdw blurRad="40000" dist="23000" dir="5400000" rotWithShape="0">
+              <a:srgbClr val="000000">
+                <a:alpha val="35000"/>
+              </a:srgbClr>
+            </a:outerShdw>
+          </a:effectLst>
+        </a:effectStyle>
+        <a:effectStyle>
+          <a:effectLst>
+            <a:outerShdw blurRad="40000" dist="23000" dir="5400000" rotWithShape="0">
+              <a:srgbClr val="000000">
+                <a:alpha val="35000"/>
+              </a:srgbClr>
+            </a:outerShdw>
+          </a:effectLst>
+          <a:scene3d>
+            <a:camera prst="orthographicFront">
+              <a:rot lat="0" lon="0" rev="0"/>
+            </a:camera>
+            <a:lightRig rig="threePt" dir="t">
+              <a:rot lat="0" lon="0" rev="1200000"/>
+            </a:lightRig>
+          </a:scene3d>
+          <a:sp3d>
+            <a:bevelT w="63500" h="25400"/>
+          </a:sp3d>
+        </a:effectStyle>
+      </a:effectStyleLst>
+      <a:bgFillStyleLst>
+        <a:solidFill>
+          <a:schemeClr val="phClr"/>
+        </a:solidFill>
+        <a:gradFill rotWithShape="1">
+          <a:gsLst>
+            <a:gs pos="0">
+              <a:schemeClr val="phClr">
+                <a:tint val="40000"/>
+                <a:satMod val="350000"/>
+              </a:schemeClr>
+            </a:gs>
+            <a:gs pos="40000">
+              <a:schemeClr val="phClr">
+                <a:tint val="45000"/>
+                <a:shade val="99000"/>
+                <a:satMod val="350000"/>
+              </a:schemeClr>
+            </a:gs>
+            <a:gs pos="100000">
+              <a:schemeClr val="phClr">
+                <a:shade val="20000"/>
+                <a:satMod val="255000"/>
+              </a:schemeClr>
+            </a:gs>
+          </a:gsLst>
+          <a:path path="circle">
+            <a:fillToRect l="50000" t="-80000" r="50000" b="180000"/>
+          </a:path>
+        </a:gradFill>
+        <a:gradFill rotWithShape="1">
+          <a:gsLst>
+            <a:gs pos="0">
+              <a:schemeClr val="phClr">
+                <a:tint val="80000"/>
+                <a:satMod val="300000"/>
+              </a:schemeClr>
+            </a:gs>
+            <a:gs pos="100000">
+              <a:schemeClr val="phClr">
+                <a:shade val="30000"/>
+                <a:satMod val="200000"/>
+              </a:schemeClr>
+            </a:gs>
+          </a:gsLst>
+          <a:path path="circle">
+            <a:fillToRect l="50000" t="50000" r="50000" b="50000"/>
+          </a:path>
+        </a:gradFill>
+      </a:bgFillStyleLst>
+    </a:fmtScheme>
+  </a:themeElements>
+  <a:objectDefaults>
+    <a:spDef>
+      <a:spPr/>
+      <a:bodyPr/>
+      <a:lstStyle/>
+      <a:style>
+        <a:lnRef idx="1">
+          <a:schemeClr val="accent1"/>
+        </a:lnRef>
+        <a:fillRef idx="3">
+          <a:schemeClr val="accent1"/>
+        </a:fillRef>
+        <a:effectRef idx="2">
+          <a:schemeClr val="accent1"/>
+        </a:effectRef>
+        <a:fontRef idx="minor">
+          <a:schemeClr val="lt1"/>
+        </a:fontRef>
+      </a:style>
+    </a:spDef>
+    <a:lnDef>
+      <a:spPr/>
+      <a:bodyPr/>
+      <a:lstStyle/>
+      <a:style>
+        <a:lnRef idx="2">
+          <a:schemeClr val="accent1"/>
+        </a:lnRef>
+        <a:fillRef idx="0">
+          <a:schemeClr val="accent1"/>
+        </a:fillRef>
+        <a:effectRef idx="1">
+          <a:schemeClr val="accent1"/>
+        </a:effectRef>
+        <a:fontRef idx="minor">
+          <a:schemeClr val="tx1"/>
+        </a:fontRef>
+      </a:style>
+    </a:lnDef>
+  </a:objectDefaults>
+  <a:extraClrSchemeLst/>
+</a:theme>
 </file>
--- a/Seminario de Sistemas/Clases/Clase 4 - Metodologias agiles/Presentacion.pptx
+++ b/Seminario de Sistemas/Clases/Clase 4 - Metodologias agiles/Presentacion.pptx
@@ -585,7 +585,7 @@
           <a:lstStyle/>
           <a:p>
             <a:r>
-              <a:t>En VetCare el docente actua como vocero de Huellitas en el rol de Product Owner, y cada estudiante -o cada equipo, si el docente lo autoriza- hace de equipo de desarrollo que se compromete con un objetivo de sprint.</a:t>
+              <a:t>En el sistema de la clinica el docente actua como vocero de la clinica en el rol de Product Owner, y cada estudiante -o cada equipo, si el docente lo autoriza- hace de equipo de desarrollo que se compromete con un objetivo de sprint.</a:t>
             </a:r>
           </a:p>
         </p:txBody>
@@ -655,7 +655,7 @@
           <a:lstStyle/>
           <a:p>
             <a:r>
-              <a:t>En VetCare el tablero seria Por hacer / Modelando / En revision del cliente / Aprobado, y la politica de la ultima columna podria ser 'solo pasa a Aprobado si tiene diagrama, mockup y visto bueno de la clinica'.</a:t>
+              <a:t>En el sistema de la clinica el tablero seria Por hacer / Modelando / En revision del cliente / Aprobado, y la politica de la ultima columna podria ser 'solo pasa a Aprobado si tiene diagrama, mockup y visto bueno de la clinica'.</a:t>
             </a:r>
           </a:p>
         </p:txBody>
@@ -4494,7 +4494,7 @@
                 </a:solidFill>
                 <a:latin typeface="Calibri"/>
               </a:rPr>
-              <a:t>  title Tres sprints de diseno de VetCare</a:t>
+              <a:t>  title Tres sprints de diseno del sistema de la clinica</a:t>
             </a:r>
           </a:p>
           <a:p>
@@ -5550,7 +5550,7 @@
                 </a:solidFill>
                 <a:latin typeface="Calibri"/>
               </a:rPr>
-              <a:t>Historia de usuario de VetCare con criterios de aceptacion</a:t>
+              <a:t>Historia de usuario del sistema de la clinica con criterios de aceptacion</a:t>
             </a:r>
           </a:p>
         </p:txBody>
@@ -5725,7 +5725,7 @@
                 </a:solidFill>
                 <a:latin typeface="Calibri"/>
               </a:rPr>
-              <a:t>  Como veterinaria de la clinica Huellitas</a:t>
+              <a:t>  Como veterinaria de la clinica</a:t>
             </a:r>
           </a:p>
           <a:p>
@@ -6224,7 +6224,7 @@
                 </a:solidFill>
                 <a:latin typeface="Calibri"/>
               </a:rPr>
-              <a:t> El docente arma en pantalla el tablero de VetCare, arrastra una tarjeta de 'Por hacer' a 'En revision del cliente' y muestra que pasa cuando se rompe el limite de trabajo en curso.</a:t>
+              <a:t> El docente arma en pantalla el tablero del sistema de la clinica, arrastra una tarjeta de 'Por hacer' a 'En revision del cliente' y muestra que pasa cuando se rompe el limite de trabajo en curso.</a:t>
             </a:r>
           </a:p>
           <a:p>
@@ -6240,7 +6240,7 @@
                 </a:solidFill>
                 <a:latin typeface="Calibri"/>
               </a:rPr>
-              <a:t>–   Mismo dominio VetCare — no otro ejemplo. Aqui se diseña, no se programa.</a:t>
+              <a:t>–   Mismo dominio: la clinica veterinaria — no otro ejemplo. Aqui se diseña, no se programa.</a:t>
             </a:r>
           </a:p>
         </p:txBody>
@@ -6785,7 +6785,7 @@
                 </a:solidFill>
                 <a:latin typeface="Calibri"/>
               </a:rPr>
-              <a:t>–   Ejemplo de toda la clase: VetCare, el sistema de la clinica «Huellitas».</a:t>
+              <a:t>–   Ejemplo de toda la clase: el sistema de una clinica veterinaria.</a:t>
             </a:r>
           </a:p>
         </p:txBody>
@@ -7354,7 +7354,7 @@
                 </a:solidFill>
                 <a:latin typeface="Calibri"/>
               </a:rPr>
-              <a:t>Demo en vivo sobre VetCare</a:t>
+              <a:t>Demo en vivo sobre la clinica</a:t>
             </a:r>
           </a:p>
         </p:txBody>
@@ -7921,7 +7921,7 @@
                 </a:solidFill>
                 <a:latin typeface="Calibri"/>
               </a:rPr>
-              <a:t>–   En VetCare esto se traduce en algo muy concreto: es mejor mostrarle a Huellitas un mockup imperfecto de la ficha en la semana tres que un documento de ochenta paginas en la semana quince.</a:t>
+              <a:t>–   En el sistema de la clinica esto se traduce en algo muy concreto: es mejor mostrarle a la clinica un mockup imperfecto de la ficha en la semana tres que un documento de ochenta paginas en la semana quince.</a:t>
             </a:r>
           </a:p>
         </p:txBody>
@@ -8741,7 +8741,7 @@
                 </a:solidFill>
                 <a:latin typeface="Calibri"/>
               </a:rPr>
-              <a:t>–   En VetCare el incremento 1 es el mockup de la ficha del paciente; cuando la veterinaria lo mira y dice 'me falta el campo de alergias y la foto de la mascota', y el equipo produce la version 2 de ese mismo mockup, eso es iteracion.</a:t>
+              <a:t>–   En el sistema de la clinica el incremento 1 es el mockup de la ficha del paciente; cuando la veterinaria lo mira y dice 'me falta el campo de alergias y la foto de la mascota', y el equipo produce la version 2 de ese mismo mockup, eso es iteracion.</a:t>
             </a:r>
           </a:p>
         </p:txBody>
@@ -8977,7 +8977,7 @@
                 </a:solidFill>
                 <a:latin typeface="Calibri"/>
               </a:rPr>
-              <a:t>–   Entregar 'todas las tablas de la base de datos' no es un incremento util para Huellitas; entregar 'registrar y consultar una ficha completa de principio a fin' si lo es.</a:t>
+              <a:t>–   Entregar 'todas las tablas de la base de datos' no es un incremento util para la clinica; entregar 'registrar y consultar una ficha completa de principio a fin' si lo es.</a:t>
             </a:r>
           </a:p>
         </p:txBody>
@@ -9229,7 +9229,7 @@
                 </a:solidFill>
                 <a:latin typeface="Calibri"/>
               </a:rPr>
-              <a:t>–   Para nuestro Proyecto Integrador esto es central: en Seminario de Sistemas el entregable ES documentacion de diseño, y aun asi el trabajo puede ser perfectamente agil, porque se produce por incrementos, se revisa con el cliente y se corrige.</a:t>
+              <a:t>–   Para este curso esto es central: en Seminario de Sistemas el producto ES documentacion de diseño, y aun asi el trabajo puede ser perfectamente agil, porque se produce por incrementos, se revisa con el cliente y se corrige.</a:t>
             </a:r>
           </a:p>
           <a:p>

--- a/Seminario de Sistemas/Clases/Clase 4 - Metodologias agiles/Presentacion.pptx
+++ b/Seminario de Sistemas/Clases/Clase 4 - Metodologias agiles/Presentacion.pptx
@@ -585,7 +585,7 @@
           <a:lstStyle/>
           <a:p>
             <a:r>
-              <a:t>En el sistema de la clinica el docente actua como vocero de la clinica en el rol de Product Owner, y cada estudiante -o cada equipo, si el docente lo autoriza- hace de equipo de desarrollo que se compromete con un objetivo de sprint.</a:t>
+              <a:t>En la clinica el docente actua como vocero de la clinica en el rol de Product Owner, y cada estudiante -o cada equipo, si el docente lo autoriza- hace de equipo de desarrollo que se compromete con un objetivo de sprint.</a:t>
             </a:r>
           </a:p>
         </p:txBody>
@@ -655,7 +655,7 @@
           <a:lstStyle/>
           <a:p>
             <a:r>
-              <a:t>En el sistema de la clinica el tablero seria Por hacer / Modelando / En revision del cliente / Aprobado, y la politica de la ultima columna podria ser 'solo pasa a Aprobado si tiene diagrama, mockup y visto bueno de la clinica'.</a:t>
+              <a:t>En la clinica el tablero seria Por hacer / Modelando / En revision del cliente / Aprobado, y la politica de la ultima columna podria ser 'solo pasa a Aprobado si tiene diagrama, mockup y visto bueno de la clinica'.</a:t>
             </a:r>
           </a:p>
         </p:txBody>
@@ -4494,7 +4494,7 @@
                 </a:solidFill>
                 <a:latin typeface="Calibri"/>
               </a:rPr>
-              <a:t>  title Tres sprints de diseno del sistema de la clinica</a:t>
+              <a:t>  title Tres sprints de diseno de la clinica</a:t>
             </a:r>
           </a:p>
           <a:p>
@@ -5550,7 +5550,7 @@
                 </a:solidFill>
                 <a:latin typeface="Calibri"/>
               </a:rPr>
-              <a:t>Historia de usuario del sistema de la clinica con criterios de aceptacion</a:t>
+              <a:t>Historia de usuario de la clinica con criterios de aceptacion</a:t>
             </a:r>
           </a:p>
         </p:txBody>
@@ -6224,7 +6224,7 @@
                 </a:solidFill>
                 <a:latin typeface="Calibri"/>
               </a:rPr>
-              <a:t> El docente arma en pantalla el tablero del sistema de la clinica, arrastra una tarjeta de 'Por hacer' a 'En revision del cliente' y muestra que pasa cuando se rompe el limite de trabajo en curso.</a:t>
+              <a:t> Se arma en pantalla el tablero de la clinica, arrastra una tarjeta de 'Por hacer' a 'En revision del cliente' y muestra que pasa cuando se rompe el limite de trabajo en curso.</a:t>
             </a:r>
           </a:p>
           <a:p>
@@ -7921,7 +7921,7 @@
                 </a:solidFill>
                 <a:latin typeface="Calibri"/>
               </a:rPr>
-              <a:t>–   En el sistema de la clinica esto se traduce en algo muy concreto: es mejor mostrarle a la clinica un mockup imperfecto de la ficha en la semana tres que un documento de ochenta paginas en la semana quince.</a:t>
+              <a:t>–   En la clinica esto se traduce en algo muy concreto: es mejor mostrarle a la clinica un mockup imperfecto de la ficha en la semana tres que un documento de ochenta paginas en la semana quince.</a:t>
             </a:r>
           </a:p>
         </p:txBody>
@@ -8741,7 +8741,7 @@
                 </a:solidFill>
                 <a:latin typeface="Calibri"/>
               </a:rPr>
-              <a:t>–   En el sistema de la clinica el incremento 1 es el mockup de la ficha del paciente; cuando la veterinaria lo mira y dice 'me falta el campo de alergias y la foto de la mascota', y el equipo produce la version 2 de ese mismo mockup, eso es iteracion.</a:t>
+              <a:t>–   En la clinica el incremento 1 es el mockup de la ficha del paciente; cuando la veterinaria lo mira y dice 'me falta el campo de alergias y la foto de la mascota', y el equipo produce la version 2 de ese mismo mockup, eso es iteracion.</a:t>
             </a:r>
           </a:p>
         </p:txBody>

--- a/Seminario de Sistemas/Clases/Clase 4 - Metodologias agiles/Presentacion.pptx
+++ b/Seminario de Sistemas/Clases/Clase 4 - Metodologias agiles/Presentacion.pptx
@@ -18,7 +18,6 @@
     <p:sldId id="266" r:id="rId18"/>
     <p:sldId id="267" r:id="rId19"/>
     <p:sldId id="268" r:id="rId20"/>
-    <p:sldId id="269" r:id="rId21"/>
   </p:sldIdLst>
   <p:sldSz cx="12191695" cy="6858000" type="screen4x3"/>
   <p:notesSz cx="6858000" cy="9144000"/>
@@ -515,6 +514,48 @@
           <a:lstStyle/>
           <a:p>
             <a:r>
+              <a:t>DESARROLLO (para explicarlo, no se proyecta):</a:t>
+            </a:r>
+          </a:p>
+          <a:p/>
+          <a:p>
+            <a:r>
+              <a:t>El manifiesto agil se firmo en 2001 por diecisiete personas cansadas de proyectos que entregaban documentos perfectos y sistemas inservibles.</a:t>
+            </a:r>
+          </a:p>
+          <a:p/>
+          <a:p>
+            <a:r>
+              <a:t>Tiene cuatro valores y la clave esta en la palabra que los une: 'sobre'.</a:t>
+            </a:r>
+          </a:p>
+          <a:p/>
+          <a:p>
+            <a:r>
+              <a:t>Dice sobre, no 'en vez de': lo de la derecha sigue teniendo valor, solo que lo de la izquierda tiene mas.</a:t>
+            </a:r>
+          </a:p>
+          <a:p/>
+          <a:p>
+            <a:r>
+              <a:t>Ademas hay doce principios, y tres son muy utiles aqui: entregar valor pronto y con frecuencia, aceptar el cambio incluso tarde, y mantener un ritmo sostenible.</a:t>
+            </a:r>
+          </a:p>
+          <a:p/>
+          <a:p>
+            <a:r>
+              <a:t>En la clinica esto se traduce en algo muy concreto: es mejor mostrarle a la clinica un mockup imperfecto de la ficha en la semana tres que un documento de ochenta paginas en la semana quince.</a:t>
+            </a:r>
+          </a:p>
+          <a:p/>
+          <a:p>
+            <a:r>
+              <a:t>NOTAS:</a:t>
+            </a:r>
+          </a:p>
+          <a:p/>
+          <a:p>
+            <a:r>
               <a:t>Individuos e interacciones SOBRE procesos y herramientas; software funcionando SOBRE documentacion exhaustiva; colaboracion con el cliente SOBRE negociacion contractual; respuesta ante el cambio SOBRE seguir un plan.</a:t>
             </a:r>
           </a:p>
@@ -585,6 +626,54 @@
           <a:lstStyle/>
           <a:p>
             <a:r>
+              <a:t>DESARROLLO (para explicarlo, no se proyecta):</a:t>
+            </a:r>
+          </a:p>
+          <a:p/>
+          <a:p>
+            <a:r>
+              <a:t>Scrum es un marco de trabajo, no una metodologia completa: define lo minimo y deja que cada equipo llene el resto.</a:t>
+            </a:r>
+          </a:p>
+          <a:p/>
+          <a:p>
+            <a:r>
+              <a:t>Tiene tres roles: el Product Owner, que decide QUE se hace y en que orden, y es el dueño del Product Backlog; el Scrum Master, que facilita, protege al equipo y quita impedimentos</a:t>
+            </a:r>
+          </a:p>
+          <a:p/>
+          <a:p>
+            <a:r>
+              <a:t>Y que no es el jefe; y el equipo de desarrollo, que decide COMO hacerlo y se autoorganiza.</a:t>
+            </a:r>
+          </a:p>
+          <a:p/>
+          <a:p>
+            <a:r>
+              <a:t>Tiene cinco eventos: el Sprint, que es el contenedor de duracion fija (una a cuatro semanas), la Planificacion, la Reunion diaria de quince minutos para sincronizarse</a:t>
+            </a:r>
+          </a:p>
+          <a:p/>
+          <a:p>
+            <a:r>
+              <a:t>La Revision donde se le muestra el incremento al cliente, y la Retrospectiva donde se mejora la forma de trabajar.</a:t>
+            </a:r>
+          </a:p>
+          <a:p/>
+          <a:p>
+            <a:r>
+              <a:t>Y tiene tres artefactos: Product Backlog, Sprint Backlog e Incremento, este ultimo gobernado por la Definicion de Terminado.</a:t>
+            </a:r>
+          </a:p>
+          <a:p/>
+          <a:p>
+            <a:r>
+              <a:t>NOTAS:</a:t>
+            </a:r>
+          </a:p>
+          <a:p/>
+          <a:p>
+            <a:r>
               <a:t>En la clinica el docente actua como vocero de la clinica en el rol de Product Owner, y cada estudiante -o cada equipo, si el docente lo autoriza- hace de equipo de desarrollo que se compromete con un objetivo de sprint.</a:t>
             </a:r>
           </a:p>
@@ -655,6 +744,42 @@
           <a:lstStyle/>
           <a:p>
             <a:r>
+              <a:t>DESARROLLO (para explicarlo, no se proyecta):</a:t>
+            </a:r>
+          </a:p>
+          <a:p/>
+          <a:p>
+            <a:r>
+              <a:t>Kanban viene de otra tradicion y su promesa es distinta: no impone iteraciones ni roles, sino que hace visible el flujo del trabajo.</a:t>
+            </a:r>
+          </a:p>
+          <a:p/>
+          <a:p>
+            <a:r>
+              <a:t>Sus practicas centrales son visualizar el trabajo en un tablero, limitar el trabajo en curso, gestionar el flujo detectando donde se acumulan las tarjetas, hacer explicitas las politicas de cada columna y mejorar de forma continua.</a:t>
+            </a:r>
+          </a:p>
+          <a:p/>
+          <a:p>
+            <a:r>
+              <a:t>El limite de trabajo en curso es la parte que mas cuesta y la que mas sirve: si el equipo pone limite dos en la columna 'Modelando', nadie puede empezar una tercera tarea sin terminar alguna.</a:t>
+            </a:r>
+          </a:p>
+          <a:p/>
+          <a:p>
+            <a:r>
+              <a:t>El estudiante que abre cinco diagramas al tiempo y no termina ninguno es exactamente el problema que el limite de trabajo en curso resuelve.</a:t>
+            </a:r>
+          </a:p>
+          <a:p/>
+          <a:p>
+            <a:r>
+              <a:t>NOTAS:</a:t>
+            </a:r>
+          </a:p>
+          <a:p/>
+          <a:p>
+            <a:r>
               <a:t>En la clinica el tablero seria Por hacer / Modelando / En revision del cliente / Aprobado, y la politica de la ultima columna podria ser 'solo pasa a Aprobado si tiene diagrama, mockup y visto bueno de la clinica'.</a:t>
             </a:r>
           </a:p>
@@ -725,6 +850,48 @@
           <a:lstStyle/>
           <a:p>
             <a:r>
+              <a:t>DESARROLLO (para explicarlo, no se proyecta):</a:t>
+            </a:r>
+          </a:p>
+          <a:p/>
+          <a:p>
+            <a:r>
+              <a:t>Hay dos palabras que se usan como sinonimos y significan cosas distintas: iteracion e incremento.</a:t>
+            </a:r>
+          </a:p>
+          <a:p/>
+          <a:p>
+            <a:r>
+              <a:t>Incremento es agregar un pedazo nuevo y utilizable al sistema; iteracion es volver sobre algo que ya existe y mejorarlo con base en la retroalimentacion.</a:t>
+            </a:r>
+          </a:p>
+          <a:p/>
+          <a:p>
+            <a:r>
+              <a:t>En la clinica el incremento 1 es el mockup de la ficha del paciente; cuando la veterinaria lo mira y dice 'me falta el campo de alergias y la foto de la mascota', y el equipo produce la version 2 de ese mismo mockup, eso es iteracion.</a:t>
+            </a:r>
+          </a:p>
+          <a:p/>
+          <a:p>
+            <a:r>
+              <a:t>Y aqui aparece una regla practica que salva proyectos: cada entrega debe ser una rebanada vertical, algo que el cliente pueda ver y opinar, no una capa horizontal invisible.</a:t>
+            </a:r>
+          </a:p>
+          <a:p/>
+          <a:p>
+            <a:r>
+              <a:t>Entregar 'todas las tablas de la base de datos' no es un incremento util para la clinica; entregar 'registrar y consultar una ficha completa de principio a fin' si lo es.</a:t>
+            </a:r>
+          </a:p>
+          <a:p/>
+          <a:p>
+            <a:r>
+              <a:t>NOTAS:</a:t>
+            </a:r>
+          </a:p>
+          <a:p/>
+          <a:p>
+            <a:r>
               <a:t>Agil hace las dos cosas al mismo tiempo.</a:t>
             </a:r>
           </a:p>
@@ -795,7 +962,131 @@
           <a:lstStyle/>
           <a:p>
             <a:r>
+              <a:t>DESARROLLO (para explicarlo, no se proyecta):</a:t>
+            </a:r>
+          </a:p>
+          <a:p/>
+          <a:p>
+            <a:r>
+              <a:t>Agil no significa trabajar sin documentacion, y este es el malentendido que mas daño hace.</a:t>
+            </a:r>
+          </a:p>
+          <a:p/>
+          <a:p>
+            <a:r>
+              <a:t>El manifiesto dice software funcionando sobre documentacion exhaustiva: lo que se rechaza es el documento inflado que nadie lee, no el documento util.</a:t>
+            </a:r>
+          </a:p>
+          <a:p/>
+          <a:p>
+            <a:r>
+              <a:t>Para este curso esto es central: en Seminario de Sistemas el producto ES documentacion de diseño, y aun asi el trabajo puede ser perfectamente agil, porque se produce por incrementos, se revisa con el cliente y se corrige.</a:t>
+            </a:r>
+          </a:p>
+          <a:p/>
+          <a:p>
+            <a:r>
+              <a:t>El estudiante que solo cursa esta materia trabaja con sprints igual que los demas: sus incrementos son mockups, casos de uso y diccionario de datos, y cierra con un prototipo navegable que se puede recorrer y criticar.</a:t>
+            </a:r>
+          </a:p>
+          <a:p/>
+          <a:p>
+            <a:r>
+              <a:t>NOTAS:</a:t>
+            </a:r>
+          </a:p>
+          <a:p/>
+          <a:p>
+            <a:r>
               <a:t>Un equipo agil documenta historias de usuario con criterios de aceptacion, la Definicion de Terminado, las decisiones de arquitectura, el diccionario de datos y los diagramas que hagan falta, pero los escribe justo a tiempo y los mantiene vivos.</a:t>
+            </a:r>
+          </a:p>
+        </p:txBody>
+      </p:sp>
+      <p:sp>
+        <p:nvSpPr>
+          <p:cNvPr id="4" name="Slide Number Placeholder 3"/>
+          <p:cNvSpPr>
+            <a:spLocks noGrp="1"/>
+          </p:cNvSpPr>
+          <p:nvPr>
+            <p:ph type="sldNum" idx="5" sz="quarter"/>
+          </p:nvPr>
+        </p:nvSpPr>
+        <p:spPr/>
+      </p:sp>
+    </p:spTree>
+  </p:cSld>
+  <p:clrMapOvr>
+    <a:masterClrMapping/>
+  </p:clrMapOvr>
+</p:notes>
+</file>
+
+<file path=ppt/notesSlides/notesSlide6.xml><?xml version="1.0" encoding="utf-8"?>
+<p:notes xmlns:a="http://schemas.openxmlformats.org/drawingml/2006/main" xmlns:p="http://schemas.openxmlformats.org/presentationml/2006/main" xmlns:r="http://schemas.openxmlformats.org/officeDocument/2006/relationships">
+  <p:cSld>
+    <p:spTree>
+      <p:nvGrpSpPr>
+        <p:cNvPr id="1" name=""/>
+        <p:cNvGrpSpPr/>
+        <p:nvPr/>
+      </p:nvGrpSpPr>
+      <p:grpSpPr>
+        <a:xfrm>
+          <a:off x="0" y="0"/>
+          <a:ext cx="0" cy="0"/>
+          <a:chOff x="0" y="0"/>
+          <a:chExt cx="0" cy="0"/>
+        </a:xfrm>
+      </p:grpSpPr>
+      <p:sp>
+        <p:nvSpPr>
+          <p:cNvPr id="2" name="Slide Image Placeholder 1"/>
+          <p:cNvSpPr>
+            <a:spLocks noGrp="1"/>
+          </p:cNvSpPr>
+          <p:nvPr>
+            <p:ph type="sldImg" idx="2"/>
+          </p:nvPr>
+        </p:nvSpPr>
+        <p:spPr/>
+      </p:sp>
+      <p:sp>
+        <p:nvSpPr>
+          <p:cNvPr id="3" name="Notes Placeholder 2"/>
+          <p:cNvSpPr>
+            <a:spLocks noGrp="1"/>
+          </p:cNvSpPr>
+          <p:nvPr>
+            <p:ph type="body" idx="3" sz="quarter"/>
+          </p:nvPr>
+        </p:nvSpPr>
+        <p:spPr/>
+        <p:txBody>
+          <a:bodyPr/>
+          <a:lstStyle/>
+          <a:p>
+            <a:r>
+              <a:t>TEXTO COMPLETO DE LA LÁMINA (se proyecta resumido):</a:t>
+            </a:r>
+          </a:p>
+          <a:p/>
+          <a:p>
+            <a:r>
+              <a:t>Herramienta: draw.io · Excalidraw · Google Docs</a:t>
+            </a:r>
+          </a:p>
+          <a:p/>
+          <a:p>
+            <a:r>
+              <a:t>Demo: Se arma en pantalla el tablero de la clinica, arrastra una tarjeta de 'Por hacer' a 'En revision del cliente' y muestra que pasa cuando se rompe el limite de trabajo en curso.</a:t>
+            </a:r>
+          </a:p>
+          <a:p/>
+          <a:p>
+            <a:r>
+              <a:t>Mismo dominio: la clinica veterinaria — no otro ejemplo. Aqui se diseña, no se programa.</a:t>
             </a:r>
           </a:p>
         </p:txBody>
@@ -4319,7 +4610,7 @@
                 </a:solidFill>
                 <a:latin typeface="Calibri"/>
               </a:rPr>
-              <a:t>El plan de sprints en Mermaid (gantt)</a:t>
+              <a:t>Historia de usuario con criterios de aceptacion</a:t>
             </a:r>
           </a:p>
         </p:txBody>
@@ -4333,15 +4624,15 @@
         <p:spPr>
           <a:xfrm>
             <a:off x="457200" y="1261872"/>
-            <a:ext cx="11277295" cy="5093208"/>
+            <a:ext cx="11277295" cy="4745196"/>
           </a:xfrm>
           <a:prstGeom prst="roundRect">
             <a:avLst>
-              <a:gd name="adj" fmla="val 12000"/>
+              <a:gd name="adj" fmla="val 4000"/>
             </a:avLst>
           </a:prstGeom>
           <a:solidFill>
-            <a:srgbClr val="1E2A38"/>
+            <a:srgbClr val="1E1E1E"/>
           </a:solidFill>
           <a:ln>
             <a:noFill/>
@@ -4378,13 +4669,13 @@
         <p:spPr>
           <a:xfrm>
             <a:off x="457200" y="1261872"/>
-            <a:ext cx="11277295" cy="320040"/>
+            <a:ext cx="11277295" cy="365760"/>
           </a:xfrm>
           <a:prstGeom prst="rect">
             <a:avLst/>
           </a:prstGeom>
           <a:solidFill>
-            <a:srgbClr val="095292"/>
+            <a:srgbClr val="2D2D30"/>
           </a:solidFill>
           <a:ln>
             <a:noFill/>
@@ -4414,14 +4705,143 @@
       </p:sp>
       <p:sp>
         <p:nvSpPr>
-          <p:cNvPr id="7" name="TextBox 6"/>
+          <p:cNvPr id="7" name="Oval 6"/>
+          <p:cNvSpPr/>
+          <p:nvPr/>
+        </p:nvSpPr>
+        <p:spPr>
+          <a:xfrm>
+            <a:off x="658368" y="1380743"/>
+            <a:ext cx="128016" cy="128016"/>
+          </a:xfrm>
+          <a:prstGeom prst="ellipse">
+            <a:avLst/>
+          </a:prstGeom>
+          <a:solidFill>
+            <a:srgbClr val="FF5F56"/>
+          </a:solidFill>
+          <a:ln>
+            <a:noFill/>
+          </a:ln>
+        </p:spPr>
+        <p:style>
+          <a:lnRef idx="1">
+            <a:schemeClr val="accent1"/>
+          </a:lnRef>
+          <a:fillRef idx="3">
+            <a:schemeClr val="accent1"/>
+          </a:fillRef>
+          <a:effectRef idx="2">
+            <a:schemeClr val="accent1"/>
+          </a:effectRef>
+          <a:fontRef idx="minor">
+            <a:schemeClr val="lt1"/>
+          </a:fontRef>
+        </p:style>
+        <p:txBody>
+          <a:bodyPr rtlCol="0" anchor="ctr"/>
+          <a:lstStyle/>
+          <a:p>
+            <a:pPr algn="ctr"/>
+          </a:p>
+        </p:txBody>
+      </p:sp>
+      <p:sp>
+        <p:nvSpPr>
+          <p:cNvPr id="8" name="Oval 7"/>
+          <p:cNvSpPr/>
+          <p:nvPr/>
+        </p:nvSpPr>
+        <p:spPr>
+          <a:xfrm>
+            <a:off x="877824" y="1380743"/>
+            <a:ext cx="128016" cy="128016"/>
+          </a:xfrm>
+          <a:prstGeom prst="ellipse">
+            <a:avLst/>
+          </a:prstGeom>
+          <a:solidFill>
+            <a:srgbClr val="FFBD2E"/>
+          </a:solidFill>
+          <a:ln>
+            <a:noFill/>
+          </a:ln>
+        </p:spPr>
+        <p:style>
+          <a:lnRef idx="1">
+            <a:schemeClr val="accent1"/>
+          </a:lnRef>
+          <a:fillRef idx="3">
+            <a:schemeClr val="accent1"/>
+          </a:fillRef>
+          <a:effectRef idx="2">
+            <a:schemeClr val="accent1"/>
+          </a:effectRef>
+          <a:fontRef idx="minor">
+            <a:schemeClr val="lt1"/>
+          </a:fontRef>
+        </p:style>
+        <p:txBody>
+          <a:bodyPr rtlCol="0" anchor="ctr"/>
+          <a:lstStyle/>
+          <a:p>
+            <a:pPr algn="ctr"/>
+          </a:p>
+        </p:txBody>
+      </p:sp>
+      <p:sp>
+        <p:nvSpPr>
+          <p:cNvPr id="9" name="Oval 8"/>
+          <p:cNvSpPr/>
+          <p:nvPr/>
+        </p:nvSpPr>
+        <p:spPr>
+          <a:xfrm>
+            <a:off x="1097280" y="1380743"/>
+            <a:ext cx="128016" cy="128016"/>
+          </a:xfrm>
+          <a:prstGeom prst="ellipse">
+            <a:avLst/>
+          </a:prstGeom>
+          <a:solidFill>
+            <a:srgbClr val="27C93F"/>
+          </a:solidFill>
+          <a:ln>
+            <a:noFill/>
+          </a:ln>
+        </p:spPr>
+        <p:style>
+          <a:lnRef idx="1">
+            <a:schemeClr val="accent1"/>
+          </a:lnRef>
+          <a:fillRef idx="3">
+            <a:schemeClr val="accent1"/>
+          </a:fillRef>
+          <a:effectRef idx="2">
+            <a:schemeClr val="accent1"/>
+          </a:effectRef>
+          <a:fontRef idx="minor">
+            <a:schemeClr val="lt1"/>
+          </a:fontRef>
+        </p:style>
+        <p:txBody>
+          <a:bodyPr rtlCol="0" anchor="ctr"/>
+          <a:lstStyle/>
+          <a:p>
+            <a:pPr algn="ctr"/>
+          </a:p>
+        </p:txBody>
+      </p:sp>
+      <p:sp>
+        <p:nvSpPr>
+          <p:cNvPr id="10" name="TextBox 9"/>
           <p:cNvSpPr txBox="1"/>
           <p:nvPr/>
         </p:nvSpPr>
         <p:spPr>
           <a:xfrm>
-            <a:off x="685800" y="1307592"/>
-            <a:ext cx="10820095" cy="256032"/>
+            <a:off x="1371600" y="1298448"/>
+            <a:ext cx="10180015" cy="292608"/>
           </a:xfrm>
           <a:prstGeom prst="rect">
             <a:avLst/>
@@ -4432,28 +4852,29 @@
           <a:bodyPr wrap="square" anchor="ctr"/>
           <a:lstStyle/>
           <a:p>
-            <a:r>
-              <a:rPr sz="1000" b="1" i="0">
-                <a:solidFill>
-                  <a:srgbClr val="269CCB"/>
+            <a:pPr algn="r"/>
+            <a:r>
+              <a:rPr sz="1100" b="1" i="0">
+                <a:solidFill>
+                  <a:srgbClr val="BBBBBB"/>
                 </a:solidFill>
                 <a:latin typeface="Calibri"/>
               </a:rPr>
-              <a:t>● ● ●</a:t>
-            </a:r>
-          </a:p>
-        </p:txBody>
-      </p:sp>
-      <p:sp>
-        <p:nvSpPr>
-          <p:cNvPr id="8" name="TextBox 7"/>
+              <a:t>Plantilla</a:t>
+            </a:r>
+          </a:p>
+        </p:txBody>
+      </p:sp>
+      <p:sp>
+        <p:nvSpPr>
+          <p:cNvPr id="11" name="TextBox 10"/>
           <p:cNvSpPr txBox="1"/>
           <p:nvPr/>
         </p:nvSpPr>
         <p:spPr>
           <a:xfrm>
-            <a:off x="777240" y="1719072"/>
-            <a:ext cx="10637215" cy="4453128"/>
+            <a:off x="685800" y="1719072"/>
+            <a:ext cx="502920" cy="4150836"/>
           </a:xfrm>
           <a:prstGeom prst="rect">
             <a:avLst/>
@@ -4466,81 +4887,868 @@
           </a:bodyPr>
           <a:lstStyle/>
           <a:p>
+            <a:pPr algn="r">
+              <a:spcAft>
+                <a:spcPts val="342"/>
+              </a:spcAft>
+            </a:pPr>
+            <a:r>
+              <a:rPr sz="1600" i="0" b="0">
+                <a:solidFill>
+                  <a:srgbClr val="858585"/>
+                </a:solidFill>
+                <a:latin typeface="Consolas"/>
+              </a:rPr>
+              <a:t>1</a:t>
+            </a:r>
+          </a:p>
+          <a:p>
+            <a:pPr algn="r">
+              <a:spcAft>
+                <a:spcPts val="342"/>
+              </a:spcAft>
+            </a:pPr>
+            <a:r>
+              <a:rPr sz="1600" i="0" b="0">
+                <a:solidFill>
+                  <a:srgbClr val="858585"/>
+                </a:solidFill>
+                <a:latin typeface="Consolas"/>
+              </a:rPr>
+              <a:t>2</a:t>
+            </a:r>
+          </a:p>
+          <a:p>
+            <a:pPr algn="r">
+              <a:spcAft>
+                <a:spcPts val="342"/>
+              </a:spcAft>
+            </a:pPr>
+            <a:r>
+              <a:rPr sz="1600" i="0" b="0">
+                <a:solidFill>
+                  <a:srgbClr val="858585"/>
+                </a:solidFill>
+                <a:latin typeface="Consolas"/>
+              </a:rPr>
+              <a:t>3</a:t>
+            </a:r>
+          </a:p>
+          <a:p>
+            <a:pPr algn="r">
+              <a:spcAft>
+                <a:spcPts val="342"/>
+              </a:spcAft>
+            </a:pPr>
+            <a:r>
+              <a:rPr sz="1600" i="0" b="0">
+                <a:solidFill>
+                  <a:srgbClr val="858585"/>
+                </a:solidFill>
+                <a:latin typeface="Consolas"/>
+              </a:rPr>
+              <a:t>4</a:t>
+            </a:r>
+          </a:p>
+          <a:p>
+            <a:pPr algn="r">
+              <a:spcAft>
+                <a:spcPts val="342"/>
+              </a:spcAft>
+            </a:pPr>
+            <a:r>
+              <a:rPr sz="1600" i="0" b="0">
+                <a:solidFill>
+                  <a:srgbClr val="858585"/>
+                </a:solidFill>
+                <a:latin typeface="Consolas"/>
+              </a:rPr>
+              <a:t>5</a:t>
+            </a:r>
+          </a:p>
+          <a:p>
+            <a:pPr algn="r">
+              <a:spcAft>
+                <a:spcPts val="342"/>
+              </a:spcAft>
+            </a:pPr>
+            <a:r>
+              <a:rPr sz="1600" i="0" b="0">
+                <a:solidFill>
+                  <a:srgbClr val="858585"/>
+                </a:solidFill>
+                <a:latin typeface="Consolas"/>
+              </a:rPr>
+              <a:t>6</a:t>
+            </a:r>
+          </a:p>
+          <a:p>
+            <a:pPr algn="r">
+              <a:spcAft>
+                <a:spcPts val="342"/>
+              </a:spcAft>
+            </a:pPr>
+            <a:r>
+              <a:rPr sz="1600" i="0" b="0">
+                <a:solidFill>
+                  <a:srgbClr val="858585"/>
+                </a:solidFill>
+                <a:latin typeface="Consolas"/>
+              </a:rPr>
+              <a:t>7</a:t>
+            </a:r>
+          </a:p>
+          <a:p>
+            <a:pPr algn="r">
+              <a:spcAft>
+                <a:spcPts val="342"/>
+              </a:spcAft>
+            </a:pPr>
+            <a:r>
+              <a:rPr sz="1600" i="0" b="0">
+                <a:solidFill>
+                  <a:srgbClr val="858585"/>
+                </a:solidFill>
+                <a:latin typeface="Consolas"/>
+              </a:rPr>
+              <a:t>8</a:t>
+            </a:r>
+          </a:p>
+          <a:p>
+            <a:pPr algn="r">
+              <a:spcAft>
+                <a:spcPts val="342"/>
+              </a:spcAft>
+            </a:pPr>
+            <a:r>
+              <a:rPr sz="1600" i="0" b="0">
+                <a:solidFill>
+                  <a:srgbClr val="858585"/>
+                </a:solidFill>
+                <a:latin typeface="Consolas"/>
+              </a:rPr>
+              <a:t>9</a:t>
+            </a:r>
+          </a:p>
+          <a:p>
+            <a:pPr algn="r">
+              <a:spcAft>
+                <a:spcPts val="342"/>
+              </a:spcAft>
+            </a:pPr>
+            <a:r>
+              <a:rPr sz="1600" i="0" b="0">
+                <a:solidFill>
+                  <a:srgbClr val="858585"/>
+                </a:solidFill>
+                <a:latin typeface="Consolas"/>
+              </a:rPr>
+              <a:t>10</a:t>
+            </a:r>
+          </a:p>
+          <a:p>
+            <a:pPr algn="r">
+              <a:spcAft>
+                <a:spcPts val="342"/>
+              </a:spcAft>
+            </a:pPr>
+            <a:r>
+              <a:rPr sz="1600" i="0" b="0">
+                <a:solidFill>
+                  <a:srgbClr val="858585"/>
+                </a:solidFill>
+                <a:latin typeface="Consolas"/>
+              </a:rPr>
+              <a:t>11</a:t>
+            </a:r>
+          </a:p>
+          <a:p>
+            <a:pPr algn="r">
+              <a:spcAft>
+                <a:spcPts val="342"/>
+              </a:spcAft>
+            </a:pPr>
+            <a:r>
+              <a:rPr sz="1600" i="0" b="0">
+                <a:solidFill>
+                  <a:srgbClr val="858585"/>
+                </a:solidFill>
+                <a:latin typeface="Consolas"/>
+              </a:rPr>
+              <a:t>12</a:t>
+            </a:r>
+          </a:p>
+          <a:p>
+            <a:pPr algn="r">
+              <a:spcAft>
+                <a:spcPts val="342"/>
+              </a:spcAft>
+            </a:pPr>
+            <a:r>
+              <a:rPr sz="1600" i="0" b="0">
+                <a:solidFill>
+                  <a:srgbClr val="858585"/>
+                </a:solidFill>
+                <a:latin typeface="Consolas"/>
+              </a:rPr>
+              <a:t>13</a:t>
+            </a:r>
+          </a:p>
+          <a:p>
+            <a:pPr algn="r">
+              <a:spcAft>
+                <a:spcPts val="342"/>
+              </a:spcAft>
+            </a:pPr>
+            <a:r>
+              <a:rPr sz="1600" i="0" b="0">
+                <a:solidFill>
+                  <a:srgbClr val="858585"/>
+                </a:solidFill>
+                <a:latin typeface="Consolas"/>
+              </a:rPr>
+              <a:t>14</a:t>
+            </a:r>
+          </a:p>
+        </p:txBody>
+      </p:sp>
+      <p:sp>
+        <p:nvSpPr>
+          <p:cNvPr id="12" name="TextBox 11"/>
+          <p:cNvSpPr txBox="1"/>
+          <p:nvPr/>
+        </p:nvSpPr>
+        <p:spPr>
+          <a:xfrm>
+            <a:off x="1188720" y="1719072"/>
+            <a:ext cx="10271455" cy="4150836"/>
+          </a:xfrm>
+          <a:prstGeom prst="rect">
+            <a:avLst/>
+          </a:prstGeom>
+          <a:noFill/>
+        </p:spPr>
+        <p:txBody>
+          <a:bodyPr wrap="square">
+            <a:spAutoFit/>
+          </a:bodyPr>
+          <a:lstStyle/>
+          <a:p>
             <a:pPr>
               <a:spcAft>
-                <a:spcPts val="400"/>
+                <a:spcPts val="342"/>
               </a:spcAft>
             </a:pPr>
             <a:r>
-              <a:rPr sz="1400" b="0" i="0">
-                <a:solidFill>
-                  <a:srgbClr val="FFFFFF"/>
-                </a:solidFill>
-                <a:latin typeface="Calibri"/>
-              </a:rPr>
-              <a:t>gantt</a:t>
+              <a:rPr sz="1600" i="0" b="0">
+                <a:solidFill>
+                  <a:srgbClr val="D4D4D4"/>
+                </a:solidFill>
+                <a:latin typeface="Consolas"/>
+              </a:rPr>
+              <a:t>HU</a:t>
+            </a:r>
+            <a:r>
+              <a:rPr sz="1600" i="0" b="0">
+                <a:solidFill>
+                  <a:srgbClr val="D4D4D4"/>
+                </a:solidFill>
+                <a:latin typeface="Consolas"/>
+              </a:rPr>
+              <a:t>-</a:t>
+            </a:r>
+            <a:r>
+              <a:rPr sz="1600" i="0" b="0">
+                <a:solidFill>
+                  <a:srgbClr val="B5CEA8"/>
+                </a:solidFill>
+                <a:latin typeface="Consolas"/>
+              </a:rPr>
+              <a:t>07</a:t>
+            </a:r>
+            <a:r>
+              <a:rPr sz="1600" i="0" b="0">
+                <a:solidFill>
+                  <a:srgbClr val="D4D4D4"/>
+                </a:solidFill>
+                <a:latin typeface="Consolas"/>
+              </a:rPr>
+              <a:t>  </a:t>
+            </a:r>
+            <a:r>
+              <a:rPr sz="1600" i="0" b="0">
+                <a:solidFill>
+                  <a:srgbClr val="D4D4D4"/>
+                </a:solidFill>
+                <a:latin typeface="Consolas"/>
+              </a:rPr>
+              <a:t>Buscar</a:t>
+            </a:r>
+            <a:r>
+              <a:rPr sz="1600" i="0" b="0">
+                <a:solidFill>
+                  <a:srgbClr val="D4D4D4"/>
+                </a:solidFill>
+                <a:latin typeface="Consolas"/>
+              </a:rPr>
+              <a:t> </a:t>
+            </a:r>
+            <a:r>
+              <a:rPr sz="1600" i="0" b="0">
+                <a:solidFill>
+                  <a:srgbClr val="D4D4D4"/>
+                </a:solidFill>
+                <a:latin typeface="Consolas"/>
+              </a:rPr>
+              <a:t>historia</a:t>
+            </a:r>
+            <a:r>
+              <a:rPr sz="1600" i="0" b="0">
+                <a:solidFill>
+                  <a:srgbClr val="D4D4D4"/>
+                </a:solidFill>
+                <a:latin typeface="Consolas"/>
+              </a:rPr>
+              <a:t> </a:t>
+            </a:r>
+            <a:r>
+              <a:rPr sz="1600" i="0" b="0">
+                <a:solidFill>
+                  <a:srgbClr val="D4D4D4"/>
+                </a:solidFill>
+                <a:latin typeface="Consolas"/>
+              </a:rPr>
+              <a:t>clinica</a:t>
             </a:r>
           </a:p>
           <a:p>
             <a:pPr>
               <a:spcAft>
-                <a:spcPts val="400"/>
+                <a:spcPts val="342"/>
               </a:spcAft>
             </a:pPr>
             <a:r>
-              <a:rPr sz="1400" b="0" i="0">
-                <a:solidFill>
-                  <a:srgbClr val="FFFFFF"/>
-                </a:solidFill>
-                <a:latin typeface="Calibri"/>
-              </a:rPr>
-              <a:t>  title Tres sprints de diseno de la clinica</a:t>
+              <a:rPr sz="1600" i="0" b="0">
+                <a:solidFill>
+                  <a:srgbClr val="D4D4D4"/>
+                </a:solidFill>
+                <a:latin typeface="Consolas"/>
+              </a:rPr>
+              <a:t>  </a:t>
+            </a:r>
+            <a:r>
+              <a:rPr sz="1600" i="0" b="0">
+                <a:solidFill>
+                  <a:srgbClr val="D4D4D4"/>
+                </a:solidFill>
+                <a:latin typeface="Consolas"/>
+              </a:rPr>
+              <a:t>Como</a:t>
+            </a:r>
+            <a:r>
+              <a:rPr sz="1600" i="0" b="0">
+                <a:solidFill>
+                  <a:srgbClr val="D4D4D4"/>
+                </a:solidFill>
+                <a:latin typeface="Consolas"/>
+              </a:rPr>
+              <a:t> </a:t>
+            </a:r>
+            <a:r>
+              <a:rPr sz="1600" i="0" b="0">
+                <a:solidFill>
+                  <a:srgbClr val="D4D4D4"/>
+                </a:solidFill>
+                <a:latin typeface="Consolas"/>
+              </a:rPr>
+              <a:t>veterinaria</a:t>
+            </a:r>
+            <a:r>
+              <a:rPr sz="1600" i="0" b="0">
+                <a:solidFill>
+                  <a:srgbClr val="D4D4D4"/>
+                </a:solidFill>
+                <a:latin typeface="Consolas"/>
+              </a:rPr>
+              <a:t> </a:t>
+            </a:r>
+            <a:r>
+              <a:rPr sz="1600" i="0" b="0">
+                <a:solidFill>
+                  <a:srgbClr val="D4D4D4"/>
+                </a:solidFill>
+                <a:latin typeface="Consolas"/>
+              </a:rPr>
+              <a:t>de</a:t>
+            </a:r>
+            <a:r>
+              <a:rPr sz="1600" i="0" b="0">
+                <a:solidFill>
+                  <a:srgbClr val="D4D4D4"/>
+                </a:solidFill>
+                <a:latin typeface="Consolas"/>
+              </a:rPr>
+              <a:t> </a:t>
+            </a:r>
+            <a:r>
+              <a:rPr sz="1600" i="0" b="0">
+                <a:solidFill>
+                  <a:srgbClr val="D4D4D4"/>
+                </a:solidFill>
+                <a:latin typeface="Consolas"/>
+              </a:rPr>
+              <a:t>la</a:t>
+            </a:r>
+            <a:r>
+              <a:rPr sz="1600" i="0" b="0">
+                <a:solidFill>
+                  <a:srgbClr val="D4D4D4"/>
+                </a:solidFill>
+                <a:latin typeface="Consolas"/>
+              </a:rPr>
+              <a:t> </a:t>
+            </a:r>
+            <a:r>
+              <a:rPr sz="1600" i="0" b="0">
+                <a:solidFill>
+                  <a:srgbClr val="D4D4D4"/>
+                </a:solidFill>
+                <a:latin typeface="Consolas"/>
+              </a:rPr>
+              <a:t>clinica</a:t>
             </a:r>
           </a:p>
           <a:p>
             <a:pPr>
               <a:spcAft>
-                <a:spcPts val="400"/>
+                <a:spcPts val="342"/>
               </a:spcAft>
             </a:pPr>
             <a:r>
-              <a:rPr sz="1400" b="0" i="0">
-                <a:solidFill>
-                  <a:srgbClr val="FFFFFF"/>
-                </a:solidFill>
-                <a:latin typeface="Calibri"/>
-              </a:rPr>
-              <a:t>  dateFormat YYYY-MM-DD</a:t>
+              <a:rPr sz="1600" i="0" b="0">
+                <a:solidFill>
+                  <a:srgbClr val="D4D4D4"/>
+                </a:solidFill>
+                <a:latin typeface="Consolas"/>
+              </a:rPr>
+              <a:t>  </a:t>
+            </a:r>
+            <a:r>
+              <a:rPr sz="1600" i="0" b="0">
+                <a:solidFill>
+                  <a:srgbClr val="D4D4D4"/>
+                </a:solidFill>
+                <a:latin typeface="Consolas"/>
+              </a:rPr>
+              <a:t>quiero</a:t>
+            </a:r>
+            <a:r>
+              <a:rPr sz="1600" i="0" b="0">
+                <a:solidFill>
+                  <a:srgbClr val="D4D4D4"/>
+                </a:solidFill>
+                <a:latin typeface="Consolas"/>
+              </a:rPr>
+              <a:t> </a:t>
+            </a:r>
+            <a:r>
+              <a:rPr sz="1600" i="0" b="0">
+                <a:solidFill>
+                  <a:srgbClr val="D4D4D4"/>
+                </a:solidFill>
+                <a:latin typeface="Consolas"/>
+              </a:rPr>
+              <a:t>buscar</a:t>
+            </a:r>
+            <a:r>
+              <a:rPr sz="1600" i="0" b="0">
+                <a:solidFill>
+                  <a:srgbClr val="D4D4D4"/>
+                </a:solidFill>
+                <a:latin typeface="Consolas"/>
+              </a:rPr>
+              <a:t> </a:t>
+            </a:r>
+            <a:r>
+              <a:rPr sz="1600" i="0" b="0">
+                <a:solidFill>
+                  <a:srgbClr val="D4D4D4"/>
+                </a:solidFill>
+                <a:latin typeface="Consolas"/>
+              </a:rPr>
+              <a:t>la</a:t>
+            </a:r>
+            <a:r>
+              <a:rPr sz="1600" i="0" b="0">
+                <a:solidFill>
+                  <a:srgbClr val="D4D4D4"/>
+                </a:solidFill>
+                <a:latin typeface="Consolas"/>
+              </a:rPr>
+              <a:t> </a:t>
+            </a:r>
+            <a:r>
+              <a:rPr sz="1600" i="0" b="0">
+                <a:solidFill>
+                  <a:srgbClr val="D4D4D4"/>
+                </a:solidFill>
+                <a:latin typeface="Consolas"/>
+              </a:rPr>
+              <a:t>historia</a:t>
+            </a:r>
+            <a:r>
+              <a:rPr sz="1600" i="0" b="0">
+                <a:solidFill>
+                  <a:srgbClr val="D4D4D4"/>
+                </a:solidFill>
+                <a:latin typeface="Consolas"/>
+              </a:rPr>
+              <a:t> </a:t>
+            </a:r>
+            <a:r>
+              <a:rPr sz="1600" i="0" b="0">
+                <a:solidFill>
+                  <a:srgbClr val="D4D4D4"/>
+                </a:solidFill>
+                <a:latin typeface="Consolas"/>
+              </a:rPr>
+              <a:t>clinica</a:t>
+            </a:r>
+            <a:r>
+              <a:rPr sz="1600" i="0" b="0">
+                <a:solidFill>
+                  <a:srgbClr val="D4D4D4"/>
+                </a:solidFill>
+                <a:latin typeface="Consolas"/>
+              </a:rPr>
+              <a:t> </a:t>
+            </a:r>
+            <a:r>
+              <a:rPr sz="1600" i="0" b="0">
+                <a:solidFill>
+                  <a:srgbClr val="D4D4D4"/>
+                </a:solidFill>
+                <a:latin typeface="Consolas"/>
+              </a:rPr>
+              <a:t>de</a:t>
+            </a:r>
+            <a:r>
+              <a:rPr sz="1600" i="0" b="0">
+                <a:solidFill>
+                  <a:srgbClr val="D4D4D4"/>
+                </a:solidFill>
+                <a:latin typeface="Consolas"/>
+              </a:rPr>
+              <a:t> </a:t>
+            </a:r>
+            <a:r>
+              <a:rPr sz="1600" i="0" b="0">
+                <a:solidFill>
+                  <a:srgbClr val="D4D4D4"/>
+                </a:solidFill>
+                <a:latin typeface="Consolas"/>
+              </a:rPr>
+              <a:t>una</a:t>
+            </a:r>
+            <a:r>
+              <a:rPr sz="1600" i="0" b="0">
+                <a:solidFill>
+                  <a:srgbClr val="D4D4D4"/>
+                </a:solidFill>
+                <a:latin typeface="Consolas"/>
+              </a:rPr>
+              <a:t> </a:t>
+            </a:r>
+            <a:r>
+              <a:rPr sz="1600" i="0" b="0">
+                <a:solidFill>
+                  <a:srgbClr val="D4D4D4"/>
+                </a:solidFill>
+                <a:latin typeface="Consolas"/>
+              </a:rPr>
+              <a:t>mascota</a:t>
+            </a:r>
+            <a:r>
+              <a:rPr sz="1600" i="0" b="0">
+                <a:solidFill>
+                  <a:srgbClr val="D4D4D4"/>
+                </a:solidFill>
+                <a:latin typeface="Consolas"/>
+              </a:rPr>
+              <a:t> </a:t>
+            </a:r>
+            <a:r>
+              <a:rPr sz="1600" i="0" b="0">
+                <a:solidFill>
+                  <a:srgbClr val="D4D4D4"/>
+                </a:solidFill>
+                <a:latin typeface="Consolas"/>
+              </a:rPr>
+              <a:t>por</a:t>
+            </a:r>
+            <a:r>
+              <a:rPr sz="1600" i="0" b="0">
+                <a:solidFill>
+                  <a:srgbClr val="D4D4D4"/>
+                </a:solidFill>
+                <a:latin typeface="Consolas"/>
+              </a:rPr>
+              <a:t> </a:t>
+            </a:r>
+            <a:r>
+              <a:rPr sz="1600" i="0" b="0">
+                <a:solidFill>
+                  <a:srgbClr val="D4D4D4"/>
+                </a:solidFill>
+                <a:latin typeface="Consolas"/>
+              </a:rPr>
+              <a:t>nombre</a:t>
+            </a:r>
+            <a:r>
+              <a:rPr sz="1600" i="0" b="0">
+                <a:solidFill>
+                  <a:srgbClr val="D4D4D4"/>
+                </a:solidFill>
+                <a:latin typeface="Consolas"/>
+              </a:rPr>
+              <a:t> </a:t>
+            </a:r>
+            <a:r>
+              <a:rPr sz="1600" i="0" b="0">
+                <a:solidFill>
+                  <a:srgbClr val="D4D4D4"/>
+                </a:solidFill>
+                <a:latin typeface="Consolas"/>
+              </a:rPr>
+              <a:t>o</a:t>
+            </a:r>
+            <a:r>
+              <a:rPr sz="1600" i="0" b="0">
+                <a:solidFill>
+                  <a:srgbClr val="D4D4D4"/>
+                </a:solidFill>
+                <a:latin typeface="Consolas"/>
+              </a:rPr>
+              <a:t> </a:t>
+            </a:r>
+            <a:r>
+              <a:rPr sz="1600" i="0" b="0">
+                <a:solidFill>
+                  <a:srgbClr val="D4D4D4"/>
+                </a:solidFill>
+                <a:latin typeface="Consolas"/>
+              </a:rPr>
+              <a:t>documento</a:t>
             </a:r>
           </a:p>
           <a:p>
             <a:pPr>
               <a:spcAft>
-                <a:spcPts val="400"/>
+                <a:spcPts val="342"/>
               </a:spcAft>
             </a:pPr>
             <a:r>
-              <a:rPr sz="1400" b="0" i="0">
-                <a:solidFill>
-                  <a:srgbClr val="FFFFFF"/>
-                </a:solidFill>
-                <a:latin typeface="Calibri"/>
-              </a:rPr>
-              <a:t>  axisFormat %d/%m</a:t>
+              <a:rPr sz="1600" i="0" b="0">
+                <a:solidFill>
+                  <a:srgbClr val="D4D4D4"/>
+                </a:solidFill>
+                <a:latin typeface="Consolas"/>
+              </a:rPr>
+              <a:t>  </a:t>
+            </a:r>
+            <a:r>
+              <a:rPr sz="1600" i="0" b="0">
+                <a:solidFill>
+                  <a:srgbClr val="D4D4D4"/>
+                </a:solidFill>
+                <a:latin typeface="Consolas"/>
+              </a:rPr>
+              <a:t>para</a:t>
+            </a:r>
+            <a:r>
+              <a:rPr sz="1600" i="0" b="0">
+                <a:solidFill>
+                  <a:srgbClr val="D4D4D4"/>
+                </a:solidFill>
+                <a:latin typeface="Consolas"/>
+              </a:rPr>
+              <a:t> </a:t>
+            </a:r>
+            <a:r>
+              <a:rPr sz="1600" i="0" b="0">
+                <a:solidFill>
+                  <a:srgbClr val="D4D4D4"/>
+                </a:solidFill>
+                <a:latin typeface="Consolas"/>
+              </a:rPr>
+              <a:t>atender</a:t>
+            </a:r>
+            <a:r>
+              <a:rPr sz="1600" i="0" b="0">
+                <a:solidFill>
+                  <a:srgbClr val="D4D4D4"/>
+                </a:solidFill>
+                <a:latin typeface="Consolas"/>
+              </a:rPr>
+              <a:t> </a:t>
+            </a:r>
+            <a:r>
+              <a:rPr sz="1600" i="0" b="0">
+                <a:solidFill>
+                  <a:srgbClr val="D4D4D4"/>
+                </a:solidFill>
+                <a:latin typeface="Consolas"/>
+              </a:rPr>
+              <a:t>la</a:t>
+            </a:r>
+            <a:r>
+              <a:rPr sz="1600" i="0" b="0">
+                <a:solidFill>
+                  <a:srgbClr val="D4D4D4"/>
+                </a:solidFill>
+                <a:latin typeface="Consolas"/>
+              </a:rPr>
+              <a:t> </a:t>
+            </a:r>
+            <a:r>
+              <a:rPr sz="1600" i="0" b="0">
+                <a:solidFill>
+                  <a:srgbClr val="D4D4D4"/>
+                </a:solidFill>
+                <a:latin typeface="Consolas"/>
+              </a:rPr>
+              <a:t>consulta</a:t>
+            </a:r>
+            <a:r>
+              <a:rPr sz="1600" i="0" b="0">
+                <a:solidFill>
+                  <a:srgbClr val="D4D4D4"/>
+                </a:solidFill>
+                <a:latin typeface="Consolas"/>
+              </a:rPr>
+              <a:t> </a:t>
+            </a:r>
+            <a:r>
+              <a:rPr sz="1600" i="0" b="0">
+                <a:solidFill>
+                  <a:srgbClr val="D4D4D4"/>
+                </a:solidFill>
+                <a:latin typeface="Consolas"/>
+              </a:rPr>
+              <a:t>sin</a:t>
+            </a:r>
+            <a:r>
+              <a:rPr sz="1600" i="0" b="0">
+                <a:solidFill>
+                  <a:srgbClr val="D4D4D4"/>
+                </a:solidFill>
+                <a:latin typeface="Consolas"/>
+              </a:rPr>
+              <a:t> </a:t>
+            </a:r>
+            <a:r>
+              <a:rPr sz="1600" i="0" b="0">
+                <a:solidFill>
+                  <a:srgbClr val="D4D4D4"/>
+                </a:solidFill>
+                <a:latin typeface="Consolas"/>
+              </a:rPr>
+              <a:t>ir</a:t>
+            </a:r>
+            <a:r>
+              <a:rPr sz="1600" i="0" b="0">
+                <a:solidFill>
+                  <a:srgbClr val="D4D4D4"/>
+                </a:solidFill>
+                <a:latin typeface="Consolas"/>
+              </a:rPr>
+              <a:t> </a:t>
+            </a:r>
+            <a:r>
+              <a:rPr sz="1600" i="0" b="0">
+                <a:solidFill>
+                  <a:srgbClr val="D4D4D4"/>
+                </a:solidFill>
+                <a:latin typeface="Consolas"/>
+              </a:rPr>
+              <a:t>al</a:t>
+            </a:r>
+            <a:r>
+              <a:rPr sz="1600" i="0" b="0">
+                <a:solidFill>
+                  <a:srgbClr val="D4D4D4"/>
+                </a:solidFill>
+                <a:latin typeface="Consolas"/>
+              </a:rPr>
+              <a:t> </a:t>
+            </a:r>
+            <a:r>
+              <a:rPr sz="1600" i="0" b="0">
+                <a:solidFill>
+                  <a:srgbClr val="D4D4D4"/>
+                </a:solidFill>
+                <a:latin typeface="Consolas"/>
+              </a:rPr>
+              <a:t>archivador</a:t>
+            </a:r>
+            <a:r>
+              <a:rPr sz="1600" i="0" b="0">
+                <a:solidFill>
+                  <a:srgbClr val="D4D4D4"/>
+                </a:solidFill>
+                <a:latin typeface="Consolas"/>
+              </a:rPr>
+              <a:t> </a:t>
+            </a:r>
+            <a:r>
+              <a:rPr sz="1600" i="0" b="0">
+                <a:solidFill>
+                  <a:srgbClr val="D4D4D4"/>
+                </a:solidFill>
+                <a:latin typeface="Consolas"/>
+              </a:rPr>
+              <a:t>de</a:t>
+            </a:r>
+            <a:r>
+              <a:rPr sz="1600" i="0" b="0">
+                <a:solidFill>
+                  <a:srgbClr val="D4D4D4"/>
+                </a:solidFill>
+                <a:latin typeface="Consolas"/>
+              </a:rPr>
+              <a:t> </a:t>
+            </a:r>
+            <a:r>
+              <a:rPr sz="1600" i="0" b="0">
+                <a:solidFill>
+                  <a:srgbClr val="D4D4D4"/>
+                </a:solidFill>
+                <a:latin typeface="Consolas"/>
+              </a:rPr>
+              <a:t>papel</a:t>
+            </a:r>
+            <a:r>
+              <a:rPr sz="1600" i="0" b="0">
+                <a:solidFill>
+                  <a:srgbClr val="D4D4D4"/>
+                </a:solidFill>
+                <a:latin typeface="Consolas"/>
+              </a:rPr>
+              <a:t>.</a:t>
             </a:r>
           </a:p>
           <a:p>
             <a:pPr>
               <a:spcAft>
-                <a:spcPts val="400"/>
+                <a:spcPts val="342"/>
               </a:spcAft>
             </a:pPr>
             <a:r>
-              <a:rPr sz="1400" b="0" i="0">
-                <a:solidFill>
-                  <a:srgbClr val="FFFFFF"/>
-                </a:solidFill>
-                <a:latin typeface="Calibri"/>
+              <a:rPr sz="1600" i="0" b="0">
+                <a:solidFill>
+                  <a:srgbClr val="D4D4D4"/>
+                </a:solidFill>
+                <a:latin typeface="Consolas"/>
               </a:rPr>
               <a:t/>
             </a:r>
@@ -4548,168 +5756,1447 @@
           <a:p>
             <a:pPr>
               <a:spcAft>
-                <a:spcPts val="400"/>
+                <a:spcPts val="342"/>
               </a:spcAft>
             </a:pPr>
             <a:r>
-              <a:rPr sz="1400" b="0" i="0">
-                <a:solidFill>
-                  <a:srgbClr val="FFFFFF"/>
-                </a:solidFill>
-                <a:latin typeface="Calibri"/>
-              </a:rPr>
-              <a:t>  section Sprint 1</a:t>
+              <a:rPr sz="1600" i="0" b="0">
+                <a:solidFill>
+                  <a:srgbClr val="D4D4D4"/>
+                </a:solidFill>
+                <a:latin typeface="Consolas"/>
+              </a:rPr>
+              <a:t>Criterios</a:t>
+            </a:r>
+            <a:r>
+              <a:rPr sz="1600" i="0" b="0">
+                <a:solidFill>
+                  <a:srgbClr val="D4D4D4"/>
+                </a:solidFill>
+                <a:latin typeface="Consolas"/>
+              </a:rPr>
+              <a:t> </a:t>
+            </a:r>
+            <a:r>
+              <a:rPr sz="1600" i="0" b="0">
+                <a:solidFill>
+                  <a:srgbClr val="D4D4D4"/>
+                </a:solidFill>
+                <a:latin typeface="Consolas"/>
+              </a:rPr>
+              <a:t>de</a:t>
+            </a:r>
+            <a:r>
+              <a:rPr sz="1600" i="0" b="0">
+                <a:solidFill>
+                  <a:srgbClr val="D4D4D4"/>
+                </a:solidFill>
+                <a:latin typeface="Consolas"/>
+              </a:rPr>
+              <a:t> </a:t>
+            </a:r>
+            <a:r>
+              <a:rPr sz="1600" i="0" b="0">
+                <a:solidFill>
+                  <a:srgbClr val="D4D4D4"/>
+                </a:solidFill>
+                <a:latin typeface="Consolas"/>
+              </a:rPr>
+              <a:t>aceptacion</a:t>
             </a:r>
           </a:p>
           <a:p>
             <a:pPr>
               <a:spcAft>
-                <a:spcPts val="400"/>
+                <a:spcPts val="342"/>
               </a:spcAft>
             </a:pPr>
             <a:r>
-              <a:rPr sz="1400" b="0" i="0">
-                <a:solidFill>
-                  <a:srgbClr val="FFFFFF"/>
-                </a:solidFill>
-                <a:latin typeface="Calibri"/>
-              </a:rPr>
-              <a:t>  Modelo de dominio      :s1a, 2026-09-01, 7d</a:t>
+              <a:rPr sz="1600" i="0" b="0">
+                <a:solidFill>
+                  <a:srgbClr val="D4D4D4"/>
+                </a:solidFill>
+                <a:latin typeface="Consolas"/>
+              </a:rPr>
+              <a:t>  </a:t>
+            </a:r>
+            <a:r>
+              <a:rPr sz="1600" i="0" b="0">
+                <a:solidFill>
+                  <a:srgbClr val="D4D4D4"/>
+                </a:solidFill>
+                <a:latin typeface="Consolas"/>
+              </a:rPr>
+              <a:t>Dado</a:t>
+            </a:r>
+            <a:r>
+              <a:rPr sz="1600" i="0" b="0">
+                <a:solidFill>
+                  <a:srgbClr val="D4D4D4"/>
+                </a:solidFill>
+                <a:latin typeface="Consolas"/>
+              </a:rPr>
+              <a:t> </a:t>
+            </a:r>
+            <a:r>
+              <a:rPr sz="1600" i="0" b="0">
+                <a:solidFill>
+                  <a:srgbClr val="D4D4D4"/>
+                </a:solidFill>
+                <a:latin typeface="Consolas"/>
+              </a:rPr>
+              <a:t>que</a:t>
+            </a:r>
+            <a:r>
+              <a:rPr sz="1600" i="0" b="0">
+                <a:solidFill>
+                  <a:srgbClr val="D4D4D4"/>
+                </a:solidFill>
+                <a:latin typeface="Consolas"/>
+              </a:rPr>
+              <a:t> </a:t>
+            </a:r>
+            <a:r>
+              <a:rPr sz="1600" i="0" b="0">
+                <a:solidFill>
+                  <a:srgbClr val="D4D4D4"/>
+                </a:solidFill>
+                <a:latin typeface="Consolas"/>
+              </a:rPr>
+              <a:t>la</a:t>
+            </a:r>
+            <a:r>
+              <a:rPr sz="1600" i="0" b="0">
+                <a:solidFill>
+                  <a:srgbClr val="D4D4D4"/>
+                </a:solidFill>
+                <a:latin typeface="Consolas"/>
+              </a:rPr>
+              <a:t> </a:t>
+            </a:r>
+            <a:r>
+              <a:rPr sz="1600" i="0" b="0">
+                <a:solidFill>
+                  <a:srgbClr val="D4D4D4"/>
+                </a:solidFill>
+                <a:latin typeface="Consolas"/>
+              </a:rPr>
+              <a:t>mascota</a:t>
+            </a:r>
+            <a:r>
+              <a:rPr sz="1600" i="0" b="0">
+                <a:solidFill>
+                  <a:srgbClr val="D4D4D4"/>
+                </a:solidFill>
+                <a:latin typeface="Consolas"/>
+              </a:rPr>
+              <a:t> </a:t>
+            </a:r>
+            <a:r>
+              <a:rPr sz="1600" i="0" b="0">
+                <a:solidFill>
+                  <a:srgbClr val="D4D4D4"/>
+                </a:solidFill>
+                <a:latin typeface="Consolas"/>
+              </a:rPr>
+              <a:t>Rocky</a:t>
+            </a:r>
+            <a:r>
+              <a:rPr sz="1600" i="0" b="0">
+                <a:solidFill>
+                  <a:srgbClr val="D4D4D4"/>
+                </a:solidFill>
+                <a:latin typeface="Consolas"/>
+              </a:rPr>
+              <a:t> </a:t>
+            </a:r>
+            <a:r>
+              <a:rPr sz="1600" i="0" b="0">
+                <a:solidFill>
+                  <a:srgbClr val="D4D4D4"/>
+                </a:solidFill>
+                <a:latin typeface="Consolas"/>
+              </a:rPr>
+              <a:t>esta</a:t>
+            </a:r>
+            <a:r>
+              <a:rPr sz="1600" i="0" b="0">
+                <a:solidFill>
+                  <a:srgbClr val="D4D4D4"/>
+                </a:solidFill>
+                <a:latin typeface="Consolas"/>
+              </a:rPr>
+              <a:t> </a:t>
+            </a:r>
+            <a:r>
+              <a:rPr sz="1600" i="0" b="0">
+                <a:solidFill>
+                  <a:srgbClr val="D4D4D4"/>
+                </a:solidFill>
+                <a:latin typeface="Consolas"/>
+              </a:rPr>
+              <a:t>registrada</a:t>
+            </a:r>
+            <a:r>
+              <a:rPr sz="1600" i="0" b="0">
+                <a:solidFill>
+                  <a:srgbClr val="D4D4D4"/>
+                </a:solidFill>
+                <a:latin typeface="Consolas"/>
+              </a:rPr>
+              <a:t> </a:t>
+            </a:r>
+            <a:r>
+              <a:rPr sz="1600" i="0" b="0">
+                <a:solidFill>
+                  <a:srgbClr val="D4D4D4"/>
+                </a:solidFill>
+                <a:latin typeface="Consolas"/>
+              </a:rPr>
+              <a:t>con</a:t>
+            </a:r>
+            <a:r>
+              <a:rPr sz="1600" i="0" b="0">
+                <a:solidFill>
+                  <a:srgbClr val="D4D4D4"/>
+                </a:solidFill>
+                <a:latin typeface="Consolas"/>
+              </a:rPr>
+              <a:t> </a:t>
+            </a:r>
+            <a:r>
+              <a:rPr sz="1600" i="0" b="0">
+                <a:solidFill>
+                  <a:srgbClr val="D4D4D4"/>
+                </a:solidFill>
+                <a:latin typeface="Consolas"/>
+              </a:rPr>
+              <a:t>el</a:t>
+            </a:r>
+            <a:r>
+              <a:rPr sz="1600" i="0" b="0">
+                <a:solidFill>
+                  <a:srgbClr val="D4D4D4"/>
+                </a:solidFill>
+                <a:latin typeface="Consolas"/>
+              </a:rPr>
+              <a:t> </a:t>
+            </a:r>
+            <a:r>
+              <a:rPr sz="1600" i="0" b="0">
+                <a:solidFill>
+                  <a:srgbClr val="D4D4D4"/>
+                </a:solidFill>
+                <a:latin typeface="Consolas"/>
+              </a:rPr>
+              <a:t>dueño</a:t>
+            </a:r>
+            <a:r>
+              <a:rPr sz="1600" i="0" b="0">
+                <a:solidFill>
+                  <a:srgbClr val="D4D4D4"/>
+                </a:solidFill>
+                <a:latin typeface="Consolas"/>
+              </a:rPr>
+              <a:t> </a:t>
+            </a:r>
+            <a:r>
+              <a:rPr sz="1600" i="0" b="0">
+                <a:solidFill>
+                  <a:srgbClr val="D4D4D4"/>
+                </a:solidFill>
+                <a:latin typeface="Consolas"/>
+              </a:rPr>
+              <a:t>CC</a:t>
+            </a:r>
+            <a:r>
+              <a:rPr sz="1600" i="0" b="0">
+                <a:solidFill>
+                  <a:srgbClr val="D4D4D4"/>
+                </a:solidFill>
+                <a:latin typeface="Consolas"/>
+              </a:rPr>
+              <a:t> </a:t>
+            </a:r>
+            <a:r>
+              <a:rPr sz="1600" i="0" b="0">
+                <a:solidFill>
+                  <a:srgbClr val="B5CEA8"/>
+                </a:solidFill>
+                <a:latin typeface="Consolas"/>
+              </a:rPr>
+              <a:t>1.144</a:t>
+            </a:r>
+            <a:r>
+              <a:rPr sz="1600" i="0" b="0">
+                <a:solidFill>
+                  <a:srgbClr val="D4D4D4"/>
+                </a:solidFill>
+                <a:latin typeface="Consolas"/>
+              </a:rPr>
+              <a:t>.</a:t>
+            </a:r>
+            <a:r>
+              <a:rPr sz="1600" i="0" b="0">
+                <a:solidFill>
+                  <a:srgbClr val="B5CEA8"/>
+                </a:solidFill>
+                <a:latin typeface="Consolas"/>
+              </a:rPr>
+              <a:t>556</a:t>
             </a:r>
           </a:p>
           <a:p>
             <a:pPr>
               <a:spcAft>
-                <a:spcPts val="400"/>
+                <a:spcPts val="342"/>
               </a:spcAft>
             </a:pPr>
             <a:r>
-              <a:rPr sz="1400" b="0" i="0">
-                <a:solidFill>
-                  <a:srgbClr val="FFFFFF"/>
-                </a:solidFill>
-                <a:latin typeface="Calibri"/>
-              </a:rPr>
-              <a:t>  Casos de uso nucleo    :s1b, after s1a, 7d</a:t>
+              <a:rPr sz="1600" i="0" b="0">
+                <a:solidFill>
+                  <a:srgbClr val="D4D4D4"/>
+                </a:solidFill>
+                <a:latin typeface="Consolas"/>
+              </a:rPr>
+              <a:t>  </a:t>
+            </a:r>
+            <a:r>
+              <a:rPr sz="1600" i="0" b="0">
+                <a:solidFill>
+                  <a:srgbClr val="D4D4D4"/>
+                </a:solidFill>
+                <a:latin typeface="Consolas"/>
+              </a:rPr>
+              <a:t>Cuando</a:t>
+            </a:r>
+            <a:r>
+              <a:rPr sz="1600" i="0" b="0">
+                <a:solidFill>
+                  <a:srgbClr val="D4D4D4"/>
+                </a:solidFill>
+                <a:latin typeface="Consolas"/>
+              </a:rPr>
+              <a:t> </a:t>
+            </a:r>
+            <a:r>
+              <a:rPr sz="1600" i="0" b="0">
+                <a:solidFill>
+                  <a:srgbClr val="D4D4D4"/>
+                </a:solidFill>
+                <a:latin typeface="Consolas"/>
+              </a:rPr>
+              <a:t>escribo</a:t>
+            </a:r>
+            <a:r>
+              <a:rPr sz="1600" i="0" b="0">
+                <a:solidFill>
+                  <a:srgbClr val="D4D4D4"/>
+                </a:solidFill>
+                <a:latin typeface="Consolas"/>
+              </a:rPr>
+              <a:t> </a:t>
+            </a:r>
+            <a:r>
+              <a:rPr sz="1600" i="0" b="0">
+                <a:solidFill>
+                  <a:srgbClr val="D4D4D4"/>
+                </a:solidFill>
+                <a:latin typeface="Consolas"/>
+              </a:rPr>
+              <a:t>Rocky</a:t>
+            </a:r>
+            <a:r>
+              <a:rPr sz="1600" i="0" b="0">
+                <a:solidFill>
+                  <a:srgbClr val="D4D4D4"/>
+                </a:solidFill>
+                <a:latin typeface="Consolas"/>
+              </a:rPr>
+              <a:t> </a:t>
+            </a:r>
+            <a:r>
+              <a:rPr sz="1600" i="0" b="0">
+                <a:solidFill>
+                  <a:srgbClr val="D4D4D4"/>
+                </a:solidFill>
+                <a:latin typeface="Consolas"/>
+              </a:rPr>
+              <a:t>en</a:t>
+            </a:r>
+            <a:r>
+              <a:rPr sz="1600" i="0" b="0">
+                <a:solidFill>
+                  <a:srgbClr val="D4D4D4"/>
+                </a:solidFill>
+                <a:latin typeface="Consolas"/>
+              </a:rPr>
+              <a:t> </a:t>
+            </a:r>
+            <a:r>
+              <a:rPr sz="1600" i="0" b="0">
+                <a:solidFill>
+                  <a:srgbClr val="D4D4D4"/>
+                </a:solidFill>
+                <a:latin typeface="Consolas"/>
+              </a:rPr>
+              <a:t>el</a:t>
+            </a:r>
+            <a:r>
+              <a:rPr sz="1600" i="0" b="0">
+                <a:solidFill>
+                  <a:srgbClr val="D4D4D4"/>
+                </a:solidFill>
+                <a:latin typeface="Consolas"/>
+              </a:rPr>
+              <a:t> </a:t>
+            </a:r>
+            <a:r>
+              <a:rPr sz="1600" i="0" b="0">
+                <a:solidFill>
+                  <a:srgbClr val="D4D4D4"/>
+                </a:solidFill>
+                <a:latin typeface="Consolas"/>
+              </a:rPr>
+              <a:t>buscador</a:t>
+            </a:r>
+            <a:r>
+              <a:rPr sz="1600" i="0" b="0">
+                <a:solidFill>
+                  <a:srgbClr val="D4D4D4"/>
+                </a:solidFill>
+                <a:latin typeface="Consolas"/>
+              </a:rPr>
+              <a:t> </a:t>
+            </a:r>
+            <a:r>
+              <a:rPr sz="1600" i="0" b="0">
+                <a:solidFill>
+                  <a:srgbClr val="D4D4D4"/>
+                </a:solidFill>
+                <a:latin typeface="Consolas"/>
+              </a:rPr>
+              <a:t>y</a:t>
+            </a:r>
+            <a:r>
+              <a:rPr sz="1600" i="0" b="0">
+                <a:solidFill>
+                  <a:srgbClr val="D4D4D4"/>
+                </a:solidFill>
+                <a:latin typeface="Consolas"/>
+              </a:rPr>
+              <a:t> </a:t>
+            </a:r>
+            <a:r>
+              <a:rPr sz="1600" i="0" b="0">
+                <a:solidFill>
+                  <a:srgbClr val="D4D4D4"/>
+                </a:solidFill>
+                <a:latin typeface="Consolas"/>
+              </a:rPr>
+              <a:t>presiono</a:t>
+            </a:r>
+            <a:r>
+              <a:rPr sz="1600" i="0" b="0">
+                <a:solidFill>
+                  <a:srgbClr val="D4D4D4"/>
+                </a:solidFill>
+                <a:latin typeface="Consolas"/>
+              </a:rPr>
+              <a:t> </a:t>
+            </a:r>
+            <a:r>
+              <a:rPr sz="1600" i="0" b="0">
+                <a:solidFill>
+                  <a:srgbClr val="D4D4D4"/>
+                </a:solidFill>
+                <a:latin typeface="Consolas"/>
+              </a:rPr>
+              <a:t>Enter</a:t>
             </a:r>
           </a:p>
           <a:p>
             <a:pPr>
               <a:spcAft>
-                <a:spcPts val="400"/>
+                <a:spcPts val="342"/>
               </a:spcAft>
             </a:pPr>
             <a:r>
-              <a:rPr sz="1400" b="0" i="0">
-                <a:solidFill>
-                  <a:srgbClr val="FFFFFF"/>
-                </a:solidFill>
-                <a:latin typeface="Calibri"/>
-              </a:rPr>
-              <a:t/>
+              <a:rPr sz="1600" i="0" b="0">
+                <a:solidFill>
+                  <a:srgbClr val="D4D4D4"/>
+                </a:solidFill>
+                <a:latin typeface="Consolas"/>
+              </a:rPr>
+              <a:t>  </a:t>
+            </a:r>
+            <a:r>
+              <a:rPr sz="1600" i="0" b="0">
+                <a:solidFill>
+                  <a:srgbClr val="D4D4D4"/>
+                </a:solidFill>
+                <a:latin typeface="Consolas"/>
+              </a:rPr>
+              <a:t>Entonces</a:t>
+            </a:r>
+            <a:r>
+              <a:rPr sz="1600" i="0" b="0">
+                <a:solidFill>
+                  <a:srgbClr val="D4D4D4"/>
+                </a:solidFill>
+                <a:latin typeface="Consolas"/>
+              </a:rPr>
+              <a:t> </a:t>
+            </a:r>
+            <a:r>
+              <a:rPr sz="1600" i="0" b="0">
+                <a:solidFill>
+                  <a:srgbClr val="D4D4D4"/>
+                </a:solidFill>
+                <a:latin typeface="Consolas"/>
+              </a:rPr>
+              <a:t>veo</a:t>
+            </a:r>
+            <a:r>
+              <a:rPr sz="1600" i="0" b="0">
+                <a:solidFill>
+                  <a:srgbClr val="D4D4D4"/>
+                </a:solidFill>
+                <a:latin typeface="Consolas"/>
+              </a:rPr>
+              <a:t> </a:t>
+            </a:r>
+            <a:r>
+              <a:rPr sz="1600" i="0" b="0">
+                <a:solidFill>
+                  <a:srgbClr val="D4D4D4"/>
+                </a:solidFill>
+                <a:latin typeface="Consolas"/>
+              </a:rPr>
+              <a:t>la</a:t>
+            </a:r>
+            <a:r>
+              <a:rPr sz="1600" i="0" b="0">
+                <a:solidFill>
+                  <a:srgbClr val="D4D4D4"/>
+                </a:solidFill>
+                <a:latin typeface="Consolas"/>
+              </a:rPr>
+              <a:t> </a:t>
+            </a:r>
+            <a:r>
+              <a:rPr sz="1600" i="0" b="0">
+                <a:solidFill>
+                  <a:srgbClr val="D4D4D4"/>
+                </a:solidFill>
+                <a:latin typeface="Consolas"/>
+              </a:rPr>
+              <a:t>ficha</a:t>
+            </a:r>
+            <a:r>
+              <a:rPr sz="1600" i="0" b="0">
+                <a:solidFill>
+                  <a:srgbClr val="D4D4D4"/>
+                </a:solidFill>
+                <a:latin typeface="Consolas"/>
+              </a:rPr>
+              <a:t> </a:t>
+            </a:r>
+            <a:r>
+              <a:rPr sz="1600" i="0" b="0">
+                <a:solidFill>
+                  <a:srgbClr val="D4D4D4"/>
+                </a:solidFill>
+                <a:latin typeface="Consolas"/>
+              </a:rPr>
+              <a:t>con</a:t>
+            </a:r>
+            <a:r>
+              <a:rPr sz="1600" i="0" b="0">
+                <a:solidFill>
+                  <a:srgbClr val="D4D4D4"/>
+                </a:solidFill>
+                <a:latin typeface="Consolas"/>
+              </a:rPr>
+              <a:t> </a:t>
+            </a:r>
+            <a:r>
+              <a:rPr sz="1600" i="0" b="0">
+                <a:solidFill>
+                  <a:srgbClr val="D4D4D4"/>
+                </a:solidFill>
+                <a:latin typeface="Consolas"/>
+              </a:rPr>
+              <a:t>especie</a:t>
+            </a:r>
+            <a:r>
+              <a:rPr sz="1600" i="0" b="0">
+                <a:solidFill>
+                  <a:srgbClr val="D4D4D4"/>
+                </a:solidFill>
+                <a:latin typeface="Consolas"/>
+              </a:rPr>
+              <a:t>, </a:t>
+            </a:r>
+            <a:r>
+              <a:rPr sz="1600" i="0" b="0">
+                <a:solidFill>
+                  <a:srgbClr val="D4D4D4"/>
+                </a:solidFill>
+                <a:latin typeface="Consolas"/>
+              </a:rPr>
+              <a:t>edad</a:t>
+            </a:r>
+            <a:r>
+              <a:rPr sz="1600" i="0" b="0">
+                <a:solidFill>
+                  <a:srgbClr val="D4D4D4"/>
+                </a:solidFill>
+                <a:latin typeface="Consolas"/>
+              </a:rPr>
+              <a:t> </a:t>
+            </a:r>
+            <a:r>
+              <a:rPr sz="1600" i="0" b="0">
+                <a:solidFill>
+                  <a:srgbClr val="D4D4D4"/>
+                </a:solidFill>
+                <a:latin typeface="Consolas"/>
+              </a:rPr>
+              <a:t>y</a:t>
+            </a:r>
+            <a:r>
+              <a:rPr sz="1600" i="0" b="0">
+                <a:solidFill>
+                  <a:srgbClr val="D4D4D4"/>
+                </a:solidFill>
+                <a:latin typeface="Consolas"/>
+              </a:rPr>
+              <a:t> </a:t>
+            </a:r>
+            <a:r>
+              <a:rPr sz="1600" i="0" b="0">
+                <a:solidFill>
+                  <a:srgbClr val="D4D4D4"/>
+                </a:solidFill>
+                <a:latin typeface="Consolas"/>
+              </a:rPr>
+              <a:t>las</a:t>
+            </a:r>
+            <a:r>
+              <a:rPr sz="1600" i="0" b="0">
+                <a:solidFill>
+                  <a:srgbClr val="D4D4D4"/>
+                </a:solidFill>
+                <a:latin typeface="Consolas"/>
+              </a:rPr>
+              <a:t> </a:t>
+            </a:r>
+            <a:r>
+              <a:rPr sz="1600" i="0" b="0">
+                <a:solidFill>
+                  <a:srgbClr val="D4D4D4"/>
+                </a:solidFill>
+                <a:latin typeface="Consolas"/>
+              </a:rPr>
+              <a:t>ultimas</a:t>
+            </a:r>
+            <a:r>
+              <a:rPr sz="1600" i="0" b="0">
+                <a:solidFill>
+                  <a:srgbClr val="D4D4D4"/>
+                </a:solidFill>
+                <a:latin typeface="Consolas"/>
+              </a:rPr>
+              <a:t> </a:t>
+            </a:r>
+            <a:r>
+              <a:rPr sz="1600" i="0" b="0">
+                <a:solidFill>
+                  <a:srgbClr val="B5CEA8"/>
+                </a:solidFill>
+                <a:latin typeface="Consolas"/>
+              </a:rPr>
+              <a:t>3</a:t>
+            </a:r>
+            <a:r>
+              <a:rPr sz="1600" i="0" b="0">
+                <a:solidFill>
+                  <a:srgbClr val="D4D4D4"/>
+                </a:solidFill>
+                <a:latin typeface="Consolas"/>
+              </a:rPr>
+              <a:t> </a:t>
+            </a:r>
+            <a:r>
+              <a:rPr sz="1600" i="0" b="0">
+                <a:solidFill>
+                  <a:srgbClr val="D4D4D4"/>
+                </a:solidFill>
+                <a:latin typeface="Consolas"/>
+              </a:rPr>
+              <a:t>consultas</a:t>
+            </a:r>
+            <a:r>
+              <a:rPr sz="1600" i="0" b="0">
+                <a:solidFill>
+                  <a:srgbClr val="D4D4D4"/>
+                </a:solidFill>
+                <a:latin typeface="Consolas"/>
+              </a:rPr>
+              <a:t> </a:t>
+            </a:r>
+            <a:r>
+              <a:rPr sz="1600" i="0" b="0">
+                <a:solidFill>
+                  <a:srgbClr val="D4D4D4"/>
+                </a:solidFill>
+                <a:latin typeface="Consolas"/>
+              </a:rPr>
+              <a:t>en</a:t>
+            </a:r>
+            <a:r>
+              <a:rPr sz="1600" i="0" b="0">
+                <a:solidFill>
+                  <a:srgbClr val="D4D4D4"/>
+                </a:solidFill>
+                <a:latin typeface="Consolas"/>
+              </a:rPr>
+              <a:t> &lt;= </a:t>
+            </a:r>
+            <a:r>
+              <a:rPr sz="1600" i="0" b="0">
+                <a:solidFill>
+                  <a:srgbClr val="B5CEA8"/>
+                </a:solidFill>
+                <a:latin typeface="Consolas"/>
+              </a:rPr>
+              <a:t>3</a:t>
+            </a:r>
+            <a:r>
+              <a:rPr sz="1600" i="0" b="0">
+                <a:solidFill>
+                  <a:srgbClr val="D4D4D4"/>
+                </a:solidFill>
+                <a:latin typeface="Consolas"/>
+              </a:rPr>
+              <a:t> </a:t>
+            </a:r>
+            <a:r>
+              <a:rPr sz="1600" i="0" b="0">
+                <a:solidFill>
+                  <a:srgbClr val="D4D4D4"/>
+                </a:solidFill>
+                <a:latin typeface="Consolas"/>
+              </a:rPr>
+              <a:t>s</a:t>
             </a:r>
           </a:p>
           <a:p>
             <a:pPr>
               <a:spcAft>
-                <a:spcPts val="400"/>
+                <a:spcPts val="342"/>
               </a:spcAft>
             </a:pPr>
             <a:r>
-              <a:rPr sz="1400" b="0" i="0">
-                <a:solidFill>
-                  <a:srgbClr val="FFFFFF"/>
-                </a:solidFill>
-                <a:latin typeface="Calibri"/>
-              </a:rPr>
-              <a:t>  section Sprint 2</a:t>
+              <a:rPr sz="1600" i="0" b="0">
+                <a:solidFill>
+                  <a:srgbClr val="D4D4D4"/>
+                </a:solidFill>
+                <a:latin typeface="Consolas"/>
+              </a:rPr>
+              <a:t/>
             </a:r>
           </a:p>
           <a:p>
             <a:pPr>
               <a:spcAft>
-                <a:spcPts val="400"/>
+                <a:spcPts val="342"/>
               </a:spcAft>
             </a:pPr>
             <a:r>
-              <a:rPr sz="1400" b="0" i="0">
-                <a:solidFill>
-                  <a:srgbClr val="FFFFFF"/>
-                </a:solidFill>
-                <a:latin typeface="Calibri"/>
-              </a:rPr>
-              <a:t>  Secuencia de agendar   :s2a, after s1b, 7d</a:t>
+              <a:rPr sz="1600" i="0" b="0">
+                <a:solidFill>
+                  <a:srgbClr val="D4D4D4"/>
+                </a:solidFill>
+                <a:latin typeface="Consolas"/>
+              </a:rPr>
+              <a:t>  </a:t>
+            </a:r>
+            <a:r>
+              <a:rPr sz="1600" i="0" b="0">
+                <a:solidFill>
+                  <a:srgbClr val="D4D4D4"/>
+                </a:solidFill>
+                <a:latin typeface="Consolas"/>
+              </a:rPr>
+              <a:t>Dado</a:t>
+            </a:r>
+            <a:r>
+              <a:rPr sz="1600" i="0" b="0">
+                <a:solidFill>
+                  <a:srgbClr val="D4D4D4"/>
+                </a:solidFill>
+                <a:latin typeface="Consolas"/>
+              </a:rPr>
+              <a:t> </a:t>
+            </a:r>
+            <a:r>
+              <a:rPr sz="1600" i="0" b="0">
+                <a:solidFill>
+                  <a:srgbClr val="D4D4D4"/>
+                </a:solidFill>
+                <a:latin typeface="Consolas"/>
+              </a:rPr>
+              <a:t>que</a:t>
+            </a:r>
+            <a:r>
+              <a:rPr sz="1600" i="0" b="0">
+                <a:solidFill>
+                  <a:srgbClr val="D4D4D4"/>
+                </a:solidFill>
+                <a:latin typeface="Consolas"/>
+              </a:rPr>
+              <a:t> </a:t>
+            </a:r>
+            <a:r>
+              <a:rPr sz="1600" i="0" b="0">
+                <a:solidFill>
+                  <a:srgbClr val="D4D4D4"/>
+                </a:solidFill>
+                <a:latin typeface="Consolas"/>
+              </a:rPr>
+              <a:t>escribo</a:t>
+            </a:r>
+            <a:r>
+              <a:rPr sz="1600" i="0" b="0">
+                <a:solidFill>
+                  <a:srgbClr val="D4D4D4"/>
+                </a:solidFill>
+                <a:latin typeface="Consolas"/>
+              </a:rPr>
+              <a:t> </a:t>
+            </a:r>
+            <a:r>
+              <a:rPr sz="1600" i="0" b="0">
+                <a:solidFill>
+                  <a:srgbClr val="D4D4D4"/>
+                </a:solidFill>
+                <a:latin typeface="Consolas"/>
+              </a:rPr>
+              <a:t>un</a:t>
+            </a:r>
+            <a:r>
+              <a:rPr sz="1600" i="0" b="0">
+                <a:solidFill>
+                  <a:srgbClr val="D4D4D4"/>
+                </a:solidFill>
+                <a:latin typeface="Consolas"/>
+              </a:rPr>
+              <a:t> </a:t>
+            </a:r>
+            <a:r>
+              <a:rPr sz="1600" i="0" b="0">
+                <a:solidFill>
+                  <a:srgbClr val="D4D4D4"/>
+                </a:solidFill>
+                <a:latin typeface="Consolas"/>
+              </a:rPr>
+              <a:t>nombre</a:t>
+            </a:r>
+            <a:r>
+              <a:rPr sz="1600" i="0" b="0">
+                <a:solidFill>
+                  <a:srgbClr val="D4D4D4"/>
+                </a:solidFill>
+                <a:latin typeface="Consolas"/>
+              </a:rPr>
+              <a:t> </a:t>
+            </a:r>
+            <a:r>
+              <a:rPr sz="1600" i="0" b="0">
+                <a:solidFill>
+                  <a:srgbClr val="D4D4D4"/>
+                </a:solidFill>
+                <a:latin typeface="Consolas"/>
+              </a:rPr>
+              <a:t>que</a:t>
+            </a:r>
+            <a:r>
+              <a:rPr sz="1600" i="0" b="0">
+                <a:solidFill>
+                  <a:srgbClr val="D4D4D4"/>
+                </a:solidFill>
+                <a:latin typeface="Consolas"/>
+              </a:rPr>
+              <a:t> </a:t>
+            </a:r>
+            <a:r>
+              <a:rPr sz="1600" i="0" b="0">
+                <a:solidFill>
+                  <a:srgbClr val="D4D4D4"/>
+                </a:solidFill>
+                <a:latin typeface="Consolas"/>
+              </a:rPr>
+              <a:t>no</a:t>
+            </a:r>
+            <a:r>
+              <a:rPr sz="1600" i="0" b="0">
+                <a:solidFill>
+                  <a:srgbClr val="D4D4D4"/>
+                </a:solidFill>
+                <a:latin typeface="Consolas"/>
+              </a:rPr>
+              <a:t> </a:t>
+            </a:r>
+            <a:r>
+              <a:rPr sz="1600" i="0" b="0">
+                <a:solidFill>
+                  <a:srgbClr val="D4D4D4"/>
+                </a:solidFill>
+                <a:latin typeface="Consolas"/>
+              </a:rPr>
+              <a:t>existe</a:t>
+            </a:r>
+            <a:r>
+              <a:rPr sz="1600" i="0" b="0">
+                <a:solidFill>
+                  <a:srgbClr val="D4D4D4"/>
+                </a:solidFill>
+                <a:latin typeface="Consolas"/>
+              </a:rPr>
+              <a:t> </a:t>
+            </a:r>
+            <a:r>
+              <a:rPr sz="1600" i="0" b="0">
+                <a:solidFill>
+                  <a:srgbClr val="D4D4D4"/>
+                </a:solidFill>
+                <a:latin typeface="Consolas"/>
+              </a:rPr>
+              <a:t>en</a:t>
+            </a:r>
+            <a:r>
+              <a:rPr sz="1600" i="0" b="0">
+                <a:solidFill>
+                  <a:srgbClr val="D4D4D4"/>
+                </a:solidFill>
+                <a:latin typeface="Consolas"/>
+              </a:rPr>
+              <a:t> </a:t>
+            </a:r>
+            <a:r>
+              <a:rPr sz="1600" i="0" b="0">
+                <a:solidFill>
+                  <a:srgbClr val="D4D4D4"/>
+                </a:solidFill>
+                <a:latin typeface="Consolas"/>
+              </a:rPr>
+              <a:t>el</a:t>
+            </a:r>
+            <a:r>
+              <a:rPr sz="1600" i="0" b="0">
+                <a:solidFill>
+                  <a:srgbClr val="D4D4D4"/>
+                </a:solidFill>
+                <a:latin typeface="Consolas"/>
+              </a:rPr>
+              <a:t> </a:t>
+            </a:r>
+            <a:r>
+              <a:rPr sz="1600" i="0" b="0">
+                <a:solidFill>
+                  <a:srgbClr val="D4D4D4"/>
+                </a:solidFill>
+                <a:latin typeface="Consolas"/>
+              </a:rPr>
+              <a:t>sistema</a:t>
             </a:r>
           </a:p>
           <a:p>
             <a:pPr>
               <a:spcAft>
-                <a:spcPts val="400"/>
+                <a:spcPts val="342"/>
               </a:spcAft>
             </a:pPr>
             <a:r>
-              <a:rPr sz="1400" b="0" i="0">
-                <a:solidFill>
-                  <a:srgbClr val="FFFFFF"/>
-                </a:solidFill>
-                <a:latin typeface="Calibri"/>
-              </a:rPr>
-              <a:t>  Wireframes principales :s2b, after s2a, 7d</a:t>
+              <a:rPr sz="1600" i="0" b="0">
+                <a:solidFill>
+                  <a:srgbClr val="D4D4D4"/>
+                </a:solidFill>
+                <a:latin typeface="Consolas"/>
+              </a:rPr>
+              <a:t>  </a:t>
+            </a:r>
+            <a:r>
+              <a:rPr sz="1600" i="0" b="0">
+                <a:solidFill>
+                  <a:srgbClr val="D4D4D4"/>
+                </a:solidFill>
+                <a:latin typeface="Consolas"/>
+              </a:rPr>
+              <a:t>Cuando</a:t>
+            </a:r>
+            <a:r>
+              <a:rPr sz="1600" i="0" b="0">
+                <a:solidFill>
+                  <a:srgbClr val="D4D4D4"/>
+                </a:solidFill>
+                <a:latin typeface="Consolas"/>
+              </a:rPr>
+              <a:t> </a:t>
+            </a:r>
+            <a:r>
+              <a:rPr sz="1600" i="0" b="0">
+                <a:solidFill>
+                  <a:srgbClr val="D4D4D4"/>
+                </a:solidFill>
+                <a:latin typeface="Consolas"/>
+              </a:rPr>
+              <a:t>presiono</a:t>
+            </a:r>
+            <a:r>
+              <a:rPr sz="1600" i="0" b="0">
+                <a:solidFill>
+                  <a:srgbClr val="D4D4D4"/>
+                </a:solidFill>
+                <a:latin typeface="Consolas"/>
+              </a:rPr>
+              <a:t> </a:t>
+            </a:r>
+            <a:r>
+              <a:rPr sz="1600" i="0" b="0">
+                <a:solidFill>
+                  <a:srgbClr val="D4D4D4"/>
+                </a:solidFill>
+                <a:latin typeface="Consolas"/>
+              </a:rPr>
+              <a:t>Enter</a:t>
             </a:r>
           </a:p>
           <a:p>
             <a:pPr>
               <a:spcAft>
-                <a:spcPts val="400"/>
+                <a:spcPts val="342"/>
               </a:spcAft>
             </a:pPr>
             <a:r>
-              <a:rPr sz="1400" b="0" i="0">
-                <a:solidFill>
-                  <a:srgbClr val="FFFFFF"/>
-                </a:solidFill>
-                <a:latin typeface="Calibri"/>
-              </a:rPr>
-              <a:t/>
+              <a:rPr sz="1600" i="0" b="0">
+                <a:solidFill>
+                  <a:srgbClr val="D4D4D4"/>
+                </a:solidFill>
+                <a:latin typeface="Consolas"/>
+              </a:rPr>
+              <a:t>  </a:t>
+            </a:r>
+            <a:r>
+              <a:rPr sz="1600" i="0" b="0">
+                <a:solidFill>
+                  <a:srgbClr val="D4D4D4"/>
+                </a:solidFill>
+                <a:latin typeface="Consolas"/>
+              </a:rPr>
+              <a:t>Entonces</a:t>
+            </a:r>
+            <a:r>
+              <a:rPr sz="1600" i="0" b="0">
+                <a:solidFill>
+                  <a:srgbClr val="D4D4D4"/>
+                </a:solidFill>
+                <a:latin typeface="Consolas"/>
+              </a:rPr>
+              <a:t> </a:t>
+            </a:r>
+            <a:r>
+              <a:rPr sz="1600" i="0" b="0">
+                <a:solidFill>
+                  <a:srgbClr val="D4D4D4"/>
+                </a:solidFill>
+                <a:latin typeface="Consolas"/>
+              </a:rPr>
+              <a:t>veo</a:t>
+            </a:r>
+            <a:r>
+              <a:rPr sz="1600" i="0" b="0">
+                <a:solidFill>
+                  <a:srgbClr val="D4D4D4"/>
+                </a:solidFill>
+                <a:latin typeface="Consolas"/>
+              </a:rPr>
+              <a:t> </a:t>
+            </a:r>
+            <a:r>
+              <a:rPr sz="1600" i="0" b="0">
+                <a:solidFill>
+                  <a:srgbClr val="CE9178"/>
+                </a:solidFill>
+                <a:latin typeface="Consolas"/>
+              </a:rPr>
+              <a:t>'No se encontro el paciente'</a:t>
+            </a:r>
+            <a:r>
+              <a:rPr sz="1600" i="0" b="0">
+                <a:solidFill>
+                  <a:srgbClr val="D4D4D4"/>
+                </a:solidFill>
+                <a:latin typeface="Consolas"/>
+              </a:rPr>
+              <a:t> </a:t>
+            </a:r>
+            <a:r>
+              <a:rPr sz="1600" i="0" b="0">
+                <a:solidFill>
+                  <a:srgbClr val="D4D4D4"/>
+                </a:solidFill>
+                <a:latin typeface="Consolas"/>
+              </a:rPr>
+              <a:t>y</a:t>
+            </a:r>
+            <a:r>
+              <a:rPr sz="1600" i="0" b="0">
+                <a:solidFill>
+                  <a:srgbClr val="D4D4D4"/>
+                </a:solidFill>
+                <a:latin typeface="Consolas"/>
+              </a:rPr>
+              <a:t> </a:t>
+            </a:r>
+            <a:r>
+              <a:rPr sz="1600" i="0" b="0">
+                <a:solidFill>
+                  <a:srgbClr val="D4D4D4"/>
+                </a:solidFill>
+                <a:latin typeface="Consolas"/>
+              </a:rPr>
+              <a:t>el</a:t>
+            </a:r>
+            <a:r>
+              <a:rPr sz="1600" i="0" b="0">
+                <a:solidFill>
+                  <a:srgbClr val="D4D4D4"/>
+                </a:solidFill>
+                <a:latin typeface="Consolas"/>
+              </a:rPr>
+              <a:t> </a:t>
+            </a:r>
+            <a:r>
+              <a:rPr sz="1600" i="0" b="0">
+                <a:solidFill>
+                  <a:srgbClr val="D4D4D4"/>
+                </a:solidFill>
+                <a:latin typeface="Consolas"/>
+              </a:rPr>
+              <a:t>boton</a:t>
+            </a:r>
+            <a:r>
+              <a:rPr sz="1600" i="0" b="0">
+                <a:solidFill>
+                  <a:srgbClr val="D4D4D4"/>
+                </a:solidFill>
+                <a:latin typeface="Consolas"/>
+              </a:rPr>
+              <a:t> </a:t>
+            </a:r>
+            <a:r>
+              <a:rPr sz="1600" i="0" b="0">
+                <a:solidFill>
+                  <a:srgbClr val="D4D4D4"/>
+                </a:solidFill>
+                <a:latin typeface="Consolas"/>
+              </a:rPr>
+              <a:t>Registrar</a:t>
+            </a:r>
+            <a:r>
+              <a:rPr sz="1600" i="0" b="0">
+                <a:solidFill>
+                  <a:srgbClr val="D4D4D4"/>
+                </a:solidFill>
+                <a:latin typeface="Consolas"/>
+              </a:rPr>
+              <a:t> </a:t>
+            </a:r>
+            <a:r>
+              <a:rPr sz="1600" i="0" b="0">
+                <a:solidFill>
+                  <a:srgbClr val="D4D4D4"/>
+                </a:solidFill>
+                <a:latin typeface="Consolas"/>
+              </a:rPr>
+              <a:t>nuevo</a:t>
             </a:r>
           </a:p>
           <a:p>
             <a:pPr>
               <a:spcAft>
-                <a:spcPts val="400"/>
+                <a:spcPts val="342"/>
               </a:spcAft>
             </a:pPr>
             <a:r>
-              <a:rPr sz="1400" b="0" i="0">
-                <a:solidFill>
-                  <a:srgbClr val="FFFFFF"/>
+              <a:rPr sz="1600" i="0" b="0">
+                <a:solidFill>
+                  <a:srgbClr val="D4D4D4"/>
+                </a:solidFill>
+                <a:latin typeface="Consolas"/>
+              </a:rPr>
+              <a:t>Terminado</a:t>
+            </a:r>
+            <a:r>
+              <a:rPr sz="1600" i="0" b="0">
+                <a:solidFill>
+                  <a:srgbClr val="D4D4D4"/>
+                </a:solidFill>
+                <a:latin typeface="Consolas"/>
+              </a:rPr>
+              <a:t> = </a:t>
+            </a:r>
+            <a:r>
+              <a:rPr sz="1600" i="0" b="0">
+                <a:solidFill>
+                  <a:srgbClr val="D4D4D4"/>
+                </a:solidFill>
+                <a:latin typeface="Consolas"/>
+              </a:rPr>
+              <a:t>caso</a:t>
+            </a:r>
+            <a:r>
+              <a:rPr sz="1600" i="0" b="0">
+                <a:solidFill>
+                  <a:srgbClr val="D4D4D4"/>
+                </a:solidFill>
+                <a:latin typeface="Consolas"/>
+              </a:rPr>
+              <a:t> </a:t>
+            </a:r>
+            <a:r>
+              <a:rPr sz="1600" i="0" b="0">
+                <a:solidFill>
+                  <a:srgbClr val="D4D4D4"/>
+                </a:solidFill>
+                <a:latin typeface="Consolas"/>
+              </a:rPr>
+              <a:t>de</a:t>
+            </a:r>
+            <a:r>
+              <a:rPr sz="1600" i="0" b="0">
+                <a:solidFill>
+                  <a:srgbClr val="D4D4D4"/>
+                </a:solidFill>
+                <a:latin typeface="Consolas"/>
+              </a:rPr>
+              <a:t> </a:t>
+            </a:r>
+            <a:r>
+              <a:rPr sz="1600" i="0" b="0">
+                <a:solidFill>
+                  <a:srgbClr val="D4D4D4"/>
+                </a:solidFill>
+                <a:latin typeface="Consolas"/>
+              </a:rPr>
+              <a:t>uso</a:t>
+            </a:r>
+            <a:r>
+              <a:rPr sz="1600" i="0" b="0">
+                <a:solidFill>
+                  <a:srgbClr val="D4D4D4"/>
+                </a:solidFill>
+                <a:latin typeface="Consolas"/>
+              </a:rPr>
+              <a:t> + </a:t>
+            </a:r>
+            <a:r>
+              <a:rPr sz="1600" i="0" b="0">
+                <a:solidFill>
+                  <a:srgbClr val="D4D4D4"/>
+                </a:solidFill>
+                <a:latin typeface="Consolas"/>
+              </a:rPr>
+              <a:t>mockup</a:t>
+            </a:r>
+            <a:r>
+              <a:rPr sz="1600" i="0" b="0">
+                <a:solidFill>
+                  <a:srgbClr val="D4D4D4"/>
+                </a:solidFill>
+                <a:latin typeface="Consolas"/>
+              </a:rPr>
+              <a:t> + </a:t>
+            </a:r>
+            <a:r>
+              <a:rPr sz="1600" i="0" b="0">
+                <a:solidFill>
+                  <a:srgbClr val="D4D4D4"/>
+                </a:solidFill>
+                <a:latin typeface="Consolas"/>
+              </a:rPr>
+              <a:t>revision</a:t>
+            </a:r>
+            <a:r>
+              <a:rPr sz="1600" i="0" b="0">
+                <a:solidFill>
+                  <a:srgbClr val="D4D4D4"/>
+                </a:solidFill>
+                <a:latin typeface="Consolas"/>
+              </a:rPr>
+              <a:t> </a:t>
+            </a:r>
+            <a:r>
+              <a:rPr sz="1600" i="0" b="0">
+                <a:solidFill>
+                  <a:srgbClr val="D4D4D4"/>
+                </a:solidFill>
+                <a:latin typeface="Consolas"/>
+              </a:rPr>
+              <a:t>de</a:t>
+            </a:r>
+            <a:r>
+              <a:rPr sz="1600" i="0" b="0">
+                <a:solidFill>
+                  <a:srgbClr val="D4D4D4"/>
+                </a:solidFill>
+                <a:latin typeface="Consolas"/>
+              </a:rPr>
+              <a:t> </a:t>
+            </a:r>
+            <a:r>
+              <a:rPr sz="1600" i="0" b="0">
+                <a:solidFill>
+                  <a:srgbClr val="D4D4D4"/>
+                </a:solidFill>
+                <a:latin typeface="Consolas"/>
+              </a:rPr>
+              <a:t>un</a:t>
+            </a:r>
+            <a:r>
+              <a:rPr sz="1600" i="0" b="0">
+                <a:solidFill>
+                  <a:srgbClr val="D4D4D4"/>
+                </a:solidFill>
+                <a:latin typeface="Consolas"/>
+              </a:rPr>
+              <a:t> </a:t>
+            </a:r>
+            <a:r>
+              <a:rPr sz="1600" i="0" b="0">
+                <a:solidFill>
+                  <a:srgbClr val="D4D4D4"/>
+                </a:solidFill>
+                <a:latin typeface="Consolas"/>
+              </a:rPr>
+              <a:t>compañero</a:t>
+            </a:r>
+            <a:r>
+              <a:rPr sz="1600" i="0" b="0">
+                <a:solidFill>
+                  <a:srgbClr val="D4D4D4"/>
+                </a:solidFill>
+                <a:latin typeface="Consolas"/>
+              </a:rPr>
+              <a:t> + </a:t>
+            </a:r>
+            <a:r>
+              <a:rPr sz="1600" i="0" b="0">
+                <a:solidFill>
+                  <a:srgbClr val="D4D4D4"/>
+                </a:solidFill>
+                <a:latin typeface="Consolas"/>
+              </a:rPr>
+              <a:t>visto</a:t>
+            </a:r>
+            <a:r>
+              <a:rPr sz="1600" i="0" b="0">
+                <a:solidFill>
+                  <a:srgbClr val="D4D4D4"/>
+                </a:solidFill>
+                <a:latin typeface="Consolas"/>
+              </a:rPr>
+              <a:t> </a:t>
+            </a:r>
+            <a:r>
+              <a:rPr sz="1600" i="0" b="0">
+                <a:solidFill>
+                  <a:srgbClr val="D4D4D4"/>
+                </a:solidFill>
+                <a:latin typeface="Consolas"/>
+              </a:rPr>
+              <a:t>bueno</a:t>
+            </a:r>
+            <a:r>
+              <a:rPr sz="1600" i="0" b="0">
+                <a:solidFill>
+                  <a:srgbClr val="D4D4D4"/>
+                </a:solidFill>
+                <a:latin typeface="Consolas"/>
+              </a:rPr>
+              <a:t> </a:t>
+            </a:r>
+            <a:r>
+              <a:rPr sz="1600" i="0" b="0">
+                <a:solidFill>
+                  <a:srgbClr val="D4D4D4"/>
+                </a:solidFill>
+                <a:latin typeface="Consolas"/>
+              </a:rPr>
+              <a:t>del</a:t>
+            </a:r>
+            <a:r>
+              <a:rPr sz="1600" i="0" b="0">
+                <a:solidFill>
+                  <a:srgbClr val="D4D4D4"/>
+                </a:solidFill>
+                <a:latin typeface="Consolas"/>
+              </a:rPr>
+              <a:t> </a:t>
+            </a:r>
+            <a:r>
+              <a:rPr sz="1600" i="0" b="0">
+                <a:solidFill>
+                  <a:srgbClr val="D4D4D4"/>
+                </a:solidFill>
+                <a:latin typeface="Consolas"/>
+              </a:rPr>
+              <a:t>cliente</a:t>
+            </a:r>
+          </a:p>
+        </p:txBody>
+      </p:sp>
+      <p:sp>
+        <p:nvSpPr>
+          <p:cNvPr id="13" name="TextBox 12"/>
+          <p:cNvSpPr txBox="1"/>
+          <p:nvPr/>
+        </p:nvSpPr>
+        <p:spPr>
+          <a:xfrm>
+            <a:off x="457200" y="6035040"/>
+            <a:ext cx="11277295" cy="365760"/>
+          </a:xfrm>
+          <a:prstGeom prst="rect">
+            <a:avLst/>
+          </a:prstGeom>
+          <a:noFill/>
+        </p:spPr>
+        <p:txBody>
+          <a:bodyPr wrap="square">
+            <a:spAutoFit/>
+          </a:bodyPr>
+          <a:lstStyle/>
+          <a:p>
+            <a:pPr algn="ctr"/>
+            <a:r>
+              <a:rPr sz="1300" b="0" i="1">
+                <a:solidFill>
+                  <a:srgbClr val="666666"/>
                 </a:solidFill>
                 <a:latin typeface="Calibri"/>
               </a:rPr>
-              <a:t>  section Sprint 3</a:t>
-            </a:r>
-          </a:p>
-          <a:p>
-            <a:pPr>
-              <a:spcAft>
-                <a:spcPts val="400"/>
-              </a:spcAft>
-            </a:pPr>
-            <a:r>
-              <a:rPr sz="1400" b="0" i="0">
-                <a:solidFill>
-                  <a:srgbClr val="FFFFFF"/>
-                </a:solidFill>
-                <a:latin typeface="Calibri"/>
-              </a:rPr>
-              <a:t>  Consolidacion paquete  :s3a, after s2b, 7d</a:t>
-            </a:r>
-          </a:p>
-        </p:txBody>
-      </p:sp>
-      <p:sp>
-        <p:nvSpPr>
-          <p:cNvPr id="9" name="TextBox 8"/>
+              <a:t>La historia dice quien la necesita y para que; los criterios dicen como se demuestra que quedo lista, incluido el camino que sale mal.</a:t>
+            </a:r>
+          </a:p>
+        </p:txBody>
+      </p:sp>
+      <p:sp>
+        <p:nvSpPr>
+          <p:cNvPr id="14" name="TextBox 13"/>
           <p:cNvSpPr txBox="1"/>
           <p:nvPr/>
         </p:nvSpPr>
@@ -4883,7 +7370,7 @@
                 </a:solidFill>
                 <a:latin typeface="Calibri"/>
               </a:rPr>
-              <a:t>El tablero de flujo con limite de trabajo en curso</a:t>
+              <a:t>Ágil no es trabajar sin documentación</a:t>
             </a:r>
           </a:p>
         </p:txBody>
@@ -4896,16 +7383,16 @@
         </p:nvSpPr>
         <p:spPr>
           <a:xfrm>
-            <a:off x="457200" y="1261872"/>
-            <a:ext cx="11277295" cy="5093208"/>
+            <a:off x="5797149" y="1573813"/>
+            <a:ext cx="6010497" cy="4057845"/>
           </a:xfrm>
           <a:prstGeom prst="roundRect">
             <a:avLst>
-              <a:gd name="adj" fmla="val 12000"/>
+              <a:gd name="adj" fmla="val 4000"/>
             </a:avLst>
           </a:prstGeom>
           <a:solidFill>
-            <a:srgbClr val="1E2A38"/>
+            <a:srgbClr val="E8EEF4"/>
           </a:solidFill>
           <a:ln>
             <a:noFill/>
@@ -4933,49 +7420,30 @@
           </a:p>
         </p:txBody>
       </p:sp>
-      <p:sp>
-        <p:nvSpPr>
-          <p:cNvPr id="6" name="Rectangle 5"/>
-          <p:cNvSpPr/>
+      <p:pic>
+        <p:nvPicPr>
+          <p:cNvPr id="6" name="Picture 5" descr="sticky-notes-planning-board.jpg"/>
+          <p:cNvPicPr>
+            <a:picLocks noChangeAspect="1"/>
+          </p:cNvPicPr>
           <p:nvPr/>
-        </p:nvSpPr>
-        <p:spPr>
-          <a:xfrm>
-            <a:off x="457200" y="1261872"/>
-            <a:ext cx="11277295" cy="320040"/>
+        </p:nvPicPr>
+        <p:blipFill>
+          <a:blip r:embed="rId2"/>
+          <a:stretch>
+            <a:fillRect/>
+          </a:stretch>
+        </p:blipFill>
+        <p:spPr>
+          <a:xfrm>
+            <a:off x="5870301" y="1646965"/>
+            <a:ext cx="5864193" cy="3911541"/>
           </a:xfrm>
           <a:prstGeom prst="rect">
             <a:avLst/>
           </a:prstGeom>
-          <a:solidFill>
-            <a:srgbClr val="095292"/>
-          </a:solidFill>
-          <a:ln>
-            <a:noFill/>
-          </a:ln>
-        </p:spPr>
-        <p:style>
-          <a:lnRef idx="1">
-            <a:schemeClr val="accent1"/>
-          </a:lnRef>
-          <a:fillRef idx="3">
-            <a:schemeClr val="accent1"/>
-          </a:fillRef>
-          <a:effectRef idx="2">
-            <a:schemeClr val="accent1"/>
-          </a:effectRef>
-          <a:fontRef idx="minor">
-            <a:schemeClr val="lt1"/>
-          </a:fontRef>
-        </p:style>
-        <p:txBody>
-          <a:bodyPr rtlCol="0" anchor="ctr"/>
-          <a:lstStyle/>
-          <a:p>
-            <a:pPr algn="ctr"/>
-          </a:p>
-        </p:txBody>
-      </p:sp>
+        </p:spPr>
+      </p:pic>
       <p:sp>
         <p:nvSpPr>
           <p:cNvPr id="7" name="TextBox 6"/>
@@ -4984,8 +7452,8 @@
         </p:nvSpPr>
         <p:spPr>
           <a:xfrm>
-            <a:off x="685800" y="1307592"/>
-            <a:ext cx="10820095" cy="256032"/>
+            <a:off x="5870301" y="5961888"/>
+            <a:ext cx="5864193" cy="320040"/>
           </a:xfrm>
           <a:prstGeom prst="rect">
             <a:avLst/>
@@ -4993,17 +7461,20 @@
           <a:noFill/>
         </p:spPr>
         <p:txBody>
-          <a:bodyPr wrap="square" anchor="ctr"/>
-          <a:lstStyle/>
-          <a:p>
-            <a:r>
-              <a:rPr sz="1000" b="1" i="0">
-                <a:solidFill>
-                  <a:srgbClr val="269CCB"/>
+          <a:bodyPr wrap="square">
+            <a:spAutoFit/>
+          </a:bodyPr>
+          <a:lstStyle/>
+          <a:p>
+            <a:pPr algn="ctr"/>
+            <a:r>
+              <a:rPr sz="1100" b="0" i="1">
+                <a:solidFill>
+                  <a:srgbClr val="666666"/>
                 </a:solidFill>
                 <a:latin typeface="Calibri"/>
               </a:rPr>
-              <a:t>● ● ●</a:t>
+              <a:t>Foto: cottonbro studio · Pexels</a:t>
             </a:r>
           </a:p>
         </p:txBody>
@@ -5016,8 +7487,8 @@
         </p:nvSpPr>
         <p:spPr>
           <a:xfrm>
-            <a:off x="777240" y="1719072"/>
-            <a:ext cx="5181447" cy="4453128"/>
+            <a:off x="457200" y="1353312"/>
+            <a:ext cx="5093061" cy="5047488"/>
           </a:xfrm>
           <a:prstGeom prst="rect">
             <a:avLst/>
@@ -5032,161 +7503,65 @@
           <a:p>
             <a:pPr>
               <a:spcAft>
-                <a:spcPts val="400"/>
+                <a:spcPts val="800"/>
               </a:spcAft>
             </a:pPr>
             <a:r>
-              <a:rPr sz="1400" b="0" i="0">
-                <a:solidFill>
-                  <a:srgbClr val="FFFFFF"/>
+              <a:rPr sz="2000" b="0" i="0">
+                <a:solidFill>
+                  <a:srgbClr val="333333"/>
                 </a:solidFill>
                 <a:latin typeface="Calibri"/>
               </a:rPr>
-              <a:t>flowchart LR</a:t>
+              <a:t>–   Lo que el manifiesto rechaza es el documento inflado que nadie lee, no el documento útil.</a:t>
             </a:r>
           </a:p>
           <a:p>
             <a:pPr>
               <a:spcAft>
-                <a:spcPts val="400"/>
+                <a:spcPts val="800"/>
               </a:spcAft>
             </a:pPr>
             <a:r>
-              <a:rPr sz="1400" b="0" i="0">
-                <a:solidFill>
-                  <a:srgbClr val="FFFFFF"/>
+              <a:rPr sz="2000" b="0" i="0">
+                <a:solidFill>
+                  <a:srgbClr val="333333"/>
                 </a:solidFill>
                 <a:latin typeface="Calibri"/>
               </a:rPr>
-              <a:t>  subgraph backlog[Backlog]</a:t>
+              <a:t>–   Un equipo ágil documenta historias con criterios, Definición de Terminado, decisiones, diccionario de datos y diagramas.</a:t>
             </a:r>
           </a:p>
           <a:p>
             <a:pPr>
               <a:spcAft>
-                <a:spcPts val="400"/>
+                <a:spcPts val="800"/>
               </a:spcAft>
             </a:pPr>
             <a:r>
-              <a:rPr sz="1400" b="0" i="0">
-                <a:solidFill>
-                  <a:srgbClr val="FFFFFF"/>
+              <a:rPr sz="2000" b="0" i="0">
+                <a:solidFill>
+                  <a:srgbClr val="333333"/>
                 </a:solidFill>
                 <a:latin typeface="Calibri"/>
               </a:rPr>
-              <a:t>    b1[HU-04]</a:t>
+              <a:t>–   Los escribe justo a tiempo y los mantiene vivos.</a:t>
             </a:r>
           </a:p>
           <a:p>
             <a:pPr>
               <a:spcAft>
-                <a:spcPts val="400"/>
+                <a:spcPts val="800"/>
               </a:spcAft>
             </a:pPr>
             <a:r>
-              <a:rPr sz="1400" b="0" i="0">
-                <a:solidFill>
-                  <a:srgbClr val="FFFFFF"/>
+              <a:rPr sz="2000" b="0" i="0">
+                <a:solidFill>
+                  <a:srgbClr val="333333"/>
                 </a:solidFill>
                 <a:latin typeface="Calibri"/>
               </a:rPr>
-              <a:t>    b2[HU-05]</a:t>
-            </a:r>
-          </a:p>
-          <a:p>
-            <a:pPr>
-              <a:spcAft>
-                <a:spcPts val="400"/>
-              </a:spcAft>
-            </a:pPr>
-            <a:r>
-              <a:rPr sz="1400" b="0" i="0">
-                <a:solidFill>
-                  <a:srgbClr val="FFFFFF"/>
-                </a:solidFill>
-                <a:latin typeface="Calibri"/>
-              </a:rPr>
-              <a:t>  end</a:t>
-            </a:r>
-          </a:p>
-          <a:p>
-            <a:pPr>
-              <a:spcAft>
-                <a:spcPts val="400"/>
-              </a:spcAft>
-            </a:pPr>
-            <a:r>
-              <a:rPr sz="1400" b="0" i="0">
-                <a:solidFill>
-                  <a:srgbClr val="FFFFFF"/>
-                </a:solidFill>
-                <a:latin typeface="Calibri"/>
-              </a:rPr>
-              <a:t>  subgraph curso[En curso - LIMITE 2]</a:t>
-            </a:r>
-          </a:p>
-          <a:p>
-            <a:pPr>
-              <a:spcAft>
-                <a:spcPts val="400"/>
-              </a:spcAft>
-            </a:pPr>
-            <a:r>
-              <a:rPr sz="1400" b="0" i="0">
-                <a:solidFill>
-                  <a:srgbClr val="FFFFFF"/>
-                </a:solidFill>
-                <a:latin typeface="Calibri"/>
-              </a:rPr>
-              <a:t>    c1[HU-02]</a:t>
-            </a:r>
-          </a:p>
-          <a:p>
-            <a:pPr>
-              <a:spcAft>
-                <a:spcPts val="400"/>
-              </a:spcAft>
-            </a:pPr>
-            <a:r>
-              <a:rPr sz="1400" b="0" i="0">
-                <a:solidFill>
-                  <a:srgbClr val="FFFFFF"/>
-                </a:solidFill>
-                <a:latin typeface="Calibri"/>
-              </a:rPr>
-              <a:t>    c2[HU-03]</a:t>
-            </a:r>
-          </a:p>
-          <a:p>
-            <a:pPr>
-              <a:spcAft>
-                <a:spcPts val="400"/>
-              </a:spcAft>
-            </a:pPr>
-            <a:r>
-              <a:rPr sz="1400" b="0" i="0">
-                <a:solidFill>
-                  <a:srgbClr val="FFFFFF"/>
-                </a:solidFill>
-                <a:latin typeface="Calibri"/>
-              </a:rPr>
-              <a:t>  end</a:t>
-            </a:r>
-          </a:p>
-          <a:p>
-            <a:pPr>
-              <a:spcAft>
-                <a:spcPts val="400"/>
-              </a:spcAft>
-            </a:pPr>
-            <a:r>
-              <a:rPr sz="1400" b="0" i="0">
-                <a:solidFill>
-                  <a:srgbClr val="FFFFFF"/>
-                </a:solidFill>
-                <a:latin typeface="Calibri"/>
-              </a:rPr>
-              <a:t>  subgraph rev[En revision - LIMITE 1]</a:t>
+              <a:t>–   Un producto que ES documentación de diseño también se puede hacer ágil: por incrementos, revisado con el cliente.</a:t>
             </a:r>
           </a:p>
         </p:txBody>
@@ -5194,189 +7569,6 @@
       <p:sp>
         <p:nvSpPr>
           <p:cNvPr id="9" name="TextBox 8"/>
-          <p:cNvSpPr txBox="1"/>
-          <p:nvPr/>
-        </p:nvSpPr>
-        <p:spPr>
-          <a:xfrm>
-            <a:off x="6233007" y="1719072"/>
-            <a:ext cx="5181447" cy="4453128"/>
-          </a:xfrm>
-          <a:prstGeom prst="rect">
-            <a:avLst/>
-          </a:prstGeom>
-          <a:noFill/>
-        </p:spPr>
-        <p:txBody>
-          <a:bodyPr wrap="square">
-            <a:spAutoFit/>
-          </a:bodyPr>
-          <a:lstStyle/>
-          <a:p>
-            <a:pPr>
-              <a:spcAft>
-                <a:spcPts val="400"/>
-              </a:spcAft>
-            </a:pPr>
-            <a:r>
-              <a:rPr sz="1400" b="0" i="0">
-                <a:solidFill>
-                  <a:srgbClr val="FFFFFF"/>
-                </a:solidFill>
-                <a:latin typeface="Calibri"/>
-              </a:rPr>
-              <a:t>    r1[HU-01]</a:t>
-            </a:r>
-          </a:p>
-          <a:p>
-            <a:pPr>
-              <a:spcAft>
-                <a:spcPts val="400"/>
-              </a:spcAft>
-            </a:pPr>
-            <a:r>
-              <a:rPr sz="1400" b="0" i="0">
-                <a:solidFill>
-                  <a:srgbClr val="FFFFFF"/>
-                </a:solidFill>
-                <a:latin typeface="Calibri"/>
-              </a:rPr>
-              <a:t>  end</a:t>
-            </a:r>
-          </a:p>
-          <a:p>
-            <a:pPr>
-              <a:spcAft>
-                <a:spcPts val="400"/>
-              </a:spcAft>
-            </a:pPr>
-            <a:r>
-              <a:rPr sz="1400" b="0" i="0">
-                <a:solidFill>
-                  <a:srgbClr val="FFFFFF"/>
-                </a:solidFill>
-                <a:latin typeface="Calibri"/>
-              </a:rPr>
-              <a:t>  subgraph listo[Terminado]</a:t>
-            </a:r>
-          </a:p>
-          <a:p>
-            <a:pPr>
-              <a:spcAft>
-                <a:spcPts val="400"/>
-              </a:spcAft>
-            </a:pPr>
-            <a:r>
-              <a:rPr sz="1400" b="0" i="0">
-                <a:solidFill>
-                  <a:srgbClr val="FFFFFF"/>
-                </a:solidFill>
-                <a:latin typeface="Calibri"/>
-              </a:rPr>
-              <a:t>    l1[HU-00]</a:t>
-            </a:r>
-          </a:p>
-          <a:p>
-            <a:pPr>
-              <a:spcAft>
-                <a:spcPts val="400"/>
-              </a:spcAft>
-            </a:pPr>
-            <a:r>
-              <a:rPr sz="1400" b="0" i="0">
-                <a:solidFill>
-                  <a:srgbClr val="FFFFFF"/>
-                </a:solidFill>
-                <a:latin typeface="Calibri"/>
-              </a:rPr>
-              <a:t>  end</a:t>
-            </a:r>
-          </a:p>
-          <a:p>
-            <a:pPr>
-              <a:spcAft>
-                <a:spcPts val="400"/>
-              </a:spcAft>
-            </a:pPr>
-            <a:r>
-              <a:rPr sz="1400" b="0" i="0">
-                <a:solidFill>
-                  <a:srgbClr val="FFFFFF"/>
-                </a:solidFill>
-                <a:latin typeface="Calibri"/>
-              </a:rPr>
-              <a:t/>
-            </a:r>
-          </a:p>
-          <a:p>
-            <a:pPr>
-              <a:spcAft>
-                <a:spcPts val="400"/>
-              </a:spcAft>
-            </a:pPr>
-            <a:r>
-              <a:rPr sz="1400" b="0" i="0">
-                <a:solidFill>
-                  <a:srgbClr val="FFFFFF"/>
-                </a:solidFill>
-                <a:latin typeface="Calibri"/>
-              </a:rPr>
-              <a:t>  backlog --&gt; curso --&gt; rev --&gt; listo</a:t>
-            </a:r>
-          </a:p>
-          <a:p>
-            <a:pPr>
-              <a:spcAft>
-                <a:spcPts val="400"/>
-              </a:spcAft>
-            </a:pPr>
-            <a:r>
-              <a:rPr sz="1400" b="0" i="0">
-                <a:solidFill>
-                  <a:srgbClr val="FFFFFF"/>
-                </a:solidFill>
-                <a:latin typeface="Calibri"/>
-              </a:rPr>
-              <a:t/>
-            </a:r>
-          </a:p>
-          <a:p>
-            <a:pPr>
-              <a:spcAft>
-                <a:spcPts val="400"/>
-              </a:spcAft>
-            </a:pPr>
-            <a:r>
-              <a:rPr sz="1400" b="0" i="0">
-                <a:solidFill>
-                  <a:srgbClr val="FFFFFF"/>
-                </a:solidFill>
-                <a:latin typeface="Calibri"/>
-              </a:rPr>
-              <a:t>%% El LIMITE es lo que hace que el tablero sirva: sin el, todo esta</a:t>
-            </a:r>
-          </a:p>
-          <a:p>
-            <a:pPr>
-              <a:spcAft>
-                <a:spcPts val="400"/>
-              </a:spcAft>
-            </a:pPr>
-            <a:r>
-              <a:rPr sz="1400" b="0" i="0">
-                <a:solidFill>
-                  <a:srgbClr val="FFFFFF"/>
-                </a:solidFill>
-                <a:latin typeface="Calibri"/>
-              </a:rPr>
-              <a:t>%% «en curso» y nada termina. Para empezar HU-04 hay que cerrar una.</a:t>
-            </a:r>
-          </a:p>
-        </p:txBody>
-      </p:sp>
-      <p:sp>
-        <p:nvSpPr>
-          <p:cNvPr id="10" name="TextBox 9"/>
           <p:cNvSpPr txBox="1"/>
           <p:nvPr/>
         </p:nvSpPr>
@@ -5550,7 +7742,7 @@
                 </a:solidFill>
                 <a:latin typeface="Calibri"/>
               </a:rPr>
-              <a:t>Historia de usuario de la clinica con criterios de aceptacion</a:t>
+              <a:t>Demo del dia</a:t>
             </a:r>
           </a:p>
         </p:txBody>
@@ -5563,16 +7755,16 @@
         </p:nvSpPr>
         <p:spPr>
           <a:xfrm>
-            <a:off x="457200" y="1261872"/>
-            <a:ext cx="11277295" cy="4773168"/>
+            <a:off x="5797149" y="1573813"/>
+            <a:ext cx="6010497" cy="4057845"/>
           </a:xfrm>
           <a:prstGeom prst="roundRect">
             <a:avLst>
-              <a:gd name="adj" fmla="val 12000"/>
+              <a:gd name="adj" fmla="val 4000"/>
             </a:avLst>
           </a:prstGeom>
           <a:solidFill>
-            <a:srgbClr val="1E2A38"/>
+            <a:srgbClr val="E8EEF4"/>
           </a:solidFill>
           <a:ln>
             <a:noFill/>
@@ -5600,49 +7792,30 @@
           </a:p>
         </p:txBody>
       </p:sp>
-      <p:sp>
-        <p:nvSpPr>
-          <p:cNvPr id="6" name="Rectangle 5"/>
-          <p:cNvSpPr/>
+      <p:pic>
+        <p:nvPicPr>
+          <p:cNvPr id="6" name="Picture 5" descr="laptop-code-live-demo.jpg"/>
+          <p:cNvPicPr>
+            <a:picLocks noChangeAspect="1"/>
+          </p:cNvPicPr>
           <p:nvPr/>
-        </p:nvSpPr>
-        <p:spPr>
-          <a:xfrm>
-            <a:off x="457200" y="1261872"/>
-            <a:ext cx="11277295" cy="320040"/>
+        </p:nvPicPr>
+        <p:blipFill>
+          <a:blip r:embed="rId2"/>
+          <a:stretch>
+            <a:fillRect/>
+          </a:stretch>
+        </p:blipFill>
+        <p:spPr>
+          <a:xfrm>
+            <a:off x="5870301" y="1646965"/>
+            <a:ext cx="5864193" cy="3911541"/>
           </a:xfrm>
           <a:prstGeom prst="rect">
             <a:avLst/>
           </a:prstGeom>
-          <a:solidFill>
-            <a:srgbClr val="095292"/>
-          </a:solidFill>
-          <a:ln>
-            <a:noFill/>
-          </a:ln>
-        </p:spPr>
-        <p:style>
-          <a:lnRef idx="1">
-            <a:schemeClr val="accent1"/>
-          </a:lnRef>
-          <a:fillRef idx="3">
-            <a:schemeClr val="accent1"/>
-          </a:fillRef>
-          <a:effectRef idx="2">
-            <a:schemeClr val="accent1"/>
-          </a:effectRef>
-          <a:fontRef idx="minor">
-            <a:schemeClr val="lt1"/>
-          </a:fontRef>
-        </p:style>
-        <p:txBody>
-          <a:bodyPr rtlCol="0" anchor="ctr"/>
-          <a:lstStyle/>
-          <a:p>
-            <a:pPr algn="ctr"/>
-          </a:p>
-        </p:txBody>
-      </p:sp>
+        </p:spPr>
+      </p:pic>
       <p:sp>
         <p:nvSpPr>
           <p:cNvPr id="7" name="TextBox 6"/>
@@ -5651,8 +7824,8 @@
         </p:nvSpPr>
         <p:spPr>
           <a:xfrm>
-            <a:off x="685800" y="1307592"/>
-            <a:ext cx="10820095" cy="256032"/>
+            <a:off x="5870301" y="5961888"/>
+            <a:ext cx="5864193" cy="320040"/>
           </a:xfrm>
           <a:prstGeom prst="rect">
             <a:avLst/>
@@ -5660,17 +7833,20 @@
           <a:noFill/>
         </p:spPr>
         <p:txBody>
-          <a:bodyPr wrap="square" anchor="ctr"/>
-          <a:lstStyle/>
-          <a:p>
-            <a:r>
-              <a:rPr sz="1000" b="1" i="0">
-                <a:solidFill>
-                  <a:srgbClr val="269CCB"/>
+          <a:bodyPr wrap="square">
+            <a:spAutoFit/>
+          </a:bodyPr>
+          <a:lstStyle/>
+          <a:p>
+            <a:pPr algn="ctr"/>
+            <a:r>
+              <a:rPr sz="1100" b="0" i="1">
+                <a:solidFill>
+                  <a:srgbClr val="666666"/>
                 </a:solidFill>
                 <a:latin typeface="Calibri"/>
               </a:rPr>
-              <a:t>● ● ●</a:t>
+              <a:t>Foto: olia danilevich · Pexels</a:t>
             </a:r>
           </a:p>
         </p:txBody>
@@ -5683,8 +7859,8 @@
         </p:nvSpPr>
         <p:spPr>
           <a:xfrm>
-            <a:off x="777240" y="1719072"/>
-            <a:ext cx="10637215" cy="4133087"/>
+            <a:off x="457200" y="1353312"/>
+            <a:ext cx="5093061" cy="5047488"/>
           </a:xfrm>
           <a:prstGeom prst="rect">
             <a:avLst/>
@@ -5699,225 +7875,76 @@
           <a:p>
             <a:pPr>
               <a:spcAft>
-                <a:spcPts val="400"/>
+                <a:spcPts val="800"/>
               </a:spcAft>
             </a:pPr>
             <a:r>
-              <a:rPr sz="1400" b="0" i="0">
-                <a:solidFill>
-                  <a:srgbClr val="FFFFFF"/>
+              <a:rPr sz="2000" b="0" i="0">
+                <a:solidFill>
+                  <a:srgbClr val="333333"/>
                 </a:solidFill>
                 <a:latin typeface="Calibri"/>
               </a:rPr>
-              <a:t>HU-07  Buscar historia clinica</a:t>
+              <a:t>–   </a:t>
+            </a:r>
+            <a:r>
+              <a:rPr sz="2000" b="1" i="0">
+                <a:solidFill>
+                  <a:srgbClr val="333333"/>
+                </a:solidFill>
+                <a:latin typeface="Calibri"/>
+              </a:rPr>
+              <a:t>Herramienta:</a:t>
+            </a:r>
+            <a:r>
+              <a:rPr sz="2000" b="0" i="0">
+                <a:solidFill>
+                  <a:srgbClr val="333333"/>
+                </a:solidFill>
+                <a:latin typeface="Calibri"/>
+              </a:rPr>
+              <a:t> draw.io · Excalidraw · Google Docs</a:t>
             </a:r>
           </a:p>
           <a:p>
             <a:pPr>
               <a:spcAft>
-                <a:spcPts val="400"/>
+                <a:spcPts val="800"/>
               </a:spcAft>
             </a:pPr>
             <a:r>
-              <a:rPr sz="1400" b="0" i="0">
-                <a:solidFill>
-                  <a:srgbClr val="FFFFFF"/>
+              <a:rPr sz="2000" b="0" i="0">
+                <a:solidFill>
+                  <a:srgbClr val="333333"/>
                 </a:solidFill>
                 <a:latin typeface="Calibri"/>
               </a:rPr>
-              <a:t>  Como veterinaria de la clinica</a:t>
+              <a:t>–   </a:t>
+            </a:r>
+            <a:r>
+              <a:rPr sz="2000" b="1" i="0">
+                <a:solidFill>
+                  <a:srgbClr val="333333"/>
+                </a:solidFill>
+                <a:latin typeface="Calibri"/>
+              </a:rPr>
+              <a:t>Demo:</a:t>
             </a:r>
           </a:p>
           <a:p>
             <a:pPr>
               <a:spcAft>
-                <a:spcPts val="400"/>
+                <a:spcPts val="800"/>
               </a:spcAft>
             </a:pPr>
             <a:r>
-              <a:rPr sz="1400" b="0" i="0">
-                <a:solidFill>
-                  <a:srgbClr val="FFFFFF"/>
+              <a:rPr sz="2000" b="0" i="0">
+                <a:solidFill>
+                  <a:srgbClr val="333333"/>
                 </a:solidFill>
                 <a:latin typeface="Calibri"/>
               </a:rPr>
-              <a:t>  quiero buscar la historia clinica de una mascota por nombre o documento</a:t>
-            </a:r>
-          </a:p>
-          <a:p>
-            <a:pPr>
-              <a:spcAft>
-                <a:spcPts val="400"/>
-              </a:spcAft>
-            </a:pPr>
-            <a:r>
-              <a:rPr sz="1400" b="0" i="0">
-                <a:solidFill>
-                  <a:srgbClr val="FFFFFF"/>
-                </a:solidFill>
-                <a:latin typeface="Calibri"/>
-              </a:rPr>
-              <a:t>  para atender la consulta sin ir al archivador de papel.</a:t>
-            </a:r>
-          </a:p>
-          <a:p>
-            <a:pPr>
-              <a:spcAft>
-                <a:spcPts val="400"/>
-              </a:spcAft>
-            </a:pPr>
-            <a:r>
-              <a:rPr sz="1400" b="0" i="0">
-                <a:solidFill>
-                  <a:srgbClr val="FFFFFF"/>
-                </a:solidFill>
-                <a:latin typeface="Calibri"/>
-              </a:rPr>
-              <a:t/>
-            </a:r>
-          </a:p>
-          <a:p>
-            <a:pPr>
-              <a:spcAft>
-                <a:spcPts val="400"/>
-              </a:spcAft>
-            </a:pPr>
-            <a:r>
-              <a:rPr sz="1400" b="0" i="0">
-                <a:solidFill>
-                  <a:srgbClr val="FFFFFF"/>
-                </a:solidFill>
-                <a:latin typeface="Calibri"/>
-              </a:rPr>
-              <a:t>Criterios de aceptacion</a:t>
-            </a:r>
-          </a:p>
-          <a:p>
-            <a:pPr>
-              <a:spcAft>
-                <a:spcPts val="400"/>
-              </a:spcAft>
-            </a:pPr>
-            <a:r>
-              <a:rPr sz="1400" b="0" i="0">
-                <a:solidFill>
-                  <a:srgbClr val="FFFFFF"/>
-                </a:solidFill>
-                <a:latin typeface="Calibri"/>
-              </a:rPr>
-              <a:t>  Dado que la mascota Rocky esta registrada con el dueño CC 1.144.556</a:t>
-            </a:r>
-          </a:p>
-          <a:p>
-            <a:pPr>
-              <a:spcAft>
-                <a:spcPts val="400"/>
-              </a:spcAft>
-            </a:pPr>
-            <a:r>
-              <a:rPr sz="1400" b="0" i="0">
-                <a:solidFill>
-                  <a:srgbClr val="FFFFFF"/>
-                </a:solidFill>
-                <a:latin typeface="Calibri"/>
-              </a:rPr>
-              <a:t>  Cuando escribo Rocky en el buscador y presiono Enter</a:t>
-            </a:r>
-          </a:p>
-          <a:p>
-            <a:pPr>
-              <a:spcAft>
-                <a:spcPts val="400"/>
-              </a:spcAft>
-            </a:pPr>
-            <a:r>
-              <a:rPr sz="1400" b="0" i="0">
-                <a:solidFill>
-                  <a:srgbClr val="FFFFFF"/>
-                </a:solidFill>
-                <a:latin typeface="Calibri"/>
-              </a:rPr>
-              <a:t>  Entonces veo la ficha con especie, edad y las ultimas 3 consultas en &lt;= 3 s</a:t>
-            </a:r>
-          </a:p>
-          <a:p>
-            <a:pPr>
-              <a:spcAft>
-                <a:spcPts val="400"/>
-              </a:spcAft>
-            </a:pPr>
-            <a:r>
-              <a:rPr sz="1400" b="0" i="0">
-                <a:solidFill>
-                  <a:srgbClr val="FFFFFF"/>
-                </a:solidFill>
-                <a:latin typeface="Calibri"/>
-              </a:rPr>
-              <a:t/>
-            </a:r>
-          </a:p>
-          <a:p>
-            <a:pPr>
-              <a:spcAft>
-                <a:spcPts val="400"/>
-              </a:spcAft>
-            </a:pPr>
-            <a:r>
-              <a:rPr sz="1400" b="0" i="0">
-                <a:solidFill>
-                  <a:srgbClr val="FFFFFF"/>
-                </a:solidFill>
-                <a:latin typeface="Calibri"/>
-              </a:rPr>
-              <a:t>  Dado que escribo un nombre que no existe en el sistema</a:t>
-            </a:r>
-          </a:p>
-          <a:p>
-            <a:pPr>
-              <a:spcAft>
-                <a:spcPts val="400"/>
-              </a:spcAft>
-            </a:pPr>
-            <a:r>
-              <a:rPr sz="1400" b="0" i="0">
-                <a:solidFill>
-                  <a:srgbClr val="FFFFFF"/>
-                </a:solidFill>
-                <a:latin typeface="Calibri"/>
-              </a:rPr>
-              <a:t>  Cuando presiono Enter</a:t>
-            </a:r>
-          </a:p>
-          <a:p>
-            <a:pPr>
-              <a:spcAft>
-                <a:spcPts val="400"/>
-              </a:spcAft>
-            </a:pPr>
-            <a:r>
-              <a:rPr sz="1400" b="0" i="0">
-                <a:solidFill>
-                  <a:srgbClr val="FFFFFF"/>
-                </a:solidFill>
-                <a:latin typeface="Calibri"/>
-              </a:rPr>
-              <a:t>  Entonces veo 'No se encontro el paciente' y el boton Registrar nuevo</a:t>
-            </a:r>
-          </a:p>
-          <a:p>
-            <a:pPr>
-              <a:spcAft>
-                <a:spcPts val="400"/>
-              </a:spcAft>
-            </a:pPr>
-            <a:r>
-              <a:rPr sz="1400" b="0" i="0">
-                <a:solidFill>
-                  <a:srgbClr val="FFFFFF"/>
-                </a:solidFill>
-                <a:latin typeface="Calibri"/>
-              </a:rPr>
-              <a:t>Terminado = caso de uso + mockup + revision de un compañero + visto bueno del cliente</a:t>
+              <a:t>–   Mismo dominio: la clinica veterinaria — no otro ejemplo. Aqui se diseña, no se programa.</a:t>
             </a:r>
           </a:p>
         </p:txBody>
@@ -5925,41 +7952,6 @@
       <p:sp>
         <p:nvSpPr>
           <p:cNvPr id="9" name="TextBox 8"/>
-          <p:cNvSpPr txBox="1"/>
-          <p:nvPr/>
-        </p:nvSpPr>
-        <p:spPr>
-          <a:xfrm>
-            <a:off x="457200" y="6080760"/>
-            <a:ext cx="11277295" cy="320040"/>
-          </a:xfrm>
-          <a:prstGeom prst="rect">
-            <a:avLst/>
-          </a:prstGeom>
-          <a:noFill/>
-        </p:spPr>
-        <p:txBody>
-          <a:bodyPr wrap="square">
-            <a:spAutoFit/>
-          </a:bodyPr>
-          <a:lstStyle/>
-          <a:p>
-            <a:pPr algn="ctr"/>
-            <a:r>
-              <a:rPr sz="1200" b="0" i="1">
-                <a:solidFill>
-                  <a:srgbClr val="666666"/>
-                </a:solidFill>
-                <a:latin typeface="Calibri"/>
-              </a:rPr>
-              <a:t>La historia dice quien la necesita y para que; los criterios dicen como se demuestra que quedo lista, incluido el camino que sale mal.</a:t>
-            </a:r>
-          </a:p>
-        </p:txBody>
-      </p:sp>
-      <p:sp>
-        <p:nvSpPr>
-          <p:cNvPr id="10" name="TextBox 9"/>
           <p:cNvSpPr txBox="1"/>
           <p:nvPr/>
         </p:nvSpPr>
@@ -6027,294 +8019,6 @@
         <p:spPr>
           <a:xfrm>
             <a:off x="0" y="0"/>
-            <a:ext cx="12191695" cy="960120"/>
-          </a:xfrm>
-          <a:prstGeom prst="rect">
-            <a:avLst/>
-          </a:prstGeom>
-          <a:solidFill>
-            <a:srgbClr val="095292"/>
-          </a:solidFill>
-          <a:ln>
-            <a:noFill/>
-          </a:ln>
-        </p:spPr>
-        <p:style>
-          <a:lnRef idx="1">
-            <a:schemeClr val="accent1"/>
-          </a:lnRef>
-          <a:fillRef idx="3">
-            <a:schemeClr val="accent1"/>
-          </a:fillRef>
-          <a:effectRef idx="2">
-            <a:schemeClr val="accent1"/>
-          </a:effectRef>
-          <a:fontRef idx="minor">
-            <a:schemeClr val="lt1"/>
-          </a:fontRef>
-        </p:style>
-        <p:txBody>
-          <a:bodyPr rtlCol="0" anchor="ctr"/>
-          <a:lstStyle/>
-          <a:p>
-            <a:pPr algn="ctr"/>
-          </a:p>
-        </p:txBody>
-      </p:sp>
-      <p:sp>
-        <p:nvSpPr>
-          <p:cNvPr id="3" name="Rectangle 2"/>
-          <p:cNvSpPr/>
-          <p:nvPr/>
-        </p:nvSpPr>
-        <p:spPr>
-          <a:xfrm>
-            <a:off x="0" y="960120"/>
-            <a:ext cx="12191695" cy="41148"/>
-          </a:xfrm>
-          <a:prstGeom prst="rect">
-            <a:avLst/>
-          </a:prstGeom>
-          <a:solidFill>
-            <a:srgbClr val="FFD000"/>
-          </a:solidFill>
-          <a:ln>
-            <a:noFill/>
-          </a:ln>
-        </p:spPr>
-        <p:style>
-          <a:lnRef idx="1">
-            <a:schemeClr val="accent1"/>
-          </a:lnRef>
-          <a:fillRef idx="3">
-            <a:schemeClr val="accent1"/>
-          </a:fillRef>
-          <a:effectRef idx="2">
-            <a:schemeClr val="accent1"/>
-          </a:effectRef>
-          <a:fontRef idx="minor">
-            <a:schemeClr val="lt1"/>
-          </a:fontRef>
-        </p:style>
-        <p:txBody>
-          <a:bodyPr rtlCol="0" anchor="ctr"/>
-          <a:lstStyle/>
-          <a:p>
-            <a:pPr algn="ctr"/>
-          </a:p>
-        </p:txBody>
-      </p:sp>
-      <p:sp>
-        <p:nvSpPr>
-          <p:cNvPr id="4" name="TextBox 3"/>
-          <p:cNvSpPr txBox="1"/>
-          <p:nvPr/>
-        </p:nvSpPr>
-        <p:spPr>
-          <a:xfrm>
-            <a:off x="457200" y="164592"/>
-            <a:ext cx="11277295" cy="502920"/>
-          </a:xfrm>
-          <a:prstGeom prst="rect">
-            <a:avLst/>
-          </a:prstGeom>
-          <a:noFill/>
-        </p:spPr>
-        <p:txBody>
-          <a:bodyPr wrap="square">
-            <a:spAutoFit/>
-          </a:bodyPr>
-          <a:lstStyle/>
-          <a:p>
-            <a:r>
-              <a:rPr sz="2600" b="1" i="0">
-                <a:solidFill>
-                  <a:srgbClr val="FFFFFF"/>
-                </a:solidFill>
-                <a:latin typeface="Calibri"/>
-              </a:rPr>
-              <a:t>Demo del dia</a:t>
-            </a:r>
-          </a:p>
-        </p:txBody>
-      </p:sp>
-      <p:sp>
-        <p:nvSpPr>
-          <p:cNvPr id="5" name="TextBox 4"/>
-          <p:cNvSpPr txBox="1"/>
-          <p:nvPr/>
-        </p:nvSpPr>
-        <p:spPr>
-          <a:xfrm>
-            <a:off x="457200" y="1170432"/>
-            <a:ext cx="11277295" cy="5230368"/>
-          </a:xfrm>
-          <a:prstGeom prst="rect">
-            <a:avLst/>
-          </a:prstGeom>
-          <a:noFill/>
-        </p:spPr>
-        <p:txBody>
-          <a:bodyPr wrap="square">
-            <a:spAutoFit/>
-          </a:bodyPr>
-          <a:lstStyle/>
-          <a:p>
-            <a:pPr>
-              <a:spcAft>
-                <a:spcPts val="800"/>
-              </a:spcAft>
-            </a:pPr>
-            <a:r>
-              <a:rPr sz="2000" b="0" i="0">
-                <a:solidFill>
-                  <a:srgbClr val="333333"/>
-                </a:solidFill>
-                <a:latin typeface="Calibri"/>
-              </a:rPr>
-              <a:t>–   </a:t>
-            </a:r>
-            <a:r>
-              <a:rPr sz="2000" b="1" i="0">
-                <a:solidFill>
-                  <a:srgbClr val="333333"/>
-                </a:solidFill>
-                <a:latin typeface="Calibri"/>
-              </a:rPr>
-              <a:t>Herramienta:</a:t>
-            </a:r>
-            <a:r>
-              <a:rPr sz="2000" b="0" i="0">
-                <a:solidFill>
-                  <a:srgbClr val="333333"/>
-                </a:solidFill>
-                <a:latin typeface="Calibri"/>
-              </a:rPr>
-              <a:t> draw.io · Excalidraw · Google Docs</a:t>
-            </a:r>
-          </a:p>
-          <a:p>
-            <a:pPr>
-              <a:spcAft>
-                <a:spcPts val="800"/>
-              </a:spcAft>
-            </a:pPr>
-            <a:r>
-              <a:rPr sz="2000" b="0" i="0">
-                <a:solidFill>
-                  <a:srgbClr val="333333"/>
-                </a:solidFill>
-                <a:latin typeface="Calibri"/>
-              </a:rPr>
-              <a:t>–   </a:t>
-            </a:r>
-            <a:r>
-              <a:rPr sz="2000" b="1" i="0">
-                <a:solidFill>
-                  <a:srgbClr val="333333"/>
-                </a:solidFill>
-                <a:latin typeface="Calibri"/>
-              </a:rPr>
-              <a:t>Demo:</a:t>
-            </a:r>
-            <a:r>
-              <a:rPr sz="2000" b="0" i="0">
-                <a:solidFill>
-                  <a:srgbClr val="333333"/>
-                </a:solidFill>
-                <a:latin typeface="Calibri"/>
-              </a:rPr>
-              <a:t> Se arma en pantalla el tablero de la clinica, arrastra una tarjeta de 'Por hacer' a 'En revision del cliente' y muestra que pasa cuando se rompe el limite de trabajo en curso.</a:t>
-            </a:r>
-          </a:p>
-          <a:p>
-            <a:pPr>
-              <a:spcAft>
-                <a:spcPts val="800"/>
-              </a:spcAft>
-            </a:pPr>
-            <a:r>
-              <a:rPr sz="2000" b="0" i="0">
-                <a:solidFill>
-                  <a:srgbClr val="333333"/>
-                </a:solidFill>
-                <a:latin typeface="Calibri"/>
-              </a:rPr>
-              <a:t>–   Mismo dominio: la clinica veterinaria — no otro ejemplo. Aqui se diseña, no se programa.</a:t>
-            </a:r>
-          </a:p>
-        </p:txBody>
-      </p:sp>
-      <p:sp>
-        <p:nvSpPr>
-          <p:cNvPr id="6" name="TextBox 5"/>
-          <p:cNvSpPr txBox="1"/>
-          <p:nvPr/>
-        </p:nvSpPr>
-        <p:spPr>
-          <a:xfrm>
-            <a:off x="11185855" y="6473952"/>
-            <a:ext cx="640080" cy="274320"/>
-          </a:xfrm>
-          <a:prstGeom prst="rect">
-            <a:avLst/>
-          </a:prstGeom>
-          <a:noFill/>
-        </p:spPr>
-        <p:txBody>
-          <a:bodyPr wrap="square">
-            <a:spAutoFit/>
-          </a:bodyPr>
-          <a:lstStyle/>
-          <a:p>
-            <a:pPr algn="r"/>
-            <a:r>
-              <a:rPr sz="1100" b="0" i="0">
-                <a:solidFill>
-                  <a:srgbClr val="666666"/>
-                </a:solidFill>
-                <a:latin typeface="Calibri"/>
-              </a:rPr>
-              <a:t>13</a:t>
-            </a:r>
-          </a:p>
-        </p:txBody>
-      </p:sp>
-    </p:spTree>
-  </p:cSld>
-  <p:clrMapOvr>
-    <a:masterClrMapping/>
-  </p:clrMapOvr>
-</p:sld>
-</file>
-
-<file path=ppt/slides/slide14.xml><?xml version="1.0" encoding="utf-8"?>
-<p:sld xmlns:a="http://schemas.openxmlformats.org/drawingml/2006/main" xmlns:p="http://schemas.openxmlformats.org/presentationml/2006/main" xmlns:r="http://schemas.openxmlformats.org/officeDocument/2006/relationships">
-  <p:cSld>
-    <p:bg>
-      <p:bgPr>
-        <a:solidFill>
-          <a:srgbClr val="FFFFFF"/>
-        </a:solidFill>
-        <a:effectLst/>
-      </p:bgPr>
-    </p:bg>
-    <p:spTree>
-      <p:nvGrpSpPr>
-        <p:cNvPr id="1" name=""/>
-        <p:cNvGrpSpPr/>
-        <p:nvPr/>
-      </p:nvGrpSpPr>
-      <p:grpSpPr/>
-      <p:sp>
-        <p:nvSpPr>
-          <p:cNvPr id="2" name="Rectangle 1"/>
-          <p:cNvSpPr/>
-          <p:nvPr/>
-        </p:nvSpPr>
-        <p:spPr>
-          <a:xfrm>
-            <a:off x="0" y="0"/>
             <a:ext cx="12191695" cy="164592"/>
           </a:xfrm>
           <a:prstGeom prst="rect">
@@ -6660,14 +8364,118 @@
       </p:sp>
       <p:sp>
         <p:nvSpPr>
-          <p:cNvPr id="5" name="TextBox 4"/>
+          <p:cNvPr id="5" name="Rounded Rectangle 4"/>
+          <p:cNvSpPr/>
+          <p:nvPr/>
+        </p:nvSpPr>
+        <p:spPr>
+          <a:xfrm>
+            <a:off x="5797149" y="1573813"/>
+            <a:ext cx="6010497" cy="4057845"/>
+          </a:xfrm>
+          <a:prstGeom prst="roundRect">
+            <a:avLst>
+              <a:gd name="adj" fmla="val 4000"/>
+            </a:avLst>
+          </a:prstGeom>
+          <a:solidFill>
+            <a:srgbClr val="E8EEF4"/>
+          </a:solidFill>
+          <a:ln>
+            <a:noFill/>
+          </a:ln>
+        </p:spPr>
+        <p:style>
+          <a:lnRef idx="1">
+            <a:schemeClr val="accent1"/>
+          </a:lnRef>
+          <a:fillRef idx="3">
+            <a:schemeClr val="accent1"/>
+          </a:fillRef>
+          <a:effectRef idx="2">
+            <a:schemeClr val="accent1"/>
+          </a:effectRef>
+          <a:fontRef idx="minor">
+            <a:schemeClr val="lt1"/>
+          </a:fontRef>
+        </p:style>
+        <p:txBody>
+          <a:bodyPr rtlCol="0" anchor="ctr"/>
+          <a:lstStyle/>
+          <a:p>
+            <a:pPr algn="ctr"/>
+          </a:p>
+        </p:txBody>
+      </p:sp>
+      <p:pic>
+        <p:nvPicPr>
+          <p:cNvPr id="6" name="Picture 5" descr="notebook-planning-desk-coffee.jpg"/>
+          <p:cNvPicPr>
+            <a:picLocks noChangeAspect="1"/>
+          </p:cNvPicPr>
+          <p:nvPr/>
+        </p:nvPicPr>
+        <p:blipFill>
+          <a:blip r:embed="rId2"/>
+          <a:stretch>
+            <a:fillRect/>
+          </a:stretch>
+        </p:blipFill>
+        <p:spPr>
+          <a:xfrm>
+            <a:off x="5870301" y="1646965"/>
+            <a:ext cx="5864193" cy="3911541"/>
+          </a:xfrm>
+          <a:prstGeom prst="rect">
+            <a:avLst/>
+          </a:prstGeom>
+        </p:spPr>
+      </p:pic>
+      <p:sp>
+        <p:nvSpPr>
+          <p:cNvPr id="7" name="TextBox 6"/>
           <p:cNvSpPr txBox="1"/>
           <p:nvPr/>
         </p:nvSpPr>
         <p:spPr>
           <a:xfrm>
-            <a:off x="457200" y="1170432"/>
-            <a:ext cx="11277295" cy="5230368"/>
+            <a:off x="5870301" y="5961888"/>
+            <a:ext cx="5864193" cy="320040"/>
+          </a:xfrm>
+          <a:prstGeom prst="rect">
+            <a:avLst/>
+          </a:prstGeom>
+          <a:noFill/>
+        </p:spPr>
+        <p:txBody>
+          <a:bodyPr wrap="square">
+            <a:spAutoFit/>
+          </a:bodyPr>
+          <a:lstStyle/>
+          <a:p>
+            <a:pPr algn="ctr"/>
+            <a:r>
+              <a:rPr sz="1100" b="0" i="1">
+                <a:solidFill>
+                  <a:srgbClr val="666666"/>
+                </a:solidFill>
+                <a:latin typeface="Calibri"/>
+              </a:rPr>
+              <a:t>Foto: Cup of  Couple · Pexels</a:t>
+            </a:r>
+          </a:p>
+        </p:txBody>
+      </p:sp>
+      <p:sp>
+        <p:nvSpPr>
+          <p:cNvPr id="8" name="TextBox 7"/>
+          <p:cNvSpPr txBox="1"/>
+          <p:nvPr/>
+        </p:nvSpPr>
+        <p:spPr>
+          <a:xfrm>
+            <a:off x="457200" y="1353312"/>
+            <a:ext cx="5093061" cy="5047488"/>
           </a:xfrm>
           <a:prstGeom prst="rect">
             <a:avLst/>
@@ -6792,7 +8600,7 @@
       </p:sp>
       <p:sp>
         <p:nvSpPr>
-          <p:cNvPr id="6" name="TextBox 5"/>
+          <p:cNvPr id="9" name="TextBox 8"/>
           <p:cNvSpPr txBox="1"/>
           <p:nvPr/>
         </p:nvSpPr>
@@ -7818,21 +9626,173 @@
                 </a:solidFill>
                 <a:latin typeface="Calibri"/>
               </a:rPr>
-              <a:t>El manifiesto agil se firmo en 2001 por diecisiete personas cansadas de...</a:t>
-            </a:r>
-          </a:p>
-        </p:txBody>
-      </p:sp>
-      <p:sp>
-        <p:nvSpPr>
-          <p:cNvPr id="5" name="TextBox 4"/>
+              <a:t>El manifiesto ágil</a:t>
+            </a:r>
+          </a:p>
+        </p:txBody>
+      </p:sp>
+      <p:sp>
+        <p:nvSpPr>
+          <p:cNvPr id="5" name="Rounded Rectangle 4"/>
+          <p:cNvSpPr/>
+          <p:nvPr/>
+        </p:nvSpPr>
+        <p:spPr>
+          <a:xfrm>
+            <a:off x="5803166" y="1188719"/>
+            <a:ext cx="5998464" cy="4828032"/>
+          </a:xfrm>
+          <a:prstGeom prst="roundRect">
+            <a:avLst>
+              <a:gd name="adj" fmla="val 4000"/>
+            </a:avLst>
+          </a:prstGeom>
+          <a:solidFill>
+            <a:srgbClr val="E8EEF4"/>
+          </a:solidFill>
+          <a:ln>
+            <a:noFill/>
+          </a:ln>
+        </p:spPr>
+        <p:style>
+          <a:lnRef idx="1">
+            <a:schemeClr val="accent1"/>
+          </a:lnRef>
+          <a:fillRef idx="3">
+            <a:schemeClr val="accent1"/>
+          </a:fillRef>
+          <a:effectRef idx="2">
+            <a:schemeClr val="accent1"/>
+          </a:effectRef>
+          <a:fontRef idx="minor">
+            <a:schemeClr val="lt1"/>
+          </a:fontRef>
+        </p:style>
+        <p:txBody>
+          <a:bodyPr rtlCol="0" anchor="ctr"/>
+          <a:lstStyle/>
+          <a:p>
+            <a:pPr algn="ctr"/>
+          </a:p>
+        </p:txBody>
+      </p:sp>
+      <p:pic>
+        <p:nvPicPr>
+          <p:cNvPr id="6" name="Picture 5" descr="manifiesto-sobre-paso1.png"/>
+          <p:cNvPicPr>
+            <a:picLocks noChangeAspect="1"/>
+          </p:cNvPicPr>
+          <p:nvPr/>
+        </p:nvPicPr>
+        <p:blipFill>
+          <a:blip r:embed="rId2"/>
+          <a:stretch>
+            <a:fillRect/>
+          </a:stretch>
+        </p:blipFill>
+        <p:spPr>
+          <a:xfrm>
+            <a:off x="5876318" y="1261872"/>
+            <a:ext cx="5852160" cy="4681728"/>
+          </a:xfrm>
+          <a:prstGeom prst="rect">
+            <a:avLst/>
+          </a:prstGeom>
+        </p:spPr>
+      </p:pic>
+      <p:pic>
+        <p:nvPicPr>
+          <p:cNvPr id="7" name="Picture 6" descr="manifiesto-sobre-paso2.png"/>
+          <p:cNvPicPr>
+            <a:picLocks noChangeAspect="1"/>
+          </p:cNvPicPr>
+          <p:nvPr/>
+        </p:nvPicPr>
+        <p:blipFill>
+          <a:blip r:embed="rId3"/>
+          <a:stretch>
+            <a:fillRect/>
+          </a:stretch>
+        </p:blipFill>
+        <p:spPr>
+          <a:xfrm>
+            <a:off x="5876318" y="1261872"/>
+            <a:ext cx="5852160" cy="4681728"/>
+          </a:xfrm>
+          <a:prstGeom prst="rect">
+            <a:avLst/>
+          </a:prstGeom>
+        </p:spPr>
+      </p:pic>
+      <p:pic>
+        <p:nvPicPr>
+          <p:cNvPr id="8" name="Picture 7" descr="manifiesto-sobre-paso3.png"/>
+          <p:cNvPicPr>
+            <a:picLocks noChangeAspect="1"/>
+          </p:cNvPicPr>
+          <p:nvPr/>
+        </p:nvPicPr>
+        <p:blipFill>
+          <a:blip r:embed="rId4"/>
+          <a:stretch>
+            <a:fillRect/>
+          </a:stretch>
+        </p:blipFill>
+        <p:spPr>
+          <a:xfrm>
+            <a:off x="5876318" y="1261872"/>
+            <a:ext cx="5852160" cy="4681728"/>
+          </a:xfrm>
+          <a:prstGeom prst="rect">
+            <a:avLst/>
+          </a:prstGeom>
+        </p:spPr>
+      </p:pic>
+      <p:sp>
+        <p:nvSpPr>
+          <p:cNvPr id="13" name="TextBox 12"/>
           <p:cNvSpPr txBox="1"/>
           <p:nvPr/>
         </p:nvSpPr>
         <p:spPr>
           <a:xfrm>
-            <a:off x="457200" y="1170432"/>
-            <a:ext cx="11277295" cy="5230368"/>
+            <a:off x="5870301" y="5961888"/>
+            <a:ext cx="5864193" cy="320040"/>
+          </a:xfrm>
+          <a:prstGeom prst="rect">
+            <a:avLst/>
+          </a:prstGeom>
+          <a:noFill/>
+        </p:spPr>
+        <p:txBody>
+          <a:bodyPr wrap="square">
+            <a:spAutoFit/>
+          </a:bodyPr>
+          <a:lstStyle/>
+          <a:p>
+            <a:pPr algn="ctr"/>
+            <a:r>
+              <a:rPr sz="1100" b="0" i="1">
+                <a:solidFill>
+                  <a:srgbClr val="666666"/>
+                </a:solidFill>
+                <a:latin typeface="Calibri"/>
+              </a:rPr>
+              <a:t>Clic para avanzar la animación</a:t>
+            </a:r>
+          </a:p>
+        </p:txBody>
+      </p:sp>
+      <p:sp>
+        <p:nvSpPr>
+          <p:cNvPr id="14" name="TextBox 13"/>
+          <p:cNvSpPr txBox="1"/>
+          <p:nvPr/>
+        </p:nvSpPr>
+        <p:spPr>
+          <a:xfrm>
+            <a:off x="457200" y="1353312"/>
+            <a:ext cx="5093061" cy="5047488"/>
           </a:xfrm>
           <a:prstGeom prst="rect">
             <a:avLst/>
@@ -7857,7 +9817,7 @@
                 </a:solidFill>
                 <a:latin typeface="Calibri"/>
               </a:rPr>
-              <a:t>–   El manifiesto agil se firmo en 2001 por diecisiete personas cansadas de proyectos que entregaban documentos perfectos y sistemas inservibles.</a:t>
+              <a:t>–   Firmado en 2001 por diecisiete personas cansadas de documentos perfectos y sistemas inservibles.</a:t>
             </a:r>
           </a:p>
           <a:p>
@@ -7873,7 +9833,7 @@
                 </a:solidFill>
                 <a:latin typeface="Calibri"/>
               </a:rPr>
-              <a:t>–   Tiene cuatro valores y la clave esta en la palabra que los une: 'sobre'.</a:t>
+              <a:t>–   Cuatro valores unidos por «sobre»: individuos sobre procesos, software funcionando sobre documentación exhaustiva, colaboración sobre contrato…</a:t>
             </a:r>
           </a:p>
           <a:p>
@@ -7889,7 +9849,7 @@
                 </a:solidFill>
                 <a:latin typeface="Calibri"/>
               </a:rPr>
-              <a:t>–   Dice sobre, no 'en vez de': lo de la derecha sigue teniendo valor, solo que lo de la izquierda tiene mas.</a:t>
+              <a:t>–   «Sobre» no es «en vez de»: lo de la derecha sigue valiendo.</a:t>
             </a:r>
           </a:p>
           <a:p>
@@ -7905,30 +9865,14 @@
                 </a:solidFill>
                 <a:latin typeface="Calibri"/>
               </a:rPr>
-              <a:t>–   Ademas hay doce principios, y tres son muy utiles aqui: entregar valor pronto y con frecuencia, aceptar el cambio incluso tarde, y mantener un ritmo sostenible.</a:t>
-            </a:r>
-          </a:p>
-          <a:p>
-            <a:pPr>
-              <a:spcAft>
-                <a:spcPts val="800"/>
-              </a:spcAft>
-            </a:pPr>
-            <a:r>
-              <a:rPr sz="2000" b="0" i="0">
-                <a:solidFill>
-                  <a:srgbClr val="333333"/>
-                </a:solidFill>
-                <a:latin typeface="Calibri"/>
-              </a:rPr>
-              <a:t>–   En la clinica esto se traduce en algo muy concreto: es mejor mostrarle a la clinica un mockup imperfecto de la ficha en la semana tres que un documento de ochenta paginas en la semana quince.</a:t>
-            </a:r>
-          </a:p>
-        </p:txBody>
-      </p:sp>
-      <p:sp>
-        <p:nvSpPr>
-          <p:cNvPr id="6" name="TextBox 5"/>
+              <a:t>–   Mejor un mockup imperfecto en la semana 3 que ochenta páginas en la 15.</a:t>
+            </a:r>
+          </a:p>
+        </p:txBody>
+      </p:sp>
+      <p:sp>
+        <p:nvSpPr>
+          <p:cNvPr id="15" name="TextBox 14"/>
           <p:cNvSpPr txBox="1"/>
           <p:nvPr/>
         </p:nvSpPr>
@@ -7966,6 +9910,142 @@
   <p:clrMapOvr>
     <a:masterClrMapping/>
   </p:clrMapOvr>
+  <p:timing>
+    <p:tnLst>
+      <p:par>
+        <p:cTn id="1" dur="indefinite" restart="never" nodeType="tmRoot">
+          <p:childTnLst>
+            <p:seq concurrent="1" nextAc="seek">
+              <p:cTn id="2" dur="indefinite" nodeType="mainSeq">
+                <p:childTnLst>
+                  <p:par>
+                    <p:cTn id="3" fill="hold">
+                      <p:stCondLst>
+                        <p:cond delay="indefinite"/>
+                      </p:stCondLst>
+                      <p:childTnLst>
+                        <p:par>
+                          <p:cTn id="4" fill="hold">
+                            <p:stCondLst>
+                              <p:cond delay="0"/>
+                            </p:stCondLst>
+                            <p:childTnLst>
+                              <p:par>
+                                <p:cTn id="5" presetID="10" presetClass="entr" presetSubtype="0" fill="hold" nodeType="clickEffect">
+                                  <p:stCondLst>
+                                    <p:cond delay="0"/>
+                                  </p:stCondLst>
+                                  <p:childTnLst>
+                                    <p:set>
+                                      <p:cBhvr>
+                                        <p:cTn id="6" dur="1" fill="hold">
+                                          <p:stCondLst>
+                                            <p:cond delay="0"/>
+                                          </p:stCondLst>
+                                        </p:cTn>
+                                        <p:tgtEl>
+                                          <p:spTgt spid="7"/>
+                                        </p:tgtEl>
+                                        <p:attrNameLst>
+                                          <p:attrName>style.visibility</p:attrName>
+                                        </p:attrNameLst>
+                                      </p:cBhvr>
+                                      <p:to>
+                                        <p:strVal val="visible"/>
+                                      </p:to>
+                                    </p:set>
+                                    <p:animEffect transition="in" filter="fade">
+                                      <p:cBhvr>
+                                        <p:cTn id="7" dur="450"/>
+                                        <p:tgtEl>
+                                          <p:spTgt spid="7"/>
+                                        </p:tgtEl>
+                                      </p:cBhvr>
+                                    </p:animEffect>
+                                  </p:childTnLst>
+                                </p:cTn>
+                              </p:par>
+                            </p:childTnLst>
+                          </p:cTn>
+                        </p:par>
+                      </p:childTnLst>
+                    </p:cTn>
+                  </p:par>
+                  <p:par>
+                    <p:cTn id="8" fill="hold">
+                      <p:stCondLst>
+                        <p:cond delay="indefinite"/>
+                      </p:stCondLst>
+                      <p:childTnLst>
+                        <p:par>
+                          <p:cTn id="9" fill="hold">
+                            <p:stCondLst>
+                              <p:cond delay="0"/>
+                            </p:stCondLst>
+                            <p:childTnLst>
+                              <p:par>
+                                <p:cTn id="10" presetID="10" presetClass="entr" presetSubtype="0" fill="hold" nodeType="clickEffect">
+                                  <p:stCondLst>
+                                    <p:cond delay="0"/>
+                                  </p:stCondLst>
+                                  <p:childTnLst>
+                                    <p:set>
+                                      <p:cBhvr>
+                                        <p:cTn id="11" dur="1" fill="hold">
+                                          <p:stCondLst>
+                                            <p:cond delay="0"/>
+                                          </p:stCondLst>
+                                        </p:cTn>
+                                        <p:tgtEl>
+                                          <p:spTgt spid="8"/>
+                                        </p:tgtEl>
+                                        <p:attrNameLst>
+                                          <p:attrName>style.visibility</p:attrName>
+                                        </p:attrNameLst>
+                                      </p:cBhvr>
+                                      <p:to>
+                                        <p:strVal val="visible"/>
+                                      </p:to>
+                                    </p:set>
+                                    <p:animEffect transition="in" filter="fade">
+                                      <p:cBhvr>
+                                        <p:cTn id="12" dur="450"/>
+                                        <p:tgtEl>
+                                          <p:spTgt spid="8"/>
+                                        </p:tgtEl>
+                                      </p:cBhvr>
+                                    </p:animEffect>
+                                  </p:childTnLst>
+                                </p:cTn>
+                              </p:par>
+                            </p:childTnLst>
+                          </p:cTn>
+                        </p:par>
+                      </p:childTnLst>
+                    </p:cTn>
+                  </p:par>
+                </p:childTnLst>
+              </p:cTn>
+              <p:prevCondLst>
+                <p:cond evt="onPrev" delay="0">
+                  <p:tgtEl>
+                    <p:sldTgt/>
+                  </p:tgtEl>
+                </p:cond>
+              </p:prevCondLst>
+              <p:nextCondLst>
+                <p:cond evt="onNext" delay="0">
+                  <p:tgtEl>
+                    <p:sldTgt/>
+                  </p:tgtEl>
+                </p:cond>
+              </p:nextCondLst>
+            </p:seq>
+          </p:childTnLst>
+        </p:cTn>
+      </p:par>
+    </p:tnLst>
+  </p:timing>
 </p:sld>
 </file>
 
@@ -8102,21 +10182,173 @@
                 </a:solidFill>
                 <a:latin typeface="Calibri"/>
               </a:rPr>
-              <a:t>Scrum es un marco de trabajo, no una metodologia completa: define lo...</a:t>
-            </a:r>
-          </a:p>
-        </p:txBody>
-      </p:sp>
-      <p:sp>
-        <p:nvSpPr>
-          <p:cNvPr id="5" name="TextBox 4"/>
+              <a:t>Scrum: roles, eventos y artefactos</a:t>
+            </a:r>
+          </a:p>
+        </p:txBody>
+      </p:sp>
+      <p:sp>
+        <p:nvSpPr>
+          <p:cNvPr id="5" name="Rounded Rectangle 4"/>
+          <p:cNvSpPr/>
+          <p:nvPr/>
+        </p:nvSpPr>
+        <p:spPr>
+          <a:xfrm>
+            <a:off x="5803166" y="1188719"/>
+            <a:ext cx="5998464" cy="4828032"/>
+          </a:xfrm>
+          <a:prstGeom prst="roundRect">
+            <a:avLst>
+              <a:gd name="adj" fmla="val 4000"/>
+            </a:avLst>
+          </a:prstGeom>
+          <a:solidFill>
+            <a:srgbClr val="E8EEF4"/>
+          </a:solidFill>
+          <a:ln>
+            <a:noFill/>
+          </a:ln>
+        </p:spPr>
+        <p:style>
+          <a:lnRef idx="1">
+            <a:schemeClr val="accent1"/>
+          </a:lnRef>
+          <a:fillRef idx="3">
+            <a:schemeClr val="accent1"/>
+          </a:fillRef>
+          <a:effectRef idx="2">
+            <a:schemeClr val="accent1"/>
+          </a:effectRef>
+          <a:fontRef idx="minor">
+            <a:schemeClr val="lt1"/>
+          </a:fontRef>
+        </p:style>
+        <p:txBody>
+          <a:bodyPr rtlCol="0" anchor="ctr"/>
+          <a:lstStyle/>
+          <a:p>
+            <a:pPr algn="ctr"/>
+          </a:p>
+        </p:txBody>
+      </p:sp>
+      <p:pic>
+        <p:nvPicPr>
+          <p:cNvPr id="6" name="Picture 5" descr="ciclo-scrum-paso1.png"/>
+          <p:cNvPicPr>
+            <a:picLocks noChangeAspect="1"/>
+          </p:cNvPicPr>
+          <p:nvPr/>
+        </p:nvPicPr>
+        <p:blipFill>
+          <a:blip r:embed="rId2"/>
+          <a:stretch>
+            <a:fillRect/>
+          </a:stretch>
+        </p:blipFill>
+        <p:spPr>
+          <a:xfrm>
+            <a:off x="5876318" y="1261872"/>
+            <a:ext cx="5852160" cy="4681728"/>
+          </a:xfrm>
+          <a:prstGeom prst="rect">
+            <a:avLst/>
+          </a:prstGeom>
+        </p:spPr>
+      </p:pic>
+      <p:pic>
+        <p:nvPicPr>
+          <p:cNvPr id="7" name="Picture 6" descr="ciclo-scrum-paso2.png"/>
+          <p:cNvPicPr>
+            <a:picLocks noChangeAspect="1"/>
+          </p:cNvPicPr>
+          <p:nvPr/>
+        </p:nvPicPr>
+        <p:blipFill>
+          <a:blip r:embed="rId3"/>
+          <a:stretch>
+            <a:fillRect/>
+          </a:stretch>
+        </p:blipFill>
+        <p:spPr>
+          <a:xfrm>
+            <a:off x="5876318" y="1261872"/>
+            <a:ext cx="5852160" cy="4681728"/>
+          </a:xfrm>
+          <a:prstGeom prst="rect">
+            <a:avLst/>
+          </a:prstGeom>
+        </p:spPr>
+      </p:pic>
+      <p:pic>
+        <p:nvPicPr>
+          <p:cNvPr id="8" name="Picture 7" descr="ciclo-scrum-paso3.png"/>
+          <p:cNvPicPr>
+            <a:picLocks noChangeAspect="1"/>
+          </p:cNvPicPr>
+          <p:nvPr/>
+        </p:nvPicPr>
+        <p:blipFill>
+          <a:blip r:embed="rId4"/>
+          <a:stretch>
+            <a:fillRect/>
+          </a:stretch>
+        </p:blipFill>
+        <p:spPr>
+          <a:xfrm>
+            <a:off x="5876318" y="1261872"/>
+            <a:ext cx="5852160" cy="4681728"/>
+          </a:xfrm>
+          <a:prstGeom prst="rect">
+            <a:avLst/>
+          </a:prstGeom>
+        </p:spPr>
+      </p:pic>
+      <p:sp>
+        <p:nvSpPr>
+          <p:cNvPr id="13" name="TextBox 12"/>
           <p:cNvSpPr txBox="1"/>
           <p:nvPr/>
         </p:nvSpPr>
         <p:spPr>
           <a:xfrm>
-            <a:off x="457200" y="1170432"/>
-            <a:ext cx="11277295" cy="5230368"/>
+            <a:off x="5870301" y="5961888"/>
+            <a:ext cx="5864193" cy="320040"/>
+          </a:xfrm>
+          <a:prstGeom prst="rect">
+            <a:avLst/>
+          </a:prstGeom>
+          <a:noFill/>
+        </p:spPr>
+        <p:txBody>
+          <a:bodyPr wrap="square">
+            <a:spAutoFit/>
+          </a:bodyPr>
+          <a:lstStyle/>
+          <a:p>
+            <a:pPr algn="ctr"/>
+            <a:r>
+              <a:rPr sz="1100" b="0" i="1">
+                <a:solidFill>
+                  <a:srgbClr val="666666"/>
+                </a:solidFill>
+                <a:latin typeface="Calibri"/>
+              </a:rPr>
+              <a:t>Clic para avanzar la animación</a:t>
+            </a:r>
+          </a:p>
+        </p:txBody>
+      </p:sp>
+      <p:sp>
+        <p:nvSpPr>
+          <p:cNvPr id="14" name="TextBox 13"/>
+          <p:cNvSpPr txBox="1"/>
+          <p:nvPr/>
+        </p:nvSpPr>
+        <p:spPr>
+          <a:xfrm>
+            <a:off x="457200" y="1353312"/>
+            <a:ext cx="5093061" cy="5047488"/>
           </a:xfrm>
           <a:prstGeom prst="rect">
             <a:avLst/>
@@ -8141,7 +10373,7 @@
                 </a:solidFill>
                 <a:latin typeface="Calibri"/>
               </a:rPr>
-              <a:t>–   Scrum es un marco de trabajo, no una metodologia completa: define lo minimo y deja que cada equipo llene el resto.</a:t>
+              <a:t>–   Un marco, no una metodología completa: define lo mínimo.</a:t>
             </a:r>
           </a:p>
           <a:p>
@@ -8157,7 +10389,7 @@
                 </a:solidFill>
                 <a:latin typeface="Calibri"/>
               </a:rPr>
-              <a:t>–   Tiene tres roles: el Product Owner, que decide QUE se hace y en que orden, y es el dueño del Product Backlog; el Scrum Master, que facilita, protege al equipo y quita impedimentos</a:t>
+              <a:t>–   Roles: Product Owner (QUÉ y en qué orden), Scrum Master (facilita, no es el jefe) y equipo de desarrollo (CÓMO).</a:t>
             </a:r>
           </a:p>
           <a:p>
@@ -8173,7 +10405,7 @@
                 </a:solidFill>
                 <a:latin typeface="Calibri"/>
               </a:rPr>
-              <a:t>–   Y que no es el jefe; y el equipo de desarrollo, que decide COMO hacerlo y se autoorganiza.</a:t>
+              <a:t>–   Eventos: Sprint de 1 a 4 semanas, Planificación, Diaria de 15 min, Revisión y Retrospectiva.</a:t>
             </a:r>
           </a:p>
           <a:p>
@@ -8189,46 +10421,14 @@
                 </a:solidFill>
                 <a:latin typeface="Calibri"/>
               </a:rPr>
-              <a:t>–   Tiene cinco eventos: el Sprint, que es el contenedor de duracion fija (una a cuatro semanas), la Planificacion, la Reunion diaria de quince minutos para sincronizarse</a:t>
-            </a:r>
-          </a:p>
-          <a:p>
-            <a:pPr>
-              <a:spcAft>
-                <a:spcPts val="800"/>
-              </a:spcAft>
-            </a:pPr>
-            <a:r>
-              <a:rPr sz="2000" b="0" i="0">
-                <a:solidFill>
-                  <a:srgbClr val="333333"/>
-                </a:solidFill>
-                <a:latin typeface="Calibri"/>
-              </a:rPr>
-              <a:t>–   La Revision donde se le muestra el incremento al cliente, y la Retrospectiva donde se mejora la forma de trabajar.</a:t>
-            </a:r>
-          </a:p>
-          <a:p>
-            <a:pPr>
-              <a:spcAft>
-                <a:spcPts val="800"/>
-              </a:spcAft>
-            </a:pPr>
-            <a:r>
-              <a:rPr sz="2000" b="0" i="0">
-                <a:solidFill>
-                  <a:srgbClr val="333333"/>
-                </a:solidFill>
-                <a:latin typeface="Calibri"/>
-              </a:rPr>
-              <a:t>–   Y tiene tres artefactos: Product Backlog, Sprint Backlog e Incremento, este ultimo gobernado por la Definicion de Terminado.</a:t>
-            </a:r>
-          </a:p>
-        </p:txBody>
-      </p:sp>
-      <p:sp>
-        <p:nvSpPr>
-          <p:cNvPr id="6" name="TextBox 5"/>
+              <a:t>–   Artefactos: Product Backlog, Sprint Backlog e Incremento, con su Definición de Terminado.</a:t>
+            </a:r>
+          </a:p>
+        </p:txBody>
+      </p:sp>
+      <p:sp>
+        <p:nvSpPr>
+          <p:cNvPr id="15" name="TextBox 14"/>
           <p:cNvSpPr txBox="1"/>
           <p:nvPr/>
         </p:nvSpPr>
@@ -8266,6 +10466,142 @@
   <p:clrMapOvr>
     <a:masterClrMapping/>
   </p:clrMapOvr>
+  <p:timing>
+    <p:tnLst>
+      <p:par>
+        <p:cTn id="1" dur="indefinite" restart="never" nodeType="tmRoot">
+          <p:childTnLst>
+            <p:seq concurrent="1" nextAc="seek">
+              <p:cTn id="2" dur="indefinite" nodeType="mainSeq">
+                <p:childTnLst>
+                  <p:par>
+                    <p:cTn id="3" fill="hold">
+                      <p:stCondLst>
+                        <p:cond delay="indefinite"/>
+                      </p:stCondLst>
+                      <p:childTnLst>
+                        <p:par>
+                          <p:cTn id="4" fill="hold">
+                            <p:stCondLst>
+                              <p:cond delay="0"/>
+                            </p:stCondLst>
+                            <p:childTnLst>
+                              <p:par>
+                                <p:cTn id="5" presetID="10" presetClass="entr" presetSubtype="0" fill="hold" nodeType="clickEffect">
+                                  <p:stCondLst>
+                                    <p:cond delay="0"/>
+                                  </p:stCondLst>
+                                  <p:childTnLst>
+                                    <p:set>
+                                      <p:cBhvr>
+                                        <p:cTn id="6" dur="1" fill="hold">
+                                          <p:stCondLst>
+                                            <p:cond delay="0"/>
+                                          </p:stCondLst>
+                                        </p:cTn>
+                                        <p:tgtEl>
+                                          <p:spTgt spid="7"/>
+                                        </p:tgtEl>
+                                        <p:attrNameLst>
+                                          <p:attrName>style.visibility</p:attrName>
+                                        </p:attrNameLst>
+                                      </p:cBhvr>
+                                      <p:to>
+                                        <p:strVal val="visible"/>
+                                      </p:to>
+                                    </p:set>
+                                    <p:animEffect transition="in" filter="fade">
+                                      <p:cBhvr>
+                                        <p:cTn id="7" dur="450"/>
+                                        <p:tgtEl>
+                                          <p:spTgt spid="7"/>
+                                        </p:tgtEl>
+                                      </p:cBhvr>
+                                    </p:animEffect>
+                                  </p:childTnLst>
+                                </p:cTn>
+                              </p:par>
+                            </p:childTnLst>
+                          </p:cTn>
+                        </p:par>
+                      </p:childTnLst>
+                    </p:cTn>
+                  </p:par>
+                  <p:par>
+                    <p:cTn id="8" fill="hold">
+                      <p:stCondLst>
+                        <p:cond delay="indefinite"/>
+                      </p:stCondLst>
+                      <p:childTnLst>
+                        <p:par>
+                          <p:cTn id="9" fill="hold">
+                            <p:stCondLst>
+                              <p:cond delay="0"/>
+                            </p:stCondLst>
+                            <p:childTnLst>
+                              <p:par>
+                                <p:cTn id="10" presetID="10" presetClass="entr" presetSubtype="0" fill="hold" nodeType="clickEffect">
+                                  <p:stCondLst>
+                                    <p:cond delay="0"/>
+                                  </p:stCondLst>
+                                  <p:childTnLst>
+                                    <p:set>
+                                      <p:cBhvr>
+                                        <p:cTn id="11" dur="1" fill="hold">
+                                          <p:stCondLst>
+                                            <p:cond delay="0"/>
+                                          </p:stCondLst>
+                                        </p:cTn>
+                                        <p:tgtEl>
+                                          <p:spTgt spid="8"/>
+                                        </p:tgtEl>
+                                        <p:attrNameLst>
+                                          <p:attrName>style.visibility</p:attrName>
+                                        </p:attrNameLst>
+                                      </p:cBhvr>
+                                      <p:to>
+                                        <p:strVal val="visible"/>
+                                      </p:to>
+                                    </p:set>
+                                    <p:animEffect transition="in" filter="fade">
+                                      <p:cBhvr>
+                                        <p:cTn id="12" dur="450"/>
+                                        <p:tgtEl>
+                                          <p:spTgt spid="8"/>
+                                        </p:tgtEl>
+                                      </p:cBhvr>
+                                    </p:animEffect>
+                                  </p:childTnLst>
+                                </p:cTn>
+                              </p:par>
+                            </p:childTnLst>
+                          </p:cTn>
+                        </p:par>
+                      </p:childTnLst>
+                    </p:cTn>
+                  </p:par>
+                </p:childTnLst>
+              </p:cTn>
+              <p:prevCondLst>
+                <p:cond evt="onPrev" delay="0">
+                  <p:tgtEl>
+                    <p:sldTgt/>
+                  </p:tgtEl>
+                </p:cond>
+              </p:prevCondLst>
+              <p:nextCondLst>
+                <p:cond evt="onNext" delay="0">
+                  <p:tgtEl>
+                    <p:sldTgt/>
+                  </p:tgtEl>
+                </p:cond>
+              </p:nextCondLst>
+            </p:seq>
+          </p:childTnLst>
+        </p:cTn>
+      </p:par>
+    </p:tnLst>
+  </p:timing>
 </p:sld>
 </file>
 
@@ -8402,21 +10738,238 @@
                 </a:solidFill>
                 <a:latin typeface="Calibri"/>
               </a:rPr>
-              <a:t>Kanban viene de otra tradicion y su promesa es distinta: no impone...</a:t>
-            </a:r>
-          </a:p>
-        </p:txBody>
-      </p:sp>
-      <p:sp>
-        <p:nvSpPr>
-          <p:cNvPr id="5" name="TextBox 4"/>
+              <a:t>El plan de sprints en Mermaid (gantt)</a:t>
+            </a:r>
+          </a:p>
+        </p:txBody>
+      </p:sp>
+      <p:sp>
+        <p:nvSpPr>
+          <p:cNvPr id="5" name="Rounded Rectangle 4"/>
+          <p:cNvSpPr/>
+          <p:nvPr/>
+        </p:nvSpPr>
+        <p:spPr>
+          <a:xfrm>
+            <a:off x="457200" y="1261872"/>
+            <a:ext cx="11277295" cy="5031343"/>
+          </a:xfrm>
+          <a:prstGeom prst="roundRect">
+            <a:avLst>
+              <a:gd name="adj" fmla="val 4000"/>
+            </a:avLst>
+          </a:prstGeom>
+          <a:solidFill>
+            <a:srgbClr val="1E1E1E"/>
+          </a:solidFill>
+          <a:ln>
+            <a:noFill/>
+          </a:ln>
+        </p:spPr>
+        <p:style>
+          <a:lnRef idx="1">
+            <a:schemeClr val="accent1"/>
+          </a:lnRef>
+          <a:fillRef idx="3">
+            <a:schemeClr val="accent1"/>
+          </a:fillRef>
+          <a:effectRef idx="2">
+            <a:schemeClr val="accent1"/>
+          </a:effectRef>
+          <a:fontRef idx="minor">
+            <a:schemeClr val="lt1"/>
+          </a:fontRef>
+        </p:style>
+        <p:txBody>
+          <a:bodyPr rtlCol="0" anchor="ctr"/>
+          <a:lstStyle/>
+          <a:p>
+            <a:pPr algn="ctr"/>
+          </a:p>
+        </p:txBody>
+      </p:sp>
+      <p:sp>
+        <p:nvSpPr>
+          <p:cNvPr id="6" name="Rectangle 5"/>
+          <p:cNvSpPr/>
+          <p:nvPr/>
+        </p:nvSpPr>
+        <p:spPr>
+          <a:xfrm>
+            <a:off x="457200" y="1261872"/>
+            <a:ext cx="11277295" cy="365760"/>
+          </a:xfrm>
+          <a:prstGeom prst="rect">
+            <a:avLst/>
+          </a:prstGeom>
+          <a:solidFill>
+            <a:srgbClr val="2D2D30"/>
+          </a:solidFill>
+          <a:ln>
+            <a:noFill/>
+          </a:ln>
+        </p:spPr>
+        <p:style>
+          <a:lnRef idx="1">
+            <a:schemeClr val="accent1"/>
+          </a:lnRef>
+          <a:fillRef idx="3">
+            <a:schemeClr val="accent1"/>
+          </a:fillRef>
+          <a:effectRef idx="2">
+            <a:schemeClr val="accent1"/>
+          </a:effectRef>
+          <a:fontRef idx="minor">
+            <a:schemeClr val="lt1"/>
+          </a:fontRef>
+        </p:style>
+        <p:txBody>
+          <a:bodyPr rtlCol="0" anchor="ctr"/>
+          <a:lstStyle/>
+          <a:p>
+            <a:pPr algn="ctr"/>
+          </a:p>
+        </p:txBody>
+      </p:sp>
+      <p:sp>
+        <p:nvSpPr>
+          <p:cNvPr id="7" name="Oval 6"/>
+          <p:cNvSpPr/>
+          <p:nvPr/>
+        </p:nvSpPr>
+        <p:spPr>
+          <a:xfrm>
+            <a:off x="658368" y="1380743"/>
+            <a:ext cx="128016" cy="128016"/>
+          </a:xfrm>
+          <a:prstGeom prst="ellipse">
+            <a:avLst/>
+          </a:prstGeom>
+          <a:solidFill>
+            <a:srgbClr val="FF5F56"/>
+          </a:solidFill>
+          <a:ln>
+            <a:noFill/>
+          </a:ln>
+        </p:spPr>
+        <p:style>
+          <a:lnRef idx="1">
+            <a:schemeClr val="accent1"/>
+          </a:lnRef>
+          <a:fillRef idx="3">
+            <a:schemeClr val="accent1"/>
+          </a:fillRef>
+          <a:effectRef idx="2">
+            <a:schemeClr val="accent1"/>
+          </a:effectRef>
+          <a:fontRef idx="minor">
+            <a:schemeClr val="lt1"/>
+          </a:fontRef>
+        </p:style>
+        <p:txBody>
+          <a:bodyPr rtlCol="0" anchor="ctr"/>
+          <a:lstStyle/>
+          <a:p>
+            <a:pPr algn="ctr"/>
+          </a:p>
+        </p:txBody>
+      </p:sp>
+      <p:sp>
+        <p:nvSpPr>
+          <p:cNvPr id="8" name="Oval 7"/>
+          <p:cNvSpPr/>
+          <p:nvPr/>
+        </p:nvSpPr>
+        <p:spPr>
+          <a:xfrm>
+            <a:off x="877824" y="1380743"/>
+            <a:ext cx="128016" cy="128016"/>
+          </a:xfrm>
+          <a:prstGeom prst="ellipse">
+            <a:avLst/>
+          </a:prstGeom>
+          <a:solidFill>
+            <a:srgbClr val="FFBD2E"/>
+          </a:solidFill>
+          <a:ln>
+            <a:noFill/>
+          </a:ln>
+        </p:spPr>
+        <p:style>
+          <a:lnRef idx="1">
+            <a:schemeClr val="accent1"/>
+          </a:lnRef>
+          <a:fillRef idx="3">
+            <a:schemeClr val="accent1"/>
+          </a:fillRef>
+          <a:effectRef idx="2">
+            <a:schemeClr val="accent1"/>
+          </a:effectRef>
+          <a:fontRef idx="minor">
+            <a:schemeClr val="lt1"/>
+          </a:fontRef>
+        </p:style>
+        <p:txBody>
+          <a:bodyPr rtlCol="0" anchor="ctr"/>
+          <a:lstStyle/>
+          <a:p>
+            <a:pPr algn="ctr"/>
+          </a:p>
+        </p:txBody>
+      </p:sp>
+      <p:sp>
+        <p:nvSpPr>
+          <p:cNvPr id="9" name="Oval 8"/>
+          <p:cNvSpPr/>
+          <p:nvPr/>
+        </p:nvSpPr>
+        <p:spPr>
+          <a:xfrm>
+            <a:off x="1097280" y="1380743"/>
+            <a:ext cx="128016" cy="128016"/>
+          </a:xfrm>
+          <a:prstGeom prst="ellipse">
+            <a:avLst/>
+          </a:prstGeom>
+          <a:solidFill>
+            <a:srgbClr val="27C93F"/>
+          </a:solidFill>
+          <a:ln>
+            <a:noFill/>
+          </a:ln>
+        </p:spPr>
+        <p:style>
+          <a:lnRef idx="1">
+            <a:schemeClr val="accent1"/>
+          </a:lnRef>
+          <a:fillRef idx="3">
+            <a:schemeClr val="accent1"/>
+          </a:fillRef>
+          <a:effectRef idx="2">
+            <a:schemeClr val="accent1"/>
+          </a:effectRef>
+          <a:fontRef idx="minor">
+            <a:schemeClr val="lt1"/>
+          </a:fontRef>
+        </p:style>
+        <p:txBody>
+          <a:bodyPr rtlCol="0" anchor="ctr"/>
+          <a:lstStyle/>
+          <a:p>
+            <a:pPr algn="ctr"/>
+          </a:p>
+        </p:txBody>
+      </p:sp>
+      <p:sp>
+        <p:nvSpPr>
+          <p:cNvPr id="10" name="TextBox 9"/>
           <p:cNvSpPr txBox="1"/>
           <p:nvPr/>
         </p:nvSpPr>
         <p:spPr>
           <a:xfrm>
-            <a:off x="457200" y="1170432"/>
-            <a:ext cx="11277295" cy="5230368"/>
+            <a:off x="1371600" y="1298448"/>
+            <a:ext cx="10180015" cy="292608"/>
           </a:xfrm>
           <a:prstGeom prst="rect">
             <a:avLst/>
@@ -8424,79 +10977,1514 @@
           <a:noFill/>
         </p:spPr>
         <p:txBody>
+          <a:bodyPr wrap="square" anchor="ctr"/>
+          <a:lstStyle/>
+          <a:p>
+            <a:pPr algn="r"/>
+            <a:r>
+              <a:rPr sz="1100" b="1" i="0">
+                <a:solidFill>
+                  <a:srgbClr val="BBBBBB"/>
+                </a:solidFill>
+                <a:latin typeface="Calibri"/>
+              </a:rPr>
+              <a:t>Mermaid</a:t>
+            </a:r>
+          </a:p>
+        </p:txBody>
+      </p:sp>
+      <p:sp>
+        <p:nvSpPr>
+          <p:cNvPr id="11" name="TextBox 10"/>
+          <p:cNvSpPr txBox="1"/>
+          <p:nvPr/>
+        </p:nvSpPr>
+        <p:spPr>
+          <a:xfrm>
+            <a:off x="685800" y="1719072"/>
+            <a:ext cx="502920" cy="4436983"/>
+          </a:xfrm>
+          <a:prstGeom prst="rect">
+            <a:avLst/>
+          </a:prstGeom>
+          <a:noFill/>
+        </p:spPr>
+        <p:txBody>
           <a:bodyPr wrap="square">
             <a:spAutoFit/>
           </a:bodyPr>
           <a:lstStyle/>
           <a:p>
+            <a:pPr algn="r">
+              <a:spcAft>
+                <a:spcPts val="342"/>
+              </a:spcAft>
+            </a:pPr>
+            <a:r>
+              <a:rPr sz="1600" i="0" b="0">
+                <a:solidFill>
+                  <a:srgbClr val="858585"/>
+                </a:solidFill>
+                <a:latin typeface="Consolas"/>
+              </a:rPr>
+              <a:t>1</a:t>
+            </a:r>
+          </a:p>
+          <a:p>
+            <a:pPr algn="r">
+              <a:spcAft>
+                <a:spcPts val="342"/>
+              </a:spcAft>
+            </a:pPr>
+            <a:r>
+              <a:rPr sz="1600" i="0" b="0">
+                <a:solidFill>
+                  <a:srgbClr val="858585"/>
+                </a:solidFill>
+                <a:latin typeface="Consolas"/>
+              </a:rPr>
+              <a:t>2</a:t>
+            </a:r>
+          </a:p>
+          <a:p>
+            <a:pPr algn="r">
+              <a:spcAft>
+                <a:spcPts val="342"/>
+              </a:spcAft>
+            </a:pPr>
+            <a:r>
+              <a:rPr sz="1600" i="0" b="0">
+                <a:solidFill>
+                  <a:srgbClr val="858585"/>
+                </a:solidFill>
+                <a:latin typeface="Consolas"/>
+              </a:rPr>
+              <a:t>3</a:t>
+            </a:r>
+          </a:p>
+          <a:p>
+            <a:pPr algn="r">
+              <a:spcAft>
+                <a:spcPts val="342"/>
+              </a:spcAft>
+            </a:pPr>
+            <a:r>
+              <a:rPr sz="1600" i="0" b="0">
+                <a:solidFill>
+                  <a:srgbClr val="858585"/>
+                </a:solidFill>
+                <a:latin typeface="Consolas"/>
+              </a:rPr>
+              <a:t>4</a:t>
+            </a:r>
+          </a:p>
+          <a:p>
+            <a:pPr algn="r">
+              <a:spcAft>
+                <a:spcPts val="342"/>
+              </a:spcAft>
+            </a:pPr>
+            <a:r>
+              <a:rPr sz="1600" i="0" b="0">
+                <a:solidFill>
+                  <a:srgbClr val="858585"/>
+                </a:solidFill>
+                <a:latin typeface="Consolas"/>
+              </a:rPr>
+              <a:t>5</a:t>
+            </a:r>
+          </a:p>
+          <a:p>
+            <a:pPr algn="r">
+              <a:spcAft>
+                <a:spcPts val="342"/>
+              </a:spcAft>
+            </a:pPr>
+            <a:r>
+              <a:rPr sz="1600" i="0" b="0">
+                <a:solidFill>
+                  <a:srgbClr val="858585"/>
+                </a:solidFill>
+                <a:latin typeface="Consolas"/>
+              </a:rPr>
+              <a:t>6</a:t>
+            </a:r>
+          </a:p>
+          <a:p>
+            <a:pPr algn="r">
+              <a:spcAft>
+                <a:spcPts val="342"/>
+              </a:spcAft>
+            </a:pPr>
+            <a:r>
+              <a:rPr sz="1600" i="0" b="0">
+                <a:solidFill>
+                  <a:srgbClr val="858585"/>
+                </a:solidFill>
+                <a:latin typeface="Consolas"/>
+              </a:rPr>
+              <a:t>7</a:t>
+            </a:r>
+          </a:p>
+          <a:p>
+            <a:pPr algn="r">
+              <a:spcAft>
+                <a:spcPts val="342"/>
+              </a:spcAft>
+            </a:pPr>
+            <a:r>
+              <a:rPr sz="1600" i="0" b="0">
+                <a:solidFill>
+                  <a:srgbClr val="858585"/>
+                </a:solidFill>
+                <a:latin typeface="Consolas"/>
+              </a:rPr>
+              <a:t>8</a:t>
+            </a:r>
+          </a:p>
+          <a:p>
+            <a:pPr algn="r">
+              <a:spcAft>
+                <a:spcPts val="342"/>
+              </a:spcAft>
+            </a:pPr>
+            <a:r>
+              <a:rPr sz="1600" i="0" b="0">
+                <a:solidFill>
+                  <a:srgbClr val="858585"/>
+                </a:solidFill>
+                <a:latin typeface="Consolas"/>
+              </a:rPr>
+              <a:t>9</a:t>
+            </a:r>
+          </a:p>
+          <a:p>
+            <a:pPr algn="r">
+              <a:spcAft>
+                <a:spcPts val="342"/>
+              </a:spcAft>
+            </a:pPr>
+            <a:r>
+              <a:rPr sz="1600" i="0" b="0">
+                <a:solidFill>
+                  <a:srgbClr val="858585"/>
+                </a:solidFill>
+                <a:latin typeface="Consolas"/>
+              </a:rPr>
+              <a:t>10</a:t>
+            </a:r>
+          </a:p>
+          <a:p>
+            <a:pPr algn="r">
+              <a:spcAft>
+                <a:spcPts val="342"/>
+              </a:spcAft>
+            </a:pPr>
+            <a:r>
+              <a:rPr sz="1600" i="0" b="0">
+                <a:solidFill>
+                  <a:srgbClr val="858585"/>
+                </a:solidFill>
+                <a:latin typeface="Consolas"/>
+              </a:rPr>
+              <a:t>11</a:t>
+            </a:r>
+          </a:p>
+          <a:p>
+            <a:pPr algn="r">
+              <a:spcAft>
+                <a:spcPts val="342"/>
+              </a:spcAft>
+            </a:pPr>
+            <a:r>
+              <a:rPr sz="1600" i="0" b="0">
+                <a:solidFill>
+                  <a:srgbClr val="858585"/>
+                </a:solidFill>
+                <a:latin typeface="Consolas"/>
+              </a:rPr>
+              <a:t>12</a:t>
+            </a:r>
+          </a:p>
+          <a:p>
+            <a:pPr algn="r">
+              <a:spcAft>
+                <a:spcPts val="342"/>
+              </a:spcAft>
+            </a:pPr>
+            <a:r>
+              <a:rPr sz="1600" i="0" b="0">
+                <a:solidFill>
+                  <a:srgbClr val="858585"/>
+                </a:solidFill>
+                <a:latin typeface="Consolas"/>
+              </a:rPr>
+              <a:t>13</a:t>
+            </a:r>
+          </a:p>
+          <a:p>
+            <a:pPr algn="r">
+              <a:spcAft>
+                <a:spcPts val="342"/>
+              </a:spcAft>
+            </a:pPr>
+            <a:r>
+              <a:rPr sz="1600" i="0" b="0">
+                <a:solidFill>
+                  <a:srgbClr val="858585"/>
+                </a:solidFill>
+                <a:latin typeface="Consolas"/>
+              </a:rPr>
+              <a:t>14</a:t>
+            </a:r>
+          </a:p>
+          <a:p>
+            <a:pPr algn="r">
+              <a:spcAft>
+                <a:spcPts val="342"/>
+              </a:spcAft>
+            </a:pPr>
+            <a:r>
+              <a:rPr sz="1600" i="0" b="0">
+                <a:solidFill>
+                  <a:srgbClr val="858585"/>
+                </a:solidFill>
+                <a:latin typeface="Consolas"/>
+              </a:rPr>
+              <a:t>15</a:t>
+            </a:r>
+          </a:p>
+        </p:txBody>
+      </p:sp>
+      <p:sp>
+        <p:nvSpPr>
+          <p:cNvPr id="12" name="TextBox 11"/>
+          <p:cNvSpPr txBox="1"/>
+          <p:nvPr/>
+        </p:nvSpPr>
+        <p:spPr>
+          <a:xfrm>
+            <a:off x="1188720" y="1719072"/>
+            <a:ext cx="10271455" cy="4436983"/>
+          </a:xfrm>
+          <a:prstGeom prst="rect">
+            <a:avLst/>
+          </a:prstGeom>
+          <a:noFill/>
+        </p:spPr>
+        <p:txBody>
+          <a:bodyPr wrap="square">
+            <a:spAutoFit/>
+          </a:bodyPr>
+          <a:lstStyle/>
+          <a:p>
             <a:pPr>
               <a:spcAft>
-                <a:spcPts val="800"/>
+                <a:spcPts val="342"/>
               </a:spcAft>
             </a:pPr>
             <a:r>
-              <a:rPr sz="2000" b="0" i="0">
-                <a:solidFill>
-                  <a:srgbClr val="333333"/>
-                </a:solidFill>
-                <a:latin typeface="Calibri"/>
-              </a:rPr>
-              <a:t>–   Kanban viene de otra tradicion y su promesa es distinta: no impone iteraciones ni roles, sino que hace visible el flujo del trabajo.</a:t>
+              <a:rPr sz="1600" i="0" b="0">
+                <a:solidFill>
+                  <a:srgbClr val="D4D4D4"/>
+                </a:solidFill>
+                <a:latin typeface="Consolas"/>
+              </a:rPr>
+              <a:t>gantt</a:t>
             </a:r>
           </a:p>
           <a:p>
             <a:pPr>
               <a:spcAft>
-                <a:spcPts val="800"/>
+                <a:spcPts val="342"/>
               </a:spcAft>
             </a:pPr>
             <a:r>
-              <a:rPr sz="2000" b="0" i="0">
-                <a:solidFill>
-                  <a:srgbClr val="333333"/>
-                </a:solidFill>
-                <a:latin typeface="Calibri"/>
-              </a:rPr>
-              <a:t>–   Sus practicas centrales son visualizar el trabajo en un tablero, limitar el trabajo en curso, gestionar el flujo detectando donde se acumulan las tarjetas, hacer explicitas las politicas de cada columna y mejorar de forma continua.</a:t>
+              <a:rPr sz="1600" i="0" b="0">
+                <a:solidFill>
+                  <a:srgbClr val="D4D4D4"/>
+                </a:solidFill>
+                <a:latin typeface="Consolas"/>
+              </a:rPr>
+              <a:t>  </a:t>
+            </a:r>
+            <a:r>
+              <a:rPr sz="1600" i="0" b="0">
+                <a:solidFill>
+                  <a:srgbClr val="D4D4D4"/>
+                </a:solidFill>
+                <a:latin typeface="Consolas"/>
+              </a:rPr>
+              <a:t>title</a:t>
+            </a:r>
+            <a:r>
+              <a:rPr sz="1600" i="0" b="0">
+                <a:solidFill>
+                  <a:srgbClr val="D4D4D4"/>
+                </a:solidFill>
+                <a:latin typeface="Consolas"/>
+              </a:rPr>
+              <a:t> </a:t>
+            </a:r>
+            <a:r>
+              <a:rPr sz="1600" i="0" b="0">
+                <a:solidFill>
+                  <a:srgbClr val="D4D4D4"/>
+                </a:solidFill>
+                <a:latin typeface="Consolas"/>
+              </a:rPr>
+              <a:t>Tres</a:t>
+            </a:r>
+            <a:r>
+              <a:rPr sz="1600" i="0" b="0">
+                <a:solidFill>
+                  <a:srgbClr val="D4D4D4"/>
+                </a:solidFill>
+                <a:latin typeface="Consolas"/>
+              </a:rPr>
+              <a:t> </a:t>
+            </a:r>
+            <a:r>
+              <a:rPr sz="1600" i="0" b="0">
+                <a:solidFill>
+                  <a:srgbClr val="D4D4D4"/>
+                </a:solidFill>
+                <a:latin typeface="Consolas"/>
+              </a:rPr>
+              <a:t>sprints</a:t>
+            </a:r>
+            <a:r>
+              <a:rPr sz="1600" i="0" b="0">
+                <a:solidFill>
+                  <a:srgbClr val="D4D4D4"/>
+                </a:solidFill>
+                <a:latin typeface="Consolas"/>
+              </a:rPr>
+              <a:t> </a:t>
+            </a:r>
+            <a:r>
+              <a:rPr sz="1600" i="0" b="0">
+                <a:solidFill>
+                  <a:srgbClr val="D4D4D4"/>
+                </a:solidFill>
+                <a:latin typeface="Consolas"/>
+              </a:rPr>
+              <a:t>de</a:t>
+            </a:r>
+            <a:r>
+              <a:rPr sz="1600" i="0" b="0">
+                <a:solidFill>
+                  <a:srgbClr val="D4D4D4"/>
+                </a:solidFill>
+                <a:latin typeface="Consolas"/>
+              </a:rPr>
+              <a:t> </a:t>
+            </a:r>
+            <a:r>
+              <a:rPr sz="1600" i="0" b="0">
+                <a:solidFill>
+                  <a:srgbClr val="D4D4D4"/>
+                </a:solidFill>
+                <a:latin typeface="Consolas"/>
+              </a:rPr>
+              <a:t>diseno</a:t>
+            </a:r>
+            <a:r>
+              <a:rPr sz="1600" i="0" b="0">
+                <a:solidFill>
+                  <a:srgbClr val="D4D4D4"/>
+                </a:solidFill>
+                <a:latin typeface="Consolas"/>
+              </a:rPr>
+              <a:t> </a:t>
+            </a:r>
+            <a:r>
+              <a:rPr sz="1600" i="0" b="0">
+                <a:solidFill>
+                  <a:srgbClr val="D4D4D4"/>
+                </a:solidFill>
+                <a:latin typeface="Consolas"/>
+              </a:rPr>
+              <a:t>de</a:t>
+            </a:r>
+            <a:r>
+              <a:rPr sz="1600" i="0" b="0">
+                <a:solidFill>
+                  <a:srgbClr val="D4D4D4"/>
+                </a:solidFill>
+                <a:latin typeface="Consolas"/>
+              </a:rPr>
+              <a:t> </a:t>
+            </a:r>
+            <a:r>
+              <a:rPr sz="1600" i="0" b="0">
+                <a:solidFill>
+                  <a:srgbClr val="D4D4D4"/>
+                </a:solidFill>
+                <a:latin typeface="Consolas"/>
+              </a:rPr>
+              <a:t>la</a:t>
+            </a:r>
+            <a:r>
+              <a:rPr sz="1600" i="0" b="0">
+                <a:solidFill>
+                  <a:srgbClr val="D4D4D4"/>
+                </a:solidFill>
+                <a:latin typeface="Consolas"/>
+              </a:rPr>
+              <a:t> </a:t>
+            </a:r>
+            <a:r>
+              <a:rPr sz="1600" i="0" b="0">
+                <a:solidFill>
+                  <a:srgbClr val="D4D4D4"/>
+                </a:solidFill>
+                <a:latin typeface="Consolas"/>
+              </a:rPr>
+              <a:t>clinica</a:t>
             </a:r>
           </a:p>
           <a:p>
             <a:pPr>
               <a:spcAft>
-                <a:spcPts val="800"/>
+                <a:spcPts val="342"/>
               </a:spcAft>
             </a:pPr>
             <a:r>
-              <a:rPr sz="2000" b="0" i="0">
-                <a:solidFill>
-                  <a:srgbClr val="333333"/>
-                </a:solidFill>
-                <a:latin typeface="Calibri"/>
-              </a:rPr>
-              <a:t>–   El limite de trabajo en curso es la parte que mas cuesta y la que mas sirve: si el equipo pone limite dos en la columna 'Modelando', nadie puede empezar una tercera tarea sin terminar alguna.</a:t>
+              <a:rPr sz="1600" i="0" b="0">
+                <a:solidFill>
+                  <a:srgbClr val="D4D4D4"/>
+                </a:solidFill>
+                <a:latin typeface="Consolas"/>
+              </a:rPr>
+              <a:t>  </a:t>
+            </a:r>
+            <a:r>
+              <a:rPr sz="1600" i="0" b="0">
+                <a:solidFill>
+                  <a:srgbClr val="D4D4D4"/>
+                </a:solidFill>
+                <a:latin typeface="Consolas"/>
+              </a:rPr>
+              <a:t>dateFormat</a:t>
+            </a:r>
+            <a:r>
+              <a:rPr sz="1600" i="0" b="0">
+                <a:solidFill>
+                  <a:srgbClr val="D4D4D4"/>
+                </a:solidFill>
+                <a:latin typeface="Consolas"/>
+              </a:rPr>
+              <a:t> </a:t>
+            </a:r>
+            <a:r>
+              <a:rPr sz="1600" i="0" b="0">
+                <a:solidFill>
+                  <a:srgbClr val="D4D4D4"/>
+                </a:solidFill>
+                <a:latin typeface="Consolas"/>
+              </a:rPr>
+              <a:t>YYYY</a:t>
+            </a:r>
+            <a:r>
+              <a:rPr sz="1600" i="0" b="0">
+                <a:solidFill>
+                  <a:srgbClr val="D4D4D4"/>
+                </a:solidFill>
+                <a:latin typeface="Consolas"/>
+              </a:rPr>
+              <a:t>-</a:t>
+            </a:r>
+            <a:r>
+              <a:rPr sz="1600" i="0" b="0">
+                <a:solidFill>
+                  <a:srgbClr val="D4D4D4"/>
+                </a:solidFill>
+                <a:latin typeface="Consolas"/>
+              </a:rPr>
+              <a:t>MM</a:t>
+            </a:r>
+            <a:r>
+              <a:rPr sz="1600" i="0" b="0">
+                <a:solidFill>
+                  <a:srgbClr val="D4D4D4"/>
+                </a:solidFill>
+                <a:latin typeface="Consolas"/>
+              </a:rPr>
+              <a:t>-</a:t>
+            </a:r>
+            <a:r>
+              <a:rPr sz="1600" i="0" b="0">
+                <a:solidFill>
+                  <a:srgbClr val="D4D4D4"/>
+                </a:solidFill>
+                <a:latin typeface="Consolas"/>
+              </a:rPr>
+              <a:t>DD</a:t>
             </a:r>
           </a:p>
           <a:p>
             <a:pPr>
               <a:spcAft>
-                <a:spcPts val="800"/>
+                <a:spcPts val="342"/>
               </a:spcAft>
             </a:pPr>
             <a:r>
-              <a:rPr sz="2000" b="0" i="0">
-                <a:solidFill>
-                  <a:srgbClr val="333333"/>
-                </a:solidFill>
-                <a:latin typeface="Calibri"/>
-              </a:rPr>
-              <a:t>–   El estudiante que abre cinco diagramas al tiempo y no termina ninguno es exactamente el problema que el limite de trabajo en curso resuelve.</a:t>
-            </a:r>
-          </a:p>
-        </p:txBody>
-      </p:sp>
-      <p:sp>
-        <p:nvSpPr>
-          <p:cNvPr id="6" name="TextBox 5"/>
+              <a:rPr sz="1600" i="0" b="0">
+                <a:solidFill>
+                  <a:srgbClr val="D4D4D4"/>
+                </a:solidFill>
+                <a:latin typeface="Consolas"/>
+              </a:rPr>
+              <a:t>  </a:t>
+            </a:r>
+            <a:r>
+              <a:rPr sz="1600" i="0" b="0">
+                <a:solidFill>
+                  <a:srgbClr val="D4D4D4"/>
+                </a:solidFill>
+                <a:latin typeface="Consolas"/>
+              </a:rPr>
+              <a:t>axisFormat</a:t>
+            </a:r>
+            <a:r>
+              <a:rPr sz="1600" i="0" b="0">
+                <a:solidFill>
+                  <a:srgbClr val="D4D4D4"/>
+                </a:solidFill>
+                <a:latin typeface="Consolas"/>
+              </a:rPr>
+              <a:t> %</a:t>
+            </a:r>
+            <a:r>
+              <a:rPr sz="1600" i="0" b="0">
+                <a:solidFill>
+                  <a:srgbClr val="D4D4D4"/>
+                </a:solidFill>
+                <a:latin typeface="Consolas"/>
+              </a:rPr>
+              <a:t>d</a:t>
+            </a:r>
+            <a:r>
+              <a:rPr sz="1600" i="0" b="0">
+                <a:solidFill>
+                  <a:srgbClr val="D4D4D4"/>
+                </a:solidFill>
+                <a:latin typeface="Consolas"/>
+              </a:rPr>
+              <a:t>/%</a:t>
+            </a:r>
+            <a:r>
+              <a:rPr sz="1600" i="0" b="0">
+                <a:solidFill>
+                  <a:srgbClr val="D4D4D4"/>
+                </a:solidFill>
+                <a:latin typeface="Consolas"/>
+              </a:rPr>
+              <a:t>m</a:t>
+            </a:r>
+          </a:p>
+          <a:p>
+            <a:pPr>
+              <a:spcAft>
+                <a:spcPts val="342"/>
+              </a:spcAft>
+            </a:pPr>
+            <a:r>
+              <a:rPr sz="1600" i="0" b="0">
+                <a:solidFill>
+                  <a:srgbClr val="D4D4D4"/>
+                </a:solidFill>
+                <a:latin typeface="Consolas"/>
+              </a:rPr>
+              <a:t/>
+            </a:r>
+          </a:p>
+          <a:p>
+            <a:pPr>
+              <a:spcAft>
+                <a:spcPts val="342"/>
+              </a:spcAft>
+            </a:pPr>
+            <a:r>
+              <a:rPr sz="1600" i="0" b="0">
+                <a:solidFill>
+                  <a:srgbClr val="D4D4D4"/>
+                </a:solidFill>
+                <a:latin typeface="Consolas"/>
+              </a:rPr>
+              <a:t>  </a:t>
+            </a:r>
+            <a:r>
+              <a:rPr sz="1600" i="0" b="0">
+                <a:solidFill>
+                  <a:srgbClr val="D4D4D4"/>
+                </a:solidFill>
+                <a:latin typeface="Consolas"/>
+              </a:rPr>
+              <a:t>section</a:t>
+            </a:r>
+            <a:r>
+              <a:rPr sz="1600" i="0" b="0">
+                <a:solidFill>
+                  <a:srgbClr val="D4D4D4"/>
+                </a:solidFill>
+                <a:latin typeface="Consolas"/>
+              </a:rPr>
+              <a:t> </a:t>
+            </a:r>
+            <a:r>
+              <a:rPr sz="1600" i="0" b="0">
+                <a:solidFill>
+                  <a:srgbClr val="D4D4D4"/>
+                </a:solidFill>
+                <a:latin typeface="Consolas"/>
+              </a:rPr>
+              <a:t>Sprint</a:t>
+            </a:r>
+            <a:r>
+              <a:rPr sz="1600" i="0" b="0">
+                <a:solidFill>
+                  <a:srgbClr val="D4D4D4"/>
+                </a:solidFill>
+                <a:latin typeface="Consolas"/>
+              </a:rPr>
+              <a:t> </a:t>
+            </a:r>
+            <a:r>
+              <a:rPr sz="1600" i="0" b="0">
+                <a:solidFill>
+                  <a:srgbClr val="B5CEA8"/>
+                </a:solidFill>
+                <a:latin typeface="Consolas"/>
+              </a:rPr>
+              <a:t>1</a:t>
+            </a:r>
+          </a:p>
+          <a:p>
+            <a:pPr>
+              <a:spcAft>
+                <a:spcPts val="342"/>
+              </a:spcAft>
+            </a:pPr>
+            <a:r>
+              <a:rPr sz="1600" i="0" b="0">
+                <a:solidFill>
+                  <a:srgbClr val="D4D4D4"/>
+                </a:solidFill>
+                <a:latin typeface="Consolas"/>
+              </a:rPr>
+              <a:t>  </a:t>
+            </a:r>
+            <a:r>
+              <a:rPr sz="1600" i="0" b="0">
+                <a:solidFill>
+                  <a:srgbClr val="D4D4D4"/>
+                </a:solidFill>
+                <a:latin typeface="Consolas"/>
+              </a:rPr>
+              <a:t>Modelo</a:t>
+            </a:r>
+            <a:r>
+              <a:rPr sz="1600" i="0" b="0">
+                <a:solidFill>
+                  <a:srgbClr val="D4D4D4"/>
+                </a:solidFill>
+                <a:latin typeface="Consolas"/>
+              </a:rPr>
+              <a:t> </a:t>
+            </a:r>
+            <a:r>
+              <a:rPr sz="1600" i="0" b="0">
+                <a:solidFill>
+                  <a:srgbClr val="D4D4D4"/>
+                </a:solidFill>
+                <a:latin typeface="Consolas"/>
+              </a:rPr>
+              <a:t>de</a:t>
+            </a:r>
+            <a:r>
+              <a:rPr sz="1600" i="0" b="0">
+                <a:solidFill>
+                  <a:srgbClr val="D4D4D4"/>
+                </a:solidFill>
+                <a:latin typeface="Consolas"/>
+              </a:rPr>
+              <a:t> </a:t>
+            </a:r>
+            <a:r>
+              <a:rPr sz="1600" i="0" b="0">
+                <a:solidFill>
+                  <a:srgbClr val="D4D4D4"/>
+                </a:solidFill>
+                <a:latin typeface="Consolas"/>
+              </a:rPr>
+              <a:t>dominio</a:t>
+            </a:r>
+            <a:r>
+              <a:rPr sz="1600" i="0" b="0">
+                <a:solidFill>
+                  <a:srgbClr val="D4D4D4"/>
+                </a:solidFill>
+                <a:latin typeface="Consolas"/>
+              </a:rPr>
+              <a:t>      :</a:t>
+            </a:r>
+            <a:r>
+              <a:rPr sz="1600" i="0" b="0">
+                <a:solidFill>
+                  <a:srgbClr val="D4D4D4"/>
+                </a:solidFill>
+                <a:latin typeface="Consolas"/>
+              </a:rPr>
+              <a:t>s1a</a:t>
+            </a:r>
+            <a:r>
+              <a:rPr sz="1600" i="0" b="0">
+                <a:solidFill>
+                  <a:srgbClr val="D4D4D4"/>
+                </a:solidFill>
+                <a:latin typeface="Consolas"/>
+              </a:rPr>
+              <a:t>, </a:t>
+            </a:r>
+            <a:r>
+              <a:rPr sz="1600" i="0" b="0">
+                <a:solidFill>
+                  <a:srgbClr val="B5CEA8"/>
+                </a:solidFill>
+                <a:latin typeface="Consolas"/>
+              </a:rPr>
+              <a:t>2026</a:t>
+            </a:r>
+            <a:r>
+              <a:rPr sz="1600" i="0" b="0">
+                <a:solidFill>
+                  <a:srgbClr val="D4D4D4"/>
+                </a:solidFill>
+                <a:latin typeface="Consolas"/>
+              </a:rPr>
+              <a:t>-</a:t>
+            </a:r>
+            <a:r>
+              <a:rPr sz="1600" i="0" b="0">
+                <a:solidFill>
+                  <a:srgbClr val="B5CEA8"/>
+                </a:solidFill>
+                <a:latin typeface="Consolas"/>
+              </a:rPr>
+              <a:t>09</a:t>
+            </a:r>
+            <a:r>
+              <a:rPr sz="1600" i="0" b="0">
+                <a:solidFill>
+                  <a:srgbClr val="D4D4D4"/>
+                </a:solidFill>
+                <a:latin typeface="Consolas"/>
+              </a:rPr>
+              <a:t>-</a:t>
+            </a:r>
+            <a:r>
+              <a:rPr sz="1600" i="0" b="0">
+                <a:solidFill>
+                  <a:srgbClr val="B5CEA8"/>
+                </a:solidFill>
+                <a:latin typeface="Consolas"/>
+              </a:rPr>
+              <a:t>01</a:t>
+            </a:r>
+            <a:r>
+              <a:rPr sz="1600" i="0" b="0">
+                <a:solidFill>
+                  <a:srgbClr val="D4D4D4"/>
+                </a:solidFill>
+                <a:latin typeface="Consolas"/>
+              </a:rPr>
+              <a:t>, 7</a:t>
+            </a:r>
+            <a:r>
+              <a:rPr sz="1600" i="0" b="0">
+                <a:solidFill>
+                  <a:srgbClr val="D4D4D4"/>
+                </a:solidFill>
+                <a:latin typeface="Consolas"/>
+              </a:rPr>
+              <a:t>d</a:t>
+            </a:r>
+          </a:p>
+          <a:p>
+            <a:pPr>
+              <a:spcAft>
+                <a:spcPts val="342"/>
+              </a:spcAft>
+            </a:pPr>
+            <a:r>
+              <a:rPr sz="1600" i="0" b="0">
+                <a:solidFill>
+                  <a:srgbClr val="D4D4D4"/>
+                </a:solidFill>
+                <a:latin typeface="Consolas"/>
+              </a:rPr>
+              <a:t>  </a:t>
+            </a:r>
+            <a:r>
+              <a:rPr sz="1600" i="0" b="0">
+                <a:solidFill>
+                  <a:srgbClr val="D4D4D4"/>
+                </a:solidFill>
+                <a:latin typeface="Consolas"/>
+              </a:rPr>
+              <a:t>Casos</a:t>
+            </a:r>
+            <a:r>
+              <a:rPr sz="1600" i="0" b="0">
+                <a:solidFill>
+                  <a:srgbClr val="D4D4D4"/>
+                </a:solidFill>
+                <a:latin typeface="Consolas"/>
+              </a:rPr>
+              <a:t> </a:t>
+            </a:r>
+            <a:r>
+              <a:rPr sz="1600" i="0" b="0">
+                <a:solidFill>
+                  <a:srgbClr val="D4D4D4"/>
+                </a:solidFill>
+                <a:latin typeface="Consolas"/>
+              </a:rPr>
+              <a:t>de</a:t>
+            </a:r>
+            <a:r>
+              <a:rPr sz="1600" i="0" b="0">
+                <a:solidFill>
+                  <a:srgbClr val="D4D4D4"/>
+                </a:solidFill>
+                <a:latin typeface="Consolas"/>
+              </a:rPr>
+              <a:t> </a:t>
+            </a:r>
+            <a:r>
+              <a:rPr sz="1600" i="0" b="0">
+                <a:solidFill>
+                  <a:srgbClr val="D4D4D4"/>
+                </a:solidFill>
+                <a:latin typeface="Consolas"/>
+              </a:rPr>
+              <a:t>uso</a:t>
+            </a:r>
+            <a:r>
+              <a:rPr sz="1600" i="0" b="0">
+                <a:solidFill>
+                  <a:srgbClr val="D4D4D4"/>
+                </a:solidFill>
+                <a:latin typeface="Consolas"/>
+              </a:rPr>
+              <a:t> </a:t>
+            </a:r>
+            <a:r>
+              <a:rPr sz="1600" i="0" b="0">
+                <a:solidFill>
+                  <a:srgbClr val="D4D4D4"/>
+                </a:solidFill>
+                <a:latin typeface="Consolas"/>
+              </a:rPr>
+              <a:t>nucleo</a:t>
+            </a:r>
+            <a:r>
+              <a:rPr sz="1600" i="0" b="0">
+                <a:solidFill>
+                  <a:srgbClr val="D4D4D4"/>
+                </a:solidFill>
+                <a:latin typeface="Consolas"/>
+              </a:rPr>
+              <a:t>    :</a:t>
+            </a:r>
+            <a:r>
+              <a:rPr sz="1600" i="0" b="0">
+                <a:solidFill>
+                  <a:srgbClr val="D4D4D4"/>
+                </a:solidFill>
+                <a:latin typeface="Consolas"/>
+              </a:rPr>
+              <a:t>s1b</a:t>
+            </a:r>
+            <a:r>
+              <a:rPr sz="1600" i="0" b="0">
+                <a:solidFill>
+                  <a:srgbClr val="D4D4D4"/>
+                </a:solidFill>
+                <a:latin typeface="Consolas"/>
+              </a:rPr>
+              <a:t>, </a:t>
+            </a:r>
+            <a:r>
+              <a:rPr sz="1600" i="0" b="0">
+                <a:solidFill>
+                  <a:srgbClr val="D4D4D4"/>
+                </a:solidFill>
+                <a:latin typeface="Consolas"/>
+              </a:rPr>
+              <a:t>after</a:t>
+            </a:r>
+            <a:r>
+              <a:rPr sz="1600" i="0" b="0">
+                <a:solidFill>
+                  <a:srgbClr val="D4D4D4"/>
+                </a:solidFill>
+                <a:latin typeface="Consolas"/>
+              </a:rPr>
+              <a:t> </a:t>
+            </a:r>
+            <a:r>
+              <a:rPr sz="1600" i="0" b="0">
+                <a:solidFill>
+                  <a:srgbClr val="D4D4D4"/>
+                </a:solidFill>
+                <a:latin typeface="Consolas"/>
+              </a:rPr>
+              <a:t>s1a</a:t>
+            </a:r>
+            <a:r>
+              <a:rPr sz="1600" i="0" b="0">
+                <a:solidFill>
+                  <a:srgbClr val="D4D4D4"/>
+                </a:solidFill>
+                <a:latin typeface="Consolas"/>
+              </a:rPr>
+              <a:t>, 7</a:t>
+            </a:r>
+            <a:r>
+              <a:rPr sz="1600" i="0" b="0">
+                <a:solidFill>
+                  <a:srgbClr val="D4D4D4"/>
+                </a:solidFill>
+                <a:latin typeface="Consolas"/>
+              </a:rPr>
+              <a:t>d</a:t>
+            </a:r>
+          </a:p>
+          <a:p>
+            <a:pPr>
+              <a:spcAft>
+                <a:spcPts val="342"/>
+              </a:spcAft>
+            </a:pPr>
+            <a:r>
+              <a:rPr sz="1600" i="0" b="0">
+                <a:solidFill>
+                  <a:srgbClr val="D4D4D4"/>
+                </a:solidFill>
+                <a:latin typeface="Consolas"/>
+              </a:rPr>
+              <a:t/>
+            </a:r>
+          </a:p>
+          <a:p>
+            <a:pPr>
+              <a:spcAft>
+                <a:spcPts val="342"/>
+              </a:spcAft>
+            </a:pPr>
+            <a:r>
+              <a:rPr sz="1600" i="0" b="0">
+                <a:solidFill>
+                  <a:srgbClr val="D4D4D4"/>
+                </a:solidFill>
+                <a:latin typeface="Consolas"/>
+              </a:rPr>
+              <a:t>  </a:t>
+            </a:r>
+            <a:r>
+              <a:rPr sz="1600" i="0" b="0">
+                <a:solidFill>
+                  <a:srgbClr val="D4D4D4"/>
+                </a:solidFill>
+                <a:latin typeface="Consolas"/>
+              </a:rPr>
+              <a:t>section</a:t>
+            </a:r>
+            <a:r>
+              <a:rPr sz="1600" i="0" b="0">
+                <a:solidFill>
+                  <a:srgbClr val="D4D4D4"/>
+                </a:solidFill>
+                <a:latin typeface="Consolas"/>
+              </a:rPr>
+              <a:t> </a:t>
+            </a:r>
+            <a:r>
+              <a:rPr sz="1600" i="0" b="0">
+                <a:solidFill>
+                  <a:srgbClr val="D4D4D4"/>
+                </a:solidFill>
+                <a:latin typeface="Consolas"/>
+              </a:rPr>
+              <a:t>Sprint</a:t>
+            </a:r>
+            <a:r>
+              <a:rPr sz="1600" i="0" b="0">
+                <a:solidFill>
+                  <a:srgbClr val="D4D4D4"/>
+                </a:solidFill>
+                <a:latin typeface="Consolas"/>
+              </a:rPr>
+              <a:t> </a:t>
+            </a:r>
+            <a:r>
+              <a:rPr sz="1600" i="0" b="0">
+                <a:solidFill>
+                  <a:srgbClr val="B5CEA8"/>
+                </a:solidFill>
+                <a:latin typeface="Consolas"/>
+              </a:rPr>
+              <a:t>2</a:t>
+            </a:r>
+          </a:p>
+          <a:p>
+            <a:pPr>
+              <a:spcAft>
+                <a:spcPts val="342"/>
+              </a:spcAft>
+            </a:pPr>
+            <a:r>
+              <a:rPr sz="1600" i="0" b="0">
+                <a:solidFill>
+                  <a:srgbClr val="D4D4D4"/>
+                </a:solidFill>
+                <a:latin typeface="Consolas"/>
+              </a:rPr>
+              <a:t>  </a:t>
+            </a:r>
+            <a:r>
+              <a:rPr sz="1600" i="0" b="0">
+                <a:solidFill>
+                  <a:srgbClr val="D4D4D4"/>
+                </a:solidFill>
+                <a:latin typeface="Consolas"/>
+              </a:rPr>
+              <a:t>Secuencia</a:t>
+            </a:r>
+            <a:r>
+              <a:rPr sz="1600" i="0" b="0">
+                <a:solidFill>
+                  <a:srgbClr val="D4D4D4"/>
+                </a:solidFill>
+                <a:latin typeface="Consolas"/>
+              </a:rPr>
+              <a:t> </a:t>
+            </a:r>
+            <a:r>
+              <a:rPr sz="1600" i="0" b="0">
+                <a:solidFill>
+                  <a:srgbClr val="D4D4D4"/>
+                </a:solidFill>
+                <a:latin typeface="Consolas"/>
+              </a:rPr>
+              <a:t>de</a:t>
+            </a:r>
+            <a:r>
+              <a:rPr sz="1600" i="0" b="0">
+                <a:solidFill>
+                  <a:srgbClr val="D4D4D4"/>
+                </a:solidFill>
+                <a:latin typeface="Consolas"/>
+              </a:rPr>
+              <a:t> </a:t>
+            </a:r>
+            <a:r>
+              <a:rPr sz="1600" i="0" b="0">
+                <a:solidFill>
+                  <a:srgbClr val="D4D4D4"/>
+                </a:solidFill>
+                <a:latin typeface="Consolas"/>
+              </a:rPr>
+              <a:t>agendar</a:t>
+            </a:r>
+            <a:r>
+              <a:rPr sz="1600" i="0" b="0">
+                <a:solidFill>
+                  <a:srgbClr val="D4D4D4"/>
+                </a:solidFill>
+                <a:latin typeface="Consolas"/>
+              </a:rPr>
+              <a:t>   :</a:t>
+            </a:r>
+            <a:r>
+              <a:rPr sz="1600" i="0" b="0">
+                <a:solidFill>
+                  <a:srgbClr val="D4D4D4"/>
+                </a:solidFill>
+                <a:latin typeface="Consolas"/>
+              </a:rPr>
+              <a:t>s2a</a:t>
+            </a:r>
+            <a:r>
+              <a:rPr sz="1600" i="0" b="0">
+                <a:solidFill>
+                  <a:srgbClr val="D4D4D4"/>
+                </a:solidFill>
+                <a:latin typeface="Consolas"/>
+              </a:rPr>
+              <a:t>, </a:t>
+            </a:r>
+            <a:r>
+              <a:rPr sz="1600" i="0" b="0">
+                <a:solidFill>
+                  <a:srgbClr val="D4D4D4"/>
+                </a:solidFill>
+                <a:latin typeface="Consolas"/>
+              </a:rPr>
+              <a:t>after</a:t>
+            </a:r>
+            <a:r>
+              <a:rPr sz="1600" i="0" b="0">
+                <a:solidFill>
+                  <a:srgbClr val="D4D4D4"/>
+                </a:solidFill>
+                <a:latin typeface="Consolas"/>
+              </a:rPr>
+              <a:t> </a:t>
+            </a:r>
+            <a:r>
+              <a:rPr sz="1600" i="0" b="0">
+                <a:solidFill>
+                  <a:srgbClr val="D4D4D4"/>
+                </a:solidFill>
+                <a:latin typeface="Consolas"/>
+              </a:rPr>
+              <a:t>s1b</a:t>
+            </a:r>
+            <a:r>
+              <a:rPr sz="1600" i="0" b="0">
+                <a:solidFill>
+                  <a:srgbClr val="D4D4D4"/>
+                </a:solidFill>
+                <a:latin typeface="Consolas"/>
+              </a:rPr>
+              <a:t>, 7</a:t>
+            </a:r>
+            <a:r>
+              <a:rPr sz="1600" i="0" b="0">
+                <a:solidFill>
+                  <a:srgbClr val="D4D4D4"/>
+                </a:solidFill>
+                <a:latin typeface="Consolas"/>
+              </a:rPr>
+              <a:t>d</a:t>
+            </a:r>
+          </a:p>
+          <a:p>
+            <a:pPr>
+              <a:spcAft>
+                <a:spcPts val="342"/>
+              </a:spcAft>
+            </a:pPr>
+            <a:r>
+              <a:rPr sz="1600" i="0" b="0">
+                <a:solidFill>
+                  <a:srgbClr val="D4D4D4"/>
+                </a:solidFill>
+                <a:latin typeface="Consolas"/>
+              </a:rPr>
+              <a:t>  </a:t>
+            </a:r>
+            <a:r>
+              <a:rPr sz="1600" i="0" b="0">
+                <a:solidFill>
+                  <a:srgbClr val="D4D4D4"/>
+                </a:solidFill>
+                <a:latin typeface="Consolas"/>
+              </a:rPr>
+              <a:t>Wireframes</a:t>
+            </a:r>
+            <a:r>
+              <a:rPr sz="1600" i="0" b="0">
+                <a:solidFill>
+                  <a:srgbClr val="D4D4D4"/>
+                </a:solidFill>
+                <a:latin typeface="Consolas"/>
+              </a:rPr>
+              <a:t> </a:t>
+            </a:r>
+            <a:r>
+              <a:rPr sz="1600" i="0" b="0">
+                <a:solidFill>
+                  <a:srgbClr val="D4D4D4"/>
+                </a:solidFill>
+                <a:latin typeface="Consolas"/>
+              </a:rPr>
+              <a:t>principales</a:t>
+            </a:r>
+            <a:r>
+              <a:rPr sz="1600" i="0" b="0">
+                <a:solidFill>
+                  <a:srgbClr val="D4D4D4"/>
+                </a:solidFill>
+                <a:latin typeface="Consolas"/>
+              </a:rPr>
+              <a:t> :</a:t>
+            </a:r>
+            <a:r>
+              <a:rPr sz="1600" i="0" b="0">
+                <a:solidFill>
+                  <a:srgbClr val="D4D4D4"/>
+                </a:solidFill>
+                <a:latin typeface="Consolas"/>
+              </a:rPr>
+              <a:t>s2b</a:t>
+            </a:r>
+            <a:r>
+              <a:rPr sz="1600" i="0" b="0">
+                <a:solidFill>
+                  <a:srgbClr val="D4D4D4"/>
+                </a:solidFill>
+                <a:latin typeface="Consolas"/>
+              </a:rPr>
+              <a:t>, </a:t>
+            </a:r>
+            <a:r>
+              <a:rPr sz="1600" i="0" b="0">
+                <a:solidFill>
+                  <a:srgbClr val="D4D4D4"/>
+                </a:solidFill>
+                <a:latin typeface="Consolas"/>
+              </a:rPr>
+              <a:t>after</a:t>
+            </a:r>
+            <a:r>
+              <a:rPr sz="1600" i="0" b="0">
+                <a:solidFill>
+                  <a:srgbClr val="D4D4D4"/>
+                </a:solidFill>
+                <a:latin typeface="Consolas"/>
+              </a:rPr>
+              <a:t> </a:t>
+            </a:r>
+            <a:r>
+              <a:rPr sz="1600" i="0" b="0">
+                <a:solidFill>
+                  <a:srgbClr val="D4D4D4"/>
+                </a:solidFill>
+                <a:latin typeface="Consolas"/>
+              </a:rPr>
+              <a:t>s2a</a:t>
+            </a:r>
+            <a:r>
+              <a:rPr sz="1600" i="0" b="0">
+                <a:solidFill>
+                  <a:srgbClr val="D4D4D4"/>
+                </a:solidFill>
+                <a:latin typeface="Consolas"/>
+              </a:rPr>
+              <a:t>, 7</a:t>
+            </a:r>
+            <a:r>
+              <a:rPr sz="1600" i="0" b="0">
+                <a:solidFill>
+                  <a:srgbClr val="D4D4D4"/>
+                </a:solidFill>
+                <a:latin typeface="Consolas"/>
+              </a:rPr>
+              <a:t>d</a:t>
+            </a:r>
+          </a:p>
+          <a:p>
+            <a:pPr>
+              <a:spcAft>
+                <a:spcPts val="342"/>
+              </a:spcAft>
+            </a:pPr>
+            <a:r>
+              <a:rPr sz="1600" i="0" b="0">
+                <a:solidFill>
+                  <a:srgbClr val="D4D4D4"/>
+                </a:solidFill>
+                <a:latin typeface="Consolas"/>
+              </a:rPr>
+              <a:t/>
+            </a:r>
+          </a:p>
+          <a:p>
+            <a:pPr>
+              <a:spcAft>
+                <a:spcPts val="342"/>
+              </a:spcAft>
+            </a:pPr>
+            <a:r>
+              <a:rPr sz="1600" i="0" b="0">
+                <a:solidFill>
+                  <a:srgbClr val="D4D4D4"/>
+                </a:solidFill>
+                <a:latin typeface="Consolas"/>
+              </a:rPr>
+              <a:t>  </a:t>
+            </a:r>
+            <a:r>
+              <a:rPr sz="1600" i="0" b="0">
+                <a:solidFill>
+                  <a:srgbClr val="D4D4D4"/>
+                </a:solidFill>
+                <a:latin typeface="Consolas"/>
+              </a:rPr>
+              <a:t>section</a:t>
+            </a:r>
+            <a:r>
+              <a:rPr sz="1600" i="0" b="0">
+                <a:solidFill>
+                  <a:srgbClr val="D4D4D4"/>
+                </a:solidFill>
+                <a:latin typeface="Consolas"/>
+              </a:rPr>
+              <a:t> </a:t>
+            </a:r>
+            <a:r>
+              <a:rPr sz="1600" i="0" b="0">
+                <a:solidFill>
+                  <a:srgbClr val="D4D4D4"/>
+                </a:solidFill>
+                <a:latin typeface="Consolas"/>
+              </a:rPr>
+              <a:t>Sprint</a:t>
+            </a:r>
+            <a:r>
+              <a:rPr sz="1600" i="0" b="0">
+                <a:solidFill>
+                  <a:srgbClr val="D4D4D4"/>
+                </a:solidFill>
+                <a:latin typeface="Consolas"/>
+              </a:rPr>
+              <a:t> </a:t>
+            </a:r>
+            <a:r>
+              <a:rPr sz="1600" i="0" b="0">
+                <a:solidFill>
+                  <a:srgbClr val="B5CEA8"/>
+                </a:solidFill>
+                <a:latin typeface="Consolas"/>
+              </a:rPr>
+              <a:t>3</a:t>
+            </a:r>
+          </a:p>
+          <a:p>
+            <a:pPr>
+              <a:spcAft>
+                <a:spcPts val="342"/>
+              </a:spcAft>
+            </a:pPr>
+            <a:r>
+              <a:rPr sz="1600" i="0" b="0">
+                <a:solidFill>
+                  <a:srgbClr val="D4D4D4"/>
+                </a:solidFill>
+                <a:latin typeface="Consolas"/>
+              </a:rPr>
+              <a:t>  </a:t>
+            </a:r>
+            <a:r>
+              <a:rPr sz="1600" i="0" b="0">
+                <a:solidFill>
+                  <a:srgbClr val="D4D4D4"/>
+                </a:solidFill>
+                <a:latin typeface="Consolas"/>
+              </a:rPr>
+              <a:t>Consolidacion</a:t>
+            </a:r>
+            <a:r>
+              <a:rPr sz="1600" i="0" b="0">
+                <a:solidFill>
+                  <a:srgbClr val="D4D4D4"/>
+                </a:solidFill>
+                <a:latin typeface="Consolas"/>
+              </a:rPr>
+              <a:t> </a:t>
+            </a:r>
+            <a:r>
+              <a:rPr sz="1600" i="0" b="0">
+                <a:solidFill>
+                  <a:srgbClr val="D4D4D4"/>
+                </a:solidFill>
+                <a:latin typeface="Consolas"/>
+              </a:rPr>
+              <a:t>paquete</a:t>
+            </a:r>
+            <a:r>
+              <a:rPr sz="1600" i="0" b="0">
+                <a:solidFill>
+                  <a:srgbClr val="D4D4D4"/>
+                </a:solidFill>
+                <a:latin typeface="Consolas"/>
+              </a:rPr>
+              <a:t>  :</a:t>
+            </a:r>
+            <a:r>
+              <a:rPr sz="1600" i="0" b="0">
+                <a:solidFill>
+                  <a:srgbClr val="D4D4D4"/>
+                </a:solidFill>
+                <a:latin typeface="Consolas"/>
+              </a:rPr>
+              <a:t>s3a</a:t>
+            </a:r>
+            <a:r>
+              <a:rPr sz="1600" i="0" b="0">
+                <a:solidFill>
+                  <a:srgbClr val="D4D4D4"/>
+                </a:solidFill>
+                <a:latin typeface="Consolas"/>
+              </a:rPr>
+              <a:t>, </a:t>
+            </a:r>
+            <a:r>
+              <a:rPr sz="1600" i="0" b="0">
+                <a:solidFill>
+                  <a:srgbClr val="D4D4D4"/>
+                </a:solidFill>
+                <a:latin typeface="Consolas"/>
+              </a:rPr>
+              <a:t>after</a:t>
+            </a:r>
+            <a:r>
+              <a:rPr sz="1600" i="0" b="0">
+                <a:solidFill>
+                  <a:srgbClr val="D4D4D4"/>
+                </a:solidFill>
+                <a:latin typeface="Consolas"/>
+              </a:rPr>
+              <a:t> </a:t>
+            </a:r>
+            <a:r>
+              <a:rPr sz="1600" i="0" b="0">
+                <a:solidFill>
+                  <a:srgbClr val="D4D4D4"/>
+                </a:solidFill>
+                <a:latin typeface="Consolas"/>
+              </a:rPr>
+              <a:t>s2b</a:t>
+            </a:r>
+            <a:r>
+              <a:rPr sz="1600" i="0" b="0">
+                <a:solidFill>
+                  <a:srgbClr val="D4D4D4"/>
+                </a:solidFill>
+                <a:latin typeface="Consolas"/>
+              </a:rPr>
+              <a:t>, 7</a:t>
+            </a:r>
+            <a:r>
+              <a:rPr sz="1600" i="0" b="0">
+                <a:solidFill>
+                  <a:srgbClr val="D4D4D4"/>
+                </a:solidFill>
+                <a:latin typeface="Consolas"/>
+              </a:rPr>
+              <a:t>d</a:t>
+            </a:r>
+          </a:p>
+        </p:txBody>
+      </p:sp>
+      <p:sp>
+        <p:nvSpPr>
+          <p:cNvPr id="13" name="TextBox 12"/>
           <p:cNvSpPr txBox="1"/>
           <p:nvPr/>
         </p:nvSpPr>
@@ -8670,21 +12658,173 @@
                 </a:solidFill>
                 <a:latin typeface="Calibri"/>
               </a:rPr>
-              <a:t>Hay dos palabras que se usan como sinonimos y significan cosas... (1/2)</a:t>
-            </a:r>
-          </a:p>
-        </p:txBody>
-      </p:sp>
-      <p:sp>
-        <p:nvSpPr>
-          <p:cNvPr id="5" name="TextBox 4"/>
+              <a:t>Kanban y el límite de trabajo en curso</a:t>
+            </a:r>
+          </a:p>
+        </p:txBody>
+      </p:sp>
+      <p:sp>
+        <p:nvSpPr>
+          <p:cNvPr id="5" name="Rounded Rectangle 4"/>
+          <p:cNvSpPr/>
+          <p:nvPr/>
+        </p:nvSpPr>
+        <p:spPr>
+          <a:xfrm>
+            <a:off x="5803166" y="1188719"/>
+            <a:ext cx="5998464" cy="4828032"/>
+          </a:xfrm>
+          <a:prstGeom prst="roundRect">
+            <a:avLst>
+              <a:gd name="adj" fmla="val 4000"/>
+            </a:avLst>
+          </a:prstGeom>
+          <a:solidFill>
+            <a:srgbClr val="E8EEF4"/>
+          </a:solidFill>
+          <a:ln>
+            <a:noFill/>
+          </a:ln>
+        </p:spPr>
+        <p:style>
+          <a:lnRef idx="1">
+            <a:schemeClr val="accent1"/>
+          </a:lnRef>
+          <a:fillRef idx="3">
+            <a:schemeClr val="accent1"/>
+          </a:fillRef>
+          <a:effectRef idx="2">
+            <a:schemeClr val="accent1"/>
+          </a:effectRef>
+          <a:fontRef idx="minor">
+            <a:schemeClr val="lt1"/>
+          </a:fontRef>
+        </p:style>
+        <p:txBody>
+          <a:bodyPr rtlCol="0" anchor="ctr"/>
+          <a:lstStyle/>
+          <a:p>
+            <a:pPr algn="ctr"/>
+          </a:p>
+        </p:txBody>
+      </p:sp>
+      <p:pic>
+        <p:nvPicPr>
+          <p:cNvPr id="6" name="Picture 5" descr="kanban-wip-paso1.png"/>
+          <p:cNvPicPr>
+            <a:picLocks noChangeAspect="1"/>
+          </p:cNvPicPr>
+          <p:nvPr/>
+        </p:nvPicPr>
+        <p:blipFill>
+          <a:blip r:embed="rId2"/>
+          <a:stretch>
+            <a:fillRect/>
+          </a:stretch>
+        </p:blipFill>
+        <p:spPr>
+          <a:xfrm>
+            <a:off x="5876318" y="1261872"/>
+            <a:ext cx="5852160" cy="4681728"/>
+          </a:xfrm>
+          <a:prstGeom prst="rect">
+            <a:avLst/>
+          </a:prstGeom>
+        </p:spPr>
+      </p:pic>
+      <p:pic>
+        <p:nvPicPr>
+          <p:cNvPr id="7" name="Picture 6" descr="kanban-wip-paso2.png"/>
+          <p:cNvPicPr>
+            <a:picLocks noChangeAspect="1"/>
+          </p:cNvPicPr>
+          <p:nvPr/>
+        </p:nvPicPr>
+        <p:blipFill>
+          <a:blip r:embed="rId3"/>
+          <a:stretch>
+            <a:fillRect/>
+          </a:stretch>
+        </p:blipFill>
+        <p:spPr>
+          <a:xfrm>
+            <a:off x="5876318" y="1261872"/>
+            <a:ext cx="5852160" cy="4681728"/>
+          </a:xfrm>
+          <a:prstGeom prst="rect">
+            <a:avLst/>
+          </a:prstGeom>
+        </p:spPr>
+      </p:pic>
+      <p:pic>
+        <p:nvPicPr>
+          <p:cNvPr id="8" name="Picture 7" descr="kanban-wip-paso3.png"/>
+          <p:cNvPicPr>
+            <a:picLocks noChangeAspect="1"/>
+          </p:cNvPicPr>
+          <p:nvPr/>
+        </p:nvPicPr>
+        <p:blipFill>
+          <a:blip r:embed="rId4"/>
+          <a:stretch>
+            <a:fillRect/>
+          </a:stretch>
+        </p:blipFill>
+        <p:spPr>
+          <a:xfrm>
+            <a:off x="5876318" y="1261872"/>
+            <a:ext cx="5852160" cy="4681728"/>
+          </a:xfrm>
+          <a:prstGeom prst="rect">
+            <a:avLst/>
+          </a:prstGeom>
+        </p:spPr>
+      </p:pic>
+      <p:sp>
+        <p:nvSpPr>
+          <p:cNvPr id="13" name="TextBox 12"/>
           <p:cNvSpPr txBox="1"/>
           <p:nvPr/>
         </p:nvSpPr>
         <p:spPr>
           <a:xfrm>
-            <a:off x="457200" y="1170432"/>
-            <a:ext cx="11277295" cy="5230368"/>
+            <a:off x="5870301" y="5961888"/>
+            <a:ext cx="5864193" cy="320040"/>
+          </a:xfrm>
+          <a:prstGeom prst="rect">
+            <a:avLst/>
+          </a:prstGeom>
+          <a:noFill/>
+        </p:spPr>
+        <p:txBody>
+          <a:bodyPr wrap="square">
+            <a:spAutoFit/>
+          </a:bodyPr>
+          <a:lstStyle/>
+          <a:p>
+            <a:pPr algn="ctr"/>
+            <a:r>
+              <a:rPr sz="1100" b="0" i="1">
+                <a:solidFill>
+                  <a:srgbClr val="666666"/>
+                </a:solidFill>
+                <a:latin typeface="Calibri"/>
+              </a:rPr>
+              <a:t>Clic para avanzar la animación</a:t>
+            </a:r>
+          </a:p>
+        </p:txBody>
+      </p:sp>
+      <p:sp>
+        <p:nvSpPr>
+          <p:cNvPr id="14" name="TextBox 13"/>
+          <p:cNvSpPr txBox="1"/>
+          <p:nvPr/>
+        </p:nvSpPr>
+        <p:spPr>
+          <a:xfrm>
+            <a:off x="457200" y="1353312"/>
+            <a:ext cx="5093061" cy="5047488"/>
           </a:xfrm>
           <a:prstGeom prst="rect">
             <a:avLst/>
@@ -8709,7 +12849,7 @@
                 </a:solidFill>
                 <a:latin typeface="Calibri"/>
               </a:rPr>
-              <a:t>–   Hay dos palabras que se usan como sinonimos y significan cosas distintas: iteracion e incremento.</a:t>
+              <a:t>–   No impone iteraciones ni roles: hace visible el flujo del trabajo.</a:t>
             </a:r>
           </a:p>
           <a:p>
@@ -8725,7 +12865,7 @@
                 </a:solidFill>
                 <a:latin typeface="Calibri"/>
               </a:rPr>
-              <a:t>–   Incremento es agregar un pedazo nuevo y utilizable al sistema; iteracion es volver sobre algo que ya existe y mejorarlo con base en la retroalimentacion.</a:t>
+              <a:t>–   Prácticas: visualizar en un tablero, limitar el trabajo en curso, gestionar el flujo, políticas explícitas y mejora continua.</a:t>
             </a:r>
           </a:p>
           <a:p>
@@ -8741,14 +12881,30 @@
                 </a:solidFill>
                 <a:latin typeface="Calibri"/>
               </a:rPr>
-              <a:t>–   En la clinica el incremento 1 es el mockup de la ficha del paciente; cuando la veterinaria lo mira y dice 'me falta el campo de alergias y la foto de la mascota', y el equipo produce la version 2 de ese mismo mockup, eso es iteracion.</a:t>
-            </a:r>
-          </a:p>
-        </p:txBody>
-      </p:sp>
-      <p:sp>
-        <p:nvSpPr>
-          <p:cNvPr id="6" name="TextBox 5"/>
+              <a:t>–   Con límite 2 en «Modelando», nadie empieza una tercera tarea sin terminar otra.</a:t>
+            </a:r>
+          </a:p>
+          <a:p>
+            <a:pPr>
+              <a:spcAft>
+                <a:spcPts val="800"/>
+              </a:spcAft>
+            </a:pPr>
+            <a:r>
+              <a:rPr sz="2000" b="0" i="0">
+                <a:solidFill>
+                  <a:srgbClr val="333333"/>
+                </a:solidFill>
+                <a:latin typeface="Calibri"/>
+              </a:rPr>
+              <a:t>–   Abrir cinco diagramas y no terminar ninguno es el problema que el límite resuelve.</a:t>
+            </a:r>
+          </a:p>
+        </p:txBody>
+      </p:sp>
+      <p:sp>
+        <p:nvSpPr>
+          <p:cNvPr id="15" name="TextBox 14"/>
           <p:cNvSpPr txBox="1"/>
           <p:nvPr/>
         </p:nvSpPr>
@@ -8786,6 +12942,142 @@
   <p:clrMapOvr>
     <a:masterClrMapping/>
   </p:clrMapOvr>
+  <p:timing>
+    <p:tnLst>
+      <p:par>
+        <p:cTn id="1" dur="indefinite" restart="never" nodeType="tmRoot">
+          <p:childTnLst>
+            <p:seq concurrent="1" nextAc="seek">
+              <p:cTn id="2" dur="indefinite" nodeType="mainSeq">
+                <p:childTnLst>
+                  <p:par>
+                    <p:cTn id="3" fill="hold">
+                      <p:stCondLst>
+                        <p:cond delay="indefinite"/>
+                      </p:stCondLst>
+                      <p:childTnLst>
+                        <p:par>
+                          <p:cTn id="4" fill="hold">
+                            <p:stCondLst>
+                              <p:cond delay="0"/>
+                            </p:stCondLst>
+                            <p:childTnLst>
+                              <p:par>
+                                <p:cTn id="5" presetID="10" presetClass="entr" presetSubtype="0" fill="hold" nodeType="clickEffect">
+                                  <p:stCondLst>
+                                    <p:cond delay="0"/>
+                                  </p:stCondLst>
+                                  <p:childTnLst>
+                                    <p:set>
+                                      <p:cBhvr>
+                                        <p:cTn id="6" dur="1" fill="hold">
+                                          <p:stCondLst>
+                                            <p:cond delay="0"/>
+                                          </p:stCondLst>
+                                        </p:cTn>
+                                        <p:tgtEl>
+                                          <p:spTgt spid="7"/>
+                                        </p:tgtEl>
+                                        <p:attrNameLst>
+                                          <p:attrName>style.visibility</p:attrName>
+                                        </p:attrNameLst>
+                                      </p:cBhvr>
+                                      <p:to>
+                                        <p:strVal val="visible"/>
+                                      </p:to>
+                                    </p:set>
+                                    <p:animEffect transition="in" filter="fade">
+                                      <p:cBhvr>
+                                        <p:cTn id="7" dur="450"/>
+                                        <p:tgtEl>
+                                          <p:spTgt spid="7"/>
+                                        </p:tgtEl>
+                                      </p:cBhvr>
+                                    </p:animEffect>
+                                  </p:childTnLst>
+                                </p:cTn>
+                              </p:par>
+                            </p:childTnLst>
+                          </p:cTn>
+                        </p:par>
+                      </p:childTnLst>
+                    </p:cTn>
+                  </p:par>
+                  <p:par>
+                    <p:cTn id="8" fill="hold">
+                      <p:stCondLst>
+                        <p:cond delay="indefinite"/>
+                      </p:stCondLst>
+                      <p:childTnLst>
+                        <p:par>
+                          <p:cTn id="9" fill="hold">
+                            <p:stCondLst>
+                              <p:cond delay="0"/>
+                            </p:stCondLst>
+                            <p:childTnLst>
+                              <p:par>
+                                <p:cTn id="10" presetID="10" presetClass="entr" presetSubtype="0" fill="hold" nodeType="clickEffect">
+                                  <p:stCondLst>
+                                    <p:cond delay="0"/>
+                                  </p:stCondLst>
+                                  <p:childTnLst>
+                                    <p:set>
+                                      <p:cBhvr>
+                                        <p:cTn id="11" dur="1" fill="hold">
+                                          <p:stCondLst>
+                                            <p:cond delay="0"/>
+                                          </p:stCondLst>
+                                        </p:cTn>
+                                        <p:tgtEl>
+                                          <p:spTgt spid="8"/>
+                                        </p:tgtEl>
+                                        <p:attrNameLst>
+                                          <p:attrName>style.visibility</p:attrName>
+                                        </p:attrNameLst>
+                                      </p:cBhvr>
+                                      <p:to>
+                                        <p:strVal val="visible"/>
+                                      </p:to>
+                                    </p:set>
+                                    <p:animEffect transition="in" filter="fade">
+                                      <p:cBhvr>
+                                        <p:cTn id="12" dur="450"/>
+                                        <p:tgtEl>
+                                          <p:spTgt spid="8"/>
+                                        </p:tgtEl>
+                                      </p:cBhvr>
+                                    </p:animEffect>
+                                  </p:childTnLst>
+                                </p:cTn>
+                              </p:par>
+                            </p:childTnLst>
+                          </p:cTn>
+                        </p:par>
+                      </p:childTnLst>
+                    </p:cTn>
+                  </p:par>
+                </p:childTnLst>
+              </p:cTn>
+              <p:prevCondLst>
+                <p:cond evt="onPrev" delay="0">
+                  <p:tgtEl>
+                    <p:sldTgt/>
+                  </p:tgtEl>
+                </p:cond>
+              </p:prevCondLst>
+              <p:nextCondLst>
+                <p:cond evt="onNext" delay="0">
+                  <p:tgtEl>
+                    <p:sldTgt/>
+                  </p:tgtEl>
+                </p:cond>
+              </p:nextCondLst>
+            </p:seq>
+          </p:childTnLst>
+        </p:cTn>
+      </p:par>
+    </p:tnLst>
+  </p:timing>
 </p:sld>
 </file>
 
@@ -8922,21 +13214,238 @@
                 </a:solidFill>
                 <a:latin typeface="Calibri"/>
               </a:rPr>
-              <a:t>Hay dos palabras que se usan como sinonimos y significan cosas... (2/2)</a:t>
-            </a:r>
-          </a:p>
-        </p:txBody>
-      </p:sp>
-      <p:sp>
-        <p:nvSpPr>
-          <p:cNvPr id="5" name="TextBox 4"/>
+              <a:t>El tablero de flujo con limite de trabajo en curso</a:t>
+            </a:r>
+          </a:p>
+        </p:txBody>
+      </p:sp>
+      <p:sp>
+        <p:nvSpPr>
+          <p:cNvPr id="5" name="Rounded Rectangle 4"/>
+          <p:cNvSpPr/>
+          <p:nvPr/>
+        </p:nvSpPr>
+        <p:spPr>
+          <a:xfrm>
+            <a:off x="457200" y="1261872"/>
+            <a:ext cx="11277295" cy="4911784"/>
+          </a:xfrm>
+          <a:prstGeom prst="roundRect">
+            <a:avLst>
+              <a:gd name="adj" fmla="val 4000"/>
+            </a:avLst>
+          </a:prstGeom>
+          <a:solidFill>
+            <a:srgbClr val="1E1E1E"/>
+          </a:solidFill>
+          <a:ln>
+            <a:noFill/>
+          </a:ln>
+        </p:spPr>
+        <p:style>
+          <a:lnRef idx="1">
+            <a:schemeClr val="accent1"/>
+          </a:lnRef>
+          <a:fillRef idx="3">
+            <a:schemeClr val="accent1"/>
+          </a:fillRef>
+          <a:effectRef idx="2">
+            <a:schemeClr val="accent1"/>
+          </a:effectRef>
+          <a:fontRef idx="minor">
+            <a:schemeClr val="lt1"/>
+          </a:fontRef>
+        </p:style>
+        <p:txBody>
+          <a:bodyPr rtlCol="0" anchor="ctr"/>
+          <a:lstStyle/>
+          <a:p>
+            <a:pPr algn="ctr"/>
+          </a:p>
+        </p:txBody>
+      </p:sp>
+      <p:sp>
+        <p:nvSpPr>
+          <p:cNvPr id="6" name="Rectangle 5"/>
+          <p:cNvSpPr/>
+          <p:nvPr/>
+        </p:nvSpPr>
+        <p:spPr>
+          <a:xfrm>
+            <a:off x="457200" y="1261872"/>
+            <a:ext cx="11277295" cy="365760"/>
+          </a:xfrm>
+          <a:prstGeom prst="rect">
+            <a:avLst/>
+          </a:prstGeom>
+          <a:solidFill>
+            <a:srgbClr val="2D2D30"/>
+          </a:solidFill>
+          <a:ln>
+            <a:noFill/>
+          </a:ln>
+        </p:spPr>
+        <p:style>
+          <a:lnRef idx="1">
+            <a:schemeClr val="accent1"/>
+          </a:lnRef>
+          <a:fillRef idx="3">
+            <a:schemeClr val="accent1"/>
+          </a:fillRef>
+          <a:effectRef idx="2">
+            <a:schemeClr val="accent1"/>
+          </a:effectRef>
+          <a:fontRef idx="minor">
+            <a:schemeClr val="lt1"/>
+          </a:fontRef>
+        </p:style>
+        <p:txBody>
+          <a:bodyPr rtlCol="0" anchor="ctr"/>
+          <a:lstStyle/>
+          <a:p>
+            <a:pPr algn="ctr"/>
+          </a:p>
+        </p:txBody>
+      </p:sp>
+      <p:sp>
+        <p:nvSpPr>
+          <p:cNvPr id="7" name="Oval 6"/>
+          <p:cNvSpPr/>
+          <p:nvPr/>
+        </p:nvSpPr>
+        <p:spPr>
+          <a:xfrm>
+            <a:off x="658368" y="1380743"/>
+            <a:ext cx="128016" cy="128016"/>
+          </a:xfrm>
+          <a:prstGeom prst="ellipse">
+            <a:avLst/>
+          </a:prstGeom>
+          <a:solidFill>
+            <a:srgbClr val="FF5F56"/>
+          </a:solidFill>
+          <a:ln>
+            <a:noFill/>
+          </a:ln>
+        </p:spPr>
+        <p:style>
+          <a:lnRef idx="1">
+            <a:schemeClr val="accent1"/>
+          </a:lnRef>
+          <a:fillRef idx="3">
+            <a:schemeClr val="accent1"/>
+          </a:fillRef>
+          <a:effectRef idx="2">
+            <a:schemeClr val="accent1"/>
+          </a:effectRef>
+          <a:fontRef idx="minor">
+            <a:schemeClr val="lt1"/>
+          </a:fontRef>
+        </p:style>
+        <p:txBody>
+          <a:bodyPr rtlCol="0" anchor="ctr"/>
+          <a:lstStyle/>
+          <a:p>
+            <a:pPr algn="ctr"/>
+          </a:p>
+        </p:txBody>
+      </p:sp>
+      <p:sp>
+        <p:nvSpPr>
+          <p:cNvPr id="8" name="Oval 7"/>
+          <p:cNvSpPr/>
+          <p:nvPr/>
+        </p:nvSpPr>
+        <p:spPr>
+          <a:xfrm>
+            <a:off x="877824" y="1380743"/>
+            <a:ext cx="128016" cy="128016"/>
+          </a:xfrm>
+          <a:prstGeom prst="ellipse">
+            <a:avLst/>
+          </a:prstGeom>
+          <a:solidFill>
+            <a:srgbClr val="FFBD2E"/>
+          </a:solidFill>
+          <a:ln>
+            <a:noFill/>
+          </a:ln>
+        </p:spPr>
+        <p:style>
+          <a:lnRef idx="1">
+            <a:schemeClr val="accent1"/>
+          </a:lnRef>
+          <a:fillRef idx="3">
+            <a:schemeClr val="accent1"/>
+          </a:fillRef>
+          <a:effectRef idx="2">
+            <a:schemeClr val="accent1"/>
+          </a:effectRef>
+          <a:fontRef idx="minor">
+            <a:schemeClr val="lt1"/>
+          </a:fontRef>
+        </p:style>
+        <p:txBody>
+          <a:bodyPr rtlCol="0" anchor="ctr"/>
+          <a:lstStyle/>
+          <a:p>
+            <a:pPr algn="ctr"/>
+          </a:p>
+        </p:txBody>
+      </p:sp>
+      <p:sp>
+        <p:nvSpPr>
+          <p:cNvPr id="9" name="Oval 8"/>
+          <p:cNvSpPr/>
+          <p:nvPr/>
+        </p:nvSpPr>
+        <p:spPr>
+          <a:xfrm>
+            <a:off x="1097280" y="1380743"/>
+            <a:ext cx="128016" cy="128016"/>
+          </a:xfrm>
+          <a:prstGeom prst="ellipse">
+            <a:avLst/>
+          </a:prstGeom>
+          <a:solidFill>
+            <a:srgbClr val="27C93F"/>
+          </a:solidFill>
+          <a:ln>
+            <a:noFill/>
+          </a:ln>
+        </p:spPr>
+        <p:style>
+          <a:lnRef idx="1">
+            <a:schemeClr val="accent1"/>
+          </a:lnRef>
+          <a:fillRef idx="3">
+            <a:schemeClr val="accent1"/>
+          </a:fillRef>
+          <a:effectRef idx="2">
+            <a:schemeClr val="accent1"/>
+          </a:effectRef>
+          <a:fontRef idx="minor">
+            <a:schemeClr val="lt1"/>
+          </a:fontRef>
+        </p:style>
+        <p:txBody>
+          <a:bodyPr rtlCol="0" anchor="ctr"/>
+          <a:lstStyle/>
+          <a:p>
+            <a:pPr algn="ctr"/>
+          </a:p>
+        </p:txBody>
+      </p:sp>
+      <p:sp>
+        <p:nvSpPr>
+          <p:cNvPr id="10" name="TextBox 9"/>
           <p:cNvSpPr txBox="1"/>
           <p:nvPr/>
         </p:nvSpPr>
         <p:spPr>
           <a:xfrm>
-            <a:off x="457200" y="1170432"/>
-            <a:ext cx="11277295" cy="5230368"/>
+            <a:off x="1371600" y="1298448"/>
+            <a:ext cx="10180015" cy="292608"/>
           </a:xfrm>
           <a:prstGeom prst="rect">
             <a:avLst/>
@@ -8944,47 +13453,1476 @@
           <a:noFill/>
         </p:spPr>
         <p:txBody>
+          <a:bodyPr wrap="square" anchor="ctr"/>
+          <a:lstStyle/>
+          <a:p>
+            <a:pPr algn="r"/>
+            <a:r>
+              <a:rPr sz="1100" b="1" i="0">
+                <a:solidFill>
+                  <a:srgbClr val="BBBBBB"/>
+                </a:solidFill>
+                <a:latin typeface="Calibri"/>
+              </a:rPr>
+              <a:t>Mermaid</a:t>
+            </a:r>
+          </a:p>
+        </p:txBody>
+      </p:sp>
+      <p:sp>
+        <p:nvSpPr>
+          <p:cNvPr id="11" name="TextBox 10"/>
+          <p:cNvSpPr txBox="1"/>
+          <p:nvPr/>
+        </p:nvSpPr>
+        <p:spPr>
+          <a:xfrm>
+            <a:off x="685800" y="1719072"/>
+            <a:ext cx="502920" cy="4317424"/>
+          </a:xfrm>
+          <a:prstGeom prst="rect">
+            <a:avLst/>
+          </a:prstGeom>
+          <a:noFill/>
+        </p:spPr>
+        <p:txBody>
           <a:bodyPr wrap="square">
             <a:spAutoFit/>
           </a:bodyPr>
           <a:lstStyle/>
           <a:p>
+            <a:pPr algn="r">
+              <a:spcAft>
+                <a:spcPts val="235"/>
+              </a:spcAft>
+            </a:pPr>
+            <a:r>
+              <a:rPr sz="1100" i="0" b="0">
+                <a:solidFill>
+                  <a:srgbClr val="858585"/>
+                </a:solidFill>
+                <a:latin typeface="Consolas"/>
+              </a:rPr>
+              <a:t>1</a:t>
+            </a:r>
+          </a:p>
+          <a:p>
+            <a:pPr algn="r">
+              <a:spcAft>
+                <a:spcPts val="235"/>
+              </a:spcAft>
+            </a:pPr>
+            <a:r>
+              <a:rPr sz="1100" i="0" b="0">
+                <a:solidFill>
+                  <a:srgbClr val="858585"/>
+                </a:solidFill>
+                <a:latin typeface="Consolas"/>
+              </a:rPr>
+              <a:t>2</a:t>
+            </a:r>
+          </a:p>
+          <a:p>
+            <a:pPr algn="r">
+              <a:spcAft>
+                <a:spcPts val="235"/>
+              </a:spcAft>
+            </a:pPr>
+            <a:r>
+              <a:rPr sz="1100" i="0" b="0">
+                <a:solidFill>
+                  <a:srgbClr val="858585"/>
+                </a:solidFill>
+                <a:latin typeface="Consolas"/>
+              </a:rPr>
+              <a:t>3</a:t>
+            </a:r>
+          </a:p>
+          <a:p>
+            <a:pPr algn="r">
+              <a:spcAft>
+                <a:spcPts val="235"/>
+              </a:spcAft>
+            </a:pPr>
+            <a:r>
+              <a:rPr sz="1100" i="0" b="0">
+                <a:solidFill>
+                  <a:srgbClr val="858585"/>
+                </a:solidFill>
+                <a:latin typeface="Consolas"/>
+              </a:rPr>
+              <a:t>4</a:t>
+            </a:r>
+          </a:p>
+          <a:p>
+            <a:pPr algn="r">
+              <a:spcAft>
+                <a:spcPts val="235"/>
+              </a:spcAft>
+            </a:pPr>
+            <a:r>
+              <a:rPr sz="1100" i="0" b="0">
+                <a:solidFill>
+                  <a:srgbClr val="858585"/>
+                </a:solidFill>
+                <a:latin typeface="Consolas"/>
+              </a:rPr>
+              <a:t>5</a:t>
+            </a:r>
+          </a:p>
+          <a:p>
+            <a:pPr algn="r">
+              <a:spcAft>
+                <a:spcPts val="235"/>
+              </a:spcAft>
+            </a:pPr>
+            <a:r>
+              <a:rPr sz="1100" i="0" b="0">
+                <a:solidFill>
+                  <a:srgbClr val="858585"/>
+                </a:solidFill>
+                <a:latin typeface="Consolas"/>
+              </a:rPr>
+              <a:t>6</a:t>
+            </a:r>
+          </a:p>
+          <a:p>
+            <a:pPr algn="r">
+              <a:spcAft>
+                <a:spcPts val="235"/>
+              </a:spcAft>
+            </a:pPr>
+            <a:r>
+              <a:rPr sz="1100" i="0" b="0">
+                <a:solidFill>
+                  <a:srgbClr val="858585"/>
+                </a:solidFill>
+                <a:latin typeface="Consolas"/>
+              </a:rPr>
+              <a:t>7</a:t>
+            </a:r>
+          </a:p>
+          <a:p>
+            <a:pPr algn="r">
+              <a:spcAft>
+                <a:spcPts val="235"/>
+              </a:spcAft>
+            </a:pPr>
+            <a:r>
+              <a:rPr sz="1100" i="0" b="0">
+                <a:solidFill>
+                  <a:srgbClr val="858585"/>
+                </a:solidFill>
+                <a:latin typeface="Consolas"/>
+              </a:rPr>
+              <a:t>8</a:t>
+            </a:r>
+          </a:p>
+          <a:p>
+            <a:pPr algn="r">
+              <a:spcAft>
+                <a:spcPts val="235"/>
+              </a:spcAft>
+            </a:pPr>
+            <a:r>
+              <a:rPr sz="1100" i="0" b="0">
+                <a:solidFill>
+                  <a:srgbClr val="858585"/>
+                </a:solidFill>
+                <a:latin typeface="Consolas"/>
+              </a:rPr>
+              <a:t>9</a:t>
+            </a:r>
+          </a:p>
+          <a:p>
+            <a:pPr algn="r">
+              <a:spcAft>
+                <a:spcPts val="235"/>
+              </a:spcAft>
+            </a:pPr>
+            <a:r>
+              <a:rPr sz="1100" i="0" b="0">
+                <a:solidFill>
+                  <a:srgbClr val="858585"/>
+                </a:solidFill>
+                <a:latin typeface="Consolas"/>
+              </a:rPr>
+              <a:t>10</a:t>
+            </a:r>
+          </a:p>
+          <a:p>
+            <a:pPr algn="r">
+              <a:spcAft>
+                <a:spcPts val="235"/>
+              </a:spcAft>
+            </a:pPr>
+            <a:r>
+              <a:rPr sz="1100" i="0" b="0">
+                <a:solidFill>
+                  <a:srgbClr val="858585"/>
+                </a:solidFill>
+                <a:latin typeface="Consolas"/>
+              </a:rPr>
+              <a:t>11</a:t>
+            </a:r>
+          </a:p>
+          <a:p>
+            <a:pPr algn="r">
+              <a:spcAft>
+                <a:spcPts val="235"/>
+              </a:spcAft>
+            </a:pPr>
+            <a:r>
+              <a:rPr sz="1100" i="0" b="0">
+                <a:solidFill>
+                  <a:srgbClr val="858585"/>
+                </a:solidFill>
+                <a:latin typeface="Consolas"/>
+              </a:rPr>
+              <a:t>12</a:t>
+            </a:r>
+          </a:p>
+          <a:p>
+            <a:pPr algn="r">
+              <a:spcAft>
+                <a:spcPts val="235"/>
+              </a:spcAft>
+            </a:pPr>
+            <a:r>
+              <a:rPr sz="1100" i="0" b="0">
+                <a:solidFill>
+                  <a:srgbClr val="858585"/>
+                </a:solidFill>
+                <a:latin typeface="Consolas"/>
+              </a:rPr>
+              <a:t>13</a:t>
+            </a:r>
+          </a:p>
+          <a:p>
+            <a:pPr algn="r">
+              <a:spcAft>
+                <a:spcPts val="235"/>
+              </a:spcAft>
+            </a:pPr>
+            <a:r>
+              <a:rPr sz="1100" i="0" b="0">
+                <a:solidFill>
+                  <a:srgbClr val="858585"/>
+                </a:solidFill>
+                <a:latin typeface="Consolas"/>
+              </a:rPr>
+              <a:t>14</a:t>
+            </a:r>
+          </a:p>
+          <a:p>
+            <a:pPr algn="r">
+              <a:spcAft>
+                <a:spcPts val="235"/>
+              </a:spcAft>
+            </a:pPr>
+            <a:r>
+              <a:rPr sz="1100" i="0" b="0">
+                <a:solidFill>
+                  <a:srgbClr val="858585"/>
+                </a:solidFill>
+                <a:latin typeface="Consolas"/>
+              </a:rPr>
+              <a:t>15</a:t>
+            </a:r>
+          </a:p>
+          <a:p>
+            <a:pPr algn="r">
+              <a:spcAft>
+                <a:spcPts val="235"/>
+              </a:spcAft>
+            </a:pPr>
+            <a:r>
+              <a:rPr sz="1100" i="0" b="0">
+                <a:solidFill>
+                  <a:srgbClr val="858585"/>
+                </a:solidFill>
+                <a:latin typeface="Consolas"/>
+              </a:rPr>
+              <a:t>16</a:t>
+            </a:r>
+          </a:p>
+          <a:p>
+            <a:pPr algn="r">
+              <a:spcAft>
+                <a:spcPts val="235"/>
+              </a:spcAft>
+            </a:pPr>
+            <a:r>
+              <a:rPr sz="1100" i="0" b="0">
+                <a:solidFill>
+                  <a:srgbClr val="858585"/>
+                </a:solidFill>
+                <a:latin typeface="Consolas"/>
+              </a:rPr>
+              <a:t>17</a:t>
+            </a:r>
+          </a:p>
+          <a:p>
+            <a:pPr algn="r">
+              <a:spcAft>
+                <a:spcPts val="235"/>
+              </a:spcAft>
+            </a:pPr>
+            <a:r>
+              <a:rPr sz="1100" i="0" b="0">
+                <a:solidFill>
+                  <a:srgbClr val="858585"/>
+                </a:solidFill>
+                <a:latin typeface="Consolas"/>
+              </a:rPr>
+              <a:t>18</a:t>
+            </a:r>
+          </a:p>
+          <a:p>
+            <a:pPr algn="r">
+              <a:spcAft>
+                <a:spcPts val="235"/>
+              </a:spcAft>
+            </a:pPr>
+            <a:r>
+              <a:rPr sz="1100" i="0" b="0">
+                <a:solidFill>
+                  <a:srgbClr val="858585"/>
+                </a:solidFill>
+                <a:latin typeface="Consolas"/>
+              </a:rPr>
+              <a:t>19</a:t>
+            </a:r>
+          </a:p>
+          <a:p>
+            <a:pPr algn="r">
+              <a:spcAft>
+                <a:spcPts val="235"/>
+              </a:spcAft>
+            </a:pPr>
+            <a:r>
+              <a:rPr sz="1100" i="0" b="0">
+                <a:solidFill>
+                  <a:srgbClr val="858585"/>
+                </a:solidFill>
+                <a:latin typeface="Consolas"/>
+              </a:rPr>
+              <a:t>20</a:t>
+            </a:r>
+          </a:p>
+        </p:txBody>
+      </p:sp>
+      <p:sp>
+        <p:nvSpPr>
+          <p:cNvPr id="12" name="TextBox 11"/>
+          <p:cNvSpPr txBox="1"/>
+          <p:nvPr/>
+        </p:nvSpPr>
+        <p:spPr>
+          <a:xfrm>
+            <a:off x="1188720" y="1719072"/>
+            <a:ext cx="10271455" cy="4317424"/>
+          </a:xfrm>
+          <a:prstGeom prst="rect">
+            <a:avLst/>
+          </a:prstGeom>
+          <a:noFill/>
+        </p:spPr>
+        <p:txBody>
+          <a:bodyPr wrap="square">
+            <a:spAutoFit/>
+          </a:bodyPr>
+          <a:lstStyle/>
+          <a:p>
             <a:pPr>
               <a:spcAft>
-                <a:spcPts val="800"/>
+                <a:spcPts val="235"/>
               </a:spcAft>
             </a:pPr>
             <a:r>
-              <a:rPr sz="2000" b="0" i="0">
-                <a:solidFill>
-                  <a:srgbClr val="333333"/>
-                </a:solidFill>
-                <a:latin typeface="Calibri"/>
-              </a:rPr>
-              <a:t>–   Y aqui aparece una regla practica que salva proyectos: cada entrega debe ser una rebanada vertical, algo que el cliente pueda ver y opinar, no una capa horizontal invisible.</a:t>
+              <a:rPr sz="1100" i="0" b="0">
+                <a:solidFill>
+                  <a:srgbClr val="D4D4D4"/>
+                </a:solidFill>
+                <a:latin typeface="Consolas"/>
+              </a:rPr>
+              <a:t>flowchart</a:t>
+            </a:r>
+            <a:r>
+              <a:rPr sz="1100" i="0" b="0">
+                <a:solidFill>
+                  <a:srgbClr val="D4D4D4"/>
+                </a:solidFill>
+                <a:latin typeface="Consolas"/>
+              </a:rPr>
+              <a:t> </a:t>
+            </a:r>
+            <a:r>
+              <a:rPr sz="1100" i="0" b="0">
+                <a:solidFill>
+                  <a:srgbClr val="D4D4D4"/>
+                </a:solidFill>
+                <a:latin typeface="Consolas"/>
+              </a:rPr>
+              <a:t>LR</a:t>
             </a:r>
           </a:p>
           <a:p>
             <a:pPr>
               <a:spcAft>
-                <a:spcPts val="800"/>
+                <a:spcPts val="235"/>
               </a:spcAft>
             </a:pPr>
             <a:r>
-              <a:rPr sz="2000" b="0" i="0">
-                <a:solidFill>
-                  <a:srgbClr val="333333"/>
-                </a:solidFill>
-                <a:latin typeface="Calibri"/>
-              </a:rPr>
-              <a:t>–   Entregar 'todas las tablas de la base de datos' no es un incremento util para la clinica; entregar 'registrar y consultar una ficha completa de principio a fin' si lo es.</a:t>
-            </a:r>
-          </a:p>
-        </p:txBody>
-      </p:sp>
-      <p:sp>
-        <p:nvSpPr>
-          <p:cNvPr id="6" name="TextBox 5"/>
+              <a:rPr sz="1100" i="0" b="0">
+                <a:solidFill>
+                  <a:srgbClr val="D4D4D4"/>
+                </a:solidFill>
+                <a:latin typeface="Consolas"/>
+              </a:rPr>
+              <a:t>  </a:t>
+            </a:r>
+            <a:r>
+              <a:rPr sz="1100" i="0" b="0">
+                <a:solidFill>
+                  <a:srgbClr val="D4D4D4"/>
+                </a:solidFill>
+                <a:latin typeface="Consolas"/>
+              </a:rPr>
+              <a:t>subgraph</a:t>
+            </a:r>
+            <a:r>
+              <a:rPr sz="1100" i="0" b="0">
+                <a:solidFill>
+                  <a:srgbClr val="D4D4D4"/>
+                </a:solidFill>
+                <a:latin typeface="Consolas"/>
+              </a:rPr>
+              <a:t> </a:t>
+            </a:r>
+            <a:r>
+              <a:rPr sz="1100" i="0" b="0">
+                <a:solidFill>
+                  <a:srgbClr val="D4D4D4"/>
+                </a:solidFill>
+                <a:latin typeface="Consolas"/>
+              </a:rPr>
+              <a:t>backlog</a:t>
+            </a:r>
+            <a:r>
+              <a:rPr sz="1100" i="0" b="0">
+                <a:solidFill>
+                  <a:srgbClr val="D4D4D4"/>
+                </a:solidFill>
+                <a:latin typeface="Consolas"/>
+              </a:rPr>
+              <a:t>[</a:t>
+            </a:r>
+            <a:r>
+              <a:rPr sz="1100" i="0" b="0">
+                <a:solidFill>
+                  <a:srgbClr val="D4D4D4"/>
+                </a:solidFill>
+                <a:latin typeface="Consolas"/>
+              </a:rPr>
+              <a:t>Backlog</a:t>
+            </a:r>
+            <a:r>
+              <a:rPr sz="1100" i="0" b="0">
+                <a:solidFill>
+                  <a:srgbClr val="D4D4D4"/>
+                </a:solidFill>
+                <a:latin typeface="Consolas"/>
+              </a:rPr>
+              <a:t>]</a:t>
+            </a:r>
+          </a:p>
+          <a:p>
+            <a:pPr>
+              <a:spcAft>
+                <a:spcPts val="235"/>
+              </a:spcAft>
+            </a:pPr>
+            <a:r>
+              <a:rPr sz="1100" i="0" b="0">
+                <a:solidFill>
+                  <a:srgbClr val="D4D4D4"/>
+                </a:solidFill>
+                <a:latin typeface="Consolas"/>
+              </a:rPr>
+              <a:t>    </a:t>
+            </a:r>
+            <a:r>
+              <a:rPr sz="1100" i="0" b="0">
+                <a:solidFill>
+                  <a:srgbClr val="D4D4D4"/>
+                </a:solidFill>
+                <a:latin typeface="Consolas"/>
+              </a:rPr>
+              <a:t>b1</a:t>
+            </a:r>
+            <a:r>
+              <a:rPr sz="1100" i="0" b="0">
+                <a:solidFill>
+                  <a:srgbClr val="D4D4D4"/>
+                </a:solidFill>
+                <a:latin typeface="Consolas"/>
+              </a:rPr>
+              <a:t>[</a:t>
+            </a:r>
+            <a:r>
+              <a:rPr sz="1100" i="0" b="0">
+                <a:solidFill>
+                  <a:srgbClr val="D4D4D4"/>
+                </a:solidFill>
+                <a:latin typeface="Consolas"/>
+              </a:rPr>
+              <a:t>HU</a:t>
+            </a:r>
+            <a:r>
+              <a:rPr sz="1100" i="0" b="0">
+                <a:solidFill>
+                  <a:srgbClr val="D4D4D4"/>
+                </a:solidFill>
+                <a:latin typeface="Consolas"/>
+              </a:rPr>
+              <a:t>-</a:t>
+            </a:r>
+            <a:r>
+              <a:rPr sz="1100" i="0" b="0">
+                <a:solidFill>
+                  <a:srgbClr val="B5CEA8"/>
+                </a:solidFill>
+                <a:latin typeface="Consolas"/>
+              </a:rPr>
+              <a:t>04</a:t>
+            </a:r>
+            <a:r>
+              <a:rPr sz="1100" i="0" b="0">
+                <a:solidFill>
+                  <a:srgbClr val="D4D4D4"/>
+                </a:solidFill>
+                <a:latin typeface="Consolas"/>
+              </a:rPr>
+              <a:t>]</a:t>
+            </a:r>
+          </a:p>
+          <a:p>
+            <a:pPr>
+              <a:spcAft>
+                <a:spcPts val="235"/>
+              </a:spcAft>
+            </a:pPr>
+            <a:r>
+              <a:rPr sz="1100" i="0" b="0">
+                <a:solidFill>
+                  <a:srgbClr val="D4D4D4"/>
+                </a:solidFill>
+                <a:latin typeface="Consolas"/>
+              </a:rPr>
+              <a:t>    </a:t>
+            </a:r>
+            <a:r>
+              <a:rPr sz="1100" i="0" b="0">
+                <a:solidFill>
+                  <a:srgbClr val="D4D4D4"/>
+                </a:solidFill>
+                <a:latin typeface="Consolas"/>
+              </a:rPr>
+              <a:t>b2</a:t>
+            </a:r>
+            <a:r>
+              <a:rPr sz="1100" i="0" b="0">
+                <a:solidFill>
+                  <a:srgbClr val="D4D4D4"/>
+                </a:solidFill>
+                <a:latin typeface="Consolas"/>
+              </a:rPr>
+              <a:t>[</a:t>
+            </a:r>
+            <a:r>
+              <a:rPr sz="1100" i="0" b="0">
+                <a:solidFill>
+                  <a:srgbClr val="D4D4D4"/>
+                </a:solidFill>
+                <a:latin typeface="Consolas"/>
+              </a:rPr>
+              <a:t>HU</a:t>
+            </a:r>
+            <a:r>
+              <a:rPr sz="1100" i="0" b="0">
+                <a:solidFill>
+                  <a:srgbClr val="D4D4D4"/>
+                </a:solidFill>
+                <a:latin typeface="Consolas"/>
+              </a:rPr>
+              <a:t>-</a:t>
+            </a:r>
+            <a:r>
+              <a:rPr sz="1100" i="0" b="0">
+                <a:solidFill>
+                  <a:srgbClr val="B5CEA8"/>
+                </a:solidFill>
+                <a:latin typeface="Consolas"/>
+              </a:rPr>
+              <a:t>05</a:t>
+            </a:r>
+            <a:r>
+              <a:rPr sz="1100" i="0" b="0">
+                <a:solidFill>
+                  <a:srgbClr val="D4D4D4"/>
+                </a:solidFill>
+                <a:latin typeface="Consolas"/>
+              </a:rPr>
+              <a:t>]</a:t>
+            </a:r>
+          </a:p>
+          <a:p>
+            <a:pPr>
+              <a:spcAft>
+                <a:spcPts val="235"/>
+              </a:spcAft>
+            </a:pPr>
+            <a:r>
+              <a:rPr sz="1100" i="0" b="0">
+                <a:solidFill>
+                  <a:srgbClr val="D4D4D4"/>
+                </a:solidFill>
+                <a:latin typeface="Consolas"/>
+              </a:rPr>
+              <a:t>  </a:t>
+            </a:r>
+            <a:r>
+              <a:rPr sz="1100" i="0" b="0">
+                <a:solidFill>
+                  <a:srgbClr val="D4D4D4"/>
+                </a:solidFill>
+                <a:latin typeface="Consolas"/>
+              </a:rPr>
+              <a:t>end</a:t>
+            </a:r>
+          </a:p>
+          <a:p>
+            <a:pPr>
+              <a:spcAft>
+                <a:spcPts val="235"/>
+              </a:spcAft>
+            </a:pPr>
+            <a:r>
+              <a:rPr sz="1100" i="0" b="0">
+                <a:solidFill>
+                  <a:srgbClr val="D4D4D4"/>
+                </a:solidFill>
+                <a:latin typeface="Consolas"/>
+              </a:rPr>
+              <a:t>  </a:t>
+            </a:r>
+            <a:r>
+              <a:rPr sz="1100" i="0" b="0">
+                <a:solidFill>
+                  <a:srgbClr val="D4D4D4"/>
+                </a:solidFill>
+                <a:latin typeface="Consolas"/>
+              </a:rPr>
+              <a:t>subgraph</a:t>
+            </a:r>
+            <a:r>
+              <a:rPr sz="1100" i="0" b="0">
+                <a:solidFill>
+                  <a:srgbClr val="D4D4D4"/>
+                </a:solidFill>
+                <a:latin typeface="Consolas"/>
+              </a:rPr>
+              <a:t> </a:t>
+            </a:r>
+            <a:r>
+              <a:rPr sz="1100" i="0" b="0">
+                <a:solidFill>
+                  <a:srgbClr val="D4D4D4"/>
+                </a:solidFill>
+                <a:latin typeface="Consolas"/>
+              </a:rPr>
+              <a:t>curso</a:t>
+            </a:r>
+            <a:r>
+              <a:rPr sz="1100" i="0" b="0">
+                <a:solidFill>
+                  <a:srgbClr val="D4D4D4"/>
+                </a:solidFill>
+                <a:latin typeface="Consolas"/>
+              </a:rPr>
+              <a:t>[</a:t>
+            </a:r>
+            <a:r>
+              <a:rPr sz="1100" i="0" b="0">
+                <a:solidFill>
+                  <a:srgbClr val="D4D4D4"/>
+                </a:solidFill>
+                <a:latin typeface="Consolas"/>
+              </a:rPr>
+              <a:t>En</a:t>
+            </a:r>
+            <a:r>
+              <a:rPr sz="1100" i="0" b="0">
+                <a:solidFill>
+                  <a:srgbClr val="D4D4D4"/>
+                </a:solidFill>
+                <a:latin typeface="Consolas"/>
+              </a:rPr>
+              <a:t> </a:t>
+            </a:r>
+            <a:r>
+              <a:rPr sz="1100" i="0" b="0">
+                <a:solidFill>
+                  <a:srgbClr val="D4D4D4"/>
+                </a:solidFill>
+                <a:latin typeface="Consolas"/>
+              </a:rPr>
+              <a:t>curso</a:t>
+            </a:r>
+            <a:r>
+              <a:rPr sz="1100" i="0" b="0">
+                <a:solidFill>
+                  <a:srgbClr val="D4D4D4"/>
+                </a:solidFill>
+                <a:latin typeface="Consolas"/>
+              </a:rPr>
+              <a:t> - </a:t>
+            </a:r>
+            <a:r>
+              <a:rPr sz="1100" i="0" b="0">
+                <a:solidFill>
+                  <a:srgbClr val="D4D4D4"/>
+                </a:solidFill>
+                <a:latin typeface="Consolas"/>
+              </a:rPr>
+              <a:t>LIMITE</a:t>
+            </a:r>
+            <a:r>
+              <a:rPr sz="1100" i="0" b="0">
+                <a:solidFill>
+                  <a:srgbClr val="D4D4D4"/>
+                </a:solidFill>
+                <a:latin typeface="Consolas"/>
+              </a:rPr>
+              <a:t> </a:t>
+            </a:r>
+            <a:r>
+              <a:rPr sz="1100" i="0" b="0">
+                <a:solidFill>
+                  <a:srgbClr val="B5CEA8"/>
+                </a:solidFill>
+                <a:latin typeface="Consolas"/>
+              </a:rPr>
+              <a:t>2</a:t>
+            </a:r>
+            <a:r>
+              <a:rPr sz="1100" i="0" b="0">
+                <a:solidFill>
+                  <a:srgbClr val="D4D4D4"/>
+                </a:solidFill>
+                <a:latin typeface="Consolas"/>
+              </a:rPr>
+              <a:t>]</a:t>
+            </a:r>
+          </a:p>
+          <a:p>
+            <a:pPr>
+              <a:spcAft>
+                <a:spcPts val="235"/>
+              </a:spcAft>
+            </a:pPr>
+            <a:r>
+              <a:rPr sz="1100" i="0" b="0">
+                <a:solidFill>
+                  <a:srgbClr val="D4D4D4"/>
+                </a:solidFill>
+                <a:latin typeface="Consolas"/>
+              </a:rPr>
+              <a:t>    </a:t>
+            </a:r>
+            <a:r>
+              <a:rPr sz="1100" i="0" b="0">
+                <a:solidFill>
+                  <a:srgbClr val="D4D4D4"/>
+                </a:solidFill>
+                <a:latin typeface="Consolas"/>
+              </a:rPr>
+              <a:t>c1</a:t>
+            </a:r>
+            <a:r>
+              <a:rPr sz="1100" i="0" b="0">
+                <a:solidFill>
+                  <a:srgbClr val="D4D4D4"/>
+                </a:solidFill>
+                <a:latin typeface="Consolas"/>
+              </a:rPr>
+              <a:t>[</a:t>
+            </a:r>
+            <a:r>
+              <a:rPr sz="1100" i="0" b="0">
+                <a:solidFill>
+                  <a:srgbClr val="D4D4D4"/>
+                </a:solidFill>
+                <a:latin typeface="Consolas"/>
+              </a:rPr>
+              <a:t>HU</a:t>
+            </a:r>
+            <a:r>
+              <a:rPr sz="1100" i="0" b="0">
+                <a:solidFill>
+                  <a:srgbClr val="D4D4D4"/>
+                </a:solidFill>
+                <a:latin typeface="Consolas"/>
+              </a:rPr>
+              <a:t>-</a:t>
+            </a:r>
+            <a:r>
+              <a:rPr sz="1100" i="0" b="0">
+                <a:solidFill>
+                  <a:srgbClr val="B5CEA8"/>
+                </a:solidFill>
+                <a:latin typeface="Consolas"/>
+              </a:rPr>
+              <a:t>02</a:t>
+            </a:r>
+            <a:r>
+              <a:rPr sz="1100" i="0" b="0">
+                <a:solidFill>
+                  <a:srgbClr val="D4D4D4"/>
+                </a:solidFill>
+                <a:latin typeface="Consolas"/>
+              </a:rPr>
+              <a:t>]</a:t>
+            </a:r>
+          </a:p>
+          <a:p>
+            <a:pPr>
+              <a:spcAft>
+                <a:spcPts val="235"/>
+              </a:spcAft>
+            </a:pPr>
+            <a:r>
+              <a:rPr sz="1100" i="0" b="0">
+                <a:solidFill>
+                  <a:srgbClr val="D4D4D4"/>
+                </a:solidFill>
+                <a:latin typeface="Consolas"/>
+              </a:rPr>
+              <a:t>    </a:t>
+            </a:r>
+            <a:r>
+              <a:rPr sz="1100" i="0" b="0">
+                <a:solidFill>
+                  <a:srgbClr val="D4D4D4"/>
+                </a:solidFill>
+                <a:latin typeface="Consolas"/>
+              </a:rPr>
+              <a:t>c2</a:t>
+            </a:r>
+            <a:r>
+              <a:rPr sz="1100" i="0" b="0">
+                <a:solidFill>
+                  <a:srgbClr val="D4D4D4"/>
+                </a:solidFill>
+                <a:latin typeface="Consolas"/>
+              </a:rPr>
+              <a:t>[</a:t>
+            </a:r>
+            <a:r>
+              <a:rPr sz="1100" i="0" b="0">
+                <a:solidFill>
+                  <a:srgbClr val="D4D4D4"/>
+                </a:solidFill>
+                <a:latin typeface="Consolas"/>
+              </a:rPr>
+              <a:t>HU</a:t>
+            </a:r>
+            <a:r>
+              <a:rPr sz="1100" i="0" b="0">
+                <a:solidFill>
+                  <a:srgbClr val="D4D4D4"/>
+                </a:solidFill>
+                <a:latin typeface="Consolas"/>
+              </a:rPr>
+              <a:t>-</a:t>
+            </a:r>
+            <a:r>
+              <a:rPr sz="1100" i="0" b="0">
+                <a:solidFill>
+                  <a:srgbClr val="B5CEA8"/>
+                </a:solidFill>
+                <a:latin typeface="Consolas"/>
+              </a:rPr>
+              <a:t>03</a:t>
+            </a:r>
+            <a:r>
+              <a:rPr sz="1100" i="0" b="0">
+                <a:solidFill>
+                  <a:srgbClr val="D4D4D4"/>
+                </a:solidFill>
+                <a:latin typeface="Consolas"/>
+              </a:rPr>
+              <a:t>]</a:t>
+            </a:r>
+          </a:p>
+          <a:p>
+            <a:pPr>
+              <a:spcAft>
+                <a:spcPts val="235"/>
+              </a:spcAft>
+            </a:pPr>
+            <a:r>
+              <a:rPr sz="1100" i="0" b="0">
+                <a:solidFill>
+                  <a:srgbClr val="D4D4D4"/>
+                </a:solidFill>
+                <a:latin typeface="Consolas"/>
+              </a:rPr>
+              <a:t>  </a:t>
+            </a:r>
+            <a:r>
+              <a:rPr sz="1100" i="0" b="0">
+                <a:solidFill>
+                  <a:srgbClr val="D4D4D4"/>
+                </a:solidFill>
+                <a:latin typeface="Consolas"/>
+              </a:rPr>
+              <a:t>end</a:t>
+            </a:r>
+          </a:p>
+          <a:p>
+            <a:pPr>
+              <a:spcAft>
+                <a:spcPts val="235"/>
+              </a:spcAft>
+            </a:pPr>
+            <a:r>
+              <a:rPr sz="1100" i="0" b="0">
+                <a:solidFill>
+                  <a:srgbClr val="D4D4D4"/>
+                </a:solidFill>
+                <a:latin typeface="Consolas"/>
+              </a:rPr>
+              <a:t>  </a:t>
+            </a:r>
+            <a:r>
+              <a:rPr sz="1100" i="0" b="0">
+                <a:solidFill>
+                  <a:srgbClr val="D4D4D4"/>
+                </a:solidFill>
+                <a:latin typeface="Consolas"/>
+              </a:rPr>
+              <a:t>subgraph</a:t>
+            </a:r>
+            <a:r>
+              <a:rPr sz="1100" i="0" b="0">
+                <a:solidFill>
+                  <a:srgbClr val="D4D4D4"/>
+                </a:solidFill>
+                <a:latin typeface="Consolas"/>
+              </a:rPr>
+              <a:t> </a:t>
+            </a:r>
+            <a:r>
+              <a:rPr sz="1100" i="0" b="0">
+                <a:solidFill>
+                  <a:srgbClr val="D4D4D4"/>
+                </a:solidFill>
+                <a:latin typeface="Consolas"/>
+              </a:rPr>
+              <a:t>rev</a:t>
+            </a:r>
+            <a:r>
+              <a:rPr sz="1100" i="0" b="0">
+                <a:solidFill>
+                  <a:srgbClr val="D4D4D4"/>
+                </a:solidFill>
+                <a:latin typeface="Consolas"/>
+              </a:rPr>
+              <a:t>[</a:t>
+            </a:r>
+            <a:r>
+              <a:rPr sz="1100" i="0" b="0">
+                <a:solidFill>
+                  <a:srgbClr val="D4D4D4"/>
+                </a:solidFill>
+                <a:latin typeface="Consolas"/>
+              </a:rPr>
+              <a:t>En</a:t>
+            </a:r>
+            <a:r>
+              <a:rPr sz="1100" i="0" b="0">
+                <a:solidFill>
+                  <a:srgbClr val="D4D4D4"/>
+                </a:solidFill>
+                <a:latin typeface="Consolas"/>
+              </a:rPr>
+              <a:t> </a:t>
+            </a:r>
+            <a:r>
+              <a:rPr sz="1100" i="0" b="0">
+                <a:solidFill>
+                  <a:srgbClr val="D4D4D4"/>
+                </a:solidFill>
+                <a:latin typeface="Consolas"/>
+              </a:rPr>
+              <a:t>revision</a:t>
+            </a:r>
+            <a:r>
+              <a:rPr sz="1100" i="0" b="0">
+                <a:solidFill>
+                  <a:srgbClr val="D4D4D4"/>
+                </a:solidFill>
+                <a:latin typeface="Consolas"/>
+              </a:rPr>
+              <a:t> - </a:t>
+            </a:r>
+            <a:r>
+              <a:rPr sz="1100" i="0" b="0">
+                <a:solidFill>
+                  <a:srgbClr val="D4D4D4"/>
+                </a:solidFill>
+                <a:latin typeface="Consolas"/>
+              </a:rPr>
+              <a:t>LIMITE</a:t>
+            </a:r>
+            <a:r>
+              <a:rPr sz="1100" i="0" b="0">
+                <a:solidFill>
+                  <a:srgbClr val="D4D4D4"/>
+                </a:solidFill>
+                <a:latin typeface="Consolas"/>
+              </a:rPr>
+              <a:t> </a:t>
+            </a:r>
+            <a:r>
+              <a:rPr sz="1100" i="0" b="0">
+                <a:solidFill>
+                  <a:srgbClr val="B5CEA8"/>
+                </a:solidFill>
+                <a:latin typeface="Consolas"/>
+              </a:rPr>
+              <a:t>1</a:t>
+            </a:r>
+            <a:r>
+              <a:rPr sz="1100" i="0" b="0">
+                <a:solidFill>
+                  <a:srgbClr val="D4D4D4"/>
+                </a:solidFill>
+                <a:latin typeface="Consolas"/>
+              </a:rPr>
+              <a:t>]</a:t>
+            </a:r>
+          </a:p>
+          <a:p>
+            <a:pPr>
+              <a:spcAft>
+                <a:spcPts val="235"/>
+              </a:spcAft>
+            </a:pPr>
+            <a:r>
+              <a:rPr sz="1100" i="0" b="0">
+                <a:solidFill>
+                  <a:srgbClr val="D4D4D4"/>
+                </a:solidFill>
+                <a:latin typeface="Consolas"/>
+              </a:rPr>
+              <a:t>    </a:t>
+            </a:r>
+            <a:r>
+              <a:rPr sz="1100" i="0" b="0">
+                <a:solidFill>
+                  <a:srgbClr val="D4D4D4"/>
+                </a:solidFill>
+                <a:latin typeface="Consolas"/>
+              </a:rPr>
+              <a:t>r1</a:t>
+            </a:r>
+            <a:r>
+              <a:rPr sz="1100" i="0" b="0">
+                <a:solidFill>
+                  <a:srgbClr val="D4D4D4"/>
+                </a:solidFill>
+                <a:latin typeface="Consolas"/>
+              </a:rPr>
+              <a:t>[</a:t>
+            </a:r>
+            <a:r>
+              <a:rPr sz="1100" i="0" b="0">
+                <a:solidFill>
+                  <a:srgbClr val="D4D4D4"/>
+                </a:solidFill>
+                <a:latin typeface="Consolas"/>
+              </a:rPr>
+              <a:t>HU</a:t>
+            </a:r>
+            <a:r>
+              <a:rPr sz="1100" i="0" b="0">
+                <a:solidFill>
+                  <a:srgbClr val="D4D4D4"/>
+                </a:solidFill>
+                <a:latin typeface="Consolas"/>
+              </a:rPr>
+              <a:t>-</a:t>
+            </a:r>
+            <a:r>
+              <a:rPr sz="1100" i="0" b="0">
+                <a:solidFill>
+                  <a:srgbClr val="B5CEA8"/>
+                </a:solidFill>
+                <a:latin typeface="Consolas"/>
+              </a:rPr>
+              <a:t>01</a:t>
+            </a:r>
+            <a:r>
+              <a:rPr sz="1100" i="0" b="0">
+                <a:solidFill>
+                  <a:srgbClr val="D4D4D4"/>
+                </a:solidFill>
+                <a:latin typeface="Consolas"/>
+              </a:rPr>
+              <a:t>]</a:t>
+            </a:r>
+          </a:p>
+          <a:p>
+            <a:pPr>
+              <a:spcAft>
+                <a:spcPts val="235"/>
+              </a:spcAft>
+            </a:pPr>
+            <a:r>
+              <a:rPr sz="1100" i="0" b="0">
+                <a:solidFill>
+                  <a:srgbClr val="D4D4D4"/>
+                </a:solidFill>
+                <a:latin typeface="Consolas"/>
+              </a:rPr>
+              <a:t>  </a:t>
+            </a:r>
+            <a:r>
+              <a:rPr sz="1100" i="0" b="0">
+                <a:solidFill>
+                  <a:srgbClr val="D4D4D4"/>
+                </a:solidFill>
+                <a:latin typeface="Consolas"/>
+              </a:rPr>
+              <a:t>end</a:t>
+            </a:r>
+          </a:p>
+          <a:p>
+            <a:pPr>
+              <a:spcAft>
+                <a:spcPts val="235"/>
+              </a:spcAft>
+            </a:pPr>
+            <a:r>
+              <a:rPr sz="1100" i="0" b="0">
+                <a:solidFill>
+                  <a:srgbClr val="D4D4D4"/>
+                </a:solidFill>
+                <a:latin typeface="Consolas"/>
+              </a:rPr>
+              <a:t>  </a:t>
+            </a:r>
+            <a:r>
+              <a:rPr sz="1100" i="0" b="0">
+                <a:solidFill>
+                  <a:srgbClr val="D4D4D4"/>
+                </a:solidFill>
+                <a:latin typeface="Consolas"/>
+              </a:rPr>
+              <a:t>subgraph</a:t>
+            </a:r>
+            <a:r>
+              <a:rPr sz="1100" i="0" b="0">
+                <a:solidFill>
+                  <a:srgbClr val="D4D4D4"/>
+                </a:solidFill>
+                <a:latin typeface="Consolas"/>
+              </a:rPr>
+              <a:t> </a:t>
+            </a:r>
+            <a:r>
+              <a:rPr sz="1100" i="0" b="0">
+                <a:solidFill>
+                  <a:srgbClr val="D4D4D4"/>
+                </a:solidFill>
+                <a:latin typeface="Consolas"/>
+              </a:rPr>
+              <a:t>listo</a:t>
+            </a:r>
+            <a:r>
+              <a:rPr sz="1100" i="0" b="0">
+                <a:solidFill>
+                  <a:srgbClr val="D4D4D4"/>
+                </a:solidFill>
+                <a:latin typeface="Consolas"/>
+              </a:rPr>
+              <a:t>[</a:t>
+            </a:r>
+            <a:r>
+              <a:rPr sz="1100" i="0" b="0">
+                <a:solidFill>
+                  <a:srgbClr val="D4D4D4"/>
+                </a:solidFill>
+                <a:latin typeface="Consolas"/>
+              </a:rPr>
+              <a:t>Terminado</a:t>
+            </a:r>
+            <a:r>
+              <a:rPr sz="1100" i="0" b="0">
+                <a:solidFill>
+                  <a:srgbClr val="D4D4D4"/>
+                </a:solidFill>
+                <a:latin typeface="Consolas"/>
+              </a:rPr>
+              <a:t>]</a:t>
+            </a:r>
+          </a:p>
+          <a:p>
+            <a:pPr>
+              <a:spcAft>
+                <a:spcPts val="235"/>
+              </a:spcAft>
+            </a:pPr>
+            <a:r>
+              <a:rPr sz="1100" i="0" b="0">
+                <a:solidFill>
+                  <a:srgbClr val="D4D4D4"/>
+                </a:solidFill>
+                <a:latin typeface="Consolas"/>
+              </a:rPr>
+              <a:t>    </a:t>
+            </a:r>
+            <a:r>
+              <a:rPr sz="1100" i="0" b="0">
+                <a:solidFill>
+                  <a:srgbClr val="D4D4D4"/>
+                </a:solidFill>
+                <a:latin typeface="Consolas"/>
+              </a:rPr>
+              <a:t>l1</a:t>
+            </a:r>
+            <a:r>
+              <a:rPr sz="1100" i="0" b="0">
+                <a:solidFill>
+                  <a:srgbClr val="D4D4D4"/>
+                </a:solidFill>
+                <a:latin typeface="Consolas"/>
+              </a:rPr>
+              <a:t>[</a:t>
+            </a:r>
+            <a:r>
+              <a:rPr sz="1100" i="0" b="0">
+                <a:solidFill>
+                  <a:srgbClr val="D4D4D4"/>
+                </a:solidFill>
+                <a:latin typeface="Consolas"/>
+              </a:rPr>
+              <a:t>HU</a:t>
+            </a:r>
+            <a:r>
+              <a:rPr sz="1100" i="0" b="0">
+                <a:solidFill>
+                  <a:srgbClr val="D4D4D4"/>
+                </a:solidFill>
+                <a:latin typeface="Consolas"/>
+              </a:rPr>
+              <a:t>-</a:t>
+            </a:r>
+            <a:r>
+              <a:rPr sz="1100" i="0" b="0">
+                <a:solidFill>
+                  <a:srgbClr val="B5CEA8"/>
+                </a:solidFill>
+                <a:latin typeface="Consolas"/>
+              </a:rPr>
+              <a:t>00</a:t>
+            </a:r>
+            <a:r>
+              <a:rPr sz="1100" i="0" b="0">
+                <a:solidFill>
+                  <a:srgbClr val="D4D4D4"/>
+                </a:solidFill>
+                <a:latin typeface="Consolas"/>
+              </a:rPr>
+              <a:t>]</a:t>
+            </a:r>
+          </a:p>
+          <a:p>
+            <a:pPr>
+              <a:spcAft>
+                <a:spcPts val="235"/>
+              </a:spcAft>
+            </a:pPr>
+            <a:r>
+              <a:rPr sz="1100" i="0" b="0">
+                <a:solidFill>
+                  <a:srgbClr val="D4D4D4"/>
+                </a:solidFill>
+                <a:latin typeface="Consolas"/>
+              </a:rPr>
+              <a:t>  </a:t>
+            </a:r>
+            <a:r>
+              <a:rPr sz="1100" i="0" b="0">
+                <a:solidFill>
+                  <a:srgbClr val="D4D4D4"/>
+                </a:solidFill>
+                <a:latin typeface="Consolas"/>
+              </a:rPr>
+              <a:t>end</a:t>
+            </a:r>
+          </a:p>
+          <a:p>
+            <a:pPr>
+              <a:spcAft>
+                <a:spcPts val="235"/>
+              </a:spcAft>
+            </a:pPr>
+            <a:r>
+              <a:rPr sz="1100" i="0" b="0">
+                <a:solidFill>
+                  <a:srgbClr val="D4D4D4"/>
+                </a:solidFill>
+                <a:latin typeface="Consolas"/>
+              </a:rPr>
+              <a:t/>
+            </a:r>
+          </a:p>
+          <a:p>
+            <a:pPr>
+              <a:spcAft>
+                <a:spcPts val="235"/>
+              </a:spcAft>
+            </a:pPr>
+            <a:r>
+              <a:rPr sz="1100" i="0" b="0">
+                <a:solidFill>
+                  <a:srgbClr val="D4D4D4"/>
+                </a:solidFill>
+                <a:latin typeface="Consolas"/>
+              </a:rPr>
+              <a:t>  </a:t>
+            </a:r>
+            <a:r>
+              <a:rPr sz="1100" i="0" b="0">
+                <a:solidFill>
+                  <a:srgbClr val="D4D4D4"/>
+                </a:solidFill>
+                <a:latin typeface="Consolas"/>
+              </a:rPr>
+              <a:t>backlog</a:t>
+            </a:r>
+            <a:r>
+              <a:rPr sz="1100" i="0" b="0">
+                <a:solidFill>
+                  <a:srgbClr val="D4D4D4"/>
+                </a:solidFill>
+                <a:latin typeface="Consolas"/>
+              </a:rPr>
+              <a:t> --&gt; </a:t>
+            </a:r>
+            <a:r>
+              <a:rPr sz="1100" i="0" b="0">
+                <a:solidFill>
+                  <a:srgbClr val="D4D4D4"/>
+                </a:solidFill>
+                <a:latin typeface="Consolas"/>
+              </a:rPr>
+              <a:t>curso</a:t>
+            </a:r>
+            <a:r>
+              <a:rPr sz="1100" i="0" b="0">
+                <a:solidFill>
+                  <a:srgbClr val="D4D4D4"/>
+                </a:solidFill>
+                <a:latin typeface="Consolas"/>
+              </a:rPr>
+              <a:t> --&gt; </a:t>
+            </a:r>
+            <a:r>
+              <a:rPr sz="1100" i="0" b="0">
+                <a:solidFill>
+                  <a:srgbClr val="D4D4D4"/>
+                </a:solidFill>
+                <a:latin typeface="Consolas"/>
+              </a:rPr>
+              <a:t>rev</a:t>
+            </a:r>
+            <a:r>
+              <a:rPr sz="1100" i="0" b="0">
+                <a:solidFill>
+                  <a:srgbClr val="D4D4D4"/>
+                </a:solidFill>
+                <a:latin typeface="Consolas"/>
+              </a:rPr>
+              <a:t> --&gt; </a:t>
+            </a:r>
+            <a:r>
+              <a:rPr sz="1100" i="0" b="0">
+                <a:solidFill>
+                  <a:srgbClr val="D4D4D4"/>
+                </a:solidFill>
+                <a:latin typeface="Consolas"/>
+              </a:rPr>
+              <a:t>listo</a:t>
+            </a:r>
+          </a:p>
+          <a:p>
+            <a:pPr>
+              <a:spcAft>
+                <a:spcPts val="235"/>
+              </a:spcAft>
+            </a:pPr>
+            <a:r>
+              <a:rPr sz="1100" i="0" b="0">
+                <a:solidFill>
+                  <a:srgbClr val="D4D4D4"/>
+                </a:solidFill>
+                <a:latin typeface="Consolas"/>
+              </a:rPr>
+              <a:t/>
+            </a:r>
+          </a:p>
+          <a:p>
+            <a:pPr>
+              <a:spcAft>
+                <a:spcPts val="235"/>
+              </a:spcAft>
+            </a:pPr>
+            <a:r>
+              <a:rPr sz="1100" i="1" b="0">
+                <a:solidFill>
+                  <a:srgbClr val="6A9955"/>
+                </a:solidFill>
+                <a:latin typeface="Consolas"/>
+              </a:rPr>
+              <a:t>%% El LIMITE es lo que hace que el tablero sirva: sin el, todo esta</a:t>
+            </a:r>
+          </a:p>
+          <a:p>
+            <a:pPr>
+              <a:spcAft>
+                <a:spcPts val="235"/>
+              </a:spcAft>
+            </a:pPr>
+            <a:r>
+              <a:rPr sz="1100" i="1" b="0">
+                <a:solidFill>
+                  <a:srgbClr val="6A9955"/>
+                </a:solidFill>
+                <a:latin typeface="Consolas"/>
+              </a:rPr>
+              <a:t>%% «en curso» y nada termina. Para empezar HU-04 hay que cerrar una.</a:t>
+            </a:r>
+          </a:p>
+        </p:txBody>
+      </p:sp>
+      <p:sp>
+        <p:nvSpPr>
+          <p:cNvPr id="13" name="TextBox 12"/>
           <p:cNvSpPr txBox="1"/>
           <p:nvPr/>
         </p:nvSpPr>
@@ -9158,21 +15096,173 @@
                 </a:solidFill>
                 <a:latin typeface="Calibri"/>
               </a:rPr>
-              <a:t>Agil no significa trabajar sin documentacion, y este es el malentendido...</a:t>
-            </a:r>
-          </a:p>
-        </p:txBody>
-      </p:sp>
-      <p:sp>
-        <p:nvSpPr>
-          <p:cNvPr id="5" name="TextBox 4"/>
+              <a:t>Iteración e incremento</a:t>
+            </a:r>
+          </a:p>
+        </p:txBody>
+      </p:sp>
+      <p:sp>
+        <p:nvSpPr>
+          <p:cNvPr id="5" name="Rounded Rectangle 4"/>
+          <p:cNvSpPr/>
+          <p:nvPr/>
+        </p:nvSpPr>
+        <p:spPr>
+          <a:xfrm>
+            <a:off x="5803166" y="1188719"/>
+            <a:ext cx="5998464" cy="4828032"/>
+          </a:xfrm>
+          <a:prstGeom prst="roundRect">
+            <a:avLst>
+              <a:gd name="adj" fmla="val 4000"/>
+            </a:avLst>
+          </a:prstGeom>
+          <a:solidFill>
+            <a:srgbClr val="E8EEF4"/>
+          </a:solidFill>
+          <a:ln>
+            <a:noFill/>
+          </a:ln>
+        </p:spPr>
+        <p:style>
+          <a:lnRef idx="1">
+            <a:schemeClr val="accent1"/>
+          </a:lnRef>
+          <a:fillRef idx="3">
+            <a:schemeClr val="accent1"/>
+          </a:fillRef>
+          <a:effectRef idx="2">
+            <a:schemeClr val="accent1"/>
+          </a:effectRef>
+          <a:fontRef idx="minor">
+            <a:schemeClr val="lt1"/>
+          </a:fontRef>
+        </p:style>
+        <p:txBody>
+          <a:bodyPr rtlCol="0" anchor="ctr"/>
+          <a:lstStyle/>
+          <a:p>
+            <a:pPr algn="ctr"/>
+          </a:p>
+        </p:txBody>
+      </p:sp>
+      <p:pic>
+        <p:nvPicPr>
+          <p:cNvPr id="6" name="Picture 5" descr="iteracion-incremento-paso1.png"/>
+          <p:cNvPicPr>
+            <a:picLocks noChangeAspect="1"/>
+          </p:cNvPicPr>
+          <p:nvPr/>
+        </p:nvPicPr>
+        <p:blipFill>
+          <a:blip r:embed="rId2"/>
+          <a:stretch>
+            <a:fillRect/>
+          </a:stretch>
+        </p:blipFill>
+        <p:spPr>
+          <a:xfrm>
+            <a:off x="5876318" y="1261872"/>
+            <a:ext cx="5852160" cy="4681728"/>
+          </a:xfrm>
+          <a:prstGeom prst="rect">
+            <a:avLst/>
+          </a:prstGeom>
+        </p:spPr>
+      </p:pic>
+      <p:pic>
+        <p:nvPicPr>
+          <p:cNvPr id="7" name="Picture 6" descr="iteracion-incremento-paso2.png"/>
+          <p:cNvPicPr>
+            <a:picLocks noChangeAspect="1"/>
+          </p:cNvPicPr>
+          <p:nvPr/>
+        </p:nvPicPr>
+        <p:blipFill>
+          <a:blip r:embed="rId3"/>
+          <a:stretch>
+            <a:fillRect/>
+          </a:stretch>
+        </p:blipFill>
+        <p:spPr>
+          <a:xfrm>
+            <a:off x="5876318" y="1261872"/>
+            <a:ext cx="5852160" cy="4681728"/>
+          </a:xfrm>
+          <a:prstGeom prst="rect">
+            <a:avLst/>
+          </a:prstGeom>
+        </p:spPr>
+      </p:pic>
+      <p:pic>
+        <p:nvPicPr>
+          <p:cNvPr id="8" name="Picture 7" descr="iteracion-incremento-paso3.png"/>
+          <p:cNvPicPr>
+            <a:picLocks noChangeAspect="1"/>
+          </p:cNvPicPr>
+          <p:nvPr/>
+        </p:nvPicPr>
+        <p:blipFill>
+          <a:blip r:embed="rId4"/>
+          <a:stretch>
+            <a:fillRect/>
+          </a:stretch>
+        </p:blipFill>
+        <p:spPr>
+          <a:xfrm>
+            <a:off x="5876318" y="1261872"/>
+            <a:ext cx="5852160" cy="4681728"/>
+          </a:xfrm>
+          <a:prstGeom prst="rect">
+            <a:avLst/>
+          </a:prstGeom>
+        </p:spPr>
+      </p:pic>
+      <p:sp>
+        <p:nvSpPr>
+          <p:cNvPr id="13" name="TextBox 12"/>
           <p:cNvSpPr txBox="1"/>
           <p:nvPr/>
         </p:nvSpPr>
         <p:spPr>
           <a:xfrm>
-            <a:off x="457200" y="1170432"/>
-            <a:ext cx="11277295" cy="5230368"/>
+            <a:off x="5870301" y="5961888"/>
+            <a:ext cx="5864193" cy="320040"/>
+          </a:xfrm>
+          <a:prstGeom prst="rect">
+            <a:avLst/>
+          </a:prstGeom>
+          <a:noFill/>
+        </p:spPr>
+        <p:txBody>
+          <a:bodyPr wrap="square">
+            <a:spAutoFit/>
+          </a:bodyPr>
+          <a:lstStyle/>
+          <a:p>
+            <a:pPr algn="ctr"/>
+            <a:r>
+              <a:rPr sz="1100" b="0" i="1">
+                <a:solidFill>
+                  <a:srgbClr val="666666"/>
+                </a:solidFill>
+                <a:latin typeface="Calibri"/>
+              </a:rPr>
+              <a:t>Clic para avanzar la animación</a:t>
+            </a:r>
+          </a:p>
+        </p:txBody>
+      </p:sp>
+      <p:sp>
+        <p:nvSpPr>
+          <p:cNvPr id="14" name="TextBox 13"/>
+          <p:cNvSpPr txBox="1"/>
+          <p:nvPr/>
+        </p:nvSpPr>
+        <p:spPr>
+          <a:xfrm>
+            <a:off x="457200" y="1353312"/>
+            <a:ext cx="5093061" cy="5047488"/>
           </a:xfrm>
           <a:prstGeom prst="rect">
             <a:avLst/>
@@ -9197,7 +15287,7 @@
                 </a:solidFill>
                 <a:latin typeface="Calibri"/>
               </a:rPr>
-              <a:t>–   Agil no significa trabajar sin documentacion, y este es el malentendido que mas daño hace.</a:t>
+              <a:t>–   Incremento: agregar un pedazo nuevo y utilizable al sistema.</a:t>
             </a:r>
           </a:p>
           <a:p>
@@ -9213,7 +15303,7 @@
                 </a:solidFill>
                 <a:latin typeface="Calibri"/>
               </a:rPr>
-              <a:t>–   El manifiesto dice software funcionando sobre documentacion exhaustiva: lo que se rechaza es el documento inflado que nadie lee, no el documento util.</a:t>
+              <a:t>–   Iteración: volver sobre lo que ya existe y mejorarlo con la retroalimentación.</a:t>
             </a:r>
           </a:p>
           <a:p>
@@ -9229,7 +15319,7 @@
                 </a:solidFill>
                 <a:latin typeface="Calibri"/>
               </a:rPr>
-              <a:t>–   Para este curso esto es central: en Seminario de Sistemas el producto ES documentacion de diseño, y aun asi el trabajo puede ser perfectamente agil, porque se produce por incrementos, se revisa con el cliente y se corrige.</a:t>
+              <a:t>–   Mockup de la ficha (incremento); la veterinaria pide alergias y foto, sale la versión 2 (iteración).</a:t>
             </a:r>
           </a:p>
           <a:p>
@@ -9245,14 +15335,14 @@
                 </a:solidFill>
                 <a:latin typeface="Calibri"/>
               </a:rPr>
-              <a:t>–   El estudiante que solo cursa esta materia trabaja con sprints igual que los demas: sus incrementos son mockups, casos de uso y diccionario de datos, y cierra con un prototipo navegable que se puede recorrer y criticar.</a:t>
-            </a:r>
-          </a:p>
-        </p:txBody>
-      </p:sp>
-      <p:sp>
-        <p:nvSpPr>
-          <p:cNvPr id="6" name="TextBox 5"/>
+              <a:t>–   Cada entrega es una rebanada vertical que el cliente puede ver, no una capa invisible.</a:t>
+            </a:r>
+          </a:p>
+        </p:txBody>
+      </p:sp>
+      <p:sp>
+        <p:nvSpPr>
+          <p:cNvPr id="15" name="TextBox 14"/>
           <p:cNvSpPr txBox="1"/>
           <p:nvPr/>
         </p:nvSpPr>
@@ -9290,6 +15380,142 @@
   <p:clrMapOvr>
     <a:masterClrMapping/>
   </p:clrMapOvr>
+  <p:timing>
+    <p:tnLst>
+      <p:par>
+        <p:cTn id="1" dur="indefinite" restart="never" nodeType="tmRoot">
+          <p:childTnLst>
+            <p:seq concurrent="1" nextAc="seek">
+              <p:cTn id="2" dur="indefinite" nodeType="mainSeq">
+                <p:childTnLst>
+                  <p:par>
+                    <p:cTn id="3" fill="hold">
+                      <p:stCondLst>
+                        <p:cond delay="indefinite"/>
+                      </p:stCondLst>
+                      <p:childTnLst>
+                        <p:par>
+                          <p:cTn id="4" fill="hold">
+                            <p:stCondLst>
+                              <p:cond delay="0"/>
+                            </p:stCondLst>
+                            <p:childTnLst>
+                              <p:par>
+                                <p:cTn id="5" presetID="10" presetClass="entr" presetSubtype="0" fill="hold" nodeType="clickEffect">
+                                  <p:stCondLst>
+                                    <p:cond delay="0"/>
+                                  </p:stCondLst>
+                                  <p:childTnLst>
+                                    <p:set>
+                                      <p:cBhvr>
+                                        <p:cTn id="6" dur="1" fill="hold">
+                                          <p:stCondLst>
+                                            <p:cond delay="0"/>
+                                          </p:stCondLst>
+                                        </p:cTn>
+                                        <p:tgtEl>
+                                          <p:spTgt spid="7"/>
+                                        </p:tgtEl>
+                                        <p:attrNameLst>
+                                          <p:attrName>style.visibility</p:attrName>
+                                        </p:attrNameLst>
+                                      </p:cBhvr>
+                                      <p:to>
+                                        <p:strVal val="visible"/>
+                                      </p:to>
+                                    </p:set>
+                                    <p:animEffect transition="in" filter="fade">
+                                      <p:cBhvr>
+                                        <p:cTn id="7" dur="450"/>
+                                        <p:tgtEl>
+                                          <p:spTgt spid="7"/>
+                                        </p:tgtEl>
+                                      </p:cBhvr>
+                                    </p:animEffect>
+                                  </p:childTnLst>
+                                </p:cTn>
+                              </p:par>
+                            </p:childTnLst>
+                          </p:cTn>
+                        </p:par>
+                      </p:childTnLst>
+                    </p:cTn>
+                  </p:par>
+                  <p:par>
+                    <p:cTn id="8" fill="hold">
+                      <p:stCondLst>
+                        <p:cond delay="indefinite"/>
+                      </p:stCondLst>
+                      <p:childTnLst>
+                        <p:par>
+                          <p:cTn id="9" fill="hold">
+                            <p:stCondLst>
+                              <p:cond delay="0"/>
+                            </p:stCondLst>
+                            <p:childTnLst>
+                              <p:par>
+                                <p:cTn id="10" presetID="10" presetClass="entr" presetSubtype="0" fill="hold" nodeType="clickEffect">
+                                  <p:stCondLst>
+                                    <p:cond delay="0"/>
+                                  </p:stCondLst>
+                                  <p:childTnLst>
+                                    <p:set>
+                                      <p:cBhvr>
+                                        <p:cTn id="11" dur="1" fill="hold">
+                                          <p:stCondLst>
+                                            <p:cond delay="0"/>
+                                          </p:stCondLst>
+                                        </p:cTn>
+                                        <p:tgtEl>
+                                          <p:spTgt spid="8"/>
+                                        </p:tgtEl>
+                                        <p:attrNameLst>
+                                          <p:attrName>style.visibility</p:attrName>
+                                        </p:attrNameLst>
+                                      </p:cBhvr>
+                                      <p:to>
+                                        <p:strVal val="visible"/>
+                                      </p:to>
+                                    </p:set>
+                                    <p:animEffect transition="in" filter="fade">
+                                      <p:cBhvr>
+                                        <p:cTn id="12" dur="450"/>
+                                        <p:tgtEl>
+                                          <p:spTgt spid="8"/>
+                                        </p:tgtEl>
+                                      </p:cBhvr>
+                                    </p:animEffect>
+                                  </p:childTnLst>
+                                </p:cTn>
+                              </p:par>
+                            </p:childTnLst>
+                          </p:cTn>
+                        </p:par>
+                      </p:childTnLst>
+                    </p:cTn>
+                  </p:par>
+                </p:childTnLst>
+              </p:cTn>
+              <p:prevCondLst>
+                <p:cond evt="onPrev" delay="0">
+                  <p:tgtEl>
+                    <p:sldTgt/>
+                  </p:tgtEl>
+                </p:cond>
+              </p:prevCondLst>
+              <p:nextCondLst>
+                <p:cond evt="onNext" delay="0">
+                  <p:tgtEl>
+                    <p:sldTgt/>
+                  </p:tgtEl>
+                </p:cond>
+              </p:nextCondLst>
+            </p:seq>
+          </p:childTnLst>
+        </p:cTn>
+      </p:par>
+    </p:tnLst>
+  </p:timing>
 </p:sld>
 </file>
 

--- a/Seminario de Sistemas/Clases/Clase 4 - Metodologias agiles/Presentacion.pptx
+++ b/Seminario de Sistemas/Clases/Clase 4 - Metodologias agiles/Presentacion.pptx
@@ -999,94 +999,6 @@
           <a:p>
             <a:r>
               <a:t>Un equipo agil documenta historias de usuario con criterios de aceptacion, la Definicion de Terminado, las decisiones de arquitectura, el diccionario de datos y los diagramas que hagan falta, pero los escribe justo a tiempo y los mantiene vivos.</a:t>
-            </a:r>
-          </a:p>
-        </p:txBody>
-      </p:sp>
-      <p:sp>
-        <p:nvSpPr>
-          <p:cNvPr id="4" name="Slide Number Placeholder 3"/>
-          <p:cNvSpPr>
-            <a:spLocks noGrp="1"/>
-          </p:cNvSpPr>
-          <p:nvPr>
-            <p:ph type="sldNum" idx="5" sz="quarter"/>
-          </p:nvPr>
-        </p:nvSpPr>
-        <p:spPr/>
-      </p:sp>
-    </p:spTree>
-  </p:cSld>
-  <p:clrMapOvr>
-    <a:masterClrMapping/>
-  </p:clrMapOvr>
-</p:notes>
-</file>
-
-<file path=ppt/notesSlides/notesSlide6.xml><?xml version="1.0" encoding="utf-8"?>
-<p:notes xmlns:a="http://schemas.openxmlformats.org/drawingml/2006/main" xmlns:p="http://schemas.openxmlformats.org/presentationml/2006/main" xmlns:r="http://schemas.openxmlformats.org/officeDocument/2006/relationships">
-  <p:cSld>
-    <p:spTree>
-      <p:nvGrpSpPr>
-        <p:cNvPr id="1" name=""/>
-        <p:cNvGrpSpPr/>
-        <p:nvPr/>
-      </p:nvGrpSpPr>
-      <p:grpSpPr>
-        <a:xfrm>
-          <a:off x="0" y="0"/>
-          <a:ext cx="0" cy="0"/>
-          <a:chOff x="0" y="0"/>
-          <a:chExt cx="0" cy="0"/>
-        </a:xfrm>
-      </p:grpSpPr>
-      <p:sp>
-        <p:nvSpPr>
-          <p:cNvPr id="2" name="Slide Image Placeholder 1"/>
-          <p:cNvSpPr>
-            <a:spLocks noGrp="1"/>
-          </p:cNvSpPr>
-          <p:nvPr>
-            <p:ph type="sldImg" idx="2"/>
-          </p:nvPr>
-        </p:nvSpPr>
-        <p:spPr/>
-      </p:sp>
-      <p:sp>
-        <p:nvSpPr>
-          <p:cNvPr id="3" name="Notes Placeholder 2"/>
-          <p:cNvSpPr>
-            <a:spLocks noGrp="1"/>
-          </p:cNvSpPr>
-          <p:nvPr>
-            <p:ph type="body" idx="3" sz="quarter"/>
-          </p:nvPr>
-        </p:nvSpPr>
-        <p:spPr/>
-        <p:txBody>
-          <a:bodyPr/>
-          <a:lstStyle/>
-          <a:p>
-            <a:r>
-              <a:t>TEXTO COMPLETO DE LA LÁMINA (se proyecta resumido):</a:t>
-            </a:r>
-          </a:p>
-          <a:p/>
-          <a:p>
-            <a:r>
-              <a:t>Herramienta: draw.io · Excalidraw · Google Docs</a:t>
-            </a:r>
-          </a:p>
-          <a:p/>
-          <a:p>
-            <a:r>
-              <a:t>Demo: Se arma en pantalla el tablero de la clinica, arrastra una tarjeta de 'Por hacer' a 'En revision del cliente' y muestra que pasa cuando se rompe el limite de trabajo en curso.</a:t>
-            </a:r>
-          </a:p>
-          <a:p/>
-          <a:p>
-            <a:r>
-              <a:t>Mismo dominio: la clinica veterinaria — no otro ejemplo. Aqui se diseña, no se programa.</a:t>
             </a:r>
           </a:p>
         </p:txBody>
@@ -7377,83 +7289,14 @@
       </p:sp>
       <p:sp>
         <p:nvSpPr>
-          <p:cNvPr id="5" name="Rounded Rectangle 4"/>
-          <p:cNvSpPr/>
+          <p:cNvPr id="5" name="TextBox 4"/>
+          <p:cNvSpPr txBox="1"/>
           <p:nvPr/>
         </p:nvSpPr>
         <p:spPr>
           <a:xfrm>
-            <a:off x="5797149" y="1573813"/>
-            <a:ext cx="6010497" cy="4057845"/>
-          </a:xfrm>
-          <a:prstGeom prst="roundRect">
-            <a:avLst>
-              <a:gd name="adj" fmla="val 4000"/>
-            </a:avLst>
-          </a:prstGeom>
-          <a:solidFill>
-            <a:srgbClr val="E8EEF4"/>
-          </a:solidFill>
-          <a:ln>
-            <a:noFill/>
-          </a:ln>
-        </p:spPr>
-        <p:style>
-          <a:lnRef idx="1">
-            <a:schemeClr val="accent1"/>
-          </a:lnRef>
-          <a:fillRef idx="3">
-            <a:schemeClr val="accent1"/>
-          </a:fillRef>
-          <a:effectRef idx="2">
-            <a:schemeClr val="accent1"/>
-          </a:effectRef>
-          <a:fontRef idx="minor">
-            <a:schemeClr val="lt1"/>
-          </a:fontRef>
-        </p:style>
-        <p:txBody>
-          <a:bodyPr rtlCol="0" anchor="ctr"/>
-          <a:lstStyle/>
-          <a:p>
-            <a:pPr algn="ctr"/>
-          </a:p>
-        </p:txBody>
-      </p:sp>
-      <p:pic>
-        <p:nvPicPr>
-          <p:cNvPr id="6" name="Picture 5" descr="sticky-notes-planning-board.jpg"/>
-          <p:cNvPicPr>
-            <a:picLocks noChangeAspect="1"/>
-          </p:cNvPicPr>
-          <p:nvPr/>
-        </p:nvPicPr>
-        <p:blipFill>
-          <a:blip r:embed="rId2"/>
-          <a:stretch>
-            <a:fillRect/>
-          </a:stretch>
-        </p:blipFill>
-        <p:spPr>
-          <a:xfrm>
-            <a:off x="5870301" y="1646965"/>
-            <a:ext cx="5864193" cy="3911541"/>
-          </a:xfrm>
-          <a:prstGeom prst="rect">
-            <a:avLst/>
-          </a:prstGeom>
-        </p:spPr>
-      </p:pic>
-      <p:sp>
-        <p:nvSpPr>
-          <p:cNvPr id="7" name="TextBox 6"/>
-          <p:cNvSpPr txBox="1"/>
-          <p:nvPr/>
-        </p:nvSpPr>
-        <p:spPr>
-          <a:xfrm>
-            <a:off x="5870301" y="5961888"/>
-            <a:ext cx="5864193" cy="320040"/>
+            <a:off x="457200" y="1170432"/>
+            <a:ext cx="11277295" cy="5230368"/>
           </a:xfrm>
           <a:prstGeom prst="rect">
             <a:avLst/>
@@ -7466,41 +7309,6 @@
           </a:bodyPr>
           <a:lstStyle/>
           <a:p>
-            <a:pPr algn="ctr"/>
-            <a:r>
-              <a:rPr sz="1100" b="0" i="1">
-                <a:solidFill>
-                  <a:srgbClr val="666666"/>
-                </a:solidFill>
-                <a:latin typeface="Calibri"/>
-              </a:rPr>
-              <a:t>Foto: cottonbro studio · Pexels</a:t>
-            </a:r>
-          </a:p>
-        </p:txBody>
-      </p:sp>
-      <p:sp>
-        <p:nvSpPr>
-          <p:cNvPr id="8" name="TextBox 7"/>
-          <p:cNvSpPr txBox="1"/>
-          <p:nvPr/>
-        </p:nvSpPr>
-        <p:spPr>
-          <a:xfrm>
-            <a:off x="457200" y="1353312"/>
-            <a:ext cx="5093061" cy="5047488"/>
-          </a:xfrm>
-          <a:prstGeom prst="rect">
-            <a:avLst/>
-          </a:prstGeom>
-          <a:noFill/>
-        </p:spPr>
-        <p:txBody>
-          <a:bodyPr wrap="square">
-            <a:spAutoFit/>
-          </a:bodyPr>
-          <a:lstStyle/>
-          <a:p>
             <a:pPr>
               <a:spcAft>
                 <a:spcPts val="800"/>
@@ -7568,7 +7376,7 @@
       </p:sp>
       <p:sp>
         <p:nvSpPr>
-          <p:cNvPr id="9" name="TextBox 8"/>
+          <p:cNvPr id="6" name="TextBox 5"/>
           <p:cNvSpPr txBox="1"/>
           <p:nvPr/>
         </p:nvSpPr>
@@ -7749,83 +7557,14 @@
       </p:sp>
       <p:sp>
         <p:nvSpPr>
-          <p:cNvPr id="5" name="Rounded Rectangle 4"/>
-          <p:cNvSpPr/>
+          <p:cNvPr id="5" name="TextBox 4"/>
+          <p:cNvSpPr txBox="1"/>
           <p:nvPr/>
         </p:nvSpPr>
         <p:spPr>
           <a:xfrm>
-            <a:off x="5797149" y="1573813"/>
-            <a:ext cx="6010497" cy="4057845"/>
-          </a:xfrm>
-          <a:prstGeom prst="roundRect">
-            <a:avLst>
-              <a:gd name="adj" fmla="val 4000"/>
-            </a:avLst>
-          </a:prstGeom>
-          <a:solidFill>
-            <a:srgbClr val="E8EEF4"/>
-          </a:solidFill>
-          <a:ln>
-            <a:noFill/>
-          </a:ln>
-        </p:spPr>
-        <p:style>
-          <a:lnRef idx="1">
-            <a:schemeClr val="accent1"/>
-          </a:lnRef>
-          <a:fillRef idx="3">
-            <a:schemeClr val="accent1"/>
-          </a:fillRef>
-          <a:effectRef idx="2">
-            <a:schemeClr val="accent1"/>
-          </a:effectRef>
-          <a:fontRef idx="minor">
-            <a:schemeClr val="lt1"/>
-          </a:fontRef>
-        </p:style>
-        <p:txBody>
-          <a:bodyPr rtlCol="0" anchor="ctr"/>
-          <a:lstStyle/>
-          <a:p>
-            <a:pPr algn="ctr"/>
-          </a:p>
-        </p:txBody>
-      </p:sp>
-      <p:pic>
-        <p:nvPicPr>
-          <p:cNvPr id="6" name="Picture 5" descr="laptop-code-live-demo.jpg"/>
-          <p:cNvPicPr>
-            <a:picLocks noChangeAspect="1"/>
-          </p:cNvPicPr>
-          <p:nvPr/>
-        </p:nvPicPr>
-        <p:blipFill>
-          <a:blip r:embed="rId2"/>
-          <a:stretch>
-            <a:fillRect/>
-          </a:stretch>
-        </p:blipFill>
-        <p:spPr>
-          <a:xfrm>
-            <a:off x="5870301" y="1646965"/>
-            <a:ext cx="5864193" cy="3911541"/>
-          </a:xfrm>
-          <a:prstGeom prst="rect">
-            <a:avLst/>
-          </a:prstGeom>
-        </p:spPr>
-      </p:pic>
-      <p:sp>
-        <p:nvSpPr>
-          <p:cNvPr id="7" name="TextBox 6"/>
-          <p:cNvSpPr txBox="1"/>
-          <p:nvPr/>
-        </p:nvSpPr>
-        <p:spPr>
-          <a:xfrm>
-            <a:off x="5870301" y="5961888"/>
-            <a:ext cx="5864193" cy="320040"/>
+            <a:off x="457200" y="1170432"/>
+            <a:ext cx="11277295" cy="5230368"/>
           </a:xfrm>
           <a:prstGeom prst="rect">
             <a:avLst/>
@@ -7838,41 +7577,6 @@
           </a:bodyPr>
           <a:lstStyle/>
           <a:p>
-            <a:pPr algn="ctr"/>
-            <a:r>
-              <a:rPr sz="1100" b="0" i="1">
-                <a:solidFill>
-                  <a:srgbClr val="666666"/>
-                </a:solidFill>
-                <a:latin typeface="Calibri"/>
-              </a:rPr>
-              <a:t>Foto: olia danilevich · Pexels</a:t>
-            </a:r>
-          </a:p>
-        </p:txBody>
-      </p:sp>
-      <p:sp>
-        <p:nvSpPr>
-          <p:cNvPr id="8" name="TextBox 7"/>
-          <p:cNvSpPr txBox="1"/>
-          <p:nvPr/>
-        </p:nvSpPr>
-        <p:spPr>
-          <a:xfrm>
-            <a:off x="457200" y="1353312"/>
-            <a:ext cx="5093061" cy="5047488"/>
-          </a:xfrm>
-          <a:prstGeom prst="rect">
-            <a:avLst/>
-          </a:prstGeom>
-          <a:noFill/>
-        </p:spPr>
-        <p:txBody>
-          <a:bodyPr wrap="square">
-            <a:spAutoFit/>
-          </a:bodyPr>
-          <a:lstStyle/>
-          <a:p>
             <a:pPr>
               <a:spcAft>
                 <a:spcPts val="800"/>
@@ -7930,6 +7634,15 @@
               </a:rPr>
               <a:t>Demo:</a:t>
             </a:r>
+            <a:r>
+              <a:rPr sz="2000" b="0" i="0">
+                <a:solidFill>
+                  <a:srgbClr val="333333"/>
+                </a:solidFill>
+                <a:latin typeface="Calibri"/>
+              </a:rPr>
+              <a:t> Se arma en pantalla el tablero de la clinica, arrastra una tarjeta de 'Por hacer' a 'En revision del cliente' y muestra que pasa cuando se rompe el limite de trabajo en curso.</a:t>
+            </a:r>
           </a:p>
           <a:p>
             <a:pPr>
@@ -7951,7 +7664,7 @@
       </p:sp>
       <p:sp>
         <p:nvSpPr>
-          <p:cNvPr id="9" name="TextBox 8"/>
+          <p:cNvPr id="6" name="TextBox 5"/>
           <p:cNvSpPr txBox="1"/>
           <p:nvPr/>
         </p:nvSpPr>
@@ -8364,83 +8077,14 @@
       </p:sp>
       <p:sp>
         <p:nvSpPr>
-          <p:cNvPr id="5" name="Rounded Rectangle 4"/>
-          <p:cNvSpPr/>
+          <p:cNvPr id="5" name="TextBox 4"/>
+          <p:cNvSpPr txBox="1"/>
           <p:nvPr/>
         </p:nvSpPr>
         <p:spPr>
           <a:xfrm>
-            <a:off x="5797149" y="1573813"/>
-            <a:ext cx="6010497" cy="4057845"/>
-          </a:xfrm>
-          <a:prstGeom prst="roundRect">
-            <a:avLst>
-              <a:gd name="adj" fmla="val 4000"/>
-            </a:avLst>
-          </a:prstGeom>
-          <a:solidFill>
-            <a:srgbClr val="E8EEF4"/>
-          </a:solidFill>
-          <a:ln>
-            <a:noFill/>
-          </a:ln>
-        </p:spPr>
-        <p:style>
-          <a:lnRef idx="1">
-            <a:schemeClr val="accent1"/>
-          </a:lnRef>
-          <a:fillRef idx="3">
-            <a:schemeClr val="accent1"/>
-          </a:fillRef>
-          <a:effectRef idx="2">
-            <a:schemeClr val="accent1"/>
-          </a:effectRef>
-          <a:fontRef idx="minor">
-            <a:schemeClr val="lt1"/>
-          </a:fontRef>
-        </p:style>
-        <p:txBody>
-          <a:bodyPr rtlCol="0" anchor="ctr"/>
-          <a:lstStyle/>
-          <a:p>
-            <a:pPr algn="ctr"/>
-          </a:p>
-        </p:txBody>
-      </p:sp>
-      <p:pic>
-        <p:nvPicPr>
-          <p:cNvPr id="6" name="Picture 5" descr="notebook-planning-desk-coffee.jpg"/>
-          <p:cNvPicPr>
-            <a:picLocks noChangeAspect="1"/>
-          </p:cNvPicPr>
-          <p:nvPr/>
-        </p:nvPicPr>
-        <p:blipFill>
-          <a:blip r:embed="rId2"/>
-          <a:stretch>
-            <a:fillRect/>
-          </a:stretch>
-        </p:blipFill>
-        <p:spPr>
-          <a:xfrm>
-            <a:off x="5870301" y="1646965"/>
-            <a:ext cx="5864193" cy="3911541"/>
-          </a:xfrm>
-          <a:prstGeom prst="rect">
-            <a:avLst/>
-          </a:prstGeom>
-        </p:spPr>
-      </p:pic>
-      <p:sp>
-        <p:nvSpPr>
-          <p:cNvPr id="7" name="TextBox 6"/>
-          <p:cNvSpPr txBox="1"/>
-          <p:nvPr/>
-        </p:nvSpPr>
-        <p:spPr>
-          <a:xfrm>
-            <a:off x="5870301" y="5961888"/>
-            <a:ext cx="5864193" cy="320040"/>
+            <a:off x="457200" y="1170432"/>
+            <a:ext cx="11277295" cy="5230368"/>
           </a:xfrm>
           <a:prstGeom prst="rect">
             <a:avLst/>
@@ -8453,41 +8097,6 @@
           </a:bodyPr>
           <a:lstStyle/>
           <a:p>
-            <a:pPr algn="ctr"/>
-            <a:r>
-              <a:rPr sz="1100" b="0" i="1">
-                <a:solidFill>
-                  <a:srgbClr val="666666"/>
-                </a:solidFill>
-                <a:latin typeface="Calibri"/>
-              </a:rPr>
-              <a:t>Foto: Cup of  Couple · Pexels</a:t>
-            </a:r>
-          </a:p>
-        </p:txBody>
-      </p:sp>
-      <p:sp>
-        <p:nvSpPr>
-          <p:cNvPr id="8" name="TextBox 7"/>
-          <p:cNvSpPr txBox="1"/>
-          <p:nvPr/>
-        </p:nvSpPr>
-        <p:spPr>
-          <a:xfrm>
-            <a:off x="457200" y="1353312"/>
-            <a:ext cx="5093061" cy="5047488"/>
-          </a:xfrm>
-          <a:prstGeom prst="rect">
-            <a:avLst/>
-          </a:prstGeom>
-          <a:noFill/>
-        </p:spPr>
-        <p:txBody>
-          <a:bodyPr wrap="square">
-            <a:spAutoFit/>
-          </a:bodyPr>
-          <a:lstStyle/>
-          <a:p>
             <a:pPr>
               <a:spcAft>
                 <a:spcPts val="800"/>
@@ -8600,7 +8209,7 @@
       </p:sp>
       <p:sp>
         <p:nvSpPr>
-          <p:cNvPr id="9" name="TextBox 8"/>
+          <p:cNvPr id="6" name="TextBox 5"/>
           <p:cNvSpPr txBox="1"/>
           <p:nvPr/>
         </p:nvSpPr>

--- a/Seminario de Sistemas/Clases/Clase 4 - Metodologias agiles/Presentacion.pptx
+++ b/Seminario de Sistemas/Clases/Clase 4 - Metodologias agiles/Presentacion.pptx
@@ -999,6 +999,94 @@
           <a:p>
             <a:r>
               <a:t>Un equipo agil documenta historias de usuario con criterios de aceptacion, la Definicion de Terminado, las decisiones de arquitectura, el diccionario de datos y los diagramas que hagan falta, pero los escribe justo a tiempo y los mantiene vivos.</a:t>
+            </a:r>
+          </a:p>
+        </p:txBody>
+      </p:sp>
+      <p:sp>
+        <p:nvSpPr>
+          <p:cNvPr id="4" name="Slide Number Placeholder 3"/>
+          <p:cNvSpPr>
+            <a:spLocks noGrp="1"/>
+          </p:cNvSpPr>
+          <p:nvPr>
+            <p:ph type="sldNum" idx="5" sz="quarter"/>
+          </p:nvPr>
+        </p:nvSpPr>
+        <p:spPr/>
+      </p:sp>
+    </p:spTree>
+  </p:cSld>
+  <p:clrMapOvr>
+    <a:masterClrMapping/>
+  </p:clrMapOvr>
+</p:notes>
+</file>
+
+<file path=ppt/notesSlides/notesSlide6.xml><?xml version="1.0" encoding="utf-8"?>
+<p:notes xmlns:a="http://schemas.openxmlformats.org/drawingml/2006/main" xmlns:p="http://schemas.openxmlformats.org/presentationml/2006/main" xmlns:r="http://schemas.openxmlformats.org/officeDocument/2006/relationships">
+  <p:cSld>
+    <p:spTree>
+      <p:nvGrpSpPr>
+        <p:cNvPr id="1" name=""/>
+        <p:cNvGrpSpPr/>
+        <p:nvPr/>
+      </p:nvGrpSpPr>
+      <p:grpSpPr>
+        <a:xfrm>
+          <a:off x="0" y="0"/>
+          <a:ext cx="0" cy="0"/>
+          <a:chOff x="0" y="0"/>
+          <a:chExt cx="0" cy="0"/>
+        </a:xfrm>
+      </p:grpSpPr>
+      <p:sp>
+        <p:nvSpPr>
+          <p:cNvPr id="2" name="Slide Image Placeholder 1"/>
+          <p:cNvSpPr>
+            <a:spLocks noGrp="1"/>
+          </p:cNvSpPr>
+          <p:nvPr>
+            <p:ph type="sldImg" idx="2"/>
+          </p:nvPr>
+        </p:nvSpPr>
+        <p:spPr/>
+      </p:sp>
+      <p:sp>
+        <p:nvSpPr>
+          <p:cNvPr id="3" name="Notes Placeholder 2"/>
+          <p:cNvSpPr>
+            <a:spLocks noGrp="1"/>
+          </p:cNvSpPr>
+          <p:nvPr>
+            <p:ph type="body" idx="3" sz="quarter"/>
+          </p:nvPr>
+        </p:nvSpPr>
+        <p:spPr/>
+        <p:txBody>
+          <a:bodyPr/>
+          <a:lstStyle/>
+          <a:p>
+            <a:r>
+              <a:t>TEXTO COMPLETO DE LA LÁMINA (se proyecta resumido):</a:t>
+            </a:r>
+          </a:p>
+          <a:p/>
+          <a:p>
+            <a:r>
+              <a:t>Herramienta: draw.io · Excalidraw · Google Docs</a:t>
+            </a:r>
+          </a:p>
+          <a:p/>
+          <a:p>
+            <a:r>
+              <a:t>Demo: Se arma en pantalla el tablero de la clinica, arrastra una tarjeta de 'Por hacer' a 'En revision del cliente' y muestra que pasa cuando se rompe el limite de trabajo en curso.</a:t>
+            </a:r>
+          </a:p>
+          <a:p/>
+          <a:p>
+            <a:r>
+              <a:t>Mismo dominio: la clinica veterinaria — no otro ejemplo. Aqui se diseña, no se programa.</a:t>
             </a:r>
           </a:p>
         </p:txBody>
@@ -7289,14 +7377,83 @@
       </p:sp>
       <p:sp>
         <p:nvSpPr>
-          <p:cNvPr id="5" name="TextBox 4"/>
+          <p:cNvPr id="5" name="Rounded Rectangle 4"/>
+          <p:cNvSpPr/>
+          <p:nvPr/>
+        </p:nvSpPr>
+        <p:spPr>
+          <a:xfrm>
+            <a:off x="5797149" y="1343926"/>
+            <a:ext cx="6010497" cy="4837658"/>
+          </a:xfrm>
+          <a:prstGeom prst="roundRect">
+            <a:avLst>
+              <a:gd name="adj" fmla="val 4000"/>
+            </a:avLst>
+          </a:prstGeom>
+          <a:solidFill>
+            <a:srgbClr val="E8EEF4"/>
+          </a:solidFill>
+          <a:ln>
+            <a:noFill/>
+          </a:ln>
+        </p:spPr>
+        <p:style>
+          <a:lnRef idx="1">
+            <a:schemeClr val="accent1"/>
+          </a:lnRef>
+          <a:fillRef idx="3">
+            <a:schemeClr val="accent1"/>
+          </a:fillRef>
+          <a:effectRef idx="2">
+            <a:schemeClr val="accent1"/>
+          </a:effectRef>
+          <a:fontRef idx="minor">
+            <a:schemeClr val="lt1"/>
+          </a:fontRef>
+        </p:style>
+        <p:txBody>
+          <a:bodyPr rtlCol="0" anchor="ctr"/>
+          <a:lstStyle/>
+          <a:p>
+            <a:pPr algn="ctr"/>
+          </a:p>
+        </p:txBody>
+      </p:sp>
+      <p:pic>
+        <p:nvPicPr>
+          <p:cNvPr id="6" name="Picture 5" descr="ilus-agil-documenta-paso1.png"/>
+          <p:cNvPicPr>
+            <a:picLocks noChangeAspect="1"/>
+          </p:cNvPicPr>
+          <p:nvPr/>
+        </p:nvPicPr>
+        <p:blipFill>
+          <a:blip r:embed="rId2"/>
+          <a:stretch>
+            <a:fillRect/>
+          </a:stretch>
+        </p:blipFill>
+        <p:spPr>
+          <a:xfrm>
+            <a:off x="5870301" y="1417078"/>
+            <a:ext cx="5864193" cy="4691354"/>
+          </a:xfrm>
+          <a:prstGeom prst="rect">
+            <a:avLst/>
+          </a:prstGeom>
+        </p:spPr>
+      </p:pic>
+      <p:sp>
+        <p:nvSpPr>
+          <p:cNvPr id="7" name="TextBox 6"/>
           <p:cNvSpPr txBox="1"/>
           <p:nvPr/>
         </p:nvSpPr>
         <p:spPr>
           <a:xfrm>
-            <a:off x="457200" y="1170432"/>
-            <a:ext cx="11277295" cy="5230368"/>
+            <a:off x="457200" y="1353312"/>
+            <a:ext cx="5093061" cy="5047488"/>
           </a:xfrm>
           <a:prstGeom prst="rect">
             <a:avLst/>
@@ -7376,7 +7533,7 @@
       </p:sp>
       <p:sp>
         <p:nvSpPr>
-          <p:cNvPr id="6" name="TextBox 5"/>
+          <p:cNvPr id="8" name="TextBox 7"/>
           <p:cNvSpPr txBox="1"/>
           <p:nvPr/>
         </p:nvSpPr>
@@ -7557,14 +7714,83 @@
       </p:sp>
       <p:sp>
         <p:nvSpPr>
-          <p:cNvPr id="5" name="TextBox 4"/>
+          <p:cNvPr id="5" name="Rounded Rectangle 4"/>
+          <p:cNvSpPr/>
+          <p:nvPr/>
+        </p:nvSpPr>
+        <p:spPr>
+          <a:xfrm>
+            <a:off x="5797149" y="1343926"/>
+            <a:ext cx="6010497" cy="4837658"/>
+          </a:xfrm>
+          <a:prstGeom prst="roundRect">
+            <a:avLst>
+              <a:gd name="adj" fmla="val 4000"/>
+            </a:avLst>
+          </a:prstGeom>
+          <a:solidFill>
+            <a:srgbClr val="E8EEF4"/>
+          </a:solidFill>
+          <a:ln>
+            <a:noFill/>
+          </a:ln>
+        </p:spPr>
+        <p:style>
+          <a:lnRef idx="1">
+            <a:schemeClr val="accent1"/>
+          </a:lnRef>
+          <a:fillRef idx="3">
+            <a:schemeClr val="accent1"/>
+          </a:fillRef>
+          <a:effectRef idx="2">
+            <a:schemeClr val="accent1"/>
+          </a:effectRef>
+          <a:fontRef idx="minor">
+            <a:schemeClr val="lt1"/>
+          </a:fontRef>
+        </p:style>
+        <p:txBody>
+          <a:bodyPr rtlCol="0" anchor="ctr"/>
+          <a:lstStyle/>
+          <a:p>
+            <a:pPr algn="ctr"/>
+          </a:p>
+        </p:txBody>
+      </p:sp>
+      <p:pic>
+        <p:nvPicPr>
+          <p:cNvPr id="6" name="Picture 5" descr="ilus-demo-paso1.png"/>
+          <p:cNvPicPr>
+            <a:picLocks noChangeAspect="1"/>
+          </p:cNvPicPr>
+          <p:nvPr/>
+        </p:nvPicPr>
+        <p:blipFill>
+          <a:blip r:embed="rId2"/>
+          <a:stretch>
+            <a:fillRect/>
+          </a:stretch>
+        </p:blipFill>
+        <p:spPr>
+          <a:xfrm>
+            <a:off x="5870301" y="1417078"/>
+            <a:ext cx="5864193" cy="4691354"/>
+          </a:xfrm>
+          <a:prstGeom prst="rect">
+            <a:avLst/>
+          </a:prstGeom>
+        </p:spPr>
+      </p:pic>
+      <p:sp>
+        <p:nvSpPr>
+          <p:cNvPr id="7" name="TextBox 6"/>
           <p:cNvSpPr txBox="1"/>
           <p:nvPr/>
         </p:nvSpPr>
         <p:spPr>
           <a:xfrm>
-            <a:off x="457200" y="1170432"/>
-            <a:ext cx="11277295" cy="5230368"/>
+            <a:off x="457200" y="1353312"/>
+            <a:ext cx="5093061" cy="5047488"/>
           </a:xfrm>
           <a:prstGeom prst="rect">
             <a:avLst/>
@@ -7641,7 +7867,7 @@
                 </a:solidFill>
                 <a:latin typeface="Calibri"/>
               </a:rPr>
-              <a:t> Se arma en pantalla el tablero de la clinica, arrastra una tarjeta de 'Por hacer' a 'En revision del cliente' y muestra que pasa cuando se rompe el limite de trabajo en curso.</a:t>
+              <a:t> Se arma en pantalla el tablero de la clinica, arrastra una tarjeta de 'Por hacer' a 'En revision del cliente' y muestra que pasa cuando se…</a:t>
             </a:r>
           </a:p>
           <a:p>
@@ -7664,7 +7890,7 @@
       </p:sp>
       <p:sp>
         <p:nvSpPr>
-          <p:cNvPr id="6" name="TextBox 5"/>
+          <p:cNvPr id="8" name="TextBox 7"/>
           <p:cNvSpPr txBox="1"/>
           <p:nvPr/>
         </p:nvSpPr>
@@ -12389,9 +12615,33 @@
           </a:prstGeom>
         </p:spPr>
       </p:pic>
-      <p:sp>
-        <p:nvSpPr>
-          <p:cNvPr id="13" name="TextBox 12"/>
+      <p:pic>
+        <p:nvPicPr>
+          <p:cNvPr id="9" name="Picture 8" descr="kanban-wip-paso4.png"/>
+          <p:cNvPicPr>
+            <a:picLocks noChangeAspect="1"/>
+          </p:cNvPicPr>
+          <p:nvPr/>
+        </p:nvPicPr>
+        <p:blipFill>
+          <a:blip r:embed="rId5"/>
+          <a:stretch>
+            <a:fillRect/>
+          </a:stretch>
+        </p:blipFill>
+        <p:spPr>
+          <a:xfrm>
+            <a:off x="5876318" y="1261872"/>
+            <a:ext cx="5852160" cy="4681728"/>
+          </a:xfrm>
+          <a:prstGeom prst="rect">
+            <a:avLst/>
+          </a:prstGeom>
+        </p:spPr>
+      </p:pic>
+      <p:sp>
+        <p:nvSpPr>
+          <p:cNvPr id="18" name="TextBox 17"/>
           <p:cNvSpPr txBox="1"/>
           <p:nvPr/>
         </p:nvSpPr>
@@ -12426,7 +12676,7 @@
       </p:sp>
       <p:sp>
         <p:nvSpPr>
-          <p:cNvPr id="14" name="TextBox 13"/>
+          <p:cNvPr id="19" name="TextBox 18"/>
           <p:cNvSpPr txBox="1"/>
           <p:nvPr/>
         </p:nvSpPr>
@@ -12513,7 +12763,7 @@
       </p:sp>
       <p:sp>
         <p:nvSpPr>
-          <p:cNvPr id="15" name="TextBox 14"/>
+          <p:cNvPr id="20" name="TextBox 19"/>
           <p:cNvSpPr txBox="1"/>
           <p:nvPr/>
         </p:nvSpPr>
@@ -12653,6 +12903,59 @@
                                         <p:cTn id="12" dur="450"/>
                                         <p:tgtEl>
                                           <p:spTgt spid="8"/>
+                                        </p:tgtEl>
+                                      </p:cBhvr>
+                                    </p:animEffect>
+                                  </p:childTnLst>
+                                </p:cTn>
+                              </p:par>
+                            </p:childTnLst>
+                          </p:cTn>
+                        </p:par>
+                      </p:childTnLst>
+                    </p:cTn>
+                  </p:par>
+                  <p:par>
+                    <p:cTn id="13" fill="hold">
+                      <p:stCondLst>
+                        <p:cond delay="indefinite"/>
+                      </p:stCondLst>
+                      <p:childTnLst>
+                        <p:par>
+                          <p:cTn id="14" fill="hold">
+                            <p:stCondLst>
+                              <p:cond delay="0"/>
+                            </p:stCondLst>
+                            <p:childTnLst>
+                              <p:par>
+                                <p:cTn id="15" presetID="10" presetClass="entr" presetSubtype="0" fill="hold" nodeType="clickEffect">
+                                  <p:stCondLst>
+                                    <p:cond delay="0"/>
+                                  </p:stCondLst>
+                                  <p:childTnLst>
+                                    <p:set>
+                                      <p:cBhvr>
+                                        <p:cTn id="16" dur="1" fill="hold">
+                                          <p:stCondLst>
+                                            <p:cond delay="0"/>
+                                          </p:stCondLst>
+                                        </p:cTn>
+                                        <p:tgtEl>
+                                          <p:spTgt spid="9"/>
+                                        </p:tgtEl>
+                                        <p:attrNameLst>
+                                          <p:attrName>style.visibility</p:attrName>
+                                        </p:attrNameLst>
+                                      </p:cBhvr>
+                                      <p:to>
+                                        <p:strVal val="visible"/>
+                                      </p:to>
+                                    </p:set>
+                                    <p:animEffect transition="in" filter="fade">
+                                      <p:cBhvr>
+                                        <p:cTn id="17" dur="450"/>
+                                        <p:tgtEl>
+                                          <p:spTgt spid="9"/>
                                         </p:tgtEl>
                                       </p:cBhvr>
                                     </p:animEffect>

--- a/Seminario de Sistemas/Clases/Clase 4 - Metodologias agiles/Presentacion.pptx
+++ b/Seminario de Sistemas/Clases/Clase 4 - Metodologias agiles/Presentacion.pptx
@@ -4624,7 +4624,7 @@
         <p:spPr>
           <a:xfrm>
             <a:off x="457200" y="1261872"/>
-            <a:ext cx="11277295" cy="4745196"/>
+            <a:ext cx="11277295" cy="4528155"/>
           </a:xfrm>
           <a:prstGeom prst="roundRect">
             <a:avLst>
@@ -4874,7 +4874,7 @@
         <p:spPr>
           <a:xfrm>
             <a:off x="685800" y="1719072"/>
-            <a:ext cx="502920" cy="4150836"/>
+            <a:ext cx="502920" cy="3933795"/>
           </a:xfrm>
           <a:prstGeom prst="rect">
             <a:avLst/>
@@ -4889,11 +4889,11 @@
           <a:p>
             <a:pPr algn="r">
               <a:spcAft>
-                <a:spcPts val="342"/>
+                <a:spcPts val="321"/>
               </a:spcAft>
             </a:pPr>
             <a:r>
-              <a:rPr sz="1600" i="0" b="0">
+              <a:rPr sz="1500" i="0" b="0">
                 <a:solidFill>
                   <a:srgbClr val="858585"/>
                 </a:solidFill>
@@ -4905,11 +4905,11 @@
           <a:p>
             <a:pPr algn="r">
               <a:spcAft>
-                <a:spcPts val="342"/>
+                <a:spcPts val="321"/>
               </a:spcAft>
             </a:pPr>
             <a:r>
-              <a:rPr sz="1600" i="0" b="0">
+              <a:rPr sz="1500" i="0" b="0">
                 <a:solidFill>
                   <a:srgbClr val="858585"/>
                 </a:solidFill>
@@ -4921,11 +4921,11 @@
           <a:p>
             <a:pPr algn="r">
               <a:spcAft>
-                <a:spcPts val="342"/>
+                <a:spcPts val="321"/>
               </a:spcAft>
             </a:pPr>
             <a:r>
-              <a:rPr sz="1600" i="0" b="0">
+              <a:rPr sz="1500" i="0" b="0">
                 <a:solidFill>
                   <a:srgbClr val="858585"/>
                 </a:solidFill>
@@ -4937,11 +4937,11 @@
           <a:p>
             <a:pPr algn="r">
               <a:spcAft>
-                <a:spcPts val="342"/>
+                <a:spcPts val="321"/>
               </a:spcAft>
             </a:pPr>
             <a:r>
-              <a:rPr sz="1600" i="0" b="0">
+              <a:rPr sz="1500" i="0" b="0">
                 <a:solidFill>
                   <a:srgbClr val="858585"/>
                 </a:solidFill>
@@ -4953,11 +4953,11 @@
           <a:p>
             <a:pPr algn="r">
               <a:spcAft>
-                <a:spcPts val="342"/>
+                <a:spcPts val="321"/>
               </a:spcAft>
             </a:pPr>
             <a:r>
-              <a:rPr sz="1600" i="0" b="0">
+              <a:rPr sz="1500" i="0" b="0">
                 <a:solidFill>
                   <a:srgbClr val="858585"/>
                 </a:solidFill>
@@ -4969,11 +4969,11 @@
           <a:p>
             <a:pPr algn="r">
               <a:spcAft>
-                <a:spcPts val="342"/>
+                <a:spcPts val="321"/>
               </a:spcAft>
             </a:pPr>
             <a:r>
-              <a:rPr sz="1600" i="0" b="0">
+              <a:rPr sz="1500" i="0" b="0">
                 <a:solidFill>
                   <a:srgbClr val="858585"/>
                 </a:solidFill>
@@ -4985,11 +4985,11 @@
           <a:p>
             <a:pPr algn="r">
               <a:spcAft>
-                <a:spcPts val="342"/>
+                <a:spcPts val="321"/>
               </a:spcAft>
             </a:pPr>
             <a:r>
-              <a:rPr sz="1600" i="0" b="0">
+              <a:rPr sz="1500" i="0" b="0">
                 <a:solidFill>
                   <a:srgbClr val="858585"/>
                 </a:solidFill>
@@ -5001,11 +5001,11 @@
           <a:p>
             <a:pPr algn="r">
               <a:spcAft>
-                <a:spcPts val="342"/>
+                <a:spcPts val="321"/>
               </a:spcAft>
             </a:pPr>
             <a:r>
-              <a:rPr sz="1600" i="0" b="0">
+              <a:rPr sz="1500" i="0" b="0">
                 <a:solidFill>
                   <a:srgbClr val="858585"/>
                 </a:solidFill>
@@ -5017,11 +5017,11 @@
           <a:p>
             <a:pPr algn="r">
               <a:spcAft>
-                <a:spcPts val="342"/>
+                <a:spcPts val="321"/>
               </a:spcAft>
             </a:pPr>
             <a:r>
-              <a:rPr sz="1600" i="0" b="0">
+              <a:rPr sz="1500" i="0" b="0">
                 <a:solidFill>
                   <a:srgbClr val="858585"/>
                 </a:solidFill>
@@ -5033,11 +5033,11 @@
           <a:p>
             <a:pPr algn="r">
               <a:spcAft>
-                <a:spcPts val="342"/>
+                <a:spcPts val="321"/>
               </a:spcAft>
             </a:pPr>
             <a:r>
-              <a:rPr sz="1600" i="0" b="0">
+              <a:rPr sz="1500" i="0" b="0">
                 <a:solidFill>
                   <a:srgbClr val="858585"/>
                 </a:solidFill>
@@ -5049,11 +5049,11 @@
           <a:p>
             <a:pPr algn="r">
               <a:spcAft>
-                <a:spcPts val="342"/>
+                <a:spcPts val="321"/>
               </a:spcAft>
             </a:pPr>
             <a:r>
-              <a:rPr sz="1600" i="0" b="0">
+              <a:rPr sz="1500" i="0" b="0">
                 <a:solidFill>
                   <a:srgbClr val="858585"/>
                 </a:solidFill>
@@ -5065,11 +5065,11 @@
           <a:p>
             <a:pPr algn="r">
               <a:spcAft>
-                <a:spcPts val="342"/>
+                <a:spcPts val="321"/>
               </a:spcAft>
             </a:pPr>
             <a:r>
-              <a:rPr sz="1600" i="0" b="0">
+              <a:rPr sz="1500" i="0" b="0">
                 <a:solidFill>
                   <a:srgbClr val="858585"/>
                 </a:solidFill>
@@ -5081,11 +5081,11 @@
           <a:p>
             <a:pPr algn="r">
               <a:spcAft>
-                <a:spcPts val="342"/>
+                <a:spcPts val="321"/>
               </a:spcAft>
             </a:pPr>
             <a:r>
-              <a:rPr sz="1600" i="0" b="0">
+              <a:rPr sz="1500" i="0" b="0">
                 <a:solidFill>
                   <a:srgbClr val="858585"/>
                 </a:solidFill>
@@ -5097,11 +5097,11 @@
           <a:p>
             <a:pPr algn="r">
               <a:spcAft>
-                <a:spcPts val="342"/>
+                <a:spcPts val="321"/>
               </a:spcAft>
             </a:pPr>
             <a:r>
-              <a:rPr sz="1600" i="0" b="0">
+              <a:rPr sz="1500" i="0" b="0">
                 <a:solidFill>
                   <a:srgbClr val="858585"/>
                 </a:solidFill>
@@ -5121,7 +5121,7 @@
         <p:spPr>
           <a:xfrm>
             <a:off x="1188720" y="1719072"/>
-            <a:ext cx="10271455" cy="4150836"/>
+            <a:ext cx="10271455" cy="3933795"/>
           </a:xfrm>
           <a:prstGeom prst="rect">
             <a:avLst/>
@@ -5136,11 +5136,11 @@
           <a:p>
             <a:pPr>
               <a:spcAft>
-                <a:spcPts val="342"/>
+                <a:spcPts val="321"/>
               </a:spcAft>
             </a:pPr>
             <a:r>
-              <a:rPr sz="1600" i="0" b="0">
+              <a:rPr sz="1500" i="0" b="0">
                 <a:solidFill>
                   <a:srgbClr val="D4D4D4"/>
                 </a:solidFill>
@@ -5149,7 +5149,7 @@
               <a:t>HU</a:t>
             </a:r>
             <a:r>
-              <a:rPr sz="1600" i="0" b="0">
+              <a:rPr sz="1500" i="0" b="0">
                 <a:solidFill>
                   <a:srgbClr val="D4D4D4"/>
                 </a:solidFill>
@@ -5158,7 +5158,7 @@
               <a:t>-</a:t>
             </a:r>
             <a:r>
-              <a:rPr sz="1600" i="0" b="0">
+              <a:rPr sz="1500" i="0" b="0">
                 <a:solidFill>
                   <a:srgbClr val="B5CEA8"/>
                 </a:solidFill>
@@ -5167,7 +5167,7 @@
               <a:t>07</a:t>
             </a:r>
             <a:r>
-              <a:rPr sz="1600" i="0" b="0">
+              <a:rPr sz="1500" i="0" b="0">
                 <a:solidFill>
                   <a:srgbClr val="D4D4D4"/>
                 </a:solidFill>
@@ -5176,7 +5176,7 @@
               <a:t>  </a:t>
             </a:r>
             <a:r>
-              <a:rPr sz="1600" i="0" b="0">
+              <a:rPr sz="1500" i="0" b="0">
                 <a:solidFill>
                   <a:srgbClr val="D4D4D4"/>
                 </a:solidFill>
@@ -5185,7 +5185,7 @@
               <a:t>Buscar</a:t>
             </a:r>
             <a:r>
-              <a:rPr sz="1600" i="0" b="0">
+              <a:rPr sz="1500" i="0" b="0">
                 <a:solidFill>
                   <a:srgbClr val="D4D4D4"/>
                 </a:solidFill>
@@ -5194,7 +5194,7 @@
               <a:t> </a:t>
             </a:r>
             <a:r>
-              <a:rPr sz="1600" i="0" b="0">
+              <a:rPr sz="1500" i="0" b="0">
                 <a:solidFill>
                   <a:srgbClr val="D4D4D4"/>
                 </a:solidFill>
@@ -5203,7 +5203,7 @@
               <a:t>historia</a:t>
             </a:r>
             <a:r>
-              <a:rPr sz="1600" i="0" b="0">
+              <a:rPr sz="1500" i="0" b="0">
                 <a:solidFill>
                   <a:srgbClr val="D4D4D4"/>
                 </a:solidFill>
@@ -5212,7 +5212,7 @@
               <a:t> </a:t>
             </a:r>
             <a:r>
-              <a:rPr sz="1600" i="0" b="0">
+              <a:rPr sz="1500" i="0" b="0">
                 <a:solidFill>
                   <a:srgbClr val="D4D4D4"/>
                 </a:solidFill>
@@ -5224,11 +5224,11 @@
           <a:p>
             <a:pPr>
               <a:spcAft>
-                <a:spcPts val="342"/>
+                <a:spcPts val="321"/>
               </a:spcAft>
             </a:pPr>
             <a:r>
-              <a:rPr sz="1600" i="0" b="0">
+              <a:rPr sz="1500" i="0" b="0">
                 <a:solidFill>
                   <a:srgbClr val="D4D4D4"/>
                 </a:solidFill>
@@ -5237,7 +5237,7 @@
               <a:t>  </a:t>
             </a:r>
             <a:r>
-              <a:rPr sz="1600" i="0" b="0">
+              <a:rPr sz="1500" i="0" b="0">
                 <a:solidFill>
                   <a:srgbClr val="D4D4D4"/>
                 </a:solidFill>
@@ -5246,7 +5246,7 @@
               <a:t>Como</a:t>
             </a:r>
             <a:r>
-              <a:rPr sz="1600" i="0" b="0">
+              <a:rPr sz="1500" i="0" b="0">
                 <a:solidFill>
                   <a:srgbClr val="D4D4D4"/>
                 </a:solidFill>
@@ -5255,7 +5255,7 @@
               <a:t> </a:t>
             </a:r>
             <a:r>
-              <a:rPr sz="1600" i="0" b="0">
+              <a:rPr sz="1500" i="0" b="0">
                 <a:solidFill>
                   <a:srgbClr val="D4D4D4"/>
                 </a:solidFill>
@@ -5264,7 +5264,7 @@
               <a:t>veterinaria</a:t>
             </a:r>
             <a:r>
-              <a:rPr sz="1600" i="0" b="0">
+              <a:rPr sz="1500" i="0" b="0">
                 <a:solidFill>
                   <a:srgbClr val="D4D4D4"/>
                 </a:solidFill>
@@ -5273,7 +5273,7 @@
               <a:t> </a:t>
             </a:r>
             <a:r>
-              <a:rPr sz="1600" i="0" b="0">
+              <a:rPr sz="1500" i="0" b="0">
                 <a:solidFill>
                   <a:srgbClr val="D4D4D4"/>
                 </a:solidFill>
@@ -5282,7 +5282,7 @@
               <a:t>de</a:t>
             </a:r>
             <a:r>
-              <a:rPr sz="1600" i="0" b="0">
+              <a:rPr sz="1500" i="0" b="0">
                 <a:solidFill>
                   <a:srgbClr val="D4D4D4"/>
                 </a:solidFill>
@@ -5291,7 +5291,7 @@
               <a:t> </a:t>
             </a:r>
             <a:r>
-              <a:rPr sz="1600" i="0" b="0">
+              <a:rPr sz="1500" i="0" b="0">
                 <a:solidFill>
                   <a:srgbClr val="D4D4D4"/>
                 </a:solidFill>
@@ -5300,7 +5300,7 @@
               <a:t>la</a:t>
             </a:r>
             <a:r>
-              <a:rPr sz="1600" i="0" b="0">
+              <a:rPr sz="1500" i="0" b="0">
                 <a:solidFill>
                   <a:srgbClr val="D4D4D4"/>
                 </a:solidFill>
@@ -5309,7 +5309,7 @@
               <a:t> </a:t>
             </a:r>
             <a:r>
-              <a:rPr sz="1600" i="0" b="0">
+              <a:rPr sz="1500" i="0" b="0">
                 <a:solidFill>
                   <a:srgbClr val="D4D4D4"/>
                 </a:solidFill>
@@ -5321,11 +5321,11 @@
           <a:p>
             <a:pPr>
               <a:spcAft>
-                <a:spcPts val="342"/>
+                <a:spcPts val="321"/>
               </a:spcAft>
             </a:pPr>
             <a:r>
-              <a:rPr sz="1600" i="0" b="0">
+              <a:rPr sz="1500" i="0" b="0">
                 <a:solidFill>
                   <a:srgbClr val="D4D4D4"/>
                 </a:solidFill>
@@ -5334,7 +5334,7 @@
               <a:t>  </a:t>
             </a:r>
             <a:r>
-              <a:rPr sz="1600" i="0" b="0">
+              <a:rPr sz="1500" i="0" b="0">
                 <a:solidFill>
                   <a:srgbClr val="D4D4D4"/>
                 </a:solidFill>
@@ -5343,7 +5343,7 @@
               <a:t>quiero</a:t>
             </a:r>
             <a:r>
-              <a:rPr sz="1600" i="0" b="0">
+              <a:rPr sz="1500" i="0" b="0">
                 <a:solidFill>
                   <a:srgbClr val="D4D4D4"/>
                 </a:solidFill>
@@ -5352,7 +5352,7 @@
               <a:t> </a:t>
             </a:r>
             <a:r>
-              <a:rPr sz="1600" i="0" b="0">
+              <a:rPr sz="1500" i="0" b="0">
                 <a:solidFill>
                   <a:srgbClr val="D4D4D4"/>
                 </a:solidFill>
@@ -5361,7 +5361,7 @@
               <a:t>buscar</a:t>
             </a:r>
             <a:r>
-              <a:rPr sz="1600" i="0" b="0">
+              <a:rPr sz="1500" i="0" b="0">
                 <a:solidFill>
                   <a:srgbClr val="D4D4D4"/>
                 </a:solidFill>
@@ -5370,7 +5370,7 @@
               <a:t> </a:t>
             </a:r>
             <a:r>
-              <a:rPr sz="1600" i="0" b="0">
+              <a:rPr sz="1500" i="0" b="0">
                 <a:solidFill>
                   <a:srgbClr val="D4D4D4"/>
                 </a:solidFill>
@@ -5379,7 +5379,7 @@
               <a:t>la</a:t>
             </a:r>
             <a:r>
-              <a:rPr sz="1600" i="0" b="0">
+              <a:rPr sz="1500" i="0" b="0">
                 <a:solidFill>
                   <a:srgbClr val="D4D4D4"/>
                 </a:solidFill>
@@ -5388,7 +5388,7 @@
               <a:t> </a:t>
             </a:r>
             <a:r>
-              <a:rPr sz="1600" i="0" b="0">
+              <a:rPr sz="1500" i="0" b="0">
                 <a:solidFill>
                   <a:srgbClr val="D4D4D4"/>
                 </a:solidFill>
@@ -5397,7 +5397,7 @@
               <a:t>historia</a:t>
             </a:r>
             <a:r>
-              <a:rPr sz="1600" i="0" b="0">
+              <a:rPr sz="1500" i="0" b="0">
                 <a:solidFill>
                   <a:srgbClr val="D4D4D4"/>
                 </a:solidFill>
@@ -5406,7 +5406,7 @@
               <a:t> </a:t>
             </a:r>
             <a:r>
-              <a:rPr sz="1600" i="0" b="0">
+              <a:rPr sz="1500" i="0" b="0">
                 <a:solidFill>
                   <a:srgbClr val="D4D4D4"/>
                 </a:solidFill>
@@ -5415,7 +5415,7 @@
               <a:t>clinica</a:t>
             </a:r>
             <a:r>
-              <a:rPr sz="1600" i="0" b="0">
+              <a:rPr sz="1500" i="0" b="0">
                 <a:solidFill>
                   <a:srgbClr val="D4D4D4"/>
                 </a:solidFill>
@@ -5424,7 +5424,7 @@
               <a:t> </a:t>
             </a:r>
             <a:r>
-              <a:rPr sz="1600" i="0" b="0">
+              <a:rPr sz="1500" i="0" b="0">
                 <a:solidFill>
                   <a:srgbClr val="D4D4D4"/>
                 </a:solidFill>
@@ -5433,7 +5433,7 @@
               <a:t>de</a:t>
             </a:r>
             <a:r>
-              <a:rPr sz="1600" i="0" b="0">
+              <a:rPr sz="1500" i="0" b="0">
                 <a:solidFill>
                   <a:srgbClr val="D4D4D4"/>
                 </a:solidFill>
@@ -5442,7 +5442,7 @@
               <a:t> </a:t>
             </a:r>
             <a:r>
-              <a:rPr sz="1600" i="0" b="0">
+              <a:rPr sz="1500" i="0" b="0">
                 <a:solidFill>
                   <a:srgbClr val="D4D4D4"/>
                 </a:solidFill>
@@ -5451,7 +5451,7 @@
               <a:t>una</a:t>
             </a:r>
             <a:r>
-              <a:rPr sz="1600" i="0" b="0">
+              <a:rPr sz="1500" i="0" b="0">
                 <a:solidFill>
                   <a:srgbClr val="D4D4D4"/>
                 </a:solidFill>
@@ -5460,7 +5460,7 @@
               <a:t> </a:t>
             </a:r>
             <a:r>
-              <a:rPr sz="1600" i="0" b="0">
+              <a:rPr sz="1500" i="0" b="0">
                 <a:solidFill>
                   <a:srgbClr val="D4D4D4"/>
                 </a:solidFill>
@@ -5469,7 +5469,7 @@
               <a:t>mascota</a:t>
             </a:r>
             <a:r>
-              <a:rPr sz="1600" i="0" b="0">
+              <a:rPr sz="1500" i="0" b="0">
                 <a:solidFill>
                   <a:srgbClr val="D4D4D4"/>
                 </a:solidFill>
@@ -5478,7 +5478,7 @@
               <a:t> </a:t>
             </a:r>
             <a:r>
-              <a:rPr sz="1600" i="0" b="0">
+              <a:rPr sz="1500" i="0" b="0">
                 <a:solidFill>
                   <a:srgbClr val="D4D4D4"/>
                 </a:solidFill>
@@ -5487,7 +5487,7 @@
               <a:t>por</a:t>
             </a:r>
             <a:r>
-              <a:rPr sz="1600" i="0" b="0">
+              <a:rPr sz="1500" i="0" b="0">
                 <a:solidFill>
                   <a:srgbClr val="D4D4D4"/>
                 </a:solidFill>
@@ -5496,7 +5496,7 @@
               <a:t> </a:t>
             </a:r>
             <a:r>
-              <a:rPr sz="1600" i="0" b="0">
+              <a:rPr sz="1500" i="0" b="0">
                 <a:solidFill>
                   <a:srgbClr val="D4D4D4"/>
                 </a:solidFill>
@@ -5505,7 +5505,7 @@
               <a:t>nombre</a:t>
             </a:r>
             <a:r>
-              <a:rPr sz="1600" i="0" b="0">
+              <a:rPr sz="1500" i="0" b="0">
                 <a:solidFill>
                   <a:srgbClr val="D4D4D4"/>
                 </a:solidFill>
@@ -5514,7 +5514,7 @@
               <a:t> </a:t>
             </a:r>
             <a:r>
-              <a:rPr sz="1600" i="0" b="0">
+              <a:rPr sz="1500" i="0" b="0">
                 <a:solidFill>
                   <a:srgbClr val="D4D4D4"/>
                 </a:solidFill>
@@ -5523,7 +5523,7 @@
               <a:t>o</a:t>
             </a:r>
             <a:r>
-              <a:rPr sz="1600" i="0" b="0">
+              <a:rPr sz="1500" i="0" b="0">
                 <a:solidFill>
                   <a:srgbClr val="D4D4D4"/>
                 </a:solidFill>
@@ -5532,7 +5532,7 @@
               <a:t> </a:t>
             </a:r>
             <a:r>
-              <a:rPr sz="1600" i="0" b="0">
+              <a:rPr sz="1500" i="0" b="0">
                 <a:solidFill>
                   <a:srgbClr val="D4D4D4"/>
                 </a:solidFill>
@@ -5544,11 +5544,11 @@
           <a:p>
             <a:pPr>
               <a:spcAft>
-                <a:spcPts val="342"/>
+                <a:spcPts val="321"/>
               </a:spcAft>
             </a:pPr>
             <a:r>
-              <a:rPr sz="1600" i="0" b="0">
+              <a:rPr sz="1500" i="0" b="0">
                 <a:solidFill>
                   <a:srgbClr val="D4D4D4"/>
                 </a:solidFill>
@@ -5557,7 +5557,7 @@
               <a:t>  </a:t>
             </a:r>
             <a:r>
-              <a:rPr sz="1600" i="0" b="0">
+              <a:rPr sz="1500" i="0" b="0">
                 <a:solidFill>
                   <a:srgbClr val="D4D4D4"/>
                 </a:solidFill>
@@ -5566,7 +5566,7 @@
               <a:t>para</a:t>
             </a:r>
             <a:r>
-              <a:rPr sz="1600" i="0" b="0">
+              <a:rPr sz="1500" i="0" b="0">
                 <a:solidFill>
                   <a:srgbClr val="D4D4D4"/>
                 </a:solidFill>
@@ -5575,7 +5575,7 @@
               <a:t> </a:t>
             </a:r>
             <a:r>
-              <a:rPr sz="1600" i="0" b="0">
+              <a:rPr sz="1500" i="0" b="0">
                 <a:solidFill>
                   <a:srgbClr val="D4D4D4"/>
                 </a:solidFill>
@@ -5584,7 +5584,7 @@
               <a:t>atender</a:t>
             </a:r>
             <a:r>
-              <a:rPr sz="1600" i="0" b="0">
+              <a:rPr sz="1500" i="0" b="0">
                 <a:solidFill>
                   <a:srgbClr val="D4D4D4"/>
                 </a:solidFill>
@@ -5593,7 +5593,7 @@
               <a:t> </a:t>
             </a:r>
             <a:r>
-              <a:rPr sz="1600" i="0" b="0">
+              <a:rPr sz="1500" i="0" b="0">
                 <a:solidFill>
                   <a:srgbClr val="D4D4D4"/>
                 </a:solidFill>
@@ -5602,7 +5602,7 @@
               <a:t>la</a:t>
             </a:r>
             <a:r>
-              <a:rPr sz="1600" i="0" b="0">
+              <a:rPr sz="1500" i="0" b="0">
                 <a:solidFill>
                   <a:srgbClr val="D4D4D4"/>
                 </a:solidFill>
@@ -5611,7 +5611,7 @@
               <a:t> </a:t>
             </a:r>
             <a:r>
-              <a:rPr sz="1600" i="0" b="0">
+              <a:rPr sz="1500" i="0" b="0">
                 <a:solidFill>
                   <a:srgbClr val="D4D4D4"/>
                 </a:solidFill>
@@ -5620,7 +5620,7 @@
               <a:t>consulta</a:t>
             </a:r>
             <a:r>
-              <a:rPr sz="1600" i="0" b="0">
+              <a:rPr sz="1500" i="0" b="0">
                 <a:solidFill>
                   <a:srgbClr val="D4D4D4"/>
                 </a:solidFill>
@@ -5629,7 +5629,7 @@
               <a:t> </a:t>
             </a:r>
             <a:r>
-              <a:rPr sz="1600" i="0" b="0">
+              <a:rPr sz="1500" i="0" b="0">
                 <a:solidFill>
                   <a:srgbClr val="D4D4D4"/>
                 </a:solidFill>
@@ -5638,7 +5638,7 @@
               <a:t>sin</a:t>
             </a:r>
             <a:r>
-              <a:rPr sz="1600" i="0" b="0">
+              <a:rPr sz="1500" i="0" b="0">
                 <a:solidFill>
                   <a:srgbClr val="D4D4D4"/>
                 </a:solidFill>
@@ -5647,7 +5647,7 @@
               <a:t> </a:t>
             </a:r>
             <a:r>
-              <a:rPr sz="1600" i="0" b="0">
+              <a:rPr sz="1500" i="0" b="0">
                 <a:solidFill>
                   <a:srgbClr val="D4D4D4"/>
                 </a:solidFill>
@@ -5656,7 +5656,7 @@
               <a:t>ir</a:t>
             </a:r>
             <a:r>
-              <a:rPr sz="1600" i="0" b="0">
+              <a:rPr sz="1500" i="0" b="0">
                 <a:solidFill>
                   <a:srgbClr val="D4D4D4"/>
                 </a:solidFill>
@@ -5665,7 +5665,7 @@
               <a:t> </a:t>
             </a:r>
             <a:r>
-              <a:rPr sz="1600" i="0" b="0">
+              <a:rPr sz="1500" i="0" b="0">
                 <a:solidFill>
                   <a:srgbClr val="D4D4D4"/>
                 </a:solidFill>
@@ -5674,7 +5674,7 @@
               <a:t>al</a:t>
             </a:r>
             <a:r>
-              <a:rPr sz="1600" i="0" b="0">
+              <a:rPr sz="1500" i="0" b="0">
                 <a:solidFill>
                   <a:srgbClr val="D4D4D4"/>
                 </a:solidFill>
@@ -5683,7 +5683,7 @@
               <a:t> </a:t>
             </a:r>
             <a:r>
-              <a:rPr sz="1600" i="0" b="0">
+              <a:rPr sz="1500" i="0" b="0">
                 <a:solidFill>
                   <a:srgbClr val="D4D4D4"/>
                 </a:solidFill>
@@ -5692,7 +5692,7 @@
               <a:t>archivador</a:t>
             </a:r>
             <a:r>
-              <a:rPr sz="1600" i="0" b="0">
+              <a:rPr sz="1500" i="0" b="0">
                 <a:solidFill>
                   <a:srgbClr val="D4D4D4"/>
                 </a:solidFill>
@@ -5701,7 +5701,7 @@
               <a:t> </a:t>
             </a:r>
             <a:r>
-              <a:rPr sz="1600" i="0" b="0">
+              <a:rPr sz="1500" i="0" b="0">
                 <a:solidFill>
                   <a:srgbClr val="D4D4D4"/>
                 </a:solidFill>
@@ -5710,7 +5710,7 @@
               <a:t>de</a:t>
             </a:r>
             <a:r>
-              <a:rPr sz="1600" i="0" b="0">
+              <a:rPr sz="1500" i="0" b="0">
                 <a:solidFill>
                   <a:srgbClr val="D4D4D4"/>
                 </a:solidFill>
@@ -5719,7 +5719,7 @@
               <a:t> </a:t>
             </a:r>
             <a:r>
-              <a:rPr sz="1600" i="0" b="0">
+              <a:rPr sz="1500" i="0" b="0">
                 <a:solidFill>
                   <a:srgbClr val="D4D4D4"/>
                 </a:solidFill>
@@ -5728,7 +5728,7 @@
               <a:t>papel</a:t>
             </a:r>
             <a:r>
-              <a:rPr sz="1600" i="0" b="0">
+              <a:rPr sz="1500" i="0" b="0">
                 <a:solidFill>
                   <a:srgbClr val="D4D4D4"/>
                 </a:solidFill>
@@ -5740,11 +5740,11 @@
           <a:p>
             <a:pPr>
               <a:spcAft>
-                <a:spcPts val="342"/>
+                <a:spcPts val="321"/>
               </a:spcAft>
             </a:pPr>
             <a:r>
-              <a:rPr sz="1600" i="0" b="0">
+              <a:rPr sz="1500" i="0" b="0">
                 <a:solidFill>
                   <a:srgbClr val="D4D4D4"/>
                 </a:solidFill>
@@ -5756,11 +5756,11 @@
           <a:p>
             <a:pPr>
               <a:spcAft>
-                <a:spcPts val="342"/>
+                <a:spcPts val="321"/>
               </a:spcAft>
             </a:pPr>
             <a:r>
-              <a:rPr sz="1600" i="0" b="0">
+              <a:rPr sz="1500" i="0" b="0">
                 <a:solidFill>
                   <a:srgbClr val="D4D4D4"/>
                 </a:solidFill>
@@ -5769,7 +5769,7 @@
               <a:t>Criterios</a:t>
             </a:r>
             <a:r>
-              <a:rPr sz="1600" i="0" b="0">
+              <a:rPr sz="1500" i="0" b="0">
                 <a:solidFill>
                   <a:srgbClr val="D4D4D4"/>
                 </a:solidFill>
@@ -5778,7 +5778,7 @@
               <a:t> </a:t>
             </a:r>
             <a:r>
-              <a:rPr sz="1600" i="0" b="0">
+              <a:rPr sz="1500" i="0" b="0">
                 <a:solidFill>
                   <a:srgbClr val="D4D4D4"/>
                 </a:solidFill>
@@ -5787,7 +5787,7 @@
               <a:t>de</a:t>
             </a:r>
             <a:r>
-              <a:rPr sz="1600" i="0" b="0">
+              <a:rPr sz="1500" i="0" b="0">
                 <a:solidFill>
                   <a:srgbClr val="D4D4D4"/>
                 </a:solidFill>
@@ -5796,7 +5796,7 @@
               <a:t> </a:t>
             </a:r>
             <a:r>
-              <a:rPr sz="1600" i="0" b="0">
+              <a:rPr sz="1500" i="0" b="0">
                 <a:solidFill>
                   <a:srgbClr val="D4D4D4"/>
                 </a:solidFill>
@@ -5808,11 +5808,11 @@
           <a:p>
             <a:pPr>
               <a:spcAft>
-                <a:spcPts val="342"/>
+                <a:spcPts val="321"/>
               </a:spcAft>
             </a:pPr>
             <a:r>
-              <a:rPr sz="1600" i="0" b="0">
+              <a:rPr sz="1500" i="0" b="0">
                 <a:solidFill>
                   <a:srgbClr val="D4D4D4"/>
                 </a:solidFill>
@@ -5821,7 +5821,7 @@
               <a:t>  </a:t>
             </a:r>
             <a:r>
-              <a:rPr sz="1600" i="0" b="0">
+              <a:rPr sz="1500" i="0" b="0">
                 <a:solidFill>
                   <a:srgbClr val="D4D4D4"/>
                 </a:solidFill>
@@ -5830,7 +5830,7 @@
               <a:t>Dado</a:t>
             </a:r>
             <a:r>
-              <a:rPr sz="1600" i="0" b="0">
+              <a:rPr sz="1500" i="0" b="0">
                 <a:solidFill>
                   <a:srgbClr val="D4D4D4"/>
                 </a:solidFill>
@@ -5839,7 +5839,7 @@
               <a:t> </a:t>
             </a:r>
             <a:r>
-              <a:rPr sz="1600" i="0" b="0">
+              <a:rPr sz="1500" i="0" b="0">
                 <a:solidFill>
                   <a:srgbClr val="D4D4D4"/>
                 </a:solidFill>
@@ -5848,7 +5848,7 @@
               <a:t>que</a:t>
             </a:r>
             <a:r>
-              <a:rPr sz="1600" i="0" b="0">
+              <a:rPr sz="1500" i="0" b="0">
                 <a:solidFill>
                   <a:srgbClr val="D4D4D4"/>
                 </a:solidFill>
@@ -5857,7 +5857,7 @@
               <a:t> </a:t>
             </a:r>
             <a:r>
-              <a:rPr sz="1600" i="0" b="0">
+              <a:rPr sz="1500" i="0" b="0">
                 <a:solidFill>
                   <a:srgbClr val="D4D4D4"/>
                 </a:solidFill>
@@ -5866,7 +5866,7 @@
               <a:t>la</a:t>
             </a:r>
             <a:r>
-              <a:rPr sz="1600" i="0" b="0">
+              <a:rPr sz="1500" i="0" b="0">
                 <a:solidFill>
                   <a:srgbClr val="D4D4D4"/>
                 </a:solidFill>
@@ -5875,7 +5875,7 @@
               <a:t> </a:t>
             </a:r>
             <a:r>
-              <a:rPr sz="1600" i="0" b="0">
+              <a:rPr sz="1500" i="0" b="0">
                 <a:solidFill>
                   <a:srgbClr val="D4D4D4"/>
                 </a:solidFill>
@@ -5884,7 +5884,7 @@
               <a:t>mascota</a:t>
             </a:r>
             <a:r>
-              <a:rPr sz="1600" i="0" b="0">
+              <a:rPr sz="1500" i="0" b="0">
                 <a:solidFill>
                   <a:srgbClr val="D4D4D4"/>
                 </a:solidFill>
@@ -5893,7 +5893,7 @@
               <a:t> </a:t>
             </a:r>
             <a:r>
-              <a:rPr sz="1600" i="0" b="0">
+              <a:rPr sz="1500" i="0" b="0">
                 <a:solidFill>
                   <a:srgbClr val="D4D4D4"/>
                 </a:solidFill>
@@ -5902,7 +5902,7 @@
               <a:t>Rocky</a:t>
             </a:r>
             <a:r>
-              <a:rPr sz="1600" i="0" b="0">
+              <a:rPr sz="1500" i="0" b="0">
                 <a:solidFill>
                   <a:srgbClr val="D4D4D4"/>
                 </a:solidFill>
@@ -5911,7 +5911,7 @@
               <a:t> </a:t>
             </a:r>
             <a:r>
-              <a:rPr sz="1600" i="0" b="0">
+              <a:rPr sz="1500" i="0" b="0">
                 <a:solidFill>
                   <a:srgbClr val="D4D4D4"/>
                 </a:solidFill>
@@ -5920,7 +5920,7 @@
               <a:t>esta</a:t>
             </a:r>
             <a:r>
-              <a:rPr sz="1600" i="0" b="0">
+              <a:rPr sz="1500" i="0" b="0">
                 <a:solidFill>
                   <a:srgbClr val="D4D4D4"/>
                 </a:solidFill>
@@ -5929,7 +5929,7 @@
               <a:t> </a:t>
             </a:r>
             <a:r>
-              <a:rPr sz="1600" i="0" b="0">
+              <a:rPr sz="1500" i="0" b="0">
                 <a:solidFill>
                   <a:srgbClr val="D4D4D4"/>
                 </a:solidFill>
@@ -5938,7 +5938,7 @@
               <a:t>registrada</a:t>
             </a:r>
             <a:r>
-              <a:rPr sz="1600" i="0" b="0">
+              <a:rPr sz="1500" i="0" b="0">
                 <a:solidFill>
                   <a:srgbClr val="D4D4D4"/>
                 </a:solidFill>
@@ -5947,7 +5947,7 @@
               <a:t> </a:t>
             </a:r>
             <a:r>
-              <a:rPr sz="1600" i="0" b="0">
+              <a:rPr sz="1500" i="0" b="0">
                 <a:solidFill>
                   <a:srgbClr val="D4D4D4"/>
                 </a:solidFill>
@@ -5956,7 +5956,7 @@
               <a:t>con</a:t>
             </a:r>
             <a:r>
-              <a:rPr sz="1600" i="0" b="0">
+              <a:rPr sz="1500" i="0" b="0">
                 <a:solidFill>
                   <a:srgbClr val="D4D4D4"/>
                 </a:solidFill>
@@ -5965,7 +5965,7 @@
               <a:t> </a:t>
             </a:r>
             <a:r>
-              <a:rPr sz="1600" i="0" b="0">
+              <a:rPr sz="1500" i="0" b="0">
                 <a:solidFill>
                   <a:srgbClr val="D4D4D4"/>
                 </a:solidFill>
@@ -5974,7 +5974,7 @@
               <a:t>el</a:t>
             </a:r>
             <a:r>
-              <a:rPr sz="1600" i="0" b="0">
+              <a:rPr sz="1500" i="0" b="0">
                 <a:solidFill>
                   <a:srgbClr val="D4D4D4"/>
                 </a:solidFill>
@@ -5983,7 +5983,7 @@
               <a:t> </a:t>
             </a:r>
             <a:r>
-              <a:rPr sz="1600" i="0" b="0">
+              <a:rPr sz="1500" i="0" b="0">
                 <a:solidFill>
                   <a:srgbClr val="D4D4D4"/>
                 </a:solidFill>
@@ -5992,7 +5992,7 @@
               <a:t>dueño</a:t>
             </a:r>
             <a:r>
-              <a:rPr sz="1600" i="0" b="0">
+              <a:rPr sz="1500" i="0" b="0">
                 <a:solidFill>
                   <a:srgbClr val="D4D4D4"/>
                 </a:solidFill>
@@ -6001,7 +6001,7 @@
               <a:t> </a:t>
             </a:r>
             <a:r>
-              <a:rPr sz="1600" i="0" b="0">
+              <a:rPr sz="1500" i="0" b="0">
                 <a:solidFill>
                   <a:srgbClr val="D4D4D4"/>
                 </a:solidFill>
@@ -6010,7 +6010,7 @@
               <a:t>CC</a:t>
             </a:r>
             <a:r>
-              <a:rPr sz="1600" i="0" b="0">
+              <a:rPr sz="1500" i="0" b="0">
                 <a:solidFill>
                   <a:srgbClr val="D4D4D4"/>
                 </a:solidFill>
@@ -6019,7 +6019,7 @@
               <a:t> </a:t>
             </a:r>
             <a:r>
-              <a:rPr sz="1600" i="0" b="0">
+              <a:rPr sz="1500" i="0" b="0">
                 <a:solidFill>
                   <a:srgbClr val="B5CEA8"/>
                 </a:solidFill>
@@ -6028,7 +6028,7 @@
               <a:t>1.144</a:t>
             </a:r>
             <a:r>
-              <a:rPr sz="1600" i="0" b="0">
+              <a:rPr sz="1500" i="0" b="0">
                 <a:solidFill>
                   <a:srgbClr val="D4D4D4"/>
                 </a:solidFill>
@@ -6037,7 +6037,7 @@
               <a:t>.</a:t>
             </a:r>
             <a:r>
-              <a:rPr sz="1600" i="0" b="0">
+              <a:rPr sz="1500" i="0" b="0">
                 <a:solidFill>
                   <a:srgbClr val="B5CEA8"/>
                 </a:solidFill>
@@ -6049,11 +6049,11 @@
           <a:p>
             <a:pPr>
               <a:spcAft>
-                <a:spcPts val="342"/>
+                <a:spcPts val="321"/>
               </a:spcAft>
             </a:pPr>
             <a:r>
-              <a:rPr sz="1600" i="0" b="0">
+              <a:rPr sz="1500" i="0" b="0">
                 <a:solidFill>
                   <a:srgbClr val="D4D4D4"/>
                 </a:solidFill>
@@ -6062,7 +6062,7 @@
               <a:t>  </a:t>
             </a:r>
             <a:r>
-              <a:rPr sz="1600" i="0" b="0">
+              <a:rPr sz="1500" i="0" b="0">
                 <a:solidFill>
                   <a:srgbClr val="D4D4D4"/>
                 </a:solidFill>
@@ -6071,7 +6071,7 @@
               <a:t>Cuando</a:t>
             </a:r>
             <a:r>
-              <a:rPr sz="1600" i="0" b="0">
+              <a:rPr sz="1500" i="0" b="0">
                 <a:solidFill>
                   <a:srgbClr val="D4D4D4"/>
                 </a:solidFill>
@@ -6080,7 +6080,7 @@
               <a:t> </a:t>
             </a:r>
             <a:r>
-              <a:rPr sz="1600" i="0" b="0">
+              <a:rPr sz="1500" i="0" b="0">
                 <a:solidFill>
                   <a:srgbClr val="D4D4D4"/>
                 </a:solidFill>
@@ -6089,7 +6089,7 @@
               <a:t>escribo</a:t>
             </a:r>
             <a:r>
-              <a:rPr sz="1600" i="0" b="0">
+              <a:rPr sz="1500" i="0" b="0">
                 <a:solidFill>
                   <a:srgbClr val="D4D4D4"/>
                 </a:solidFill>
@@ -6098,7 +6098,7 @@
               <a:t> </a:t>
             </a:r>
             <a:r>
-              <a:rPr sz="1600" i="0" b="0">
+              <a:rPr sz="1500" i="0" b="0">
                 <a:solidFill>
                   <a:srgbClr val="D4D4D4"/>
                 </a:solidFill>
@@ -6107,7 +6107,7 @@
               <a:t>Rocky</a:t>
             </a:r>
             <a:r>
-              <a:rPr sz="1600" i="0" b="0">
+              <a:rPr sz="1500" i="0" b="0">
                 <a:solidFill>
                   <a:srgbClr val="D4D4D4"/>
                 </a:solidFill>
@@ -6116,7 +6116,7 @@
               <a:t> </a:t>
             </a:r>
             <a:r>
-              <a:rPr sz="1600" i="0" b="0">
+              <a:rPr sz="1500" i="0" b="0">
                 <a:solidFill>
                   <a:srgbClr val="D4D4D4"/>
                 </a:solidFill>
@@ -6125,7 +6125,7 @@
               <a:t>en</a:t>
             </a:r>
             <a:r>
-              <a:rPr sz="1600" i="0" b="0">
+              <a:rPr sz="1500" i="0" b="0">
                 <a:solidFill>
                   <a:srgbClr val="D4D4D4"/>
                 </a:solidFill>
@@ -6134,7 +6134,7 @@
               <a:t> </a:t>
             </a:r>
             <a:r>
-              <a:rPr sz="1600" i="0" b="0">
+              <a:rPr sz="1500" i="0" b="0">
                 <a:solidFill>
                   <a:srgbClr val="D4D4D4"/>
                 </a:solidFill>
@@ -6143,7 +6143,7 @@
               <a:t>el</a:t>
             </a:r>
             <a:r>
-              <a:rPr sz="1600" i="0" b="0">
+              <a:rPr sz="1500" i="0" b="0">
                 <a:solidFill>
                   <a:srgbClr val="D4D4D4"/>
                 </a:solidFill>
@@ -6152,7 +6152,7 @@
               <a:t> </a:t>
             </a:r>
             <a:r>
-              <a:rPr sz="1600" i="0" b="0">
+              <a:rPr sz="1500" i="0" b="0">
                 <a:solidFill>
                   <a:srgbClr val="D4D4D4"/>
                 </a:solidFill>
@@ -6161,7 +6161,7 @@
               <a:t>buscador</a:t>
             </a:r>
             <a:r>
-              <a:rPr sz="1600" i="0" b="0">
+              <a:rPr sz="1500" i="0" b="0">
                 <a:solidFill>
                   <a:srgbClr val="D4D4D4"/>
                 </a:solidFill>
@@ -6170,7 +6170,7 @@
               <a:t> </a:t>
             </a:r>
             <a:r>
-              <a:rPr sz="1600" i="0" b="0">
+              <a:rPr sz="1500" i="0" b="0">
                 <a:solidFill>
                   <a:srgbClr val="D4D4D4"/>
                 </a:solidFill>
@@ -6179,7 +6179,7 @@
               <a:t>y</a:t>
             </a:r>
             <a:r>
-              <a:rPr sz="1600" i="0" b="0">
+              <a:rPr sz="1500" i="0" b="0">
                 <a:solidFill>
                   <a:srgbClr val="D4D4D4"/>
                 </a:solidFill>
@@ -6188,7 +6188,7 @@
               <a:t> </a:t>
             </a:r>
             <a:r>
-              <a:rPr sz="1600" i="0" b="0">
+              <a:rPr sz="1500" i="0" b="0">
                 <a:solidFill>
                   <a:srgbClr val="D4D4D4"/>
                 </a:solidFill>
@@ -6197,7 +6197,7 @@
               <a:t>presiono</a:t>
             </a:r>
             <a:r>
-              <a:rPr sz="1600" i="0" b="0">
+              <a:rPr sz="1500" i="0" b="0">
                 <a:solidFill>
                   <a:srgbClr val="D4D4D4"/>
                 </a:solidFill>
@@ -6206,7 +6206,7 @@
               <a:t> </a:t>
             </a:r>
             <a:r>
-              <a:rPr sz="1600" i="0" b="0">
+              <a:rPr sz="1500" i="0" b="0">
                 <a:solidFill>
                   <a:srgbClr val="D4D4D4"/>
                 </a:solidFill>
@@ -6218,11 +6218,11 @@
           <a:p>
             <a:pPr>
               <a:spcAft>
-                <a:spcPts val="342"/>
+                <a:spcPts val="321"/>
               </a:spcAft>
             </a:pPr>
             <a:r>
-              <a:rPr sz="1600" i="0" b="0">
+              <a:rPr sz="1500" i="0" b="0">
                 <a:solidFill>
                   <a:srgbClr val="D4D4D4"/>
                 </a:solidFill>
@@ -6231,7 +6231,7 @@
               <a:t>  </a:t>
             </a:r>
             <a:r>
-              <a:rPr sz="1600" i="0" b="0">
+              <a:rPr sz="1500" i="0" b="0">
                 <a:solidFill>
                   <a:srgbClr val="D4D4D4"/>
                 </a:solidFill>
@@ -6240,7 +6240,7 @@
               <a:t>Entonces</a:t>
             </a:r>
             <a:r>
-              <a:rPr sz="1600" i="0" b="0">
+              <a:rPr sz="1500" i="0" b="0">
                 <a:solidFill>
                   <a:srgbClr val="D4D4D4"/>
                 </a:solidFill>
@@ -6249,7 +6249,7 @@
               <a:t> </a:t>
             </a:r>
             <a:r>
-              <a:rPr sz="1600" i="0" b="0">
+              <a:rPr sz="1500" i="0" b="0">
                 <a:solidFill>
                   <a:srgbClr val="D4D4D4"/>
                 </a:solidFill>
@@ -6258,7 +6258,7 @@
               <a:t>veo</a:t>
             </a:r>
             <a:r>
-              <a:rPr sz="1600" i="0" b="0">
+              <a:rPr sz="1500" i="0" b="0">
                 <a:solidFill>
                   <a:srgbClr val="D4D4D4"/>
                 </a:solidFill>
@@ -6267,7 +6267,7 @@
               <a:t> </a:t>
             </a:r>
             <a:r>
-              <a:rPr sz="1600" i="0" b="0">
+              <a:rPr sz="1500" i="0" b="0">
                 <a:solidFill>
                   <a:srgbClr val="D4D4D4"/>
                 </a:solidFill>
@@ -6276,7 +6276,7 @@
               <a:t>la</a:t>
             </a:r>
             <a:r>
-              <a:rPr sz="1600" i="0" b="0">
+              <a:rPr sz="1500" i="0" b="0">
                 <a:solidFill>
                   <a:srgbClr val="D4D4D4"/>
                 </a:solidFill>
@@ -6285,7 +6285,7 @@
               <a:t> </a:t>
             </a:r>
             <a:r>
-              <a:rPr sz="1600" i="0" b="0">
+              <a:rPr sz="1500" i="0" b="0">
                 <a:solidFill>
                   <a:srgbClr val="D4D4D4"/>
                 </a:solidFill>
@@ -6294,7 +6294,7 @@
               <a:t>ficha</a:t>
             </a:r>
             <a:r>
-              <a:rPr sz="1600" i="0" b="0">
+              <a:rPr sz="1500" i="0" b="0">
                 <a:solidFill>
                   <a:srgbClr val="D4D4D4"/>
                 </a:solidFill>
@@ -6303,7 +6303,7 @@
               <a:t> </a:t>
             </a:r>
             <a:r>
-              <a:rPr sz="1600" i="0" b="0">
+              <a:rPr sz="1500" i="0" b="0">
                 <a:solidFill>
                   <a:srgbClr val="D4D4D4"/>
                 </a:solidFill>
@@ -6312,7 +6312,7 @@
               <a:t>con</a:t>
             </a:r>
             <a:r>
-              <a:rPr sz="1600" i="0" b="0">
+              <a:rPr sz="1500" i="0" b="0">
                 <a:solidFill>
                   <a:srgbClr val="D4D4D4"/>
                 </a:solidFill>
@@ -6321,7 +6321,7 @@
               <a:t> </a:t>
             </a:r>
             <a:r>
-              <a:rPr sz="1600" i="0" b="0">
+              <a:rPr sz="1500" i="0" b="0">
                 <a:solidFill>
                   <a:srgbClr val="D4D4D4"/>
                 </a:solidFill>
@@ -6330,7 +6330,7 @@
               <a:t>especie</a:t>
             </a:r>
             <a:r>
-              <a:rPr sz="1600" i="0" b="0">
+              <a:rPr sz="1500" i="0" b="0">
                 <a:solidFill>
                   <a:srgbClr val="D4D4D4"/>
                 </a:solidFill>
@@ -6339,7 +6339,7 @@
               <a:t>, </a:t>
             </a:r>
             <a:r>
-              <a:rPr sz="1600" i="0" b="0">
+              <a:rPr sz="1500" i="0" b="0">
                 <a:solidFill>
                   <a:srgbClr val="D4D4D4"/>
                 </a:solidFill>
@@ -6348,7 +6348,7 @@
               <a:t>edad</a:t>
             </a:r>
             <a:r>
-              <a:rPr sz="1600" i="0" b="0">
+              <a:rPr sz="1500" i="0" b="0">
                 <a:solidFill>
                   <a:srgbClr val="D4D4D4"/>
                 </a:solidFill>
@@ -6357,7 +6357,7 @@
               <a:t> </a:t>
             </a:r>
             <a:r>
-              <a:rPr sz="1600" i="0" b="0">
+              <a:rPr sz="1500" i="0" b="0">
                 <a:solidFill>
                   <a:srgbClr val="D4D4D4"/>
                 </a:solidFill>
@@ -6366,7 +6366,7 @@
               <a:t>y</a:t>
             </a:r>
             <a:r>
-              <a:rPr sz="1600" i="0" b="0">
+              <a:rPr sz="1500" i="0" b="0">
                 <a:solidFill>
                   <a:srgbClr val="D4D4D4"/>
                 </a:solidFill>
@@ -6375,7 +6375,7 @@
               <a:t> </a:t>
             </a:r>
             <a:r>
-              <a:rPr sz="1600" i="0" b="0">
+              <a:rPr sz="1500" i="0" b="0">
                 <a:solidFill>
                   <a:srgbClr val="D4D4D4"/>
                 </a:solidFill>
@@ -6384,7 +6384,7 @@
               <a:t>las</a:t>
             </a:r>
             <a:r>
-              <a:rPr sz="1600" i="0" b="0">
+              <a:rPr sz="1500" i="0" b="0">
                 <a:solidFill>
                   <a:srgbClr val="D4D4D4"/>
                 </a:solidFill>
@@ -6393,7 +6393,7 @@
               <a:t> </a:t>
             </a:r>
             <a:r>
-              <a:rPr sz="1600" i="0" b="0">
+              <a:rPr sz="1500" i="0" b="0">
                 <a:solidFill>
                   <a:srgbClr val="D4D4D4"/>
                 </a:solidFill>
@@ -6402,7 +6402,7 @@
               <a:t>ultimas</a:t>
             </a:r>
             <a:r>
-              <a:rPr sz="1600" i="0" b="0">
+              <a:rPr sz="1500" i="0" b="0">
                 <a:solidFill>
                   <a:srgbClr val="D4D4D4"/>
                 </a:solidFill>
@@ -6411,7 +6411,7 @@
               <a:t> </a:t>
             </a:r>
             <a:r>
-              <a:rPr sz="1600" i="0" b="0">
+              <a:rPr sz="1500" i="0" b="0">
                 <a:solidFill>
                   <a:srgbClr val="B5CEA8"/>
                 </a:solidFill>
@@ -6420,7 +6420,7 @@
               <a:t>3</a:t>
             </a:r>
             <a:r>
-              <a:rPr sz="1600" i="0" b="0">
+              <a:rPr sz="1500" i="0" b="0">
                 <a:solidFill>
                   <a:srgbClr val="D4D4D4"/>
                 </a:solidFill>
@@ -6429,7 +6429,7 @@
               <a:t> </a:t>
             </a:r>
             <a:r>
-              <a:rPr sz="1600" i="0" b="0">
+              <a:rPr sz="1500" i="0" b="0">
                 <a:solidFill>
                   <a:srgbClr val="D4D4D4"/>
                 </a:solidFill>
@@ -6438,7 +6438,7 @@
               <a:t>consultas</a:t>
             </a:r>
             <a:r>
-              <a:rPr sz="1600" i="0" b="0">
+              <a:rPr sz="1500" i="0" b="0">
                 <a:solidFill>
                   <a:srgbClr val="D4D4D4"/>
                 </a:solidFill>
@@ -6447,7 +6447,7 @@
               <a:t> </a:t>
             </a:r>
             <a:r>
-              <a:rPr sz="1600" i="0" b="0">
+              <a:rPr sz="1500" i="0" b="0">
                 <a:solidFill>
                   <a:srgbClr val="D4D4D4"/>
                 </a:solidFill>
@@ -6456,7 +6456,7 @@
               <a:t>en</a:t>
             </a:r>
             <a:r>
-              <a:rPr sz="1600" i="0" b="0">
+              <a:rPr sz="1500" i="0" b="0">
                 <a:solidFill>
                   <a:srgbClr val="D4D4D4"/>
                 </a:solidFill>
@@ -6465,7 +6465,7 @@
               <a:t> &lt;= </a:t>
             </a:r>
             <a:r>
-              <a:rPr sz="1600" i="0" b="0">
+              <a:rPr sz="1500" i="0" b="0">
                 <a:solidFill>
                   <a:srgbClr val="B5CEA8"/>
                 </a:solidFill>
@@ -6474,7 +6474,7 @@
               <a:t>3</a:t>
             </a:r>
             <a:r>
-              <a:rPr sz="1600" i="0" b="0">
+              <a:rPr sz="1500" i="0" b="0">
                 <a:solidFill>
                   <a:srgbClr val="D4D4D4"/>
                 </a:solidFill>
@@ -6483,7 +6483,7 @@
               <a:t> </a:t>
             </a:r>
             <a:r>
-              <a:rPr sz="1600" i="0" b="0">
+              <a:rPr sz="1500" i="0" b="0">
                 <a:solidFill>
                   <a:srgbClr val="D4D4D4"/>
                 </a:solidFill>
@@ -6495,11 +6495,11 @@
           <a:p>
             <a:pPr>
               <a:spcAft>
-                <a:spcPts val="342"/>
+                <a:spcPts val="321"/>
               </a:spcAft>
             </a:pPr>
             <a:r>
-              <a:rPr sz="1600" i="0" b="0">
+              <a:rPr sz="1500" i="0" b="0">
                 <a:solidFill>
                   <a:srgbClr val="D4D4D4"/>
                 </a:solidFill>
@@ -6511,11 +6511,11 @@
           <a:p>
             <a:pPr>
               <a:spcAft>
-                <a:spcPts val="342"/>
+                <a:spcPts val="321"/>
               </a:spcAft>
             </a:pPr>
             <a:r>
-              <a:rPr sz="1600" i="0" b="0">
+              <a:rPr sz="1500" i="0" b="0">
                 <a:solidFill>
                   <a:srgbClr val="D4D4D4"/>
                 </a:solidFill>
@@ -6524,7 +6524,7 @@
               <a:t>  </a:t>
             </a:r>
             <a:r>
-              <a:rPr sz="1600" i="0" b="0">
+              <a:rPr sz="1500" i="0" b="0">
                 <a:solidFill>
                   <a:srgbClr val="D4D4D4"/>
                 </a:solidFill>
@@ -6533,7 +6533,7 @@
               <a:t>Dado</a:t>
             </a:r>
             <a:r>
-              <a:rPr sz="1600" i="0" b="0">
+              <a:rPr sz="1500" i="0" b="0">
                 <a:solidFill>
                   <a:srgbClr val="D4D4D4"/>
                 </a:solidFill>
@@ -6542,7 +6542,7 @@
               <a:t> </a:t>
             </a:r>
             <a:r>
-              <a:rPr sz="1600" i="0" b="0">
+              <a:rPr sz="1500" i="0" b="0">
                 <a:solidFill>
                   <a:srgbClr val="D4D4D4"/>
                 </a:solidFill>
@@ -6551,7 +6551,7 @@
               <a:t>que</a:t>
             </a:r>
             <a:r>
-              <a:rPr sz="1600" i="0" b="0">
+              <a:rPr sz="1500" i="0" b="0">
                 <a:solidFill>
                   <a:srgbClr val="D4D4D4"/>
                 </a:solidFill>
@@ -6560,7 +6560,7 @@
               <a:t> </a:t>
             </a:r>
             <a:r>
-              <a:rPr sz="1600" i="0" b="0">
+              <a:rPr sz="1500" i="0" b="0">
                 <a:solidFill>
                   <a:srgbClr val="D4D4D4"/>
                 </a:solidFill>
@@ -6569,7 +6569,7 @@
               <a:t>escribo</a:t>
             </a:r>
             <a:r>
-              <a:rPr sz="1600" i="0" b="0">
+              <a:rPr sz="1500" i="0" b="0">
                 <a:solidFill>
                   <a:srgbClr val="D4D4D4"/>
                 </a:solidFill>
@@ -6578,7 +6578,7 @@
               <a:t> </a:t>
             </a:r>
             <a:r>
-              <a:rPr sz="1600" i="0" b="0">
+              <a:rPr sz="1500" i="0" b="0">
                 <a:solidFill>
                   <a:srgbClr val="D4D4D4"/>
                 </a:solidFill>
@@ -6587,7 +6587,7 @@
               <a:t>un</a:t>
             </a:r>
             <a:r>
-              <a:rPr sz="1600" i="0" b="0">
+              <a:rPr sz="1500" i="0" b="0">
                 <a:solidFill>
                   <a:srgbClr val="D4D4D4"/>
                 </a:solidFill>
@@ -6596,7 +6596,7 @@
               <a:t> </a:t>
             </a:r>
             <a:r>
-              <a:rPr sz="1600" i="0" b="0">
+              <a:rPr sz="1500" i="0" b="0">
                 <a:solidFill>
                   <a:srgbClr val="D4D4D4"/>
                 </a:solidFill>
@@ -6605,7 +6605,7 @@
               <a:t>nombre</a:t>
             </a:r>
             <a:r>
-              <a:rPr sz="1600" i="0" b="0">
+              <a:rPr sz="1500" i="0" b="0">
                 <a:solidFill>
                   <a:srgbClr val="D4D4D4"/>
                 </a:solidFill>
@@ -6614,7 +6614,7 @@
               <a:t> </a:t>
             </a:r>
             <a:r>
-              <a:rPr sz="1600" i="0" b="0">
+              <a:rPr sz="1500" i="0" b="0">
                 <a:solidFill>
                   <a:srgbClr val="D4D4D4"/>
                 </a:solidFill>
@@ -6623,7 +6623,7 @@
               <a:t>que</a:t>
             </a:r>
             <a:r>
-              <a:rPr sz="1600" i="0" b="0">
+              <a:rPr sz="1500" i="0" b="0">
                 <a:solidFill>
                   <a:srgbClr val="D4D4D4"/>
                 </a:solidFill>
@@ -6632,7 +6632,7 @@
               <a:t> </a:t>
             </a:r>
             <a:r>
-              <a:rPr sz="1600" i="0" b="0">
+              <a:rPr sz="1500" i="0" b="0">
                 <a:solidFill>
                   <a:srgbClr val="D4D4D4"/>
                 </a:solidFill>
@@ -6641,7 +6641,7 @@
               <a:t>no</a:t>
             </a:r>
             <a:r>
-              <a:rPr sz="1600" i="0" b="0">
+              <a:rPr sz="1500" i="0" b="0">
                 <a:solidFill>
                   <a:srgbClr val="D4D4D4"/>
                 </a:solidFill>
@@ -6650,7 +6650,7 @@
               <a:t> </a:t>
             </a:r>
             <a:r>
-              <a:rPr sz="1600" i="0" b="0">
+              <a:rPr sz="1500" i="0" b="0">
                 <a:solidFill>
                   <a:srgbClr val="D4D4D4"/>
                 </a:solidFill>
@@ -6659,7 +6659,7 @@
               <a:t>existe</a:t>
             </a:r>
             <a:r>
-              <a:rPr sz="1600" i="0" b="0">
+              <a:rPr sz="1500" i="0" b="0">
                 <a:solidFill>
                   <a:srgbClr val="D4D4D4"/>
                 </a:solidFill>
@@ -6668,7 +6668,7 @@
               <a:t> </a:t>
             </a:r>
             <a:r>
-              <a:rPr sz="1600" i="0" b="0">
+              <a:rPr sz="1500" i="0" b="0">
                 <a:solidFill>
                   <a:srgbClr val="D4D4D4"/>
                 </a:solidFill>
@@ -6677,7 +6677,7 @@
               <a:t>en</a:t>
             </a:r>
             <a:r>
-              <a:rPr sz="1600" i="0" b="0">
+              <a:rPr sz="1500" i="0" b="0">
                 <a:solidFill>
                   <a:srgbClr val="D4D4D4"/>
                 </a:solidFill>
@@ -6686,7 +6686,7 @@
               <a:t> </a:t>
             </a:r>
             <a:r>
-              <a:rPr sz="1600" i="0" b="0">
+              <a:rPr sz="1500" i="0" b="0">
                 <a:solidFill>
                   <a:srgbClr val="D4D4D4"/>
                 </a:solidFill>
@@ -6695,7 +6695,7 @@
               <a:t>el</a:t>
             </a:r>
             <a:r>
-              <a:rPr sz="1600" i="0" b="0">
+              <a:rPr sz="1500" i="0" b="0">
                 <a:solidFill>
                   <a:srgbClr val="D4D4D4"/>
                 </a:solidFill>
@@ -6704,7 +6704,7 @@
               <a:t> </a:t>
             </a:r>
             <a:r>
-              <a:rPr sz="1600" i="0" b="0">
+              <a:rPr sz="1500" i="0" b="0">
                 <a:solidFill>
                   <a:srgbClr val="D4D4D4"/>
                 </a:solidFill>
@@ -6716,11 +6716,11 @@
           <a:p>
             <a:pPr>
               <a:spcAft>
-                <a:spcPts val="342"/>
+                <a:spcPts val="321"/>
               </a:spcAft>
             </a:pPr>
             <a:r>
-              <a:rPr sz="1600" i="0" b="0">
+              <a:rPr sz="1500" i="0" b="0">
                 <a:solidFill>
                   <a:srgbClr val="D4D4D4"/>
                 </a:solidFill>
@@ -6729,7 +6729,7 @@
               <a:t>  </a:t>
             </a:r>
             <a:r>
-              <a:rPr sz="1600" i="0" b="0">
+              <a:rPr sz="1500" i="0" b="0">
                 <a:solidFill>
                   <a:srgbClr val="D4D4D4"/>
                 </a:solidFill>
@@ -6738,7 +6738,7 @@
               <a:t>Cuando</a:t>
             </a:r>
             <a:r>
-              <a:rPr sz="1600" i="0" b="0">
+              <a:rPr sz="1500" i="0" b="0">
                 <a:solidFill>
                   <a:srgbClr val="D4D4D4"/>
                 </a:solidFill>
@@ -6747,7 +6747,7 @@
               <a:t> </a:t>
             </a:r>
             <a:r>
-              <a:rPr sz="1600" i="0" b="0">
+              <a:rPr sz="1500" i="0" b="0">
                 <a:solidFill>
                   <a:srgbClr val="D4D4D4"/>
                 </a:solidFill>
@@ -6756,7 +6756,7 @@
               <a:t>presiono</a:t>
             </a:r>
             <a:r>
-              <a:rPr sz="1600" i="0" b="0">
+              <a:rPr sz="1500" i="0" b="0">
                 <a:solidFill>
                   <a:srgbClr val="D4D4D4"/>
                 </a:solidFill>
@@ -6765,7 +6765,7 @@
               <a:t> </a:t>
             </a:r>
             <a:r>
-              <a:rPr sz="1600" i="0" b="0">
+              <a:rPr sz="1500" i="0" b="0">
                 <a:solidFill>
                   <a:srgbClr val="D4D4D4"/>
                 </a:solidFill>
@@ -6777,11 +6777,11 @@
           <a:p>
             <a:pPr>
               <a:spcAft>
-                <a:spcPts val="342"/>
+                <a:spcPts val="321"/>
               </a:spcAft>
             </a:pPr>
             <a:r>
-              <a:rPr sz="1600" i="0" b="0">
+              <a:rPr sz="1500" i="0" b="0">
                 <a:solidFill>
                   <a:srgbClr val="D4D4D4"/>
                 </a:solidFill>
@@ -6790,7 +6790,7 @@
               <a:t>  </a:t>
             </a:r>
             <a:r>
-              <a:rPr sz="1600" i="0" b="0">
+              <a:rPr sz="1500" i="0" b="0">
                 <a:solidFill>
                   <a:srgbClr val="D4D4D4"/>
                 </a:solidFill>
@@ -6799,7 +6799,7 @@
               <a:t>Entonces</a:t>
             </a:r>
             <a:r>
-              <a:rPr sz="1600" i="0" b="0">
+              <a:rPr sz="1500" i="0" b="0">
                 <a:solidFill>
                   <a:srgbClr val="D4D4D4"/>
                 </a:solidFill>
@@ -6808,7 +6808,7 @@
               <a:t> </a:t>
             </a:r>
             <a:r>
-              <a:rPr sz="1600" i="0" b="0">
+              <a:rPr sz="1500" i="0" b="0">
                 <a:solidFill>
                   <a:srgbClr val="D4D4D4"/>
                 </a:solidFill>
@@ -6817,7 +6817,7 @@
               <a:t>veo</a:t>
             </a:r>
             <a:r>
-              <a:rPr sz="1600" i="0" b="0">
+              <a:rPr sz="1500" i="0" b="0">
                 <a:solidFill>
                   <a:srgbClr val="D4D4D4"/>
                 </a:solidFill>
@@ -6826,7 +6826,7 @@
               <a:t> </a:t>
             </a:r>
             <a:r>
-              <a:rPr sz="1600" i="0" b="0">
+              <a:rPr sz="1500" i="0" b="0">
                 <a:solidFill>
                   <a:srgbClr val="CE9178"/>
                 </a:solidFill>
@@ -6835,7 +6835,7 @@
               <a:t>'No se encontro el paciente'</a:t>
             </a:r>
             <a:r>
-              <a:rPr sz="1600" i="0" b="0">
+              <a:rPr sz="1500" i="0" b="0">
                 <a:solidFill>
                   <a:srgbClr val="D4D4D4"/>
                 </a:solidFill>
@@ -6844,7 +6844,7 @@
               <a:t> </a:t>
             </a:r>
             <a:r>
-              <a:rPr sz="1600" i="0" b="0">
+              <a:rPr sz="1500" i="0" b="0">
                 <a:solidFill>
                   <a:srgbClr val="D4D4D4"/>
                 </a:solidFill>
@@ -6853,7 +6853,7 @@
               <a:t>y</a:t>
             </a:r>
             <a:r>
-              <a:rPr sz="1600" i="0" b="0">
+              <a:rPr sz="1500" i="0" b="0">
                 <a:solidFill>
                   <a:srgbClr val="D4D4D4"/>
                 </a:solidFill>
@@ -6862,7 +6862,7 @@
               <a:t> </a:t>
             </a:r>
             <a:r>
-              <a:rPr sz="1600" i="0" b="0">
+              <a:rPr sz="1500" i="0" b="0">
                 <a:solidFill>
                   <a:srgbClr val="D4D4D4"/>
                 </a:solidFill>
@@ -6871,7 +6871,7 @@
               <a:t>el</a:t>
             </a:r>
             <a:r>
-              <a:rPr sz="1600" i="0" b="0">
+              <a:rPr sz="1500" i="0" b="0">
                 <a:solidFill>
                   <a:srgbClr val="D4D4D4"/>
                 </a:solidFill>
@@ -6880,7 +6880,7 @@
               <a:t> </a:t>
             </a:r>
             <a:r>
-              <a:rPr sz="1600" i="0" b="0">
+              <a:rPr sz="1500" i="0" b="0">
                 <a:solidFill>
                   <a:srgbClr val="D4D4D4"/>
                 </a:solidFill>
@@ -6889,7 +6889,7 @@
               <a:t>boton</a:t>
             </a:r>
             <a:r>
-              <a:rPr sz="1600" i="0" b="0">
+              <a:rPr sz="1500" i="0" b="0">
                 <a:solidFill>
                   <a:srgbClr val="D4D4D4"/>
                 </a:solidFill>
@@ -6898,7 +6898,7 @@
               <a:t> </a:t>
             </a:r>
             <a:r>
-              <a:rPr sz="1600" i="0" b="0">
+              <a:rPr sz="1500" i="0" b="0">
                 <a:solidFill>
                   <a:srgbClr val="D4D4D4"/>
                 </a:solidFill>
@@ -6907,7 +6907,7 @@
               <a:t>Registrar</a:t>
             </a:r>
             <a:r>
-              <a:rPr sz="1600" i="0" b="0">
+              <a:rPr sz="1500" i="0" b="0">
                 <a:solidFill>
                   <a:srgbClr val="D4D4D4"/>
                 </a:solidFill>
@@ -6916,7 +6916,7 @@
               <a:t> </a:t>
             </a:r>
             <a:r>
-              <a:rPr sz="1600" i="0" b="0">
+              <a:rPr sz="1500" i="0" b="0">
                 <a:solidFill>
                   <a:srgbClr val="D4D4D4"/>
                 </a:solidFill>
@@ -6928,11 +6928,11 @@
           <a:p>
             <a:pPr>
               <a:spcAft>
-                <a:spcPts val="342"/>
+                <a:spcPts val="321"/>
               </a:spcAft>
             </a:pPr>
             <a:r>
-              <a:rPr sz="1600" i="0" b="0">
+              <a:rPr sz="1500" i="0" b="0">
                 <a:solidFill>
                   <a:srgbClr val="D4D4D4"/>
                 </a:solidFill>
@@ -6941,7 +6941,7 @@
               <a:t>Terminado</a:t>
             </a:r>
             <a:r>
-              <a:rPr sz="1600" i="0" b="0">
+              <a:rPr sz="1500" i="0" b="0">
                 <a:solidFill>
                   <a:srgbClr val="D4D4D4"/>
                 </a:solidFill>
@@ -6950,7 +6950,7 @@
               <a:t> = </a:t>
             </a:r>
             <a:r>
-              <a:rPr sz="1600" i="0" b="0">
+              <a:rPr sz="1500" i="0" b="0">
                 <a:solidFill>
                   <a:srgbClr val="D4D4D4"/>
                 </a:solidFill>
@@ -6959,7 +6959,7 @@
               <a:t>caso</a:t>
             </a:r>
             <a:r>
-              <a:rPr sz="1600" i="0" b="0">
+              <a:rPr sz="1500" i="0" b="0">
                 <a:solidFill>
                   <a:srgbClr val="D4D4D4"/>
                 </a:solidFill>
@@ -6968,7 +6968,7 @@
               <a:t> </a:t>
             </a:r>
             <a:r>
-              <a:rPr sz="1600" i="0" b="0">
+              <a:rPr sz="1500" i="0" b="0">
                 <a:solidFill>
                   <a:srgbClr val="D4D4D4"/>
                 </a:solidFill>
@@ -6977,7 +6977,7 @@
               <a:t>de</a:t>
             </a:r>
             <a:r>
-              <a:rPr sz="1600" i="0" b="0">
+              <a:rPr sz="1500" i="0" b="0">
                 <a:solidFill>
                   <a:srgbClr val="D4D4D4"/>
                 </a:solidFill>
@@ -6986,7 +6986,7 @@
               <a:t> </a:t>
             </a:r>
             <a:r>
-              <a:rPr sz="1600" i="0" b="0">
+              <a:rPr sz="1500" i="0" b="0">
                 <a:solidFill>
                   <a:srgbClr val="D4D4D4"/>
                 </a:solidFill>
@@ -6995,7 +6995,7 @@
               <a:t>uso</a:t>
             </a:r>
             <a:r>
-              <a:rPr sz="1600" i="0" b="0">
+              <a:rPr sz="1500" i="0" b="0">
                 <a:solidFill>
                   <a:srgbClr val="D4D4D4"/>
                 </a:solidFill>
@@ -7004,7 +7004,7 @@
               <a:t> + </a:t>
             </a:r>
             <a:r>
-              <a:rPr sz="1600" i="0" b="0">
+              <a:rPr sz="1500" i="0" b="0">
                 <a:solidFill>
                   <a:srgbClr val="D4D4D4"/>
                 </a:solidFill>
@@ -7013,7 +7013,7 @@
               <a:t>mockup</a:t>
             </a:r>
             <a:r>
-              <a:rPr sz="1600" i="0" b="0">
+              <a:rPr sz="1500" i="0" b="0">
                 <a:solidFill>
                   <a:srgbClr val="D4D4D4"/>
                 </a:solidFill>
@@ -7022,7 +7022,7 @@
               <a:t> + </a:t>
             </a:r>
             <a:r>
-              <a:rPr sz="1600" i="0" b="0">
+              <a:rPr sz="1500" i="0" b="0">
                 <a:solidFill>
                   <a:srgbClr val="D4D4D4"/>
                 </a:solidFill>
@@ -7031,7 +7031,7 @@
               <a:t>revision</a:t>
             </a:r>
             <a:r>
-              <a:rPr sz="1600" i="0" b="0">
+              <a:rPr sz="1500" i="0" b="0">
                 <a:solidFill>
                   <a:srgbClr val="D4D4D4"/>
                 </a:solidFill>
@@ -7040,7 +7040,7 @@
               <a:t> </a:t>
             </a:r>
             <a:r>
-              <a:rPr sz="1600" i="0" b="0">
+              <a:rPr sz="1500" i="0" b="0">
                 <a:solidFill>
                   <a:srgbClr val="D4D4D4"/>
                 </a:solidFill>
@@ -7049,7 +7049,7 @@
               <a:t>de</a:t>
             </a:r>
             <a:r>
-              <a:rPr sz="1600" i="0" b="0">
+              <a:rPr sz="1500" i="0" b="0">
                 <a:solidFill>
                   <a:srgbClr val="D4D4D4"/>
                 </a:solidFill>
@@ -7058,7 +7058,7 @@
               <a:t> </a:t>
             </a:r>
             <a:r>
-              <a:rPr sz="1600" i="0" b="0">
+              <a:rPr sz="1500" i="0" b="0">
                 <a:solidFill>
                   <a:srgbClr val="D4D4D4"/>
                 </a:solidFill>
@@ -7067,7 +7067,7 @@
               <a:t>un</a:t>
             </a:r>
             <a:r>
-              <a:rPr sz="1600" i="0" b="0">
+              <a:rPr sz="1500" i="0" b="0">
                 <a:solidFill>
                   <a:srgbClr val="D4D4D4"/>
                 </a:solidFill>
@@ -7076,7 +7076,7 @@
               <a:t> </a:t>
             </a:r>
             <a:r>
-              <a:rPr sz="1600" i="0" b="0">
+              <a:rPr sz="1500" i="0" b="0">
                 <a:solidFill>
                   <a:srgbClr val="D4D4D4"/>
                 </a:solidFill>
@@ -7085,7 +7085,7 @@
               <a:t>compañero</a:t>
             </a:r>
             <a:r>
-              <a:rPr sz="1600" i="0" b="0">
+              <a:rPr sz="1500" i="0" b="0">
                 <a:solidFill>
                   <a:srgbClr val="D4D4D4"/>
                 </a:solidFill>
@@ -7094,7 +7094,7 @@
               <a:t> + </a:t>
             </a:r>
             <a:r>
-              <a:rPr sz="1600" i="0" b="0">
+              <a:rPr sz="1500" i="0" b="0">
                 <a:solidFill>
                   <a:srgbClr val="D4D4D4"/>
                 </a:solidFill>
@@ -7103,7 +7103,7 @@
               <a:t>visto</a:t>
             </a:r>
             <a:r>
-              <a:rPr sz="1600" i="0" b="0">
+              <a:rPr sz="1500" i="0" b="0">
                 <a:solidFill>
                   <a:srgbClr val="D4D4D4"/>
                 </a:solidFill>
@@ -7112,7 +7112,7 @@
               <a:t> </a:t>
             </a:r>
             <a:r>
-              <a:rPr sz="1600" i="0" b="0">
+              <a:rPr sz="1500" i="0" b="0">
                 <a:solidFill>
                   <a:srgbClr val="D4D4D4"/>
                 </a:solidFill>
@@ -7121,7 +7121,7 @@
               <a:t>bueno</a:t>
             </a:r>
             <a:r>
-              <a:rPr sz="1600" i="0" b="0">
+              <a:rPr sz="1500" i="0" b="0">
                 <a:solidFill>
                   <a:srgbClr val="D4D4D4"/>
                 </a:solidFill>
@@ -7130,7 +7130,7 @@
               <a:t> </a:t>
             </a:r>
             <a:r>
-              <a:rPr sz="1600" i="0" b="0">
+              <a:rPr sz="1500" i="0" b="0">
                 <a:solidFill>
                   <a:srgbClr val="D4D4D4"/>
                 </a:solidFill>
@@ -7139,7 +7139,7 @@
               <a:t>del</a:t>
             </a:r>
             <a:r>
-              <a:rPr sz="1600" i="0" b="0">
+              <a:rPr sz="1500" i="0" b="0">
                 <a:solidFill>
                   <a:srgbClr val="D4D4D4"/>
                 </a:solidFill>
@@ -7148,7 +7148,7 @@
               <a:t> </a:t>
             </a:r>
             <a:r>
-              <a:rPr sz="1600" i="0" b="0">
+              <a:rPr sz="1500" i="0" b="0">
                 <a:solidFill>
                   <a:srgbClr val="D4D4D4"/>
                 </a:solidFill>
@@ -10587,7 +10587,7 @@
         <p:spPr>
           <a:xfrm>
             <a:off x="457200" y="1261872"/>
-            <a:ext cx="11277295" cy="5031343"/>
+            <a:ext cx="6991923" cy="4798799"/>
           </a:xfrm>
           <a:prstGeom prst="roundRect">
             <a:avLst>
@@ -10632,7 +10632,7 @@
         <p:spPr>
           <a:xfrm>
             <a:off x="457200" y="1261872"/>
-            <a:ext cx="11277295" cy="365760"/>
+            <a:ext cx="6991923" cy="365760"/>
           </a:xfrm>
           <a:prstGeom prst="rect">
             <a:avLst/>
@@ -10804,7 +10804,7 @@
         <p:spPr>
           <a:xfrm>
             <a:off x="1371600" y="1298448"/>
-            <a:ext cx="10180015" cy="292608"/>
+            <a:ext cx="5894643" cy="292608"/>
           </a:xfrm>
           <a:prstGeom prst="rect">
             <a:avLst/>
@@ -10837,7 +10837,7 @@
         <p:spPr>
           <a:xfrm>
             <a:off x="685800" y="1719072"/>
-            <a:ext cx="502920" cy="4436983"/>
+            <a:ext cx="502920" cy="4204439"/>
           </a:xfrm>
           <a:prstGeom prst="rect">
             <a:avLst/>
@@ -10852,11 +10852,11 @@
           <a:p>
             <a:pPr algn="r">
               <a:spcAft>
-                <a:spcPts val="342"/>
+                <a:spcPts val="321"/>
               </a:spcAft>
             </a:pPr>
             <a:r>
-              <a:rPr sz="1600" i="0" b="0">
+              <a:rPr sz="1500" i="0" b="0">
                 <a:solidFill>
                   <a:srgbClr val="858585"/>
                 </a:solidFill>
@@ -10868,11 +10868,11 @@
           <a:p>
             <a:pPr algn="r">
               <a:spcAft>
-                <a:spcPts val="342"/>
+                <a:spcPts val="321"/>
               </a:spcAft>
             </a:pPr>
             <a:r>
-              <a:rPr sz="1600" i="0" b="0">
+              <a:rPr sz="1500" i="0" b="0">
                 <a:solidFill>
                   <a:srgbClr val="858585"/>
                 </a:solidFill>
@@ -10884,11 +10884,11 @@
           <a:p>
             <a:pPr algn="r">
               <a:spcAft>
-                <a:spcPts val="342"/>
+                <a:spcPts val="321"/>
               </a:spcAft>
             </a:pPr>
             <a:r>
-              <a:rPr sz="1600" i="0" b="0">
+              <a:rPr sz="1500" i="0" b="0">
                 <a:solidFill>
                   <a:srgbClr val="858585"/>
                 </a:solidFill>
@@ -10900,11 +10900,11 @@
           <a:p>
             <a:pPr algn="r">
               <a:spcAft>
-                <a:spcPts val="342"/>
+                <a:spcPts val="321"/>
               </a:spcAft>
             </a:pPr>
             <a:r>
-              <a:rPr sz="1600" i="0" b="0">
+              <a:rPr sz="1500" i="0" b="0">
                 <a:solidFill>
                   <a:srgbClr val="858585"/>
                 </a:solidFill>
@@ -10916,11 +10916,11 @@
           <a:p>
             <a:pPr algn="r">
               <a:spcAft>
-                <a:spcPts val="342"/>
+                <a:spcPts val="321"/>
               </a:spcAft>
             </a:pPr>
             <a:r>
-              <a:rPr sz="1600" i="0" b="0">
+              <a:rPr sz="1500" i="0" b="0">
                 <a:solidFill>
                   <a:srgbClr val="858585"/>
                 </a:solidFill>
@@ -10932,11 +10932,11 @@
           <a:p>
             <a:pPr algn="r">
               <a:spcAft>
-                <a:spcPts val="342"/>
+                <a:spcPts val="321"/>
               </a:spcAft>
             </a:pPr>
             <a:r>
-              <a:rPr sz="1600" i="0" b="0">
+              <a:rPr sz="1500" i="0" b="0">
                 <a:solidFill>
                   <a:srgbClr val="858585"/>
                 </a:solidFill>
@@ -10948,11 +10948,11 @@
           <a:p>
             <a:pPr algn="r">
               <a:spcAft>
-                <a:spcPts val="342"/>
+                <a:spcPts val="321"/>
               </a:spcAft>
             </a:pPr>
             <a:r>
-              <a:rPr sz="1600" i="0" b="0">
+              <a:rPr sz="1500" i="0" b="0">
                 <a:solidFill>
                   <a:srgbClr val="858585"/>
                 </a:solidFill>
@@ -10964,11 +10964,11 @@
           <a:p>
             <a:pPr algn="r">
               <a:spcAft>
-                <a:spcPts val="342"/>
+                <a:spcPts val="321"/>
               </a:spcAft>
             </a:pPr>
             <a:r>
-              <a:rPr sz="1600" i="0" b="0">
+              <a:rPr sz="1500" i="0" b="0">
                 <a:solidFill>
                   <a:srgbClr val="858585"/>
                 </a:solidFill>
@@ -10980,11 +10980,11 @@
           <a:p>
             <a:pPr algn="r">
               <a:spcAft>
-                <a:spcPts val="342"/>
+                <a:spcPts val="321"/>
               </a:spcAft>
             </a:pPr>
             <a:r>
-              <a:rPr sz="1600" i="0" b="0">
+              <a:rPr sz="1500" i="0" b="0">
                 <a:solidFill>
                   <a:srgbClr val="858585"/>
                 </a:solidFill>
@@ -10996,11 +10996,11 @@
           <a:p>
             <a:pPr algn="r">
               <a:spcAft>
-                <a:spcPts val="342"/>
+                <a:spcPts val="321"/>
               </a:spcAft>
             </a:pPr>
             <a:r>
-              <a:rPr sz="1600" i="0" b="0">
+              <a:rPr sz="1500" i="0" b="0">
                 <a:solidFill>
                   <a:srgbClr val="858585"/>
                 </a:solidFill>
@@ -11012,11 +11012,11 @@
           <a:p>
             <a:pPr algn="r">
               <a:spcAft>
-                <a:spcPts val="342"/>
+                <a:spcPts val="321"/>
               </a:spcAft>
             </a:pPr>
             <a:r>
-              <a:rPr sz="1600" i="0" b="0">
+              <a:rPr sz="1500" i="0" b="0">
                 <a:solidFill>
                   <a:srgbClr val="858585"/>
                 </a:solidFill>
@@ -11028,11 +11028,11 @@
           <a:p>
             <a:pPr algn="r">
               <a:spcAft>
-                <a:spcPts val="342"/>
+                <a:spcPts val="321"/>
               </a:spcAft>
             </a:pPr>
             <a:r>
-              <a:rPr sz="1600" i="0" b="0">
+              <a:rPr sz="1500" i="0" b="0">
                 <a:solidFill>
                   <a:srgbClr val="858585"/>
                 </a:solidFill>
@@ -11044,11 +11044,11 @@
           <a:p>
             <a:pPr algn="r">
               <a:spcAft>
-                <a:spcPts val="342"/>
+                <a:spcPts val="321"/>
               </a:spcAft>
             </a:pPr>
             <a:r>
-              <a:rPr sz="1600" i="0" b="0">
+              <a:rPr sz="1500" i="0" b="0">
                 <a:solidFill>
                   <a:srgbClr val="858585"/>
                 </a:solidFill>
@@ -11060,11 +11060,11 @@
           <a:p>
             <a:pPr algn="r">
               <a:spcAft>
-                <a:spcPts val="342"/>
+                <a:spcPts val="321"/>
               </a:spcAft>
             </a:pPr>
             <a:r>
-              <a:rPr sz="1600" i="0" b="0">
+              <a:rPr sz="1500" i="0" b="0">
                 <a:solidFill>
                   <a:srgbClr val="858585"/>
                 </a:solidFill>
@@ -11076,11 +11076,11 @@
           <a:p>
             <a:pPr algn="r">
               <a:spcAft>
-                <a:spcPts val="342"/>
+                <a:spcPts val="321"/>
               </a:spcAft>
             </a:pPr>
             <a:r>
-              <a:rPr sz="1600" i="0" b="0">
+              <a:rPr sz="1500" i="0" b="0">
                 <a:solidFill>
                   <a:srgbClr val="858585"/>
                 </a:solidFill>
@@ -11100,7 +11100,7 @@
         <p:spPr>
           <a:xfrm>
             <a:off x="1188720" y="1719072"/>
-            <a:ext cx="10271455" cy="4436983"/>
+            <a:ext cx="5986083" cy="4204439"/>
           </a:xfrm>
           <a:prstGeom prst="rect">
             <a:avLst/>
@@ -11115,11 +11115,11 @@
           <a:p>
             <a:pPr>
               <a:spcAft>
-                <a:spcPts val="342"/>
+                <a:spcPts val="321"/>
               </a:spcAft>
             </a:pPr>
             <a:r>
-              <a:rPr sz="1600" i="0" b="0">
+              <a:rPr sz="1500" i="0" b="0">
                 <a:solidFill>
                   <a:srgbClr val="D4D4D4"/>
                 </a:solidFill>
@@ -11131,11 +11131,11 @@
           <a:p>
             <a:pPr>
               <a:spcAft>
-                <a:spcPts val="342"/>
+                <a:spcPts val="321"/>
               </a:spcAft>
             </a:pPr>
             <a:r>
-              <a:rPr sz="1600" i="0" b="0">
+              <a:rPr sz="1500" i="0" b="0">
                 <a:solidFill>
                   <a:srgbClr val="D4D4D4"/>
                 </a:solidFill>
@@ -11144,7 +11144,7 @@
               <a:t>  </a:t>
             </a:r>
             <a:r>
-              <a:rPr sz="1600" i="0" b="0">
+              <a:rPr sz="1500" i="0" b="0">
                 <a:solidFill>
                   <a:srgbClr val="D4D4D4"/>
                 </a:solidFill>
@@ -11153,7 +11153,7 @@
               <a:t>title</a:t>
             </a:r>
             <a:r>
-              <a:rPr sz="1600" i="0" b="0">
+              <a:rPr sz="1500" i="0" b="0">
                 <a:solidFill>
                   <a:srgbClr val="D4D4D4"/>
                 </a:solidFill>
@@ -11162,7 +11162,7 @@
               <a:t> </a:t>
             </a:r>
             <a:r>
-              <a:rPr sz="1600" i="0" b="0">
+              <a:rPr sz="1500" i="0" b="0">
                 <a:solidFill>
                   <a:srgbClr val="D4D4D4"/>
                 </a:solidFill>
@@ -11171,7 +11171,7 @@
               <a:t>Tres</a:t>
             </a:r>
             <a:r>
-              <a:rPr sz="1600" i="0" b="0">
+              <a:rPr sz="1500" i="0" b="0">
                 <a:solidFill>
                   <a:srgbClr val="D4D4D4"/>
                 </a:solidFill>
@@ -11180,7 +11180,7 @@
               <a:t> </a:t>
             </a:r>
             <a:r>
-              <a:rPr sz="1600" i="0" b="0">
+              <a:rPr sz="1500" i="0" b="0">
                 <a:solidFill>
                   <a:srgbClr val="D4D4D4"/>
                 </a:solidFill>
@@ -11189,7 +11189,7 @@
               <a:t>sprints</a:t>
             </a:r>
             <a:r>
-              <a:rPr sz="1600" i="0" b="0">
+              <a:rPr sz="1500" i="0" b="0">
                 <a:solidFill>
                   <a:srgbClr val="D4D4D4"/>
                 </a:solidFill>
@@ -11198,7 +11198,7 @@
               <a:t> </a:t>
             </a:r>
             <a:r>
-              <a:rPr sz="1600" i="0" b="0">
+              <a:rPr sz="1500" i="0" b="0">
                 <a:solidFill>
                   <a:srgbClr val="D4D4D4"/>
                 </a:solidFill>
@@ -11207,7 +11207,7 @@
               <a:t>de</a:t>
             </a:r>
             <a:r>
-              <a:rPr sz="1600" i="0" b="0">
+              <a:rPr sz="1500" i="0" b="0">
                 <a:solidFill>
                   <a:srgbClr val="D4D4D4"/>
                 </a:solidFill>
@@ -11216,7 +11216,7 @@
               <a:t> </a:t>
             </a:r>
             <a:r>
-              <a:rPr sz="1600" i="0" b="0">
+              <a:rPr sz="1500" i="0" b="0">
                 <a:solidFill>
                   <a:srgbClr val="D4D4D4"/>
                 </a:solidFill>
@@ -11225,7 +11225,7 @@
               <a:t>diseno</a:t>
             </a:r>
             <a:r>
-              <a:rPr sz="1600" i="0" b="0">
+              <a:rPr sz="1500" i="0" b="0">
                 <a:solidFill>
                   <a:srgbClr val="D4D4D4"/>
                 </a:solidFill>
@@ -11234,7 +11234,7 @@
               <a:t> </a:t>
             </a:r>
             <a:r>
-              <a:rPr sz="1600" i="0" b="0">
+              <a:rPr sz="1500" i="0" b="0">
                 <a:solidFill>
                   <a:srgbClr val="D4D4D4"/>
                 </a:solidFill>
@@ -11243,7 +11243,7 @@
               <a:t>de</a:t>
             </a:r>
             <a:r>
-              <a:rPr sz="1600" i="0" b="0">
+              <a:rPr sz="1500" i="0" b="0">
                 <a:solidFill>
                   <a:srgbClr val="D4D4D4"/>
                 </a:solidFill>
@@ -11252,7 +11252,7 @@
               <a:t> </a:t>
             </a:r>
             <a:r>
-              <a:rPr sz="1600" i="0" b="0">
+              <a:rPr sz="1500" i="0" b="0">
                 <a:solidFill>
                   <a:srgbClr val="D4D4D4"/>
                 </a:solidFill>
@@ -11261,7 +11261,7 @@
               <a:t>la</a:t>
             </a:r>
             <a:r>
-              <a:rPr sz="1600" i="0" b="0">
+              <a:rPr sz="1500" i="0" b="0">
                 <a:solidFill>
                   <a:srgbClr val="D4D4D4"/>
                 </a:solidFill>
@@ -11270,7 +11270,7 @@
               <a:t> </a:t>
             </a:r>
             <a:r>
-              <a:rPr sz="1600" i="0" b="0">
+              <a:rPr sz="1500" i="0" b="0">
                 <a:solidFill>
                   <a:srgbClr val="D4D4D4"/>
                 </a:solidFill>
@@ -11282,11 +11282,11 @@
           <a:p>
             <a:pPr>
               <a:spcAft>
-                <a:spcPts val="342"/>
+                <a:spcPts val="321"/>
               </a:spcAft>
             </a:pPr>
             <a:r>
-              <a:rPr sz="1600" i="0" b="0">
+              <a:rPr sz="1500" i="0" b="0">
                 <a:solidFill>
                   <a:srgbClr val="D4D4D4"/>
                 </a:solidFill>
@@ -11295,7 +11295,7 @@
               <a:t>  </a:t>
             </a:r>
             <a:r>
-              <a:rPr sz="1600" i="0" b="0">
+              <a:rPr sz="1500" i="0" b="0">
                 <a:solidFill>
                   <a:srgbClr val="D4D4D4"/>
                 </a:solidFill>
@@ -11304,7 +11304,7 @@
               <a:t>dateFormat</a:t>
             </a:r>
             <a:r>
-              <a:rPr sz="1600" i="0" b="0">
+              <a:rPr sz="1500" i="0" b="0">
                 <a:solidFill>
                   <a:srgbClr val="D4D4D4"/>
                 </a:solidFill>
@@ -11313,7 +11313,7 @@
               <a:t> </a:t>
             </a:r>
             <a:r>
-              <a:rPr sz="1600" i="0" b="0">
+              <a:rPr sz="1500" i="0" b="0">
                 <a:solidFill>
                   <a:srgbClr val="D4D4D4"/>
                 </a:solidFill>
@@ -11322,7 +11322,7 @@
               <a:t>YYYY</a:t>
             </a:r>
             <a:r>
-              <a:rPr sz="1600" i="0" b="0">
+              <a:rPr sz="1500" i="0" b="0">
                 <a:solidFill>
                   <a:srgbClr val="D4D4D4"/>
                 </a:solidFill>
@@ -11331,7 +11331,7 @@
               <a:t>-</a:t>
             </a:r>
             <a:r>
-              <a:rPr sz="1600" i="0" b="0">
+              <a:rPr sz="1500" i="0" b="0">
                 <a:solidFill>
                   <a:srgbClr val="D4D4D4"/>
                 </a:solidFill>
@@ -11340,7 +11340,7 @@
               <a:t>MM</a:t>
             </a:r>
             <a:r>
-              <a:rPr sz="1600" i="0" b="0">
+              <a:rPr sz="1500" i="0" b="0">
                 <a:solidFill>
                   <a:srgbClr val="D4D4D4"/>
                 </a:solidFill>
@@ -11349,7 +11349,7 @@
               <a:t>-</a:t>
             </a:r>
             <a:r>
-              <a:rPr sz="1600" i="0" b="0">
+              <a:rPr sz="1500" i="0" b="0">
                 <a:solidFill>
                   <a:srgbClr val="D4D4D4"/>
                 </a:solidFill>
@@ -11361,11 +11361,11 @@
           <a:p>
             <a:pPr>
               <a:spcAft>
-                <a:spcPts val="342"/>
+                <a:spcPts val="321"/>
               </a:spcAft>
             </a:pPr>
             <a:r>
-              <a:rPr sz="1600" i="0" b="0">
+              <a:rPr sz="1500" i="0" b="0">
                 <a:solidFill>
                   <a:srgbClr val="D4D4D4"/>
                 </a:solidFill>
@@ -11374,7 +11374,7 @@
               <a:t>  </a:t>
             </a:r>
             <a:r>
-              <a:rPr sz="1600" i="0" b="0">
+              <a:rPr sz="1500" i="0" b="0">
                 <a:solidFill>
                   <a:srgbClr val="D4D4D4"/>
                 </a:solidFill>
@@ -11383,7 +11383,7 @@
               <a:t>axisFormat</a:t>
             </a:r>
             <a:r>
-              <a:rPr sz="1600" i="0" b="0">
+              <a:rPr sz="1500" i="0" b="0">
                 <a:solidFill>
                   <a:srgbClr val="D4D4D4"/>
                 </a:solidFill>
@@ -11392,7 +11392,7 @@
               <a:t> %</a:t>
             </a:r>
             <a:r>
-              <a:rPr sz="1600" i="0" b="0">
+              <a:rPr sz="1500" i="0" b="0">
                 <a:solidFill>
                   <a:srgbClr val="D4D4D4"/>
                 </a:solidFill>
@@ -11401,7 +11401,7 @@
               <a:t>d</a:t>
             </a:r>
             <a:r>
-              <a:rPr sz="1600" i="0" b="0">
+              <a:rPr sz="1500" i="0" b="0">
                 <a:solidFill>
                   <a:srgbClr val="D4D4D4"/>
                 </a:solidFill>
@@ -11410,7 +11410,7 @@
               <a:t>/%</a:t>
             </a:r>
             <a:r>
-              <a:rPr sz="1600" i="0" b="0">
+              <a:rPr sz="1500" i="0" b="0">
                 <a:solidFill>
                   <a:srgbClr val="D4D4D4"/>
                 </a:solidFill>
@@ -11422,11 +11422,11 @@
           <a:p>
             <a:pPr>
               <a:spcAft>
-                <a:spcPts val="342"/>
+                <a:spcPts val="321"/>
               </a:spcAft>
             </a:pPr>
             <a:r>
-              <a:rPr sz="1600" i="0" b="0">
+              <a:rPr sz="1500" i="0" b="0">
                 <a:solidFill>
                   <a:srgbClr val="D4D4D4"/>
                 </a:solidFill>
@@ -11438,11 +11438,11 @@
           <a:p>
             <a:pPr>
               <a:spcAft>
-                <a:spcPts val="342"/>
+                <a:spcPts val="321"/>
               </a:spcAft>
             </a:pPr>
             <a:r>
-              <a:rPr sz="1600" i="0" b="0">
+              <a:rPr sz="1500" i="0" b="0">
                 <a:solidFill>
                   <a:srgbClr val="D4D4D4"/>
                 </a:solidFill>
@@ -11451,7 +11451,7 @@
               <a:t>  </a:t>
             </a:r>
             <a:r>
-              <a:rPr sz="1600" i="0" b="0">
+              <a:rPr sz="1500" i="0" b="0">
                 <a:solidFill>
                   <a:srgbClr val="D4D4D4"/>
                 </a:solidFill>
@@ -11460,7 +11460,7 @@
               <a:t>section</a:t>
             </a:r>
             <a:r>
-              <a:rPr sz="1600" i="0" b="0">
+              <a:rPr sz="1500" i="0" b="0">
                 <a:solidFill>
                   <a:srgbClr val="D4D4D4"/>
                 </a:solidFill>
@@ -11469,7 +11469,7 @@
               <a:t> </a:t>
             </a:r>
             <a:r>
-              <a:rPr sz="1600" i="0" b="0">
+              <a:rPr sz="1500" i="0" b="0">
                 <a:solidFill>
                   <a:srgbClr val="D4D4D4"/>
                 </a:solidFill>
@@ -11478,7 +11478,7 @@
               <a:t>Sprint</a:t>
             </a:r>
             <a:r>
-              <a:rPr sz="1600" i="0" b="0">
+              <a:rPr sz="1500" i="0" b="0">
                 <a:solidFill>
                   <a:srgbClr val="D4D4D4"/>
                 </a:solidFill>
@@ -11487,7 +11487,7 @@
               <a:t> </a:t>
             </a:r>
             <a:r>
-              <a:rPr sz="1600" i="0" b="0">
+              <a:rPr sz="1500" i="0" b="0">
                 <a:solidFill>
                   <a:srgbClr val="B5CEA8"/>
                 </a:solidFill>
@@ -11499,11 +11499,11 @@
           <a:p>
             <a:pPr>
               <a:spcAft>
-                <a:spcPts val="342"/>
+                <a:spcPts val="321"/>
               </a:spcAft>
             </a:pPr>
             <a:r>
-              <a:rPr sz="1600" i="0" b="0">
+              <a:rPr sz="1500" i="0" b="0">
                 <a:solidFill>
                   <a:srgbClr val="D4D4D4"/>
                 </a:solidFill>
@@ -11512,7 +11512,7 @@
               <a:t>  </a:t>
             </a:r>
             <a:r>
-              <a:rPr sz="1600" i="0" b="0">
+              <a:rPr sz="1500" i="0" b="0">
                 <a:solidFill>
                   <a:srgbClr val="D4D4D4"/>
                 </a:solidFill>
@@ -11521,7 +11521,7 @@
               <a:t>Modelo</a:t>
             </a:r>
             <a:r>
-              <a:rPr sz="1600" i="0" b="0">
+              <a:rPr sz="1500" i="0" b="0">
                 <a:solidFill>
                   <a:srgbClr val="D4D4D4"/>
                 </a:solidFill>
@@ -11530,7 +11530,7 @@
               <a:t> </a:t>
             </a:r>
             <a:r>
-              <a:rPr sz="1600" i="0" b="0">
+              <a:rPr sz="1500" i="0" b="0">
                 <a:solidFill>
                   <a:srgbClr val="D4D4D4"/>
                 </a:solidFill>
@@ -11539,7 +11539,7 @@
               <a:t>de</a:t>
             </a:r>
             <a:r>
-              <a:rPr sz="1600" i="0" b="0">
+              <a:rPr sz="1500" i="0" b="0">
                 <a:solidFill>
                   <a:srgbClr val="D4D4D4"/>
                 </a:solidFill>
@@ -11548,7 +11548,7 @@
               <a:t> </a:t>
             </a:r>
             <a:r>
-              <a:rPr sz="1600" i="0" b="0">
+              <a:rPr sz="1500" i="0" b="0">
                 <a:solidFill>
                   <a:srgbClr val="D4D4D4"/>
                 </a:solidFill>
@@ -11557,7 +11557,7 @@
               <a:t>dominio</a:t>
             </a:r>
             <a:r>
-              <a:rPr sz="1600" i="0" b="0">
+              <a:rPr sz="1500" i="0" b="0">
                 <a:solidFill>
                   <a:srgbClr val="D4D4D4"/>
                 </a:solidFill>
@@ -11566,7 +11566,7 @@
               <a:t>      :</a:t>
             </a:r>
             <a:r>
-              <a:rPr sz="1600" i="0" b="0">
+              <a:rPr sz="1500" i="0" b="0">
                 <a:solidFill>
                   <a:srgbClr val="D4D4D4"/>
                 </a:solidFill>
@@ -11575,7 +11575,7 @@
               <a:t>s1a</a:t>
             </a:r>
             <a:r>
-              <a:rPr sz="1600" i="0" b="0">
+              <a:rPr sz="1500" i="0" b="0">
                 <a:solidFill>
                   <a:srgbClr val="D4D4D4"/>
                 </a:solidFill>
@@ -11584,7 +11584,7 @@
               <a:t>, </a:t>
             </a:r>
             <a:r>
-              <a:rPr sz="1600" i="0" b="0">
+              <a:rPr sz="1500" i="0" b="0">
                 <a:solidFill>
                   <a:srgbClr val="B5CEA8"/>
                 </a:solidFill>
@@ -11593,7 +11593,7 @@
               <a:t>2026</a:t>
             </a:r>
             <a:r>
-              <a:rPr sz="1600" i="0" b="0">
+              <a:rPr sz="1500" i="0" b="0">
                 <a:solidFill>
                   <a:srgbClr val="D4D4D4"/>
                 </a:solidFill>
@@ -11602,7 +11602,7 @@
               <a:t>-</a:t>
             </a:r>
             <a:r>
-              <a:rPr sz="1600" i="0" b="0">
+              <a:rPr sz="1500" i="0" b="0">
                 <a:solidFill>
                   <a:srgbClr val="B5CEA8"/>
                 </a:solidFill>
@@ -11611,7 +11611,7 @@
               <a:t>09</a:t>
             </a:r>
             <a:r>
-              <a:rPr sz="1600" i="0" b="0">
+              <a:rPr sz="1500" i="0" b="0">
                 <a:solidFill>
                   <a:srgbClr val="D4D4D4"/>
                 </a:solidFill>
@@ -11620,7 +11620,7 @@
               <a:t>-</a:t>
             </a:r>
             <a:r>
-              <a:rPr sz="1600" i="0" b="0">
+              <a:rPr sz="1500" i="0" b="0">
                 <a:solidFill>
                   <a:srgbClr val="B5CEA8"/>
                 </a:solidFill>
@@ -11629,7 +11629,7 @@
               <a:t>01</a:t>
             </a:r>
             <a:r>
-              <a:rPr sz="1600" i="0" b="0">
+              <a:rPr sz="1500" i="0" b="0">
                 <a:solidFill>
                   <a:srgbClr val="D4D4D4"/>
                 </a:solidFill>
@@ -11638,7 +11638,7 @@
               <a:t>, 7</a:t>
             </a:r>
             <a:r>
-              <a:rPr sz="1600" i="0" b="0">
+              <a:rPr sz="1500" i="0" b="0">
                 <a:solidFill>
                   <a:srgbClr val="D4D4D4"/>
                 </a:solidFill>
@@ -11650,11 +11650,11 @@
           <a:p>
             <a:pPr>
               <a:spcAft>
-                <a:spcPts val="342"/>
+                <a:spcPts val="321"/>
               </a:spcAft>
             </a:pPr>
             <a:r>
-              <a:rPr sz="1600" i="0" b="0">
+              <a:rPr sz="1500" i="0" b="0">
                 <a:solidFill>
                   <a:srgbClr val="D4D4D4"/>
                 </a:solidFill>
@@ -11663,7 +11663,7 @@
               <a:t>  </a:t>
             </a:r>
             <a:r>
-              <a:rPr sz="1600" i="0" b="0">
+              <a:rPr sz="1500" i="0" b="0">
                 <a:solidFill>
                   <a:srgbClr val="D4D4D4"/>
                 </a:solidFill>
@@ -11672,7 +11672,7 @@
               <a:t>Casos</a:t>
             </a:r>
             <a:r>
-              <a:rPr sz="1600" i="0" b="0">
+              <a:rPr sz="1500" i="0" b="0">
                 <a:solidFill>
                   <a:srgbClr val="D4D4D4"/>
                 </a:solidFill>
@@ -11681,7 +11681,7 @@
               <a:t> </a:t>
             </a:r>
             <a:r>
-              <a:rPr sz="1600" i="0" b="0">
+              <a:rPr sz="1500" i="0" b="0">
                 <a:solidFill>
                   <a:srgbClr val="D4D4D4"/>
                 </a:solidFill>
@@ -11690,7 +11690,7 @@
               <a:t>de</a:t>
             </a:r>
             <a:r>
-              <a:rPr sz="1600" i="0" b="0">
+              <a:rPr sz="1500" i="0" b="0">
                 <a:solidFill>
                   <a:srgbClr val="D4D4D4"/>
                 </a:solidFill>
@@ -11699,7 +11699,7 @@
               <a:t> </a:t>
             </a:r>
             <a:r>
-              <a:rPr sz="1600" i="0" b="0">
+              <a:rPr sz="1500" i="0" b="0">
                 <a:solidFill>
                   <a:srgbClr val="D4D4D4"/>
                 </a:solidFill>
@@ -11708,7 +11708,7 @@
               <a:t>uso</a:t>
             </a:r>
             <a:r>
-              <a:rPr sz="1600" i="0" b="0">
+              <a:rPr sz="1500" i="0" b="0">
                 <a:solidFill>
                   <a:srgbClr val="D4D4D4"/>
                 </a:solidFill>
@@ -11717,7 +11717,7 @@
               <a:t> </a:t>
             </a:r>
             <a:r>
-              <a:rPr sz="1600" i="0" b="0">
+              <a:rPr sz="1500" i="0" b="0">
                 <a:solidFill>
                   <a:srgbClr val="D4D4D4"/>
                 </a:solidFill>
@@ -11726,7 +11726,7 @@
               <a:t>nucleo</a:t>
             </a:r>
             <a:r>
-              <a:rPr sz="1600" i="0" b="0">
+              <a:rPr sz="1500" i="0" b="0">
                 <a:solidFill>
                   <a:srgbClr val="D4D4D4"/>
                 </a:solidFill>
@@ -11735,7 +11735,7 @@
               <a:t>    :</a:t>
             </a:r>
             <a:r>
-              <a:rPr sz="1600" i="0" b="0">
+              <a:rPr sz="1500" i="0" b="0">
                 <a:solidFill>
                   <a:srgbClr val="D4D4D4"/>
                 </a:solidFill>
@@ -11744,7 +11744,7 @@
               <a:t>s1b</a:t>
             </a:r>
             <a:r>
-              <a:rPr sz="1600" i="0" b="0">
+              <a:rPr sz="1500" i="0" b="0">
                 <a:solidFill>
                   <a:srgbClr val="D4D4D4"/>
                 </a:solidFill>
@@ -11753,7 +11753,7 @@
               <a:t>, </a:t>
             </a:r>
             <a:r>
-              <a:rPr sz="1600" i="0" b="0">
+              <a:rPr sz="1500" i="0" b="0">
                 <a:solidFill>
                   <a:srgbClr val="D4D4D4"/>
                 </a:solidFill>
@@ -11762,7 +11762,7 @@
               <a:t>after</a:t>
             </a:r>
             <a:r>
-              <a:rPr sz="1600" i="0" b="0">
+              <a:rPr sz="1500" i="0" b="0">
                 <a:solidFill>
                   <a:srgbClr val="D4D4D4"/>
                 </a:solidFill>
@@ -11771,7 +11771,7 @@
               <a:t> </a:t>
             </a:r>
             <a:r>
-              <a:rPr sz="1600" i="0" b="0">
+              <a:rPr sz="1500" i="0" b="0">
                 <a:solidFill>
                   <a:srgbClr val="D4D4D4"/>
                 </a:solidFill>
@@ -11780,7 +11780,7 @@
               <a:t>s1a</a:t>
             </a:r>
             <a:r>
-              <a:rPr sz="1600" i="0" b="0">
+              <a:rPr sz="1500" i="0" b="0">
                 <a:solidFill>
                   <a:srgbClr val="D4D4D4"/>
                 </a:solidFill>
@@ -11789,7 +11789,7 @@
               <a:t>, 7</a:t>
             </a:r>
             <a:r>
-              <a:rPr sz="1600" i="0" b="0">
+              <a:rPr sz="1500" i="0" b="0">
                 <a:solidFill>
                   <a:srgbClr val="D4D4D4"/>
                 </a:solidFill>
@@ -11801,11 +11801,11 @@
           <a:p>
             <a:pPr>
               <a:spcAft>
-                <a:spcPts val="342"/>
+                <a:spcPts val="321"/>
               </a:spcAft>
             </a:pPr>
             <a:r>
-              <a:rPr sz="1600" i="0" b="0">
+              <a:rPr sz="1500" i="0" b="0">
                 <a:solidFill>
                   <a:srgbClr val="D4D4D4"/>
                 </a:solidFill>
@@ -11817,11 +11817,11 @@
           <a:p>
             <a:pPr>
               <a:spcAft>
-                <a:spcPts val="342"/>
+                <a:spcPts val="321"/>
               </a:spcAft>
             </a:pPr>
             <a:r>
-              <a:rPr sz="1600" i="0" b="0">
+              <a:rPr sz="1500" i="0" b="0">
                 <a:solidFill>
                   <a:srgbClr val="D4D4D4"/>
                 </a:solidFill>
@@ -11830,7 +11830,7 @@
               <a:t>  </a:t>
             </a:r>
             <a:r>
-              <a:rPr sz="1600" i="0" b="0">
+              <a:rPr sz="1500" i="0" b="0">
                 <a:solidFill>
                   <a:srgbClr val="D4D4D4"/>
                 </a:solidFill>
@@ -11839,7 +11839,7 @@
               <a:t>section</a:t>
             </a:r>
             <a:r>
-              <a:rPr sz="1600" i="0" b="0">
+              <a:rPr sz="1500" i="0" b="0">
                 <a:solidFill>
                   <a:srgbClr val="D4D4D4"/>
                 </a:solidFill>
@@ -11848,7 +11848,7 @@
               <a:t> </a:t>
             </a:r>
             <a:r>
-              <a:rPr sz="1600" i="0" b="0">
+              <a:rPr sz="1500" i="0" b="0">
                 <a:solidFill>
                   <a:srgbClr val="D4D4D4"/>
                 </a:solidFill>
@@ -11857,7 +11857,7 @@
               <a:t>Sprint</a:t>
             </a:r>
             <a:r>
-              <a:rPr sz="1600" i="0" b="0">
+              <a:rPr sz="1500" i="0" b="0">
                 <a:solidFill>
                   <a:srgbClr val="D4D4D4"/>
                 </a:solidFill>
@@ -11866,7 +11866,7 @@
               <a:t> </a:t>
             </a:r>
             <a:r>
-              <a:rPr sz="1600" i="0" b="0">
+              <a:rPr sz="1500" i="0" b="0">
                 <a:solidFill>
                   <a:srgbClr val="B5CEA8"/>
                 </a:solidFill>
@@ -11878,11 +11878,11 @@
           <a:p>
             <a:pPr>
               <a:spcAft>
-                <a:spcPts val="342"/>
+                <a:spcPts val="321"/>
               </a:spcAft>
             </a:pPr>
             <a:r>
-              <a:rPr sz="1600" i="0" b="0">
+              <a:rPr sz="1500" i="0" b="0">
                 <a:solidFill>
                   <a:srgbClr val="D4D4D4"/>
                 </a:solidFill>
@@ -11891,7 +11891,7 @@
               <a:t>  </a:t>
             </a:r>
             <a:r>
-              <a:rPr sz="1600" i="0" b="0">
+              <a:rPr sz="1500" i="0" b="0">
                 <a:solidFill>
                   <a:srgbClr val="D4D4D4"/>
                 </a:solidFill>
@@ -11900,7 +11900,7 @@
               <a:t>Secuencia</a:t>
             </a:r>
             <a:r>
-              <a:rPr sz="1600" i="0" b="0">
+              <a:rPr sz="1500" i="0" b="0">
                 <a:solidFill>
                   <a:srgbClr val="D4D4D4"/>
                 </a:solidFill>
@@ -11909,7 +11909,7 @@
               <a:t> </a:t>
             </a:r>
             <a:r>
-              <a:rPr sz="1600" i="0" b="0">
+              <a:rPr sz="1500" i="0" b="0">
                 <a:solidFill>
                   <a:srgbClr val="D4D4D4"/>
                 </a:solidFill>
@@ -11918,7 +11918,7 @@
               <a:t>de</a:t>
             </a:r>
             <a:r>
-              <a:rPr sz="1600" i="0" b="0">
+              <a:rPr sz="1500" i="0" b="0">
                 <a:solidFill>
                   <a:srgbClr val="D4D4D4"/>
                 </a:solidFill>
@@ -11927,7 +11927,7 @@
               <a:t> </a:t>
             </a:r>
             <a:r>
-              <a:rPr sz="1600" i="0" b="0">
+              <a:rPr sz="1500" i="0" b="0">
                 <a:solidFill>
                   <a:srgbClr val="D4D4D4"/>
                 </a:solidFill>
@@ -11936,7 +11936,7 @@
               <a:t>agendar</a:t>
             </a:r>
             <a:r>
-              <a:rPr sz="1600" i="0" b="0">
+              <a:rPr sz="1500" i="0" b="0">
                 <a:solidFill>
                   <a:srgbClr val="D4D4D4"/>
                 </a:solidFill>
@@ -11945,7 +11945,7 @@
               <a:t>   :</a:t>
             </a:r>
             <a:r>
-              <a:rPr sz="1600" i="0" b="0">
+              <a:rPr sz="1500" i="0" b="0">
                 <a:solidFill>
                   <a:srgbClr val="D4D4D4"/>
                 </a:solidFill>
@@ -11954,7 +11954,7 @@
               <a:t>s2a</a:t>
             </a:r>
             <a:r>
-              <a:rPr sz="1600" i="0" b="0">
+              <a:rPr sz="1500" i="0" b="0">
                 <a:solidFill>
                   <a:srgbClr val="D4D4D4"/>
                 </a:solidFill>
@@ -11963,7 +11963,7 @@
               <a:t>, </a:t>
             </a:r>
             <a:r>
-              <a:rPr sz="1600" i="0" b="0">
+              <a:rPr sz="1500" i="0" b="0">
                 <a:solidFill>
                   <a:srgbClr val="D4D4D4"/>
                 </a:solidFill>
@@ -11972,7 +11972,7 @@
               <a:t>after</a:t>
             </a:r>
             <a:r>
-              <a:rPr sz="1600" i="0" b="0">
+              <a:rPr sz="1500" i="0" b="0">
                 <a:solidFill>
                   <a:srgbClr val="D4D4D4"/>
                 </a:solidFill>
@@ -11981,7 +11981,7 @@
               <a:t> </a:t>
             </a:r>
             <a:r>
-              <a:rPr sz="1600" i="0" b="0">
+              <a:rPr sz="1500" i="0" b="0">
                 <a:solidFill>
                   <a:srgbClr val="D4D4D4"/>
                 </a:solidFill>
@@ -11990,7 +11990,7 @@
               <a:t>s1b</a:t>
             </a:r>
             <a:r>
-              <a:rPr sz="1600" i="0" b="0">
+              <a:rPr sz="1500" i="0" b="0">
                 <a:solidFill>
                   <a:srgbClr val="D4D4D4"/>
                 </a:solidFill>
@@ -11999,7 +11999,7 @@
               <a:t>, 7</a:t>
             </a:r>
             <a:r>
-              <a:rPr sz="1600" i="0" b="0">
+              <a:rPr sz="1500" i="0" b="0">
                 <a:solidFill>
                   <a:srgbClr val="D4D4D4"/>
                 </a:solidFill>
@@ -12011,11 +12011,11 @@
           <a:p>
             <a:pPr>
               <a:spcAft>
-                <a:spcPts val="342"/>
+                <a:spcPts val="321"/>
               </a:spcAft>
             </a:pPr>
             <a:r>
-              <a:rPr sz="1600" i="0" b="0">
+              <a:rPr sz="1500" i="0" b="0">
                 <a:solidFill>
                   <a:srgbClr val="D4D4D4"/>
                 </a:solidFill>
@@ -12024,7 +12024,7 @@
               <a:t>  </a:t>
             </a:r>
             <a:r>
-              <a:rPr sz="1600" i="0" b="0">
+              <a:rPr sz="1500" i="0" b="0">
                 <a:solidFill>
                   <a:srgbClr val="D4D4D4"/>
                 </a:solidFill>
@@ -12033,7 +12033,7 @@
               <a:t>Wireframes</a:t>
             </a:r>
             <a:r>
-              <a:rPr sz="1600" i="0" b="0">
+              <a:rPr sz="1500" i="0" b="0">
                 <a:solidFill>
                   <a:srgbClr val="D4D4D4"/>
                 </a:solidFill>
@@ -12042,7 +12042,7 @@
               <a:t> </a:t>
             </a:r>
             <a:r>
-              <a:rPr sz="1600" i="0" b="0">
+              <a:rPr sz="1500" i="0" b="0">
                 <a:solidFill>
                   <a:srgbClr val="D4D4D4"/>
                 </a:solidFill>
@@ -12051,7 +12051,7 @@
               <a:t>principales</a:t>
             </a:r>
             <a:r>
-              <a:rPr sz="1600" i="0" b="0">
+              <a:rPr sz="1500" i="0" b="0">
                 <a:solidFill>
                   <a:srgbClr val="D4D4D4"/>
                 </a:solidFill>
@@ -12060,7 +12060,7 @@
               <a:t> :</a:t>
             </a:r>
             <a:r>
-              <a:rPr sz="1600" i="0" b="0">
+              <a:rPr sz="1500" i="0" b="0">
                 <a:solidFill>
                   <a:srgbClr val="D4D4D4"/>
                 </a:solidFill>
@@ -12069,7 +12069,7 @@
               <a:t>s2b</a:t>
             </a:r>
             <a:r>
-              <a:rPr sz="1600" i="0" b="0">
+              <a:rPr sz="1500" i="0" b="0">
                 <a:solidFill>
                   <a:srgbClr val="D4D4D4"/>
                 </a:solidFill>
@@ -12078,7 +12078,7 @@
               <a:t>, </a:t>
             </a:r>
             <a:r>
-              <a:rPr sz="1600" i="0" b="0">
+              <a:rPr sz="1500" i="0" b="0">
                 <a:solidFill>
                   <a:srgbClr val="D4D4D4"/>
                 </a:solidFill>
@@ -12087,7 +12087,7 @@
               <a:t>after</a:t>
             </a:r>
             <a:r>
-              <a:rPr sz="1600" i="0" b="0">
+              <a:rPr sz="1500" i="0" b="0">
                 <a:solidFill>
                   <a:srgbClr val="D4D4D4"/>
                 </a:solidFill>
@@ -12096,7 +12096,7 @@
               <a:t> </a:t>
             </a:r>
             <a:r>
-              <a:rPr sz="1600" i="0" b="0">
+              <a:rPr sz="1500" i="0" b="0">
                 <a:solidFill>
                   <a:srgbClr val="D4D4D4"/>
                 </a:solidFill>
@@ -12105,7 +12105,7 @@
               <a:t>s2a</a:t>
             </a:r>
             <a:r>
-              <a:rPr sz="1600" i="0" b="0">
+              <a:rPr sz="1500" i="0" b="0">
                 <a:solidFill>
                   <a:srgbClr val="D4D4D4"/>
                 </a:solidFill>
@@ -12114,7 +12114,7 @@
               <a:t>, 7</a:t>
             </a:r>
             <a:r>
-              <a:rPr sz="1600" i="0" b="0">
+              <a:rPr sz="1500" i="0" b="0">
                 <a:solidFill>
                   <a:srgbClr val="D4D4D4"/>
                 </a:solidFill>
@@ -12126,11 +12126,11 @@
           <a:p>
             <a:pPr>
               <a:spcAft>
-                <a:spcPts val="342"/>
+                <a:spcPts val="321"/>
               </a:spcAft>
             </a:pPr>
             <a:r>
-              <a:rPr sz="1600" i="0" b="0">
+              <a:rPr sz="1500" i="0" b="0">
                 <a:solidFill>
                   <a:srgbClr val="D4D4D4"/>
                 </a:solidFill>
@@ -12142,11 +12142,11 @@
           <a:p>
             <a:pPr>
               <a:spcAft>
-                <a:spcPts val="342"/>
+                <a:spcPts val="321"/>
               </a:spcAft>
             </a:pPr>
             <a:r>
-              <a:rPr sz="1600" i="0" b="0">
+              <a:rPr sz="1500" i="0" b="0">
                 <a:solidFill>
                   <a:srgbClr val="D4D4D4"/>
                 </a:solidFill>
@@ -12155,7 +12155,7 @@
               <a:t>  </a:t>
             </a:r>
             <a:r>
-              <a:rPr sz="1600" i="0" b="0">
+              <a:rPr sz="1500" i="0" b="0">
                 <a:solidFill>
                   <a:srgbClr val="D4D4D4"/>
                 </a:solidFill>
@@ -12164,7 +12164,7 @@
               <a:t>section</a:t>
             </a:r>
             <a:r>
-              <a:rPr sz="1600" i="0" b="0">
+              <a:rPr sz="1500" i="0" b="0">
                 <a:solidFill>
                   <a:srgbClr val="D4D4D4"/>
                 </a:solidFill>
@@ -12173,7 +12173,7 @@
               <a:t> </a:t>
             </a:r>
             <a:r>
-              <a:rPr sz="1600" i="0" b="0">
+              <a:rPr sz="1500" i="0" b="0">
                 <a:solidFill>
                   <a:srgbClr val="D4D4D4"/>
                 </a:solidFill>
@@ -12182,7 +12182,7 @@
               <a:t>Sprint</a:t>
             </a:r>
             <a:r>
-              <a:rPr sz="1600" i="0" b="0">
+              <a:rPr sz="1500" i="0" b="0">
                 <a:solidFill>
                   <a:srgbClr val="D4D4D4"/>
                 </a:solidFill>
@@ -12191,7 +12191,7 @@
               <a:t> </a:t>
             </a:r>
             <a:r>
-              <a:rPr sz="1600" i="0" b="0">
+              <a:rPr sz="1500" i="0" b="0">
                 <a:solidFill>
                   <a:srgbClr val="B5CEA8"/>
                 </a:solidFill>
@@ -12203,11 +12203,11 @@
           <a:p>
             <a:pPr>
               <a:spcAft>
-                <a:spcPts val="342"/>
+                <a:spcPts val="321"/>
               </a:spcAft>
             </a:pPr>
             <a:r>
-              <a:rPr sz="1600" i="0" b="0">
+              <a:rPr sz="1500" i="0" b="0">
                 <a:solidFill>
                   <a:srgbClr val="D4D4D4"/>
                 </a:solidFill>
@@ -12216,7 +12216,7 @@
               <a:t>  </a:t>
             </a:r>
             <a:r>
-              <a:rPr sz="1600" i="0" b="0">
+              <a:rPr sz="1500" i="0" b="0">
                 <a:solidFill>
                   <a:srgbClr val="D4D4D4"/>
                 </a:solidFill>
@@ -12225,7 +12225,7 @@
               <a:t>Consolidacion</a:t>
             </a:r>
             <a:r>
-              <a:rPr sz="1600" i="0" b="0">
+              <a:rPr sz="1500" i="0" b="0">
                 <a:solidFill>
                   <a:srgbClr val="D4D4D4"/>
                 </a:solidFill>
@@ -12234,7 +12234,7 @@
               <a:t> </a:t>
             </a:r>
             <a:r>
-              <a:rPr sz="1600" i="0" b="0">
+              <a:rPr sz="1500" i="0" b="0">
                 <a:solidFill>
                   <a:srgbClr val="D4D4D4"/>
                 </a:solidFill>
@@ -12243,7 +12243,7 @@
               <a:t>paquete</a:t>
             </a:r>
             <a:r>
-              <a:rPr sz="1600" i="0" b="0">
+              <a:rPr sz="1500" i="0" b="0">
                 <a:solidFill>
                   <a:srgbClr val="D4D4D4"/>
                 </a:solidFill>
@@ -12252,7 +12252,7 @@
               <a:t>  :</a:t>
             </a:r>
             <a:r>
-              <a:rPr sz="1600" i="0" b="0">
+              <a:rPr sz="1500" i="0" b="0">
                 <a:solidFill>
                   <a:srgbClr val="D4D4D4"/>
                 </a:solidFill>
@@ -12261,7 +12261,7 @@
               <a:t>s3a</a:t>
             </a:r>
             <a:r>
-              <a:rPr sz="1600" i="0" b="0">
+              <a:rPr sz="1500" i="0" b="0">
                 <a:solidFill>
                   <a:srgbClr val="D4D4D4"/>
                 </a:solidFill>
@@ -12270,7 +12270,7 @@
               <a:t>, </a:t>
             </a:r>
             <a:r>
-              <a:rPr sz="1600" i="0" b="0">
+              <a:rPr sz="1500" i="0" b="0">
                 <a:solidFill>
                   <a:srgbClr val="D4D4D4"/>
                 </a:solidFill>
@@ -12279,7 +12279,7 @@
               <a:t>after</a:t>
             </a:r>
             <a:r>
-              <a:rPr sz="1600" i="0" b="0">
+              <a:rPr sz="1500" i="0" b="0">
                 <a:solidFill>
                   <a:srgbClr val="D4D4D4"/>
                 </a:solidFill>
@@ -12288,7 +12288,7 @@
               <a:t> </a:t>
             </a:r>
             <a:r>
-              <a:rPr sz="1600" i="0" b="0">
+              <a:rPr sz="1500" i="0" b="0">
                 <a:solidFill>
                   <a:srgbClr val="D4D4D4"/>
                 </a:solidFill>
@@ -12297,7 +12297,7 @@
               <a:t>s2b</a:t>
             </a:r>
             <a:r>
-              <a:rPr sz="1600" i="0" b="0">
+              <a:rPr sz="1500" i="0" b="0">
                 <a:solidFill>
                   <a:srgbClr val="D4D4D4"/>
                 </a:solidFill>
@@ -12306,7 +12306,7 @@
               <a:t>, 7</a:t>
             </a:r>
             <a:r>
-              <a:rPr sz="1600" i="0" b="0">
+              <a:rPr sz="1500" i="0" b="0">
                 <a:solidFill>
                   <a:srgbClr val="D4D4D4"/>
                 </a:solidFill>
@@ -12319,7 +12319,146 @@
       </p:sp>
       <p:sp>
         <p:nvSpPr>
-          <p:cNvPr id="13" name="TextBox 12"/>
+          <p:cNvPr id="13" name="Rounded Rectangle 12"/>
+          <p:cNvSpPr/>
+          <p:nvPr/>
+        </p:nvSpPr>
+        <p:spPr>
+          <a:xfrm>
+            <a:off x="7668579" y="1261872"/>
+            <a:ext cx="4120780" cy="3318569"/>
+          </a:xfrm>
+          <a:prstGeom prst="roundRect">
+            <a:avLst>
+              <a:gd name="adj" fmla="val 4000"/>
+            </a:avLst>
+          </a:prstGeom>
+          <a:solidFill>
+            <a:srgbClr val="E8EEF4"/>
+          </a:solidFill>
+          <a:ln>
+            <a:noFill/>
+          </a:ln>
+        </p:spPr>
+        <p:style>
+          <a:lnRef idx="1">
+            <a:schemeClr val="accent1"/>
+          </a:lnRef>
+          <a:fillRef idx="3">
+            <a:schemeClr val="accent1"/>
+          </a:fillRef>
+          <a:effectRef idx="2">
+            <a:schemeClr val="accent1"/>
+          </a:effectRef>
+          <a:fontRef idx="minor">
+            <a:schemeClr val="lt1"/>
+          </a:fontRef>
+        </p:style>
+        <p:txBody>
+          <a:bodyPr rtlCol="0" anchor="ctr"/>
+          <a:lstStyle/>
+          <a:p>
+            <a:pPr algn="ctr"/>
+          </a:p>
+        </p:txBody>
+      </p:sp>
+      <p:pic>
+        <p:nvPicPr>
+          <p:cNvPr id="14" name="Picture 13" descr="dg-gantt-sprints-paso1.png"/>
+          <p:cNvPicPr>
+            <a:picLocks noChangeAspect="1"/>
+          </p:cNvPicPr>
+          <p:nvPr/>
+        </p:nvPicPr>
+        <p:blipFill>
+          <a:blip r:embed="rId2"/>
+          <a:stretch>
+            <a:fillRect/>
+          </a:stretch>
+        </p:blipFill>
+        <p:spPr>
+          <a:xfrm>
+            <a:off x="7723443" y="1316736"/>
+            <a:ext cx="4011052" cy="3208841"/>
+          </a:xfrm>
+          <a:prstGeom prst="rect">
+            <a:avLst/>
+          </a:prstGeom>
+        </p:spPr>
+      </p:pic>
+      <p:sp>
+        <p:nvSpPr>
+          <p:cNvPr id="15" name="TextBox 14"/>
+          <p:cNvSpPr txBox="1"/>
+          <p:nvPr/>
+        </p:nvSpPr>
+        <p:spPr>
+          <a:xfrm>
+            <a:off x="7723443" y="4580441"/>
+            <a:ext cx="4011052" cy="320040"/>
+          </a:xfrm>
+          <a:prstGeom prst="rect">
+            <a:avLst/>
+          </a:prstGeom>
+          <a:noFill/>
+        </p:spPr>
+        <p:txBody>
+          <a:bodyPr wrap="square">
+            <a:spAutoFit/>
+          </a:bodyPr>
+          <a:lstStyle/>
+          <a:p>
+            <a:pPr algn="ctr"/>
+            <a:r>
+              <a:rPr sz="1200" b="0" i="1">
+                <a:solidFill>
+                  <a:srgbClr val="666666"/>
+                </a:solidFill>
+                <a:latin typeface="Calibri"/>
+              </a:rPr>
+              <a:t>Lo que dibuja este código</a:t>
+            </a:r>
+          </a:p>
+        </p:txBody>
+      </p:sp>
+      <p:sp>
+        <p:nvSpPr>
+          <p:cNvPr id="16" name="TextBox 15"/>
+          <p:cNvSpPr txBox="1"/>
+          <p:nvPr/>
+        </p:nvSpPr>
+        <p:spPr>
+          <a:xfrm>
+            <a:off x="457200" y="6035040"/>
+            <a:ext cx="11277295" cy="365760"/>
+          </a:xfrm>
+          <a:prstGeom prst="rect">
+            <a:avLst/>
+          </a:prstGeom>
+          <a:noFill/>
+        </p:spPr>
+        <p:txBody>
+          <a:bodyPr wrap="square">
+            <a:spAutoFit/>
+          </a:bodyPr>
+          <a:lstStyle/>
+          <a:p>
+            <a:pPr algn="ctr"/>
+            <a:r>
+              <a:rPr sz="1300" b="0" i="1">
+                <a:solidFill>
+                  <a:srgbClr val="666666"/>
+                </a:solidFill>
+                <a:latin typeface="Calibri"/>
+              </a:rPr>
+              <a:t>Cada tarea empieza «after» la anterior: si una se atrasa, el plan entero se corre.</a:t>
+            </a:r>
+          </a:p>
+        </p:txBody>
+      </p:sp>
+      <p:sp>
+        <p:nvSpPr>
+          <p:cNvPr id="17" name="TextBox 16"/>
           <p:cNvSpPr txBox="1"/>
           <p:nvPr/>
         </p:nvSpPr>
@@ -13140,7 +13279,7 @@
         <p:spPr>
           <a:xfrm>
             <a:off x="457200" y="1261872"/>
-            <a:ext cx="11277295" cy="4911784"/>
+            <a:ext cx="6991923" cy="4812987"/>
           </a:xfrm>
           <a:prstGeom prst="roundRect">
             <a:avLst>
@@ -13185,7 +13324,7 @@
         <p:spPr>
           <a:xfrm>
             <a:off x="457200" y="1261872"/>
-            <a:ext cx="11277295" cy="365760"/>
+            <a:ext cx="6991923" cy="365760"/>
           </a:xfrm>
           <a:prstGeom prst="rect">
             <a:avLst/>
@@ -13357,7 +13496,7 @@
         <p:spPr>
           <a:xfrm>
             <a:off x="1371600" y="1298448"/>
-            <a:ext cx="10180015" cy="292608"/>
+            <a:ext cx="5894643" cy="292608"/>
           </a:xfrm>
           <a:prstGeom prst="rect">
             <a:avLst/>
@@ -13390,7 +13529,7 @@
         <p:spPr>
           <a:xfrm>
             <a:off x="685800" y="1719072"/>
-            <a:ext cx="502920" cy="4317424"/>
+            <a:ext cx="502920" cy="4218627"/>
           </a:xfrm>
           <a:prstGeom prst="rect">
             <a:avLst/>
@@ -13405,11 +13544,11 @@
           <a:p>
             <a:pPr algn="r">
               <a:spcAft>
-                <a:spcPts val="235"/>
+                <a:spcPts val="278"/>
               </a:spcAft>
             </a:pPr>
             <a:r>
-              <a:rPr sz="1100" i="0" b="0">
+              <a:rPr sz="1300" i="0" b="0">
                 <a:solidFill>
                   <a:srgbClr val="858585"/>
                 </a:solidFill>
@@ -13421,11 +13560,11 @@
           <a:p>
             <a:pPr algn="r">
               <a:spcAft>
-                <a:spcPts val="235"/>
+                <a:spcPts val="278"/>
               </a:spcAft>
             </a:pPr>
             <a:r>
-              <a:rPr sz="1100" i="0" b="0">
+              <a:rPr sz="1300" i="0" b="0">
                 <a:solidFill>
                   <a:srgbClr val="858585"/>
                 </a:solidFill>
@@ -13437,11 +13576,11 @@
           <a:p>
             <a:pPr algn="r">
               <a:spcAft>
-                <a:spcPts val="235"/>
+                <a:spcPts val="278"/>
               </a:spcAft>
             </a:pPr>
             <a:r>
-              <a:rPr sz="1100" i="0" b="0">
+              <a:rPr sz="1300" i="0" b="0">
                 <a:solidFill>
                   <a:srgbClr val="858585"/>
                 </a:solidFill>
@@ -13453,11 +13592,11 @@
           <a:p>
             <a:pPr algn="r">
               <a:spcAft>
-                <a:spcPts val="235"/>
+                <a:spcPts val="278"/>
               </a:spcAft>
             </a:pPr>
             <a:r>
-              <a:rPr sz="1100" i="0" b="0">
+              <a:rPr sz="1300" i="0" b="0">
                 <a:solidFill>
                   <a:srgbClr val="858585"/>
                 </a:solidFill>
@@ -13469,11 +13608,11 @@
           <a:p>
             <a:pPr algn="r">
               <a:spcAft>
-                <a:spcPts val="235"/>
+                <a:spcPts val="278"/>
               </a:spcAft>
             </a:pPr>
             <a:r>
-              <a:rPr sz="1100" i="0" b="0">
+              <a:rPr sz="1300" i="0" b="0">
                 <a:solidFill>
                   <a:srgbClr val="858585"/>
                 </a:solidFill>
@@ -13485,11 +13624,11 @@
           <a:p>
             <a:pPr algn="r">
               <a:spcAft>
-                <a:spcPts val="235"/>
+                <a:spcPts val="278"/>
               </a:spcAft>
             </a:pPr>
             <a:r>
-              <a:rPr sz="1100" i="0" b="0">
+              <a:rPr sz="1300" i="0" b="0">
                 <a:solidFill>
                   <a:srgbClr val="858585"/>
                 </a:solidFill>
@@ -13501,11 +13640,11 @@
           <a:p>
             <a:pPr algn="r">
               <a:spcAft>
-                <a:spcPts val="235"/>
+                <a:spcPts val="278"/>
               </a:spcAft>
             </a:pPr>
             <a:r>
-              <a:rPr sz="1100" i="0" b="0">
+              <a:rPr sz="1300" i="0" b="0">
                 <a:solidFill>
                   <a:srgbClr val="858585"/>
                 </a:solidFill>
@@ -13517,11 +13656,11 @@
           <a:p>
             <a:pPr algn="r">
               <a:spcAft>
-                <a:spcPts val="235"/>
+                <a:spcPts val="278"/>
               </a:spcAft>
             </a:pPr>
             <a:r>
-              <a:rPr sz="1100" i="0" b="0">
+              <a:rPr sz="1300" i="0" b="0">
                 <a:solidFill>
                   <a:srgbClr val="858585"/>
                 </a:solidFill>
@@ -13533,11 +13672,11 @@
           <a:p>
             <a:pPr algn="r">
               <a:spcAft>
-                <a:spcPts val="235"/>
+                <a:spcPts val="278"/>
               </a:spcAft>
             </a:pPr>
             <a:r>
-              <a:rPr sz="1100" i="0" b="0">
+              <a:rPr sz="1300" i="0" b="0">
                 <a:solidFill>
                   <a:srgbClr val="858585"/>
                 </a:solidFill>
@@ -13549,11 +13688,11 @@
           <a:p>
             <a:pPr algn="r">
               <a:spcAft>
-                <a:spcPts val="235"/>
+                <a:spcPts val="278"/>
               </a:spcAft>
             </a:pPr>
             <a:r>
-              <a:rPr sz="1100" i="0" b="0">
+              <a:rPr sz="1300" i="0" b="0">
                 <a:solidFill>
                   <a:srgbClr val="858585"/>
                 </a:solidFill>
@@ -13565,11 +13704,11 @@
           <a:p>
             <a:pPr algn="r">
               <a:spcAft>
-                <a:spcPts val="235"/>
+                <a:spcPts val="278"/>
               </a:spcAft>
             </a:pPr>
             <a:r>
-              <a:rPr sz="1100" i="0" b="0">
+              <a:rPr sz="1300" i="0" b="0">
                 <a:solidFill>
                   <a:srgbClr val="858585"/>
                 </a:solidFill>
@@ -13581,11 +13720,11 @@
           <a:p>
             <a:pPr algn="r">
               <a:spcAft>
-                <a:spcPts val="235"/>
+                <a:spcPts val="278"/>
               </a:spcAft>
             </a:pPr>
             <a:r>
-              <a:rPr sz="1100" i="0" b="0">
+              <a:rPr sz="1300" i="0" b="0">
                 <a:solidFill>
                   <a:srgbClr val="858585"/>
                 </a:solidFill>
@@ -13597,11 +13736,11 @@
           <a:p>
             <a:pPr algn="r">
               <a:spcAft>
-                <a:spcPts val="235"/>
+                <a:spcPts val="278"/>
               </a:spcAft>
             </a:pPr>
             <a:r>
-              <a:rPr sz="1100" i="0" b="0">
+              <a:rPr sz="1300" i="0" b="0">
                 <a:solidFill>
                   <a:srgbClr val="858585"/>
                 </a:solidFill>
@@ -13613,11 +13752,11 @@
           <a:p>
             <a:pPr algn="r">
               <a:spcAft>
-                <a:spcPts val="235"/>
+                <a:spcPts val="278"/>
               </a:spcAft>
             </a:pPr>
             <a:r>
-              <a:rPr sz="1100" i="0" b="0">
+              <a:rPr sz="1300" i="0" b="0">
                 <a:solidFill>
                   <a:srgbClr val="858585"/>
                 </a:solidFill>
@@ -13629,11 +13768,11 @@
           <a:p>
             <a:pPr algn="r">
               <a:spcAft>
-                <a:spcPts val="235"/>
+                <a:spcPts val="278"/>
               </a:spcAft>
             </a:pPr>
             <a:r>
-              <a:rPr sz="1100" i="0" b="0">
+              <a:rPr sz="1300" i="0" b="0">
                 <a:solidFill>
                   <a:srgbClr val="858585"/>
                 </a:solidFill>
@@ -13645,11 +13784,11 @@
           <a:p>
             <a:pPr algn="r">
               <a:spcAft>
-                <a:spcPts val="235"/>
+                <a:spcPts val="278"/>
               </a:spcAft>
             </a:pPr>
             <a:r>
-              <a:rPr sz="1100" i="0" b="0">
+              <a:rPr sz="1300" i="0" b="0">
                 <a:solidFill>
                   <a:srgbClr val="858585"/>
                 </a:solidFill>
@@ -13661,65 +13800,17 @@
           <a:p>
             <a:pPr algn="r">
               <a:spcAft>
-                <a:spcPts val="235"/>
+                <a:spcPts val="278"/>
               </a:spcAft>
             </a:pPr>
             <a:r>
-              <a:rPr sz="1100" i="0" b="0">
+              <a:rPr sz="1300" i="0" b="0">
                 <a:solidFill>
                   <a:srgbClr val="858585"/>
                 </a:solidFill>
                 <a:latin typeface="Consolas"/>
               </a:rPr>
               <a:t>17</a:t>
-            </a:r>
-          </a:p>
-          <a:p>
-            <a:pPr algn="r">
-              <a:spcAft>
-                <a:spcPts val="235"/>
-              </a:spcAft>
-            </a:pPr>
-            <a:r>
-              <a:rPr sz="1100" i="0" b="0">
-                <a:solidFill>
-                  <a:srgbClr val="858585"/>
-                </a:solidFill>
-                <a:latin typeface="Consolas"/>
-              </a:rPr>
-              <a:t>18</a:t>
-            </a:r>
-          </a:p>
-          <a:p>
-            <a:pPr algn="r">
-              <a:spcAft>
-                <a:spcPts val="235"/>
-              </a:spcAft>
-            </a:pPr>
-            <a:r>
-              <a:rPr sz="1100" i="0" b="0">
-                <a:solidFill>
-                  <a:srgbClr val="858585"/>
-                </a:solidFill>
-                <a:latin typeface="Consolas"/>
-              </a:rPr>
-              <a:t>19</a:t>
-            </a:r>
-          </a:p>
-          <a:p>
-            <a:pPr algn="r">
-              <a:spcAft>
-                <a:spcPts val="235"/>
-              </a:spcAft>
-            </a:pPr>
-            <a:r>
-              <a:rPr sz="1100" i="0" b="0">
-                <a:solidFill>
-                  <a:srgbClr val="858585"/>
-                </a:solidFill>
-                <a:latin typeface="Consolas"/>
-              </a:rPr>
-              <a:t>20</a:t>
             </a:r>
           </a:p>
         </p:txBody>
@@ -13733,7 +13824,7 @@
         <p:spPr>
           <a:xfrm>
             <a:off x="1188720" y="1719072"/>
-            <a:ext cx="10271455" cy="4317424"/>
+            <a:ext cx="5986083" cy="4218627"/>
           </a:xfrm>
           <a:prstGeom prst="rect">
             <a:avLst/>
@@ -13748,11 +13839,11 @@
           <a:p>
             <a:pPr>
               <a:spcAft>
-                <a:spcPts val="235"/>
+                <a:spcPts val="278"/>
               </a:spcAft>
             </a:pPr>
             <a:r>
-              <a:rPr sz="1100" i="0" b="0">
+              <a:rPr sz="1300" i="0" b="0">
                 <a:solidFill>
                   <a:srgbClr val="D4D4D4"/>
                 </a:solidFill>
@@ -13761,7 +13852,7 @@
               <a:t>flowchart</a:t>
             </a:r>
             <a:r>
-              <a:rPr sz="1100" i="0" b="0">
+              <a:rPr sz="1300" i="0" b="0">
                 <a:solidFill>
                   <a:srgbClr val="D4D4D4"/>
                 </a:solidFill>
@@ -13770,7 +13861,7 @@
               <a:t> </a:t>
             </a:r>
             <a:r>
-              <a:rPr sz="1100" i="0" b="0">
+              <a:rPr sz="1300" i="0" b="0">
                 <a:solidFill>
                   <a:srgbClr val="D4D4D4"/>
                 </a:solidFill>
@@ -13782,11 +13873,11 @@
           <a:p>
             <a:pPr>
               <a:spcAft>
-                <a:spcPts val="235"/>
+                <a:spcPts val="278"/>
               </a:spcAft>
             </a:pPr>
             <a:r>
-              <a:rPr sz="1100" i="0" b="0">
+              <a:rPr sz="1300" i="0" b="0">
                 <a:solidFill>
                   <a:srgbClr val="D4D4D4"/>
                 </a:solidFill>
@@ -13795,7 +13886,7 @@
               <a:t>  </a:t>
             </a:r>
             <a:r>
-              <a:rPr sz="1100" i="0" b="0">
+              <a:rPr sz="1300" i="0" b="0">
                 <a:solidFill>
                   <a:srgbClr val="D4D4D4"/>
                 </a:solidFill>
@@ -13804,7 +13895,7 @@
               <a:t>subgraph</a:t>
             </a:r>
             <a:r>
-              <a:rPr sz="1100" i="0" b="0">
+              <a:rPr sz="1300" i="0" b="0">
                 <a:solidFill>
                   <a:srgbClr val="D4D4D4"/>
                 </a:solidFill>
@@ -13813,7 +13904,7 @@
               <a:t> </a:t>
             </a:r>
             <a:r>
-              <a:rPr sz="1100" i="0" b="0">
+              <a:rPr sz="1300" i="0" b="0">
                 <a:solidFill>
                   <a:srgbClr val="D4D4D4"/>
                 </a:solidFill>
@@ -13822,7 +13913,7 @@
               <a:t>backlog</a:t>
             </a:r>
             <a:r>
-              <a:rPr sz="1100" i="0" b="0">
+              <a:rPr sz="1300" i="0" b="0">
                 <a:solidFill>
                   <a:srgbClr val="D4D4D4"/>
                 </a:solidFill>
@@ -13831,7 +13922,7 @@
               <a:t>[</a:t>
             </a:r>
             <a:r>
-              <a:rPr sz="1100" i="0" b="0">
+              <a:rPr sz="1300" i="0" b="0">
                 <a:solidFill>
                   <a:srgbClr val="D4D4D4"/>
                 </a:solidFill>
@@ -13840,7 +13931,7 @@
               <a:t>Backlog</a:t>
             </a:r>
             <a:r>
-              <a:rPr sz="1100" i="0" b="0">
+              <a:rPr sz="1300" i="0" b="0">
                 <a:solidFill>
                   <a:srgbClr val="D4D4D4"/>
                 </a:solidFill>
@@ -13852,11 +13943,11 @@
           <a:p>
             <a:pPr>
               <a:spcAft>
-                <a:spcPts val="235"/>
+                <a:spcPts val="278"/>
               </a:spcAft>
             </a:pPr>
             <a:r>
-              <a:rPr sz="1100" i="0" b="0">
+              <a:rPr sz="1300" i="0" b="0">
                 <a:solidFill>
                   <a:srgbClr val="D4D4D4"/>
                 </a:solidFill>
@@ -13865,7 +13956,7 @@
               <a:t>    </a:t>
             </a:r>
             <a:r>
-              <a:rPr sz="1100" i="0" b="0">
+              <a:rPr sz="1300" i="0" b="0">
                 <a:solidFill>
                   <a:srgbClr val="D4D4D4"/>
                 </a:solidFill>
@@ -13874,7 +13965,7 @@
               <a:t>b1</a:t>
             </a:r>
             <a:r>
-              <a:rPr sz="1100" i="0" b="0">
+              <a:rPr sz="1300" i="0" b="0">
                 <a:solidFill>
                   <a:srgbClr val="D4D4D4"/>
                 </a:solidFill>
@@ -13883,7 +13974,7 @@
               <a:t>[</a:t>
             </a:r>
             <a:r>
-              <a:rPr sz="1100" i="0" b="0">
+              <a:rPr sz="1300" i="0" b="0">
                 <a:solidFill>
                   <a:srgbClr val="D4D4D4"/>
                 </a:solidFill>
@@ -13892,7 +13983,7 @@
               <a:t>HU</a:t>
             </a:r>
             <a:r>
-              <a:rPr sz="1100" i="0" b="0">
+              <a:rPr sz="1300" i="0" b="0">
                 <a:solidFill>
                   <a:srgbClr val="D4D4D4"/>
                 </a:solidFill>
@@ -13901,7 +13992,7 @@
               <a:t>-</a:t>
             </a:r>
             <a:r>
-              <a:rPr sz="1100" i="0" b="0">
+              <a:rPr sz="1300" i="0" b="0">
                 <a:solidFill>
                   <a:srgbClr val="B5CEA8"/>
                 </a:solidFill>
@@ -13910,7 +14001,7 @@
               <a:t>04</a:t>
             </a:r>
             <a:r>
-              <a:rPr sz="1100" i="0" b="0">
+              <a:rPr sz="1300" i="0" b="0">
                 <a:solidFill>
                   <a:srgbClr val="D4D4D4"/>
                 </a:solidFill>
@@ -13922,11 +14013,11 @@
           <a:p>
             <a:pPr>
               <a:spcAft>
-                <a:spcPts val="235"/>
+                <a:spcPts val="278"/>
               </a:spcAft>
             </a:pPr>
             <a:r>
-              <a:rPr sz="1100" i="0" b="0">
+              <a:rPr sz="1300" i="0" b="0">
                 <a:solidFill>
                   <a:srgbClr val="D4D4D4"/>
                 </a:solidFill>
@@ -13935,7 +14026,7 @@
               <a:t>    </a:t>
             </a:r>
             <a:r>
-              <a:rPr sz="1100" i="0" b="0">
+              <a:rPr sz="1300" i="0" b="0">
                 <a:solidFill>
                   <a:srgbClr val="D4D4D4"/>
                 </a:solidFill>
@@ -13944,7 +14035,7 @@
               <a:t>b2</a:t>
             </a:r>
             <a:r>
-              <a:rPr sz="1100" i="0" b="0">
+              <a:rPr sz="1300" i="0" b="0">
                 <a:solidFill>
                   <a:srgbClr val="D4D4D4"/>
                 </a:solidFill>
@@ -13953,7 +14044,7 @@
               <a:t>[</a:t>
             </a:r>
             <a:r>
-              <a:rPr sz="1100" i="0" b="0">
+              <a:rPr sz="1300" i="0" b="0">
                 <a:solidFill>
                   <a:srgbClr val="D4D4D4"/>
                 </a:solidFill>
@@ -13962,7 +14053,7 @@
               <a:t>HU</a:t>
             </a:r>
             <a:r>
-              <a:rPr sz="1100" i="0" b="0">
+              <a:rPr sz="1300" i="0" b="0">
                 <a:solidFill>
                   <a:srgbClr val="D4D4D4"/>
                 </a:solidFill>
@@ -13971,7 +14062,7 @@
               <a:t>-</a:t>
             </a:r>
             <a:r>
-              <a:rPr sz="1100" i="0" b="0">
+              <a:rPr sz="1300" i="0" b="0">
                 <a:solidFill>
                   <a:srgbClr val="B5CEA8"/>
                 </a:solidFill>
@@ -13980,7 +14071,7 @@
               <a:t>05</a:t>
             </a:r>
             <a:r>
-              <a:rPr sz="1100" i="0" b="0">
+              <a:rPr sz="1300" i="0" b="0">
                 <a:solidFill>
                   <a:srgbClr val="D4D4D4"/>
                 </a:solidFill>
@@ -13992,11 +14083,11 @@
           <a:p>
             <a:pPr>
               <a:spcAft>
-                <a:spcPts val="235"/>
+                <a:spcPts val="278"/>
               </a:spcAft>
             </a:pPr>
             <a:r>
-              <a:rPr sz="1100" i="0" b="0">
+              <a:rPr sz="1300" i="0" b="0">
                 <a:solidFill>
                   <a:srgbClr val="D4D4D4"/>
                 </a:solidFill>
@@ -14005,7 +14096,7 @@
               <a:t>  </a:t>
             </a:r>
             <a:r>
-              <a:rPr sz="1100" i="0" b="0">
+              <a:rPr sz="1300" i="0" b="0">
                 <a:solidFill>
                   <a:srgbClr val="D4D4D4"/>
                 </a:solidFill>
@@ -14017,11 +14108,11 @@
           <a:p>
             <a:pPr>
               <a:spcAft>
-                <a:spcPts val="235"/>
+                <a:spcPts val="278"/>
               </a:spcAft>
             </a:pPr>
             <a:r>
-              <a:rPr sz="1100" i="0" b="0">
+              <a:rPr sz="1300" i="0" b="0">
                 <a:solidFill>
                   <a:srgbClr val="D4D4D4"/>
                 </a:solidFill>
@@ -14030,7 +14121,7 @@
               <a:t>  </a:t>
             </a:r>
             <a:r>
-              <a:rPr sz="1100" i="0" b="0">
+              <a:rPr sz="1300" i="0" b="0">
                 <a:solidFill>
                   <a:srgbClr val="D4D4D4"/>
                 </a:solidFill>
@@ -14039,7 +14130,7 @@
               <a:t>subgraph</a:t>
             </a:r>
             <a:r>
-              <a:rPr sz="1100" i="0" b="0">
+              <a:rPr sz="1300" i="0" b="0">
                 <a:solidFill>
                   <a:srgbClr val="D4D4D4"/>
                 </a:solidFill>
@@ -14048,7 +14139,7 @@
               <a:t> </a:t>
             </a:r>
             <a:r>
-              <a:rPr sz="1100" i="0" b="0">
+              <a:rPr sz="1300" i="0" b="0">
                 <a:solidFill>
                   <a:srgbClr val="D4D4D4"/>
                 </a:solidFill>
@@ -14057,7 +14148,7 @@
               <a:t>curso</a:t>
             </a:r>
             <a:r>
-              <a:rPr sz="1100" i="0" b="0">
+              <a:rPr sz="1300" i="0" b="0">
                 <a:solidFill>
                   <a:srgbClr val="D4D4D4"/>
                 </a:solidFill>
@@ -14066,7 +14157,7 @@
               <a:t>[</a:t>
             </a:r>
             <a:r>
-              <a:rPr sz="1100" i="0" b="0">
+              <a:rPr sz="1300" i="0" b="0">
                 <a:solidFill>
                   <a:srgbClr val="D4D4D4"/>
                 </a:solidFill>
@@ -14075,7 +14166,7 @@
               <a:t>En</a:t>
             </a:r>
             <a:r>
-              <a:rPr sz="1100" i="0" b="0">
+              <a:rPr sz="1300" i="0" b="0">
                 <a:solidFill>
                   <a:srgbClr val="D4D4D4"/>
                 </a:solidFill>
@@ -14084,7 +14175,7 @@
               <a:t> </a:t>
             </a:r>
             <a:r>
-              <a:rPr sz="1100" i="0" b="0">
+              <a:rPr sz="1300" i="0" b="0">
                 <a:solidFill>
                   <a:srgbClr val="D4D4D4"/>
                 </a:solidFill>
@@ -14093,7 +14184,7 @@
               <a:t>curso</a:t>
             </a:r>
             <a:r>
-              <a:rPr sz="1100" i="0" b="0">
+              <a:rPr sz="1300" i="0" b="0">
                 <a:solidFill>
                   <a:srgbClr val="D4D4D4"/>
                 </a:solidFill>
@@ -14102,7 +14193,7 @@
               <a:t> - </a:t>
             </a:r>
             <a:r>
-              <a:rPr sz="1100" i="0" b="0">
+              <a:rPr sz="1300" i="0" b="0">
                 <a:solidFill>
                   <a:srgbClr val="D4D4D4"/>
                 </a:solidFill>
@@ -14111,7 +14202,7 @@
               <a:t>LIMITE</a:t>
             </a:r>
             <a:r>
-              <a:rPr sz="1100" i="0" b="0">
+              <a:rPr sz="1300" i="0" b="0">
                 <a:solidFill>
                   <a:srgbClr val="D4D4D4"/>
                 </a:solidFill>
@@ -14120,7 +14211,7 @@
               <a:t> </a:t>
             </a:r>
             <a:r>
-              <a:rPr sz="1100" i="0" b="0">
+              <a:rPr sz="1300" i="0" b="0">
                 <a:solidFill>
                   <a:srgbClr val="B5CEA8"/>
                 </a:solidFill>
@@ -14129,7 +14220,7 @@
               <a:t>2</a:t>
             </a:r>
             <a:r>
-              <a:rPr sz="1100" i="0" b="0">
+              <a:rPr sz="1300" i="0" b="0">
                 <a:solidFill>
                   <a:srgbClr val="D4D4D4"/>
                 </a:solidFill>
@@ -14141,11 +14232,11 @@
           <a:p>
             <a:pPr>
               <a:spcAft>
-                <a:spcPts val="235"/>
+                <a:spcPts val="278"/>
               </a:spcAft>
             </a:pPr>
             <a:r>
-              <a:rPr sz="1100" i="0" b="0">
+              <a:rPr sz="1300" i="0" b="0">
                 <a:solidFill>
                   <a:srgbClr val="D4D4D4"/>
                 </a:solidFill>
@@ -14154,7 +14245,7 @@
               <a:t>    </a:t>
             </a:r>
             <a:r>
-              <a:rPr sz="1100" i="0" b="0">
+              <a:rPr sz="1300" i="0" b="0">
                 <a:solidFill>
                   <a:srgbClr val="D4D4D4"/>
                 </a:solidFill>
@@ -14163,7 +14254,7 @@
               <a:t>c1</a:t>
             </a:r>
             <a:r>
-              <a:rPr sz="1100" i="0" b="0">
+              <a:rPr sz="1300" i="0" b="0">
                 <a:solidFill>
                   <a:srgbClr val="D4D4D4"/>
                 </a:solidFill>
@@ -14172,7 +14263,7 @@
               <a:t>[</a:t>
             </a:r>
             <a:r>
-              <a:rPr sz="1100" i="0" b="0">
+              <a:rPr sz="1300" i="0" b="0">
                 <a:solidFill>
                   <a:srgbClr val="D4D4D4"/>
                 </a:solidFill>
@@ -14181,7 +14272,7 @@
               <a:t>HU</a:t>
             </a:r>
             <a:r>
-              <a:rPr sz="1100" i="0" b="0">
+              <a:rPr sz="1300" i="0" b="0">
                 <a:solidFill>
                   <a:srgbClr val="D4D4D4"/>
                 </a:solidFill>
@@ -14190,7 +14281,7 @@
               <a:t>-</a:t>
             </a:r>
             <a:r>
-              <a:rPr sz="1100" i="0" b="0">
+              <a:rPr sz="1300" i="0" b="0">
                 <a:solidFill>
                   <a:srgbClr val="B5CEA8"/>
                 </a:solidFill>
@@ -14199,7 +14290,7 @@
               <a:t>02</a:t>
             </a:r>
             <a:r>
-              <a:rPr sz="1100" i="0" b="0">
+              <a:rPr sz="1300" i="0" b="0">
                 <a:solidFill>
                   <a:srgbClr val="D4D4D4"/>
                 </a:solidFill>
@@ -14211,11 +14302,11 @@
           <a:p>
             <a:pPr>
               <a:spcAft>
-                <a:spcPts val="235"/>
+                <a:spcPts val="278"/>
               </a:spcAft>
             </a:pPr>
             <a:r>
-              <a:rPr sz="1100" i="0" b="0">
+              <a:rPr sz="1300" i="0" b="0">
                 <a:solidFill>
                   <a:srgbClr val="D4D4D4"/>
                 </a:solidFill>
@@ -14224,7 +14315,7 @@
               <a:t>    </a:t>
             </a:r>
             <a:r>
-              <a:rPr sz="1100" i="0" b="0">
+              <a:rPr sz="1300" i="0" b="0">
                 <a:solidFill>
                   <a:srgbClr val="D4D4D4"/>
                 </a:solidFill>
@@ -14233,7 +14324,7 @@
               <a:t>c2</a:t>
             </a:r>
             <a:r>
-              <a:rPr sz="1100" i="0" b="0">
+              <a:rPr sz="1300" i="0" b="0">
                 <a:solidFill>
                   <a:srgbClr val="D4D4D4"/>
                 </a:solidFill>
@@ -14242,7 +14333,7 @@
               <a:t>[</a:t>
             </a:r>
             <a:r>
-              <a:rPr sz="1100" i="0" b="0">
+              <a:rPr sz="1300" i="0" b="0">
                 <a:solidFill>
                   <a:srgbClr val="D4D4D4"/>
                 </a:solidFill>
@@ -14251,7 +14342,7 @@
               <a:t>HU</a:t>
             </a:r>
             <a:r>
-              <a:rPr sz="1100" i="0" b="0">
+              <a:rPr sz="1300" i="0" b="0">
                 <a:solidFill>
                   <a:srgbClr val="D4D4D4"/>
                 </a:solidFill>
@@ -14260,7 +14351,7 @@
               <a:t>-</a:t>
             </a:r>
             <a:r>
-              <a:rPr sz="1100" i="0" b="0">
+              <a:rPr sz="1300" i="0" b="0">
                 <a:solidFill>
                   <a:srgbClr val="B5CEA8"/>
                 </a:solidFill>
@@ -14269,7 +14360,7 @@
               <a:t>03</a:t>
             </a:r>
             <a:r>
-              <a:rPr sz="1100" i="0" b="0">
+              <a:rPr sz="1300" i="0" b="0">
                 <a:solidFill>
                   <a:srgbClr val="D4D4D4"/>
                 </a:solidFill>
@@ -14281,11 +14372,11 @@
           <a:p>
             <a:pPr>
               <a:spcAft>
-                <a:spcPts val="235"/>
+                <a:spcPts val="278"/>
               </a:spcAft>
             </a:pPr>
             <a:r>
-              <a:rPr sz="1100" i="0" b="0">
+              <a:rPr sz="1300" i="0" b="0">
                 <a:solidFill>
                   <a:srgbClr val="D4D4D4"/>
                 </a:solidFill>
@@ -14294,7 +14385,7 @@
               <a:t>  </a:t>
             </a:r>
             <a:r>
-              <a:rPr sz="1100" i="0" b="0">
+              <a:rPr sz="1300" i="0" b="0">
                 <a:solidFill>
                   <a:srgbClr val="D4D4D4"/>
                 </a:solidFill>
@@ -14306,11 +14397,11 @@
           <a:p>
             <a:pPr>
               <a:spcAft>
-                <a:spcPts val="235"/>
+                <a:spcPts val="278"/>
               </a:spcAft>
             </a:pPr>
             <a:r>
-              <a:rPr sz="1100" i="0" b="0">
+              <a:rPr sz="1300" i="0" b="0">
                 <a:solidFill>
                   <a:srgbClr val="D4D4D4"/>
                 </a:solidFill>
@@ -14319,7 +14410,7 @@
               <a:t>  </a:t>
             </a:r>
             <a:r>
-              <a:rPr sz="1100" i="0" b="0">
+              <a:rPr sz="1300" i="0" b="0">
                 <a:solidFill>
                   <a:srgbClr val="D4D4D4"/>
                 </a:solidFill>
@@ -14328,7 +14419,7 @@
               <a:t>subgraph</a:t>
             </a:r>
             <a:r>
-              <a:rPr sz="1100" i="0" b="0">
+              <a:rPr sz="1300" i="0" b="0">
                 <a:solidFill>
                   <a:srgbClr val="D4D4D4"/>
                 </a:solidFill>
@@ -14337,7 +14428,7 @@
               <a:t> </a:t>
             </a:r>
             <a:r>
-              <a:rPr sz="1100" i="0" b="0">
+              <a:rPr sz="1300" i="0" b="0">
                 <a:solidFill>
                   <a:srgbClr val="D4D4D4"/>
                 </a:solidFill>
@@ -14346,7 +14437,7 @@
               <a:t>rev</a:t>
             </a:r>
             <a:r>
-              <a:rPr sz="1100" i="0" b="0">
+              <a:rPr sz="1300" i="0" b="0">
                 <a:solidFill>
                   <a:srgbClr val="D4D4D4"/>
                 </a:solidFill>
@@ -14355,7 +14446,7 @@
               <a:t>[</a:t>
             </a:r>
             <a:r>
-              <a:rPr sz="1100" i="0" b="0">
+              <a:rPr sz="1300" i="0" b="0">
                 <a:solidFill>
                   <a:srgbClr val="D4D4D4"/>
                 </a:solidFill>
@@ -14364,7 +14455,7 @@
               <a:t>En</a:t>
             </a:r>
             <a:r>
-              <a:rPr sz="1100" i="0" b="0">
+              <a:rPr sz="1300" i="0" b="0">
                 <a:solidFill>
                   <a:srgbClr val="D4D4D4"/>
                 </a:solidFill>
@@ -14373,7 +14464,7 @@
               <a:t> </a:t>
             </a:r>
             <a:r>
-              <a:rPr sz="1100" i="0" b="0">
+              <a:rPr sz="1300" i="0" b="0">
                 <a:solidFill>
                   <a:srgbClr val="D4D4D4"/>
                 </a:solidFill>
@@ -14382,7 +14473,7 @@
               <a:t>revision</a:t>
             </a:r>
             <a:r>
-              <a:rPr sz="1100" i="0" b="0">
+              <a:rPr sz="1300" i="0" b="0">
                 <a:solidFill>
                   <a:srgbClr val="D4D4D4"/>
                 </a:solidFill>
@@ -14391,7 +14482,7 @@
               <a:t> - </a:t>
             </a:r>
             <a:r>
-              <a:rPr sz="1100" i="0" b="0">
+              <a:rPr sz="1300" i="0" b="0">
                 <a:solidFill>
                   <a:srgbClr val="D4D4D4"/>
                 </a:solidFill>
@@ -14400,7 +14491,7 @@
               <a:t>LIMITE</a:t>
             </a:r>
             <a:r>
-              <a:rPr sz="1100" i="0" b="0">
+              <a:rPr sz="1300" i="0" b="0">
                 <a:solidFill>
                   <a:srgbClr val="D4D4D4"/>
                 </a:solidFill>
@@ -14409,7 +14500,7 @@
               <a:t> </a:t>
             </a:r>
             <a:r>
-              <a:rPr sz="1100" i="0" b="0">
+              <a:rPr sz="1300" i="0" b="0">
                 <a:solidFill>
                   <a:srgbClr val="B5CEA8"/>
                 </a:solidFill>
@@ -14418,7 +14509,7 @@
               <a:t>1</a:t>
             </a:r>
             <a:r>
-              <a:rPr sz="1100" i="0" b="0">
+              <a:rPr sz="1300" i="0" b="0">
                 <a:solidFill>
                   <a:srgbClr val="D4D4D4"/>
                 </a:solidFill>
@@ -14430,11 +14521,11 @@
           <a:p>
             <a:pPr>
               <a:spcAft>
-                <a:spcPts val="235"/>
+                <a:spcPts val="278"/>
               </a:spcAft>
             </a:pPr>
             <a:r>
-              <a:rPr sz="1100" i="0" b="0">
+              <a:rPr sz="1300" i="0" b="0">
                 <a:solidFill>
                   <a:srgbClr val="D4D4D4"/>
                 </a:solidFill>
@@ -14443,7 +14534,7 @@
               <a:t>    </a:t>
             </a:r>
             <a:r>
-              <a:rPr sz="1100" i="0" b="0">
+              <a:rPr sz="1300" i="0" b="0">
                 <a:solidFill>
                   <a:srgbClr val="D4D4D4"/>
                 </a:solidFill>
@@ -14452,7 +14543,7 @@
               <a:t>r1</a:t>
             </a:r>
             <a:r>
-              <a:rPr sz="1100" i="0" b="0">
+              <a:rPr sz="1300" i="0" b="0">
                 <a:solidFill>
                   <a:srgbClr val="D4D4D4"/>
                 </a:solidFill>
@@ -14461,7 +14552,7 @@
               <a:t>[</a:t>
             </a:r>
             <a:r>
-              <a:rPr sz="1100" i="0" b="0">
+              <a:rPr sz="1300" i="0" b="0">
                 <a:solidFill>
                   <a:srgbClr val="D4D4D4"/>
                 </a:solidFill>
@@ -14470,7 +14561,7 @@
               <a:t>HU</a:t>
             </a:r>
             <a:r>
-              <a:rPr sz="1100" i="0" b="0">
+              <a:rPr sz="1300" i="0" b="0">
                 <a:solidFill>
                   <a:srgbClr val="D4D4D4"/>
                 </a:solidFill>
@@ -14479,7 +14570,7 @@
               <a:t>-</a:t>
             </a:r>
             <a:r>
-              <a:rPr sz="1100" i="0" b="0">
+              <a:rPr sz="1300" i="0" b="0">
                 <a:solidFill>
                   <a:srgbClr val="B5CEA8"/>
                 </a:solidFill>
@@ -14488,7 +14579,7 @@
               <a:t>01</a:t>
             </a:r>
             <a:r>
-              <a:rPr sz="1100" i="0" b="0">
+              <a:rPr sz="1300" i="0" b="0">
                 <a:solidFill>
                   <a:srgbClr val="D4D4D4"/>
                 </a:solidFill>
@@ -14500,11 +14591,11 @@
           <a:p>
             <a:pPr>
               <a:spcAft>
-                <a:spcPts val="235"/>
+                <a:spcPts val="278"/>
               </a:spcAft>
             </a:pPr>
             <a:r>
-              <a:rPr sz="1100" i="0" b="0">
+              <a:rPr sz="1300" i="0" b="0">
                 <a:solidFill>
                   <a:srgbClr val="D4D4D4"/>
                 </a:solidFill>
@@ -14513,7 +14604,7 @@
               <a:t>  </a:t>
             </a:r>
             <a:r>
-              <a:rPr sz="1100" i="0" b="0">
+              <a:rPr sz="1300" i="0" b="0">
                 <a:solidFill>
                   <a:srgbClr val="D4D4D4"/>
                 </a:solidFill>
@@ -14525,11 +14616,11 @@
           <a:p>
             <a:pPr>
               <a:spcAft>
-                <a:spcPts val="235"/>
+                <a:spcPts val="278"/>
               </a:spcAft>
             </a:pPr>
             <a:r>
-              <a:rPr sz="1100" i="0" b="0">
+              <a:rPr sz="1300" i="0" b="0">
                 <a:solidFill>
                   <a:srgbClr val="D4D4D4"/>
                 </a:solidFill>
@@ -14538,7 +14629,7 @@
               <a:t>  </a:t>
             </a:r>
             <a:r>
-              <a:rPr sz="1100" i="0" b="0">
+              <a:rPr sz="1300" i="0" b="0">
                 <a:solidFill>
                   <a:srgbClr val="D4D4D4"/>
                 </a:solidFill>
@@ -14547,7 +14638,7 @@
               <a:t>subgraph</a:t>
             </a:r>
             <a:r>
-              <a:rPr sz="1100" i="0" b="0">
+              <a:rPr sz="1300" i="0" b="0">
                 <a:solidFill>
                   <a:srgbClr val="D4D4D4"/>
                 </a:solidFill>
@@ -14556,7 +14647,7 @@
               <a:t> </a:t>
             </a:r>
             <a:r>
-              <a:rPr sz="1100" i="0" b="0">
+              <a:rPr sz="1300" i="0" b="0">
                 <a:solidFill>
                   <a:srgbClr val="D4D4D4"/>
                 </a:solidFill>
@@ -14565,7 +14656,7 @@
               <a:t>listo</a:t>
             </a:r>
             <a:r>
-              <a:rPr sz="1100" i="0" b="0">
+              <a:rPr sz="1300" i="0" b="0">
                 <a:solidFill>
                   <a:srgbClr val="D4D4D4"/>
                 </a:solidFill>
@@ -14574,7 +14665,7 @@
               <a:t>[</a:t>
             </a:r>
             <a:r>
-              <a:rPr sz="1100" i="0" b="0">
+              <a:rPr sz="1300" i="0" b="0">
                 <a:solidFill>
                   <a:srgbClr val="D4D4D4"/>
                 </a:solidFill>
@@ -14583,7 +14674,7 @@
               <a:t>Terminado</a:t>
             </a:r>
             <a:r>
-              <a:rPr sz="1100" i="0" b="0">
+              <a:rPr sz="1300" i="0" b="0">
                 <a:solidFill>
                   <a:srgbClr val="D4D4D4"/>
                 </a:solidFill>
@@ -14595,11 +14686,11 @@
           <a:p>
             <a:pPr>
               <a:spcAft>
-                <a:spcPts val="235"/>
+                <a:spcPts val="278"/>
               </a:spcAft>
             </a:pPr>
             <a:r>
-              <a:rPr sz="1100" i="0" b="0">
+              <a:rPr sz="1300" i="0" b="0">
                 <a:solidFill>
                   <a:srgbClr val="D4D4D4"/>
                 </a:solidFill>
@@ -14608,7 +14699,7 @@
               <a:t>    </a:t>
             </a:r>
             <a:r>
-              <a:rPr sz="1100" i="0" b="0">
+              <a:rPr sz="1300" i="0" b="0">
                 <a:solidFill>
                   <a:srgbClr val="D4D4D4"/>
                 </a:solidFill>
@@ -14617,7 +14708,7 @@
               <a:t>l1</a:t>
             </a:r>
             <a:r>
-              <a:rPr sz="1100" i="0" b="0">
+              <a:rPr sz="1300" i="0" b="0">
                 <a:solidFill>
                   <a:srgbClr val="D4D4D4"/>
                 </a:solidFill>
@@ -14626,7 +14717,7 @@
               <a:t>[</a:t>
             </a:r>
             <a:r>
-              <a:rPr sz="1100" i="0" b="0">
+              <a:rPr sz="1300" i="0" b="0">
                 <a:solidFill>
                   <a:srgbClr val="D4D4D4"/>
                 </a:solidFill>
@@ -14635,7 +14726,7 @@
               <a:t>HU</a:t>
             </a:r>
             <a:r>
-              <a:rPr sz="1100" i="0" b="0">
+              <a:rPr sz="1300" i="0" b="0">
                 <a:solidFill>
                   <a:srgbClr val="D4D4D4"/>
                 </a:solidFill>
@@ -14644,7 +14735,7 @@
               <a:t>-</a:t>
             </a:r>
             <a:r>
-              <a:rPr sz="1100" i="0" b="0">
+              <a:rPr sz="1300" i="0" b="0">
                 <a:solidFill>
                   <a:srgbClr val="B5CEA8"/>
                 </a:solidFill>
@@ -14653,7 +14744,7 @@
               <a:t>00</a:t>
             </a:r>
             <a:r>
-              <a:rPr sz="1100" i="0" b="0">
+              <a:rPr sz="1300" i="0" b="0">
                 <a:solidFill>
                   <a:srgbClr val="D4D4D4"/>
                 </a:solidFill>
@@ -14665,11 +14756,11 @@
           <a:p>
             <a:pPr>
               <a:spcAft>
-                <a:spcPts val="235"/>
+                <a:spcPts val="278"/>
               </a:spcAft>
             </a:pPr>
             <a:r>
-              <a:rPr sz="1100" i="0" b="0">
+              <a:rPr sz="1300" i="0" b="0">
                 <a:solidFill>
                   <a:srgbClr val="D4D4D4"/>
                 </a:solidFill>
@@ -14678,7 +14769,7 @@
               <a:t>  </a:t>
             </a:r>
             <a:r>
-              <a:rPr sz="1100" i="0" b="0">
+              <a:rPr sz="1300" i="0" b="0">
                 <a:solidFill>
                   <a:srgbClr val="D4D4D4"/>
                 </a:solidFill>
@@ -14690,11 +14781,11 @@
           <a:p>
             <a:pPr>
               <a:spcAft>
-                <a:spcPts val="235"/>
+                <a:spcPts val="278"/>
               </a:spcAft>
             </a:pPr>
             <a:r>
-              <a:rPr sz="1100" i="0" b="0">
+              <a:rPr sz="1300" i="0" b="0">
                 <a:solidFill>
                   <a:srgbClr val="D4D4D4"/>
                 </a:solidFill>
@@ -14706,11 +14797,11 @@
           <a:p>
             <a:pPr>
               <a:spcAft>
-                <a:spcPts val="235"/>
+                <a:spcPts val="278"/>
               </a:spcAft>
             </a:pPr>
             <a:r>
-              <a:rPr sz="1100" i="0" b="0">
+              <a:rPr sz="1300" i="0" b="0">
                 <a:solidFill>
                   <a:srgbClr val="D4D4D4"/>
                 </a:solidFill>
@@ -14719,7 +14810,7 @@
               <a:t>  </a:t>
             </a:r>
             <a:r>
-              <a:rPr sz="1100" i="0" b="0">
+              <a:rPr sz="1300" i="0" b="0">
                 <a:solidFill>
                   <a:srgbClr val="D4D4D4"/>
                 </a:solidFill>
@@ -14728,7 +14819,7 @@
               <a:t>backlog</a:t>
             </a:r>
             <a:r>
-              <a:rPr sz="1100" i="0" b="0">
+              <a:rPr sz="1300" i="0" b="0">
                 <a:solidFill>
                   <a:srgbClr val="D4D4D4"/>
                 </a:solidFill>
@@ -14737,7 +14828,7 @@
               <a:t> --&gt; </a:t>
             </a:r>
             <a:r>
-              <a:rPr sz="1100" i="0" b="0">
+              <a:rPr sz="1300" i="0" b="0">
                 <a:solidFill>
                   <a:srgbClr val="D4D4D4"/>
                 </a:solidFill>
@@ -14746,7 +14837,7 @@
               <a:t>curso</a:t>
             </a:r>
             <a:r>
-              <a:rPr sz="1100" i="0" b="0">
+              <a:rPr sz="1300" i="0" b="0">
                 <a:solidFill>
                   <a:srgbClr val="D4D4D4"/>
                 </a:solidFill>
@@ -14755,7 +14846,7 @@
               <a:t> --&gt; </a:t>
             </a:r>
             <a:r>
-              <a:rPr sz="1100" i="0" b="0">
+              <a:rPr sz="1300" i="0" b="0">
                 <a:solidFill>
                   <a:srgbClr val="D4D4D4"/>
                 </a:solidFill>
@@ -14764,7 +14855,7 @@
               <a:t>rev</a:t>
             </a:r>
             <a:r>
-              <a:rPr sz="1100" i="0" b="0">
+              <a:rPr sz="1300" i="0" b="0">
                 <a:solidFill>
                   <a:srgbClr val="D4D4D4"/>
                 </a:solidFill>
@@ -14773,7 +14864,7 @@
               <a:t> --&gt; </a:t>
             </a:r>
             <a:r>
-              <a:rPr sz="1100" i="0" b="0">
+              <a:rPr sz="1300" i="0" b="0">
                 <a:solidFill>
                   <a:srgbClr val="D4D4D4"/>
                 </a:solidFill>
@@ -14782,59 +14873,150 @@
               <a:t>listo</a:t>
             </a:r>
           </a:p>
-          <a:p>
-            <a:pPr>
-              <a:spcAft>
-                <a:spcPts val="235"/>
-              </a:spcAft>
-            </a:pPr>
-            <a:r>
-              <a:rPr sz="1100" i="0" b="0">
-                <a:solidFill>
-                  <a:srgbClr val="D4D4D4"/>
-                </a:solidFill>
-                <a:latin typeface="Consolas"/>
-              </a:rPr>
-              <a:t/>
-            </a:r>
-          </a:p>
-          <a:p>
-            <a:pPr>
-              <a:spcAft>
-                <a:spcPts val="235"/>
-              </a:spcAft>
-            </a:pPr>
-            <a:r>
-              <a:rPr sz="1100" i="1" b="0">
-                <a:solidFill>
-                  <a:srgbClr val="6A9955"/>
-                </a:solidFill>
-                <a:latin typeface="Consolas"/>
-              </a:rPr>
-              <a:t>%% El LIMITE es lo que hace que el tablero sirva: sin el, todo esta</a:t>
-            </a:r>
-          </a:p>
-          <a:p>
-            <a:pPr>
-              <a:spcAft>
-                <a:spcPts val="235"/>
-              </a:spcAft>
-            </a:pPr>
-            <a:r>
-              <a:rPr sz="1100" i="1" b="0">
-                <a:solidFill>
-                  <a:srgbClr val="6A9955"/>
-                </a:solidFill>
-                <a:latin typeface="Consolas"/>
-              </a:rPr>
-              <a:t>%% «en curso» y nada termina. Para empezar HU-04 hay que cerrar una.</a:t>
-            </a:r>
-          </a:p>
-        </p:txBody>
-      </p:sp>
-      <p:sp>
-        <p:nvSpPr>
-          <p:cNvPr id="13" name="TextBox 12"/>
+        </p:txBody>
+      </p:sp>
+      <p:sp>
+        <p:nvSpPr>
+          <p:cNvPr id="13" name="Rounded Rectangle 12"/>
+          <p:cNvSpPr/>
+          <p:nvPr/>
+        </p:nvSpPr>
+        <p:spPr>
+          <a:xfrm>
+            <a:off x="7668579" y="1261872"/>
+            <a:ext cx="4120780" cy="3318569"/>
+          </a:xfrm>
+          <a:prstGeom prst="roundRect">
+            <a:avLst>
+              <a:gd name="adj" fmla="val 4000"/>
+            </a:avLst>
+          </a:prstGeom>
+          <a:solidFill>
+            <a:srgbClr val="E8EEF4"/>
+          </a:solidFill>
+          <a:ln>
+            <a:noFill/>
+          </a:ln>
+        </p:spPr>
+        <p:style>
+          <a:lnRef idx="1">
+            <a:schemeClr val="accent1"/>
+          </a:lnRef>
+          <a:fillRef idx="3">
+            <a:schemeClr val="accent1"/>
+          </a:fillRef>
+          <a:effectRef idx="2">
+            <a:schemeClr val="accent1"/>
+          </a:effectRef>
+          <a:fontRef idx="minor">
+            <a:schemeClr val="lt1"/>
+          </a:fontRef>
+        </p:style>
+        <p:txBody>
+          <a:bodyPr rtlCol="0" anchor="ctr"/>
+          <a:lstStyle/>
+          <a:p>
+            <a:pPr algn="ctr"/>
+          </a:p>
+        </p:txBody>
+      </p:sp>
+      <p:pic>
+        <p:nvPicPr>
+          <p:cNvPr id="14" name="Picture 13" descr="dg-tablero-paso1.png"/>
+          <p:cNvPicPr>
+            <a:picLocks noChangeAspect="1"/>
+          </p:cNvPicPr>
+          <p:nvPr/>
+        </p:nvPicPr>
+        <p:blipFill>
+          <a:blip r:embed="rId2"/>
+          <a:stretch>
+            <a:fillRect/>
+          </a:stretch>
+        </p:blipFill>
+        <p:spPr>
+          <a:xfrm>
+            <a:off x="7723443" y="1316736"/>
+            <a:ext cx="4011052" cy="3208841"/>
+          </a:xfrm>
+          <a:prstGeom prst="rect">
+            <a:avLst/>
+          </a:prstGeom>
+        </p:spPr>
+      </p:pic>
+      <p:sp>
+        <p:nvSpPr>
+          <p:cNvPr id="15" name="TextBox 14"/>
+          <p:cNvSpPr txBox="1"/>
+          <p:nvPr/>
+        </p:nvSpPr>
+        <p:spPr>
+          <a:xfrm>
+            <a:off x="7723443" y="4580441"/>
+            <a:ext cx="4011052" cy="320040"/>
+          </a:xfrm>
+          <a:prstGeom prst="rect">
+            <a:avLst/>
+          </a:prstGeom>
+          <a:noFill/>
+        </p:spPr>
+        <p:txBody>
+          <a:bodyPr wrap="square">
+            <a:spAutoFit/>
+          </a:bodyPr>
+          <a:lstStyle/>
+          <a:p>
+            <a:pPr algn="ctr"/>
+            <a:r>
+              <a:rPr sz="1200" b="0" i="1">
+                <a:solidFill>
+                  <a:srgbClr val="666666"/>
+                </a:solidFill>
+                <a:latin typeface="Calibri"/>
+              </a:rPr>
+              <a:t>Lo que dibuja este código</a:t>
+            </a:r>
+          </a:p>
+        </p:txBody>
+      </p:sp>
+      <p:sp>
+        <p:nvSpPr>
+          <p:cNvPr id="16" name="TextBox 15"/>
+          <p:cNvSpPr txBox="1"/>
+          <p:nvPr/>
+        </p:nvSpPr>
+        <p:spPr>
+          <a:xfrm>
+            <a:off x="457200" y="6035040"/>
+            <a:ext cx="11277295" cy="365760"/>
+          </a:xfrm>
+          <a:prstGeom prst="rect">
+            <a:avLst/>
+          </a:prstGeom>
+          <a:noFill/>
+        </p:spPr>
+        <p:txBody>
+          <a:bodyPr wrap="square">
+            <a:spAutoFit/>
+          </a:bodyPr>
+          <a:lstStyle/>
+          <a:p>
+            <a:pPr algn="ctr"/>
+            <a:r>
+              <a:rPr sz="1300" b="0" i="1">
+                <a:solidFill>
+                  <a:srgbClr val="666666"/>
+                </a:solidFill>
+                <a:latin typeface="Calibri"/>
+              </a:rPr>
+              <a:t>El limite es lo que hace servir el tablero: sin el todo esta «en curso» y nada termina.</a:t>
+            </a:r>
+          </a:p>
+        </p:txBody>
+      </p:sp>
+      <p:sp>
+        <p:nvSpPr>
+          <p:cNvPr id="17" name="TextBox 16"/>
           <p:cNvSpPr txBox="1"/>
           <p:nvPr/>
         </p:nvSpPr>
